--- a/03/ppt/03-2_여러_값을_묶는_두_가지_방법_v1.pptx
+++ b/03/ppt/03-2_여러_값을_묶는_두_가지_방법_v1.pptx
@@ -1708,7 +1708,7 @@
 기호를 외웠느냐가 아니라, 경계에서 어느 쪽에 들어가는지를 따져 볼 수 있느냐가 중요합니다. 지난 시간에 한 것과 오늘 한 것이 같은 이야기예요.
 [진행 메모]
 3-1과 3-2를 잇는 장이다. 두 차시가 따로 노는 게 아니라는 걸 여기서 한 번 묶어 준다.
-시간이 밀리면 이 장은 한 문장으로 줄인다. "지난 시간 60점 경계랑 같은 이야기입니다.</a:t>
+시간이 밀리면 이 장은 한 문장으로 줄인다. "지난 시간 60점 경계랑 같은 이야기입니다."</a:t>
             </a:r>
             <a:endParaRPr lang="en-US" dirty="0"/>
           </a:p>

--- a/03/ppt/03-2_여러_값을_묶는_두_가지_방법_v1.pptx
+++ b/03/ppt/03-2_여러_값을_묶는_두_가지_방법_v1.pptx
@@ -19,9 +19,10 @@
     <p:sldId id="267" r:id="rId13"/>
     <p:sldId id="268" r:id="rId14"/>
     <p:sldId id="269" r:id="rId15"/>
+    <p:sldId id="270" r:id="rId16"/>
   </p:sldIdLst>
   <p:notesMasterIdLst>
-    <p:notesMasterId r:id="rId16"/>
+    <p:notesMasterId r:id="rId17"/>
   </p:notesMasterIdLst>
   <p:sldSz cx="12191695" cy="6858000"/>
   <p:notesSz cx="6858000" cy="12191695"/>
@@ -524,7 +525,7 @@
 3-1에서 커널이 안 잡혔던 학생은 시작 전에 먼저 잡아 준다. 「09 교사용 설치·오류 대응 카드」 C5b.
 [시간 계획 — 학생 화면에는 표시하지 않는다]
 0–2 표지 / 2–5 왜 묶는가 / 5–9 list / 9–11 0은 무슨 뜻 / 11–15 거리로 읽기
-15–17 마지막 번호 / 17–20 IndexError / 20–22 경계 / 22–28 dict / 28–31 두 가지 비교
+15–17 마지막 번호 / 17–20 IndexError / 20–22 경계 / 22–26 dict / 26–28 dict 그림 / 28–31 두 가지 비교
 31–36 워크시트① / 36–42 워크시트② / 42–44 표가 된다 / 44–45 마무리
 ※ 워크시트 두 개가 이 차시의 주 활동이다. 앞이 밀리면 §5(거리)와 §8(경계)을 줄이고 워크시트를 지킨다.
 ※ 워크시트②는 6주차 서비스 계획서에서 다시 쓴다. 반드시 완성해서 저장하게 한다.</a:t>
@@ -615,18 +616,16 @@
           <a:p>
             <a:r>
               <a:rPr lang="en-US" dirty="0"/>
-              <a:t>[28–31분] 다른 것은 찾는 방법이다
-정리해 봅시다. 둘 다 여러 값을 묶는 건 같습니다. **다른 건 찾는 방법입니다.**
-list 는 순서와 위치로 찾습니다. 같은 종류가 여러 개 늘어설 때 씁니다. 점수 여러 개, 이름 여러 개.
-dict 는 이름과 의미로 찾습니다. 한 대상의 서로 다른 항목일 때 씁니다. 한 사람의 이름과 점수와 반.
-(band 를 가리키며) 어느 쪽을 쓸지는 **담을 정보가 정합니다.** 문법이 정하는 게 아니에요. 이게 오늘 남길 한 문장입니다.
-그럼 이제 직접 골라 보겠습니다.
+              <a:t>[26–28분] 번호를 세지 않고 이름으로 연다
+(그림을 가리키며) 서랍 세 칸에 이름표가 붙어 있습니다. name, score, passed. 방금 코드에서 본 그 이름표들이죠.
+score 를 꺼내고 싶으면 어떻게 할까요? 세지 않습니다. 이름표를 보고 곧장 그 서랍을 엽니다. 그게 student["score"] 입니다.
+list 였다면 앞에서부터 셌어야 합니다. 몇 번째인지 알고 있어야 하고요.
+그리고 dict 라는 이름 말인데요, dictionary 를 줄인 말입니다. 사전이요. 사전에서 낱말을 찾을 때 몇 번째 쪽인지 세지 않죠. 낱말 자체로 찾습니다. dict 도 똑같습니다.
 [예상 질문]
-Q. 둘 다 되는 경우도 있나요?
-A. 있습니다. 그럴 땐 나중에 꺼내 쓸 때 뭐로 찾을지를 생각해 보세요. 순서로 찾을 것 같으면 list, 이름으로 찾을 것 같으면 dict.
+Q. student.name 처럼 점으로는 안 되나요?
+A. 안 된다. AttributeError 가 난다. 점은 「그 물건이 원래 가지고 있는 것」을 꺼낼 때 쓴다 — 3-1 의 sys.executable 이 그것이다. 대괄호는 「내가 안에 넣어 둔 값」을 꺼낼 때 쓴다. 교과서 12쪽 상자에 적어 두었다.
 [진행 메모]
-워크시트로 넘어가기 직전이다. 여기서 판단 기준을 명확하게 주고 넘어가야 워크시트가 굴러간다.
-"같은 종류 여럿" 대 "한 대상의 여러 항목" — 이 두 마디를 칠판에 남겨 둔다.</a:t>
+2분을 넘기지 않는다. 앞 장에서 코드로 이미 봤고, 여기는 그림으로 굳히는 자리다.</a:t>
             </a:r>
             <a:endParaRPr lang="en-US" dirty="0"/>
           </a:p>
@@ -714,20 +713,18 @@
           <a:p>
             <a:r>
               <a:rPr lang="en-US" dirty="0"/>
-              <a:t>[31–36분] 워크시트 ① 어디에 담을까
-여덟 개 있습니다. 각각 list 가 맞을지 dict 가 맞을지 고르고, **왜 그렇게 골랐는지 한 줄씩** 적으세요.
-정답을 외우는 활동이 아닙니다. 이유를 적는 게 이 활동입니다. 이유가 말이 되면 답이 좀 갈려도 괜찮습니다.
-5분 드립니다. 다 못 하면 못 한 대로 두고, 앞에서 몇 개 같이 봅니다.
-(5분 뒤 — 2번과 3번을 같이 본다)
-2번, 친구 한 명의 이름·반·연락 방법. 한 사람의 서로 다른 항목이죠. dict.
-3번, 동아리 부원 이름 전체. 같은 종류가 여러 개 늘어서죠. list.
+              <a:t>[28–31분] 다른 것은 찾는 방법이다
+정리해 봅시다. 둘 다 여러 값을 묶는 건 같습니다. **다른 건 찾는 방법입니다.**
+list 는 순서와 위치로 찾습니다. 같은 종류가 여러 개 늘어설 때 씁니다. 점수 여러 개, 이름 여러 개.
+dict 는 이름과 의미로 찾습니다. 한 대상의 서로 다른 항목일 때 씁니다. 한 사람의 이름과 점수와 반.
+(band 를 가리키며) 어느 쪽을 쓸지는 **담을 정보가 정합니다.** 문법이 정하는 게 아니에요. 이게 오늘 남길 한 문장입니다.
+그럼 이제 직접 골라 보겠습니다.
 [예상 질문]
-Q. 7번 순위는요? 순서가 있으니까 list 아닌가요?
-A. 그렇게 읽으면 맞습니다. 다만 "과목 이름과 순위" 를 짝지어 담고 싶으면 dict 도 됩니다. 무엇을 담을지에 따라 갈립니다.
+Q. 둘 다 되는 경우도 있나요?
+A. 있습니다. 그럴 땐 나중에 꺼내 쓸 때 뭐로 찾을지를 생각해 보세요. 순서로 찾을 것 같으면 list, 이름으로 찾을 것 같으면 dict.
 [진행 메모]
-돌아다니면서 이유 칸이 비어 있는 학생을 먼저 챙긴다. 답만 적고 이유를 안 적으면 이 활동은 안 한 것이다.
-시간이 밀렸으면 여덟 개 중 2·3·4·6번만 하게 한다. list 와 dict 가 두 번씩 나온다.
-빨리 끝낸 학생은 8번의 답을 dict 로도 만들어 보게 한다.</a:t>
+워크시트로 넘어가기 직전이다. 여기서 판단 기준을 명확하게 주고 넘어가야 워크시트가 굴러간다.
+"같은 종류 여럿" 대 "한 대상의 여러 항목" — 이 두 마디를 칠판에 남겨 둔다.</a:t>
             </a:r>
             <a:endParaRPr lang="en-US" dirty="0"/>
           </a:p>
@@ -815,19 +812,20 @@
           <a:p>
             <a:r>
               <a:rPr lang="en-US" dirty="0"/>
-              <a:t>[36–42분] 워크시트 ② 나를 이름표 묶음으로
-이번엔 자기 자신을 dict 로 적어 봅니다. 이름표는 영어 소문자로, 값과 함께, 그리고 왜 그 항목이 필요한지까지.
-**항목은 다섯 개 이하로 하세요.** 많이 적는 게 잘하는 게 아닙니다. 무엇을 뺄지 고르는 것도 이 활동입니다.
-(band 를 가리키며) 하나 반드시 지킬 것. 다른 사람이 봐도 괜찮은 항목만 적으세요. 비밀번호, 연락처, 집 주소는 적지 않습니다.
-다 적었으면 교과서 19쪽처럼 실제 코드로 옮겨서 실행해 보세요. student["name"] 으로 꺼내지는지 확인하고요.
-이 워크시트는 **6주차에 다시 씁니다.** 자기 서비스가 무엇을 기억해야 하는지 정할 때 그대로 가져다 씁니다. 03 폴더에 저장해 두세요.
+              <a:t>[31–36분] 워크시트 ① 어디에 담을까
+여덟 개 있습니다. 각각 list 가 맞을지 dict 가 맞을지 고르고, **왜 그렇게 골랐는지 한 줄씩** 적으세요.
+정답을 외우는 활동이 아닙니다. 이유를 적는 게 이 활동입니다. 이유가 말이 되면 답이 좀 갈려도 괜찮습니다.
+5분 드립니다. 다 못 하면 못 한 대로 두고, 앞에서 몇 개 같이 봅니다.
+(5분 뒤 — 2번과 3번을 같이 본다)
+2번, 친구 한 명의 이름·반·연락 방법. 한 사람의 서로 다른 항목이죠. dict.
+3번, 동아리 부원 이름 전체. 같은 종류가 여러 개 늘어서죠. list.
 [예상 질문]
-Q. 뭘 적어야 할지 모르겠어요.
-A. 자기소개할 때 말하는 것부터 적어 보세요. 이름, 학년, 좋아하는 것.
+Q. 7번 순위는요? 순서가 있으니까 list 아닌가요?
+A. 그렇게 읽으면 맞습니다. 다만 "과목 이름과 순위" 를 짝지어 담고 싶으면 dict 도 됩니다. 무엇을 담을지에 따라 갈립니다.
 [진행 메모]
-개인정보 경계를 가볍게 넘기지 않는다. 한 번 말하고 넘어가지 말고, 돌아다니면서 실제로 확인한다.
-이름표를 한글로 적은 학생은 그냥 두고, 대신 영어로도 한 번 바꿔 보게 한다. 틀린 게 아니다.
-6주차 연결을 반드시 말한다. 이 활동이 오늘로 끝나는 게 아니라는 걸 알면 성의가 달라진다.</a:t>
+돌아다니면서 이유 칸이 비어 있는 학생을 먼저 챙긴다. 답만 적고 이유를 안 적으면 이 활동은 안 한 것이다.
+시간이 밀렸으면 여덟 개 중 2·3·4·6번만 하게 한다. list 와 dict 가 두 번씩 나온다.
+빨리 끝낸 학생은 8번의 답을 dict 로도 만들어 보게 한다.</a:t>
             </a:r>
             <a:endParaRPr lang="en-US" dirty="0"/>
           </a:p>
@@ -915,15 +913,19 @@
           <a:p>
             <a:r>
               <a:rPr lang="en-US" dirty="0"/>
-              <a:t>[42–44분] 묶음이 여러 개면 표가 된다
-마지막으로 하나만 더 보겠습니다.
-방금 각자 자기를 dict 하나로 만들었죠. 그럼 우리 반 여덟 명이면 dict 가 여덟 개입니다. 그걸 list 로 묶으면요?
-(코드와 표를 나란히 가리키며) 이렇게 됩니다. 그리고 이걸 옆으로 돌려 보면 — **표** 예요.
-이름표가 표의 열 이름이 되고, 묶음 하나가 표의 한 행이 됩니다.
-다음 주에 표를 다루는 도구를 씁니다. 그때 다루는 표가 지금 여러분이 만든 이 모양입니다. 새로운 걸 배우는 게 아니라 오늘 만든 걸 편하게 다루는 도구를 가져오는 거예요.
+              <a:t>[36–42분] 워크시트 ② 나를 이름표 묶음으로
+이번엔 자기 자신을 dict 로 적어 봅니다. 이름표는 영어 소문자로, 값과 함께, 그리고 왜 그 항목이 필요한지까지.
+**항목은 다섯 개 이하로 하세요.** 많이 적는 게 잘하는 게 아닙니다. 무엇을 뺄지 고르는 것도 이 활동입니다.
+(band 를 가리키며) 하나 반드시 지킬 것. 다른 사람이 봐도 괜찮은 항목만 적으세요. 비밀번호, 연락처, 집 주소는 적지 않습니다.
+다 적었으면 교과서 19쪽처럼 실제 코드로 옮겨서 실행해 보세요. student["name"] 으로 꺼내지는지 확인하고요.
+이 워크시트는 **6주차에 다시 씁니다.** 자기 서비스가 무엇을 기억해야 하는지 정할 때 그대로 가져다 씁니다. 03 폴더에 저장해 두세요.
+[예상 질문]
+Q. 뭘 적어야 할지 모르겠어요.
+A. 자기소개할 때 말하는 것부터 적어 보세요. 이름, 학년, 좋아하는 것.
 [진행 메모]
-새 문법을 가르치는 장이 아니다. **4주차로 넘어가는 다리** 다. 학생이 직접 치게 하지 않는다. 보여 주고 넘어간다.
-시간이 밀렸으면 표 그림만 보여 주고 한 문장으로 끝낸다.</a:t>
+개인정보 경계를 가볍게 넘기지 않는다. 한 번 말하고 넘어가지 말고, 돌아다니면서 실제로 확인한다.
+이름표를 한글로 적은 학생은 그냥 두고, 대신 영어로도 한 번 바꿔 보게 한다. 틀린 게 아니다.
+6주차 연결을 반드시 말한다. 이 활동이 오늘로 끝나는 게 아니라는 걸 알면 성의가 달라진다.</a:t>
             </a:r>
             <a:endParaRPr lang="en-US" dirty="0"/>
           </a:p>
@@ -1011,6 +1013,102 @@
           <a:p>
             <a:r>
               <a:rPr lang="en-US" dirty="0"/>
+              <a:t>[42–44분] 묶음이 여러 개면 표가 된다
+마지막으로 하나만 더 보겠습니다.
+방금 각자 자기를 dict 하나로 만들었죠. 그럼 우리 반 여덟 명이면 dict 가 여덟 개입니다. 그걸 list 로 묶으면요?
+(코드와 표를 나란히 가리키며) 이렇게 됩니다. 그리고 이걸 옆으로 돌려 보면 — **표** 예요.
+이름표가 표의 열 이름이 되고, 묶음 하나가 표의 한 행이 됩니다.
+다음 주에 표를 다루는 도구를 씁니다. 그때 다루는 표가 지금 여러분이 만든 이 모양입니다. 새로운 걸 배우는 게 아니라 오늘 만든 걸 편하게 다루는 도구를 가져오는 거예요.
+[진행 메모]
+새 문법을 가르치는 장이 아니다. **4주차로 넘어가는 다리** 다. 학생이 직접 치게 하지 않는다. 보여 주고 넘어간다.
+시간이 밀렸으면 표 그림만 보여 주고 한 문장으로 끝낸다.</a:t>
+            </a:r>
+            <a:endParaRPr lang="en-US" dirty="0"/>
+          </a:p>
+        </p:txBody>
+      </p:sp>
+      <p:sp>
+        <p:nvSpPr>
+          <p:cNvPr id="4" name="Slide Number Placeholder 3"/>
+          <p:cNvSpPr>
+            <a:spLocks noGrp="1"/>
+          </p:cNvSpPr>
+          <p:nvPr>
+            <p:ph type="sldNum" sz="quarter" idx="10"/>
+          </p:nvPr>
+        </p:nvSpPr>
+        <p:spPr/>
+        <p:txBody>
+          <a:bodyPr/>
+          <a:lstStyle/>
+          <a:p>
+            <a:fld id="{F7021451-1387-4CA6-816F-3879F97B5CBC}" type="slidenum">
+              <a:rPr lang="en-US"/>
+              <a:t>14</a:t>
+            </a:fld>
+            <a:endParaRPr lang="en-US"/>
+          </a:p>
+        </p:txBody>
+      </p:sp>
+    </p:spTree>
+    <p:extLst>
+      <p:ext uri="{BB962C8B-B14F-4D97-AF65-F5344CB8AC3E}">
+        <p14:creationId xmlns:p14="http://schemas.microsoft.com/office/powerpoint/2010/main" val="1024086991"/>
+      </p:ext>
+    </p:extLst>
+  </p:cSld>
+  <p:clrMapOvr>
+    <a:masterClrMapping/>
+  </p:clrMapOvr>
+</p:notes>
+</file>
+
+<file path=ppt/notesSlides/notesSlide15.xml><?xml version="1.0" encoding="utf-8"?>
+<p:notes xmlns:a="http://schemas.openxmlformats.org/drawingml/2006/main" xmlns:r="http://schemas.openxmlformats.org/officeDocument/2006/relationships" xmlns:p="http://schemas.openxmlformats.org/presentationml/2006/main">
+  <p:cSld>
+    <p:spTree>
+      <p:nvGrpSpPr>
+        <p:cNvPr id="1" name=""/>
+        <p:cNvGrpSpPr/>
+        <p:nvPr/>
+      </p:nvGrpSpPr>
+      <p:grpSpPr>
+        <a:xfrm>
+          <a:off x="0" y="0"/>
+          <a:ext cx="0" cy="0"/>
+          <a:chOff x="0" y="0"/>
+          <a:chExt cx="0" cy="0"/>
+        </a:xfrm>
+      </p:grpSpPr>
+      <p:sp>
+        <p:nvSpPr>
+          <p:cNvPr id="2" name="Slide Image Placeholder 1"/>
+          <p:cNvSpPr>
+            <a:spLocks noGrp="1" noRot="1" noChangeAspect="1"/>
+          </p:cNvSpPr>
+          <p:nvPr>
+            <p:ph type="sldImg"/>
+          </p:nvPr>
+        </p:nvSpPr>
+        <p:spPr/>
+      </p:sp>
+      <p:sp>
+        <p:nvSpPr>
+          <p:cNvPr id="3" name="Notes Placeholder 2"/>
+          <p:cNvSpPr>
+            <a:spLocks noGrp="1"/>
+          </p:cNvSpPr>
+          <p:nvPr>
+            <p:ph type="body" idx="1"/>
+          </p:nvPr>
+        </p:nvSpPr>
+        <p:spPr/>
+        <p:txBody>
+          <a:bodyPr/>
+          <a:lstStyle/>
+          <a:p>
+            <a:r>
+              <a:rPr lang="en-US" dirty="0"/>
               <a:t>[44–45분] 마무리
 오늘 남길 건 하나입니다. **담을 정보의 모양이 구조를 정한다.**
 list 냐 dict 냐를 문법으로 고르는 게 아니라, 담을 게 무엇인지 보고 고르는 겁니다.
@@ -1042,7 +1140,7 @@
           <a:p>
             <a:fld id="{F7021451-1387-4CA6-816F-3879F97B5CBC}" type="slidenum">
               <a:rPr lang="en-US"/>
-              <a:t>14</a:t>
+              <a:t>15</a:t>
             </a:fld>
             <a:endParaRPr lang="en-US"/>
           </a:p>
@@ -1304,8 +1402,9 @@
           <a:p>
             <a:r>
               <a:rPr lang="en-US" dirty="0"/>
-              <a:t>[9–11분] scores[0] 은 72였다
-방금 scores[0] 을 찍어 보니 72가 나왔습니다. 맨 앞의 값이죠.
+              <a:t>[9–11분] 값을 한 가지만 가져오려면?
+네 값을 한 줄로 묶어 뒀습니다. 그런데 그중 하나만 쓰고 싶으면 어떻게 할까요?
+대괄호 안에 번호를 적습니다. scores[0] 을 찍어 보니 72가 나왔습니다. 맨 앞의 값이죠.
 (멈추고) 그럼 여기 0 은 무슨 뜻일까요? 옆 사람이랑 잠깐 얘기해 보세요.
 (답을 듣는다)
 "첫 번째" 라는 답 나왔죠. 그렇게 읽어도 지금은 답이 맞습니다. 그런데 그렇게 읽으면 조금 뒤에 반드시 틀립니다. 왜 그런지 지금부터 봅니다.
@@ -1796,7 +1895,7 @@
           <a:p>
             <a:r>
               <a:rPr lang="en-US" dirty="0"/>
-              <a:t>[22–28분] dict — 이름으로 찾는다
+              <a:t>[22–26분] dict — 이름으로 찾는다
 이번엔 다른 경우입니다. 친구 한 명의 정보를 담는다고 해 봅시다. 이름, 점수, 통과 여부.
 이걸 list 로 담으면 어떻게 될까요? ["민준", 85, True] 이렇게요. 그럼 0번이 이름, 1번이 점수, 2번이 통과. 이걸 다 외워야 합니다. 항목이 열 개면요?
 그래서 이럴 땐 번호 대신 **이름표** 를 붙입니다. 이게 dict 입니다.
@@ -2604,7 +2703,7 @@
                 <a:ea typeface="IBM Plex Sans KR" pitchFamily="34" charset="-122"/>
                 <a:cs typeface="IBM Plex Sans KR" pitchFamily="34" charset="-120"/>
               </a:rPr>
-              <a:t>다른 것은 찾는 방법이다</a:t>
+              <a:t>번호를 세지 않고 이름으로 연다</a:t>
             </a:r>
             <a:endParaRPr lang="en-US" sz="2700" dirty="0"/>
           </a:p>
@@ -2638,8 +2737,47 @@
         </p:nvSpPr>
         <p:spPr>
           <a:xfrm>
-            <a:off x="10195560" y="786384"/>
-            <a:ext cx="1463040" cy="384048"/>
+            <a:off x="530352" y="6327648"/>
+            <a:ext cx="5486400" cy="210312"/>
+          </a:xfrm>
+          <a:prstGeom prst="rect">
+            <a:avLst/>
+          </a:prstGeom>
+          <a:noFill/>
+          <a:ln/>
+        </p:spPr>
+        <p:txBody>
+          <a:bodyPr wrap="square" lIns="0" tIns="0" rIns="0" bIns="0" rtlCol="0" anchor="ctr"/>
+          <a:lstStyle/>
+          <a:p>
+            <a:pPr indent="0" marL="0">
+              <a:buNone/>
+            </a:pPr>
+            <a:r>
+              <a:rPr lang="en-US" sz="900" dirty="0">
+                <a:solidFill>
+                  <a:srgbClr val="6C7078"/>
+                </a:solidFill>
+                <a:latin typeface="IBM Plex Sans KR" pitchFamily="34" charset="0"/>
+                <a:ea typeface="IBM Plex Sans KR" pitchFamily="34" charset="-122"/>
+                <a:cs typeface="IBM Plex Sans KR" pitchFamily="34" charset="-120"/>
+              </a:rPr>
+              <a:t>교과서 03-2 · 11–12쪽</a:t>
+            </a:r>
+            <a:endParaRPr lang="en-US" sz="900" dirty="0"/>
+          </a:p>
+        </p:txBody>
+      </p:sp>
+      <p:sp>
+        <p:nvSpPr>
+          <p:cNvPr id="8" name="Text 6"/>
+          <p:cNvSpPr/>
+          <p:nvPr/>
+        </p:nvSpPr>
+        <p:spPr>
+          <a:xfrm>
+            <a:off x="11201400" y="6327648"/>
+            <a:ext cx="438912" cy="210312"/>
           </a:xfrm>
           <a:prstGeom prst="rect">
             <a:avLst/>
@@ -2655,112 +2793,58 @@
               <a:buNone/>
             </a:pPr>
             <a:r>
-              <a:rPr lang="en-US" sz="1300" b="1" dirty="0">
-                <a:solidFill>
-                  <a:srgbClr val="FF5C00"/>
+              <a:rPr lang="en-US" sz="900" dirty="0">
+                <a:solidFill>
+                  <a:srgbClr val="6C7078"/>
                 </a:solidFill>
                 <a:latin typeface="IBM Plex Mono" pitchFamily="34" charset="0"/>
                 <a:ea typeface="IBM Plex Mono" pitchFamily="34" charset="-122"/>
                 <a:cs typeface="IBM Plex Mono" pitchFamily="34" charset="-120"/>
               </a:rPr>
-              <a:t>09</a:t>
-            </a:r>
-            <a:endParaRPr lang="en-US" sz="1300" dirty="0"/>
-          </a:p>
-        </p:txBody>
-      </p:sp>
-      <p:sp>
-        <p:nvSpPr>
-          <p:cNvPr id="8" name="Text 6"/>
-          <p:cNvSpPr/>
-          <p:nvPr/>
-        </p:nvSpPr>
-        <p:spPr>
-          <a:xfrm>
-            <a:off x="530352" y="6327648"/>
-            <a:ext cx="5486400" cy="210312"/>
-          </a:xfrm>
-          <a:prstGeom prst="rect">
-            <a:avLst/>
-          </a:prstGeom>
-          <a:noFill/>
-          <a:ln/>
-        </p:spPr>
-        <p:txBody>
-          <a:bodyPr wrap="square" lIns="0" tIns="0" rIns="0" bIns="0" rtlCol="0" anchor="ctr"/>
-          <a:lstStyle/>
-          <a:p>
-            <a:pPr indent="0" marL="0">
-              <a:buNone/>
-            </a:pPr>
-            <a:r>
-              <a:rPr lang="en-US" sz="900" dirty="0">
-                <a:solidFill>
-                  <a:srgbClr val="6C7078"/>
-                </a:solidFill>
-                <a:latin typeface="IBM Plex Sans KR" pitchFamily="34" charset="0"/>
-                <a:ea typeface="IBM Plex Sans KR" pitchFamily="34" charset="-122"/>
-                <a:cs typeface="IBM Plex Sans KR" pitchFamily="34" charset="-120"/>
-              </a:rPr>
-              <a:t>교과서 03-2 · 15–16쪽</a:t>
+              <a:t>10</a:t>
             </a:r>
             <a:endParaRPr lang="en-US" sz="900" dirty="0"/>
           </a:p>
         </p:txBody>
       </p:sp>
-      <p:sp>
-        <p:nvSpPr>
-          <p:cNvPr id="9" name="Text 7"/>
-          <p:cNvSpPr/>
-          <p:nvPr/>
-        </p:nvSpPr>
-        <p:spPr>
-          <a:xfrm>
-            <a:off x="11201400" y="6327648"/>
-            <a:ext cx="438912" cy="210312"/>
-          </a:xfrm>
-          <a:prstGeom prst="rect">
-            <a:avLst/>
-          </a:prstGeom>
-          <a:noFill/>
-          <a:ln/>
-        </p:spPr>
-        <p:txBody>
-          <a:bodyPr wrap="square" lIns="0" tIns="0" rIns="0" bIns="0" rtlCol="0" anchor="ctr"/>
-          <a:lstStyle/>
-          <a:p>
-            <a:pPr algn="r" indent="0" marL="0">
-              <a:buNone/>
-            </a:pPr>
-            <a:r>
-              <a:rPr lang="en-US" sz="900" dirty="0">
-                <a:solidFill>
-                  <a:srgbClr val="6C7078"/>
-                </a:solidFill>
-                <a:latin typeface="IBM Plex Mono" pitchFamily="34" charset="0"/>
-                <a:ea typeface="IBM Plex Mono" pitchFamily="34" charset="-122"/>
-                <a:cs typeface="IBM Plex Mono" pitchFamily="34" charset="-120"/>
-              </a:rPr>
-              <a:t>10</a:t>
-            </a:r>
-            <a:endParaRPr lang="en-US" sz="900" dirty="0"/>
-          </a:p>
-        </p:txBody>
-      </p:sp>
-      <p:sp>
-        <p:nvSpPr>
-          <p:cNvPr id="10" name="Shape 8"/>
-          <p:cNvSpPr/>
-          <p:nvPr/>
-        </p:nvSpPr>
-        <p:spPr>
-          <a:xfrm>
-            <a:off x="530352" y="2011680"/>
-            <a:ext cx="5349240" cy="2651760"/>
+      <p:pic>
+        <p:nvPicPr>
+          <p:cNvPr id="9" name="Image 0" descr="/home/claude/w5/교과서_배포/assets/img/03-2-06-dict-labels.png">    </p:cNvPr>
+          <p:cNvPicPr>
+            <a:picLocks noChangeAspect="1"/>
+          </p:cNvPicPr>
+          <p:nvPr/>
+        </p:nvPicPr>
+        <p:blipFill>
+          <a:blip r:embed="rId1"/>
+          <a:stretch>
+            <a:fillRect/>
+          </a:stretch>
+        </p:blipFill>
+        <p:spPr>
+          <a:xfrm>
+            <a:off x="658368" y="1783080"/>
+            <a:ext cx="5852160" cy="3291840"/>
+          </a:xfrm>
+          <a:prstGeom prst="rect">
+            <a:avLst/>
+          </a:prstGeom>
+        </p:spPr>
+      </p:pic>
+      <p:sp>
+        <p:nvSpPr>
+          <p:cNvPr id="10" name="Shape 7"/>
+          <p:cNvSpPr/>
+          <p:nvPr/>
+        </p:nvSpPr>
+        <p:spPr>
+          <a:xfrm>
+            <a:off x="6903720" y="1783080"/>
+            <a:ext cx="4754880" cy="1481328"/>
           </a:xfrm>
           <a:prstGeom prst="roundRect">
             <a:avLst>
-              <a:gd name="adj" fmla="val 1897"/>
+              <a:gd name="adj" fmla="val 3395"/>
             </a:avLst>
           </a:prstGeom>
           <a:solidFill>
@@ -2776,77 +2860,77 @@
       </p:sp>
       <p:sp>
         <p:nvSpPr>
-          <p:cNvPr id="11" name="Text 9"/>
-          <p:cNvSpPr/>
-          <p:nvPr/>
-        </p:nvSpPr>
-        <p:spPr>
-          <a:xfrm>
-            <a:off x="713232" y="2176272"/>
-            <a:ext cx="4983480" cy="329184"/>
-          </a:xfrm>
-          <a:prstGeom prst="rect">
-            <a:avLst/>
-          </a:prstGeom>
-          <a:noFill/>
-          <a:ln/>
-        </p:spPr>
-        <p:txBody>
-          <a:bodyPr wrap="square" lIns="0" tIns="0" rIns="0" bIns="0" rtlCol="0" anchor="ctr"/>
-          <a:lstStyle/>
-          <a:p>
-            <a:pPr indent="0" marL="0">
-              <a:buNone/>
-            </a:pPr>
-            <a:r>
-              <a:rPr lang="en-US" sz="1800" b="1" dirty="0">
+          <p:cNvPr id="11" name="Text 8"/>
+          <p:cNvSpPr/>
+          <p:nvPr/>
+        </p:nvSpPr>
+        <p:spPr>
+          <a:xfrm>
+            <a:off x="7086600" y="1947672"/>
+            <a:ext cx="4389120" cy="237744"/>
+          </a:xfrm>
+          <a:prstGeom prst="rect">
+            <a:avLst/>
+          </a:prstGeom>
+          <a:noFill/>
+          <a:ln/>
+        </p:spPr>
+        <p:txBody>
+          <a:bodyPr wrap="square" lIns="0" tIns="0" rIns="0" bIns="0" rtlCol="0" anchor="ctr"/>
+          <a:lstStyle/>
+          <a:p>
+            <a:pPr indent="0" marL="0">
+              <a:buNone/>
+            </a:pPr>
+            <a:r>
+              <a:rPr lang="en-US" sz="1050" b="1" spc="60" kern="0" dirty="0">
                 <a:solidFill>
                   <a:srgbClr val="FF5C00"/>
-                </a:solidFill>
-                <a:latin typeface="IBM Plex Mono" pitchFamily="34" charset="0"/>
-                <a:ea typeface="IBM Plex Mono" pitchFamily="34" charset="-122"/>
-                <a:cs typeface="IBM Plex Mono" pitchFamily="34" charset="-120"/>
-              </a:rPr>
-              <a:t>[ ]</a:t>
-            </a:r>
-            <a:endParaRPr lang="en-US" sz="1800" dirty="0"/>
-          </a:p>
-        </p:txBody>
-      </p:sp>
-      <p:sp>
-        <p:nvSpPr>
-          <p:cNvPr id="12" name="Text 10"/>
-          <p:cNvSpPr/>
-          <p:nvPr/>
-        </p:nvSpPr>
-        <p:spPr>
-          <a:xfrm>
-            <a:off x="713232" y="2596896"/>
-            <a:ext cx="4983480" cy="402336"/>
-          </a:xfrm>
-          <a:prstGeom prst="rect">
-            <a:avLst/>
-          </a:prstGeom>
-          <a:noFill/>
-          <a:ln/>
-        </p:spPr>
-        <p:txBody>
-          <a:bodyPr wrap="square" lIns="0" tIns="0" rIns="0" bIns="0" rtlCol="0" anchor="ctr"/>
-          <a:lstStyle/>
-          <a:p>
-            <a:pPr indent="0" marL="0">
-              <a:buNone/>
-            </a:pPr>
-            <a:r>
-              <a:rPr lang="en-US" sz="1650" b="1" dirty="0">
-                <a:solidFill>
-                  <a:srgbClr val="1B1D21"/>
                 </a:solidFill>
                 <a:latin typeface="IBM Plex Sans KR" pitchFamily="34" charset="0"/>
                 <a:ea typeface="IBM Plex Sans KR" pitchFamily="34" charset="-122"/>
                 <a:cs typeface="IBM Plex Sans KR" pitchFamily="34" charset="-120"/>
               </a:rPr>
-              <a:t>list</a:t>
+              <a:t>list 라면</a:t>
+            </a:r>
+            <a:endParaRPr lang="en-US" sz="1050" dirty="0"/>
+          </a:p>
+        </p:txBody>
+      </p:sp>
+      <p:sp>
+        <p:nvSpPr>
+          <p:cNvPr id="12" name="Text 9"/>
+          <p:cNvSpPr/>
+          <p:nvPr/>
+        </p:nvSpPr>
+        <p:spPr>
+          <a:xfrm>
+            <a:off x="7086600" y="2240280"/>
+            <a:ext cx="4389120" cy="402336"/>
+          </a:xfrm>
+          <a:prstGeom prst="rect">
+            <a:avLst/>
+          </a:prstGeom>
+          <a:noFill/>
+          <a:ln/>
+        </p:spPr>
+        <p:txBody>
+          <a:bodyPr wrap="square" lIns="0" tIns="0" rIns="0" bIns="0" rtlCol="0" anchor="ctr"/>
+          <a:lstStyle/>
+          <a:p>
+            <a:pPr indent="0" marL="0">
+              <a:buNone/>
+            </a:pPr>
+            <a:r>
+              <a:rPr lang="en-US" sz="1650" b="1" dirty="0">
+                <a:solidFill>
+                  <a:srgbClr val="1B1D21"/>
+                </a:solidFill>
+                <a:latin typeface="IBM Plex Sans KR" pitchFamily="34" charset="0"/>
+                <a:ea typeface="IBM Plex Sans KR" pitchFamily="34" charset="-122"/>
+                <a:cs typeface="IBM Plex Sans KR" pitchFamily="34" charset="-120"/>
+              </a:rPr>
+              <a:t>앞에서부터 센다</a:t>
             </a:r>
             <a:endParaRPr lang="en-US" sz="1650" dirty="0"/>
           </a:p>
@@ -2854,14 +2938,14 @@
       </p:sp>
       <p:sp>
         <p:nvSpPr>
-          <p:cNvPr id="13" name="Text 11"/>
-          <p:cNvSpPr/>
-          <p:nvPr/>
-        </p:nvSpPr>
-        <p:spPr>
-          <a:xfrm>
-            <a:off x="713232" y="3090672"/>
-            <a:ext cx="4983480" cy="1426464"/>
+          <p:cNvPr id="13" name="Text 10"/>
+          <p:cNvSpPr/>
+          <p:nvPr/>
+        </p:nvSpPr>
+        <p:spPr>
+          <a:xfrm>
+            <a:off x="7086600" y="2734056"/>
+            <a:ext cx="4389120" cy="384048"/>
           </a:xfrm>
           <a:prstGeom prst="rect">
             <a:avLst/>
@@ -2880,7 +2964,7 @@
               <a:buNone/>
             </a:pPr>
             <a:r>
-              <a:rPr lang="en-US" sz="1240" dirty="0">
+              <a:rPr lang="en-US" sz="1300" dirty="0">
                 <a:solidFill>
                   <a:srgbClr val="6C7078"/>
                 </a:solidFill>
@@ -2888,75 +2972,26 @@
                 <a:ea typeface="IBM Plex Sans KR" pitchFamily="34" charset="-122"/>
                 <a:cs typeface="IBM Plex Sans KR" pitchFamily="34" charset="-120"/>
               </a:rPr>
-              <a:t>순서와 위치로 찾는다</a:t>
-            </a:r>
-            <a:endParaRPr lang="en-US" sz="1240" dirty="0"/>
-          </a:p>
-          <a:p>
-            <a:pPr indent="0" marL="0">
-              <a:lnSpc>
-                <a:spcPts val="1900"/>
-              </a:lnSpc>
-              <a:buNone/>
-            </a:pPr>
-            <a:endParaRPr lang="en-US" sz="1240" dirty="0"/>
-          </a:p>
-          <a:p>
-            <a:pPr indent="0" marL="0">
-              <a:lnSpc>
-                <a:spcPts val="1900"/>
-              </a:lnSpc>
-              <a:buNone/>
-            </a:pPr>
-            <a:r>
-              <a:rPr lang="en-US" sz="1240" dirty="0">
-                <a:solidFill>
-                  <a:srgbClr val="6C7078"/>
-                </a:solidFill>
-                <a:latin typeface="IBM Plex Sans KR" pitchFamily="34" charset="0"/>
-                <a:ea typeface="IBM Plex Sans KR" pitchFamily="34" charset="-122"/>
-                <a:cs typeface="IBM Plex Sans KR" pitchFamily="34" charset="-120"/>
-              </a:rPr>
-              <a:t>같은 종류가 여러 개</a:t>
-            </a:r>
-            <a:endParaRPr lang="en-US" sz="1240" dirty="0"/>
-          </a:p>
-          <a:p>
-            <a:pPr indent="0" marL="0">
-              <a:lnSpc>
-                <a:spcPts val="1900"/>
-              </a:lnSpc>
-              <a:buNone/>
-            </a:pPr>
-            <a:r>
-              <a:rPr lang="en-US" sz="1240" dirty="0">
-                <a:solidFill>
-                  <a:srgbClr val="6C7078"/>
-                </a:solidFill>
-                <a:latin typeface="IBM Plex Sans KR" pitchFamily="34" charset="0"/>
-                <a:ea typeface="IBM Plex Sans KR" pitchFamily="34" charset="-122"/>
-                <a:cs typeface="IBM Plex Sans KR" pitchFamily="34" charset="-120"/>
-              </a:rPr>
-              <a:t>늘어설 때</a:t>
-            </a:r>
-            <a:endParaRPr lang="en-US" sz="1240" dirty="0"/>
-          </a:p>
-        </p:txBody>
-      </p:sp>
-      <p:sp>
-        <p:nvSpPr>
-          <p:cNvPr id="14" name="Shape 12"/>
-          <p:cNvSpPr/>
-          <p:nvPr/>
-        </p:nvSpPr>
-        <p:spPr>
-          <a:xfrm>
-            <a:off x="6309360" y="2011680"/>
-            <a:ext cx="5349240" cy="2651760"/>
+              <a:t>0, 1, 2 … 몇 번째인지 알아야 한다</a:t>
+            </a:r>
+            <a:endParaRPr lang="en-US" sz="1300" dirty="0"/>
+          </a:p>
+        </p:txBody>
+      </p:sp>
+      <p:sp>
+        <p:nvSpPr>
+          <p:cNvPr id="14" name="Shape 11"/>
+          <p:cNvSpPr/>
+          <p:nvPr/>
+        </p:nvSpPr>
+        <p:spPr>
+          <a:xfrm>
+            <a:off x="6903720" y="3429000"/>
+            <a:ext cx="4754880" cy="1645920"/>
           </a:xfrm>
           <a:prstGeom prst="roundRect">
             <a:avLst>
-              <a:gd name="adj" fmla="val 1897"/>
+              <a:gd name="adj" fmla="val 3056"/>
             </a:avLst>
           </a:prstGeom>
           <a:solidFill>
@@ -2972,77 +3007,77 @@
       </p:sp>
       <p:sp>
         <p:nvSpPr>
-          <p:cNvPr id="15" name="Text 13"/>
-          <p:cNvSpPr/>
-          <p:nvPr/>
-        </p:nvSpPr>
-        <p:spPr>
-          <a:xfrm>
-            <a:off x="6492240" y="2176272"/>
-            <a:ext cx="4983480" cy="329184"/>
-          </a:xfrm>
-          <a:prstGeom prst="rect">
-            <a:avLst/>
-          </a:prstGeom>
-          <a:noFill/>
-          <a:ln/>
-        </p:spPr>
-        <p:txBody>
-          <a:bodyPr wrap="square" lIns="0" tIns="0" rIns="0" bIns="0" rtlCol="0" anchor="ctr"/>
-          <a:lstStyle/>
-          <a:p>
-            <a:pPr indent="0" marL="0">
-              <a:buNone/>
-            </a:pPr>
-            <a:r>
-              <a:rPr lang="en-US" sz="1800" b="1" dirty="0">
+          <p:cNvPr id="15" name="Text 12"/>
+          <p:cNvSpPr/>
+          <p:nvPr/>
+        </p:nvSpPr>
+        <p:spPr>
+          <a:xfrm>
+            <a:off x="7086600" y="3593592"/>
+            <a:ext cx="4389120" cy="237744"/>
+          </a:xfrm>
+          <a:prstGeom prst="rect">
+            <a:avLst/>
+          </a:prstGeom>
+          <a:noFill/>
+          <a:ln/>
+        </p:spPr>
+        <p:txBody>
+          <a:bodyPr wrap="square" lIns="0" tIns="0" rIns="0" bIns="0" rtlCol="0" anchor="ctr"/>
+          <a:lstStyle/>
+          <a:p>
+            <a:pPr indent="0" marL="0">
+              <a:buNone/>
+            </a:pPr>
+            <a:r>
+              <a:rPr lang="en-US" sz="1050" b="1" spc="60" kern="0" dirty="0">
                 <a:solidFill>
                   <a:srgbClr val="0E7C86"/>
-                </a:solidFill>
-                <a:latin typeface="IBM Plex Mono" pitchFamily="34" charset="0"/>
-                <a:ea typeface="IBM Plex Mono" pitchFamily="34" charset="-122"/>
-                <a:cs typeface="IBM Plex Mono" pitchFamily="34" charset="-120"/>
-              </a:rPr>
-              <a:t>{ }</a:t>
-            </a:r>
-            <a:endParaRPr lang="en-US" sz="1800" dirty="0"/>
-          </a:p>
-        </p:txBody>
-      </p:sp>
-      <p:sp>
-        <p:nvSpPr>
-          <p:cNvPr id="16" name="Text 14"/>
-          <p:cNvSpPr/>
-          <p:nvPr/>
-        </p:nvSpPr>
-        <p:spPr>
-          <a:xfrm>
-            <a:off x="6492240" y="2596896"/>
-            <a:ext cx="4983480" cy="402336"/>
-          </a:xfrm>
-          <a:prstGeom prst="rect">
-            <a:avLst/>
-          </a:prstGeom>
-          <a:noFill/>
-          <a:ln/>
-        </p:spPr>
-        <p:txBody>
-          <a:bodyPr wrap="square" lIns="0" tIns="0" rIns="0" bIns="0" rtlCol="0" anchor="ctr"/>
-          <a:lstStyle/>
-          <a:p>
-            <a:pPr indent="0" marL="0">
-              <a:buNone/>
-            </a:pPr>
-            <a:r>
-              <a:rPr lang="en-US" sz="1650" b="1" dirty="0">
-                <a:solidFill>
-                  <a:srgbClr val="1B1D21"/>
                 </a:solidFill>
                 <a:latin typeface="IBM Plex Sans KR" pitchFamily="34" charset="0"/>
                 <a:ea typeface="IBM Plex Sans KR" pitchFamily="34" charset="-122"/>
                 <a:cs typeface="IBM Plex Sans KR" pitchFamily="34" charset="-120"/>
               </a:rPr>
-              <a:t>dict</a:t>
+              <a:t>dict 라면</a:t>
+            </a:r>
+            <a:endParaRPr lang="en-US" sz="1050" dirty="0"/>
+          </a:p>
+        </p:txBody>
+      </p:sp>
+      <p:sp>
+        <p:nvSpPr>
+          <p:cNvPr id="16" name="Text 13"/>
+          <p:cNvSpPr/>
+          <p:nvPr/>
+        </p:nvSpPr>
+        <p:spPr>
+          <a:xfrm>
+            <a:off x="7086600" y="3886200"/>
+            <a:ext cx="4389120" cy="402336"/>
+          </a:xfrm>
+          <a:prstGeom prst="rect">
+            <a:avLst/>
+          </a:prstGeom>
+          <a:noFill/>
+          <a:ln/>
+        </p:spPr>
+        <p:txBody>
+          <a:bodyPr wrap="square" lIns="0" tIns="0" rIns="0" bIns="0" rtlCol="0" anchor="ctr"/>
+          <a:lstStyle/>
+          <a:p>
+            <a:pPr indent="0" marL="0">
+              <a:buNone/>
+            </a:pPr>
+            <a:r>
+              <a:rPr lang="en-US" sz="1650" b="1" dirty="0">
+                <a:solidFill>
+                  <a:srgbClr val="1B1D21"/>
+                </a:solidFill>
+                <a:latin typeface="IBM Plex Sans KR" pitchFamily="34" charset="0"/>
+                <a:ea typeface="IBM Plex Sans KR" pitchFamily="34" charset="-122"/>
+                <a:cs typeface="IBM Plex Sans KR" pitchFamily="34" charset="-120"/>
+              </a:rPr>
+              <a:t>이름표를 본다</a:t>
             </a:r>
             <a:endParaRPr lang="en-US" sz="1650" dirty="0"/>
           </a:p>
@@ -3050,14 +3085,14 @@
       </p:sp>
       <p:sp>
         <p:nvSpPr>
-          <p:cNvPr id="17" name="Text 15"/>
-          <p:cNvSpPr/>
-          <p:nvPr/>
-        </p:nvSpPr>
-        <p:spPr>
-          <a:xfrm>
-            <a:off x="6492240" y="3090672"/>
-            <a:ext cx="4983480" cy="1426464"/>
+          <p:cNvPr id="17" name="Text 14"/>
+          <p:cNvSpPr/>
+          <p:nvPr/>
+        </p:nvSpPr>
+        <p:spPr>
+          <a:xfrm>
+            <a:off x="7086600" y="4379976"/>
+            <a:ext cx="4389120" cy="548640"/>
           </a:xfrm>
           <a:prstGeom prst="rect">
             <a:avLst/>
@@ -3076,7 +3111,7 @@
               <a:buNone/>
             </a:pPr>
             <a:r>
-              <a:rPr lang="en-US" sz="1240" dirty="0">
+              <a:rPr lang="en-US" sz="1300" dirty="0">
                 <a:solidFill>
                   <a:srgbClr val="34373D"/>
                 </a:solidFill>
@@ -3084,9 +3119,9 @@
                 <a:ea typeface="IBM Plex Sans KR" pitchFamily="34" charset="-122"/>
                 <a:cs typeface="IBM Plex Sans KR" pitchFamily="34" charset="-120"/>
               </a:rPr>
-              <a:t>이름과 의미로 찾는다</a:t>
-            </a:r>
-            <a:endParaRPr lang="en-US" sz="1240" dirty="0"/>
+              <a:t>student["score"]</a:t>
+            </a:r>
+            <a:endParaRPr lang="en-US" sz="1300" dirty="0"/>
           </a:p>
           <a:p>
             <a:pPr indent="0" marL="0">
@@ -3095,17 +3130,8 @@
               </a:lnSpc>
               <a:buNone/>
             </a:pPr>
-            <a:endParaRPr lang="en-US" sz="1240" dirty="0"/>
-          </a:p>
-          <a:p>
-            <a:pPr indent="0" marL="0">
-              <a:lnSpc>
-                <a:spcPts val="1900"/>
-              </a:lnSpc>
-              <a:buNone/>
-            </a:pPr>
-            <a:r>
-              <a:rPr lang="en-US" sz="1240" dirty="0">
+            <a:r>
+              <a:rPr lang="en-US" sz="1300" dirty="0">
                 <a:solidFill>
                   <a:srgbClr val="34373D"/>
                 </a:solidFill>
@@ -3113,19 +3139,38 @@
                 <a:ea typeface="IBM Plex Sans KR" pitchFamily="34" charset="-122"/>
                 <a:cs typeface="IBM Plex Sans KR" pitchFamily="34" charset="-120"/>
               </a:rPr>
-              <a:t>한 대상의 서로 다른</a:t>
-            </a:r>
-            <a:endParaRPr lang="en-US" sz="1240" dirty="0"/>
-          </a:p>
-          <a:p>
-            <a:pPr indent="0" marL="0">
-              <a:lnSpc>
-                <a:spcPts val="1900"/>
-              </a:lnSpc>
-              <a:buNone/>
-            </a:pPr>
-            <a:r>
-              <a:rPr lang="en-US" sz="1240" dirty="0">
+              <a:t>세지 않고 곧장 간다</a:t>
+            </a:r>
+            <a:endParaRPr lang="en-US" sz="1300" dirty="0"/>
+          </a:p>
+        </p:txBody>
+      </p:sp>
+      <p:sp>
+        <p:nvSpPr>
+          <p:cNvPr id="18" name="Text 15"/>
+          <p:cNvSpPr/>
+          <p:nvPr/>
+        </p:nvSpPr>
+        <p:spPr>
+          <a:xfrm>
+            <a:off x="530352" y="5440680"/>
+            <a:ext cx="11128248" cy="457200"/>
+          </a:xfrm>
+          <a:prstGeom prst="rect">
+            <a:avLst/>
+          </a:prstGeom>
+          <a:noFill/>
+          <a:ln/>
+        </p:spPr>
+        <p:txBody>
+          <a:bodyPr wrap="square" lIns="0" tIns="0" rIns="0" bIns="0" rtlCol="0" anchor="ctr"/>
+          <a:lstStyle/>
+          <a:p>
+            <a:pPr algn="ctr" indent="0" marL="0">
+              <a:buNone/>
+            </a:pPr>
+            <a:r>
+              <a:rPr lang="en-US" sz="1700" b="1" dirty="0">
                 <a:solidFill>
                   <a:srgbClr val="34373D"/>
                 </a:solidFill>
@@ -3133,75 +3178,9 @@
                 <a:ea typeface="IBM Plex Sans KR" pitchFamily="34" charset="-122"/>
                 <a:cs typeface="IBM Plex Sans KR" pitchFamily="34" charset="-120"/>
               </a:rPr>
-              <a:t>항목일 때</a:t>
-            </a:r>
-            <a:endParaRPr lang="en-US" sz="1240" dirty="0"/>
-          </a:p>
-        </p:txBody>
-      </p:sp>
-      <p:sp>
-        <p:nvSpPr>
-          <p:cNvPr id="18" name="Shape 16"/>
-          <p:cNvSpPr/>
-          <p:nvPr/>
-        </p:nvSpPr>
-        <p:spPr>
-          <a:xfrm>
-            <a:off x="530352" y="5029200"/>
-            <a:ext cx="11128248" cy="512064"/>
-          </a:xfrm>
-          <a:prstGeom prst="roundRect">
-            <a:avLst>
-              <a:gd name="adj" fmla="val 39286"/>
-            </a:avLst>
-          </a:prstGeom>
-          <a:solidFill>
-            <a:srgbClr val="FF5C00"/>
-          </a:solidFill>
-          <a:ln w="12700">
-            <a:solidFill>
-              <a:srgbClr val="FF5C00"/>
-            </a:solidFill>
-            <a:prstDash val="solid"/>
-          </a:ln>
-        </p:spPr>
-      </p:sp>
-      <p:sp>
-        <p:nvSpPr>
-          <p:cNvPr id="19" name="Text 17"/>
-          <p:cNvSpPr/>
-          <p:nvPr/>
-        </p:nvSpPr>
-        <p:spPr>
-          <a:xfrm>
-            <a:off x="731520" y="5029200"/>
-            <a:ext cx="10725912" cy="512064"/>
-          </a:xfrm>
-          <a:prstGeom prst="rect">
-            <a:avLst/>
-          </a:prstGeom>
-          <a:noFill/>
-          <a:ln/>
-        </p:spPr>
-        <p:txBody>
-          <a:bodyPr wrap="square" lIns="0" tIns="0" rIns="0" bIns="0" rtlCol="0" anchor="ctr"/>
-          <a:lstStyle/>
-          <a:p>
-            <a:pPr algn="ctr" indent="0" marL="0">
-              <a:buNone/>
-            </a:pPr>
-            <a:r>
-              <a:rPr lang="en-US" sz="1500" b="1" dirty="0">
-                <a:solidFill>
-                  <a:srgbClr val="FFFFFF"/>
-                </a:solidFill>
-                <a:latin typeface="IBM Plex Sans KR" pitchFamily="34" charset="0"/>
-                <a:ea typeface="IBM Plex Sans KR" pitchFamily="34" charset="-122"/>
-                <a:cs typeface="IBM Plex Sans KR" pitchFamily="34" charset="-120"/>
-              </a:rPr>
-              <a:t>어느 쪽이 맞는지는 담을 정보가 정한다. 문법이 정하지 않는다.</a:t>
-            </a:r>
-            <a:endParaRPr lang="en-US" sz="1500" dirty="0"/>
+              <a:t>dict 는 dictionary — 사전에서 낱말로 찾는 것과 같다</a:t>
+            </a:r>
+            <a:endParaRPr lang="en-US" sz="1700" dirty="0"/>
           </a:p>
         </p:txBody>
       </p:sp>
@@ -3370,7 +3349,7 @@
                 <a:ea typeface="IBM Plex Sans KR" pitchFamily="34" charset="-122"/>
                 <a:cs typeface="IBM Plex Sans KR" pitchFamily="34" charset="-120"/>
               </a:rPr>
-              <a:t>워크시트 ① 어디에 담을까</a:t>
+              <a:t>다른 것은 찾는 방법이다</a:t>
             </a:r>
             <a:endParaRPr lang="en-US" sz="2700" dirty="0"/>
           </a:p>
@@ -3429,7 +3408,7 @@
                 <a:ea typeface="IBM Plex Mono" pitchFamily="34" charset="-122"/>
                 <a:cs typeface="IBM Plex Mono" pitchFamily="34" charset="-120"/>
               </a:rPr>
-              <a:t>10</a:t>
+              <a:t>09</a:t>
             </a:r>
             <a:endParaRPr lang="en-US" sz="1300" dirty="0"/>
           </a:p>
@@ -3468,7 +3447,7 @@
                 <a:ea typeface="IBM Plex Sans KR" pitchFamily="34" charset="-122"/>
                 <a:cs typeface="IBM Plex Sans KR" pitchFamily="34" charset="-120"/>
               </a:rPr>
-              <a:t>교과서 03-2 · 17쪽</a:t>
+              <a:t>교과서 03-2 · 14–15쪽</a:t>
             </a:r>
             <a:endParaRPr lang="en-US" sz="900" dirty="0"/>
           </a:p>
@@ -3521,193 +3500,18 @@
         </p:nvSpPr>
         <p:spPr>
           <a:xfrm>
-            <a:off x="530352" y="1828800"/>
-            <a:ext cx="890260" cy="402336"/>
-          </a:xfrm>
-          <a:prstGeom prst="rect">
-            <a:avLst/>
-          </a:prstGeom>
-          <a:solidFill>
-            <a:srgbClr val="1B1D21"/>
-          </a:solidFill>
-          <a:ln/>
-        </p:spPr>
-      </p:sp>
-      <p:sp>
-        <p:nvSpPr>
-          <p:cNvPr id="11" name="Text 9"/>
-          <p:cNvSpPr/>
-          <p:nvPr/>
-        </p:nvSpPr>
-        <p:spPr>
-          <a:xfrm>
-            <a:off x="658368" y="1828800"/>
-            <a:ext cx="634228" cy="402336"/>
-          </a:xfrm>
-          <a:prstGeom prst="rect">
-            <a:avLst/>
-          </a:prstGeom>
-          <a:noFill/>
-          <a:ln/>
-        </p:spPr>
-        <p:txBody>
-          <a:bodyPr wrap="square" lIns="0" tIns="0" rIns="0" bIns="0" rtlCol="0" anchor="ctr"/>
-          <a:lstStyle/>
-          <a:p>
-            <a:pPr indent="0" marL="0">
-              <a:buNone/>
-            </a:pPr>
-            <a:r>
-              <a:rPr lang="en-US" sz="1050" b="1" dirty="0">
-                <a:solidFill>
-                  <a:srgbClr val="FFFFFF"/>
-                </a:solidFill>
-                <a:latin typeface="IBM Plex Sans KR" pitchFamily="34" charset="0"/>
-                <a:ea typeface="IBM Plex Sans KR" pitchFamily="34" charset="-122"/>
-                <a:cs typeface="IBM Plex Sans KR" pitchFamily="34" charset="-120"/>
-              </a:rPr>
-              <a:t>#</a:t>
-            </a:r>
-            <a:endParaRPr lang="en-US" sz="1050" dirty="0"/>
-          </a:p>
-        </p:txBody>
-      </p:sp>
-      <p:sp>
-        <p:nvSpPr>
-          <p:cNvPr id="12" name="Shape 10"/>
-          <p:cNvSpPr/>
-          <p:nvPr/>
-        </p:nvSpPr>
-        <p:spPr>
-          <a:xfrm>
-            <a:off x="1420612" y="1828800"/>
-            <a:ext cx="6899514" cy="402336"/>
-          </a:xfrm>
-          <a:prstGeom prst="rect">
-            <a:avLst/>
-          </a:prstGeom>
-          <a:solidFill>
-            <a:srgbClr val="1B1D21"/>
-          </a:solidFill>
-          <a:ln/>
-        </p:spPr>
-      </p:sp>
-      <p:sp>
-        <p:nvSpPr>
-          <p:cNvPr id="13" name="Text 11"/>
-          <p:cNvSpPr/>
-          <p:nvPr/>
-        </p:nvSpPr>
-        <p:spPr>
-          <a:xfrm>
-            <a:off x="1548628" y="1828800"/>
-            <a:ext cx="6643482" cy="402336"/>
-          </a:xfrm>
-          <a:prstGeom prst="rect">
-            <a:avLst/>
-          </a:prstGeom>
-          <a:noFill/>
-          <a:ln/>
-        </p:spPr>
-        <p:txBody>
-          <a:bodyPr wrap="square" lIns="0" tIns="0" rIns="0" bIns="0" rtlCol="0" anchor="ctr"/>
-          <a:lstStyle/>
-          <a:p>
-            <a:pPr indent="0" marL="0">
-              <a:buNone/>
-            </a:pPr>
-            <a:r>
-              <a:rPr lang="en-US" sz="1050" b="1" dirty="0">
-                <a:solidFill>
-                  <a:srgbClr val="FFFFFF"/>
-                </a:solidFill>
-                <a:latin typeface="IBM Plex Sans KR" pitchFamily="34" charset="0"/>
-                <a:ea typeface="IBM Plex Sans KR" pitchFamily="34" charset="-122"/>
-                <a:cs typeface="IBM Plex Sans KR" pitchFamily="34" charset="-120"/>
-              </a:rPr>
-              <a:t>담아야 할 정보</a:t>
-            </a:r>
-            <a:endParaRPr lang="en-US" sz="1050" dirty="0"/>
-          </a:p>
-        </p:txBody>
-      </p:sp>
-      <p:sp>
-        <p:nvSpPr>
-          <p:cNvPr id="14" name="Shape 12"/>
-          <p:cNvSpPr/>
-          <p:nvPr/>
-        </p:nvSpPr>
-        <p:spPr>
-          <a:xfrm>
-            <a:off x="8320126" y="1828800"/>
-            <a:ext cx="3338474" cy="402336"/>
-          </a:xfrm>
-          <a:prstGeom prst="rect">
-            <a:avLst/>
-          </a:prstGeom>
-          <a:solidFill>
-            <a:srgbClr val="1B1D21"/>
-          </a:solidFill>
-          <a:ln/>
-        </p:spPr>
-      </p:sp>
-      <p:sp>
-        <p:nvSpPr>
-          <p:cNvPr id="15" name="Text 13"/>
-          <p:cNvSpPr/>
-          <p:nvPr/>
-        </p:nvSpPr>
-        <p:spPr>
-          <a:xfrm>
-            <a:off x="8448142" y="1828800"/>
-            <a:ext cx="3082442" cy="402336"/>
-          </a:xfrm>
-          <a:prstGeom prst="rect">
-            <a:avLst/>
-          </a:prstGeom>
-          <a:noFill/>
-          <a:ln/>
-        </p:spPr>
-        <p:txBody>
-          <a:bodyPr wrap="square" lIns="0" tIns="0" rIns="0" bIns="0" rtlCol="0" anchor="ctr"/>
-          <a:lstStyle/>
-          <a:p>
-            <a:pPr indent="0" marL="0">
-              <a:buNone/>
-            </a:pPr>
-            <a:r>
-              <a:rPr lang="en-US" sz="1050" b="1" dirty="0">
-                <a:solidFill>
-                  <a:srgbClr val="FFFFFF"/>
-                </a:solidFill>
-                <a:latin typeface="IBM Plex Sans KR" pitchFamily="34" charset="0"/>
-                <a:ea typeface="IBM Plex Sans KR" pitchFamily="34" charset="-122"/>
-                <a:cs typeface="IBM Plex Sans KR" pitchFamily="34" charset="-120"/>
-              </a:rPr>
-              <a:t>list / dict</a:t>
-            </a:r>
-            <a:endParaRPr lang="en-US" sz="1050" dirty="0"/>
-          </a:p>
-        </p:txBody>
-      </p:sp>
-      <p:sp>
-        <p:nvSpPr>
-          <p:cNvPr id="16" name="Shape 14"/>
-          <p:cNvSpPr/>
-          <p:nvPr/>
-        </p:nvSpPr>
-        <p:spPr>
-          <a:xfrm>
-            <a:off x="530352" y="2231136"/>
-            <a:ext cx="11128248" cy="402336"/>
-          </a:xfrm>
-          <a:prstGeom prst="rect">
-            <a:avLst/>
+            <a:off x="530352" y="2011680"/>
+            <a:ext cx="5349240" cy="2651760"/>
+          </a:xfrm>
+          <a:prstGeom prst="roundRect">
+            <a:avLst>
+              <a:gd name="adj" fmla="val 1897"/>
+            </a:avLst>
           </a:prstGeom>
           <a:solidFill>
             <a:srgbClr val="F1F2F4"/>
           </a:solidFill>
-          <a:ln w="9525">
+          <a:ln w="12700">
             <a:solidFill>
               <a:srgbClr val="E0E3E7"/>
             </a:solidFill>
@@ -3717,30 +3521,69 @@
       </p:sp>
       <p:sp>
         <p:nvSpPr>
-          <p:cNvPr id="17" name="Text 15"/>
-          <p:cNvSpPr/>
-          <p:nvPr/>
-        </p:nvSpPr>
-        <p:spPr>
-          <a:xfrm>
-            <a:off x="658368" y="2231136"/>
-            <a:ext cx="634228" cy="402336"/>
-          </a:xfrm>
-          <a:prstGeom prst="rect">
-            <a:avLst/>
-          </a:prstGeom>
-          <a:noFill/>
-          <a:ln/>
-        </p:spPr>
-        <p:txBody>
-          <a:bodyPr wrap="square" lIns="0" tIns="0" rIns="0" bIns="0" rtlCol="0" anchor="ctr"/>
-          <a:lstStyle/>
-          <a:p>
-            <a:pPr indent="0" marL="0">
-              <a:buNone/>
-            </a:pPr>
-            <a:r>
-              <a:rPr lang="en-US" sz="1240" b="1" dirty="0">
+          <p:cNvPr id="11" name="Text 9"/>
+          <p:cNvSpPr/>
+          <p:nvPr/>
+        </p:nvSpPr>
+        <p:spPr>
+          <a:xfrm>
+            <a:off x="713232" y="2176272"/>
+            <a:ext cx="4983480" cy="329184"/>
+          </a:xfrm>
+          <a:prstGeom prst="rect">
+            <a:avLst/>
+          </a:prstGeom>
+          <a:noFill/>
+          <a:ln/>
+        </p:spPr>
+        <p:txBody>
+          <a:bodyPr wrap="square" lIns="0" tIns="0" rIns="0" bIns="0" rtlCol="0" anchor="ctr"/>
+          <a:lstStyle/>
+          <a:p>
+            <a:pPr indent="0" marL="0">
+              <a:buNone/>
+            </a:pPr>
+            <a:r>
+              <a:rPr lang="en-US" sz="1800" b="1" dirty="0">
+                <a:solidFill>
+                  <a:srgbClr val="FF5C00"/>
+                </a:solidFill>
+                <a:latin typeface="IBM Plex Mono" pitchFamily="34" charset="0"/>
+                <a:ea typeface="IBM Plex Mono" pitchFamily="34" charset="-122"/>
+                <a:cs typeface="IBM Plex Mono" pitchFamily="34" charset="-120"/>
+              </a:rPr>
+              <a:t>[ ]</a:t>
+            </a:r>
+            <a:endParaRPr lang="en-US" sz="1800" dirty="0"/>
+          </a:p>
+        </p:txBody>
+      </p:sp>
+      <p:sp>
+        <p:nvSpPr>
+          <p:cNvPr id="12" name="Text 10"/>
+          <p:cNvSpPr/>
+          <p:nvPr/>
+        </p:nvSpPr>
+        <p:spPr>
+          <a:xfrm>
+            <a:off x="713232" y="2596896"/>
+            <a:ext cx="4983480" cy="402336"/>
+          </a:xfrm>
+          <a:prstGeom prst="rect">
+            <a:avLst/>
+          </a:prstGeom>
+          <a:noFill/>
+          <a:ln/>
+        </p:spPr>
+        <p:txBody>
+          <a:bodyPr wrap="square" lIns="0" tIns="0" rIns="0" bIns="0" rtlCol="0" anchor="ctr"/>
+          <a:lstStyle/>
+          <a:p>
+            <a:pPr indent="0" marL="0">
+              <a:buNone/>
+            </a:pPr>
+            <a:r>
+              <a:rPr lang="en-US" sz="1650" b="1" dirty="0">
                 <a:solidFill>
                   <a:srgbClr val="1B1D21"/>
                 </a:solidFill>
@@ -3748,34 +3591,37 @@
                 <a:ea typeface="IBM Plex Sans KR" pitchFamily="34" charset="-122"/>
                 <a:cs typeface="IBM Plex Sans KR" pitchFamily="34" charset="-120"/>
               </a:rPr>
-              <a:t>1</a:t>
-            </a:r>
-            <a:endParaRPr lang="en-US" sz="1240" dirty="0"/>
-          </a:p>
-        </p:txBody>
-      </p:sp>
-      <p:sp>
-        <p:nvSpPr>
-          <p:cNvPr id="18" name="Text 16"/>
-          <p:cNvSpPr/>
-          <p:nvPr/>
-        </p:nvSpPr>
-        <p:spPr>
-          <a:xfrm>
-            <a:off x="1548628" y="2231136"/>
-            <a:ext cx="6643482" cy="402336"/>
-          </a:xfrm>
-          <a:prstGeom prst="rect">
-            <a:avLst/>
-          </a:prstGeom>
-          <a:noFill/>
-          <a:ln/>
-        </p:spPr>
-        <p:txBody>
-          <a:bodyPr wrap="square" lIns="0" tIns="0" rIns="0" bIns="0" rtlCol="0" anchor="ctr"/>
-          <a:lstStyle/>
-          <a:p>
-            <a:pPr indent="0" marL="0">
+              <a:t>list</a:t>
+            </a:r>
+            <a:endParaRPr lang="en-US" sz="1650" dirty="0"/>
+          </a:p>
+        </p:txBody>
+      </p:sp>
+      <p:sp>
+        <p:nvSpPr>
+          <p:cNvPr id="13" name="Text 11"/>
+          <p:cNvSpPr/>
+          <p:nvPr/>
+        </p:nvSpPr>
+        <p:spPr>
+          <a:xfrm>
+            <a:off x="713232" y="3090672"/>
+            <a:ext cx="4983480" cy="1426464"/>
+          </a:xfrm>
+          <a:prstGeom prst="rect">
+            <a:avLst/>
+          </a:prstGeom>
+          <a:noFill/>
+          <a:ln/>
+        </p:spPr>
+        <p:txBody>
+          <a:bodyPr wrap="square" lIns="0" tIns="0" rIns="0" bIns="0" rtlCol="0" anchor="t"/>
+          <a:lstStyle/>
+          <a:p>
+            <a:pPr indent="0" marL="0">
+              <a:lnSpc>
+                <a:spcPts val="1900"/>
+              </a:lnSpc>
               <a:buNone/>
             </a:pPr>
             <a:r>
@@ -3787,60 +3633,83 @@
                 <a:ea typeface="IBM Plex Sans KR" pitchFamily="34" charset="-122"/>
                 <a:cs typeface="IBM Plex Sans KR" pitchFamily="34" charset="-120"/>
               </a:rPr>
-              <a:t>이번 주 급식 메뉴 5개</a:t>
+              <a:t>순서와 위치로 찾는다</a:t>
             </a:r>
             <a:endParaRPr lang="en-US" sz="1240" dirty="0"/>
           </a:p>
-        </p:txBody>
-      </p:sp>
-      <p:sp>
-        <p:nvSpPr>
-          <p:cNvPr id="19" name="Text 17"/>
-          <p:cNvSpPr/>
-          <p:nvPr/>
-        </p:nvSpPr>
-        <p:spPr>
-          <a:xfrm>
-            <a:off x="8448142" y="2231136"/>
-            <a:ext cx="3082442" cy="402336"/>
-          </a:xfrm>
-          <a:prstGeom prst="rect">
-            <a:avLst/>
-          </a:prstGeom>
-          <a:noFill/>
-          <a:ln/>
-        </p:spPr>
-        <p:txBody>
-          <a:bodyPr wrap="square" lIns="0" tIns="0" rIns="0" bIns="0" rtlCol="0" anchor="ctr"/>
-          <a:lstStyle/>
-          <a:p>
-            <a:pPr indent="0" marL="0">
+          <a:p>
+            <a:pPr indent="0" marL="0">
+              <a:lnSpc>
+                <a:spcPts val="1900"/>
+              </a:lnSpc>
               <a:buNone/>
             </a:pPr>
             <a:endParaRPr lang="en-US" sz="1240" dirty="0"/>
           </a:p>
-        </p:txBody>
-      </p:sp>
-      <p:sp>
-        <p:nvSpPr>
-          <p:cNvPr id="20" name="Shape 18"/>
-          <p:cNvSpPr/>
-          <p:nvPr/>
-        </p:nvSpPr>
-        <p:spPr>
-          <a:xfrm>
-            <a:off x="530352" y="2633472"/>
-            <a:ext cx="11128248" cy="402336"/>
-          </a:xfrm>
-          <a:prstGeom prst="rect">
-            <a:avLst/>
+          <a:p>
+            <a:pPr indent="0" marL="0">
+              <a:lnSpc>
+                <a:spcPts val="1900"/>
+              </a:lnSpc>
+              <a:buNone/>
+            </a:pPr>
+            <a:r>
+              <a:rPr lang="en-US" sz="1240" dirty="0">
+                <a:solidFill>
+                  <a:srgbClr val="6C7078"/>
+                </a:solidFill>
+                <a:latin typeface="IBM Plex Sans KR" pitchFamily="34" charset="0"/>
+                <a:ea typeface="IBM Plex Sans KR" pitchFamily="34" charset="-122"/>
+                <a:cs typeface="IBM Plex Sans KR" pitchFamily="34" charset="-120"/>
+              </a:rPr>
+              <a:t>같은 종류가 여러 개</a:t>
+            </a:r>
+            <a:endParaRPr lang="en-US" sz="1240" dirty="0"/>
+          </a:p>
+          <a:p>
+            <a:pPr indent="0" marL="0">
+              <a:lnSpc>
+                <a:spcPts val="1900"/>
+              </a:lnSpc>
+              <a:buNone/>
+            </a:pPr>
+            <a:r>
+              <a:rPr lang="en-US" sz="1240" dirty="0">
+                <a:solidFill>
+                  <a:srgbClr val="6C7078"/>
+                </a:solidFill>
+                <a:latin typeface="IBM Plex Sans KR" pitchFamily="34" charset="0"/>
+                <a:ea typeface="IBM Plex Sans KR" pitchFamily="34" charset="-122"/>
+                <a:cs typeface="IBM Plex Sans KR" pitchFamily="34" charset="-120"/>
+              </a:rPr>
+              <a:t>늘어설 때</a:t>
+            </a:r>
+            <a:endParaRPr lang="en-US" sz="1240" dirty="0"/>
+          </a:p>
+        </p:txBody>
+      </p:sp>
+      <p:sp>
+        <p:nvSpPr>
+          <p:cNvPr id="14" name="Shape 12"/>
+          <p:cNvSpPr/>
+          <p:nvPr/>
+        </p:nvSpPr>
+        <p:spPr>
+          <a:xfrm>
+            <a:off x="6309360" y="2011680"/>
+            <a:ext cx="5349240" cy="2651760"/>
+          </a:xfrm>
+          <a:prstGeom prst="roundRect">
+            <a:avLst>
+              <a:gd name="adj" fmla="val 1897"/>
+            </a:avLst>
           </a:prstGeom>
           <a:solidFill>
-            <a:srgbClr val="FFFFFF"/>
+            <a:srgbClr val="E7F2ED"/>
           </a:solidFill>
-          <a:ln w="9525">
+          <a:ln w="12700">
             <a:solidFill>
-              <a:srgbClr val="E0E3E7"/>
+              <a:srgbClr val="0E7C86"/>
             </a:solidFill>
             <a:prstDash val="solid"/>
           </a:ln>
@@ -3848,30 +3717,69 @@
       </p:sp>
       <p:sp>
         <p:nvSpPr>
-          <p:cNvPr id="21" name="Text 19"/>
-          <p:cNvSpPr/>
-          <p:nvPr/>
-        </p:nvSpPr>
-        <p:spPr>
-          <a:xfrm>
-            <a:off x="658368" y="2633472"/>
-            <a:ext cx="634228" cy="402336"/>
-          </a:xfrm>
-          <a:prstGeom prst="rect">
-            <a:avLst/>
-          </a:prstGeom>
-          <a:noFill/>
-          <a:ln/>
-        </p:spPr>
-        <p:txBody>
-          <a:bodyPr wrap="square" lIns="0" tIns="0" rIns="0" bIns="0" rtlCol="0" anchor="ctr"/>
-          <a:lstStyle/>
-          <a:p>
-            <a:pPr indent="0" marL="0">
-              <a:buNone/>
-            </a:pPr>
-            <a:r>
-              <a:rPr lang="en-US" sz="1240" b="1" dirty="0">
+          <p:cNvPr id="15" name="Text 13"/>
+          <p:cNvSpPr/>
+          <p:nvPr/>
+        </p:nvSpPr>
+        <p:spPr>
+          <a:xfrm>
+            <a:off x="6492240" y="2176272"/>
+            <a:ext cx="4983480" cy="329184"/>
+          </a:xfrm>
+          <a:prstGeom prst="rect">
+            <a:avLst/>
+          </a:prstGeom>
+          <a:noFill/>
+          <a:ln/>
+        </p:spPr>
+        <p:txBody>
+          <a:bodyPr wrap="square" lIns="0" tIns="0" rIns="0" bIns="0" rtlCol="0" anchor="ctr"/>
+          <a:lstStyle/>
+          <a:p>
+            <a:pPr indent="0" marL="0">
+              <a:buNone/>
+            </a:pPr>
+            <a:r>
+              <a:rPr lang="en-US" sz="1800" b="1" dirty="0">
+                <a:solidFill>
+                  <a:srgbClr val="0E7C86"/>
+                </a:solidFill>
+                <a:latin typeface="IBM Plex Mono" pitchFamily="34" charset="0"/>
+                <a:ea typeface="IBM Plex Mono" pitchFamily="34" charset="-122"/>
+                <a:cs typeface="IBM Plex Mono" pitchFamily="34" charset="-120"/>
+              </a:rPr>
+              <a:t>{ }</a:t>
+            </a:r>
+            <a:endParaRPr lang="en-US" sz="1800" dirty="0"/>
+          </a:p>
+        </p:txBody>
+      </p:sp>
+      <p:sp>
+        <p:nvSpPr>
+          <p:cNvPr id="16" name="Text 14"/>
+          <p:cNvSpPr/>
+          <p:nvPr/>
+        </p:nvSpPr>
+        <p:spPr>
+          <a:xfrm>
+            <a:off x="6492240" y="2596896"/>
+            <a:ext cx="4983480" cy="402336"/>
+          </a:xfrm>
+          <a:prstGeom prst="rect">
+            <a:avLst/>
+          </a:prstGeom>
+          <a:noFill/>
+          <a:ln/>
+        </p:spPr>
+        <p:txBody>
+          <a:bodyPr wrap="square" lIns="0" tIns="0" rIns="0" bIns="0" rtlCol="0" anchor="ctr"/>
+          <a:lstStyle/>
+          <a:p>
+            <a:pPr indent="0" marL="0">
+              <a:buNone/>
+            </a:pPr>
+            <a:r>
+              <a:rPr lang="en-US" sz="1650" b="1" dirty="0">
                 <a:solidFill>
                   <a:srgbClr val="1B1D21"/>
                 </a:solidFill>
@@ -3879,177 +3787,98 @@
                 <a:ea typeface="IBM Plex Sans KR" pitchFamily="34" charset="-122"/>
                 <a:cs typeface="IBM Plex Sans KR" pitchFamily="34" charset="-120"/>
               </a:rPr>
-              <a:t>2</a:t>
-            </a:r>
-            <a:endParaRPr lang="en-US" sz="1240" dirty="0"/>
-          </a:p>
-        </p:txBody>
-      </p:sp>
-      <p:sp>
-        <p:nvSpPr>
-          <p:cNvPr id="22" name="Text 20"/>
-          <p:cNvSpPr/>
-          <p:nvPr/>
-        </p:nvSpPr>
-        <p:spPr>
-          <a:xfrm>
-            <a:off x="1548628" y="2633472"/>
-            <a:ext cx="6643482" cy="402336"/>
-          </a:xfrm>
-          <a:prstGeom prst="rect">
-            <a:avLst/>
-          </a:prstGeom>
-          <a:noFill/>
-          <a:ln/>
-        </p:spPr>
-        <p:txBody>
-          <a:bodyPr wrap="square" lIns="0" tIns="0" rIns="0" bIns="0" rtlCol="0" anchor="ctr"/>
-          <a:lstStyle/>
-          <a:p>
-            <a:pPr indent="0" marL="0">
+              <a:t>dict</a:t>
+            </a:r>
+            <a:endParaRPr lang="en-US" sz="1650" dirty="0"/>
+          </a:p>
+        </p:txBody>
+      </p:sp>
+      <p:sp>
+        <p:nvSpPr>
+          <p:cNvPr id="17" name="Text 15"/>
+          <p:cNvSpPr/>
+          <p:nvPr/>
+        </p:nvSpPr>
+        <p:spPr>
+          <a:xfrm>
+            <a:off x="6492240" y="3090672"/>
+            <a:ext cx="4983480" cy="1426464"/>
+          </a:xfrm>
+          <a:prstGeom prst="rect">
+            <a:avLst/>
+          </a:prstGeom>
+          <a:noFill/>
+          <a:ln/>
+        </p:spPr>
+        <p:txBody>
+          <a:bodyPr wrap="square" lIns="0" tIns="0" rIns="0" bIns="0" rtlCol="0" anchor="t"/>
+          <a:lstStyle/>
+          <a:p>
+            <a:pPr indent="0" marL="0">
+              <a:lnSpc>
+                <a:spcPts val="1900"/>
+              </a:lnSpc>
               <a:buNone/>
             </a:pPr>
             <a:r>
               <a:rPr lang="en-US" sz="1240" dirty="0">
                 <a:solidFill>
-                  <a:srgbClr val="6C7078"/>
+                  <a:srgbClr val="34373D"/>
                 </a:solidFill>
                 <a:latin typeface="IBM Plex Sans KR" pitchFamily="34" charset="0"/>
                 <a:ea typeface="IBM Plex Sans KR" pitchFamily="34" charset="-122"/>
                 <a:cs typeface="IBM Plex Sans KR" pitchFamily="34" charset="-120"/>
               </a:rPr>
-              <a:t>친구 한 명의 이름·반·연락 방법</a:t>
+              <a:t>이름과 의미로 찾는다</a:t>
             </a:r>
             <a:endParaRPr lang="en-US" sz="1240" dirty="0"/>
           </a:p>
-        </p:txBody>
-      </p:sp>
-      <p:sp>
-        <p:nvSpPr>
-          <p:cNvPr id="23" name="Text 21"/>
-          <p:cNvSpPr/>
-          <p:nvPr/>
-        </p:nvSpPr>
-        <p:spPr>
-          <a:xfrm>
-            <a:off x="8448142" y="2633472"/>
-            <a:ext cx="3082442" cy="402336"/>
-          </a:xfrm>
-          <a:prstGeom prst="rect">
-            <a:avLst/>
-          </a:prstGeom>
-          <a:noFill/>
-          <a:ln/>
-        </p:spPr>
-        <p:txBody>
-          <a:bodyPr wrap="square" lIns="0" tIns="0" rIns="0" bIns="0" rtlCol="0" anchor="ctr"/>
-          <a:lstStyle/>
-          <a:p>
-            <a:pPr indent="0" marL="0">
+          <a:p>
+            <a:pPr indent="0" marL="0">
+              <a:lnSpc>
+                <a:spcPts val="1900"/>
+              </a:lnSpc>
               <a:buNone/>
             </a:pPr>
             <a:endParaRPr lang="en-US" sz="1240" dirty="0"/>
           </a:p>
-        </p:txBody>
-      </p:sp>
-      <p:sp>
-        <p:nvSpPr>
-          <p:cNvPr id="24" name="Shape 22"/>
-          <p:cNvSpPr/>
-          <p:nvPr/>
-        </p:nvSpPr>
-        <p:spPr>
-          <a:xfrm>
-            <a:off x="530352" y="3035808"/>
-            <a:ext cx="11128248" cy="402336"/>
-          </a:xfrm>
-          <a:prstGeom prst="rect">
-            <a:avLst/>
-          </a:prstGeom>
-          <a:solidFill>
-            <a:srgbClr val="F1F2F4"/>
-          </a:solidFill>
-          <a:ln w="9525">
-            <a:solidFill>
-              <a:srgbClr val="E0E3E7"/>
-            </a:solidFill>
-            <a:prstDash val="solid"/>
-          </a:ln>
-        </p:spPr>
-      </p:sp>
-      <p:sp>
-        <p:nvSpPr>
-          <p:cNvPr id="25" name="Text 23"/>
-          <p:cNvSpPr/>
-          <p:nvPr/>
-        </p:nvSpPr>
-        <p:spPr>
-          <a:xfrm>
-            <a:off x="658368" y="3035808"/>
-            <a:ext cx="634228" cy="402336"/>
-          </a:xfrm>
-          <a:prstGeom prst="rect">
-            <a:avLst/>
-          </a:prstGeom>
-          <a:noFill/>
-          <a:ln/>
-        </p:spPr>
-        <p:txBody>
-          <a:bodyPr wrap="square" lIns="0" tIns="0" rIns="0" bIns="0" rtlCol="0" anchor="ctr"/>
-          <a:lstStyle/>
-          <a:p>
-            <a:pPr indent="0" marL="0">
-              <a:buNone/>
-            </a:pPr>
-            <a:r>
-              <a:rPr lang="en-US" sz="1240" b="1" dirty="0">
-                <a:solidFill>
-                  <a:srgbClr val="1B1D21"/>
+          <a:p>
+            <a:pPr indent="0" marL="0">
+              <a:lnSpc>
+                <a:spcPts val="1900"/>
+              </a:lnSpc>
+              <a:buNone/>
+            </a:pPr>
+            <a:r>
+              <a:rPr lang="en-US" sz="1240" dirty="0">
+                <a:solidFill>
+                  <a:srgbClr val="34373D"/>
                 </a:solidFill>
                 <a:latin typeface="IBM Plex Sans KR" pitchFamily="34" charset="0"/>
                 <a:ea typeface="IBM Plex Sans KR" pitchFamily="34" charset="-122"/>
                 <a:cs typeface="IBM Plex Sans KR" pitchFamily="34" charset="-120"/>
               </a:rPr>
-              <a:t>3</a:t>
+              <a:t>한 대상의 서로 다른</a:t>
             </a:r>
             <a:endParaRPr lang="en-US" sz="1240" dirty="0"/>
           </a:p>
-        </p:txBody>
-      </p:sp>
-      <p:sp>
-        <p:nvSpPr>
-          <p:cNvPr id="26" name="Text 24"/>
-          <p:cNvSpPr/>
-          <p:nvPr/>
-        </p:nvSpPr>
-        <p:spPr>
-          <a:xfrm>
-            <a:off x="1548628" y="3035808"/>
-            <a:ext cx="6643482" cy="402336"/>
-          </a:xfrm>
-          <a:prstGeom prst="rect">
-            <a:avLst/>
-          </a:prstGeom>
-          <a:noFill/>
-          <a:ln/>
-        </p:spPr>
-        <p:txBody>
-          <a:bodyPr wrap="square" lIns="0" tIns="0" rIns="0" bIns="0" rtlCol="0" anchor="ctr"/>
-          <a:lstStyle/>
-          <a:p>
-            <a:pPr indent="0" marL="0">
+          <a:p>
+            <a:pPr indent="0" marL="0">
+              <a:lnSpc>
+                <a:spcPts val="1900"/>
+              </a:lnSpc>
               <a:buNone/>
             </a:pPr>
             <a:r>
               <a:rPr lang="en-US" sz="1240" dirty="0">
                 <a:solidFill>
-                  <a:srgbClr val="6C7078"/>
+                  <a:srgbClr val="34373D"/>
                 </a:solidFill>
                 <a:latin typeface="IBM Plex Sans KR" pitchFamily="34" charset="0"/>
                 <a:ea typeface="IBM Plex Sans KR" pitchFamily="34" charset="-122"/>
                 <a:cs typeface="IBM Plex Sans KR" pitchFamily="34" charset="-120"/>
               </a:rPr>
-              <a:t>동아리 부원 이름 전체</a:t>
+              <a:t>항목일 때</a:t>
             </a:r>
             <a:endParaRPr lang="en-US" sz="1240" dirty="0"/>
           </a:p>
@@ -4057,696 +3886,13 @@
       </p:sp>
       <p:sp>
         <p:nvSpPr>
-          <p:cNvPr id="27" name="Text 25"/>
-          <p:cNvSpPr/>
-          <p:nvPr/>
-        </p:nvSpPr>
-        <p:spPr>
-          <a:xfrm>
-            <a:off x="8448142" y="3035808"/>
-            <a:ext cx="3082442" cy="402336"/>
-          </a:xfrm>
-          <a:prstGeom prst="rect">
-            <a:avLst/>
-          </a:prstGeom>
-          <a:noFill/>
-          <a:ln/>
-        </p:spPr>
-        <p:txBody>
-          <a:bodyPr wrap="square" lIns="0" tIns="0" rIns="0" bIns="0" rtlCol="0" anchor="ctr"/>
-          <a:lstStyle/>
-          <a:p>
-            <a:pPr indent="0" marL="0">
-              <a:buNone/>
-            </a:pPr>
-            <a:endParaRPr lang="en-US" sz="1240" dirty="0"/>
-          </a:p>
-        </p:txBody>
-      </p:sp>
-      <p:sp>
-        <p:nvSpPr>
-          <p:cNvPr id="28" name="Shape 26"/>
-          <p:cNvSpPr/>
-          <p:nvPr/>
-        </p:nvSpPr>
-        <p:spPr>
-          <a:xfrm>
-            <a:off x="530352" y="3438144"/>
-            <a:ext cx="11128248" cy="402336"/>
-          </a:xfrm>
-          <a:prstGeom prst="rect">
-            <a:avLst/>
-          </a:prstGeom>
-          <a:solidFill>
-            <a:srgbClr val="FFFFFF"/>
-          </a:solidFill>
-          <a:ln w="9525">
-            <a:solidFill>
-              <a:srgbClr val="E0E3E7"/>
-            </a:solidFill>
-            <a:prstDash val="solid"/>
-          </a:ln>
-        </p:spPr>
-      </p:sp>
-      <p:sp>
-        <p:nvSpPr>
-          <p:cNvPr id="29" name="Text 27"/>
-          <p:cNvSpPr/>
-          <p:nvPr/>
-        </p:nvSpPr>
-        <p:spPr>
-          <a:xfrm>
-            <a:off x="658368" y="3438144"/>
-            <a:ext cx="634228" cy="402336"/>
-          </a:xfrm>
-          <a:prstGeom prst="rect">
-            <a:avLst/>
-          </a:prstGeom>
-          <a:noFill/>
-          <a:ln/>
-        </p:spPr>
-        <p:txBody>
-          <a:bodyPr wrap="square" lIns="0" tIns="0" rIns="0" bIns="0" rtlCol="0" anchor="ctr"/>
-          <a:lstStyle/>
-          <a:p>
-            <a:pPr indent="0" marL="0">
-              <a:buNone/>
-            </a:pPr>
-            <a:r>
-              <a:rPr lang="en-US" sz="1240" b="1" dirty="0">
-                <a:solidFill>
-                  <a:srgbClr val="1B1D21"/>
-                </a:solidFill>
-                <a:latin typeface="IBM Plex Sans KR" pitchFamily="34" charset="0"/>
-                <a:ea typeface="IBM Plex Sans KR" pitchFamily="34" charset="-122"/>
-                <a:cs typeface="IBM Plex Sans KR" pitchFamily="34" charset="-120"/>
-              </a:rPr>
-              <a:t>4</a:t>
-            </a:r>
-            <a:endParaRPr lang="en-US" sz="1240" dirty="0"/>
-          </a:p>
-        </p:txBody>
-      </p:sp>
-      <p:sp>
-        <p:nvSpPr>
-          <p:cNvPr id="30" name="Text 28"/>
-          <p:cNvSpPr/>
-          <p:nvPr/>
-        </p:nvSpPr>
-        <p:spPr>
-          <a:xfrm>
-            <a:off x="1548628" y="3438144"/>
-            <a:ext cx="6643482" cy="402336"/>
-          </a:xfrm>
-          <a:prstGeom prst="rect">
-            <a:avLst/>
-          </a:prstGeom>
-          <a:noFill/>
-          <a:ln/>
-        </p:spPr>
-        <p:txBody>
-          <a:bodyPr wrap="square" lIns="0" tIns="0" rIns="0" bIns="0" rtlCol="0" anchor="ctr"/>
-          <a:lstStyle/>
-          <a:p>
-            <a:pPr indent="0" marL="0">
-              <a:buNone/>
-            </a:pPr>
-            <a:r>
-              <a:rPr lang="en-US" sz="1240" dirty="0">
-                <a:solidFill>
-                  <a:srgbClr val="6C7078"/>
-                </a:solidFill>
-                <a:latin typeface="IBM Plex Sans KR" pitchFamily="34" charset="0"/>
-                <a:ea typeface="IBM Plex Sans KR" pitchFamily="34" charset="-122"/>
-                <a:cs typeface="IBM Plex Sans KR" pitchFamily="34" charset="-120"/>
-              </a:rPr>
-              <a:t>내 사물함 번호·층·비밀번호 여부</a:t>
-            </a:r>
-            <a:endParaRPr lang="en-US" sz="1240" dirty="0"/>
-          </a:p>
-        </p:txBody>
-      </p:sp>
-      <p:sp>
-        <p:nvSpPr>
-          <p:cNvPr id="31" name="Text 29"/>
-          <p:cNvSpPr/>
-          <p:nvPr/>
-        </p:nvSpPr>
-        <p:spPr>
-          <a:xfrm>
-            <a:off x="8448142" y="3438144"/>
-            <a:ext cx="3082442" cy="402336"/>
-          </a:xfrm>
-          <a:prstGeom prst="rect">
-            <a:avLst/>
-          </a:prstGeom>
-          <a:noFill/>
-          <a:ln/>
-        </p:spPr>
-        <p:txBody>
-          <a:bodyPr wrap="square" lIns="0" tIns="0" rIns="0" bIns="0" rtlCol="0" anchor="ctr"/>
-          <a:lstStyle/>
-          <a:p>
-            <a:pPr indent="0" marL="0">
-              <a:buNone/>
-            </a:pPr>
-            <a:endParaRPr lang="en-US" sz="1240" dirty="0"/>
-          </a:p>
-        </p:txBody>
-      </p:sp>
-      <p:sp>
-        <p:nvSpPr>
-          <p:cNvPr id="32" name="Shape 30"/>
-          <p:cNvSpPr/>
-          <p:nvPr/>
-        </p:nvSpPr>
-        <p:spPr>
-          <a:xfrm>
-            <a:off x="530352" y="3840480"/>
-            <a:ext cx="11128248" cy="402336"/>
-          </a:xfrm>
-          <a:prstGeom prst="rect">
-            <a:avLst/>
-          </a:prstGeom>
-          <a:solidFill>
-            <a:srgbClr val="F1F2F4"/>
-          </a:solidFill>
-          <a:ln w="9525">
-            <a:solidFill>
-              <a:srgbClr val="E0E3E7"/>
-            </a:solidFill>
-            <a:prstDash val="solid"/>
-          </a:ln>
-        </p:spPr>
-      </p:sp>
-      <p:sp>
-        <p:nvSpPr>
-          <p:cNvPr id="33" name="Text 31"/>
-          <p:cNvSpPr/>
-          <p:nvPr/>
-        </p:nvSpPr>
-        <p:spPr>
-          <a:xfrm>
-            <a:off x="658368" y="3840480"/>
-            <a:ext cx="634228" cy="402336"/>
-          </a:xfrm>
-          <a:prstGeom prst="rect">
-            <a:avLst/>
-          </a:prstGeom>
-          <a:noFill/>
-          <a:ln/>
-        </p:spPr>
-        <p:txBody>
-          <a:bodyPr wrap="square" lIns="0" tIns="0" rIns="0" bIns="0" rtlCol="0" anchor="ctr"/>
-          <a:lstStyle/>
-          <a:p>
-            <a:pPr indent="0" marL="0">
-              <a:buNone/>
-            </a:pPr>
-            <a:r>
-              <a:rPr lang="en-US" sz="1240" b="1" dirty="0">
-                <a:solidFill>
-                  <a:srgbClr val="1B1D21"/>
-                </a:solidFill>
-                <a:latin typeface="IBM Plex Sans KR" pitchFamily="34" charset="0"/>
-                <a:ea typeface="IBM Plex Sans KR" pitchFamily="34" charset="-122"/>
-                <a:cs typeface="IBM Plex Sans KR" pitchFamily="34" charset="-120"/>
-              </a:rPr>
-              <a:t>5</a:t>
-            </a:r>
-            <a:endParaRPr lang="en-US" sz="1240" dirty="0"/>
-          </a:p>
-        </p:txBody>
-      </p:sp>
-      <p:sp>
-        <p:nvSpPr>
-          <p:cNvPr id="34" name="Text 32"/>
-          <p:cNvSpPr/>
-          <p:nvPr/>
-        </p:nvSpPr>
-        <p:spPr>
-          <a:xfrm>
-            <a:off x="1548628" y="3840480"/>
-            <a:ext cx="6643482" cy="402336"/>
-          </a:xfrm>
-          <a:prstGeom prst="rect">
-            <a:avLst/>
-          </a:prstGeom>
-          <a:noFill/>
-          <a:ln/>
-        </p:spPr>
-        <p:txBody>
-          <a:bodyPr wrap="square" lIns="0" tIns="0" rIns="0" bIns="0" rtlCol="0" anchor="ctr"/>
-          <a:lstStyle/>
-          <a:p>
-            <a:pPr indent="0" marL="0">
-              <a:buNone/>
-            </a:pPr>
-            <a:r>
-              <a:rPr lang="en-US" sz="1240" dirty="0">
-                <a:solidFill>
-                  <a:srgbClr val="6C7078"/>
-                </a:solidFill>
-                <a:latin typeface="IBM Plex Sans KR" pitchFamily="34" charset="0"/>
-                <a:ea typeface="IBM Plex Sans KR" pitchFamily="34" charset="-122"/>
-                <a:cs typeface="IBM Plex Sans KR" pitchFamily="34" charset="-120"/>
-              </a:rPr>
-              <a:t>이번 달 매일의 기상 시각</a:t>
-            </a:r>
-            <a:endParaRPr lang="en-US" sz="1240" dirty="0"/>
-          </a:p>
-        </p:txBody>
-      </p:sp>
-      <p:sp>
-        <p:nvSpPr>
-          <p:cNvPr id="35" name="Text 33"/>
-          <p:cNvSpPr/>
-          <p:nvPr/>
-        </p:nvSpPr>
-        <p:spPr>
-          <a:xfrm>
-            <a:off x="8448142" y="3840480"/>
-            <a:ext cx="3082442" cy="402336"/>
-          </a:xfrm>
-          <a:prstGeom prst="rect">
-            <a:avLst/>
-          </a:prstGeom>
-          <a:noFill/>
-          <a:ln/>
-        </p:spPr>
-        <p:txBody>
-          <a:bodyPr wrap="square" lIns="0" tIns="0" rIns="0" bIns="0" rtlCol="0" anchor="ctr"/>
-          <a:lstStyle/>
-          <a:p>
-            <a:pPr indent="0" marL="0">
-              <a:buNone/>
-            </a:pPr>
-            <a:endParaRPr lang="en-US" sz="1240" dirty="0"/>
-          </a:p>
-        </p:txBody>
-      </p:sp>
-      <p:sp>
-        <p:nvSpPr>
-          <p:cNvPr id="36" name="Shape 34"/>
-          <p:cNvSpPr/>
-          <p:nvPr/>
-        </p:nvSpPr>
-        <p:spPr>
-          <a:xfrm>
-            <a:off x="530352" y="4242816"/>
-            <a:ext cx="11128248" cy="402336"/>
-          </a:xfrm>
-          <a:prstGeom prst="rect">
-            <a:avLst/>
-          </a:prstGeom>
-          <a:solidFill>
-            <a:srgbClr val="FFFFFF"/>
-          </a:solidFill>
-          <a:ln w="9525">
-            <a:solidFill>
-              <a:srgbClr val="E0E3E7"/>
-            </a:solidFill>
-            <a:prstDash val="solid"/>
-          </a:ln>
-        </p:spPr>
-      </p:sp>
-      <p:sp>
-        <p:nvSpPr>
-          <p:cNvPr id="37" name="Text 35"/>
-          <p:cNvSpPr/>
-          <p:nvPr/>
-        </p:nvSpPr>
-        <p:spPr>
-          <a:xfrm>
-            <a:off x="658368" y="4242816"/>
-            <a:ext cx="634228" cy="402336"/>
-          </a:xfrm>
-          <a:prstGeom prst="rect">
-            <a:avLst/>
-          </a:prstGeom>
-          <a:noFill/>
-          <a:ln/>
-        </p:spPr>
-        <p:txBody>
-          <a:bodyPr wrap="square" lIns="0" tIns="0" rIns="0" bIns="0" rtlCol="0" anchor="ctr"/>
-          <a:lstStyle/>
-          <a:p>
-            <a:pPr indent="0" marL="0">
-              <a:buNone/>
-            </a:pPr>
-            <a:r>
-              <a:rPr lang="en-US" sz="1240" b="1" dirty="0">
-                <a:solidFill>
-                  <a:srgbClr val="1B1D21"/>
-                </a:solidFill>
-                <a:latin typeface="IBM Plex Sans KR" pitchFamily="34" charset="0"/>
-                <a:ea typeface="IBM Plex Sans KR" pitchFamily="34" charset="-122"/>
-                <a:cs typeface="IBM Plex Sans KR" pitchFamily="34" charset="-120"/>
-              </a:rPr>
-              <a:t>6</a:t>
-            </a:r>
-            <a:endParaRPr lang="en-US" sz="1240" dirty="0"/>
-          </a:p>
-        </p:txBody>
-      </p:sp>
-      <p:sp>
-        <p:nvSpPr>
-          <p:cNvPr id="38" name="Text 36"/>
-          <p:cNvSpPr/>
-          <p:nvPr/>
-        </p:nvSpPr>
-        <p:spPr>
-          <a:xfrm>
-            <a:off x="1548628" y="4242816"/>
-            <a:ext cx="6643482" cy="402336"/>
-          </a:xfrm>
-          <a:prstGeom prst="rect">
-            <a:avLst/>
-          </a:prstGeom>
-          <a:noFill/>
-          <a:ln/>
-        </p:spPr>
-        <p:txBody>
-          <a:bodyPr wrap="square" lIns="0" tIns="0" rIns="0" bIns="0" rtlCol="0" anchor="ctr"/>
-          <a:lstStyle/>
-          <a:p>
-            <a:pPr indent="0" marL="0">
-              <a:buNone/>
-            </a:pPr>
-            <a:r>
-              <a:rPr lang="en-US" sz="1240" dirty="0">
-                <a:solidFill>
-                  <a:srgbClr val="6C7078"/>
-                </a:solidFill>
-                <a:latin typeface="IBM Plex Sans KR" pitchFamily="34" charset="0"/>
-                <a:ea typeface="IBM Plex Sans KR" pitchFamily="34" charset="-122"/>
-                <a:cs typeface="IBM Plex Sans KR" pitchFamily="34" charset="-120"/>
-              </a:rPr>
-              <a:t>도서관 책 한 권의 제목·저자·대출 여부</a:t>
-            </a:r>
-            <a:endParaRPr lang="en-US" sz="1240" dirty="0"/>
-          </a:p>
-        </p:txBody>
-      </p:sp>
-      <p:sp>
-        <p:nvSpPr>
-          <p:cNvPr id="39" name="Text 37"/>
-          <p:cNvSpPr/>
-          <p:nvPr/>
-        </p:nvSpPr>
-        <p:spPr>
-          <a:xfrm>
-            <a:off x="8448142" y="4242816"/>
-            <a:ext cx="3082442" cy="402336"/>
-          </a:xfrm>
-          <a:prstGeom prst="rect">
-            <a:avLst/>
-          </a:prstGeom>
-          <a:noFill/>
-          <a:ln/>
-        </p:spPr>
-        <p:txBody>
-          <a:bodyPr wrap="square" lIns="0" tIns="0" rIns="0" bIns="0" rtlCol="0" anchor="ctr"/>
-          <a:lstStyle/>
-          <a:p>
-            <a:pPr indent="0" marL="0">
-              <a:buNone/>
-            </a:pPr>
-            <a:endParaRPr lang="en-US" sz="1240" dirty="0"/>
-          </a:p>
-        </p:txBody>
-      </p:sp>
-      <p:sp>
-        <p:nvSpPr>
-          <p:cNvPr id="40" name="Shape 38"/>
-          <p:cNvSpPr/>
-          <p:nvPr/>
-        </p:nvSpPr>
-        <p:spPr>
-          <a:xfrm>
-            <a:off x="530352" y="4645152"/>
-            <a:ext cx="11128248" cy="402336"/>
-          </a:xfrm>
-          <a:prstGeom prst="rect">
-            <a:avLst/>
-          </a:prstGeom>
-          <a:solidFill>
-            <a:srgbClr val="F1F2F4"/>
-          </a:solidFill>
-          <a:ln w="9525">
-            <a:solidFill>
-              <a:srgbClr val="E0E3E7"/>
-            </a:solidFill>
-            <a:prstDash val="solid"/>
-          </a:ln>
-        </p:spPr>
-      </p:sp>
-      <p:sp>
-        <p:nvSpPr>
-          <p:cNvPr id="41" name="Text 39"/>
-          <p:cNvSpPr/>
-          <p:nvPr/>
-        </p:nvSpPr>
-        <p:spPr>
-          <a:xfrm>
-            <a:off x="658368" y="4645152"/>
-            <a:ext cx="634228" cy="402336"/>
-          </a:xfrm>
-          <a:prstGeom prst="rect">
-            <a:avLst/>
-          </a:prstGeom>
-          <a:noFill/>
-          <a:ln/>
-        </p:spPr>
-        <p:txBody>
-          <a:bodyPr wrap="square" lIns="0" tIns="0" rIns="0" bIns="0" rtlCol="0" anchor="ctr"/>
-          <a:lstStyle/>
-          <a:p>
-            <a:pPr indent="0" marL="0">
-              <a:buNone/>
-            </a:pPr>
-            <a:r>
-              <a:rPr lang="en-US" sz="1240" b="1" dirty="0">
-                <a:solidFill>
-                  <a:srgbClr val="1B1D21"/>
-                </a:solidFill>
-                <a:latin typeface="IBM Plex Sans KR" pitchFamily="34" charset="0"/>
-                <a:ea typeface="IBM Plex Sans KR" pitchFamily="34" charset="-122"/>
-                <a:cs typeface="IBM Plex Sans KR" pitchFamily="34" charset="-120"/>
-              </a:rPr>
-              <a:t>7</a:t>
-            </a:r>
-            <a:endParaRPr lang="en-US" sz="1240" dirty="0"/>
-          </a:p>
-        </p:txBody>
-      </p:sp>
-      <p:sp>
-        <p:nvSpPr>
-          <p:cNvPr id="42" name="Text 40"/>
-          <p:cNvSpPr/>
-          <p:nvPr/>
-        </p:nvSpPr>
-        <p:spPr>
-          <a:xfrm>
-            <a:off x="1548628" y="4645152"/>
-            <a:ext cx="6643482" cy="402336"/>
-          </a:xfrm>
-          <a:prstGeom prst="rect">
-            <a:avLst/>
-          </a:prstGeom>
-          <a:noFill/>
-          <a:ln/>
-        </p:spPr>
-        <p:txBody>
-          <a:bodyPr wrap="square" lIns="0" tIns="0" rIns="0" bIns="0" rtlCol="0" anchor="ctr"/>
-          <a:lstStyle/>
-          <a:p>
-            <a:pPr indent="0" marL="0">
-              <a:buNone/>
-            </a:pPr>
-            <a:r>
-              <a:rPr lang="en-US" sz="1240" dirty="0">
-                <a:solidFill>
-                  <a:srgbClr val="6C7078"/>
-                </a:solidFill>
-                <a:latin typeface="IBM Plex Sans KR" pitchFamily="34" charset="0"/>
-                <a:ea typeface="IBM Plex Sans KR" pitchFamily="34" charset="-122"/>
-                <a:cs typeface="IBM Plex Sans KR" pitchFamily="34" charset="-120"/>
-              </a:rPr>
-              <a:t>우리 반이 좋아하는 과목 순위</a:t>
-            </a:r>
-            <a:endParaRPr lang="en-US" sz="1240" dirty="0"/>
-          </a:p>
-        </p:txBody>
-      </p:sp>
-      <p:sp>
-        <p:nvSpPr>
-          <p:cNvPr id="43" name="Text 41"/>
-          <p:cNvSpPr/>
-          <p:nvPr/>
-        </p:nvSpPr>
-        <p:spPr>
-          <a:xfrm>
-            <a:off x="8448142" y="4645152"/>
-            <a:ext cx="3082442" cy="402336"/>
-          </a:xfrm>
-          <a:prstGeom prst="rect">
-            <a:avLst/>
-          </a:prstGeom>
-          <a:noFill/>
-          <a:ln/>
-        </p:spPr>
-        <p:txBody>
-          <a:bodyPr wrap="square" lIns="0" tIns="0" rIns="0" bIns="0" rtlCol="0" anchor="ctr"/>
-          <a:lstStyle/>
-          <a:p>
-            <a:pPr indent="0" marL="0">
-              <a:buNone/>
-            </a:pPr>
-            <a:endParaRPr lang="en-US" sz="1240" dirty="0"/>
-          </a:p>
-        </p:txBody>
-      </p:sp>
-      <p:sp>
-        <p:nvSpPr>
-          <p:cNvPr id="44" name="Shape 42"/>
-          <p:cNvSpPr/>
-          <p:nvPr/>
-        </p:nvSpPr>
-        <p:spPr>
-          <a:xfrm>
-            <a:off x="530352" y="5047488"/>
-            <a:ext cx="11128248" cy="402336"/>
-          </a:xfrm>
-          <a:prstGeom prst="rect">
-            <a:avLst/>
-          </a:prstGeom>
-          <a:solidFill>
-            <a:srgbClr val="FFFFFF"/>
-          </a:solidFill>
-          <a:ln w="9525">
-            <a:solidFill>
-              <a:srgbClr val="E0E3E7"/>
-            </a:solidFill>
-            <a:prstDash val="solid"/>
-          </a:ln>
-        </p:spPr>
-      </p:sp>
-      <p:sp>
-        <p:nvSpPr>
-          <p:cNvPr id="45" name="Text 43"/>
-          <p:cNvSpPr/>
-          <p:nvPr/>
-        </p:nvSpPr>
-        <p:spPr>
-          <a:xfrm>
-            <a:off x="658368" y="5047488"/>
-            <a:ext cx="634228" cy="402336"/>
-          </a:xfrm>
-          <a:prstGeom prst="rect">
-            <a:avLst/>
-          </a:prstGeom>
-          <a:noFill/>
-          <a:ln/>
-        </p:spPr>
-        <p:txBody>
-          <a:bodyPr wrap="square" lIns="0" tIns="0" rIns="0" bIns="0" rtlCol="0" anchor="ctr"/>
-          <a:lstStyle/>
-          <a:p>
-            <a:pPr indent="0" marL="0">
-              <a:buNone/>
-            </a:pPr>
-            <a:r>
-              <a:rPr lang="en-US" sz="1240" b="1" dirty="0">
-                <a:solidFill>
-                  <a:srgbClr val="1B1D21"/>
-                </a:solidFill>
-                <a:latin typeface="IBM Plex Sans KR" pitchFamily="34" charset="0"/>
-                <a:ea typeface="IBM Plex Sans KR" pitchFamily="34" charset="-122"/>
-                <a:cs typeface="IBM Plex Sans KR" pitchFamily="34" charset="-120"/>
-              </a:rPr>
-              <a:t>8</a:t>
-            </a:r>
-            <a:endParaRPr lang="en-US" sz="1240" dirty="0"/>
-          </a:p>
-        </p:txBody>
-      </p:sp>
-      <p:sp>
-        <p:nvSpPr>
-          <p:cNvPr id="46" name="Text 44"/>
-          <p:cNvSpPr/>
-          <p:nvPr/>
-        </p:nvSpPr>
-        <p:spPr>
-          <a:xfrm>
-            <a:off x="1548628" y="5047488"/>
-            <a:ext cx="6643482" cy="402336"/>
-          </a:xfrm>
-          <a:prstGeom prst="rect">
-            <a:avLst/>
-          </a:prstGeom>
-          <a:noFill/>
-          <a:ln/>
-        </p:spPr>
-        <p:txBody>
-          <a:bodyPr wrap="square" lIns="0" tIns="0" rIns="0" bIns="0" rtlCol="0" anchor="ctr"/>
-          <a:lstStyle/>
-          <a:p>
-            <a:pPr indent="0" marL="0">
-              <a:buNone/>
-            </a:pPr>
-            <a:r>
-              <a:rPr lang="en-US" sz="1240" dirty="0">
-                <a:solidFill>
-                  <a:srgbClr val="6C7078"/>
-                </a:solidFill>
-                <a:latin typeface="IBM Plex Sans KR" pitchFamily="34" charset="0"/>
-                <a:ea typeface="IBM Plex Sans KR" pitchFamily="34" charset="-122"/>
-                <a:cs typeface="IBM Plex Sans KR" pitchFamily="34" charset="-120"/>
-              </a:rPr>
-              <a:t>오늘 시간표의 1교시부터 7교시까지</a:t>
-            </a:r>
-            <a:endParaRPr lang="en-US" sz="1240" dirty="0"/>
-          </a:p>
-        </p:txBody>
-      </p:sp>
-      <p:sp>
-        <p:nvSpPr>
-          <p:cNvPr id="47" name="Text 45"/>
-          <p:cNvSpPr/>
-          <p:nvPr/>
-        </p:nvSpPr>
-        <p:spPr>
-          <a:xfrm>
-            <a:off x="8448142" y="5047488"/>
-            <a:ext cx="3082442" cy="402336"/>
-          </a:xfrm>
-          <a:prstGeom prst="rect">
-            <a:avLst/>
-          </a:prstGeom>
-          <a:noFill/>
-          <a:ln/>
-        </p:spPr>
-        <p:txBody>
-          <a:bodyPr wrap="square" lIns="0" tIns="0" rIns="0" bIns="0" rtlCol="0" anchor="ctr"/>
-          <a:lstStyle/>
-          <a:p>
-            <a:pPr indent="0" marL="0">
-              <a:buNone/>
-            </a:pPr>
-            <a:endParaRPr lang="en-US" sz="1240" dirty="0"/>
-          </a:p>
-        </p:txBody>
-      </p:sp>
-      <p:sp>
-        <p:nvSpPr>
-          <p:cNvPr id="48" name="Shape 46"/>
-          <p:cNvSpPr/>
-          <p:nvPr/>
-        </p:nvSpPr>
-        <p:spPr>
-          <a:xfrm>
-            <a:off x="530352" y="5577840"/>
+          <p:cNvPr id="18" name="Shape 16"/>
+          <p:cNvSpPr/>
+          <p:nvPr/>
+        </p:nvSpPr>
+        <p:spPr>
+          <a:xfrm>
+            <a:off x="530352" y="5029200"/>
             <a:ext cx="11128248" cy="512064"/>
           </a:xfrm>
           <a:prstGeom prst="roundRect">
@@ -4767,13 +3913,13 @@
       </p:sp>
       <p:sp>
         <p:nvSpPr>
-          <p:cNvPr id="49" name="Text 47"/>
-          <p:cNvSpPr/>
-          <p:nvPr/>
-        </p:nvSpPr>
-        <p:spPr>
-          <a:xfrm>
-            <a:off x="731520" y="5577840"/>
+          <p:cNvPr id="19" name="Text 17"/>
+          <p:cNvSpPr/>
+          <p:nvPr/>
+        </p:nvSpPr>
+        <p:spPr>
+          <a:xfrm>
+            <a:off x="731520" y="5029200"/>
             <a:ext cx="10725912" cy="512064"/>
           </a:xfrm>
           <a:prstGeom prst="rect">
@@ -4790,7 +3936,7 @@
               <a:buNone/>
             </a:pPr>
             <a:r>
-              <a:rPr lang="en-US" sz="1400" b="1" dirty="0">
+              <a:rPr lang="en-US" sz="1500" b="1" dirty="0">
                 <a:solidFill>
                   <a:srgbClr val="FFFFFF"/>
                 </a:solidFill>
@@ -4798,9 +3944,9 @@
                 <a:ea typeface="IBM Plex Sans KR" pitchFamily="34" charset="-122"/>
                 <a:cs typeface="IBM Plex Sans KR" pitchFamily="34" charset="-120"/>
               </a:rPr>
-              <a:t>고른 이유를 한 줄씩 적는다. 정답을 외우는 활동이 아니다.</a:t>
-            </a:r>
-            <a:endParaRPr lang="en-US" sz="1400" dirty="0"/>
+              <a:t>어느 쪽이 맞는지는 담을 정보가 정한다. 문법이 정하지 않는다.</a:t>
+            </a:r>
+            <a:endParaRPr lang="en-US" sz="1500" dirty="0"/>
           </a:p>
         </p:txBody>
       </p:sp>
@@ -4969,7 +4115,7 @@
                 <a:ea typeface="IBM Plex Sans KR" pitchFamily="34" charset="-122"/>
                 <a:cs typeface="IBM Plex Sans KR" pitchFamily="34" charset="-120"/>
               </a:rPr>
-              <a:t>워크시트 ② 나를 이름표 묶음으로</a:t>
+              <a:t>워크시트 ① 어디에 담을까</a:t>
             </a:r>
             <a:endParaRPr lang="en-US" sz="2700" dirty="0"/>
           </a:p>
@@ -5028,7 +4174,7 @@
                 <a:ea typeface="IBM Plex Mono" pitchFamily="34" charset="-122"/>
                 <a:cs typeface="IBM Plex Mono" pitchFamily="34" charset="-120"/>
               </a:rPr>
-              <a:t>11</a:t>
+              <a:t>10</a:t>
             </a:r>
             <a:endParaRPr lang="en-US" sz="1300" dirty="0"/>
           </a:p>
@@ -5067,7 +4213,7 @@
                 <a:ea typeface="IBM Plex Sans KR" pitchFamily="34" charset="-122"/>
                 <a:cs typeface="IBM Plex Sans KR" pitchFamily="34" charset="-120"/>
               </a:rPr>
-              <a:t>교과서 03-2 · 18–19쪽</a:t>
+              <a:t>교과서 03-2 · 16쪽</a:t>
             </a:r>
             <a:endParaRPr lang="en-US" sz="900" dirty="0"/>
           </a:p>
@@ -5120,8 +4266,8 @@
         </p:nvSpPr>
         <p:spPr>
           <a:xfrm>
-            <a:off x="530352" y="1920240"/>
-            <a:ext cx="3338474" cy="402336"/>
+            <a:off x="530352" y="1828800"/>
+            <a:ext cx="890260" cy="402336"/>
           </a:xfrm>
           <a:prstGeom prst="rect">
             <a:avLst/>
@@ -5140,8 +4286,8 @@
         </p:nvSpPr>
         <p:spPr>
           <a:xfrm>
-            <a:off x="658368" y="1920240"/>
-            <a:ext cx="3082442" cy="402336"/>
+            <a:off x="658368" y="1828800"/>
+            <a:ext cx="634228" cy="402336"/>
           </a:xfrm>
           <a:prstGeom prst="rect">
             <a:avLst/>
@@ -5165,7 +4311,7 @@
                 <a:ea typeface="IBM Plex Sans KR" pitchFamily="34" charset="-122"/>
                 <a:cs typeface="IBM Plex Sans KR" pitchFamily="34" charset="-120"/>
               </a:rPr>
-              <a:t>이름표 (영어 소문자)</a:t>
+              <a:t>#</a:t>
             </a:r>
             <a:endParaRPr lang="en-US" sz="1050" dirty="0"/>
           </a:p>
@@ -5179,8 +4325,8 @@
         </p:nvSpPr>
         <p:spPr>
           <a:xfrm>
-            <a:off x="3868826" y="1920240"/>
-            <a:ext cx="3894887" cy="402336"/>
+            <a:off x="1420612" y="1828800"/>
+            <a:ext cx="6899514" cy="402336"/>
           </a:xfrm>
           <a:prstGeom prst="rect">
             <a:avLst/>
@@ -5199,8 +4345,8 @@
         </p:nvSpPr>
         <p:spPr>
           <a:xfrm>
-            <a:off x="3996842" y="1920240"/>
-            <a:ext cx="3638855" cy="402336"/>
+            <a:off x="1548628" y="1828800"/>
+            <a:ext cx="6643482" cy="402336"/>
           </a:xfrm>
           <a:prstGeom prst="rect">
             <a:avLst/>
@@ -5224,7 +4370,7 @@
                 <a:ea typeface="IBM Plex Sans KR" pitchFamily="34" charset="-122"/>
                 <a:cs typeface="IBM Plex Sans KR" pitchFamily="34" charset="-120"/>
               </a:rPr>
-              <a:t>값</a:t>
+              <a:t>담아야 할 정보</a:t>
             </a:r>
             <a:endParaRPr lang="en-US" sz="1050" dirty="0"/>
           </a:p>
@@ -5238,8 +4384,8 @@
         </p:nvSpPr>
         <p:spPr>
           <a:xfrm>
-            <a:off x="7763713" y="1920240"/>
-            <a:ext cx="3894887" cy="402336"/>
+            <a:off x="8320126" y="1828800"/>
+            <a:ext cx="3338474" cy="402336"/>
           </a:xfrm>
           <a:prstGeom prst="rect">
             <a:avLst/>
@@ -5258,8 +4404,8 @@
         </p:nvSpPr>
         <p:spPr>
           <a:xfrm>
-            <a:off x="7891729" y="1920240"/>
-            <a:ext cx="3638855" cy="402336"/>
+            <a:off x="8448142" y="1828800"/>
+            <a:ext cx="3082442" cy="402336"/>
           </a:xfrm>
           <a:prstGeom prst="rect">
             <a:avLst/>
@@ -5283,7 +4429,7 @@
                 <a:ea typeface="IBM Plex Sans KR" pitchFamily="34" charset="-122"/>
                 <a:cs typeface="IBM Plex Sans KR" pitchFamily="34" charset="-120"/>
               </a:rPr>
-              <a:t>왜 이 항목이 필요한가</a:t>
+              <a:t>list / dict</a:t>
             </a:r>
             <a:endParaRPr lang="en-US" sz="1050" dirty="0"/>
           </a:p>
@@ -5297,8 +4443,8 @@
         </p:nvSpPr>
         <p:spPr>
           <a:xfrm>
-            <a:off x="530352" y="2322576"/>
-            <a:ext cx="11128248" cy="502920"/>
+            <a:off x="530352" y="2231136"/>
+            <a:ext cx="11128248" cy="402336"/>
           </a:xfrm>
           <a:prstGeom prst="rect">
             <a:avLst/>
@@ -5322,8 +4468,8 @@
         </p:nvSpPr>
         <p:spPr>
           <a:xfrm>
-            <a:off x="658368" y="2322576"/>
-            <a:ext cx="3082442" cy="502920"/>
+            <a:off x="658368" y="2231136"/>
+            <a:ext cx="634228" cy="402336"/>
           </a:xfrm>
           <a:prstGeom prst="rect">
             <a:avLst/>
@@ -5347,7 +4493,7 @@
                 <a:ea typeface="IBM Plex Sans KR" pitchFamily="34" charset="-122"/>
                 <a:cs typeface="IBM Plex Sans KR" pitchFamily="34" charset="-120"/>
               </a:rPr>
-              <a:t>name</a:t>
+              <a:t>1</a:t>
             </a:r>
             <a:endParaRPr lang="en-US" sz="1240" dirty="0"/>
           </a:p>
@@ -5361,22 +4507,33 @@
         </p:nvSpPr>
         <p:spPr>
           <a:xfrm>
-            <a:off x="3996842" y="2322576"/>
-            <a:ext cx="3638855" cy="502920"/>
-          </a:xfrm>
-          <a:prstGeom prst="rect">
-            <a:avLst/>
-          </a:prstGeom>
-          <a:noFill/>
-          <a:ln/>
-        </p:spPr>
-        <p:txBody>
-          <a:bodyPr wrap="square" lIns="0" tIns="0" rIns="0" bIns="0" rtlCol="0" anchor="ctr"/>
-          <a:lstStyle/>
-          <a:p>
-            <a:pPr indent="0" marL="0">
-              <a:buNone/>
-            </a:pPr>
+            <a:off x="1548628" y="2231136"/>
+            <a:ext cx="6643482" cy="402336"/>
+          </a:xfrm>
+          <a:prstGeom prst="rect">
+            <a:avLst/>
+          </a:prstGeom>
+          <a:noFill/>
+          <a:ln/>
+        </p:spPr>
+        <p:txBody>
+          <a:bodyPr wrap="square" lIns="0" tIns="0" rIns="0" bIns="0" rtlCol="0" anchor="ctr"/>
+          <a:lstStyle/>
+          <a:p>
+            <a:pPr indent="0" marL="0">
+              <a:buNone/>
+            </a:pPr>
+            <a:r>
+              <a:rPr lang="en-US" sz="1240" dirty="0">
+                <a:solidFill>
+                  <a:srgbClr val="6C7078"/>
+                </a:solidFill>
+                <a:latin typeface="IBM Plex Sans KR" pitchFamily="34" charset="0"/>
+                <a:ea typeface="IBM Plex Sans KR" pitchFamily="34" charset="-122"/>
+                <a:cs typeface="IBM Plex Sans KR" pitchFamily="34" charset="-120"/>
+              </a:rPr>
+              <a:t>이번 주 급식 메뉴 5개</a:t>
+            </a:r>
             <a:endParaRPr lang="en-US" sz="1240" dirty="0"/>
           </a:p>
         </p:txBody>
@@ -5389,8 +4546,8 @@
         </p:nvSpPr>
         <p:spPr>
           <a:xfrm>
-            <a:off x="7891729" y="2322576"/>
-            <a:ext cx="3638855" cy="502920"/>
+            <a:off x="8448142" y="2231136"/>
+            <a:ext cx="3082442" cy="402336"/>
           </a:xfrm>
           <a:prstGeom prst="rect">
             <a:avLst/>
@@ -5417,8 +4574,8 @@
         </p:nvSpPr>
         <p:spPr>
           <a:xfrm>
-            <a:off x="530352" y="2825496"/>
-            <a:ext cx="11128248" cy="502920"/>
+            <a:off x="530352" y="2633472"/>
+            <a:ext cx="11128248" cy="402336"/>
           </a:xfrm>
           <a:prstGeom prst="rect">
             <a:avLst/>
@@ -5442,22 +4599,33 @@
         </p:nvSpPr>
         <p:spPr>
           <a:xfrm>
-            <a:off x="658368" y="2825496"/>
-            <a:ext cx="3082442" cy="502920"/>
-          </a:xfrm>
-          <a:prstGeom prst="rect">
-            <a:avLst/>
-          </a:prstGeom>
-          <a:noFill/>
-          <a:ln/>
-        </p:spPr>
-        <p:txBody>
-          <a:bodyPr wrap="square" lIns="0" tIns="0" rIns="0" bIns="0" rtlCol="0" anchor="ctr"/>
-          <a:lstStyle/>
-          <a:p>
-            <a:pPr indent="0" marL="0">
-              <a:buNone/>
-            </a:pPr>
+            <a:off x="658368" y="2633472"/>
+            <a:ext cx="634228" cy="402336"/>
+          </a:xfrm>
+          <a:prstGeom prst="rect">
+            <a:avLst/>
+          </a:prstGeom>
+          <a:noFill/>
+          <a:ln/>
+        </p:spPr>
+        <p:txBody>
+          <a:bodyPr wrap="square" lIns="0" tIns="0" rIns="0" bIns="0" rtlCol="0" anchor="ctr"/>
+          <a:lstStyle/>
+          <a:p>
+            <a:pPr indent="0" marL="0">
+              <a:buNone/>
+            </a:pPr>
+            <a:r>
+              <a:rPr lang="en-US" sz="1240" b="1" dirty="0">
+                <a:solidFill>
+                  <a:srgbClr val="1B1D21"/>
+                </a:solidFill>
+                <a:latin typeface="IBM Plex Sans KR" pitchFamily="34" charset="0"/>
+                <a:ea typeface="IBM Plex Sans KR" pitchFamily="34" charset="-122"/>
+                <a:cs typeface="IBM Plex Sans KR" pitchFamily="34" charset="-120"/>
+              </a:rPr>
+              <a:t>2</a:t>
+            </a:r>
             <a:endParaRPr lang="en-US" sz="1240" dirty="0"/>
           </a:p>
         </p:txBody>
@@ -5470,22 +4638,33 @@
         </p:nvSpPr>
         <p:spPr>
           <a:xfrm>
-            <a:off x="3996842" y="2825496"/>
-            <a:ext cx="3638855" cy="502920"/>
-          </a:xfrm>
-          <a:prstGeom prst="rect">
-            <a:avLst/>
-          </a:prstGeom>
-          <a:noFill/>
-          <a:ln/>
-        </p:spPr>
-        <p:txBody>
-          <a:bodyPr wrap="square" lIns="0" tIns="0" rIns="0" bIns="0" rtlCol="0" anchor="ctr"/>
-          <a:lstStyle/>
-          <a:p>
-            <a:pPr indent="0" marL="0">
-              <a:buNone/>
-            </a:pPr>
+            <a:off x="1548628" y="2633472"/>
+            <a:ext cx="6643482" cy="402336"/>
+          </a:xfrm>
+          <a:prstGeom prst="rect">
+            <a:avLst/>
+          </a:prstGeom>
+          <a:noFill/>
+          <a:ln/>
+        </p:spPr>
+        <p:txBody>
+          <a:bodyPr wrap="square" lIns="0" tIns="0" rIns="0" bIns="0" rtlCol="0" anchor="ctr"/>
+          <a:lstStyle/>
+          <a:p>
+            <a:pPr indent="0" marL="0">
+              <a:buNone/>
+            </a:pPr>
+            <a:r>
+              <a:rPr lang="en-US" sz="1240" dirty="0">
+                <a:solidFill>
+                  <a:srgbClr val="6C7078"/>
+                </a:solidFill>
+                <a:latin typeface="IBM Plex Sans KR" pitchFamily="34" charset="0"/>
+                <a:ea typeface="IBM Plex Sans KR" pitchFamily="34" charset="-122"/>
+                <a:cs typeface="IBM Plex Sans KR" pitchFamily="34" charset="-120"/>
+              </a:rPr>
+              <a:t>친구 한 명의 이름·반·연락 방법</a:t>
+            </a:r>
             <a:endParaRPr lang="en-US" sz="1240" dirty="0"/>
           </a:p>
         </p:txBody>
@@ -5498,8 +4677,8 @@
         </p:nvSpPr>
         <p:spPr>
           <a:xfrm>
-            <a:off x="7891729" y="2825496"/>
-            <a:ext cx="3638855" cy="502920"/>
+            <a:off x="8448142" y="2633472"/>
+            <a:ext cx="3082442" cy="402336"/>
           </a:xfrm>
           <a:prstGeom prst="rect">
             <a:avLst/>
@@ -5526,8 +4705,8 @@
         </p:nvSpPr>
         <p:spPr>
           <a:xfrm>
-            <a:off x="530352" y="3328416"/>
-            <a:ext cx="11128248" cy="502920"/>
+            <a:off x="530352" y="3035808"/>
+            <a:ext cx="11128248" cy="402336"/>
           </a:xfrm>
           <a:prstGeom prst="rect">
             <a:avLst/>
@@ -5551,22 +4730,33 @@
         </p:nvSpPr>
         <p:spPr>
           <a:xfrm>
-            <a:off x="658368" y="3328416"/>
-            <a:ext cx="3082442" cy="502920"/>
-          </a:xfrm>
-          <a:prstGeom prst="rect">
-            <a:avLst/>
-          </a:prstGeom>
-          <a:noFill/>
-          <a:ln/>
-        </p:spPr>
-        <p:txBody>
-          <a:bodyPr wrap="square" lIns="0" tIns="0" rIns="0" bIns="0" rtlCol="0" anchor="ctr"/>
-          <a:lstStyle/>
-          <a:p>
-            <a:pPr indent="0" marL="0">
-              <a:buNone/>
-            </a:pPr>
+            <a:off x="658368" y="3035808"/>
+            <a:ext cx="634228" cy="402336"/>
+          </a:xfrm>
+          <a:prstGeom prst="rect">
+            <a:avLst/>
+          </a:prstGeom>
+          <a:noFill/>
+          <a:ln/>
+        </p:spPr>
+        <p:txBody>
+          <a:bodyPr wrap="square" lIns="0" tIns="0" rIns="0" bIns="0" rtlCol="0" anchor="ctr"/>
+          <a:lstStyle/>
+          <a:p>
+            <a:pPr indent="0" marL="0">
+              <a:buNone/>
+            </a:pPr>
+            <a:r>
+              <a:rPr lang="en-US" sz="1240" b="1" dirty="0">
+                <a:solidFill>
+                  <a:srgbClr val="1B1D21"/>
+                </a:solidFill>
+                <a:latin typeface="IBM Plex Sans KR" pitchFamily="34" charset="0"/>
+                <a:ea typeface="IBM Plex Sans KR" pitchFamily="34" charset="-122"/>
+                <a:cs typeface="IBM Plex Sans KR" pitchFamily="34" charset="-120"/>
+              </a:rPr>
+              <a:t>3</a:t>
+            </a:r>
             <a:endParaRPr lang="en-US" sz="1240" dirty="0"/>
           </a:p>
         </p:txBody>
@@ -5579,22 +4769,33 @@
         </p:nvSpPr>
         <p:spPr>
           <a:xfrm>
-            <a:off x="3996842" y="3328416"/>
-            <a:ext cx="3638855" cy="502920"/>
-          </a:xfrm>
-          <a:prstGeom prst="rect">
-            <a:avLst/>
-          </a:prstGeom>
-          <a:noFill/>
-          <a:ln/>
-        </p:spPr>
-        <p:txBody>
-          <a:bodyPr wrap="square" lIns="0" tIns="0" rIns="0" bIns="0" rtlCol="0" anchor="ctr"/>
-          <a:lstStyle/>
-          <a:p>
-            <a:pPr indent="0" marL="0">
-              <a:buNone/>
-            </a:pPr>
+            <a:off x="1548628" y="3035808"/>
+            <a:ext cx="6643482" cy="402336"/>
+          </a:xfrm>
+          <a:prstGeom prst="rect">
+            <a:avLst/>
+          </a:prstGeom>
+          <a:noFill/>
+          <a:ln/>
+        </p:spPr>
+        <p:txBody>
+          <a:bodyPr wrap="square" lIns="0" tIns="0" rIns="0" bIns="0" rtlCol="0" anchor="ctr"/>
+          <a:lstStyle/>
+          <a:p>
+            <a:pPr indent="0" marL="0">
+              <a:buNone/>
+            </a:pPr>
+            <a:r>
+              <a:rPr lang="en-US" sz="1240" dirty="0">
+                <a:solidFill>
+                  <a:srgbClr val="6C7078"/>
+                </a:solidFill>
+                <a:latin typeface="IBM Plex Sans KR" pitchFamily="34" charset="0"/>
+                <a:ea typeface="IBM Plex Sans KR" pitchFamily="34" charset="-122"/>
+                <a:cs typeface="IBM Plex Sans KR" pitchFamily="34" charset="-120"/>
+              </a:rPr>
+              <a:t>동아리 부원 이름 전체</a:t>
+            </a:r>
             <a:endParaRPr lang="en-US" sz="1240" dirty="0"/>
           </a:p>
         </p:txBody>
@@ -5607,8 +4808,8 @@
         </p:nvSpPr>
         <p:spPr>
           <a:xfrm>
-            <a:off x="7891729" y="3328416"/>
-            <a:ext cx="3638855" cy="502920"/>
+            <a:off x="8448142" y="3035808"/>
+            <a:ext cx="3082442" cy="402336"/>
           </a:xfrm>
           <a:prstGeom prst="rect">
             <a:avLst/>
@@ -5635,8 +4836,8 @@
         </p:nvSpPr>
         <p:spPr>
           <a:xfrm>
-            <a:off x="530352" y="3831336"/>
-            <a:ext cx="11128248" cy="502920"/>
+            <a:off x="530352" y="3438144"/>
+            <a:ext cx="11128248" cy="402336"/>
           </a:xfrm>
           <a:prstGeom prst="rect">
             <a:avLst/>
@@ -5660,22 +4861,33 @@
         </p:nvSpPr>
         <p:spPr>
           <a:xfrm>
-            <a:off x="658368" y="3831336"/>
-            <a:ext cx="3082442" cy="502920"/>
-          </a:xfrm>
-          <a:prstGeom prst="rect">
-            <a:avLst/>
-          </a:prstGeom>
-          <a:noFill/>
-          <a:ln/>
-        </p:spPr>
-        <p:txBody>
-          <a:bodyPr wrap="square" lIns="0" tIns="0" rIns="0" bIns="0" rtlCol="0" anchor="ctr"/>
-          <a:lstStyle/>
-          <a:p>
-            <a:pPr indent="0" marL="0">
-              <a:buNone/>
-            </a:pPr>
+            <a:off x="658368" y="3438144"/>
+            <a:ext cx="634228" cy="402336"/>
+          </a:xfrm>
+          <a:prstGeom prst="rect">
+            <a:avLst/>
+          </a:prstGeom>
+          <a:noFill/>
+          <a:ln/>
+        </p:spPr>
+        <p:txBody>
+          <a:bodyPr wrap="square" lIns="0" tIns="0" rIns="0" bIns="0" rtlCol="0" anchor="ctr"/>
+          <a:lstStyle/>
+          <a:p>
+            <a:pPr indent="0" marL="0">
+              <a:buNone/>
+            </a:pPr>
+            <a:r>
+              <a:rPr lang="en-US" sz="1240" b="1" dirty="0">
+                <a:solidFill>
+                  <a:srgbClr val="1B1D21"/>
+                </a:solidFill>
+                <a:latin typeface="IBM Plex Sans KR" pitchFamily="34" charset="0"/>
+                <a:ea typeface="IBM Plex Sans KR" pitchFamily="34" charset="-122"/>
+                <a:cs typeface="IBM Plex Sans KR" pitchFamily="34" charset="-120"/>
+              </a:rPr>
+              <a:t>4</a:t>
+            </a:r>
             <a:endParaRPr lang="en-US" sz="1240" dirty="0"/>
           </a:p>
         </p:txBody>
@@ -5688,22 +4900,33 @@
         </p:nvSpPr>
         <p:spPr>
           <a:xfrm>
-            <a:off x="3996842" y="3831336"/>
-            <a:ext cx="3638855" cy="502920"/>
-          </a:xfrm>
-          <a:prstGeom prst="rect">
-            <a:avLst/>
-          </a:prstGeom>
-          <a:noFill/>
-          <a:ln/>
-        </p:spPr>
-        <p:txBody>
-          <a:bodyPr wrap="square" lIns="0" tIns="0" rIns="0" bIns="0" rtlCol="0" anchor="ctr"/>
-          <a:lstStyle/>
-          <a:p>
-            <a:pPr indent="0" marL="0">
-              <a:buNone/>
-            </a:pPr>
+            <a:off x="1548628" y="3438144"/>
+            <a:ext cx="6643482" cy="402336"/>
+          </a:xfrm>
+          <a:prstGeom prst="rect">
+            <a:avLst/>
+          </a:prstGeom>
+          <a:noFill/>
+          <a:ln/>
+        </p:spPr>
+        <p:txBody>
+          <a:bodyPr wrap="square" lIns="0" tIns="0" rIns="0" bIns="0" rtlCol="0" anchor="ctr"/>
+          <a:lstStyle/>
+          <a:p>
+            <a:pPr indent="0" marL="0">
+              <a:buNone/>
+            </a:pPr>
+            <a:r>
+              <a:rPr lang="en-US" sz="1240" dirty="0">
+                <a:solidFill>
+                  <a:srgbClr val="6C7078"/>
+                </a:solidFill>
+                <a:latin typeface="IBM Plex Sans KR" pitchFamily="34" charset="0"/>
+                <a:ea typeface="IBM Plex Sans KR" pitchFamily="34" charset="-122"/>
+                <a:cs typeface="IBM Plex Sans KR" pitchFamily="34" charset="-120"/>
+              </a:rPr>
+              <a:t>내 사물함 번호·층·비밀번호 여부</a:t>
+            </a:r>
             <a:endParaRPr lang="en-US" sz="1240" dirty="0"/>
           </a:p>
         </p:txBody>
@@ -5716,8 +4939,8 @@
         </p:nvSpPr>
         <p:spPr>
           <a:xfrm>
-            <a:off x="7891729" y="3831336"/>
-            <a:ext cx="3638855" cy="502920"/>
+            <a:off x="8448142" y="3438144"/>
+            <a:ext cx="3082442" cy="402336"/>
           </a:xfrm>
           <a:prstGeom prst="rect">
             <a:avLst/>
@@ -5744,8 +4967,8 @@
         </p:nvSpPr>
         <p:spPr>
           <a:xfrm>
-            <a:off x="530352" y="4334256"/>
-            <a:ext cx="11128248" cy="502920"/>
+            <a:off x="530352" y="3840480"/>
+            <a:ext cx="11128248" cy="402336"/>
           </a:xfrm>
           <a:prstGeom prst="rect">
             <a:avLst/>
@@ -5769,22 +4992,33 @@
         </p:nvSpPr>
         <p:spPr>
           <a:xfrm>
-            <a:off x="658368" y="4334256"/>
-            <a:ext cx="3082442" cy="502920"/>
-          </a:xfrm>
-          <a:prstGeom prst="rect">
-            <a:avLst/>
-          </a:prstGeom>
-          <a:noFill/>
-          <a:ln/>
-        </p:spPr>
-        <p:txBody>
-          <a:bodyPr wrap="square" lIns="0" tIns="0" rIns="0" bIns="0" rtlCol="0" anchor="ctr"/>
-          <a:lstStyle/>
-          <a:p>
-            <a:pPr indent="0" marL="0">
-              <a:buNone/>
-            </a:pPr>
+            <a:off x="658368" y="3840480"/>
+            <a:ext cx="634228" cy="402336"/>
+          </a:xfrm>
+          <a:prstGeom prst="rect">
+            <a:avLst/>
+          </a:prstGeom>
+          <a:noFill/>
+          <a:ln/>
+        </p:spPr>
+        <p:txBody>
+          <a:bodyPr wrap="square" lIns="0" tIns="0" rIns="0" bIns="0" rtlCol="0" anchor="ctr"/>
+          <a:lstStyle/>
+          <a:p>
+            <a:pPr indent="0" marL="0">
+              <a:buNone/>
+            </a:pPr>
+            <a:r>
+              <a:rPr lang="en-US" sz="1240" b="1" dirty="0">
+                <a:solidFill>
+                  <a:srgbClr val="1B1D21"/>
+                </a:solidFill>
+                <a:latin typeface="IBM Plex Sans KR" pitchFamily="34" charset="0"/>
+                <a:ea typeface="IBM Plex Sans KR" pitchFamily="34" charset="-122"/>
+                <a:cs typeface="IBM Plex Sans KR" pitchFamily="34" charset="-120"/>
+              </a:rPr>
+              <a:t>5</a:t>
+            </a:r>
             <a:endParaRPr lang="en-US" sz="1240" dirty="0"/>
           </a:p>
         </p:txBody>
@@ -5797,22 +5031,33 @@
         </p:nvSpPr>
         <p:spPr>
           <a:xfrm>
-            <a:off x="3996842" y="4334256"/>
-            <a:ext cx="3638855" cy="502920"/>
-          </a:xfrm>
-          <a:prstGeom prst="rect">
-            <a:avLst/>
-          </a:prstGeom>
-          <a:noFill/>
-          <a:ln/>
-        </p:spPr>
-        <p:txBody>
-          <a:bodyPr wrap="square" lIns="0" tIns="0" rIns="0" bIns="0" rtlCol="0" anchor="ctr"/>
-          <a:lstStyle/>
-          <a:p>
-            <a:pPr indent="0" marL="0">
-              <a:buNone/>
-            </a:pPr>
+            <a:off x="1548628" y="3840480"/>
+            <a:ext cx="6643482" cy="402336"/>
+          </a:xfrm>
+          <a:prstGeom prst="rect">
+            <a:avLst/>
+          </a:prstGeom>
+          <a:noFill/>
+          <a:ln/>
+        </p:spPr>
+        <p:txBody>
+          <a:bodyPr wrap="square" lIns="0" tIns="0" rIns="0" bIns="0" rtlCol="0" anchor="ctr"/>
+          <a:lstStyle/>
+          <a:p>
+            <a:pPr indent="0" marL="0">
+              <a:buNone/>
+            </a:pPr>
+            <a:r>
+              <a:rPr lang="en-US" sz="1240" dirty="0">
+                <a:solidFill>
+                  <a:srgbClr val="6C7078"/>
+                </a:solidFill>
+                <a:latin typeface="IBM Plex Sans KR" pitchFamily="34" charset="0"/>
+                <a:ea typeface="IBM Plex Sans KR" pitchFamily="34" charset="-122"/>
+                <a:cs typeface="IBM Plex Sans KR" pitchFamily="34" charset="-120"/>
+              </a:rPr>
+              <a:t>이번 달 매일의 기상 시각</a:t>
+            </a:r>
             <a:endParaRPr lang="en-US" sz="1240" dirty="0"/>
           </a:p>
         </p:txBody>
@@ -5825,8 +5070,8 @@
         </p:nvSpPr>
         <p:spPr>
           <a:xfrm>
-            <a:off x="7891729" y="4334256"/>
-            <a:ext cx="3638855" cy="502920"/>
+            <a:off x="8448142" y="3840480"/>
+            <a:ext cx="3082442" cy="402336"/>
           </a:xfrm>
           <a:prstGeom prst="rect">
             <a:avLst/>
@@ -5853,7 +5098,400 @@
         </p:nvSpPr>
         <p:spPr>
           <a:xfrm>
-            <a:off x="530352" y="5120640"/>
+            <a:off x="530352" y="4242816"/>
+            <a:ext cx="11128248" cy="402336"/>
+          </a:xfrm>
+          <a:prstGeom prst="rect">
+            <a:avLst/>
+          </a:prstGeom>
+          <a:solidFill>
+            <a:srgbClr val="FFFFFF"/>
+          </a:solidFill>
+          <a:ln w="9525">
+            <a:solidFill>
+              <a:srgbClr val="E0E3E7"/>
+            </a:solidFill>
+            <a:prstDash val="solid"/>
+          </a:ln>
+        </p:spPr>
+      </p:sp>
+      <p:sp>
+        <p:nvSpPr>
+          <p:cNvPr id="37" name="Text 35"/>
+          <p:cNvSpPr/>
+          <p:nvPr/>
+        </p:nvSpPr>
+        <p:spPr>
+          <a:xfrm>
+            <a:off x="658368" y="4242816"/>
+            <a:ext cx="634228" cy="402336"/>
+          </a:xfrm>
+          <a:prstGeom prst="rect">
+            <a:avLst/>
+          </a:prstGeom>
+          <a:noFill/>
+          <a:ln/>
+        </p:spPr>
+        <p:txBody>
+          <a:bodyPr wrap="square" lIns="0" tIns="0" rIns="0" bIns="0" rtlCol="0" anchor="ctr"/>
+          <a:lstStyle/>
+          <a:p>
+            <a:pPr indent="0" marL="0">
+              <a:buNone/>
+            </a:pPr>
+            <a:r>
+              <a:rPr lang="en-US" sz="1240" b="1" dirty="0">
+                <a:solidFill>
+                  <a:srgbClr val="1B1D21"/>
+                </a:solidFill>
+                <a:latin typeface="IBM Plex Sans KR" pitchFamily="34" charset="0"/>
+                <a:ea typeface="IBM Plex Sans KR" pitchFamily="34" charset="-122"/>
+                <a:cs typeface="IBM Plex Sans KR" pitchFamily="34" charset="-120"/>
+              </a:rPr>
+              <a:t>6</a:t>
+            </a:r>
+            <a:endParaRPr lang="en-US" sz="1240" dirty="0"/>
+          </a:p>
+        </p:txBody>
+      </p:sp>
+      <p:sp>
+        <p:nvSpPr>
+          <p:cNvPr id="38" name="Text 36"/>
+          <p:cNvSpPr/>
+          <p:nvPr/>
+        </p:nvSpPr>
+        <p:spPr>
+          <a:xfrm>
+            <a:off x="1548628" y="4242816"/>
+            <a:ext cx="6643482" cy="402336"/>
+          </a:xfrm>
+          <a:prstGeom prst="rect">
+            <a:avLst/>
+          </a:prstGeom>
+          <a:noFill/>
+          <a:ln/>
+        </p:spPr>
+        <p:txBody>
+          <a:bodyPr wrap="square" lIns="0" tIns="0" rIns="0" bIns="0" rtlCol="0" anchor="ctr"/>
+          <a:lstStyle/>
+          <a:p>
+            <a:pPr indent="0" marL="0">
+              <a:buNone/>
+            </a:pPr>
+            <a:r>
+              <a:rPr lang="en-US" sz="1240" dirty="0">
+                <a:solidFill>
+                  <a:srgbClr val="6C7078"/>
+                </a:solidFill>
+                <a:latin typeface="IBM Plex Sans KR" pitchFamily="34" charset="0"/>
+                <a:ea typeface="IBM Plex Sans KR" pitchFamily="34" charset="-122"/>
+                <a:cs typeface="IBM Plex Sans KR" pitchFamily="34" charset="-120"/>
+              </a:rPr>
+              <a:t>도서관 책 한 권의 제목·저자·대출 여부</a:t>
+            </a:r>
+            <a:endParaRPr lang="en-US" sz="1240" dirty="0"/>
+          </a:p>
+        </p:txBody>
+      </p:sp>
+      <p:sp>
+        <p:nvSpPr>
+          <p:cNvPr id="39" name="Text 37"/>
+          <p:cNvSpPr/>
+          <p:nvPr/>
+        </p:nvSpPr>
+        <p:spPr>
+          <a:xfrm>
+            <a:off x="8448142" y="4242816"/>
+            <a:ext cx="3082442" cy="402336"/>
+          </a:xfrm>
+          <a:prstGeom prst="rect">
+            <a:avLst/>
+          </a:prstGeom>
+          <a:noFill/>
+          <a:ln/>
+        </p:spPr>
+        <p:txBody>
+          <a:bodyPr wrap="square" lIns="0" tIns="0" rIns="0" bIns="0" rtlCol="0" anchor="ctr"/>
+          <a:lstStyle/>
+          <a:p>
+            <a:pPr indent="0" marL="0">
+              <a:buNone/>
+            </a:pPr>
+            <a:endParaRPr lang="en-US" sz="1240" dirty="0"/>
+          </a:p>
+        </p:txBody>
+      </p:sp>
+      <p:sp>
+        <p:nvSpPr>
+          <p:cNvPr id="40" name="Shape 38"/>
+          <p:cNvSpPr/>
+          <p:nvPr/>
+        </p:nvSpPr>
+        <p:spPr>
+          <a:xfrm>
+            <a:off x="530352" y="4645152"/>
+            <a:ext cx="11128248" cy="402336"/>
+          </a:xfrm>
+          <a:prstGeom prst="rect">
+            <a:avLst/>
+          </a:prstGeom>
+          <a:solidFill>
+            <a:srgbClr val="F1F2F4"/>
+          </a:solidFill>
+          <a:ln w="9525">
+            <a:solidFill>
+              <a:srgbClr val="E0E3E7"/>
+            </a:solidFill>
+            <a:prstDash val="solid"/>
+          </a:ln>
+        </p:spPr>
+      </p:sp>
+      <p:sp>
+        <p:nvSpPr>
+          <p:cNvPr id="41" name="Text 39"/>
+          <p:cNvSpPr/>
+          <p:nvPr/>
+        </p:nvSpPr>
+        <p:spPr>
+          <a:xfrm>
+            <a:off x="658368" y="4645152"/>
+            <a:ext cx="634228" cy="402336"/>
+          </a:xfrm>
+          <a:prstGeom prst="rect">
+            <a:avLst/>
+          </a:prstGeom>
+          <a:noFill/>
+          <a:ln/>
+        </p:spPr>
+        <p:txBody>
+          <a:bodyPr wrap="square" lIns="0" tIns="0" rIns="0" bIns="0" rtlCol="0" anchor="ctr"/>
+          <a:lstStyle/>
+          <a:p>
+            <a:pPr indent="0" marL="0">
+              <a:buNone/>
+            </a:pPr>
+            <a:r>
+              <a:rPr lang="en-US" sz="1240" b="1" dirty="0">
+                <a:solidFill>
+                  <a:srgbClr val="1B1D21"/>
+                </a:solidFill>
+                <a:latin typeface="IBM Plex Sans KR" pitchFamily="34" charset="0"/>
+                <a:ea typeface="IBM Plex Sans KR" pitchFamily="34" charset="-122"/>
+                <a:cs typeface="IBM Plex Sans KR" pitchFamily="34" charset="-120"/>
+              </a:rPr>
+              <a:t>7</a:t>
+            </a:r>
+            <a:endParaRPr lang="en-US" sz="1240" dirty="0"/>
+          </a:p>
+        </p:txBody>
+      </p:sp>
+      <p:sp>
+        <p:nvSpPr>
+          <p:cNvPr id="42" name="Text 40"/>
+          <p:cNvSpPr/>
+          <p:nvPr/>
+        </p:nvSpPr>
+        <p:spPr>
+          <a:xfrm>
+            <a:off x="1548628" y="4645152"/>
+            <a:ext cx="6643482" cy="402336"/>
+          </a:xfrm>
+          <a:prstGeom prst="rect">
+            <a:avLst/>
+          </a:prstGeom>
+          <a:noFill/>
+          <a:ln/>
+        </p:spPr>
+        <p:txBody>
+          <a:bodyPr wrap="square" lIns="0" tIns="0" rIns="0" bIns="0" rtlCol="0" anchor="ctr"/>
+          <a:lstStyle/>
+          <a:p>
+            <a:pPr indent="0" marL="0">
+              <a:buNone/>
+            </a:pPr>
+            <a:r>
+              <a:rPr lang="en-US" sz="1240" dirty="0">
+                <a:solidFill>
+                  <a:srgbClr val="6C7078"/>
+                </a:solidFill>
+                <a:latin typeface="IBM Plex Sans KR" pitchFamily="34" charset="0"/>
+                <a:ea typeface="IBM Plex Sans KR" pitchFamily="34" charset="-122"/>
+                <a:cs typeface="IBM Plex Sans KR" pitchFamily="34" charset="-120"/>
+              </a:rPr>
+              <a:t>우리 반이 좋아하는 과목 순위</a:t>
+            </a:r>
+            <a:endParaRPr lang="en-US" sz="1240" dirty="0"/>
+          </a:p>
+        </p:txBody>
+      </p:sp>
+      <p:sp>
+        <p:nvSpPr>
+          <p:cNvPr id="43" name="Text 41"/>
+          <p:cNvSpPr/>
+          <p:nvPr/>
+        </p:nvSpPr>
+        <p:spPr>
+          <a:xfrm>
+            <a:off x="8448142" y="4645152"/>
+            <a:ext cx="3082442" cy="402336"/>
+          </a:xfrm>
+          <a:prstGeom prst="rect">
+            <a:avLst/>
+          </a:prstGeom>
+          <a:noFill/>
+          <a:ln/>
+        </p:spPr>
+        <p:txBody>
+          <a:bodyPr wrap="square" lIns="0" tIns="0" rIns="0" bIns="0" rtlCol="0" anchor="ctr"/>
+          <a:lstStyle/>
+          <a:p>
+            <a:pPr indent="0" marL="0">
+              <a:buNone/>
+            </a:pPr>
+            <a:endParaRPr lang="en-US" sz="1240" dirty="0"/>
+          </a:p>
+        </p:txBody>
+      </p:sp>
+      <p:sp>
+        <p:nvSpPr>
+          <p:cNvPr id="44" name="Shape 42"/>
+          <p:cNvSpPr/>
+          <p:nvPr/>
+        </p:nvSpPr>
+        <p:spPr>
+          <a:xfrm>
+            <a:off x="530352" y="5047488"/>
+            <a:ext cx="11128248" cy="402336"/>
+          </a:xfrm>
+          <a:prstGeom prst="rect">
+            <a:avLst/>
+          </a:prstGeom>
+          <a:solidFill>
+            <a:srgbClr val="FFFFFF"/>
+          </a:solidFill>
+          <a:ln w="9525">
+            <a:solidFill>
+              <a:srgbClr val="E0E3E7"/>
+            </a:solidFill>
+            <a:prstDash val="solid"/>
+          </a:ln>
+        </p:spPr>
+      </p:sp>
+      <p:sp>
+        <p:nvSpPr>
+          <p:cNvPr id="45" name="Text 43"/>
+          <p:cNvSpPr/>
+          <p:nvPr/>
+        </p:nvSpPr>
+        <p:spPr>
+          <a:xfrm>
+            <a:off x="658368" y="5047488"/>
+            <a:ext cx="634228" cy="402336"/>
+          </a:xfrm>
+          <a:prstGeom prst="rect">
+            <a:avLst/>
+          </a:prstGeom>
+          <a:noFill/>
+          <a:ln/>
+        </p:spPr>
+        <p:txBody>
+          <a:bodyPr wrap="square" lIns="0" tIns="0" rIns="0" bIns="0" rtlCol="0" anchor="ctr"/>
+          <a:lstStyle/>
+          <a:p>
+            <a:pPr indent="0" marL="0">
+              <a:buNone/>
+            </a:pPr>
+            <a:r>
+              <a:rPr lang="en-US" sz="1240" b="1" dirty="0">
+                <a:solidFill>
+                  <a:srgbClr val="1B1D21"/>
+                </a:solidFill>
+                <a:latin typeface="IBM Plex Sans KR" pitchFamily="34" charset="0"/>
+                <a:ea typeface="IBM Plex Sans KR" pitchFamily="34" charset="-122"/>
+                <a:cs typeface="IBM Plex Sans KR" pitchFamily="34" charset="-120"/>
+              </a:rPr>
+              <a:t>8</a:t>
+            </a:r>
+            <a:endParaRPr lang="en-US" sz="1240" dirty="0"/>
+          </a:p>
+        </p:txBody>
+      </p:sp>
+      <p:sp>
+        <p:nvSpPr>
+          <p:cNvPr id="46" name="Text 44"/>
+          <p:cNvSpPr/>
+          <p:nvPr/>
+        </p:nvSpPr>
+        <p:spPr>
+          <a:xfrm>
+            <a:off x="1548628" y="5047488"/>
+            <a:ext cx="6643482" cy="402336"/>
+          </a:xfrm>
+          <a:prstGeom prst="rect">
+            <a:avLst/>
+          </a:prstGeom>
+          <a:noFill/>
+          <a:ln/>
+        </p:spPr>
+        <p:txBody>
+          <a:bodyPr wrap="square" lIns="0" tIns="0" rIns="0" bIns="0" rtlCol="0" anchor="ctr"/>
+          <a:lstStyle/>
+          <a:p>
+            <a:pPr indent="0" marL="0">
+              <a:buNone/>
+            </a:pPr>
+            <a:r>
+              <a:rPr lang="en-US" sz="1240" dirty="0">
+                <a:solidFill>
+                  <a:srgbClr val="6C7078"/>
+                </a:solidFill>
+                <a:latin typeface="IBM Plex Sans KR" pitchFamily="34" charset="0"/>
+                <a:ea typeface="IBM Plex Sans KR" pitchFamily="34" charset="-122"/>
+                <a:cs typeface="IBM Plex Sans KR" pitchFamily="34" charset="-120"/>
+              </a:rPr>
+              <a:t>오늘 시간표의 1교시부터 7교시까지</a:t>
+            </a:r>
+            <a:endParaRPr lang="en-US" sz="1240" dirty="0"/>
+          </a:p>
+        </p:txBody>
+      </p:sp>
+      <p:sp>
+        <p:nvSpPr>
+          <p:cNvPr id="47" name="Text 45"/>
+          <p:cNvSpPr/>
+          <p:nvPr/>
+        </p:nvSpPr>
+        <p:spPr>
+          <a:xfrm>
+            <a:off x="8448142" y="5047488"/>
+            <a:ext cx="3082442" cy="402336"/>
+          </a:xfrm>
+          <a:prstGeom prst="rect">
+            <a:avLst/>
+          </a:prstGeom>
+          <a:noFill/>
+          <a:ln/>
+        </p:spPr>
+        <p:txBody>
+          <a:bodyPr wrap="square" lIns="0" tIns="0" rIns="0" bIns="0" rtlCol="0" anchor="ctr"/>
+          <a:lstStyle/>
+          <a:p>
+            <a:pPr indent="0" marL="0">
+              <a:buNone/>
+            </a:pPr>
+            <a:endParaRPr lang="en-US" sz="1240" dirty="0"/>
+          </a:p>
+        </p:txBody>
+      </p:sp>
+      <p:sp>
+        <p:nvSpPr>
+          <p:cNvPr id="48" name="Shape 46"/>
+          <p:cNvSpPr/>
+          <p:nvPr/>
+        </p:nvSpPr>
+        <p:spPr>
+          <a:xfrm>
+            <a:off x="530352" y="5577840"/>
             <a:ext cx="11128248" cy="512064"/>
           </a:xfrm>
           <a:prstGeom prst="roundRect">
@@ -5874,13 +5512,13 @@
       </p:sp>
       <p:sp>
         <p:nvSpPr>
-          <p:cNvPr id="37" name="Text 35"/>
-          <p:cNvSpPr/>
-          <p:nvPr/>
-        </p:nvSpPr>
-        <p:spPr>
-          <a:xfrm>
-            <a:off x="731520" y="5120640"/>
+          <p:cNvPr id="49" name="Text 47"/>
+          <p:cNvSpPr/>
+          <p:nvPr/>
+        </p:nvSpPr>
+        <p:spPr>
+          <a:xfrm>
+            <a:off x="731520" y="5577840"/>
             <a:ext cx="10725912" cy="512064"/>
           </a:xfrm>
           <a:prstGeom prst="rect">
@@ -5905,48 +5543,9 @@
                 <a:ea typeface="IBM Plex Sans KR" pitchFamily="34" charset="-122"/>
                 <a:cs typeface="IBM Plex Sans KR" pitchFamily="34" charset="-120"/>
               </a:rPr>
-              <a:t>다른 사람에게 보여도 괜찮은 항목만 · 비밀번호·연락처·주소는 적지 않는다</a:t>
+              <a:t>고른 이유를 한 줄씩 적는다. 정답을 외우는 활동이 아니다.</a:t>
             </a:r>
             <a:endParaRPr lang="en-US" sz="1400" dirty="0"/>
-          </a:p>
-        </p:txBody>
-      </p:sp>
-      <p:sp>
-        <p:nvSpPr>
-          <p:cNvPr id="38" name="Text 36"/>
-          <p:cNvSpPr/>
-          <p:nvPr/>
-        </p:nvSpPr>
-        <p:spPr>
-          <a:xfrm>
-            <a:off x="530352" y="5806440"/>
-            <a:ext cx="11128248" cy="457200"/>
-          </a:xfrm>
-          <a:prstGeom prst="rect">
-            <a:avLst/>
-          </a:prstGeom>
-          <a:noFill/>
-          <a:ln/>
-        </p:spPr>
-        <p:txBody>
-          <a:bodyPr wrap="square" lIns="0" tIns="0" rIns="0" bIns="0" rtlCol="0" anchor="ctr"/>
-          <a:lstStyle/>
-          <a:p>
-            <a:pPr algn="ctr" indent="0" marL="0">
-              <a:buNone/>
-            </a:pPr>
-            <a:r>
-              <a:rPr lang="en-US" sz="1700" b="1" dirty="0">
-                <a:solidFill>
-                  <a:srgbClr val="34373D"/>
-                </a:solidFill>
-                <a:latin typeface="IBM Plex Sans KR" pitchFamily="34" charset="0"/>
-                <a:ea typeface="IBM Plex Sans KR" pitchFamily="34" charset="-122"/>
-                <a:cs typeface="IBM Plex Sans KR" pitchFamily="34" charset="-120"/>
-              </a:rPr>
-              <a:t>항목은 다섯 개 이하로. 무엇을 뺄지 고르는 것도 활동이다</a:t>
-            </a:r>
-            <a:endParaRPr lang="en-US" sz="1700" dirty="0"/>
           </a:p>
         </p:txBody>
       </p:sp>
@@ -6115,7 +5714,7 @@
                 <a:ea typeface="IBM Plex Sans KR" pitchFamily="34" charset="-122"/>
                 <a:cs typeface="IBM Plex Sans KR" pitchFamily="34" charset="-120"/>
               </a:rPr>
-              <a:t>묶음이 여러 개면 표가 된다</a:t>
+              <a:t>워크시트 ② 나를 이름표 묶음으로</a:t>
             </a:r>
             <a:endParaRPr lang="en-US" sz="2700" dirty="0"/>
           </a:p>
@@ -6174,7 +5773,7 @@
                 <a:ea typeface="IBM Plex Mono" pitchFamily="34" charset="-122"/>
                 <a:cs typeface="IBM Plex Mono" pitchFamily="34" charset="-120"/>
               </a:rPr>
-              <a:t>12</a:t>
+              <a:t>11</a:t>
             </a:r>
             <a:endParaRPr lang="en-US" sz="1300" dirty="0"/>
           </a:p>
@@ -6213,7 +5812,7 @@
                 <a:ea typeface="IBM Plex Sans KR" pitchFamily="34" charset="-122"/>
                 <a:cs typeface="IBM Plex Sans KR" pitchFamily="34" charset="-120"/>
               </a:rPr>
-              <a:t>교과서 03-2 · 20–21쪽</a:t>
+              <a:t>교과서 03-2 · 17–18쪽</a:t>
             </a:r>
             <a:endParaRPr lang="en-US" sz="900" dirty="0"/>
           </a:p>
@@ -6266,16 +5865,14 @@
         </p:nvSpPr>
         <p:spPr>
           <a:xfrm>
-            <a:off x="530352" y="1828800"/>
-            <a:ext cx="5669280" cy="2103120"/>
-          </a:xfrm>
-          <a:prstGeom prst="roundRect">
-            <a:avLst>
-              <a:gd name="adj" fmla="val 2174"/>
-            </a:avLst>
+            <a:off x="530352" y="1920240"/>
+            <a:ext cx="3338474" cy="402336"/>
+          </a:xfrm>
+          <a:prstGeom prst="rect">
+            <a:avLst/>
           </a:prstGeom>
           <a:solidFill>
-            <a:srgbClr val="24272C"/>
+            <a:srgbClr val="1B1D21"/>
           </a:solidFill>
           <a:ln/>
         </p:spPr>
@@ -6288,149 +5885,47 @@
         </p:nvSpPr>
         <p:spPr>
           <a:xfrm>
-            <a:off x="768096" y="2011680"/>
-            <a:ext cx="5193792" cy="1737360"/>
-          </a:xfrm>
-          <a:prstGeom prst="rect">
-            <a:avLst/>
-          </a:prstGeom>
-          <a:noFill/>
-          <a:ln/>
-        </p:spPr>
-        <p:txBody>
-          <a:bodyPr wrap="square" lIns="0" tIns="0" rIns="0" bIns="0" rtlCol="0" anchor="t"/>
-          <a:lstStyle/>
-          <a:p>
-            <a:pPr indent="0" marL="0">
-              <a:lnSpc>
-                <a:spcPts val="2380"/>
-              </a:lnSpc>
-              <a:buNone/>
-            </a:pPr>
-            <a:r>
-              <a:rPr lang="en-US" sz="1400" b="1" dirty="0">
-                <a:solidFill>
-                  <a:srgbClr val="E8EAED"/>
-                </a:solidFill>
-                <a:latin typeface="IBM Plex Mono" pitchFamily="34" charset="0"/>
-                <a:ea typeface="IBM Plex Mono" pitchFamily="34" charset="-122"/>
-                <a:cs typeface="IBM Plex Mono" pitchFamily="34" charset="-120"/>
-              </a:rPr>
-              <a:t>students = [</a:t>
-            </a:r>
-            <a:endParaRPr lang="en-US" sz="1400" dirty="0"/>
-          </a:p>
-          <a:p>
-            <a:pPr indent="0" marL="0">
-              <a:lnSpc>
-                <a:spcPts val="2380"/>
-              </a:lnSpc>
-              <a:buNone/>
-            </a:pPr>
-            <a:r>
-              <a:rPr lang="en-US" sz="1400" dirty="0">
-                <a:solidFill>
-                  <a:srgbClr val="9BD1FF"/>
-                </a:solidFill>
-                <a:latin typeface="IBM Plex Mono" pitchFamily="34" charset="0"/>
-                <a:ea typeface="IBM Plex Mono" pitchFamily="34" charset="-122"/>
-                <a:cs typeface="IBM Plex Mono" pitchFamily="34" charset="-120"/>
-              </a:rPr>
-              <a:t>  {"name": "민준", "club": "밴드"},</a:t>
-            </a:r>
-            <a:endParaRPr lang="en-US" sz="1400" dirty="0"/>
-          </a:p>
-          <a:p>
-            <a:pPr indent="0" marL="0">
-              <a:lnSpc>
-                <a:spcPts val="2380"/>
-              </a:lnSpc>
-              <a:buNone/>
-            </a:pPr>
-            <a:r>
-              <a:rPr lang="en-US" sz="1400" dirty="0">
-                <a:solidFill>
-                  <a:srgbClr val="9BD1FF"/>
-                </a:solidFill>
-                <a:latin typeface="IBM Plex Mono" pitchFamily="34" charset="0"/>
-                <a:ea typeface="IBM Plex Mono" pitchFamily="34" charset="-122"/>
-                <a:cs typeface="IBM Plex Mono" pitchFamily="34" charset="-120"/>
-              </a:rPr>
-              <a:t>  {"name": "서연", "club": "미술"},</a:t>
-            </a:r>
-            <a:endParaRPr lang="en-US" sz="1400" dirty="0"/>
-          </a:p>
-          <a:p>
-            <a:pPr indent="0" marL="0">
-              <a:lnSpc>
-                <a:spcPts val="2380"/>
-              </a:lnSpc>
-              <a:buNone/>
-            </a:pPr>
-            <a:r>
-              <a:rPr lang="en-US" sz="1400" b="1" dirty="0">
-                <a:solidFill>
-                  <a:srgbClr val="E8EAED"/>
-                </a:solidFill>
-                <a:latin typeface="IBM Plex Mono" pitchFamily="34" charset="0"/>
-                <a:ea typeface="IBM Plex Mono" pitchFamily="34" charset="-122"/>
-                <a:cs typeface="IBM Plex Mono" pitchFamily="34" charset="-120"/>
-              </a:rPr>
-              <a:t>]</a:t>
-            </a:r>
-            <a:endParaRPr lang="en-US" sz="1400" dirty="0"/>
-          </a:p>
-        </p:txBody>
-      </p:sp>
-      <p:sp>
-        <p:nvSpPr>
-          <p:cNvPr id="12" name="Text 10"/>
-          <p:cNvSpPr/>
-          <p:nvPr/>
-        </p:nvSpPr>
-        <p:spPr>
-          <a:xfrm>
-            <a:off x="5916168" y="2743200"/>
-            <a:ext cx="384048" cy="402336"/>
-          </a:xfrm>
-          <a:prstGeom prst="rect">
-            <a:avLst/>
-          </a:prstGeom>
-          <a:noFill/>
-          <a:ln/>
-        </p:spPr>
-        <p:txBody>
-          <a:bodyPr wrap="square" lIns="0" tIns="0" rIns="0" bIns="0" rtlCol="0" anchor="ctr"/>
-          <a:lstStyle/>
-          <a:p>
-            <a:pPr algn="ctr" indent="0" marL="0">
-              <a:buNone/>
-            </a:pPr>
-            <a:r>
-              <a:rPr lang="en-US" sz="2000" b="1" dirty="0">
-                <a:solidFill>
-                  <a:srgbClr val="FF5C00"/>
+            <a:off x="658368" y="1920240"/>
+            <a:ext cx="3082442" cy="402336"/>
+          </a:xfrm>
+          <a:prstGeom prst="rect">
+            <a:avLst/>
+          </a:prstGeom>
+          <a:noFill/>
+          <a:ln/>
+        </p:spPr>
+        <p:txBody>
+          <a:bodyPr wrap="square" lIns="0" tIns="0" rIns="0" bIns="0" rtlCol="0" anchor="ctr"/>
+          <a:lstStyle/>
+          <a:p>
+            <a:pPr indent="0" marL="0">
+              <a:buNone/>
+            </a:pPr>
+            <a:r>
+              <a:rPr lang="en-US" sz="1050" b="1" dirty="0">
+                <a:solidFill>
+                  <a:srgbClr val="FFFFFF"/>
                 </a:solidFill>
                 <a:latin typeface="IBM Plex Sans KR" pitchFamily="34" charset="0"/>
                 <a:ea typeface="IBM Plex Sans KR" pitchFamily="34" charset="-122"/>
                 <a:cs typeface="IBM Plex Sans KR" pitchFamily="34" charset="-120"/>
               </a:rPr>
-              <a:t>→</a:t>
-            </a:r>
-            <a:endParaRPr lang="en-US" sz="2000" dirty="0"/>
-          </a:p>
-        </p:txBody>
-      </p:sp>
-      <p:sp>
-        <p:nvSpPr>
-          <p:cNvPr id="13" name="Shape 11"/>
-          <p:cNvSpPr/>
-          <p:nvPr/>
-        </p:nvSpPr>
-        <p:spPr>
-          <a:xfrm>
-            <a:off x="6583680" y="1828800"/>
-            <a:ext cx="2537460" cy="402336"/>
+              <a:t>이름표 (영어 소문자)</a:t>
+            </a:r>
+            <a:endParaRPr lang="en-US" sz="1050" dirty="0"/>
+          </a:p>
+        </p:txBody>
+      </p:sp>
+      <p:sp>
+        <p:nvSpPr>
+          <p:cNvPr id="12" name="Shape 10"/>
+          <p:cNvSpPr/>
+          <p:nvPr/>
+        </p:nvSpPr>
+        <p:spPr>
+          <a:xfrm>
+            <a:off x="3868826" y="1920240"/>
+            <a:ext cx="3894887" cy="402336"/>
           </a:xfrm>
           <a:prstGeom prst="rect">
             <a:avLst/>
@@ -6443,14 +5938,14 @@
       </p:sp>
       <p:sp>
         <p:nvSpPr>
-          <p:cNvPr id="14" name="Text 12"/>
-          <p:cNvSpPr/>
-          <p:nvPr/>
-        </p:nvSpPr>
-        <p:spPr>
-          <a:xfrm>
-            <a:off x="6711696" y="1828800"/>
-            <a:ext cx="2281428" cy="402336"/>
+          <p:cNvPr id="13" name="Text 11"/>
+          <p:cNvSpPr/>
+          <p:nvPr/>
+        </p:nvSpPr>
+        <p:spPr>
+          <a:xfrm>
+            <a:off x="3996842" y="1920240"/>
+            <a:ext cx="3638855" cy="402336"/>
           </a:xfrm>
           <a:prstGeom prst="rect">
             <a:avLst/>
@@ -6474,7 +5969,7 @@
                 <a:ea typeface="IBM Plex Sans KR" pitchFamily="34" charset="-122"/>
                 <a:cs typeface="IBM Plex Sans KR" pitchFamily="34" charset="-120"/>
               </a:rPr>
-              <a:t>name</a:t>
+              <a:t>값</a:t>
             </a:r>
             <a:endParaRPr lang="en-US" sz="1050" dirty="0"/>
           </a:p>
@@ -6482,14 +5977,14 @@
       </p:sp>
       <p:sp>
         <p:nvSpPr>
-          <p:cNvPr id="15" name="Shape 13"/>
-          <p:cNvSpPr/>
-          <p:nvPr/>
-        </p:nvSpPr>
-        <p:spPr>
-          <a:xfrm>
-            <a:off x="9121140" y="1828800"/>
-            <a:ext cx="2537460" cy="402336"/>
+          <p:cNvPr id="14" name="Shape 12"/>
+          <p:cNvSpPr/>
+          <p:nvPr/>
+        </p:nvSpPr>
+        <p:spPr>
+          <a:xfrm>
+            <a:off x="7763713" y="1920240"/>
+            <a:ext cx="3894887" cy="402336"/>
           </a:xfrm>
           <a:prstGeom prst="rect">
             <a:avLst/>
@@ -6502,14 +5997,14 @@
       </p:sp>
       <p:sp>
         <p:nvSpPr>
-          <p:cNvPr id="16" name="Text 14"/>
-          <p:cNvSpPr/>
-          <p:nvPr/>
-        </p:nvSpPr>
-        <p:spPr>
-          <a:xfrm>
-            <a:off x="9249156" y="1828800"/>
-            <a:ext cx="2281428" cy="402336"/>
+          <p:cNvPr id="15" name="Text 13"/>
+          <p:cNvSpPr/>
+          <p:nvPr/>
+        </p:nvSpPr>
+        <p:spPr>
+          <a:xfrm>
+            <a:off x="7891729" y="1920240"/>
+            <a:ext cx="3638855" cy="402336"/>
           </a:xfrm>
           <a:prstGeom prst="rect">
             <a:avLst/>
@@ -6533,7 +6028,7 @@
                 <a:ea typeface="IBM Plex Sans KR" pitchFamily="34" charset="-122"/>
                 <a:cs typeface="IBM Plex Sans KR" pitchFamily="34" charset="-120"/>
               </a:rPr>
-              <a:t>club</a:t>
+              <a:t>왜 이 항목이 필요한가</a:t>
             </a:r>
             <a:endParaRPr lang="en-US" sz="1050" dirty="0"/>
           </a:p>
@@ -6541,14 +6036,14 @@
       </p:sp>
       <p:sp>
         <p:nvSpPr>
-          <p:cNvPr id="17" name="Shape 15"/>
-          <p:cNvSpPr/>
-          <p:nvPr/>
-        </p:nvSpPr>
-        <p:spPr>
-          <a:xfrm>
-            <a:off x="6583680" y="2231136"/>
-            <a:ext cx="5074920" cy="502920"/>
+          <p:cNvPr id="16" name="Shape 14"/>
+          <p:cNvSpPr/>
+          <p:nvPr/>
+        </p:nvSpPr>
+        <p:spPr>
+          <a:xfrm>
+            <a:off x="530352" y="2322576"/>
+            <a:ext cx="11128248" cy="502920"/>
           </a:xfrm>
           <a:prstGeom prst="rect">
             <a:avLst/>
@@ -6566,14 +6061,14 @@
       </p:sp>
       <p:sp>
         <p:nvSpPr>
-          <p:cNvPr id="18" name="Text 16"/>
-          <p:cNvSpPr/>
-          <p:nvPr/>
-        </p:nvSpPr>
-        <p:spPr>
-          <a:xfrm>
-            <a:off x="6711696" y="2231136"/>
-            <a:ext cx="2281428" cy="502920"/>
+          <p:cNvPr id="17" name="Text 15"/>
+          <p:cNvSpPr/>
+          <p:nvPr/>
+        </p:nvSpPr>
+        <p:spPr>
+          <a:xfrm>
+            <a:off x="658368" y="2322576"/>
+            <a:ext cx="3082442" cy="502920"/>
           </a:xfrm>
           <a:prstGeom prst="rect">
             <a:avLst/>
@@ -6597,7 +6092,7 @@
                 <a:ea typeface="IBM Plex Sans KR" pitchFamily="34" charset="-122"/>
                 <a:cs typeface="IBM Plex Sans KR" pitchFamily="34" charset="-120"/>
               </a:rPr>
-              <a:t>민준</a:t>
+              <a:t>name</a:t>
             </a:r>
             <a:endParaRPr lang="en-US" sz="1240" dirty="0"/>
           </a:p>
@@ -6605,39 +6100,56 @@
       </p:sp>
       <p:sp>
         <p:nvSpPr>
+          <p:cNvPr id="18" name="Text 16"/>
+          <p:cNvSpPr/>
+          <p:nvPr/>
+        </p:nvSpPr>
+        <p:spPr>
+          <a:xfrm>
+            <a:off x="3996842" y="2322576"/>
+            <a:ext cx="3638855" cy="502920"/>
+          </a:xfrm>
+          <a:prstGeom prst="rect">
+            <a:avLst/>
+          </a:prstGeom>
+          <a:noFill/>
+          <a:ln/>
+        </p:spPr>
+        <p:txBody>
+          <a:bodyPr wrap="square" lIns="0" tIns="0" rIns="0" bIns="0" rtlCol="0" anchor="ctr"/>
+          <a:lstStyle/>
+          <a:p>
+            <a:pPr indent="0" marL="0">
+              <a:buNone/>
+            </a:pPr>
+            <a:endParaRPr lang="en-US" sz="1240" dirty="0"/>
+          </a:p>
+        </p:txBody>
+      </p:sp>
+      <p:sp>
+        <p:nvSpPr>
           <p:cNvPr id="19" name="Text 17"/>
           <p:cNvSpPr/>
           <p:nvPr/>
         </p:nvSpPr>
         <p:spPr>
           <a:xfrm>
-            <a:off x="9249156" y="2231136"/>
-            <a:ext cx="2281428" cy="502920"/>
-          </a:xfrm>
-          <a:prstGeom prst="rect">
-            <a:avLst/>
-          </a:prstGeom>
-          <a:noFill/>
-          <a:ln/>
-        </p:spPr>
-        <p:txBody>
-          <a:bodyPr wrap="square" lIns="0" tIns="0" rIns="0" bIns="0" rtlCol="0" anchor="ctr"/>
-          <a:lstStyle/>
-          <a:p>
-            <a:pPr indent="0" marL="0">
-              <a:buNone/>
-            </a:pPr>
-            <a:r>
-              <a:rPr lang="en-US" sz="1240" dirty="0">
-                <a:solidFill>
-                  <a:srgbClr val="6C7078"/>
-                </a:solidFill>
-                <a:latin typeface="IBM Plex Sans KR" pitchFamily="34" charset="0"/>
-                <a:ea typeface="IBM Plex Sans KR" pitchFamily="34" charset="-122"/>
-                <a:cs typeface="IBM Plex Sans KR" pitchFamily="34" charset="-120"/>
-              </a:rPr>
-              <a:t>밴드</a:t>
-            </a:r>
+            <a:off x="7891729" y="2322576"/>
+            <a:ext cx="3638855" cy="502920"/>
+          </a:xfrm>
+          <a:prstGeom prst="rect">
+            <a:avLst/>
+          </a:prstGeom>
+          <a:noFill/>
+          <a:ln/>
+        </p:spPr>
+        <p:txBody>
+          <a:bodyPr wrap="square" lIns="0" tIns="0" rIns="0" bIns="0" rtlCol="0" anchor="ctr"/>
+          <a:lstStyle/>
+          <a:p>
+            <a:pPr indent="0" marL="0">
+              <a:buNone/>
+            </a:pPr>
             <a:endParaRPr lang="en-US" sz="1240" dirty="0"/>
           </a:p>
         </p:txBody>
@@ -6650,8 +6162,8 @@
         </p:nvSpPr>
         <p:spPr>
           <a:xfrm>
-            <a:off x="6583680" y="2734056"/>
-            <a:ext cx="5074920" cy="502920"/>
+            <a:off x="530352" y="2825496"/>
+            <a:ext cx="11128248" cy="502920"/>
           </a:xfrm>
           <a:prstGeom prst="rect">
             <a:avLst/>
@@ -6675,33 +6187,22 @@
         </p:nvSpPr>
         <p:spPr>
           <a:xfrm>
-            <a:off x="6711696" y="2734056"/>
-            <a:ext cx="2281428" cy="502920"/>
-          </a:xfrm>
-          <a:prstGeom prst="rect">
-            <a:avLst/>
-          </a:prstGeom>
-          <a:noFill/>
-          <a:ln/>
-        </p:spPr>
-        <p:txBody>
-          <a:bodyPr wrap="square" lIns="0" tIns="0" rIns="0" bIns="0" rtlCol="0" anchor="ctr"/>
-          <a:lstStyle/>
-          <a:p>
-            <a:pPr indent="0" marL="0">
-              <a:buNone/>
-            </a:pPr>
-            <a:r>
-              <a:rPr lang="en-US" sz="1240" b="1" dirty="0">
-                <a:solidFill>
-                  <a:srgbClr val="1B1D21"/>
-                </a:solidFill>
-                <a:latin typeface="IBM Plex Sans KR" pitchFamily="34" charset="0"/>
-                <a:ea typeface="IBM Plex Sans KR" pitchFamily="34" charset="-122"/>
-                <a:cs typeface="IBM Plex Sans KR" pitchFamily="34" charset="-120"/>
-              </a:rPr>
-              <a:t>서연</a:t>
-            </a:r>
+            <a:off x="658368" y="2825496"/>
+            <a:ext cx="3082442" cy="502920"/>
+          </a:xfrm>
+          <a:prstGeom prst="rect">
+            <a:avLst/>
+          </a:prstGeom>
+          <a:noFill/>
+          <a:ln/>
+        </p:spPr>
+        <p:txBody>
+          <a:bodyPr wrap="square" lIns="0" tIns="0" rIns="0" bIns="0" rtlCol="0" anchor="ctr"/>
+          <a:lstStyle/>
+          <a:p>
+            <a:pPr indent="0" marL="0">
+              <a:buNone/>
+            </a:pPr>
             <a:endParaRPr lang="en-US" sz="1240" dirty="0"/>
           </a:p>
         </p:txBody>
@@ -6714,57 +6215,72 @@
         </p:nvSpPr>
         <p:spPr>
           <a:xfrm>
-            <a:off x="9249156" y="2734056"/>
-            <a:ext cx="2281428" cy="502920"/>
-          </a:xfrm>
-          <a:prstGeom prst="rect">
-            <a:avLst/>
-          </a:prstGeom>
-          <a:noFill/>
-          <a:ln/>
-        </p:spPr>
-        <p:txBody>
-          <a:bodyPr wrap="square" lIns="0" tIns="0" rIns="0" bIns="0" rtlCol="0" anchor="ctr"/>
-          <a:lstStyle/>
-          <a:p>
-            <a:pPr indent="0" marL="0">
-              <a:buNone/>
-            </a:pPr>
-            <a:r>
-              <a:rPr lang="en-US" sz="1240" dirty="0">
-                <a:solidFill>
-                  <a:srgbClr val="6C7078"/>
-                </a:solidFill>
-                <a:latin typeface="IBM Plex Sans KR" pitchFamily="34" charset="0"/>
-                <a:ea typeface="IBM Plex Sans KR" pitchFamily="34" charset="-122"/>
-                <a:cs typeface="IBM Plex Sans KR" pitchFamily="34" charset="-120"/>
-              </a:rPr>
-              <a:t>미술</a:t>
-            </a:r>
+            <a:off x="3996842" y="2825496"/>
+            <a:ext cx="3638855" cy="502920"/>
+          </a:xfrm>
+          <a:prstGeom prst="rect">
+            <a:avLst/>
+          </a:prstGeom>
+          <a:noFill/>
+          <a:ln/>
+        </p:spPr>
+        <p:txBody>
+          <a:bodyPr wrap="square" lIns="0" tIns="0" rIns="0" bIns="0" rtlCol="0" anchor="ctr"/>
+          <a:lstStyle/>
+          <a:p>
+            <a:pPr indent="0" marL="0">
+              <a:buNone/>
+            </a:pPr>
             <a:endParaRPr lang="en-US" sz="1240" dirty="0"/>
           </a:p>
         </p:txBody>
       </p:sp>
       <p:sp>
         <p:nvSpPr>
-          <p:cNvPr id="23" name="Shape 21"/>
-          <p:cNvSpPr/>
-          <p:nvPr/>
-        </p:nvSpPr>
-        <p:spPr>
-          <a:xfrm>
-            <a:off x="530352" y="4206240"/>
-            <a:ext cx="5349240" cy="1234440"/>
-          </a:xfrm>
-          <a:prstGeom prst="roundRect">
-            <a:avLst>
-              <a:gd name="adj" fmla="val 4074"/>
-            </a:avLst>
+          <p:cNvPr id="23" name="Text 21"/>
+          <p:cNvSpPr/>
+          <p:nvPr/>
+        </p:nvSpPr>
+        <p:spPr>
+          <a:xfrm>
+            <a:off x="7891729" y="2825496"/>
+            <a:ext cx="3638855" cy="502920"/>
+          </a:xfrm>
+          <a:prstGeom prst="rect">
+            <a:avLst/>
+          </a:prstGeom>
+          <a:noFill/>
+          <a:ln/>
+        </p:spPr>
+        <p:txBody>
+          <a:bodyPr wrap="square" lIns="0" tIns="0" rIns="0" bIns="0" rtlCol="0" anchor="ctr"/>
+          <a:lstStyle/>
+          <a:p>
+            <a:pPr indent="0" marL="0">
+              <a:buNone/>
+            </a:pPr>
+            <a:endParaRPr lang="en-US" sz="1240" dirty="0"/>
+          </a:p>
+        </p:txBody>
+      </p:sp>
+      <p:sp>
+        <p:nvSpPr>
+          <p:cNvPr id="24" name="Shape 22"/>
+          <p:cNvSpPr/>
+          <p:nvPr/>
+        </p:nvSpPr>
+        <p:spPr>
+          <a:xfrm>
+            <a:off x="530352" y="3328416"/>
+            <a:ext cx="11128248" cy="502920"/>
+          </a:xfrm>
+          <a:prstGeom prst="rect">
+            <a:avLst/>
           </a:prstGeom>
           <a:solidFill>
             <a:srgbClr val="F1F2F4"/>
           </a:solidFill>
-          <a:ln w="12700">
+          <a:ln w="9525">
             <a:solidFill>
               <a:srgbClr val="E0E3E7"/>
             </a:solidFill>
@@ -6774,107 +6290,108 @@
       </p:sp>
       <p:sp>
         <p:nvSpPr>
-          <p:cNvPr id="24" name="Text 22"/>
-          <p:cNvSpPr/>
-          <p:nvPr/>
-        </p:nvSpPr>
-        <p:spPr>
-          <a:xfrm>
-            <a:off x="713232" y="4370832"/>
-            <a:ext cx="4983480" cy="402336"/>
-          </a:xfrm>
-          <a:prstGeom prst="rect">
-            <a:avLst/>
-          </a:prstGeom>
-          <a:noFill/>
-          <a:ln/>
-        </p:spPr>
-        <p:txBody>
-          <a:bodyPr wrap="square" lIns="0" tIns="0" rIns="0" bIns="0" rtlCol="0" anchor="ctr"/>
-          <a:lstStyle/>
-          <a:p>
-            <a:pPr indent="0" marL="0">
-              <a:buNone/>
-            </a:pPr>
-            <a:r>
-              <a:rPr lang="en-US" sz="1650" b="1" dirty="0">
-                <a:solidFill>
-                  <a:srgbClr val="1B1D21"/>
-                </a:solidFill>
-                <a:latin typeface="IBM Plex Sans KR" pitchFamily="34" charset="0"/>
-                <a:ea typeface="IBM Plex Sans KR" pitchFamily="34" charset="-122"/>
-                <a:cs typeface="IBM Plex Sans KR" pitchFamily="34" charset="-120"/>
-              </a:rPr>
-              <a:t>이름표</a:t>
-            </a:r>
-            <a:endParaRPr lang="en-US" sz="1650" dirty="0"/>
-          </a:p>
-        </p:txBody>
-      </p:sp>
-      <p:sp>
-        <p:nvSpPr>
           <p:cNvPr id="25" name="Text 23"/>
           <p:cNvSpPr/>
           <p:nvPr/>
         </p:nvSpPr>
         <p:spPr>
           <a:xfrm>
-            <a:off x="713232" y="4864608"/>
-            <a:ext cx="4983480" cy="429768"/>
-          </a:xfrm>
-          <a:prstGeom prst="rect">
-            <a:avLst/>
-          </a:prstGeom>
-          <a:noFill/>
-          <a:ln/>
-        </p:spPr>
-        <p:txBody>
-          <a:bodyPr wrap="square" lIns="0" tIns="0" rIns="0" bIns="0" rtlCol="0" anchor="t"/>
-          <a:lstStyle/>
-          <a:p>
-            <a:pPr indent="0" marL="0">
-              <a:lnSpc>
-                <a:spcPts val="1900"/>
-              </a:lnSpc>
-              <a:buNone/>
-            </a:pPr>
-            <a:r>
-              <a:rPr lang="en-US" sz="1240" dirty="0">
-                <a:solidFill>
-                  <a:srgbClr val="6C7078"/>
-                </a:solidFill>
-                <a:latin typeface="IBM Plex Sans KR" pitchFamily="34" charset="0"/>
-                <a:ea typeface="IBM Plex Sans KR" pitchFamily="34" charset="-122"/>
-                <a:cs typeface="IBM Plex Sans KR" pitchFamily="34" charset="-120"/>
-              </a:rPr>
-              <a:t>표의 열 이름이 된다</a:t>
-            </a:r>
+            <a:off x="658368" y="3328416"/>
+            <a:ext cx="3082442" cy="502920"/>
+          </a:xfrm>
+          <a:prstGeom prst="rect">
+            <a:avLst/>
+          </a:prstGeom>
+          <a:noFill/>
+          <a:ln/>
+        </p:spPr>
+        <p:txBody>
+          <a:bodyPr wrap="square" lIns="0" tIns="0" rIns="0" bIns="0" rtlCol="0" anchor="ctr"/>
+          <a:lstStyle/>
+          <a:p>
+            <a:pPr indent="0" marL="0">
+              <a:buNone/>
+            </a:pPr>
             <a:endParaRPr lang="en-US" sz="1240" dirty="0"/>
           </a:p>
         </p:txBody>
       </p:sp>
       <p:sp>
         <p:nvSpPr>
-          <p:cNvPr id="26" name="Shape 24"/>
-          <p:cNvSpPr/>
-          <p:nvPr/>
-        </p:nvSpPr>
-        <p:spPr>
-          <a:xfrm>
-            <a:off x="6309360" y="4206240"/>
-            <a:ext cx="5349240" cy="1234440"/>
-          </a:xfrm>
-          <a:prstGeom prst="roundRect">
-            <a:avLst>
-              <a:gd name="adj" fmla="val 4074"/>
-            </a:avLst>
+          <p:cNvPr id="26" name="Text 24"/>
+          <p:cNvSpPr/>
+          <p:nvPr/>
+        </p:nvSpPr>
+        <p:spPr>
+          <a:xfrm>
+            <a:off x="3996842" y="3328416"/>
+            <a:ext cx="3638855" cy="502920"/>
+          </a:xfrm>
+          <a:prstGeom prst="rect">
+            <a:avLst/>
+          </a:prstGeom>
+          <a:noFill/>
+          <a:ln/>
+        </p:spPr>
+        <p:txBody>
+          <a:bodyPr wrap="square" lIns="0" tIns="0" rIns="0" bIns="0" rtlCol="0" anchor="ctr"/>
+          <a:lstStyle/>
+          <a:p>
+            <a:pPr indent="0" marL="0">
+              <a:buNone/>
+            </a:pPr>
+            <a:endParaRPr lang="en-US" sz="1240" dirty="0"/>
+          </a:p>
+        </p:txBody>
+      </p:sp>
+      <p:sp>
+        <p:nvSpPr>
+          <p:cNvPr id="27" name="Text 25"/>
+          <p:cNvSpPr/>
+          <p:nvPr/>
+        </p:nvSpPr>
+        <p:spPr>
+          <a:xfrm>
+            <a:off x="7891729" y="3328416"/>
+            <a:ext cx="3638855" cy="502920"/>
+          </a:xfrm>
+          <a:prstGeom prst="rect">
+            <a:avLst/>
+          </a:prstGeom>
+          <a:noFill/>
+          <a:ln/>
+        </p:spPr>
+        <p:txBody>
+          <a:bodyPr wrap="square" lIns="0" tIns="0" rIns="0" bIns="0" rtlCol="0" anchor="ctr"/>
+          <a:lstStyle/>
+          <a:p>
+            <a:pPr indent="0" marL="0">
+              <a:buNone/>
+            </a:pPr>
+            <a:endParaRPr lang="en-US" sz="1240" dirty="0"/>
+          </a:p>
+        </p:txBody>
+      </p:sp>
+      <p:sp>
+        <p:nvSpPr>
+          <p:cNvPr id="28" name="Shape 26"/>
+          <p:cNvSpPr/>
+          <p:nvPr/>
+        </p:nvSpPr>
+        <p:spPr>
+          <a:xfrm>
+            <a:off x="530352" y="3831336"/>
+            <a:ext cx="11128248" cy="502920"/>
+          </a:xfrm>
+          <a:prstGeom prst="rect">
+            <a:avLst/>
           </a:prstGeom>
           <a:solidFill>
-            <a:srgbClr val="E7F2ED"/>
+            <a:srgbClr val="FFFFFF"/>
           </a:solidFill>
-          <a:ln w="12700">
+          <a:ln w="9525">
             <a:solidFill>
-              <a:srgbClr val="0E7C86"/>
+              <a:srgbClr val="E0E3E7"/>
             </a:solidFill>
             <a:prstDash val="solid"/>
           </a:ln>
@@ -6882,94 +6399,206 @@
       </p:sp>
       <p:sp>
         <p:nvSpPr>
-          <p:cNvPr id="27" name="Text 25"/>
-          <p:cNvSpPr/>
-          <p:nvPr/>
-        </p:nvSpPr>
-        <p:spPr>
-          <a:xfrm>
-            <a:off x="6492240" y="4370832"/>
-            <a:ext cx="4983480" cy="402336"/>
-          </a:xfrm>
-          <a:prstGeom prst="rect">
-            <a:avLst/>
-          </a:prstGeom>
-          <a:noFill/>
-          <a:ln/>
-        </p:spPr>
-        <p:txBody>
-          <a:bodyPr wrap="square" lIns="0" tIns="0" rIns="0" bIns="0" rtlCol="0" anchor="ctr"/>
-          <a:lstStyle/>
-          <a:p>
-            <a:pPr indent="0" marL="0">
-              <a:buNone/>
-            </a:pPr>
-            <a:r>
-              <a:rPr lang="en-US" sz="1650" b="1" dirty="0">
-                <a:solidFill>
-                  <a:srgbClr val="1B1D21"/>
-                </a:solidFill>
-                <a:latin typeface="IBM Plex Sans KR" pitchFamily="34" charset="0"/>
-                <a:ea typeface="IBM Plex Sans KR" pitchFamily="34" charset="-122"/>
-                <a:cs typeface="IBM Plex Sans KR" pitchFamily="34" charset="-120"/>
-              </a:rPr>
-              <a:t>묶음 하나</a:t>
-            </a:r>
-            <a:endParaRPr lang="en-US" sz="1650" dirty="0"/>
-          </a:p>
-        </p:txBody>
-      </p:sp>
-      <p:sp>
-        <p:nvSpPr>
-          <p:cNvPr id="28" name="Text 26"/>
-          <p:cNvSpPr/>
-          <p:nvPr/>
-        </p:nvSpPr>
-        <p:spPr>
-          <a:xfrm>
-            <a:off x="6492240" y="4864608"/>
-            <a:ext cx="4983480" cy="429768"/>
-          </a:xfrm>
-          <a:prstGeom prst="rect">
-            <a:avLst/>
-          </a:prstGeom>
-          <a:noFill/>
-          <a:ln/>
-        </p:spPr>
-        <p:txBody>
-          <a:bodyPr wrap="square" lIns="0" tIns="0" rIns="0" bIns="0" rtlCol="0" anchor="t"/>
-          <a:lstStyle/>
-          <a:p>
-            <a:pPr indent="0" marL="0">
-              <a:lnSpc>
-                <a:spcPts val="1900"/>
-              </a:lnSpc>
-              <a:buNone/>
-            </a:pPr>
-            <a:r>
-              <a:rPr lang="en-US" sz="1240" dirty="0">
-                <a:solidFill>
-                  <a:srgbClr val="34373D"/>
-                </a:solidFill>
-                <a:latin typeface="IBM Plex Sans KR" pitchFamily="34" charset="0"/>
-                <a:ea typeface="IBM Plex Sans KR" pitchFamily="34" charset="-122"/>
-                <a:cs typeface="IBM Plex Sans KR" pitchFamily="34" charset="-120"/>
-              </a:rPr>
-              <a:t>표의 한 행이 된다</a:t>
-            </a:r>
+          <p:cNvPr id="29" name="Text 27"/>
+          <p:cNvSpPr/>
+          <p:nvPr/>
+        </p:nvSpPr>
+        <p:spPr>
+          <a:xfrm>
+            <a:off x="658368" y="3831336"/>
+            <a:ext cx="3082442" cy="502920"/>
+          </a:xfrm>
+          <a:prstGeom prst="rect">
+            <a:avLst/>
+          </a:prstGeom>
+          <a:noFill/>
+          <a:ln/>
+        </p:spPr>
+        <p:txBody>
+          <a:bodyPr wrap="square" lIns="0" tIns="0" rIns="0" bIns="0" rtlCol="0" anchor="ctr"/>
+          <a:lstStyle/>
+          <a:p>
+            <a:pPr indent="0" marL="0">
+              <a:buNone/>
+            </a:pPr>
             <a:endParaRPr lang="en-US" sz="1240" dirty="0"/>
           </a:p>
         </p:txBody>
       </p:sp>
       <p:sp>
         <p:nvSpPr>
-          <p:cNvPr id="29" name="Shape 27"/>
-          <p:cNvSpPr/>
-          <p:nvPr/>
-        </p:nvSpPr>
-        <p:spPr>
-          <a:xfrm>
-            <a:off x="530352" y="5669280"/>
+          <p:cNvPr id="30" name="Text 28"/>
+          <p:cNvSpPr/>
+          <p:nvPr/>
+        </p:nvSpPr>
+        <p:spPr>
+          <a:xfrm>
+            <a:off x="3996842" y="3831336"/>
+            <a:ext cx="3638855" cy="502920"/>
+          </a:xfrm>
+          <a:prstGeom prst="rect">
+            <a:avLst/>
+          </a:prstGeom>
+          <a:noFill/>
+          <a:ln/>
+        </p:spPr>
+        <p:txBody>
+          <a:bodyPr wrap="square" lIns="0" tIns="0" rIns="0" bIns="0" rtlCol="0" anchor="ctr"/>
+          <a:lstStyle/>
+          <a:p>
+            <a:pPr indent="0" marL="0">
+              <a:buNone/>
+            </a:pPr>
+            <a:endParaRPr lang="en-US" sz="1240" dirty="0"/>
+          </a:p>
+        </p:txBody>
+      </p:sp>
+      <p:sp>
+        <p:nvSpPr>
+          <p:cNvPr id="31" name="Text 29"/>
+          <p:cNvSpPr/>
+          <p:nvPr/>
+        </p:nvSpPr>
+        <p:spPr>
+          <a:xfrm>
+            <a:off x="7891729" y="3831336"/>
+            <a:ext cx="3638855" cy="502920"/>
+          </a:xfrm>
+          <a:prstGeom prst="rect">
+            <a:avLst/>
+          </a:prstGeom>
+          <a:noFill/>
+          <a:ln/>
+        </p:spPr>
+        <p:txBody>
+          <a:bodyPr wrap="square" lIns="0" tIns="0" rIns="0" bIns="0" rtlCol="0" anchor="ctr"/>
+          <a:lstStyle/>
+          <a:p>
+            <a:pPr indent="0" marL="0">
+              <a:buNone/>
+            </a:pPr>
+            <a:endParaRPr lang="en-US" sz="1240" dirty="0"/>
+          </a:p>
+        </p:txBody>
+      </p:sp>
+      <p:sp>
+        <p:nvSpPr>
+          <p:cNvPr id="32" name="Shape 30"/>
+          <p:cNvSpPr/>
+          <p:nvPr/>
+        </p:nvSpPr>
+        <p:spPr>
+          <a:xfrm>
+            <a:off x="530352" y="4334256"/>
+            <a:ext cx="11128248" cy="502920"/>
+          </a:xfrm>
+          <a:prstGeom prst="rect">
+            <a:avLst/>
+          </a:prstGeom>
+          <a:solidFill>
+            <a:srgbClr val="F1F2F4"/>
+          </a:solidFill>
+          <a:ln w="9525">
+            <a:solidFill>
+              <a:srgbClr val="E0E3E7"/>
+            </a:solidFill>
+            <a:prstDash val="solid"/>
+          </a:ln>
+        </p:spPr>
+      </p:sp>
+      <p:sp>
+        <p:nvSpPr>
+          <p:cNvPr id="33" name="Text 31"/>
+          <p:cNvSpPr/>
+          <p:nvPr/>
+        </p:nvSpPr>
+        <p:spPr>
+          <a:xfrm>
+            <a:off x="658368" y="4334256"/>
+            <a:ext cx="3082442" cy="502920"/>
+          </a:xfrm>
+          <a:prstGeom prst="rect">
+            <a:avLst/>
+          </a:prstGeom>
+          <a:noFill/>
+          <a:ln/>
+        </p:spPr>
+        <p:txBody>
+          <a:bodyPr wrap="square" lIns="0" tIns="0" rIns="0" bIns="0" rtlCol="0" anchor="ctr"/>
+          <a:lstStyle/>
+          <a:p>
+            <a:pPr indent="0" marL="0">
+              <a:buNone/>
+            </a:pPr>
+            <a:endParaRPr lang="en-US" sz="1240" dirty="0"/>
+          </a:p>
+        </p:txBody>
+      </p:sp>
+      <p:sp>
+        <p:nvSpPr>
+          <p:cNvPr id="34" name="Text 32"/>
+          <p:cNvSpPr/>
+          <p:nvPr/>
+        </p:nvSpPr>
+        <p:spPr>
+          <a:xfrm>
+            <a:off x="3996842" y="4334256"/>
+            <a:ext cx="3638855" cy="502920"/>
+          </a:xfrm>
+          <a:prstGeom prst="rect">
+            <a:avLst/>
+          </a:prstGeom>
+          <a:noFill/>
+          <a:ln/>
+        </p:spPr>
+        <p:txBody>
+          <a:bodyPr wrap="square" lIns="0" tIns="0" rIns="0" bIns="0" rtlCol="0" anchor="ctr"/>
+          <a:lstStyle/>
+          <a:p>
+            <a:pPr indent="0" marL="0">
+              <a:buNone/>
+            </a:pPr>
+            <a:endParaRPr lang="en-US" sz="1240" dirty="0"/>
+          </a:p>
+        </p:txBody>
+      </p:sp>
+      <p:sp>
+        <p:nvSpPr>
+          <p:cNvPr id="35" name="Text 33"/>
+          <p:cNvSpPr/>
+          <p:nvPr/>
+        </p:nvSpPr>
+        <p:spPr>
+          <a:xfrm>
+            <a:off x="7891729" y="4334256"/>
+            <a:ext cx="3638855" cy="502920"/>
+          </a:xfrm>
+          <a:prstGeom prst="rect">
+            <a:avLst/>
+          </a:prstGeom>
+          <a:noFill/>
+          <a:ln/>
+        </p:spPr>
+        <p:txBody>
+          <a:bodyPr wrap="square" lIns="0" tIns="0" rIns="0" bIns="0" rtlCol="0" anchor="ctr"/>
+          <a:lstStyle/>
+          <a:p>
+            <a:pPr indent="0" marL="0">
+              <a:buNone/>
+            </a:pPr>
+            <a:endParaRPr lang="en-US" sz="1240" dirty="0"/>
+          </a:p>
+        </p:txBody>
+      </p:sp>
+      <p:sp>
+        <p:nvSpPr>
+          <p:cNvPr id="36" name="Shape 34"/>
+          <p:cNvSpPr/>
+          <p:nvPr/>
+        </p:nvSpPr>
+        <p:spPr>
+          <a:xfrm>
+            <a:off x="530352" y="5120640"/>
             <a:ext cx="11128248" cy="512064"/>
           </a:xfrm>
           <a:prstGeom prst="roundRect">
@@ -6978,11 +6607,11 @@
             </a:avLst>
           </a:prstGeom>
           <a:solidFill>
-            <a:srgbClr val="EAF5FB"/>
+            <a:srgbClr val="FF5C00"/>
           </a:solidFill>
           <a:ln w="12700">
             <a:solidFill>
-              <a:srgbClr val="3D8DFF"/>
+              <a:srgbClr val="FF5C00"/>
             </a:solidFill>
             <a:prstDash val="solid"/>
           </a:ln>
@@ -6990,13 +6619,13 @@
       </p:sp>
       <p:sp>
         <p:nvSpPr>
-          <p:cNvPr id="30" name="Text 28"/>
-          <p:cNvSpPr/>
-          <p:nvPr/>
-        </p:nvSpPr>
-        <p:spPr>
-          <a:xfrm>
-            <a:off x="731520" y="5669280"/>
+          <p:cNvPr id="37" name="Text 35"/>
+          <p:cNvSpPr/>
+          <p:nvPr/>
+        </p:nvSpPr>
+        <p:spPr>
+          <a:xfrm>
+            <a:off x="731520" y="5120640"/>
             <a:ext cx="10725912" cy="512064"/>
           </a:xfrm>
           <a:prstGeom prst="rect">
@@ -7013,17 +6642,56 @@
               <a:buNone/>
             </a:pPr>
             <a:r>
-              <a:rPr lang="en-US" sz="1350" b="1" dirty="0">
-                <a:solidFill>
-                  <a:srgbClr val="34373D"/>
+              <a:rPr lang="en-US" sz="1400" b="1" dirty="0">
+                <a:solidFill>
+                  <a:srgbClr val="FFFFFF"/>
                 </a:solidFill>
                 <a:latin typeface="IBM Plex Sans KR" pitchFamily="34" charset="0"/>
                 <a:ea typeface="IBM Plex Sans KR" pitchFamily="34" charset="-122"/>
                 <a:cs typeface="IBM Plex Sans KR" pitchFamily="34" charset="-120"/>
               </a:rPr>
-              <a:t>다음 주에 표를 다루는 도구를 쓴다. 그 표가 오늘 만든 이 모양이다.</a:t>
-            </a:r>
-            <a:endParaRPr lang="en-US" sz="1350" dirty="0"/>
+              <a:t>다른 사람에게 보여도 괜찮은 항목만 · 비밀번호·연락처·주소는 적지 않는다</a:t>
+            </a:r>
+            <a:endParaRPr lang="en-US" sz="1400" dirty="0"/>
+          </a:p>
+        </p:txBody>
+      </p:sp>
+      <p:sp>
+        <p:nvSpPr>
+          <p:cNvPr id="38" name="Text 36"/>
+          <p:cNvSpPr/>
+          <p:nvPr/>
+        </p:nvSpPr>
+        <p:spPr>
+          <a:xfrm>
+            <a:off x="530352" y="5806440"/>
+            <a:ext cx="11128248" cy="457200"/>
+          </a:xfrm>
+          <a:prstGeom prst="rect">
+            <a:avLst/>
+          </a:prstGeom>
+          <a:noFill/>
+          <a:ln/>
+        </p:spPr>
+        <p:txBody>
+          <a:bodyPr wrap="square" lIns="0" tIns="0" rIns="0" bIns="0" rtlCol="0" anchor="ctr"/>
+          <a:lstStyle/>
+          <a:p>
+            <a:pPr algn="ctr" indent="0" marL="0">
+              <a:buNone/>
+            </a:pPr>
+            <a:r>
+              <a:rPr lang="en-US" sz="1700" b="1" dirty="0">
+                <a:solidFill>
+                  <a:srgbClr val="34373D"/>
+                </a:solidFill>
+                <a:latin typeface="IBM Plex Sans KR" pitchFamily="34" charset="0"/>
+                <a:ea typeface="IBM Plex Sans KR" pitchFamily="34" charset="-122"/>
+                <a:cs typeface="IBM Plex Sans KR" pitchFamily="34" charset="-120"/>
+              </a:rPr>
+              <a:t>항목은 다섯 개 이하로. 무엇을 뺄지 고르는 것도 활동이다</a:t>
+            </a:r>
+            <a:endParaRPr lang="en-US" sz="1700" dirty="0"/>
           </a:p>
         </p:txBody>
       </p:sp>
@@ -7038,6 +6706,1083 @@
 <file path=ppt/slides/slide14.xml><?xml version="1.0" encoding="utf-8"?>
 <p:sld xmlns:a="http://schemas.openxmlformats.org/drawingml/2006/main" xmlns:r="http://schemas.openxmlformats.org/officeDocument/2006/relationships" xmlns:p="http://schemas.openxmlformats.org/presentationml/2006/main">
   <p:cSld name="Slide 14">
+    <p:bg>
+      <p:bgPr>
+        <a:solidFill>
+          <a:srgbClr val="FFFFFF"/>
+        </a:solidFill>
+      </p:bgPr>
+    </p:bg>
+    <p:spTree>
+      <p:nvGrpSpPr>
+        <p:cNvPr id="1" name=""/>
+        <p:cNvGrpSpPr/>
+        <p:nvPr/>
+      </p:nvGrpSpPr>
+      <p:grpSpPr>
+        <a:xfrm>
+          <a:off x="0" y="0"/>
+          <a:ext cx="0" cy="0"/>
+          <a:chOff x="0" y="0"/>
+          <a:chExt cx="0" cy="0"/>
+        </a:xfrm>
+      </p:grpSpPr>
+      <p:sp>
+        <p:nvSpPr>
+          <p:cNvPr id="2" name="Text 0"/>
+          <p:cNvSpPr/>
+          <p:nvPr/>
+        </p:nvSpPr>
+        <p:spPr>
+          <a:xfrm>
+            <a:off x="530352" y="320040"/>
+            <a:ext cx="4114800" cy="246888"/>
+          </a:xfrm>
+          <a:prstGeom prst="rect">
+            <a:avLst/>
+          </a:prstGeom>
+          <a:noFill/>
+          <a:ln/>
+        </p:spPr>
+        <p:txBody>
+          <a:bodyPr wrap="square" lIns="0" tIns="0" rIns="0" bIns="0" rtlCol="0" anchor="ctr"/>
+          <a:lstStyle/>
+          <a:p>
+            <a:pPr indent="0" marL="0">
+              <a:buNone/>
+            </a:pPr>
+            <a:r>
+              <a:rPr lang="en-US" sz="975" b="1" dirty="0">
+                <a:solidFill>
+                  <a:srgbClr val="6C7078"/>
+                </a:solidFill>
+                <a:latin typeface="IBM Plex Sans KR" pitchFamily="34" charset="0"/>
+                <a:ea typeface="IBM Plex Sans KR" pitchFamily="34" charset="-122"/>
+                <a:cs typeface="IBM Plex Sans KR" pitchFamily="34" charset="-120"/>
+              </a:rPr>
+              <a:t>정보와 디지털 문해력</a:t>
+            </a:r>
+            <a:endParaRPr lang="en-US" sz="975" dirty="0"/>
+          </a:p>
+        </p:txBody>
+      </p:sp>
+      <p:sp>
+        <p:nvSpPr>
+          <p:cNvPr id="3" name="Shape 1"/>
+          <p:cNvSpPr/>
+          <p:nvPr/>
+        </p:nvSpPr>
+        <p:spPr>
+          <a:xfrm>
+            <a:off x="10378440" y="292608"/>
+            <a:ext cx="1280160" cy="274320"/>
+          </a:xfrm>
+          <a:prstGeom prst="roundRect">
+            <a:avLst>
+              <a:gd name="adj" fmla="val 50000"/>
+            </a:avLst>
+          </a:prstGeom>
+          <a:solidFill>
+            <a:srgbClr val="1B1D21"/>
+          </a:solidFill>
+          <a:ln/>
+        </p:spPr>
+      </p:sp>
+      <p:sp>
+        <p:nvSpPr>
+          <p:cNvPr id="4" name="Text 2"/>
+          <p:cNvSpPr/>
+          <p:nvPr/>
+        </p:nvSpPr>
+        <p:spPr>
+          <a:xfrm>
+            <a:off x="10378440" y="301752"/>
+            <a:ext cx="1280160" cy="256032"/>
+          </a:xfrm>
+          <a:prstGeom prst="rect">
+            <a:avLst/>
+          </a:prstGeom>
+          <a:noFill/>
+          <a:ln/>
+        </p:spPr>
+        <p:txBody>
+          <a:bodyPr wrap="square" lIns="0" tIns="0" rIns="0" bIns="0" rtlCol="0" anchor="ctr"/>
+          <a:lstStyle/>
+          <a:p>
+            <a:pPr algn="ctr" indent="0" marL="0">
+              <a:buNone/>
+            </a:pPr>
+            <a:r>
+              <a:rPr lang="en-US" sz="975" b="1" dirty="0">
+                <a:solidFill>
+                  <a:srgbClr val="FFFFFF"/>
+                </a:solidFill>
+                <a:latin typeface="IBM Plex Sans KR" pitchFamily="34" charset="0"/>
+                <a:ea typeface="IBM Plex Sans KR" pitchFamily="34" charset="-122"/>
+                <a:cs typeface="IBM Plex Sans KR" pitchFamily="34" charset="-120"/>
+              </a:rPr>
+              <a:t>3-2</a:t>
+            </a:r>
+            <a:endParaRPr lang="en-US" sz="975" dirty="0"/>
+          </a:p>
+        </p:txBody>
+      </p:sp>
+      <p:sp>
+        <p:nvSpPr>
+          <p:cNvPr id="5" name="Text 3"/>
+          <p:cNvSpPr/>
+          <p:nvPr/>
+        </p:nvSpPr>
+        <p:spPr>
+          <a:xfrm>
+            <a:off x="530352" y="713232"/>
+            <a:ext cx="9692640" cy="713232"/>
+          </a:xfrm>
+          <a:prstGeom prst="rect">
+            <a:avLst/>
+          </a:prstGeom>
+          <a:noFill/>
+          <a:ln/>
+        </p:spPr>
+        <p:txBody>
+          <a:bodyPr wrap="square" lIns="0" tIns="0" rIns="0" bIns="0" rtlCol="0" anchor="ctr"/>
+          <a:lstStyle/>
+          <a:p>
+            <a:pPr indent="0" marL="0">
+              <a:buNone/>
+            </a:pPr>
+            <a:r>
+              <a:rPr lang="en-US" sz="2700" b="1" dirty="0">
+                <a:solidFill>
+                  <a:srgbClr val="1B1D21"/>
+                </a:solidFill>
+                <a:latin typeface="IBM Plex Sans KR" pitchFamily="34" charset="0"/>
+                <a:ea typeface="IBM Plex Sans KR" pitchFamily="34" charset="-122"/>
+                <a:cs typeface="IBM Plex Sans KR" pitchFamily="34" charset="-120"/>
+              </a:rPr>
+              <a:t>묶음이 여러 개면 표가 된다</a:t>
+            </a:r>
+            <a:endParaRPr lang="en-US" sz="2700" dirty="0"/>
+          </a:p>
+        </p:txBody>
+      </p:sp>
+      <p:sp>
+        <p:nvSpPr>
+          <p:cNvPr id="6" name="Shape 4"/>
+          <p:cNvSpPr/>
+          <p:nvPr/>
+        </p:nvSpPr>
+        <p:spPr>
+          <a:xfrm>
+            <a:off x="530352" y="1481328"/>
+            <a:ext cx="612648" cy="45720"/>
+          </a:xfrm>
+          <a:prstGeom prst="rect">
+            <a:avLst/>
+          </a:prstGeom>
+          <a:solidFill>
+            <a:srgbClr val="FF5C00"/>
+          </a:solidFill>
+          <a:ln/>
+        </p:spPr>
+      </p:sp>
+      <p:sp>
+        <p:nvSpPr>
+          <p:cNvPr id="7" name="Text 5"/>
+          <p:cNvSpPr/>
+          <p:nvPr/>
+        </p:nvSpPr>
+        <p:spPr>
+          <a:xfrm>
+            <a:off x="10195560" y="786384"/>
+            <a:ext cx="1463040" cy="384048"/>
+          </a:xfrm>
+          <a:prstGeom prst="rect">
+            <a:avLst/>
+          </a:prstGeom>
+          <a:noFill/>
+          <a:ln/>
+        </p:spPr>
+        <p:txBody>
+          <a:bodyPr wrap="square" lIns="0" tIns="0" rIns="0" bIns="0" rtlCol="0" anchor="ctr"/>
+          <a:lstStyle/>
+          <a:p>
+            <a:pPr algn="r" indent="0" marL="0">
+              <a:buNone/>
+            </a:pPr>
+            <a:r>
+              <a:rPr lang="en-US" sz="1300" b="1" dirty="0">
+                <a:solidFill>
+                  <a:srgbClr val="FF5C00"/>
+                </a:solidFill>
+                <a:latin typeface="IBM Plex Mono" pitchFamily="34" charset="0"/>
+                <a:ea typeface="IBM Plex Mono" pitchFamily="34" charset="-122"/>
+                <a:cs typeface="IBM Plex Mono" pitchFamily="34" charset="-120"/>
+              </a:rPr>
+              <a:t>12</a:t>
+            </a:r>
+            <a:endParaRPr lang="en-US" sz="1300" dirty="0"/>
+          </a:p>
+        </p:txBody>
+      </p:sp>
+      <p:sp>
+        <p:nvSpPr>
+          <p:cNvPr id="8" name="Text 6"/>
+          <p:cNvSpPr/>
+          <p:nvPr/>
+        </p:nvSpPr>
+        <p:spPr>
+          <a:xfrm>
+            <a:off x="530352" y="6327648"/>
+            <a:ext cx="5486400" cy="210312"/>
+          </a:xfrm>
+          <a:prstGeom prst="rect">
+            <a:avLst/>
+          </a:prstGeom>
+          <a:noFill/>
+          <a:ln/>
+        </p:spPr>
+        <p:txBody>
+          <a:bodyPr wrap="square" lIns="0" tIns="0" rIns="0" bIns="0" rtlCol="0" anchor="ctr"/>
+          <a:lstStyle/>
+          <a:p>
+            <a:pPr indent="0" marL="0">
+              <a:buNone/>
+            </a:pPr>
+            <a:r>
+              <a:rPr lang="en-US" sz="900" dirty="0">
+                <a:solidFill>
+                  <a:srgbClr val="6C7078"/>
+                </a:solidFill>
+                <a:latin typeface="IBM Plex Sans KR" pitchFamily="34" charset="0"/>
+                <a:ea typeface="IBM Plex Sans KR" pitchFamily="34" charset="-122"/>
+                <a:cs typeface="IBM Plex Sans KR" pitchFamily="34" charset="-120"/>
+              </a:rPr>
+              <a:t>교과서 03-2 · 19–20쪽</a:t>
+            </a:r>
+            <a:endParaRPr lang="en-US" sz="900" dirty="0"/>
+          </a:p>
+        </p:txBody>
+      </p:sp>
+      <p:sp>
+        <p:nvSpPr>
+          <p:cNvPr id="9" name="Text 7"/>
+          <p:cNvSpPr/>
+          <p:nvPr/>
+        </p:nvSpPr>
+        <p:spPr>
+          <a:xfrm>
+            <a:off x="11201400" y="6327648"/>
+            <a:ext cx="438912" cy="210312"/>
+          </a:xfrm>
+          <a:prstGeom prst="rect">
+            <a:avLst/>
+          </a:prstGeom>
+          <a:noFill/>
+          <a:ln/>
+        </p:spPr>
+        <p:txBody>
+          <a:bodyPr wrap="square" lIns="0" tIns="0" rIns="0" bIns="0" rtlCol="0" anchor="ctr"/>
+          <a:lstStyle/>
+          <a:p>
+            <a:pPr algn="r" indent="0" marL="0">
+              <a:buNone/>
+            </a:pPr>
+            <a:r>
+              <a:rPr lang="en-US" sz="900" dirty="0">
+                <a:solidFill>
+                  <a:srgbClr val="6C7078"/>
+                </a:solidFill>
+                <a:latin typeface="IBM Plex Mono" pitchFamily="34" charset="0"/>
+                <a:ea typeface="IBM Plex Mono" pitchFamily="34" charset="-122"/>
+                <a:cs typeface="IBM Plex Mono" pitchFamily="34" charset="-120"/>
+              </a:rPr>
+              <a:t>14</a:t>
+            </a:r>
+            <a:endParaRPr lang="en-US" sz="900" dirty="0"/>
+          </a:p>
+        </p:txBody>
+      </p:sp>
+      <p:sp>
+        <p:nvSpPr>
+          <p:cNvPr id="10" name="Shape 8"/>
+          <p:cNvSpPr/>
+          <p:nvPr/>
+        </p:nvSpPr>
+        <p:spPr>
+          <a:xfrm>
+            <a:off x="530352" y="1828800"/>
+            <a:ext cx="5669280" cy="2103120"/>
+          </a:xfrm>
+          <a:prstGeom prst="roundRect">
+            <a:avLst>
+              <a:gd name="adj" fmla="val 2174"/>
+            </a:avLst>
+          </a:prstGeom>
+          <a:solidFill>
+            <a:srgbClr val="24272C"/>
+          </a:solidFill>
+          <a:ln/>
+        </p:spPr>
+      </p:sp>
+      <p:sp>
+        <p:nvSpPr>
+          <p:cNvPr id="11" name="Text 9"/>
+          <p:cNvSpPr/>
+          <p:nvPr/>
+        </p:nvSpPr>
+        <p:spPr>
+          <a:xfrm>
+            <a:off x="768096" y="2011680"/>
+            <a:ext cx="5193792" cy="1737360"/>
+          </a:xfrm>
+          <a:prstGeom prst="rect">
+            <a:avLst/>
+          </a:prstGeom>
+          <a:noFill/>
+          <a:ln/>
+        </p:spPr>
+        <p:txBody>
+          <a:bodyPr wrap="square" lIns="0" tIns="0" rIns="0" bIns="0" rtlCol="0" anchor="t"/>
+          <a:lstStyle/>
+          <a:p>
+            <a:pPr indent="0" marL="0">
+              <a:lnSpc>
+                <a:spcPts val="2380"/>
+              </a:lnSpc>
+              <a:buNone/>
+            </a:pPr>
+            <a:r>
+              <a:rPr lang="en-US" sz="1400" b="1" dirty="0">
+                <a:solidFill>
+                  <a:srgbClr val="E8EAED"/>
+                </a:solidFill>
+                <a:latin typeface="IBM Plex Mono" pitchFamily="34" charset="0"/>
+                <a:ea typeface="IBM Plex Mono" pitchFamily="34" charset="-122"/>
+                <a:cs typeface="IBM Plex Mono" pitchFamily="34" charset="-120"/>
+              </a:rPr>
+              <a:t>students = [</a:t>
+            </a:r>
+            <a:endParaRPr lang="en-US" sz="1400" dirty="0"/>
+          </a:p>
+          <a:p>
+            <a:pPr indent="0" marL="0">
+              <a:lnSpc>
+                <a:spcPts val="2380"/>
+              </a:lnSpc>
+              <a:buNone/>
+            </a:pPr>
+            <a:r>
+              <a:rPr lang="en-US" sz="1400" dirty="0">
+                <a:solidFill>
+                  <a:srgbClr val="9BD1FF"/>
+                </a:solidFill>
+                <a:latin typeface="IBM Plex Mono" pitchFamily="34" charset="0"/>
+                <a:ea typeface="IBM Plex Mono" pitchFamily="34" charset="-122"/>
+                <a:cs typeface="IBM Plex Mono" pitchFamily="34" charset="-120"/>
+              </a:rPr>
+              <a:t>  {"name": "민준", "club": "밴드"},</a:t>
+            </a:r>
+            <a:endParaRPr lang="en-US" sz="1400" dirty="0"/>
+          </a:p>
+          <a:p>
+            <a:pPr indent="0" marL="0">
+              <a:lnSpc>
+                <a:spcPts val="2380"/>
+              </a:lnSpc>
+              <a:buNone/>
+            </a:pPr>
+            <a:r>
+              <a:rPr lang="en-US" sz="1400" dirty="0">
+                <a:solidFill>
+                  <a:srgbClr val="9BD1FF"/>
+                </a:solidFill>
+                <a:latin typeface="IBM Plex Mono" pitchFamily="34" charset="0"/>
+                <a:ea typeface="IBM Plex Mono" pitchFamily="34" charset="-122"/>
+                <a:cs typeface="IBM Plex Mono" pitchFamily="34" charset="-120"/>
+              </a:rPr>
+              <a:t>  {"name": "서연", "club": "미술"},</a:t>
+            </a:r>
+            <a:endParaRPr lang="en-US" sz="1400" dirty="0"/>
+          </a:p>
+          <a:p>
+            <a:pPr indent="0" marL="0">
+              <a:lnSpc>
+                <a:spcPts val="2380"/>
+              </a:lnSpc>
+              <a:buNone/>
+            </a:pPr>
+            <a:r>
+              <a:rPr lang="en-US" sz="1400" b="1" dirty="0">
+                <a:solidFill>
+                  <a:srgbClr val="E8EAED"/>
+                </a:solidFill>
+                <a:latin typeface="IBM Plex Mono" pitchFamily="34" charset="0"/>
+                <a:ea typeface="IBM Plex Mono" pitchFamily="34" charset="-122"/>
+                <a:cs typeface="IBM Plex Mono" pitchFamily="34" charset="-120"/>
+              </a:rPr>
+              <a:t>]</a:t>
+            </a:r>
+            <a:endParaRPr lang="en-US" sz="1400" dirty="0"/>
+          </a:p>
+        </p:txBody>
+      </p:sp>
+      <p:sp>
+        <p:nvSpPr>
+          <p:cNvPr id="12" name="Text 10"/>
+          <p:cNvSpPr/>
+          <p:nvPr/>
+        </p:nvSpPr>
+        <p:spPr>
+          <a:xfrm>
+            <a:off x="5916168" y="2743200"/>
+            <a:ext cx="384048" cy="402336"/>
+          </a:xfrm>
+          <a:prstGeom prst="rect">
+            <a:avLst/>
+          </a:prstGeom>
+          <a:noFill/>
+          <a:ln/>
+        </p:spPr>
+        <p:txBody>
+          <a:bodyPr wrap="square" lIns="0" tIns="0" rIns="0" bIns="0" rtlCol="0" anchor="ctr"/>
+          <a:lstStyle/>
+          <a:p>
+            <a:pPr algn="ctr" indent="0" marL="0">
+              <a:buNone/>
+            </a:pPr>
+            <a:r>
+              <a:rPr lang="en-US" sz="2000" b="1" dirty="0">
+                <a:solidFill>
+                  <a:srgbClr val="FF5C00"/>
+                </a:solidFill>
+                <a:latin typeface="IBM Plex Sans KR" pitchFamily="34" charset="0"/>
+                <a:ea typeface="IBM Plex Sans KR" pitchFamily="34" charset="-122"/>
+                <a:cs typeface="IBM Plex Sans KR" pitchFamily="34" charset="-120"/>
+              </a:rPr>
+              <a:t>→</a:t>
+            </a:r>
+            <a:endParaRPr lang="en-US" sz="2000" dirty="0"/>
+          </a:p>
+        </p:txBody>
+      </p:sp>
+      <p:sp>
+        <p:nvSpPr>
+          <p:cNvPr id="13" name="Shape 11"/>
+          <p:cNvSpPr/>
+          <p:nvPr/>
+        </p:nvSpPr>
+        <p:spPr>
+          <a:xfrm>
+            <a:off x="6583680" y="1828800"/>
+            <a:ext cx="2537460" cy="402336"/>
+          </a:xfrm>
+          <a:prstGeom prst="rect">
+            <a:avLst/>
+          </a:prstGeom>
+          <a:solidFill>
+            <a:srgbClr val="1B1D21"/>
+          </a:solidFill>
+          <a:ln/>
+        </p:spPr>
+      </p:sp>
+      <p:sp>
+        <p:nvSpPr>
+          <p:cNvPr id="14" name="Text 12"/>
+          <p:cNvSpPr/>
+          <p:nvPr/>
+        </p:nvSpPr>
+        <p:spPr>
+          <a:xfrm>
+            <a:off x="6711696" y="1828800"/>
+            <a:ext cx="2281428" cy="402336"/>
+          </a:xfrm>
+          <a:prstGeom prst="rect">
+            <a:avLst/>
+          </a:prstGeom>
+          <a:noFill/>
+          <a:ln/>
+        </p:spPr>
+        <p:txBody>
+          <a:bodyPr wrap="square" lIns="0" tIns="0" rIns="0" bIns="0" rtlCol="0" anchor="ctr"/>
+          <a:lstStyle/>
+          <a:p>
+            <a:pPr indent="0" marL="0">
+              <a:buNone/>
+            </a:pPr>
+            <a:r>
+              <a:rPr lang="en-US" sz="1050" b="1" dirty="0">
+                <a:solidFill>
+                  <a:srgbClr val="FFFFFF"/>
+                </a:solidFill>
+                <a:latin typeface="IBM Plex Sans KR" pitchFamily="34" charset="0"/>
+                <a:ea typeface="IBM Plex Sans KR" pitchFamily="34" charset="-122"/>
+                <a:cs typeface="IBM Plex Sans KR" pitchFamily="34" charset="-120"/>
+              </a:rPr>
+              <a:t>name</a:t>
+            </a:r>
+            <a:endParaRPr lang="en-US" sz="1050" dirty="0"/>
+          </a:p>
+        </p:txBody>
+      </p:sp>
+      <p:sp>
+        <p:nvSpPr>
+          <p:cNvPr id="15" name="Shape 13"/>
+          <p:cNvSpPr/>
+          <p:nvPr/>
+        </p:nvSpPr>
+        <p:spPr>
+          <a:xfrm>
+            <a:off x="9121140" y="1828800"/>
+            <a:ext cx="2537460" cy="402336"/>
+          </a:xfrm>
+          <a:prstGeom prst="rect">
+            <a:avLst/>
+          </a:prstGeom>
+          <a:solidFill>
+            <a:srgbClr val="1B1D21"/>
+          </a:solidFill>
+          <a:ln/>
+        </p:spPr>
+      </p:sp>
+      <p:sp>
+        <p:nvSpPr>
+          <p:cNvPr id="16" name="Text 14"/>
+          <p:cNvSpPr/>
+          <p:nvPr/>
+        </p:nvSpPr>
+        <p:spPr>
+          <a:xfrm>
+            <a:off x="9249156" y="1828800"/>
+            <a:ext cx="2281428" cy="402336"/>
+          </a:xfrm>
+          <a:prstGeom prst="rect">
+            <a:avLst/>
+          </a:prstGeom>
+          <a:noFill/>
+          <a:ln/>
+        </p:spPr>
+        <p:txBody>
+          <a:bodyPr wrap="square" lIns="0" tIns="0" rIns="0" bIns="0" rtlCol="0" anchor="ctr"/>
+          <a:lstStyle/>
+          <a:p>
+            <a:pPr indent="0" marL="0">
+              <a:buNone/>
+            </a:pPr>
+            <a:r>
+              <a:rPr lang="en-US" sz="1050" b="1" dirty="0">
+                <a:solidFill>
+                  <a:srgbClr val="FFFFFF"/>
+                </a:solidFill>
+                <a:latin typeface="IBM Plex Sans KR" pitchFamily="34" charset="0"/>
+                <a:ea typeface="IBM Plex Sans KR" pitchFamily="34" charset="-122"/>
+                <a:cs typeface="IBM Plex Sans KR" pitchFamily="34" charset="-120"/>
+              </a:rPr>
+              <a:t>club</a:t>
+            </a:r>
+            <a:endParaRPr lang="en-US" sz="1050" dirty="0"/>
+          </a:p>
+        </p:txBody>
+      </p:sp>
+      <p:sp>
+        <p:nvSpPr>
+          <p:cNvPr id="17" name="Shape 15"/>
+          <p:cNvSpPr/>
+          <p:nvPr/>
+        </p:nvSpPr>
+        <p:spPr>
+          <a:xfrm>
+            <a:off x="6583680" y="2231136"/>
+            <a:ext cx="5074920" cy="502920"/>
+          </a:xfrm>
+          <a:prstGeom prst="rect">
+            <a:avLst/>
+          </a:prstGeom>
+          <a:solidFill>
+            <a:srgbClr val="F1F2F4"/>
+          </a:solidFill>
+          <a:ln w="9525">
+            <a:solidFill>
+              <a:srgbClr val="E0E3E7"/>
+            </a:solidFill>
+            <a:prstDash val="solid"/>
+          </a:ln>
+        </p:spPr>
+      </p:sp>
+      <p:sp>
+        <p:nvSpPr>
+          <p:cNvPr id="18" name="Text 16"/>
+          <p:cNvSpPr/>
+          <p:nvPr/>
+        </p:nvSpPr>
+        <p:spPr>
+          <a:xfrm>
+            <a:off x="6711696" y="2231136"/>
+            <a:ext cx="2281428" cy="502920"/>
+          </a:xfrm>
+          <a:prstGeom prst="rect">
+            <a:avLst/>
+          </a:prstGeom>
+          <a:noFill/>
+          <a:ln/>
+        </p:spPr>
+        <p:txBody>
+          <a:bodyPr wrap="square" lIns="0" tIns="0" rIns="0" bIns="0" rtlCol="0" anchor="ctr"/>
+          <a:lstStyle/>
+          <a:p>
+            <a:pPr indent="0" marL="0">
+              <a:buNone/>
+            </a:pPr>
+            <a:r>
+              <a:rPr lang="en-US" sz="1240" b="1" dirty="0">
+                <a:solidFill>
+                  <a:srgbClr val="1B1D21"/>
+                </a:solidFill>
+                <a:latin typeface="IBM Plex Sans KR" pitchFamily="34" charset="0"/>
+                <a:ea typeface="IBM Plex Sans KR" pitchFamily="34" charset="-122"/>
+                <a:cs typeface="IBM Plex Sans KR" pitchFamily="34" charset="-120"/>
+              </a:rPr>
+              <a:t>민준</a:t>
+            </a:r>
+            <a:endParaRPr lang="en-US" sz="1240" dirty="0"/>
+          </a:p>
+        </p:txBody>
+      </p:sp>
+      <p:sp>
+        <p:nvSpPr>
+          <p:cNvPr id="19" name="Text 17"/>
+          <p:cNvSpPr/>
+          <p:nvPr/>
+        </p:nvSpPr>
+        <p:spPr>
+          <a:xfrm>
+            <a:off x="9249156" y="2231136"/>
+            <a:ext cx="2281428" cy="502920"/>
+          </a:xfrm>
+          <a:prstGeom prst="rect">
+            <a:avLst/>
+          </a:prstGeom>
+          <a:noFill/>
+          <a:ln/>
+        </p:spPr>
+        <p:txBody>
+          <a:bodyPr wrap="square" lIns="0" tIns="0" rIns="0" bIns="0" rtlCol="0" anchor="ctr"/>
+          <a:lstStyle/>
+          <a:p>
+            <a:pPr indent="0" marL="0">
+              <a:buNone/>
+            </a:pPr>
+            <a:r>
+              <a:rPr lang="en-US" sz="1240" dirty="0">
+                <a:solidFill>
+                  <a:srgbClr val="6C7078"/>
+                </a:solidFill>
+                <a:latin typeface="IBM Plex Sans KR" pitchFamily="34" charset="0"/>
+                <a:ea typeface="IBM Plex Sans KR" pitchFamily="34" charset="-122"/>
+                <a:cs typeface="IBM Plex Sans KR" pitchFamily="34" charset="-120"/>
+              </a:rPr>
+              <a:t>밴드</a:t>
+            </a:r>
+            <a:endParaRPr lang="en-US" sz="1240" dirty="0"/>
+          </a:p>
+        </p:txBody>
+      </p:sp>
+      <p:sp>
+        <p:nvSpPr>
+          <p:cNvPr id="20" name="Shape 18"/>
+          <p:cNvSpPr/>
+          <p:nvPr/>
+        </p:nvSpPr>
+        <p:spPr>
+          <a:xfrm>
+            <a:off x="6583680" y="2734056"/>
+            <a:ext cx="5074920" cy="502920"/>
+          </a:xfrm>
+          <a:prstGeom prst="rect">
+            <a:avLst/>
+          </a:prstGeom>
+          <a:solidFill>
+            <a:srgbClr val="FFFFFF"/>
+          </a:solidFill>
+          <a:ln w="9525">
+            <a:solidFill>
+              <a:srgbClr val="E0E3E7"/>
+            </a:solidFill>
+            <a:prstDash val="solid"/>
+          </a:ln>
+        </p:spPr>
+      </p:sp>
+      <p:sp>
+        <p:nvSpPr>
+          <p:cNvPr id="21" name="Text 19"/>
+          <p:cNvSpPr/>
+          <p:nvPr/>
+        </p:nvSpPr>
+        <p:spPr>
+          <a:xfrm>
+            <a:off x="6711696" y="2734056"/>
+            <a:ext cx="2281428" cy="502920"/>
+          </a:xfrm>
+          <a:prstGeom prst="rect">
+            <a:avLst/>
+          </a:prstGeom>
+          <a:noFill/>
+          <a:ln/>
+        </p:spPr>
+        <p:txBody>
+          <a:bodyPr wrap="square" lIns="0" tIns="0" rIns="0" bIns="0" rtlCol="0" anchor="ctr"/>
+          <a:lstStyle/>
+          <a:p>
+            <a:pPr indent="0" marL="0">
+              <a:buNone/>
+            </a:pPr>
+            <a:r>
+              <a:rPr lang="en-US" sz="1240" b="1" dirty="0">
+                <a:solidFill>
+                  <a:srgbClr val="1B1D21"/>
+                </a:solidFill>
+                <a:latin typeface="IBM Plex Sans KR" pitchFamily="34" charset="0"/>
+                <a:ea typeface="IBM Plex Sans KR" pitchFamily="34" charset="-122"/>
+                <a:cs typeface="IBM Plex Sans KR" pitchFamily="34" charset="-120"/>
+              </a:rPr>
+              <a:t>서연</a:t>
+            </a:r>
+            <a:endParaRPr lang="en-US" sz="1240" dirty="0"/>
+          </a:p>
+        </p:txBody>
+      </p:sp>
+      <p:sp>
+        <p:nvSpPr>
+          <p:cNvPr id="22" name="Text 20"/>
+          <p:cNvSpPr/>
+          <p:nvPr/>
+        </p:nvSpPr>
+        <p:spPr>
+          <a:xfrm>
+            <a:off x="9249156" y="2734056"/>
+            <a:ext cx="2281428" cy="502920"/>
+          </a:xfrm>
+          <a:prstGeom prst="rect">
+            <a:avLst/>
+          </a:prstGeom>
+          <a:noFill/>
+          <a:ln/>
+        </p:spPr>
+        <p:txBody>
+          <a:bodyPr wrap="square" lIns="0" tIns="0" rIns="0" bIns="0" rtlCol="0" anchor="ctr"/>
+          <a:lstStyle/>
+          <a:p>
+            <a:pPr indent="0" marL="0">
+              <a:buNone/>
+            </a:pPr>
+            <a:r>
+              <a:rPr lang="en-US" sz="1240" dirty="0">
+                <a:solidFill>
+                  <a:srgbClr val="6C7078"/>
+                </a:solidFill>
+                <a:latin typeface="IBM Plex Sans KR" pitchFamily="34" charset="0"/>
+                <a:ea typeface="IBM Plex Sans KR" pitchFamily="34" charset="-122"/>
+                <a:cs typeface="IBM Plex Sans KR" pitchFamily="34" charset="-120"/>
+              </a:rPr>
+              <a:t>미술</a:t>
+            </a:r>
+            <a:endParaRPr lang="en-US" sz="1240" dirty="0"/>
+          </a:p>
+        </p:txBody>
+      </p:sp>
+      <p:sp>
+        <p:nvSpPr>
+          <p:cNvPr id="23" name="Shape 21"/>
+          <p:cNvSpPr/>
+          <p:nvPr/>
+        </p:nvSpPr>
+        <p:spPr>
+          <a:xfrm>
+            <a:off x="530352" y="4206240"/>
+            <a:ext cx="5349240" cy="1234440"/>
+          </a:xfrm>
+          <a:prstGeom prst="roundRect">
+            <a:avLst>
+              <a:gd name="adj" fmla="val 4074"/>
+            </a:avLst>
+          </a:prstGeom>
+          <a:solidFill>
+            <a:srgbClr val="F1F2F4"/>
+          </a:solidFill>
+          <a:ln w="12700">
+            <a:solidFill>
+              <a:srgbClr val="E0E3E7"/>
+            </a:solidFill>
+            <a:prstDash val="solid"/>
+          </a:ln>
+        </p:spPr>
+      </p:sp>
+      <p:sp>
+        <p:nvSpPr>
+          <p:cNvPr id="24" name="Text 22"/>
+          <p:cNvSpPr/>
+          <p:nvPr/>
+        </p:nvSpPr>
+        <p:spPr>
+          <a:xfrm>
+            <a:off x="713232" y="4370832"/>
+            <a:ext cx="4983480" cy="402336"/>
+          </a:xfrm>
+          <a:prstGeom prst="rect">
+            <a:avLst/>
+          </a:prstGeom>
+          <a:noFill/>
+          <a:ln/>
+        </p:spPr>
+        <p:txBody>
+          <a:bodyPr wrap="square" lIns="0" tIns="0" rIns="0" bIns="0" rtlCol="0" anchor="ctr"/>
+          <a:lstStyle/>
+          <a:p>
+            <a:pPr indent="0" marL="0">
+              <a:buNone/>
+            </a:pPr>
+            <a:r>
+              <a:rPr lang="en-US" sz="1650" b="1" dirty="0">
+                <a:solidFill>
+                  <a:srgbClr val="1B1D21"/>
+                </a:solidFill>
+                <a:latin typeface="IBM Plex Sans KR" pitchFamily="34" charset="0"/>
+                <a:ea typeface="IBM Plex Sans KR" pitchFamily="34" charset="-122"/>
+                <a:cs typeface="IBM Plex Sans KR" pitchFamily="34" charset="-120"/>
+              </a:rPr>
+              <a:t>이름표</a:t>
+            </a:r>
+            <a:endParaRPr lang="en-US" sz="1650" dirty="0"/>
+          </a:p>
+        </p:txBody>
+      </p:sp>
+      <p:sp>
+        <p:nvSpPr>
+          <p:cNvPr id="25" name="Text 23"/>
+          <p:cNvSpPr/>
+          <p:nvPr/>
+        </p:nvSpPr>
+        <p:spPr>
+          <a:xfrm>
+            <a:off x="713232" y="4864608"/>
+            <a:ext cx="4983480" cy="429768"/>
+          </a:xfrm>
+          <a:prstGeom prst="rect">
+            <a:avLst/>
+          </a:prstGeom>
+          <a:noFill/>
+          <a:ln/>
+        </p:spPr>
+        <p:txBody>
+          <a:bodyPr wrap="square" lIns="0" tIns="0" rIns="0" bIns="0" rtlCol="0" anchor="t"/>
+          <a:lstStyle/>
+          <a:p>
+            <a:pPr indent="0" marL="0">
+              <a:lnSpc>
+                <a:spcPts val="1900"/>
+              </a:lnSpc>
+              <a:buNone/>
+            </a:pPr>
+            <a:r>
+              <a:rPr lang="en-US" sz="1240" dirty="0">
+                <a:solidFill>
+                  <a:srgbClr val="6C7078"/>
+                </a:solidFill>
+                <a:latin typeface="IBM Plex Sans KR" pitchFamily="34" charset="0"/>
+                <a:ea typeface="IBM Plex Sans KR" pitchFamily="34" charset="-122"/>
+                <a:cs typeface="IBM Plex Sans KR" pitchFamily="34" charset="-120"/>
+              </a:rPr>
+              <a:t>표의 열 이름이 된다</a:t>
+            </a:r>
+            <a:endParaRPr lang="en-US" sz="1240" dirty="0"/>
+          </a:p>
+        </p:txBody>
+      </p:sp>
+      <p:sp>
+        <p:nvSpPr>
+          <p:cNvPr id="26" name="Shape 24"/>
+          <p:cNvSpPr/>
+          <p:nvPr/>
+        </p:nvSpPr>
+        <p:spPr>
+          <a:xfrm>
+            <a:off x="6309360" y="4206240"/>
+            <a:ext cx="5349240" cy="1234440"/>
+          </a:xfrm>
+          <a:prstGeom prst="roundRect">
+            <a:avLst>
+              <a:gd name="adj" fmla="val 4074"/>
+            </a:avLst>
+          </a:prstGeom>
+          <a:solidFill>
+            <a:srgbClr val="E7F2ED"/>
+          </a:solidFill>
+          <a:ln w="12700">
+            <a:solidFill>
+              <a:srgbClr val="0E7C86"/>
+            </a:solidFill>
+            <a:prstDash val="solid"/>
+          </a:ln>
+        </p:spPr>
+      </p:sp>
+      <p:sp>
+        <p:nvSpPr>
+          <p:cNvPr id="27" name="Text 25"/>
+          <p:cNvSpPr/>
+          <p:nvPr/>
+        </p:nvSpPr>
+        <p:spPr>
+          <a:xfrm>
+            <a:off x="6492240" y="4370832"/>
+            <a:ext cx="4983480" cy="402336"/>
+          </a:xfrm>
+          <a:prstGeom prst="rect">
+            <a:avLst/>
+          </a:prstGeom>
+          <a:noFill/>
+          <a:ln/>
+        </p:spPr>
+        <p:txBody>
+          <a:bodyPr wrap="square" lIns="0" tIns="0" rIns="0" bIns="0" rtlCol="0" anchor="ctr"/>
+          <a:lstStyle/>
+          <a:p>
+            <a:pPr indent="0" marL="0">
+              <a:buNone/>
+            </a:pPr>
+            <a:r>
+              <a:rPr lang="en-US" sz="1650" b="1" dirty="0">
+                <a:solidFill>
+                  <a:srgbClr val="1B1D21"/>
+                </a:solidFill>
+                <a:latin typeface="IBM Plex Sans KR" pitchFamily="34" charset="0"/>
+                <a:ea typeface="IBM Plex Sans KR" pitchFamily="34" charset="-122"/>
+                <a:cs typeface="IBM Plex Sans KR" pitchFamily="34" charset="-120"/>
+              </a:rPr>
+              <a:t>묶음 하나</a:t>
+            </a:r>
+            <a:endParaRPr lang="en-US" sz="1650" dirty="0"/>
+          </a:p>
+        </p:txBody>
+      </p:sp>
+      <p:sp>
+        <p:nvSpPr>
+          <p:cNvPr id="28" name="Text 26"/>
+          <p:cNvSpPr/>
+          <p:nvPr/>
+        </p:nvSpPr>
+        <p:spPr>
+          <a:xfrm>
+            <a:off x="6492240" y="4864608"/>
+            <a:ext cx="4983480" cy="429768"/>
+          </a:xfrm>
+          <a:prstGeom prst="rect">
+            <a:avLst/>
+          </a:prstGeom>
+          <a:noFill/>
+          <a:ln/>
+        </p:spPr>
+        <p:txBody>
+          <a:bodyPr wrap="square" lIns="0" tIns="0" rIns="0" bIns="0" rtlCol="0" anchor="t"/>
+          <a:lstStyle/>
+          <a:p>
+            <a:pPr indent="0" marL="0">
+              <a:lnSpc>
+                <a:spcPts val="1900"/>
+              </a:lnSpc>
+              <a:buNone/>
+            </a:pPr>
+            <a:r>
+              <a:rPr lang="en-US" sz="1240" dirty="0">
+                <a:solidFill>
+                  <a:srgbClr val="34373D"/>
+                </a:solidFill>
+                <a:latin typeface="IBM Plex Sans KR" pitchFamily="34" charset="0"/>
+                <a:ea typeface="IBM Plex Sans KR" pitchFamily="34" charset="-122"/>
+                <a:cs typeface="IBM Plex Sans KR" pitchFamily="34" charset="-120"/>
+              </a:rPr>
+              <a:t>표의 한 행이 된다</a:t>
+            </a:r>
+            <a:endParaRPr lang="en-US" sz="1240" dirty="0"/>
+          </a:p>
+        </p:txBody>
+      </p:sp>
+      <p:sp>
+        <p:nvSpPr>
+          <p:cNvPr id="29" name="Shape 27"/>
+          <p:cNvSpPr/>
+          <p:nvPr/>
+        </p:nvSpPr>
+        <p:spPr>
+          <a:xfrm>
+            <a:off x="530352" y="5669280"/>
+            <a:ext cx="11128248" cy="512064"/>
+          </a:xfrm>
+          <a:prstGeom prst="roundRect">
+            <a:avLst>
+              <a:gd name="adj" fmla="val 39286"/>
+            </a:avLst>
+          </a:prstGeom>
+          <a:solidFill>
+            <a:srgbClr val="EAF5FB"/>
+          </a:solidFill>
+          <a:ln w="12700">
+            <a:solidFill>
+              <a:srgbClr val="3D8DFF"/>
+            </a:solidFill>
+            <a:prstDash val="solid"/>
+          </a:ln>
+        </p:spPr>
+      </p:sp>
+      <p:sp>
+        <p:nvSpPr>
+          <p:cNvPr id="30" name="Text 28"/>
+          <p:cNvSpPr/>
+          <p:nvPr/>
+        </p:nvSpPr>
+        <p:spPr>
+          <a:xfrm>
+            <a:off x="731520" y="5669280"/>
+            <a:ext cx="10725912" cy="512064"/>
+          </a:xfrm>
+          <a:prstGeom prst="rect">
+            <a:avLst/>
+          </a:prstGeom>
+          <a:noFill/>
+          <a:ln/>
+        </p:spPr>
+        <p:txBody>
+          <a:bodyPr wrap="square" lIns="0" tIns="0" rIns="0" bIns="0" rtlCol="0" anchor="ctr"/>
+          <a:lstStyle/>
+          <a:p>
+            <a:pPr algn="ctr" indent="0" marL="0">
+              <a:buNone/>
+            </a:pPr>
+            <a:r>
+              <a:rPr lang="en-US" sz="1350" b="1" dirty="0">
+                <a:solidFill>
+                  <a:srgbClr val="34373D"/>
+                </a:solidFill>
+                <a:latin typeface="IBM Plex Sans KR" pitchFamily="34" charset="0"/>
+                <a:ea typeface="IBM Plex Sans KR" pitchFamily="34" charset="-122"/>
+                <a:cs typeface="IBM Plex Sans KR" pitchFamily="34" charset="-120"/>
+              </a:rPr>
+              <a:t>다음 주에 표를 다루는 도구를 쓴다. 그 표가 오늘 만든 이 모양이다.</a:t>
+            </a:r>
+            <a:endParaRPr lang="en-US" sz="1350" dirty="0"/>
+          </a:p>
+        </p:txBody>
+      </p:sp>
+    </p:spTree>
+  </p:cSld>
+  <p:clrMapOvr>
+    <a:masterClrMapping/>
+  </p:clrMapOvr>
+</p:sld>
+</file>
+
+<file path=ppt/slides/slide15.xml><?xml version="1.0" encoding="utf-8"?>
+<p:sld xmlns:a="http://schemas.openxmlformats.org/drawingml/2006/main" xmlns:r="http://schemas.openxmlformats.org/officeDocument/2006/relationships" xmlns:p="http://schemas.openxmlformats.org/presentationml/2006/main">
+  <p:cSld name="Slide 15">
     <p:bg>
       <p:bgPr>
         <a:solidFill>
@@ -7269,7 +8014,7 @@
                 <a:ea typeface="IBM Plex Sans KR" pitchFamily="34" charset="-122"/>
                 <a:cs typeface="IBM Plex Sans KR" pitchFamily="34" charset="-120"/>
               </a:rPr>
-              <a:t>교과서 03-2 · 22–23쪽</a:t>
+              <a:t>교과서 03-2 · 21–22쪽</a:t>
             </a:r>
             <a:endParaRPr lang="en-US" sz="900" dirty="0"/>
           </a:p>
@@ -7308,7 +8053,7 @@
                 <a:ea typeface="IBM Plex Mono" pitchFamily="34" charset="-122"/>
                 <a:cs typeface="IBM Plex Mono" pitchFamily="34" charset="-120"/>
               </a:rPr>
-              <a:t>14</a:t>
+              <a:t>15</a:t>
             </a:r>
             <a:endParaRPr lang="en-US" sz="900" dirty="0"/>
           </a:p>
@@ -7577,7 +8322,7 @@
                 <a:ea typeface="IBM Plex Sans KR" pitchFamily="34" charset="-122"/>
                 <a:cs typeface="IBM Plex Sans KR" pitchFamily="34" charset="-120"/>
               </a:rPr>
-              <a:t>교과서 03-2 · 2–3쪽</a:t>
+              <a:t>교과서 03-2 · 2쪽</a:t>
             </a:r>
             <a:endParaRPr lang="en-US" sz="900" dirty="0"/>
           </a:p>
@@ -7630,12 +8375,12 @@
         </p:nvSpPr>
         <p:spPr>
           <a:xfrm>
-            <a:off x="530352" y="1920240"/>
-            <a:ext cx="5669280" cy="1691640"/>
+            <a:off x="530352" y="1874520"/>
+            <a:ext cx="5669280" cy="1554480"/>
           </a:xfrm>
           <a:prstGeom prst="roundRect">
             <a:avLst>
-              <a:gd name="adj" fmla="val 2703"/>
+              <a:gd name="adj" fmla="val 2941"/>
             </a:avLst>
           </a:prstGeom>
           <a:solidFill>
@@ -7652,8 +8397,8 @@
         </p:nvSpPr>
         <p:spPr>
           <a:xfrm>
-            <a:off x="768096" y="2103120"/>
-            <a:ext cx="5193792" cy="1325880"/>
+            <a:off x="768096" y="2057400"/>
+            <a:ext cx="5193792" cy="1188720"/>
           </a:xfrm>
           <a:prstGeom prst="rect">
             <a:avLst/>
@@ -7667,12 +8412,12 @@
           <a:p>
             <a:pPr indent="0" marL="0">
               <a:lnSpc>
-                <a:spcPts val="2890"/>
+                <a:spcPts val="2720"/>
               </a:lnSpc>
               <a:buNone/>
             </a:pPr>
             <a:r>
-              <a:rPr lang="en-US" sz="1700" b="1" dirty="0">
+              <a:rPr lang="en-US" sz="1600" b="1" dirty="0">
                 <a:solidFill>
                   <a:srgbClr val="E8EAED"/>
                 </a:solidFill>
@@ -7682,17 +8427,17 @@
               </a:rPr>
               <a:t>korean_score = 82</a:t>
             </a:r>
-            <a:endParaRPr lang="en-US" sz="1700" dirty="0"/>
+            <a:endParaRPr lang="en-US" sz="1600" dirty="0"/>
           </a:p>
           <a:p>
             <a:pPr indent="0" marL="0">
               <a:lnSpc>
-                <a:spcPts val="2890"/>
+                <a:spcPts val="2720"/>
               </a:lnSpc>
               <a:buNone/>
             </a:pPr>
             <a:r>
-              <a:rPr lang="en-US" sz="1700" b="1" dirty="0">
+              <a:rPr lang="en-US" sz="1600" b="1" dirty="0">
                 <a:solidFill>
                   <a:srgbClr val="E8EAED"/>
                 </a:solidFill>
@@ -7702,17 +8447,17 @@
               </a:rPr>
               <a:t>english_score = 91</a:t>
             </a:r>
-            <a:endParaRPr lang="en-US" sz="1700" dirty="0"/>
+            <a:endParaRPr lang="en-US" sz="1600" dirty="0"/>
           </a:p>
           <a:p>
             <a:pPr indent="0" marL="0">
               <a:lnSpc>
-                <a:spcPts val="2890"/>
+                <a:spcPts val="2720"/>
               </a:lnSpc>
               <a:buNone/>
             </a:pPr>
             <a:r>
-              <a:rPr lang="en-US" sz="1700" b="1" dirty="0">
+              <a:rPr lang="en-US" sz="1600" b="1" dirty="0">
                 <a:solidFill>
                   <a:srgbClr val="E8EAED"/>
                 </a:solidFill>
@@ -7722,7 +8467,7 @@
               </a:rPr>
               <a:t>math_score  = 76</a:t>
             </a:r>
-            <a:endParaRPr lang="en-US" sz="1700" dirty="0"/>
+            <a:endParaRPr lang="en-US" sz="1600" dirty="0"/>
           </a:p>
         </p:txBody>
       </p:sp>
@@ -7734,8 +8479,8 @@
         </p:nvSpPr>
         <p:spPr>
           <a:xfrm>
-            <a:off x="6583680" y="1965960"/>
-            <a:ext cx="5074920" cy="1645920"/>
+            <a:off x="530352" y="3611880"/>
+            <a:ext cx="5669280" cy="960120"/>
           </a:xfrm>
           <a:prstGeom prst="rect">
             <a:avLst/>
@@ -7749,12 +8494,12 @@
           <a:p>
             <a:pPr indent="0" marL="0">
               <a:lnSpc>
-                <a:spcPts val="3400"/>
+                <a:spcPts val="3100"/>
               </a:lnSpc>
               <a:buNone/>
             </a:pPr>
             <a:r>
-              <a:rPr lang="en-US" sz="2200" b="1" dirty="0">
+              <a:rPr lang="en-US" sz="2100" b="1" dirty="0">
                 <a:solidFill>
                   <a:srgbClr val="1B1D21"/>
                 </a:solidFill>
@@ -7764,17 +8509,17 @@
               </a:rPr>
               <a:t>우리 반 여덟 명이면?</a:t>
             </a:r>
-            <a:endParaRPr lang="en-US" sz="2200" dirty="0"/>
+            <a:endParaRPr lang="en-US" sz="2100" dirty="0"/>
           </a:p>
           <a:p>
             <a:pPr indent="0" marL="0">
               <a:lnSpc>
-                <a:spcPts val="3400"/>
+                <a:spcPts val="3100"/>
               </a:lnSpc>
               <a:buNone/>
             </a:pPr>
             <a:r>
-              <a:rPr lang="en-US" sz="2200" b="1" dirty="0">
+              <a:rPr lang="en-US" sz="2100" b="1" dirty="0">
                 <a:solidFill>
                   <a:srgbClr val="1B1D21"/>
                 </a:solidFill>
@@ -7782,41 +8527,45 @@
                 <a:ea typeface="IBM Plex Sans KR" pitchFamily="34" charset="-122"/>
                 <a:cs typeface="IBM Plex Sans KR" pitchFamily="34" charset="-120"/>
               </a:rPr>
-              <a:t>반이 세 개면?</a:t>
-            </a:r>
-            <a:endParaRPr lang="en-US" sz="2200" dirty="0"/>
-          </a:p>
-          <a:p>
-            <a:pPr indent="0" marL="0">
-              <a:lnSpc>
-                <a:spcPts val="3400"/>
-              </a:lnSpc>
-              <a:buNone/>
-            </a:pPr>
-            <a:r>
-              <a:rPr lang="en-US" sz="2200" b="1" dirty="0">
-                <a:solidFill>
-                  <a:srgbClr val="1B1D21"/>
-                </a:solidFill>
-                <a:latin typeface="IBM Plex Sans KR" pitchFamily="34" charset="0"/>
-                <a:ea typeface="IBM Plex Sans KR" pitchFamily="34" charset="-122"/>
-                <a:cs typeface="IBM Plex Sans KR" pitchFamily="34" charset="-120"/>
-              </a:rPr>
               <a:t>학년 전체면?</a:t>
             </a:r>
-            <a:endParaRPr lang="en-US" sz="2200" dirty="0"/>
-          </a:p>
-        </p:txBody>
-      </p:sp>
-      <p:sp>
-        <p:nvSpPr>
-          <p:cNvPr id="13" name="Shape 11"/>
-          <p:cNvSpPr/>
-          <p:nvPr/>
-        </p:nvSpPr>
-        <p:spPr>
-          <a:xfrm>
-            <a:off x="530352" y="4023360"/>
+            <a:endParaRPr lang="en-US" sz="2100" dirty="0"/>
+          </a:p>
+        </p:txBody>
+      </p:sp>
+      <p:pic>
+        <p:nvPicPr>
+          <p:cNvPr id="13" name="Image 0" descr="/home/claude/w5/교과서_배포/assets/img/03-2-04-too-many-names.png">    </p:cNvPr>
+          <p:cNvPicPr>
+            <a:picLocks noChangeAspect="1"/>
+          </p:cNvPicPr>
+          <p:nvPr/>
+        </p:nvPicPr>
+        <p:blipFill>
+          <a:blip r:embed="rId1"/>
+          <a:stretch>
+            <a:fillRect/>
+          </a:stretch>
+        </p:blipFill>
+        <p:spPr>
+          <a:xfrm>
+            <a:off x="6585204" y="1874520"/>
+            <a:ext cx="5071872" cy="2852928"/>
+          </a:xfrm>
+          <a:prstGeom prst="rect">
+            <a:avLst/>
+          </a:prstGeom>
+        </p:spPr>
+      </p:pic>
+      <p:sp>
+        <p:nvSpPr>
+          <p:cNvPr id="14" name="Shape 11"/>
+          <p:cNvSpPr/>
+          <p:nvPr/>
+        </p:nvSpPr>
+        <p:spPr>
+          <a:xfrm>
+            <a:off x="530352" y="4892040"/>
             <a:ext cx="11128248" cy="512064"/>
           </a:xfrm>
           <a:prstGeom prst="roundRect">
@@ -7837,13 +8586,13 @@
       </p:sp>
       <p:sp>
         <p:nvSpPr>
-          <p:cNvPr id="14" name="Text 12"/>
-          <p:cNvSpPr/>
-          <p:nvPr/>
-        </p:nvSpPr>
-        <p:spPr>
-          <a:xfrm>
-            <a:off x="731520" y="4023360"/>
+          <p:cNvPr id="15" name="Text 12"/>
+          <p:cNvSpPr/>
+          <p:nvPr/>
+        </p:nvSpPr>
+        <p:spPr>
+          <a:xfrm>
+            <a:off x="731520" y="4892040"/>
             <a:ext cx="10725912" cy="512064"/>
           </a:xfrm>
           <a:prstGeom prst="rect">
@@ -7876,13 +8625,13 @@
       </p:sp>
       <p:sp>
         <p:nvSpPr>
-          <p:cNvPr id="15" name="Text 13"/>
-          <p:cNvSpPr/>
-          <p:nvPr/>
-        </p:nvSpPr>
-        <p:spPr>
-          <a:xfrm>
-            <a:off x="530352" y="4892040"/>
+          <p:cNvPr id="16" name="Text 13"/>
+          <p:cNvSpPr/>
+          <p:nvPr/>
+        </p:nvSpPr>
+        <p:spPr>
+          <a:xfrm>
+            <a:off x="530352" y="5577840"/>
             <a:ext cx="11128248" cy="457200"/>
           </a:xfrm>
           <a:prstGeom prst="rect">
@@ -8176,7 +8925,7 @@
                 <a:ea typeface="IBM Plex Sans KR" pitchFamily="34" charset="-122"/>
                 <a:cs typeface="IBM Plex Sans KR" pitchFamily="34" charset="-120"/>
               </a:rPr>
-              <a:t>교과서 03-2 · 4–5쪽</a:t>
+              <a:t>교과서 03-2 · 3–4쪽</a:t>
             </a:r>
             <a:endParaRPr lang="en-US" sz="900" dirty="0"/>
           </a:p>
@@ -8811,7 +9560,7 @@
                 <a:ea typeface="IBM Plex Sans KR" pitchFamily="34" charset="-122"/>
                 <a:cs typeface="IBM Plex Sans KR" pitchFamily="34" charset="-120"/>
               </a:rPr>
-              <a:t>scores[0] 은 72였다</a:t>
+              <a:t>값을 한 가지만 가져오려면?</a:t>
             </a:r>
             <a:endParaRPr lang="en-US" sz="2700" dirty="0"/>
           </a:p>
@@ -8909,7 +9658,7 @@
                 <a:ea typeface="IBM Plex Sans KR" pitchFamily="34" charset="-122"/>
                 <a:cs typeface="IBM Plex Sans KR" pitchFamily="34" charset="-120"/>
               </a:rPr>
-              <a:t>교과서 03-2 · 6쪽</a:t>
+              <a:t>교과서 03-2 · 5쪽</a:t>
             </a:r>
             <a:endParaRPr lang="en-US" sz="900" dirty="0"/>
           </a:p>
@@ -8962,8 +9711,131 @@
         </p:nvSpPr>
         <p:spPr>
           <a:xfrm>
-            <a:off x="2194560" y="2194560"/>
-            <a:ext cx="1943100" cy="1280160"/>
+            <a:off x="530352" y="1783080"/>
+            <a:ext cx="11128248" cy="1143000"/>
+          </a:xfrm>
+          <a:prstGeom prst="roundRect">
+            <a:avLst>
+              <a:gd name="adj" fmla="val 4000"/>
+            </a:avLst>
+          </a:prstGeom>
+          <a:solidFill>
+            <a:srgbClr val="24272C"/>
+          </a:solidFill>
+          <a:ln/>
+        </p:spPr>
+      </p:sp>
+      <p:sp>
+        <p:nvSpPr>
+          <p:cNvPr id="11" name="Text 9"/>
+          <p:cNvSpPr/>
+          <p:nvPr/>
+        </p:nvSpPr>
+        <p:spPr>
+          <a:xfrm>
+            <a:off x="768096" y="1911096"/>
+            <a:ext cx="10652760" cy="219456"/>
+          </a:xfrm>
+          <a:prstGeom prst="rect">
+            <a:avLst/>
+          </a:prstGeom>
+          <a:noFill/>
+          <a:ln/>
+        </p:spPr>
+        <p:txBody>
+          <a:bodyPr wrap="square" lIns="0" tIns="0" rIns="0" bIns="0" rtlCol="0" anchor="ctr"/>
+          <a:lstStyle/>
+          <a:p>
+            <a:pPr indent="0" marL="0">
+              <a:buNone/>
+            </a:pPr>
+            <a:r>
+              <a:rPr lang="en-US" sz="950" dirty="0">
+                <a:solidFill>
+                  <a:srgbClr val="8A9099"/>
+                </a:solidFill>
+                <a:latin typeface="IBM Plex Mono" pitchFamily="34" charset="0"/>
+                <a:ea typeface="IBM Plex Mono" pitchFamily="34" charset="-122"/>
+                <a:cs typeface="IBM Plex Mono" pitchFamily="34" charset="-120"/>
+              </a:rPr>
+              <a:t>묶어 두었으니 하나만 꺼내 본다</a:t>
+            </a:r>
+            <a:endParaRPr lang="en-US" sz="950" dirty="0"/>
+          </a:p>
+        </p:txBody>
+      </p:sp>
+      <p:sp>
+        <p:nvSpPr>
+          <p:cNvPr id="12" name="Text 10"/>
+          <p:cNvSpPr/>
+          <p:nvPr/>
+        </p:nvSpPr>
+        <p:spPr>
+          <a:xfrm>
+            <a:off x="768096" y="2185416"/>
+            <a:ext cx="10652760" cy="594360"/>
+          </a:xfrm>
+          <a:prstGeom prst="rect">
+            <a:avLst/>
+          </a:prstGeom>
+          <a:noFill/>
+          <a:ln/>
+        </p:spPr>
+        <p:txBody>
+          <a:bodyPr wrap="square" lIns="0" tIns="0" rIns="0" bIns="0" rtlCol="0" anchor="t"/>
+          <a:lstStyle/>
+          <a:p>
+            <a:pPr indent="0" marL="0">
+              <a:lnSpc>
+                <a:spcPts val="3060"/>
+              </a:lnSpc>
+              <a:buNone/>
+            </a:pPr>
+            <a:r>
+              <a:rPr lang="en-US" sz="1800" b="1" dirty="0">
+                <a:solidFill>
+                  <a:srgbClr val="E8EAED"/>
+                </a:solidFill>
+                <a:latin typeface="IBM Plex Mono" pitchFamily="34" charset="0"/>
+                <a:ea typeface="IBM Plex Mono" pitchFamily="34" charset="-122"/>
+                <a:cs typeface="IBM Plex Mono" pitchFamily="34" charset="-120"/>
+              </a:rPr>
+              <a:t>print(scores[0])</a:t>
+            </a:r>
+            <a:endParaRPr lang="en-US" sz="1800" dirty="0"/>
+          </a:p>
+          <a:p>
+            <a:pPr indent="0" marL="0">
+              <a:lnSpc>
+                <a:spcPts val="3060"/>
+              </a:lnSpc>
+              <a:buNone/>
+            </a:pPr>
+            <a:r>
+              <a:rPr lang="en-US" sz="1800" b="1" dirty="0">
+                <a:solidFill>
+                  <a:srgbClr val="7FE0A8"/>
+                </a:solidFill>
+                <a:latin typeface="IBM Plex Mono" pitchFamily="34" charset="0"/>
+                <a:ea typeface="IBM Plex Mono" pitchFamily="34" charset="-122"/>
+                <a:cs typeface="IBM Plex Mono" pitchFamily="34" charset="-120"/>
+              </a:rPr>
+              <a:t>72</a:t>
+            </a:r>
+            <a:endParaRPr lang="en-US" sz="1800" dirty="0"/>
+          </a:p>
+        </p:txBody>
+      </p:sp>
+      <p:sp>
+        <p:nvSpPr>
+          <p:cNvPr id="13" name="Shape 11"/>
+          <p:cNvSpPr/>
+          <p:nvPr/>
+        </p:nvSpPr>
+        <p:spPr>
+          <a:xfrm>
+            <a:off x="2194560" y="3108960"/>
+            <a:ext cx="1943100" cy="1188720"/>
           </a:xfrm>
           <a:prstGeom prst="rect">
             <a:avLst/>
@@ -8981,14 +9853,14 @@
       </p:sp>
       <p:sp>
         <p:nvSpPr>
-          <p:cNvPr id="11" name="Text 9"/>
-          <p:cNvSpPr/>
-          <p:nvPr/>
-        </p:nvSpPr>
-        <p:spPr>
-          <a:xfrm>
-            <a:off x="2194560" y="2194560"/>
-            <a:ext cx="1943100" cy="1280160"/>
+          <p:cNvPr id="14" name="Text 12"/>
+          <p:cNvSpPr/>
+          <p:nvPr/>
+        </p:nvSpPr>
+        <p:spPr>
+          <a:xfrm>
+            <a:off x="2194560" y="3108960"/>
+            <a:ext cx="1943100" cy="1188720"/>
           </a:xfrm>
           <a:prstGeom prst="rect">
             <a:avLst/>
@@ -9020,14 +9892,14 @@
       </p:sp>
       <p:sp>
         <p:nvSpPr>
-          <p:cNvPr id="12" name="Shape 10"/>
-          <p:cNvSpPr/>
-          <p:nvPr/>
-        </p:nvSpPr>
-        <p:spPr>
-          <a:xfrm>
-            <a:off x="4137660" y="2194560"/>
-            <a:ext cx="1943100" cy="1280160"/>
+          <p:cNvPr id="15" name="Shape 13"/>
+          <p:cNvSpPr/>
+          <p:nvPr/>
+        </p:nvSpPr>
+        <p:spPr>
+          <a:xfrm>
+            <a:off x="4137660" y="3108960"/>
+            <a:ext cx="1943100" cy="1188720"/>
           </a:xfrm>
           <a:prstGeom prst="rect">
             <a:avLst/>
@@ -9045,14 +9917,14 @@
       </p:sp>
       <p:sp>
         <p:nvSpPr>
-          <p:cNvPr id="13" name="Text 11"/>
-          <p:cNvSpPr/>
-          <p:nvPr/>
-        </p:nvSpPr>
-        <p:spPr>
-          <a:xfrm>
-            <a:off x="4137660" y="2194560"/>
-            <a:ext cx="1943100" cy="1280160"/>
+          <p:cNvPr id="16" name="Text 14"/>
+          <p:cNvSpPr/>
+          <p:nvPr/>
+        </p:nvSpPr>
+        <p:spPr>
+          <a:xfrm>
+            <a:off x="4137660" y="3108960"/>
+            <a:ext cx="1943100" cy="1188720"/>
           </a:xfrm>
           <a:prstGeom prst="rect">
             <a:avLst/>
@@ -9084,14 +9956,14 @@
       </p:sp>
       <p:sp>
         <p:nvSpPr>
-          <p:cNvPr id="14" name="Shape 12"/>
-          <p:cNvSpPr/>
-          <p:nvPr/>
-        </p:nvSpPr>
-        <p:spPr>
-          <a:xfrm>
-            <a:off x="6080760" y="2194560"/>
-            <a:ext cx="1943100" cy="1280160"/>
+          <p:cNvPr id="17" name="Shape 15"/>
+          <p:cNvSpPr/>
+          <p:nvPr/>
+        </p:nvSpPr>
+        <p:spPr>
+          <a:xfrm>
+            <a:off x="6080760" y="3108960"/>
+            <a:ext cx="1943100" cy="1188720"/>
           </a:xfrm>
           <a:prstGeom prst="rect">
             <a:avLst/>
@@ -9109,14 +9981,14 @@
       </p:sp>
       <p:sp>
         <p:nvSpPr>
-          <p:cNvPr id="15" name="Text 13"/>
-          <p:cNvSpPr/>
-          <p:nvPr/>
-        </p:nvSpPr>
-        <p:spPr>
-          <a:xfrm>
-            <a:off x="6080760" y="2194560"/>
-            <a:ext cx="1943100" cy="1280160"/>
+          <p:cNvPr id="18" name="Text 16"/>
+          <p:cNvSpPr/>
+          <p:nvPr/>
+        </p:nvSpPr>
+        <p:spPr>
+          <a:xfrm>
+            <a:off x="6080760" y="3108960"/>
+            <a:ext cx="1943100" cy="1188720"/>
           </a:xfrm>
           <a:prstGeom prst="rect">
             <a:avLst/>
@@ -9148,14 +10020,14 @@
       </p:sp>
       <p:sp>
         <p:nvSpPr>
-          <p:cNvPr id="16" name="Shape 14"/>
-          <p:cNvSpPr/>
-          <p:nvPr/>
-        </p:nvSpPr>
-        <p:spPr>
-          <a:xfrm>
-            <a:off x="8023860" y="2194560"/>
-            <a:ext cx="1943100" cy="1280160"/>
+          <p:cNvPr id="19" name="Shape 17"/>
+          <p:cNvSpPr/>
+          <p:nvPr/>
+        </p:nvSpPr>
+        <p:spPr>
+          <a:xfrm>
+            <a:off x="8023860" y="3108960"/>
+            <a:ext cx="1943100" cy="1188720"/>
           </a:xfrm>
           <a:prstGeom prst="rect">
             <a:avLst/>
@@ -9173,14 +10045,14 @@
       </p:sp>
       <p:sp>
         <p:nvSpPr>
-          <p:cNvPr id="17" name="Text 15"/>
-          <p:cNvSpPr/>
-          <p:nvPr/>
-        </p:nvSpPr>
-        <p:spPr>
-          <a:xfrm>
-            <a:off x="8023860" y="2194560"/>
-            <a:ext cx="1943100" cy="1280160"/>
+          <p:cNvPr id="20" name="Text 18"/>
+          <p:cNvSpPr/>
+          <p:nvPr/>
+        </p:nvSpPr>
+        <p:spPr>
+          <a:xfrm>
+            <a:off x="8023860" y="3108960"/>
+            <a:ext cx="1943100" cy="1188720"/>
           </a:xfrm>
           <a:prstGeom prst="rect">
             <a:avLst/>
@@ -9212,14 +10084,14 @@
       </p:sp>
       <p:sp>
         <p:nvSpPr>
-          <p:cNvPr id="18" name="Text 16"/>
-          <p:cNvSpPr/>
-          <p:nvPr/>
-        </p:nvSpPr>
-        <p:spPr>
-          <a:xfrm>
-            <a:off x="530352" y="3931920"/>
-            <a:ext cx="11128248" cy="731520"/>
+          <p:cNvPr id="21" name="Text 19"/>
+          <p:cNvSpPr/>
+          <p:nvPr/>
+        </p:nvSpPr>
+        <p:spPr>
+          <a:xfrm>
+            <a:off x="530352" y="4480560"/>
+            <a:ext cx="11128248" cy="640080"/>
           </a:xfrm>
           <a:prstGeom prst="rect">
             <a:avLst/>
@@ -9235,7 +10107,7 @@
               <a:buNone/>
             </a:pPr>
             <a:r>
-              <a:rPr lang="en-US" sz="3200" b="1" dirty="0">
+              <a:rPr lang="en-US" sz="3000" b="1" dirty="0">
                 <a:solidFill>
                   <a:srgbClr val="1B1D21"/>
                 </a:solidFill>
@@ -9245,19 +10117,19 @@
               </a:rPr>
               <a:t>그럼 0 은 무슨 뜻일까?</a:t>
             </a:r>
-            <a:endParaRPr lang="en-US" sz="3200" dirty="0"/>
-          </a:p>
-        </p:txBody>
-      </p:sp>
-      <p:sp>
-        <p:nvSpPr>
-          <p:cNvPr id="19" name="Shape 17"/>
-          <p:cNvSpPr/>
-          <p:nvPr/>
-        </p:nvSpPr>
-        <p:spPr>
-          <a:xfrm>
-            <a:off x="530352" y="5120640"/>
+            <a:endParaRPr lang="en-US" sz="3000" dirty="0"/>
+          </a:p>
+        </p:txBody>
+      </p:sp>
+      <p:sp>
+        <p:nvSpPr>
+          <p:cNvPr id="22" name="Shape 20"/>
+          <p:cNvSpPr/>
+          <p:nvPr/>
+        </p:nvSpPr>
+        <p:spPr>
+          <a:xfrm>
+            <a:off x="530352" y="5257800"/>
             <a:ext cx="11128248" cy="512064"/>
           </a:xfrm>
           <a:prstGeom prst="roundRect">
@@ -9278,13 +10150,13 @@
       </p:sp>
       <p:sp>
         <p:nvSpPr>
-          <p:cNvPr id="20" name="Text 18"/>
-          <p:cNvSpPr/>
-          <p:nvPr/>
-        </p:nvSpPr>
-        <p:spPr>
-          <a:xfrm>
-            <a:off x="731520" y="5120640"/>
+          <p:cNvPr id="23" name="Text 21"/>
+          <p:cNvSpPr/>
+          <p:nvPr/>
+        </p:nvSpPr>
+        <p:spPr>
+          <a:xfrm>
+            <a:off x="731520" y="5257800"/>
             <a:ext cx="10725912" cy="512064"/>
           </a:xfrm>
           <a:prstGeom prst="rect">
@@ -9578,7 +10450,7 @@
                 <a:ea typeface="IBM Plex Sans KR" pitchFamily="34" charset="-122"/>
                 <a:cs typeface="IBM Plex Sans KR" pitchFamily="34" charset="-120"/>
               </a:rPr>
-              <a:t>교과서 03-2 · 7–8쪽</a:t>
+              <a:t>교과서 03-2 · 6–7쪽</a:t>
             </a:r>
             <a:endParaRPr lang="en-US" sz="900" dirty="0"/>
           </a:p>
@@ -9631,8 +10503,8 @@
         </p:nvSpPr>
         <p:spPr>
           <a:xfrm>
-            <a:off x="2194560" y="2011680"/>
-            <a:ext cx="1943100" cy="1280160"/>
+            <a:off x="2194560" y="1691640"/>
+            <a:ext cx="1943100" cy="932688"/>
           </a:xfrm>
           <a:prstGeom prst="rect">
             <a:avLst/>
@@ -9656,8 +10528,8 @@
         </p:nvSpPr>
         <p:spPr>
           <a:xfrm>
-            <a:off x="2194560" y="2011680"/>
-            <a:ext cx="1943100" cy="1280160"/>
+            <a:off x="2194560" y="1691640"/>
+            <a:ext cx="1943100" cy="932688"/>
           </a:xfrm>
           <a:prstGeom prst="rect">
             <a:avLst/>
@@ -9695,7 +10567,7 @@
         </p:nvSpPr>
         <p:spPr>
           <a:xfrm>
-            <a:off x="2194560" y="3364992"/>
+            <a:off x="2194560" y="2697480"/>
             <a:ext cx="1943100" cy="329184"/>
           </a:xfrm>
           <a:prstGeom prst="rect">
@@ -9734,8 +10606,8 @@
         </p:nvSpPr>
         <p:spPr>
           <a:xfrm>
-            <a:off x="4137660" y="2011680"/>
-            <a:ext cx="1943100" cy="1280160"/>
+            <a:off x="4137660" y="1691640"/>
+            <a:ext cx="1943100" cy="932688"/>
           </a:xfrm>
           <a:prstGeom prst="rect">
             <a:avLst/>
@@ -9759,8 +10631,8 @@
         </p:nvSpPr>
         <p:spPr>
           <a:xfrm>
-            <a:off x="4137660" y="2011680"/>
-            <a:ext cx="1943100" cy="1280160"/>
+            <a:off x="4137660" y="1691640"/>
+            <a:ext cx="1943100" cy="932688"/>
           </a:xfrm>
           <a:prstGeom prst="rect">
             <a:avLst/>
@@ -9798,7 +10670,7 @@
         </p:nvSpPr>
         <p:spPr>
           <a:xfrm>
-            <a:off x="4137660" y="3364992"/>
+            <a:off x="4137660" y="2697480"/>
             <a:ext cx="1943100" cy="329184"/>
           </a:xfrm>
           <a:prstGeom prst="rect">
@@ -9837,8 +10709,8 @@
         </p:nvSpPr>
         <p:spPr>
           <a:xfrm>
-            <a:off x="6080760" y="2011680"/>
-            <a:ext cx="1943100" cy="1280160"/>
+            <a:off x="6080760" y="1691640"/>
+            <a:ext cx="1943100" cy="932688"/>
           </a:xfrm>
           <a:prstGeom prst="rect">
             <a:avLst/>
@@ -9862,8 +10734,8 @@
         </p:nvSpPr>
         <p:spPr>
           <a:xfrm>
-            <a:off x="6080760" y="2011680"/>
-            <a:ext cx="1943100" cy="1280160"/>
+            <a:off x="6080760" y="1691640"/>
+            <a:ext cx="1943100" cy="932688"/>
           </a:xfrm>
           <a:prstGeom prst="rect">
             <a:avLst/>
@@ -9901,7 +10773,7 @@
         </p:nvSpPr>
         <p:spPr>
           <a:xfrm>
-            <a:off x="6080760" y="3364992"/>
+            <a:off x="6080760" y="2697480"/>
             <a:ext cx="1943100" cy="329184"/>
           </a:xfrm>
           <a:prstGeom prst="rect">
@@ -9940,8 +10812,8 @@
         </p:nvSpPr>
         <p:spPr>
           <a:xfrm>
-            <a:off x="8023860" y="2011680"/>
-            <a:ext cx="1943100" cy="1280160"/>
+            <a:off x="8023860" y="1691640"/>
+            <a:ext cx="1943100" cy="932688"/>
           </a:xfrm>
           <a:prstGeom prst="rect">
             <a:avLst/>
@@ -9965,8 +10837,8 @@
         </p:nvSpPr>
         <p:spPr>
           <a:xfrm>
-            <a:off x="8023860" y="2011680"/>
-            <a:ext cx="1943100" cy="1280160"/>
+            <a:off x="8023860" y="1691640"/>
+            <a:ext cx="1943100" cy="932688"/>
           </a:xfrm>
           <a:prstGeom prst="rect">
             <a:avLst/>
@@ -10004,7 +10876,7 @@
         </p:nvSpPr>
         <p:spPr>
           <a:xfrm>
-            <a:off x="8023860" y="3364992"/>
+            <a:off x="8023860" y="2697480"/>
             <a:ext cx="1943100" cy="329184"/>
           </a:xfrm>
           <a:prstGeom prst="rect">
@@ -10037,62 +10909,14 @@
       </p:sp>
       <p:sp>
         <p:nvSpPr>
-          <p:cNvPr id="22" name="Shape 20"/>
-          <p:cNvSpPr/>
-          <p:nvPr/>
-        </p:nvSpPr>
-        <p:spPr>
-          <a:xfrm>
-            <a:off x="2194560" y="4343400"/>
-            <a:ext cx="7772400" cy="502920"/>
-          </a:xfrm>
-          <a:prstGeom prst="rect">
-            <a:avLst/>
-          </a:prstGeom>
-          <a:solidFill>
-            <a:srgbClr val="F1F2F4"/>
-          </a:solidFill>
-          <a:ln w="12700">
-            <a:solidFill>
-              <a:srgbClr val="E0E3E7"/>
-            </a:solidFill>
-            <a:prstDash val="solid"/>
-          </a:ln>
-        </p:spPr>
-      </p:sp>
-      <p:sp>
-        <p:nvSpPr>
-          <p:cNvPr id="23" name="Shape 21"/>
-          <p:cNvSpPr/>
-          <p:nvPr/>
-        </p:nvSpPr>
-        <p:spPr>
-          <a:xfrm>
-            <a:off x="2194560" y="4343400"/>
-            <a:ext cx="0" cy="256032"/>
-          </a:xfrm>
-          <a:prstGeom prst="line">
-            <a:avLst/>
-          </a:prstGeom>
-          <a:noFill/>
-          <a:ln w="15875">
-            <a:solidFill>
-              <a:srgbClr val="6C7078"/>
-            </a:solidFill>
-            <a:prstDash val="solid"/>
-          </a:ln>
-        </p:spPr>
-      </p:sp>
-      <p:sp>
-        <p:nvSpPr>
-          <p:cNvPr id="24" name="Text 22"/>
-          <p:cNvSpPr/>
-          <p:nvPr/>
-        </p:nvSpPr>
-        <p:spPr>
-          <a:xfrm>
-            <a:off x="1920240" y="4617720"/>
-            <a:ext cx="548640" cy="237744"/>
+          <p:cNvPr id="22" name="Text 20"/>
+          <p:cNvSpPr/>
+          <p:nvPr/>
+        </p:nvSpPr>
+        <p:spPr>
+          <a:xfrm>
+            <a:off x="530352" y="3090672"/>
+            <a:ext cx="11128248" cy="310896"/>
           </a:xfrm>
           <a:prstGeom prst="rect">
             <a:avLst/>
@@ -10108,386 +10932,7 @@
               <a:buNone/>
             </a:pPr>
             <a:r>
-              <a:rPr lang="en-US" sz="1200" b="1" dirty="0">
-                <a:solidFill>
-                  <a:srgbClr val="FF5C00"/>
-                </a:solidFill>
-                <a:latin typeface="IBM Plex Mono" pitchFamily="34" charset="0"/>
-                <a:ea typeface="IBM Plex Mono" pitchFamily="34" charset="-122"/>
-                <a:cs typeface="IBM Plex Mono" pitchFamily="34" charset="-120"/>
-              </a:rPr>
-              <a:t>0</a:t>
-            </a:r>
-            <a:endParaRPr lang="en-US" sz="1200" dirty="0"/>
-          </a:p>
-        </p:txBody>
-      </p:sp>
-      <p:sp>
-        <p:nvSpPr>
-          <p:cNvPr id="25" name="Shape 23"/>
-          <p:cNvSpPr/>
-          <p:nvPr/>
-        </p:nvSpPr>
-        <p:spPr>
-          <a:xfrm>
-            <a:off x="3166110" y="4343400"/>
-            <a:ext cx="0" cy="146304"/>
-          </a:xfrm>
-          <a:prstGeom prst="line">
-            <a:avLst/>
-          </a:prstGeom>
-          <a:noFill/>
-          <a:ln w="15875">
-            <a:solidFill>
-              <a:srgbClr val="6C7078"/>
-            </a:solidFill>
-            <a:prstDash val="solid"/>
-          </a:ln>
-        </p:spPr>
-      </p:sp>
-      <p:sp>
-        <p:nvSpPr>
-          <p:cNvPr id="26" name="Shape 24"/>
-          <p:cNvSpPr/>
-          <p:nvPr/>
-        </p:nvSpPr>
-        <p:spPr>
-          <a:xfrm>
-            <a:off x="4137660" y="4343400"/>
-            <a:ext cx="0" cy="256032"/>
-          </a:xfrm>
-          <a:prstGeom prst="line">
-            <a:avLst/>
-          </a:prstGeom>
-          <a:noFill/>
-          <a:ln w="15875">
-            <a:solidFill>
-              <a:srgbClr val="6C7078"/>
-            </a:solidFill>
-            <a:prstDash val="solid"/>
-          </a:ln>
-        </p:spPr>
-      </p:sp>
-      <p:sp>
-        <p:nvSpPr>
-          <p:cNvPr id="27" name="Text 25"/>
-          <p:cNvSpPr/>
-          <p:nvPr/>
-        </p:nvSpPr>
-        <p:spPr>
-          <a:xfrm>
-            <a:off x="3863340" y="4617720"/>
-            <a:ext cx="548640" cy="237744"/>
-          </a:xfrm>
-          <a:prstGeom prst="rect">
-            <a:avLst/>
-          </a:prstGeom>
-          <a:noFill/>
-          <a:ln/>
-        </p:spPr>
-        <p:txBody>
-          <a:bodyPr wrap="square" lIns="0" tIns="0" rIns="0" bIns="0" rtlCol="0" anchor="ctr"/>
-          <a:lstStyle/>
-          <a:p>
-            <a:pPr algn="ctr" indent="0" marL="0">
-              <a:buNone/>
-            </a:pPr>
-            <a:r>
-              <a:rPr lang="en-US" sz="1200" dirty="0">
-                <a:solidFill>
-                  <a:srgbClr val="6C7078"/>
-                </a:solidFill>
-                <a:latin typeface="IBM Plex Mono" pitchFamily="34" charset="0"/>
-                <a:ea typeface="IBM Plex Mono" pitchFamily="34" charset="-122"/>
-                <a:cs typeface="IBM Plex Mono" pitchFamily="34" charset="-120"/>
-              </a:rPr>
-              <a:t>1</a:t>
-            </a:r>
-            <a:endParaRPr lang="en-US" sz="1200" dirty="0"/>
-          </a:p>
-        </p:txBody>
-      </p:sp>
-      <p:sp>
-        <p:nvSpPr>
-          <p:cNvPr id="28" name="Shape 26"/>
-          <p:cNvSpPr/>
-          <p:nvPr/>
-        </p:nvSpPr>
-        <p:spPr>
-          <a:xfrm>
-            <a:off x="5109210" y="4343400"/>
-            <a:ext cx="0" cy="146304"/>
-          </a:xfrm>
-          <a:prstGeom prst="line">
-            <a:avLst/>
-          </a:prstGeom>
-          <a:noFill/>
-          <a:ln w="15875">
-            <a:solidFill>
-              <a:srgbClr val="6C7078"/>
-            </a:solidFill>
-            <a:prstDash val="solid"/>
-          </a:ln>
-        </p:spPr>
-      </p:sp>
-      <p:sp>
-        <p:nvSpPr>
-          <p:cNvPr id="29" name="Shape 27"/>
-          <p:cNvSpPr/>
-          <p:nvPr/>
-        </p:nvSpPr>
-        <p:spPr>
-          <a:xfrm>
-            <a:off x="6080760" y="4343400"/>
-            <a:ext cx="0" cy="256032"/>
-          </a:xfrm>
-          <a:prstGeom prst="line">
-            <a:avLst/>
-          </a:prstGeom>
-          <a:noFill/>
-          <a:ln w="15875">
-            <a:solidFill>
-              <a:srgbClr val="6C7078"/>
-            </a:solidFill>
-            <a:prstDash val="solid"/>
-          </a:ln>
-        </p:spPr>
-      </p:sp>
-      <p:sp>
-        <p:nvSpPr>
-          <p:cNvPr id="30" name="Text 28"/>
-          <p:cNvSpPr/>
-          <p:nvPr/>
-        </p:nvSpPr>
-        <p:spPr>
-          <a:xfrm>
-            <a:off x="5806440" y="4617720"/>
-            <a:ext cx="548640" cy="237744"/>
-          </a:xfrm>
-          <a:prstGeom prst="rect">
-            <a:avLst/>
-          </a:prstGeom>
-          <a:noFill/>
-          <a:ln/>
-        </p:spPr>
-        <p:txBody>
-          <a:bodyPr wrap="square" lIns="0" tIns="0" rIns="0" bIns="0" rtlCol="0" anchor="ctr"/>
-          <a:lstStyle/>
-          <a:p>
-            <a:pPr algn="ctr" indent="0" marL="0">
-              <a:buNone/>
-            </a:pPr>
-            <a:r>
-              <a:rPr lang="en-US" sz="1200" dirty="0">
-                <a:solidFill>
-                  <a:srgbClr val="6C7078"/>
-                </a:solidFill>
-                <a:latin typeface="IBM Plex Mono" pitchFamily="34" charset="0"/>
-                <a:ea typeface="IBM Plex Mono" pitchFamily="34" charset="-122"/>
-                <a:cs typeface="IBM Plex Mono" pitchFamily="34" charset="-120"/>
-              </a:rPr>
-              <a:t>2</a:t>
-            </a:r>
-            <a:endParaRPr lang="en-US" sz="1200" dirty="0"/>
-          </a:p>
-        </p:txBody>
-      </p:sp>
-      <p:sp>
-        <p:nvSpPr>
-          <p:cNvPr id="31" name="Shape 29"/>
-          <p:cNvSpPr/>
-          <p:nvPr/>
-        </p:nvSpPr>
-        <p:spPr>
-          <a:xfrm>
-            <a:off x="7052310" y="4343400"/>
-            <a:ext cx="0" cy="146304"/>
-          </a:xfrm>
-          <a:prstGeom prst="line">
-            <a:avLst/>
-          </a:prstGeom>
-          <a:noFill/>
-          <a:ln w="15875">
-            <a:solidFill>
-              <a:srgbClr val="6C7078"/>
-            </a:solidFill>
-            <a:prstDash val="solid"/>
-          </a:ln>
-        </p:spPr>
-      </p:sp>
-      <p:sp>
-        <p:nvSpPr>
-          <p:cNvPr id="32" name="Shape 30"/>
-          <p:cNvSpPr/>
-          <p:nvPr/>
-        </p:nvSpPr>
-        <p:spPr>
-          <a:xfrm>
-            <a:off x="8023860" y="4343400"/>
-            <a:ext cx="0" cy="256032"/>
-          </a:xfrm>
-          <a:prstGeom prst="line">
-            <a:avLst/>
-          </a:prstGeom>
-          <a:noFill/>
-          <a:ln w="15875">
-            <a:solidFill>
-              <a:srgbClr val="6C7078"/>
-            </a:solidFill>
-            <a:prstDash val="solid"/>
-          </a:ln>
-        </p:spPr>
-      </p:sp>
-      <p:sp>
-        <p:nvSpPr>
-          <p:cNvPr id="33" name="Text 31"/>
-          <p:cNvSpPr/>
-          <p:nvPr/>
-        </p:nvSpPr>
-        <p:spPr>
-          <a:xfrm>
-            <a:off x="7749540" y="4617720"/>
-            <a:ext cx="548640" cy="237744"/>
-          </a:xfrm>
-          <a:prstGeom prst="rect">
-            <a:avLst/>
-          </a:prstGeom>
-          <a:noFill/>
-          <a:ln/>
-        </p:spPr>
-        <p:txBody>
-          <a:bodyPr wrap="square" lIns="0" tIns="0" rIns="0" bIns="0" rtlCol="0" anchor="ctr"/>
-          <a:lstStyle/>
-          <a:p>
-            <a:pPr algn="ctr" indent="0" marL="0">
-              <a:buNone/>
-            </a:pPr>
-            <a:r>
-              <a:rPr lang="en-US" sz="1200" dirty="0">
-                <a:solidFill>
-                  <a:srgbClr val="6C7078"/>
-                </a:solidFill>
-                <a:latin typeface="IBM Plex Mono" pitchFamily="34" charset="0"/>
-                <a:ea typeface="IBM Plex Mono" pitchFamily="34" charset="-122"/>
-                <a:cs typeface="IBM Plex Mono" pitchFamily="34" charset="-120"/>
-              </a:rPr>
-              <a:t>3</a:t>
-            </a:r>
-            <a:endParaRPr lang="en-US" sz="1200" dirty="0"/>
-          </a:p>
-        </p:txBody>
-      </p:sp>
-      <p:sp>
-        <p:nvSpPr>
-          <p:cNvPr id="34" name="Shape 32"/>
-          <p:cNvSpPr/>
-          <p:nvPr/>
-        </p:nvSpPr>
-        <p:spPr>
-          <a:xfrm>
-            <a:off x="8995410" y="4343400"/>
-            <a:ext cx="0" cy="146304"/>
-          </a:xfrm>
-          <a:prstGeom prst="line">
-            <a:avLst/>
-          </a:prstGeom>
-          <a:noFill/>
-          <a:ln w="15875">
-            <a:solidFill>
-              <a:srgbClr val="6C7078"/>
-            </a:solidFill>
-            <a:prstDash val="solid"/>
-          </a:ln>
-        </p:spPr>
-      </p:sp>
-      <p:sp>
-        <p:nvSpPr>
-          <p:cNvPr id="35" name="Shape 33"/>
-          <p:cNvSpPr/>
-          <p:nvPr/>
-        </p:nvSpPr>
-        <p:spPr>
-          <a:xfrm>
-            <a:off x="9966960" y="4343400"/>
-            <a:ext cx="0" cy="256032"/>
-          </a:xfrm>
-          <a:prstGeom prst="line">
-            <a:avLst/>
-          </a:prstGeom>
-          <a:noFill/>
-          <a:ln w="15875">
-            <a:solidFill>
-              <a:srgbClr val="6C7078"/>
-            </a:solidFill>
-            <a:prstDash val="solid"/>
-          </a:ln>
-        </p:spPr>
-      </p:sp>
-      <p:sp>
-        <p:nvSpPr>
-          <p:cNvPr id="36" name="Text 34"/>
-          <p:cNvSpPr/>
-          <p:nvPr/>
-        </p:nvSpPr>
-        <p:spPr>
-          <a:xfrm>
-            <a:off x="9692640" y="4617720"/>
-            <a:ext cx="548640" cy="237744"/>
-          </a:xfrm>
-          <a:prstGeom prst="rect">
-            <a:avLst/>
-          </a:prstGeom>
-          <a:noFill/>
-          <a:ln/>
-        </p:spPr>
-        <p:txBody>
-          <a:bodyPr wrap="square" lIns="0" tIns="0" rIns="0" bIns="0" rtlCol="0" anchor="ctr"/>
-          <a:lstStyle/>
-          <a:p>
-            <a:pPr algn="ctr" indent="0" marL="0">
-              <a:buNone/>
-            </a:pPr>
-            <a:r>
-              <a:rPr lang="en-US" sz="1200" dirty="0">
-                <a:solidFill>
-                  <a:srgbClr val="6C7078"/>
-                </a:solidFill>
-                <a:latin typeface="IBM Plex Mono" pitchFamily="34" charset="0"/>
-                <a:ea typeface="IBM Plex Mono" pitchFamily="34" charset="-122"/>
-                <a:cs typeface="IBM Plex Mono" pitchFamily="34" charset="-120"/>
-              </a:rPr>
-              <a:t>4</a:t>
-            </a:r>
-            <a:endParaRPr lang="en-US" sz="1200" dirty="0"/>
-          </a:p>
-        </p:txBody>
-      </p:sp>
-      <p:sp>
-        <p:nvSpPr>
-          <p:cNvPr id="37" name="Text 35"/>
-          <p:cNvSpPr/>
-          <p:nvPr/>
-        </p:nvSpPr>
-        <p:spPr>
-          <a:xfrm>
-            <a:off x="2194560" y="3959352"/>
-            <a:ext cx="7772400" cy="274320"/>
-          </a:xfrm>
-          <a:prstGeom prst="rect">
-            <a:avLst/>
-          </a:prstGeom>
-          <a:noFill/>
-          <a:ln/>
-        </p:spPr>
-        <p:txBody>
-          <a:bodyPr wrap="square" lIns="0" tIns="0" rIns="0" bIns="0" rtlCol="0" anchor="ctr"/>
-          <a:lstStyle/>
-          <a:p>
-            <a:pPr algn="ctr" indent="0" marL="0">
-              <a:buNone/>
-            </a:pPr>
-            <a:r>
-              <a:rPr lang="en-US" sz="1400" b="1" dirty="0">
+              <a:rPr lang="en-US" sz="1600" b="1" dirty="0">
                 <a:solidFill>
                   <a:srgbClr val="FF5C00"/>
                 </a:solidFill>
@@ -10495,78 +10940,36 @@
                 <a:ea typeface="IBM Plex Sans KR" pitchFamily="34" charset="-122"/>
                 <a:cs typeface="IBM Plex Sans KR" pitchFamily="34" charset="-120"/>
               </a:rPr>
-              <a:t>자의 시작점은 1이 아니라 0</a:t>
-            </a:r>
-            <a:endParaRPr lang="en-US" sz="1400" dirty="0"/>
-          </a:p>
-        </p:txBody>
-      </p:sp>
-      <p:sp>
-        <p:nvSpPr>
-          <p:cNvPr id="38" name="Shape 36"/>
-          <p:cNvSpPr/>
-          <p:nvPr/>
-        </p:nvSpPr>
-        <p:spPr>
-          <a:xfrm>
-            <a:off x="530352" y="5349240"/>
-            <a:ext cx="11128248" cy="512064"/>
-          </a:xfrm>
-          <a:prstGeom prst="roundRect">
-            <a:avLst>
-              <a:gd name="adj" fmla="val 39286"/>
-            </a:avLst>
-          </a:prstGeom>
-          <a:solidFill>
-            <a:srgbClr val="FF5C00"/>
-          </a:solidFill>
-          <a:ln w="12700">
-            <a:solidFill>
-              <a:srgbClr val="FF5C00"/>
-            </a:solidFill>
-            <a:prstDash val="solid"/>
-          </a:ln>
-        </p:spPr>
-      </p:sp>
-      <p:sp>
-        <p:nvSpPr>
-          <p:cNvPr id="39" name="Text 37"/>
-          <p:cNvSpPr/>
-          <p:nvPr/>
-        </p:nvSpPr>
-        <p:spPr>
-          <a:xfrm>
-            <a:off x="731520" y="5349240"/>
-            <a:ext cx="10725912" cy="512064"/>
-          </a:xfrm>
-          <a:prstGeom prst="rect">
-            <a:avLst/>
-          </a:prstGeom>
-          <a:noFill/>
-          <a:ln/>
-        </p:spPr>
-        <p:txBody>
-          <a:bodyPr wrap="square" lIns="0" tIns="0" rIns="0" bIns="0" rtlCol="0" anchor="ctr"/>
-          <a:lstStyle/>
-          <a:p>
-            <a:pPr algn="ctr" indent="0" marL="0">
-              <a:buNone/>
-            </a:pPr>
-            <a:r>
-              <a:rPr lang="en-US" sz="1500" b="1" dirty="0">
-                <a:solidFill>
-                  <a:srgbClr val="FFFFFF"/>
-                </a:solidFill>
-                <a:latin typeface="IBM Plex Sans KR" pitchFamily="34" charset="0"/>
-                <a:ea typeface="IBM Plex Sans KR" pitchFamily="34" charset="-122"/>
-                <a:cs typeface="IBM Plex Sans KR" pitchFamily="34" charset="-120"/>
-              </a:rPr>
-              <a:t>맨 앞에서 0칸 떨어진 곳 · 시작점에서 아무 데도 안 갔으면 0</a:t>
-            </a:r>
-            <a:endParaRPr lang="en-US" sz="1500" dirty="0"/>
-          </a:p>
-        </p:txBody>
-      </p:sp>
+              <a:t>자의 시작점은 1이 아니라 0 · 맨 앞에서 0칸 떨어진 곳</a:t>
+            </a:r>
+            <a:endParaRPr lang="en-US" sz="1600" dirty="0"/>
+          </a:p>
+        </p:txBody>
+      </p:sp>
+      <p:pic>
+        <p:nvPicPr>
+          <p:cNvPr id="23" name="Image 0" descr="/home/claude/w5/교과서_배포/assets/img/03-2-01-ruler-zero.png">    </p:cNvPr>
+          <p:cNvPicPr>
+            <a:picLocks noChangeAspect="1"/>
+          </p:cNvPicPr>
+          <p:nvPr/>
+        </p:nvPicPr>
+        <p:blipFill>
+          <a:blip r:embed="rId1"/>
+          <a:stretch>
+            <a:fillRect/>
+          </a:stretch>
+        </p:blipFill>
+        <p:spPr>
+          <a:xfrm>
+            <a:off x="3859276" y="3493008"/>
+            <a:ext cx="4470400" cy="2514600"/>
+          </a:xfrm>
+          <a:prstGeom prst="rect">
+            <a:avLst/>
+          </a:prstGeom>
+        </p:spPr>
+      </p:pic>
     </p:spTree>
   </p:cSld>
   <p:clrMapOvr>
@@ -10830,7 +11233,7 @@
                 <a:ea typeface="IBM Plex Sans KR" pitchFamily="34" charset="-122"/>
                 <a:cs typeface="IBM Plex Sans KR" pitchFamily="34" charset="-120"/>
               </a:rPr>
-              <a:t>교과서 03-2 · 8쪽</a:t>
+              <a:t>교과서 03-2 · 7쪽</a:t>
             </a:r>
             <a:endParaRPr lang="en-US" sz="900" dirty="0"/>
           </a:p>
@@ -11832,7 +12235,7 @@
                 <a:ea typeface="IBM Plex Sans KR" pitchFamily="34" charset="-122"/>
                 <a:cs typeface="IBM Plex Sans KR" pitchFamily="34" charset="-120"/>
               </a:rPr>
-              <a:t>교과서 03-2 · 9–10쪽</a:t>
+              <a:t>교과서 03-2 · 8–9쪽</a:t>
             </a:r>
             <a:endParaRPr lang="en-US" sz="900" dirty="0"/>
           </a:p>
@@ -11879,13 +12282,52 @@
       </p:sp>
       <p:sp>
         <p:nvSpPr>
-          <p:cNvPr id="10" name="Shape 8"/>
-          <p:cNvSpPr/>
-          <p:nvPr/>
-        </p:nvSpPr>
-        <p:spPr>
-          <a:xfrm>
-            <a:off x="530352" y="1874520"/>
+          <p:cNvPr id="10" name="Text 8"/>
+          <p:cNvSpPr/>
+          <p:nvPr/>
+        </p:nvSpPr>
+        <p:spPr>
+          <a:xfrm>
+            <a:off x="530352" y="1664208"/>
+            <a:ext cx="11128248" cy="310896"/>
+          </a:xfrm>
+          <a:prstGeom prst="rect">
+            <a:avLst/>
+          </a:prstGeom>
+          <a:noFill/>
+          <a:ln/>
+        </p:spPr>
+        <p:txBody>
+          <a:bodyPr wrap="square" lIns="0" tIns="0" rIns="0" bIns="0" rtlCol="0" anchor="ctr"/>
+          <a:lstStyle/>
+          <a:p>
+            <a:pPr indent="0" marL="0">
+              <a:buNone/>
+            </a:pPr>
+            <a:r>
+              <a:rPr lang="en-US" sz="1500" b="1" dirty="0">
+                <a:solidFill>
+                  <a:srgbClr val="1B1D21"/>
+                </a:solidFill>
+                <a:latin typeface="IBM Plex Sans KR" pitchFamily="34" charset="0"/>
+                <a:ea typeface="IBM Plex Sans KR" pitchFamily="34" charset="-122"/>
+                <a:cs typeface="IBM Plex Sans KR" pitchFamily="34" charset="-120"/>
+              </a:rPr>
+              <a:t>값은 네 개 · 자리 번호는 0 1 2 3 · 4번 자리는 없다</a:t>
+            </a:r>
+            <a:endParaRPr lang="en-US" sz="1500" dirty="0"/>
+          </a:p>
+        </p:txBody>
+      </p:sp>
+      <p:sp>
+        <p:nvSpPr>
+          <p:cNvPr id="11" name="Shape 9"/>
+          <p:cNvSpPr/>
+          <p:nvPr/>
+        </p:nvSpPr>
+        <p:spPr>
+          <a:xfrm>
+            <a:off x="530352" y="2103120"/>
             <a:ext cx="11128248" cy="822960"/>
           </a:xfrm>
           <a:prstGeom prst="roundRect">
@@ -11901,13 +12343,13 @@
       </p:sp>
       <p:sp>
         <p:nvSpPr>
-          <p:cNvPr id="11" name="Text 9"/>
-          <p:cNvSpPr/>
-          <p:nvPr/>
-        </p:nvSpPr>
-        <p:spPr>
-          <a:xfrm>
-            <a:off x="768096" y="2057400"/>
+          <p:cNvPr id="12" name="Text 10"/>
+          <p:cNvSpPr/>
+          <p:nvPr/>
+        </p:nvSpPr>
+        <p:spPr>
+          <a:xfrm>
+            <a:off x="768096" y="2286000"/>
             <a:ext cx="10652760" cy="457200"/>
           </a:xfrm>
           <a:prstGeom prst="rect">
@@ -11943,18 +12385,18 @@
       </p:sp>
       <p:sp>
         <p:nvSpPr>
-          <p:cNvPr id="12" name="Shape 10"/>
-          <p:cNvSpPr/>
-          <p:nvPr/>
-        </p:nvSpPr>
-        <p:spPr>
-          <a:xfrm>
-            <a:off x="530352" y="2880360"/>
-            <a:ext cx="11128248" cy="1463040"/>
+          <p:cNvPr id="13" name="Shape 11"/>
+          <p:cNvSpPr/>
+          <p:nvPr/>
+        </p:nvSpPr>
+        <p:spPr>
+          <a:xfrm>
+            <a:off x="530352" y="3108960"/>
+            <a:ext cx="11128248" cy="1371600"/>
           </a:xfrm>
           <a:prstGeom prst="roundRect">
             <a:avLst>
-              <a:gd name="adj" fmla="val 3125"/>
+              <a:gd name="adj" fmla="val 3333"/>
             </a:avLst>
           </a:prstGeom>
           <a:solidFill>
@@ -11965,13 +12407,13 @@
       </p:sp>
       <p:sp>
         <p:nvSpPr>
-          <p:cNvPr id="13" name="Text 11"/>
-          <p:cNvSpPr/>
-          <p:nvPr/>
-        </p:nvSpPr>
-        <p:spPr>
-          <a:xfrm>
-            <a:off x="768096" y="3008376"/>
+          <p:cNvPr id="14" name="Text 12"/>
+          <p:cNvSpPr/>
+          <p:nvPr/>
+        </p:nvSpPr>
+        <p:spPr>
+          <a:xfrm>
+            <a:off x="768096" y="3236976"/>
             <a:ext cx="10652760" cy="219456"/>
           </a:xfrm>
           <a:prstGeom prst="rect">
@@ -12004,14 +12446,14 @@
       </p:sp>
       <p:sp>
         <p:nvSpPr>
-          <p:cNvPr id="14" name="Text 12"/>
-          <p:cNvSpPr/>
-          <p:nvPr/>
-        </p:nvSpPr>
-        <p:spPr>
-          <a:xfrm>
-            <a:off x="768096" y="3282696"/>
-            <a:ext cx="10652760" cy="914400"/>
+          <p:cNvPr id="15" name="Text 13"/>
+          <p:cNvSpPr/>
+          <p:nvPr/>
+        </p:nvSpPr>
+        <p:spPr>
+          <a:xfrm>
+            <a:off x="768096" y="3511296"/>
+            <a:ext cx="10652760" cy="822960"/>
           </a:xfrm>
           <a:prstGeom prst="rect">
             <a:avLst/>
@@ -12046,18 +12488,18 @@
       </p:sp>
       <p:sp>
         <p:nvSpPr>
-          <p:cNvPr id="15" name="Shape 13"/>
-          <p:cNvSpPr/>
-          <p:nvPr/>
-        </p:nvSpPr>
-        <p:spPr>
-          <a:xfrm>
-            <a:off x="530352" y="4617720"/>
-            <a:ext cx="5349240" cy="1097280"/>
+          <p:cNvPr id="16" name="Shape 14"/>
+          <p:cNvSpPr/>
+          <p:nvPr/>
+        </p:nvSpPr>
+        <p:spPr>
+          <a:xfrm>
+            <a:off x="530352" y="4754880"/>
+            <a:ext cx="5349240" cy="1143000"/>
           </a:xfrm>
           <a:prstGeom prst="roundRect">
             <a:avLst>
-              <a:gd name="adj" fmla="val 4583"/>
+              <a:gd name="adj" fmla="val 4400"/>
             </a:avLst>
           </a:prstGeom>
           <a:solidFill>
@@ -12073,13 +12515,13 @@
       </p:sp>
       <p:sp>
         <p:nvSpPr>
-          <p:cNvPr id="16" name="Text 14"/>
-          <p:cNvSpPr/>
-          <p:nvPr/>
-        </p:nvSpPr>
-        <p:spPr>
-          <a:xfrm>
-            <a:off x="713232" y="4782312"/>
+          <p:cNvPr id="17" name="Text 15"/>
+          <p:cNvSpPr/>
+          <p:nvPr/>
+        </p:nvSpPr>
+        <p:spPr>
+          <a:xfrm>
+            <a:off x="713232" y="4919472"/>
             <a:ext cx="4983480" cy="402336"/>
           </a:xfrm>
           <a:prstGeom prst="rect">
@@ -12104,7 +12546,7 @@
                 <a:ea typeface="IBM Plex Sans KR" pitchFamily="34" charset="-122"/>
                 <a:cs typeface="IBM Plex Sans KR" pitchFamily="34" charset="-120"/>
               </a:rPr>
-              <a:t>IndexError</a:t>
+              <a:t>index = 자리 번호</a:t>
             </a:r>
             <a:endParaRPr lang="en-US" sz="1650" dirty="0"/>
           </a:p>
@@ -12112,14 +12554,14 @@
       </p:sp>
       <p:sp>
         <p:nvSpPr>
-          <p:cNvPr id="17" name="Text 15"/>
-          <p:cNvSpPr/>
-          <p:nvPr/>
-        </p:nvSpPr>
-        <p:spPr>
-          <a:xfrm>
-            <a:off x="713232" y="5276088"/>
-            <a:ext cx="4983480" cy="292608"/>
+          <p:cNvPr id="18" name="Text 16"/>
+          <p:cNvSpPr/>
+          <p:nvPr/>
+        </p:nvSpPr>
+        <p:spPr>
+          <a:xfrm>
+            <a:off x="713232" y="5413248"/>
+            <a:ext cx="4983480" cy="338328"/>
           </a:xfrm>
           <a:prstGeom prst="rect">
             <a:avLst/>
@@ -12146,7 +12588,7 @@
                 <a:ea typeface="IBM Plex Sans KR" pitchFamily="34" charset="-122"/>
                 <a:cs typeface="IBM Plex Sans KR" pitchFamily="34" charset="-120"/>
               </a:rPr>
-              <a:t>번호에 문제가 있다</a:t>
+              <a:t>IndexError 는 자리 번호가 잘못됐다는 말</a:t>
             </a:r>
             <a:endParaRPr lang="en-US" sz="1240" dirty="0"/>
           </a:p>
@@ -12154,18 +12596,18 @@
       </p:sp>
       <p:sp>
         <p:nvSpPr>
-          <p:cNvPr id="18" name="Shape 16"/>
-          <p:cNvSpPr/>
-          <p:nvPr/>
-        </p:nvSpPr>
-        <p:spPr>
-          <a:xfrm>
-            <a:off x="6309360" y="4617720"/>
-            <a:ext cx="5349240" cy="1097280"/>
+          <p:cNvPr id="19" name="Shape 17"/>
+          <p:cNvSpPr/>
+          <p:nvPr/>
+        </p:nvSpPr>
+        <p:spPr>
+          <a:xfrm>
+            <a:off x="6309360" y="4754880"/>
+            <a:ext cx="5349240" cy="1143000"/>
           </a:xfrm>
           <a:prstGeom prst="roundRect">
             <a:avLst>
-              <a:gd name="adj" fmla="val 4583"/>
+              <a:gd name="adj" fmla="val 4400"/>
             </a:avLst>
           </a:prstGeom>
           <a:solidFill>
@@ -12181,13 +12623,13 @@
       </p:sp>
       <p:sp>
         <p:nvSpPr>
-          <p:cNvPr id="19" name="Text 17"/>
-          <p:cNvSpPr/>
-          <p:nvPr/>
-        </p:nvSpPr>
-        <p:spPr>
-          <a:xfrm>
-            <a:off x="6492240" y="4782312"/>
+          <p:cNvPr id="20" name="Text 18"/>
+          <p:cNvSpPr/>
+          <p:nvPr/>
+        </p:nvSpPr>
+        <p:spPr>
+          <a:xfrm>
+            <a:off x="6492240" y="4919472"/>
             <a:ext cx="4983480" cy="402336"/>
           </a:xfrm>
           <a:prstGeom prst="rect">
@@ -12212,7 +12654,7 @@
                 <a:ea typeface="IBM Plex Sans KR" pitchFamily="34" charset="-122"/>
                 <a:cs typeface="IBM Plex Sans KR" pitchFamily="34" charset="-120"/>
               </a:rPr>
-              <a:t>out of range</a:t>
+              <a:t>range = 범위</a:t>
             </a:r>
             <a:endParaRPr lang="en-US" sz="1650" dirty="0"/>
           </a:p>
@@ -12220,14 +12662,14 @@
       </p:sp>
       <p:sp>
         <p:nvSpPr>
-          <p:cNvPr id="20" name="Text 18"/>
-          <p:cNvSpPr/>
-          <p:nvPr/>
-        </p:nvSpPr>
-        <p:spPr>
-          <a:xfrm>
-            <a:off x="6492240" y="5276088"/>
-            <a:ext cx="4983480" cy="292608"/>
+          <p:cNvPr id="21" name="Text 19"/>
+          <p:cNvSpPr/>
+          <p:nvPr/>
+        </p:nvSpPr>
+        <p:spPr>
+          <a:xfrm>
+            <a:off x="6492240" y="5413248"/>
+            <a:ext cx="4983480" cy="338328"/>
           </a:xfrm>
           <a:prstGeom prst="rect">
             <a:avLst/>
@@ -12254,7 +12696,7 @@
                 <a:ea typeface="IBM Plex Sans KR" pitchFamily="34" charset="-122"/>
                 <a:cs typeface="IBM Plex Sans KR" pitchFamily="34" charset="-120"/>
               </a:rPr>
-              <a:t>범위를 벗어났다</a:t>
+              <a:t>out of range 는 그 범위를 벗어났다는 말</a:t>
             </a:r>
             <a:endParaRPr lang="en-US" sz="1240" dirty="0"/>
           </a:p>
@@ -12523,7 +12965,7 @@
                 <a:ea typeface="IBM Plex Sans KR" pitchFamily="34" charset="-122"/>
                 <a:cs typeface="IBM Plex Sans KR" pitchFamily="34" charset="-120"/>
               </a:rPr>
-              <a:t>교과서 03-2 · 11쪽</a:t>
+              <a:t>교과서 03-2 · 10쪽</a:t>
             </a:r>
             <a:endParaRPr lang="en-US" sz="900" dirty="0"/>
           </a:p>
@@ -13202,7 +13644,7 @@
                 <a:ea typeface="IBM Plex Sans KR" pitchFamily="34" charset="-122"/>
                 <a:cs typeface="IBM Plex Sans KR" pitchFamily="34" charset="-120"/>
               </a:rPr>
-              <a:t>교과서 03-2 · 12–14쪽</a:t>
+              <a:t>교과서 03-2 · 11–13쪽</a:t>
             </a:r>
             <a:endParaRPr lang="en-US" sz="900" dirty="0"/>
           </a:p>

--- a/03/ppt/03-2_여러_값을_묶는_두_가지_방법_v1.pptx
+++ b/03/ppt/03-2_여러_값을_묶는_두_가지_방법_v1.pptx
@@ -4,6 +4,9 @@
   <p:sldMasterIdLst>
     <p:sldMasterId id="2147483648" r:id="rId1"/>
   </p:sldMasterIdLst>
+  <p:notesMasterIdLst>
+    <p:notesMasterId r:id="rId17"/>
+  </p:notesMasterIdLst>
   <p:sldIdLst>
     <p:sldId id="256" r:id="rId2"/>
     <p:sldId id="257" r:id="rId3"/>
@@ -21,11 +24,8 @@
     <p:sldId id="269" r:id="rId15"/>
     <p:sldId id="270" r:id="rId16"/>
   </p:sldIdLst>
-  <p:notesMasterIdLst>
-    <p:notesMasterId r:id="rId17"/>
-  </p:notesMasterIdLst>
-  <p:sldSz cx="12191695" cy="6858000"/>
-  <p:notesSz cx="6858000" cy="12191695"/>
+  <p:sldSz cx="12192000" cy="6858000"/>
+  <p:notesSz cx="6858000" cy="12192000"/>
   <p:defaultTextStyle>
     <a:lvl1pPr marL="0" algn="l" defTabSz="914400" rtl="0" eaLnBrk="1" latinLnBrk="0" hangingPunct="1">
       <a:defRPr sz="1800" kern="1200">
@@ -118,6 +118,11 @@
       </a:defRPr>
     </a:lvl9pPr>
   </p:defaultTextStyle>
+  <p:extLst>
+    <p:ext uri="{EFAFB233-063F-42B5-8137-9DF3F51BA10A}">
+      <p15:sldGuideLst xmlns:p15="http://schemas.microsoft.com/office/powerpoint/2012/main"/>
+    </p:ext>
+  </p:extLst>
 </p:presentation>
 </file>
 
@@ -143,240 +148,16 @@
           <a:chExt cx="0" cy="0"/>
         </a:xfrm>
       </p:grpSpPr>
-      <p:sp>
-        <p:nvSpPr>
-          <p:cNvPr id="2" name="Header Placeholder 1"/>
-          <p:cNvSpPr>
-            <a:spLocks noGrp="1"/>
-          </p:cNvSpPr>
-          <p:nvPr>
-            <p:ph type="hdr" sz="quarter"/>
-          </p:nvPr>
-        </p:nvSpPr>
-        <p:spPr>
-          <a:xfrm>
-            <a:off x="0" y="0"/>
-            <a:ext cx="2971800" cy="458788"/>
-          </a:xfrm>
-          <a:prstGeom prst="rect">
-            <a:avLst/>
-          </a:prstGeom>
-        </p:spPr>
-        <p:txBody>
-          <a:bodyPr vert="horz" lIns="91440" tIns="45720" rIns="91440" bIns="45720" rtlCol="0"/>
-          <a:lstStyle>
-            <a:lvl1pPr algn="l">
-              <a:defRPr sz="1200"/>
-            </a:lvl1pPr>
-          </a:lstStyle>
-          <a:p>
-            <a:endParaRPr lang="en-US"/>
-          </a:p>
-        </p:txBody>
-      </p:sp>
-      <p:sp>
-        <p:nvSpPr>
-          <p:cNvPr id="3" name="Date Placeholder 2"/>
-          <p:cNvSpPr>
-            <a:spLocks noGrp="1"/>
-          </p:cNvSpPr>
-          <p:nvPr>
-            <p:ph type="dt" idx="1"/>
-          </p:nvPr>
-        </p:nvSpPr>
-        <p:spPr>
-          <a:xfrm>
-            <a:off x="3884613" y="0"/>
-            <a:ext cx="2971800" cy="458788"/>
-          </a:xfrm>
-          <a:prstGeom prst="rect">
-            <a:avLst/>
-          </a:prstGeom>
-        </p:spPr>
-        <p:txBody>
-          <a:bodyPr vert="horz" lIns="91440" tIns="45720" rIns="91440" bIns="45720" rtlCol="0"/>
-          <a:lstStyle>
-            <a:lvl1pPr algn="r">
-              <a:defRPr sz="1200"/>
-            </a:lvl1pPr>
-          </a:lstStyle>
-          <a:p>
-            <a:fld id="{5282F153-3F37-0F45-9E97-73ACFA13230C}" type="datetimeFigureOut">
-              <a:rPr lang="en-US"/>
-              <a:t>7/23/19</a:t>
-            </a:fld>
-            <a:endParaRPr lang="en-US"/>
-          </a:p>
-        </p:txBody>
-      </p:sp>
-      <p:sp>
-        <p:nvSpPr>
-          <p:cNvPr id="4" name="Slide Image Placeholder 3"/>
-          <p:cNvSpPr>
-            <a:spLocks noGrp="1" noRot="1" noChangeAspect="1"/>
-          </p:cNvSpPr>
-          <p:nvPr>
-            <p:ph type="sldImg" idx="2"/>
-          </p:nvPr>
-        </p:nvSpPr>
-        <p:spPr>
-          <a:xfrm>
-            <a:off x="685800" y="1143000"/>
-            <a:ext cx="5486400" cy="3086100"/>
-          </a:xfrm>
-          <a:prstGeom prst="rect">
-            <a:avLst/>
-          </a:prstGeom>
-          <a:noFill/>
-          <a:ln w="12700">
-            <a:solidFill>
-              <a:prstClr val="black"/>
-            </a:solidFill>
-          </a:ln>
-        </p:spPr>
-        <p:txBody>
-          <a:bodyPr vert="horz" lIns="91440" tIns="45720" rIns="91440" bIns="45720" rtlCol="0" anchor="ctr"/>
-          <a:lstStyle/>
-          <a:p>
-            <a:endParaRPr lang="en-US"/>
-          </a:p>
-        </p:txBody>
-      </p:sp>
-      <p:sp>
-        <p:nvSpPr>
-          <p:cNvPr id="5" name="Notes Placeholder 4"/>
-          <p:cNvSpPr>
-            <a:spLocks noGrp="1"/>
-          </p:cNvSpPr>
-          <p:nvPr>
-            <p:ph type="body" sz="quarter" idx="3"/>
-          </p:nvPr>
-        </p:nvSpPr>
-        <p:spPr>
-          <a:xfrm>
-            <a:off x="685800" y="4400550"/>
-            <a:ext cx="5486400" cy="3600450"/>
-          </a:xfrm>
-          <a:prstGeom prst="rect">
-            <a:avLst/>
-          </a:prstGeom>
-        </p:spPr>
-        <p:txBody>
-          <a:bodyPr vert="horz" lIns="91440" tIns="45720" rIns="91440" bIns="45720" rtlCol="0"/>
-          <a:lstStyle/>
-          <a:p>
-            <a:pPr lvl="0"/>
-            <a:r>
-              <a:rPr lang="en-US"/>
-              <a:t>Click to edit Master text styles</a:t>
-            </a:r>
-          </a:p>
-          <a:p>
-            <a:pPr lvl="1"/>
-            <a:r>
-              <a:rPr lang="en-US"/>
-              <a:t>Second level</a:t>
-            </a:r>
-          </a:p>
-          <a:p>
-            <a:pPr lvl="2"/>
-            <a:r>
-              <a:rPr lang="en-US"/>
-              <a:t>Third level</a:t>
-            </a:r>
-          </a:p>
-          <a:p>
-            <a:pPr lvl="3"/>
-            <a:r>
-              <a:rPr lang="en-US"/>
-              <a:t>Fourth level</a:t>
-            </a:r>
-          </a:p>
-          <a:p>
-            <a:pPr lvl="4"/>
-            <a:r>
-              <a:rPr lang="en-US"/>
-              <a:t>Fifth level</a:t>
-            </a:r>
-          </a:p>
-        </p:txBody>
-      </p:sp>
-      <p:sp>
-        <p:nvSpPr>
-          <p:cNvPr id="6" name="Footer Placeholder 5"/>
-          <p:cNvSpPr>
-            <a:spLocks noGrp="1"/>
-          </p:cNvSpPr>
-          <p:nvPr>
-            <p:ph type="ftr" sz="quarter" idx="4"/>
-          </p:nvPr>
-        </p:nvSpPr>
-        <p:spPr>
-          <a:xfrm>
-            <a:off x="0" y="8685213"/>
-            <a:ext cx="2971800" cy="458787"/>
-          </a:xfrm>
-          <a:prstGeom prst="rect">
-            <a:avLst/>
-          </a:prstGeom>
-        </p:spPr>
-        <p:txBody>
-          <a:bodyPr vert="horz" lIns="91440" tIns="45720" rIns="91440" bIns="45720" rtlCol="0" anchor="b"/>
-          <a:lstStyle>
-            <a:lvl1pPr algn="l">
-              <a:defRPr sz="1200"/>
-            </a:lvl1pPr>
-          </a:lstStyle>
-          <a:p>
-            <a:endParaRPr lang="en-US"/>
-          </a:p>
-        </p:txBody>
-      </p:sp>
-      <p:sp>
-        <p:nvSpPr>
-          <p:cNvPr id="7" name="Slide Number Placeholder 6"/>
-          <p:cNvSpPr>
-            <a:spLocks noGrp="1"/>
-          </p:cNvSpPr>
-          <p:nvPr>
-            <p:ph type="sldNum" sz="quarter" idx="5"/>
-          </p:nvPr>
-        </p:nvSpPr>
-        <p:spPr>
-          <a:xfrm>
-            <a:off x="3884613" y="8685213"/>
-            <a:ext cx="2971800" cy="458787"/>
-          </a:xfrm>
-          <a:prstGeom prst="rect">
-            <a:avLst/>
-          </a:prstGeom>
-        </p:spPr>
-        <p:txBody>
-          <a:bodyPr vert="horz" lIns="91440" tIns="45720" rIns="91440" bIns="45720" rtlCol="0" anchor="b"/>
-          <a:lstStyle>
-            <a:lvl1pPr algn="r">
-              <a:defRPr sz="1200"/>
-            </a:lvl1pPr>
-          </a:lstStyle>
-          <a:p>
-            <a:fld id="{CE5E9CC1-C706-0F49-92D6-E571CC5EEA8F}" type="slidenum">
-              <a:rPr lang="en-US"/>
-              <a:t>‹#›</a:t>
-            </a:fld>
-            <a:endParaRPr lang="en-US"/>
-          </a:p>
-        </p:txBody>
-      </p:sp>
     </p:spTree>
     <p:extLst>
       <p:ext uri="{BB962C8B-B14F-4D97-AF65-F5344CB8AC3E}">
-        <p14:creationId xmlns:p14="http://schemas.microsoft.com/office/powerpoint/2010/main" val="1024086991"/>
+        <p14:creationId xmlns:p14="http://schemas.microsoft.com/office/powerpoint/2010/main" val="2332966557"/>
       </p:ext>
     </p:extLst>
   </p:cSld>
   <p:clrMap bg1="lt1" tx1="dk1" bg2="lt2" tx2="dk2" accent1="accent1" accent2="accent2" accent3="accent3" accent4="accent4" accent5="accent5" accent6="accent6" hlink="hlink" folHlink="folHlink"/>
   <p:notesStyle>
-    <a:lvl1pPr marL="0" algn="l" defTabSz="914400" rtl="0" eaLnBrk="1" latinLnBrk="0" hangingPunct="1">
+    <a:lvl1pPr marL="0" algn="l" defTabSz="914400" rtl="0" eaLnBrk="1" latinLnBrk="1" hangingPunct="1">
       <a:defRPr sz="1200" kern="1200">
         <a:solidFill>
           <a:schemeClr val="tx1"/>
@@ -386,7 +167,7 @@
         <a:cs typeface="+mn-cs"/>
       </a:defRPr>
     </a:lvl1pPr>
-    <a:lvl2pPr marL="457200" algn="l" defTabSz="914400" rtl="0" eaLnBrk="1" latinLnBrk="0" hangingPunct="1">
+    <a:lvl2pPr marL="457200" algn="l" defTabSz="914400" rtl="0" eaLnBrk="1" latinLnBrk="1" hangingPunct="1">
       <a:defRPr sz="1200" kern="1200">
         <a:solidFill>
           <a:schemeClr val="tx1"/>
@@ -396,7 +177,7 @@
         <a:cs typeface="+mn-cs"/>
       </a:defRPr>
     </a:lvl2pPr>
-    <a:lvl3pPr marL="914400" algn="l" defTabSz="914400" rtl="0" eaLnBrk="1" latinLnBrk="0" hangingPunct="1">
+    <a:lvl3pPr marL="914400" algn="l" defTabSz="914400" rtl="0" eaLnBrk="1" latinLnBrk="1" hangingPunct="1">
       <a:defRPr sz="1200" kern="1200">
         <a:solidFill>
           <a:schemeClr val="tx1"/>
@@ -406,7 +187,7 @@
         <a:cs typeface="+mn-cs"/>
       </a:defRPr>
     </a:lvl3pPr>
-    <a:lvl4pPr marL="1371600" algn="l" defTabSz="914400" rtl="0" eaLnBrk="1" latinLnBrk="0" hangingPunct="1">
+    <a:lvl4pPr marL="1371600" algn="l" defTabSz="914400" rtl="0" eaLnBrk="1" latinLnBrk="1" hangingPunct="1">
       <a:defRPr sz="1200" kern="1200">
         <a:solidFill>
           <a:schemeClr val="tx1"/>
@@ -416,7 +197,7 @@
         <a:cs typeface="+mn-cs"/>
       </a:defRPr>
     </a:lvl4pPr>
-    <a:lvl5pPr marL="1828800" algn="l" defTabSz="914400" rtl="0" eaLnBrk="1" latinLnBrk="0" hangingPunct="1">
+    <a:lvl5pPr marL="1828800" algn="l" defTabSz="914400" rtl="0" eaLnBrk="1" latinLnBrk="1" hangingPunct="1">
       <a:defRPr sz="1200" kern="1200">
         <a:solidFill>
           <a:schemeClr val="tx1"/>
@@ -426,7 +207,7 @@
         <a:cs typeface="+mn-cs"/>
       </a:defRPr>
     </a:lvl5pPr>
-    <a:lvl6pPr marL="2286000" algn="l" defTabSz="914400" rtl="0" eaLnBrk="1" latinLnBrk="0" hangingPunct="1">
+    <a:lvl6pPr marL="2286000" algn="l" defTabSz="914400" rtl="0" eaLnBrk="1" latinLnBrk="1" hangingPunct="1">
       <a:defRPr sz="1200" kern="1200">
         <a:solidFill>
           <a:schemeClr val="tx1"/>
@@ -436,7 +217,7 @@
         <a:cs typeface="+mn-cs"/>
       </a:defRPr>
     </a:lvl6pPr>
-    <a:lvl7pPr marL="2743200" algn="l" defTabSz="914400" rtl="0" eaLnBrk="1" latinLnBrk="0" hangingPunct="1">
+    <a:lvl7pPr marL="2743200" algn="l" defTabSz="914400" rtl="0" eaLnBrk="1" latinLnBrk="1" hangingPunct="1">
       <a:defRPr sz="1200" kern="1200">
         <a:solidFill>
           <a:schemeClr val="tx1"/>
@@ -446,7 +227,7 @@
         <a:cs typeface="+mn-cs"/>
       </a:defRPr>
     </a:lvl7pPr>
-    <a:lvl8pPr marL="3200400" algn="l" defTabSz="914400" rtl="0" eaLnBrk="1" latinLnBrk="0" hangingPunct="1">
+    <a:lvl8pPr marL="3200400" algn="l" defTabSz="914400" rtl="0" eaLnBrk="1" latinLnBrk="1" hangingPunct="1">
       <a:defRPr sz="1200" kern="1200">
         <a:solidFill>
           <a:schemeClr val="tx1"/>
@@ -456,7 +237,7 @@
         <a:cs typeface="+mn-cs"/>
       </a:defRPr>
     </a:lvl8pPr>
-    <a:lvl9pPr marL="3657600" algn="l" defTabSz="914400" rtl="0" eaLnBrk="1" latinLnBrk="0" hangingPunct="1">
+    <a:lvl9pPr marL="3657600" algn="l" defTabSz="914400" rtl="0" eaLnBrk="1" latinLnBrk="1" hangingPunct="1">
       <a:defRPr sz="1200" kern="1200">
         <a:solidFill>
           <a:schemeClr val="tx1"/>
@@ -530,7 +311,6 @@
 ※ 워크시트 두 개가 이 차시의 주 활동이다. 앞이 밀리면 §5(거리)와 §8(경계)을 줄이고 워크시트를 지킨다.
 ※ 워크시트②는 6주차 서비스 계획서에서 다시 쓴다. 반드시 완성해서 저장하게 한다.</a:t>
             </a:r>
-            <a:endParaRPr lang="en-US" dirty="0"/>
           </a:p>
         </p:txBody>
       </p:sp>
@@ -627,7 +407,6 @@
 [진행 메모]
 2분을 넘기지 않는다. 앞 장에서 코드로 이미 봤고, 여기는 그림으로 굳히는 자리다.</a:t>
             </a:r>
-            <a:endParaRPr lang="en-US" dirty="0"/>
           </a:p>
         </p:txBody>
       </p:sp>
@@ -726,7 +505,6 @@
 워크시트로 넘어가기 직전이다. 여기서 판단 기준을 명확하게 주고 넘어가야 워크시트가 굴러간다.
 "같은 종류 여럿" 대 "한 대상의 여러 항목" — 이 두 마디를 칠판에 남겨 둔다.</a:t>
             </a:r>
-            <a:endParaRPr lang="en-US" dirty="0"/>
           </a:p>
         </p:txBody>
       </p:sp>
@@ -827,7 +605,6 @@
 시간이 밀렸으면 여덟 개 중 2·3·4·6번만 하게 한다. list 와 dict 가 두 번씩 나온다.
 빨리 끝낸 학생은 8번의 답을 dict 로도 만들어 보게 한다.</a:t>
             </a:r>
-            <a:endParaRPr lang="en-US" dirty="0"/>
           </a:p>
         </p:txBody>
       </p:sp>
@@ -927,7 +704,6 @@
 이름표를 한글로 적은 학생은 그냥 두고, 대신 영어로도 한 번 바꿔 보게 한다. 틀린 게 아니다.
 6주차 연결을 반드시 말한다. 이 활동이 오늘로 끝나는 게 아니라는 걸 알면 성의가 달라진다.</a:t>
             </a:r>
-            <a:endParaRPr lang="en-US" dirty="0"/>
           </a:p>
         </p:txBody>
       </p:sp>
@@ -1023,7 +799,6 @@
 새 문법을 가르치는 장이 아니다. **4주차로 넘어가는 다리** 다. 학생이 직접 치게 하지 않는다. 보여 주고 넘어간다.
 시간이 밀렸으면 표 그림만 보여 주고 한 문장으로 끝낸다.</a:t>
             </a:r>
-            <a:endParaRPr lang="en-US" dirty="0"/>
           </a:p>
         </p:txBody>
       </p:sp>
@@ -1119,7 +894,6 @@
 3주차에 만든 환경(.venv, 커널)은 4주차에 그대로 쓴다. **03 폴더를 지우지 말라고 반드시 안내한다.**
 워크시트②를 못 끝낸 학생은 다음 시간 전까지 채워 오게 한다. 6주차에 쓸 재료다.</a:t>
             </a:r>
-            <a:endParaRPr lang="en-US" dirty="0"/>
           </a:p>
         </p:txBody>
       </p:sp>
@@ -1216,7 +990,6 @@
 [진행 메모]
 여기서 문법을 먼저 꺼내지 않는다. "왜 묶어야 하는가" 를 학생이 납득한 뒤에 list 를 보여 준다.</a:t>
             </a:r>
-            <a:endParaRPr lang="en-US" dirty="0"/>
           </a:p>
         </p:txBody>
       </p:sp>
@@ -1316,7 +1089,6 @@
 [썰 — 시간이 남을 때만]
 줄을 서면 사람마다 "몇 번째" 가 정해진다. list 도 똑같다. 값을 넣는 순간 자리가 정해지고, 그 자리는 내가 안 바꾸면 안 바뀐다.</a:t>
             </a:r>
-            <a:endParaRPr lang="en-US" dirty="0"/>
           </a:p>
         </p:txBody>
       </p:sp>
@@ -1415,7 +1187,6 @@
 **학생 답을 반드시 먼저 듣는다.** "첫 번째" 라는 답을 틀렸다고 하지 않는다. 지금 지워 버리면 다음 장의 설명이 교정이 아니라 암기가 된다.
 답이 안 나오면 그냥 넘어간다. 침묵을 오래 끌지 않는다.</a:t>
             </a:r>
-            <a:endParaRPr lang="en-US" dirty="0"/>
           </a:p>
         </p:txBody>
       </p:sp>
@@ -1516,7 +1287,6 @@
 [썰 — 시간이 남을 때만]
 건물 층수도 나라마다 다르다. 한국은 1층부터 세고, 유럽 여러 나라는 지상층을 0층이라 부르고 그 위가 1층이다. 0층은 "안 올라갔다" 는 뜻이다. 프로그래밍의 0도 그 감각에 가깝다.</a:t>
             </a:r>
-            <a:endParaRPr lang="en-US" dirty="0"/>
           </a:p>
         </p:txBody>
       </p:sp>
@@ -1614,7 +1384,6 @@
 [진행 메모]
 "개수보다 하나 작다" 를 규칙으로 외우게 하지 않는다. 거리로 읽으면 자동으로 나오는 결과라는 걸 한 번 더 짚는다.</a:t>
             </a:r>
-            <a:endParaRPr lang="en-US" dirty="0"/>
           </a:p>
         </p:txBody>
       </p:sp>
@@ -1714,7 +1483,6 @@
 학생 화면마다 오류 문장 길이가 다르다. 마지막 줄을 손가락으로 짚어 준다.
 교과서 10쪽에 같은 화면이 있다. 거기 표시된 두 부분을 같이 본다.</a:t>
             </a:r>
-            <a:endParaRPr lang="en-US" dirty="0"/>
           </a:p>
         </p:txBody>
       </p:sp>
@@ -1809,7 +1577,6 @@
 3-1과 3-2를 잇는 장이다. 두 차시가 따로 노는 게 아니라는 걸 여기서 한 번 묶어 준다.
 시간이 밀리면 이 장은 한 문장으로 줄인다. "지난 시간 60점 경계랑 같은 이야기입니다."</a:t>
             </a:r>
-            <a:endParaRPr lang="en-US" dirty="0"/>
           </a:p>
         </p:txBody>
       </p:sp>
@@ -1912,7 +1679,6 @@
 콜론을 빠뜨리는 실수가 가장 많다. 오류가 나면 콜론부터 보게 한다.
 따옴표 안의 이름표와 밖의 변수 이름을 헷갈리는 학생이 있다. student 는 따옴표 없이, "name" 은 따옴표 안에.</a:t>
             </a:r>
-            <a:endParaRPr lang="en-US" dirty="0"/>
           </a:p>
         </p:txBody>
       </p:sp>
@@ -1985,6 +1751,11 @@
 <file path=ppt/slideMasters/slideMaster1.xml><?xml version="1.0" encoding="utf-8"?>
 <p:sldMaster xmlns:a="http://schemas.openxmlformats.org/drawingml/2006/main" xmlns:r="http://schemas.openxmlformats.org/officeDocument/2006/relationships" xmlns:p="http://schemas.openxmlformats.org/presentationml/2006/main">
   <p:cSld>
+    <p:bg>
+      <p:bgRef idx="1001">
+        <a:schemeClr val="bg1"/>
+      </p:bgRef>
+    </p:bg>
     <p:spTree>
       <p:nvGrpSpPr>
         <p:cNvPr id="1" name=""/>
@@ -2267,6 +2038,7 @@
         <a:solidFill>
           <a:srgbClr val="1B1D21"/>
         </a:solidFill>
+        <a:effectLst/>
       </p:bgPr>
     </p:bg>
     <p:spTree>
@@ -2302,6 +2074,13 @@
           </a:solidFill>
           <a:ln/>
         </p:spPr>
+        <p:txBody>
+          <a:bodyPr/>
+          <a:lstStyle/>
+          <a:p>
+            <a:endParaRPr lang="ko-KR" altLang="en-US"/>
+          </a:p>
+        </p:txBody>
       </p:sp>
       <p:sp>
         <p:nvSpPr>
@@ -2324,11 +2103,11 @@
           <a:bodyPr wrap="square" lIns="0" tIns="0" rIns="0" bIns="0" rtlCol="0" anchor="ctr"/>
           <a:lstStyle/>
           <a:p>
-            <a:pPr indent="0" marL="0">
-              <a:buNone/>
-            </a:pPr>
-            <a:r>
-              <a:rPr lang="en-US" sz="1200" b="1" spc="100" kern="0" dirty="0">
+            <a:pPr marL="0" indent="0">
+              <a:buNone/>
+            </a:pPr>
+            <a:r>
+              <a:rPr lang="en-US" sz="1200" b="1" kern="0" spc="100" dirty="0">
                 <a:solidFill>
                   <a:srgbClr val="6C7078"/>
                 </a:solidFill>
@@ -2363,7 +2142,7 @@
           <a:bodyPr wrap="square" lIns="0" tIns="0" rIns="0" bIns="0" rtlCol="0" anchor="ctr"/>
           <a:lstStyle/>
           <a:p>
-            <a:pPr indent="0" marL="0">
+            <a:pPr marL="0" indent="0">
               <a:buNone/>
             </a:pPr>
             <a:r>
@@ -2380,7 +2159,7 @@
             <a:endParaRPr lang="en-US" sz="4200" dirty="0"/>
           </a:p>
           <a:p>
-            <a:pPr indent="0" marL="0">
+            <a:pPr marL="0" indent="0">
               <a:buNone/>
             </a:pPr>
             <a:r>
@@ -2419,7 +2198,7 @@
           <a:bodyPr wrap="square" lIns="0" tIns="0" rIns="0" bIns="0" rtlCol="0" anchor="ctr"/>
           <a:lstStyle/>
           <a:p>
-            <a:pPr indent="0" marL="0">
+            <a:pPr marL="0" indent="0">
               <a:lnSpc>
                 <a:spcPts val="3200"/>
               </a:lnSpc>
@@ -2439,7 +2218,7 @@
             <a:endParaRPr lang="en-US" sz="1900" dirty="0"/>
           </a:p>
           <a:p>
-            <a:pPr indent="0" marL="0">
+            <a:pPr marL="0" indent="0">
               <a:lnSpc>
                 <a:spcPts val="3200"/>
               </a:lnSpc>
@@ -2481,7 +2260,7 @@
           <a:bodyPr wrap="square" lIns="0" tIns="0" rIns="0" bIns="0" rtlCol="0" anchor="ctr"/>
           <a:lstStyle/>
           <a:p>
-            <a:pPr indent="0" marL="0">
+            <a:pPr marL="0" indent="0">
               <a:buNone/>
             </a:pPr>
             <a:r>
@@ -2520,7 +2299,7 @@
           <a:bodyPr wrap="square" lIns="0" tIns="0" rIns="0" bIns="0" rtlCol="0" anchor="ctr"/>
           <a:lstStyle/>
           <a:p>
-            <a:pPr algn="r" indent="0" marL="0">
+            <a:pPr marL="0" indent="0" algn="r">
               <a:buNone/>
             </a:pPr>
             <a:r>
@@ -2554,6 +2333,7 @@
         <a:solidFill>
           <a:srgbClr val="FFFFFF"/>
         </a:solidFill>
+        <a:effectLst/>
       </p:bgPr>
     </p:bg>
     <p:spTree>
@@ -2591,7 +2371,7 @@
           <a:bodyPr wrap="square" lIns="0" tIns="0" rIns="0" bIns="0" rtlCol="0" anchor="ctr"/>
           <a:lstStyle/>
           <a:p>
-            <a:pPr indent="0" marL="0">
+            <a:pPr marL="0" indent="0">
               <a:buNone/>
             </a:pPr>
             <a:r>
@@ -2630,6 +2410,13 @@
           </a:solidFill>
           <a:ln/>
         </p:spPr>
+        <p:txBody>
+          <a:bodyPr/>
+          <a:lstStyle/>
+          <a:p>
+            <a:endParaRPr lang="ko-KR" altLang="en-US"/>
+          </a:p>
+        </p:txBody>
       </p:sp>
       <p:sp>
         <p:nvSpPr>
@@ -2652,7 +2439,7 @@
           <a:bodyPr wrap="square" lIns="0" tIns="0" rIns="0" bIns="0" rtlCol="0" anchor="ctr"/>
           <a:lstStyle/>
           <a:p>
-            <a:pPr algn="ctr" indent="0" marL="0">
+            <a:pPr marL="0" indent="0" algn="ctr">
               <a:buNone/>
             </a:pPr>
             <a:r>
@@ -2691,7 +2478,7 @@
           <a:bodyPr wrap="square" lIns="0" tIns="0" rIns="0" bIns="0" rtlCol="0" anchor="ctr"/>
           <a:lstStyle/>
           <a:p>
-            <a:pPr indent="0" marL="0">
+            <a:pPr marL="0" indent="0">
               <a:buNone/>
             </a:pPr>
             <a:r>
@@ -2728,6 +2515,13 @@
           </a:solidFill>
           <a:ln/>
         </p:spPr>
+        <p:txBody>
+          <a:bodyPr/>
+          <a:lstStyle/>
+          <a:p>
+            <a:endParaRPr lang="ko-KR" altLang="en-US"/>
+          </a:p>
+        </p:txBody>
       </p:sp>
       <p:sp>
         <p:nvSpPr>
@@ -2750,7 +2544,7 @@
           <a:bodyPr wrap="square" lIns="0" tIns="0" rIns="0" bIns="0" rtlCol="0" anchor="ctr"/>
           <a:lstStyle/>
           <a:p>
-            <a:pPr indent="0" marL="0">
+            <a:pPr marL="0" indent="0">
               <a:buNone/>
             </a:pPr>
             <a:r>
@@ -2789,7 +2583,7 @@
           <a:bodyPr wrap="square" lIns="0" tIns="0" rIns="0" bIns="0" rtlCol="0" anchor="ctr"/>
           <a:lstStyle/>
           <a:p>
-            <a:pPr algn="r" indent="0" marL="0">
+            <a:pPr marL="0" indent="0" algn="r">
               <a:buNone/>
             </a:pPr>
             <a:r>
@@ -2809,14 +2603,14 @@
       </p:sp>
       <p:pic>
         <p:nvPicPr>
-          <p:cNvPr id="9" name="Image 0" descr="/home/claude/w5/교과서_배포/assets/img/03-2-06-dict-labels.png">    </p:cNvPr>
+          <p:cNvPr id="9" name="Image 0" descr="/home/claude/w5/교과서_배포/assets/img/03-2-06-dict-labels.png"/>
           <p:cNvPicPr>
             <a:picLocks noChangeAspect="1"/>
           </p:cNvPicPr>
           <p:nvPr/>
         </p:nvPicPr>
         <p:blipFill>
-          <a:blip r:embed="rId1"/>
+          <a:blip r:embed="rId3"/>
           <a:stretch>
             <a:fillRect/>
           </a:stretch>
@@ -2857,6 +2651,13 @@
             <a:prstDash val="solid"/>
           </a:ln>
         </p:spPr>
+        <p:txBody>
+          <a:bodyPr/>
+          <a:lstStyle/>
+          <a:p>
+            <a:endParaRPr lang="ko-KR" altLang="en-US"/>
+          </a:p>
+        </p:txBody>
       </p:sp>
       <p:sp>
         <p:nvSpPr>
@@ -2879,11 +2680,11 @@
           <a:bodyPr wrap="square" lIns="0" tIns="0" rIns="0" bIns="0" rtlCol="0" anchor="ctr"/>
           <a:lstStyle/>
           <a:p>
-            <a:pPr indent="0" marL="0">
-              <a:buNone/>
-            </a:pPr>
-            <a:r>
-              <a:rPr lang="en-US" sz="1050" b="1" spc="60" kern="0" dirty="0">
+            <a:pPr marL="0" indent="0">
+              <a:buNone/>
+            </a:pPr>
+            <a:r>
+              <a:rPr lang="en-US" sz="1050" b="1" kern="0" spc="60" dirty="0">
                 <a:solidFill>
                   <a:srgbClr val="FF5C00"/>
                 </a:solidFill>
@@ -2918,7 +2719,7 @@
           <a:bodyPr wrap="square" lIns="0" tIns="0" rIns="0" bIns="0" rtlCol="0" anchor="ctr"/>
           <a:lstStyle/>
           <a:p>
-            <a:pPr indent="0" marL="0">
+            <a:pPr marL="0" indent="0">
               <a:buNone/>
             </a:pPr>
             <a:r>
@@ -2957,7 +2758,7 @@
           <a:bodyPr wrap="square" lIns="0" tIns="0" rIns="0" bIns="0" rtlCol="0" anchor="t"/>
           <a:lstStyle/>
           <a:p>
-            <a:pPr indent="0" marL="0">
+            <a:pPr marL="0" indent="0">
               <a:lnSpc>
                 <a:spcPts val="1900"/>
               </a:lnSpc>
@@ -3004,6 +2805,13 @@
             <a:prstDash val="solid"/>
           </a:ln>
         </p:spPr>
+        <p:txBody>
+          <a:bodyPr/>
+          <a:lstStyle/>
+          <a:p>
+            <a:endParaRPr lang="ko-KR" altLang="en-US"/>
+          </a:p>
+        </p:txBody>
       </p:sp>
       <p:sp>
         <p:nvSpPr>
@@ -3026,11 +2834,11 @@
           <a:bodyPr wrap="square" lIns="0" tIns="0" rIns="0" bIns="0" rtlCol="0" anchor="ctr"/>
           <a:lstStyle/>
           <a:p>
-            <a:pPr indent="0" marL="0">
-              <a:buNone/>
-            </a:pPr>
-            <a:r>
-              <a:rPr lang="en-US" sz="1050" b="1" spc="60" kern="0" dirty="0">
+            <a:pPr marL="0" indent="0">
+              <a:buNone/>
+            </a:pPr>
+            <a:r>
+              <a:rPr lang="en-US" sz="1050" b="1" kern="0" spc="60" dirty="0">
                 <a:solidFill>
                   <a:srgbClr val="0E7C86"/>
                 </a:solidFill>
@@ -3065,7 +2873,7 @@
           <a:bodyPr wrap="square" lIns="0" tIns="0" rIns="0" bIns="0" rtlCol="0" anchor="ctr"/>
           <a:lstStyle/>
           <a:p>
-            <a:pPr indent="0" marL="0">
+            <a:pPr marL="0" indent="0">
               <a:buNone/>
             </a:pPr>
             <a:r>
@@ -3104,7 +2912,7 @@
           <a:bodyPr wrap="square" lIns="0" tIns="0" rIns="0" bIns="0" rtlCol="0" anchor="t"/>
           <a:lstStyle/>
           <a:p>
-            <a:pPr indent="0" marL="0">
+            <a:pPr marL="0" indent="0">
               <a:lnSpc>
                 <a:spcPts val="1900"/>
               </a:lnSpc>
@@ -3124,7 +2932,7 @@
             <a:endParaRPr lang="en-US" sz="1300" dirty="0"/>
           </a:p>
           <a:p>
-            <a:pPr indent="0" marL="0">
+            <a:pPr marL="0" indent="0">
               <a:lnSpc>
                 <a:spcPts val="1900"/>
               </a:lnSpc>
@@ -3166,7 +2974,7 @@
           <a:bodyPr wrap="square" lIns="0" tIns="0" rIns="0" bIns="0" rtlCol="0" anchor="ctr"/>
           <a:lstStyle/>
           <a:p>
-            <a:pPr algn="ctr" indent="0" marL="0">
+            <a:pPr marL="0" indent="0" algn="ctr">
               <a:buNone/>
             </a:pPr>
             <a:r>
@@ -3200,6 +3008,7 @@
         <a:solidFill>
           <a:srgbClr val="FFFFFF"/>
         </a:solidFill>
+        <a:effectLst/>
       </p:bgPr>
     </p:bg>
     <p:spTree>
@@ -3237,7 +3046,7 @@
           <a:bodyPr wrap="square" lIns="0" tIns="0" rIns="0" bIns="0" rtlCol="0" anchor="ctr"/>
           <a:lstStyle/>
           <a:p>
-            <a:pPr indent="0" marL="0">
+            <a:pPr marL="0" indent="0">
               <a:buNone/>
             </a:pPr>
             <a:r>
@@ -3276,6 +3085,13 @@
           </a:solidFill>
           <a:ln/>
         </p:spPr>
+        <p:txBody>
+          <a:bodyPr/>
+          <a:lstStyle/>
+          <a:p>
+            <a:endParaRPr lang="ko-KR" altLang="en-US"/>
+          </a:p>
+        </p:txBody>
       </p:sp>
       <p:sp>
         <p:nvSpPr>
@@ -3298,7 +3114,7 @@
           <a:bodyPr wrap="square" lIns="0" tIns="0" rIns="0" bIns="0" rtlCol="0" anchor="ctr"/>
           <a:lstStyle/>
           <a:p>
-            <a:pPr algn="ctr" indent="0" marL="0">
+            <a:pPr marL="0" indent="0" algn="ctr">
               <a:buNone/>
             </a:pPr>
             <a:r>
@@ -3337,7 +3153,7 @@
           <a:bodyPr wrap="square" lIns="0" tIns="0" rIns="0" bIns="0" rtlCol="0" anchor="ctr"/>
           <a:lstStyle/>
           <a:p>
-            <a:pPr indent="0" marL="0">
+            <a:pPr marL="0" indent="0">
               <a:buNone/>
             </a:pPr>
             <a:r>
@@ -3374,6 +3190,13 @@
           </a:solidFill>
           <a:ln/>
         </p:spPr>
+        <p:txBody>
+          <a:bodyPr/>
+          <a:lstStyle/>
+          <a:p>
+            <a:endParaRPr lang="ko-KR" altLang="en-US"/>
+          </a:p>
+        </p:txBody>
       </p:sp>
       <p:sp>
         <p:nvSpPr>
@@ -3396,7 +3219,7 @@
           <a:bodyPr wrap="square" lIns="0" tIns="0" rIns="0" bIns="0" rtlCol="0" anchor="ctr"/>
           <a:lstStyle/>
           <a:p>
-            <a:pPr algn="r" indent="0" marL="0">
+            <a:pPr marL="0" indent="0" algn="r">
               <a:buNone/>
             </a:pPr>
             <a:r>
@@ -3435,7 +3258,7 @@
           <a:bodyPr wrap="square" lIns="0" tIns="0" rIns="0" bIns="0" rtlCol="0" anchor="ctr"/>
           <a:lstStyle/>
           <a:p>
-            <a:pPr indent="0" marL="0">
+            <a:pPr marL="0" indent="0">
               <a:buNone/>
             </a:pPr>
             <a:r>
@@ -3474,7 +3297,7 @@
           <a:bodyPr wrap="square" lIns="0" tIns="0" rIns="0" bIns="0" rtlCol="0" anchor="ctr"/>
           <a:lstStyle/>
           <a:p>
-            <a:pPr algn="r" indent="0" marL="0">
+            <a:pPr marL="0" indent="0" algn="r">
               <a:buNone/>
             </a:pPr>
             <a:r>
@@ -3518,6 +3341,13 @@
             <a:prstDash val="solid"/>
           </a:ln>
         </p:spPr>
+        <p:txBody>
+          <a:bodyPr/>
+          <a:lstStyle/>
+          <a:p>
+            <a:endParaRPr lang="ko-KR" altLang="en-US"/>
+          </a:p>
+        </p:txBody>
       </p:sp>
       <p:sp>
         <p:nvSpPr>
@@ -3540,7 +3370,7 @@
           <a:bodyPr wrap="square" lIns="0" tIns="0" rIns="0" bIns="0" rtlCol="0" anchor="ctr"/>
           <a:lstStyle/>
           <a:p>
-            <a:pPr indent="0" marL="0">
+            <a:pPr marL="0" indent="0">
               <a:buNone/>
             </a:pPr>
             <a:r>
@@ -3579,7 +3409,7 @@
           <a:bodyPr wrap="square" lIns="0" tIns="0" rIns="0" bIns="0" rtlCol="0" anchor="ctr"/>
           <a:lstStyle/>
           <a:p>
-            <a:pPr indent="0" marL="0">
+            <a:pPr marL="0" indent="0">
               <a:buNone/>
             </a:pPr>
             <a:r>
@@ -3618,7 +3448,7 @@
           <a:bodyPr wrap="square" lIns="0" tIns="0" rIns="0" bIns="0" rtlCol="0" anchor="t"/>
           <a:lstStyle/>
           <a:p>
-            <a:pPr indent="0" marL="0">
+            <a:pPr marL="0" indent="0">
               <a:lnSpc>
                 <a:spcPts val="1900"/>
               </a:lnSpc>
@@ -3638,7 +3468,7 @@
             <a:endParaRPr lang="en-US" sz="1240" dirty="0"/>
           </a:p>
           <a:p>
-            <a:pPr indent="0" marL="0">
+            <a:pPr marL="0" indent="0">
               <a:lnSpc>
                 <a:spcPts val="1900"/>
               </a:lnSpc>
@@ -3647,7 +3477,7 @@
             <a:endParaRPr lang="en-US" sz="1240" dirty="0"/>
           </a:p>
           <a:p>
-            <a:pPr indent="0" marL="0">
+            <a:pPr marL="0" indent="0">
               <a:lnSpc>
                 <a:spcPts val="1900"/>
               </a:lnSpc>
@@ -3667,7 +3497,7 @@
             <a:endParaRPr lang="en-US" sz="1240" dirty="0"/>
           </a:p>
           <a:p>
-            <a:pPr indent="0" marL="0">
+            <a:pPr marL="0" indent="0">
               <a:lnSpc>
                 <a:spcPts val="1900"/>
               </a:lnSpc>
@@ -3714,6 +3544,13 @@
             <a:prstDash val="solid"/>
           </a:ln>
         </p:spPr>
+        <p:txBody>
+          <a:bodyPr/>
+          <a:lstStyle/>
+          <a:p>
+            <a:endParaRPr lang="ko-KR" altLang="en-US"/>
+          </a:p>
+        </p:txBody>
       </p:sp>
       <p:sp>
         <p:nvSpPr>
@@ -3736,7 +3573,7 @@
           <a:bodyPr wrap="square" lIns="0" tIns="0" rIns="0" bIns="0" rtlCol="0" anchor="ctr"/>
           <a:lstStyle/>
           <a:p>
-            <a:pPr indent="0" marL="0">
+            <a:pPr marL="0" indent="0">
               <a:buNone/>
             </a:pPr>
             <a:r>
@@ -3775,7 +3612,7 @@
           <a:bodyPr wrap="square" lIns="0" tIns="0" rIns="0" bIns="0" rtlCol="0" anchor="ctr"/>
           <a:lstStyle/>
           <a:p>
-            <a:pPr indent="0" marL="0">
+            <a:pPr marL="0" indent="0">
               <a:buNone/>
             </a:pPr>
             <a:r>
@@ -3814,7 +3651,7 @@
           <a:bodyPr wrap="square" lIns="0" tIns="0" rIns="0" bIns="0" rtlCol="0" anchor="t"/>
           <a:lstStyle/>
           <a:p>
-            <a:pPr indent="0" marL="0">
+            <a:pPr marL="0" indent="0">
               <a:lnSpc>
                 <a:spcPts val="1900"/>
               </a:lnSpc>
@@ -3834,7 +3671,7 @@
             <a:endParaRPr lang="en-US" sz="1240" dirty="0"/>
           </a:p>
           <a:p>
-            <a:pPr indent="0" marL="0">
+            <a:pPr marL="0" indent="0">
               <a:lnSpc>
                 <a:spcPts val="1900"/>
               </a:lnSpc>
@@ -3843,7 +3680,7 @@
             <a:endParaRPr lang="en-US" sz="1240" dirty="0"/>
           </a:p>
           <a:p>
-            <a:pPr indent="0" marL="0">
+            <a:pPr marL="0" indent="0">
               <a:lnSpc>
                 <a:spcPts val="1900"/>
               </a:lnSpc>
@@ -3863,7 +3700,7 @@
             <a:endParaRPr lang="en-US" sz="1240" dirty="0"/>
           </a:p>
           <a:p>
-            <a:pPr indent="0" marL="0">
+            <a:pPr marL="0" indent="0">
               <a:lnSpc>
                 <a:spcPts val="1900"/>
               </a:lnSpc>
@@ -3910,6 +3747,13 @@
             <a:prstDash val="solid"/>
           </a:ln>
         </p:spPr>
+        <p:txBody>
+          <a:bodyPr/>
+          <a:lstStyle/>
+          <a:p>
+            <a:endParaRPr lang="ko-KR" altLang="en-US"/>
+          </a:p>
+        </p:txBody>
       </p:sp>
       <p:sp>
         <p:nvSpPr>
@@ -3932,7 +3776,7 @@
           <a:bodyPr wrap="square" lIns="0" tIns="0" rIns="0" bIns="0" rtlCol="0" anchor="ctr"/>
           <a:lstStyle/>
           <a:p>
-            <a:pPr algn="ctr" indent="0" marL="0">
+            <a:pPr marL="0" indent="0" algn="ctr">
               <a:buNone/>
             </a:pPr>
             <a:r>
@@ -3966,6 +3810,7 @@
         <a:solidFill>
           <a:srgbClr val="FFFFFF"/>
         </a:solidFill>
+        <a:effectLst/>
       </p:bgPr>
     </p:bg>
     <p:spTree>
@@ -4003,7 +3848,7 @@
           <a:bodyPr wrap="square" lIns="0" tIns="0" rIns="0" bIns="0" rtlCol="0" anchor="ctr"/>
           <a:lstStyle/>
           <a:p>
-            <a:pPr indent="0" marL="0">
+            <a:pPr marL="0" indent="0">
               <a:buNone/>
             </a:pPr>
             <a:r>
@@ -4042,6 +3887,13 @@
           </a:solidFill>
           <a:ln/>
         </p:spPr>
+        <p:txBody>
+          <a:bodyPr/>
+          <a:lstStyle/>
+          <a:p>
+            <a:endParaRPr lang="ko-KR" altLang="en-US"/>
+          </a:p>
+        </p:txBody>
       </p:sp>
       <p:sp>
         <p:nvSpPr>
@@ -4064,7 +3916,7 @@
           <a:bodyPr wrap="square" lIns="0" tIns="0" rIns="0" bIns="0" rtlCol="0" anchor="ctr"/>
           <a:lstStyle/>
           <a:p>
-            <a:pPr algn="ctr" indent="0" marL="0">
+            <a:pPr marL="0" indent="0" algn="ctr">
               <a:buNone/>
             </a:pPr>
             <a:r>
@@ -4103,7 +3955,7 @@
           <a:bodyPr wrap="square" lIns="0" tIns="0" rIns="0" bIns="0" rtlCol="0" anchor="ctr"/>
           <a:lstStyle/>
           <a:p>
-            <a:pPr indent="0" marL="0">
+            <a:pPr marL="0" indent="0">
               <a:buNone/>
             </a:pPr>
             <a:r>
@@ -4140,6 +3992,13 @@
           </a:solidFill>
           <a:ln/>
         </p:spPr>
+        <p:txBody>
+          <a:bodyPr/>
+          <a:lstStyle/>
+          <a:p>
+            <a:endParaRPr lang="ko-KR" altLang="en-US"/>
+          </a:p>
+        </p:txBody>
       </p:sp>
       <p:sp>
         <p:nvSpPr>
@@ -4162,7 +4021,7 @@
           <a:bodyPr wrap="square" lIns="0" tIns="0" rIns="0" bIns="0" rtlCol="0" anchor="ctr"/>
           <a:lstStyle/>
           <a:p>
-            <a:pPr algn="r" indent="0" marL="0">
+            <a:pPr marL="0" indent="0" algn="r">
               <a:buNone/>
             </a:pPr>
             <a:r>
@@ -4201,7 +4060,7 @@
           <a:bodyPr wrap="square" lIns="0" tIns="0" rIns="0" bIns="0" rtlCol="0" anchor="ctr"/>
           <a:lstStyle/>
           <a:p>
-            <a:pPr indent="0" marL="0">
+            <a:pPr marL="0" indent="0">
               <a:buNone/>
             </a:pPr>
             <a:r>
@@ -4240,7 +4099,7 @@
           <a:bodyPr wrap="square" lIns="0" tIns="0" rIns="0" bIns="0" rtlCol="0" anchor="ctr"/>
           <a:lstStyle/>
           <a:p>
-            <a:pPr algn="r" indent="0" marL="0">
+            <a:pPr marL="0" indent="0" algn="r">
               <a:buNone/>
             </a:pPr>
             <a:r>
@@ -4277,6 +4136,13 @@
           </a:solidFill>
           <a:ln/>
         </p:spPr>
+        <p:txBody>
+          <a:bodyPr/>
+          <a:lstStyle/>
+          <a:p>
+            <a:endParaRPr lang="ko-KR" altLang="en-US"/>
+          </a:p>
+        </p:txBody>
       </p:sp>
       <p:sp>
         <p:nvSpPr>
@@ -4299,7 +4165,7 @@
           <a:bodyPr wrap="square" lIns="0" tIns="0" rIns="0" bIns="0" rtlCol="0" anchor="ctr"/>
           <a:lstStyle/>
           <a:p>
-            <a:pPr indent="0" marL="0">
+            <a:pPr marL="0" indent="0">
               <a:buNone/>
             </a:pPr>
             <a:r>
@@ -4336,6 +4202,13 @@
           </a:solidFill>
           <a:ln/>
         </p:spPr>
+        <p:txBody>
+          <a:bodyPr/>
+          <a:lstStyle/>
+          <a:p>
+            <a:endParaRPr lang="ko-KR" altLang="en-US"/>
+          </a:p>
+        </p:txBody>
       </p:sp>
       <p:sp>
         <p:nvSpPr>
@@ -4358,7 +4231,7 @@
           <a:bodyPr wrap="square" lIns="0" tIns="0" rIns="0" bIns="0" rtlCol="0" anchor="ctr"/>
           <a:lstStyle/>
           <a:p>
-            <a:pPr indent="0" marL="0">
+            <a:pPr marL="0" indent="0">
               <a:buNone/>
             </a:pPr>
             <a:r>
@@ -4395,6 +4268,13 @@
           </a:solidFill>
           <a:ln/>
         </p:spPr>
+        <p:txBody>
+          <a:bodyPr/>
+          <a:lstStyle/>
+          <a:p>
+            <a:endParaRPr lang="ko-KR" altLang="en-US"/>
+          </a:p>
+        </p:txBody>
       </p:sp>
       <p:sp>
         <p:nvSpPr>
@@ -4417,7 +4297,7 @@
           <a:bodyPr wrap="square" lIns="0" tIns="0" rIns="0" bIns="0" rtlCol="0" anchor="ctr"/>
           <a:lstStyle/>
           <a:p>
-            <a:pPr indent="0" marL="0">
+            <a:pPr marL="0" indent="0">
               <a:buNone/>
             </a:pPr>
             <a:r>
@@ -4459,6 +4339,13 @@
             <a:prstDash val="solid"/>
           </a:ln>
         </p:spPr>
+        <p:txBody>
+          <a:bodyPr/>
+          <a:lstStyle/>
+          <a:p>
+            <a:endParaRPr lang="ko-KR" altLang="en-US"/>
+          </a:p>
+        </p:txBody>
       </p:sp>
       <p:sp>
         <p:nvSpPr>
@@ -4481,7 +4368,7 @@
           <a:bodyPr wrap="square" lIns="0" tIns="0" rIns="0" bIns="0" rtlCol="0" anchor="ctr"/>
           <a:lstStyle/>
           <a:p>
-            <a:pPr indent="0" marL="0">
+            <a:pPr marL="0" indent="0">
               <a:buNone/>
             </a:pPr>
             <a:r>
@@ -4520,7 +4407,7 @@
           <a:bodyPr wrap="square" lIns="0" tIns="0" rIns="0" bIns="0" rtlCol="0" anchor="ctr"/>
           <a:lstStyle/>
           <a:p>
-            <a:pPr indent="0" marL="0">
+            <a:pPr marL="0" indent="0">
               <a:buNone/>
             </a:pPr>
             <a:r>
@@ -4559,7 +4446,7 @@
           <a:bodyPr wrap="square" lIns="0" tIns="0" rIns="0" bIns="0" rtlCol="0" anchor="ctr"/>
           <a:lstStyle/>
           <a:p>
-            <a:pPr indent="0" marL="0">
+            <a:pPr marL="0" indent="0">
               <a:buNone/>
             </a:pPr>
             <a:endParaRPr lang="en-US" sz="1240" dirty="0"/>
@@ -4590,6 +4477,13 @@
             <a:prstDash val="solid"/>
           </a:ln>
         </p:spPr>
+        <p:txBody>
+          <a:bodyPr/>
+          <a:lstStyle/>
+          <a:p>
+            <a:endParaRPr lang="ko-KR" altLang="en-US"/>
+          </a:p>
+        </p:txBody>
       </p:sp>
       <p:sp>
         <p:nvSpPr>
@@ -4612,7 +4506,7 @@
           <a:bodyPr wrap="square" lIns="0" tIns="0" rIns="0" bIns="0" rtlCol="0" anchor="ctr"/>
           <a:lstStyle/>
           <a:p>
-            <a:pPr indent="0" marL="0">
+            <a:pPr marL="0" indent="0">
               <a:buNone/>
             </a:pPr>
             <a:r>
@@ -4651,7 +4545,7 @@
           <a:bodyPr wrap="square" lIns="0" tIns="0" rIns="0" bIns="0" rtlCol="0" anchor="ctr"/>
           <a:lstStyle/>
           <a:p>
-            <a:pPr indent="0" marL="0">
+            <a:pPr marL="0" indent="0">
               <a:buNone/>
             </a:pPr>
             <a:r>
@@ -4690,7 +4584,7 @@
           <a:bodyPr wrap="square" lIns="0" tIns="0" rIns="0" bIns="0" rtlCol="0" anchor="ctr"/>
           <a:lstStyle/>
           <a:p>
-            <a:pPr indent="0" marL="0">
+            <a:pPr marL="0" indent="0">
               <a:buNone/>
             </a:pPr>
             <a:endParaRPr lang="en-US" sz="1240" dirty="0"/>
@@ -4721,6 +4615,13 @@
             <a:prstDash val="solid"/>
           </a:ln>
         </p:spPr>
+        <p:txBody>
+          <a:bodyPr/>
+          <a:lstStyle/>
+          <a:p>
+            <a:endParaRPr lang="ko-KR" altLang="en-US"/>
+          </a:p>
+        </p:txBody>
       </p:sp>
       <p:sp>
         <p:nvSpPr>
@@ -4743,7 +4644,7 @@
           <a:bodyPr wrap="square" lIns="0" tIns="0" rIns="0" bIns="0" rtlCol="0" anchor="ctr"/>
           <a:lstStyle/>
           <a:p>
-            <a:pPr indent="0" marL="0">
+            <a:pPr marL="0" indent="0">
               <a:buNone/>
             </a:pPr>
             <a:r>
@@ -4782,7 +4683,7 @@
           <a:bodyPr wrap="square" lIns="0" tIns="0" rIns="0" bIns="0" rtlCol="0" anchor="ctr"/>
           <a:lstStyle/>
           <a:p>
-            <a:pPr indent="0" marL="0">
+            <a:pPr marL="0" indent="0">
               <a:buNone/>
             </a:pPr>
             <a:r>
@@ -4821,7 +4722,7 @@
           <a:bodyPr wrap="square" lIns="0" tIns="0" rIns="0" bIns="0" rtlCol="0" anchor="ctr"/>
           <a:lstStyle/>
           <a:p>
-            <a:pPr indent="0" marL="0">
+            <a:pPr marL="0" indent="0">
               <a:buNone/>
             </a:pPr>
             <a:endParaRPr lang="en-US" sz="1240" dirty="0"/>
@@ -4852,6 +4753,13 @@
             <a:prstDash val="solid"/>
           </a:ln>
         </p:spPr>
+        <p:txBody>
+          <a:bodyPr/>
+          <a:lstStyle/>
+          <a:p>
+            <a:endParaRPr lang="ko-KR" altLang="en-US"/>
+          </a:p>
+        </p:txBody>
       </p:sp>
       <p:sp>
         <p:nvSpPr>
@@ -4874,7 +4782,7 @@
           <a:bodyPr wrap="square" lIns="0" tIns="0" rIns="0" bIns="0" rtlCol="0" anchor="ctr"/>
           <a:lstStyle/>
           <a:p>
-            <a:pPr indent="0" marL="0">
+            <a:pPr marL="0" indent="0">
               <a:buNone/>
             </a:pPr>
             <a:r>
@@ -4913,7 +4821,7 @@
           <a:bodyPr wrap="square" lIns="0" tIns="0" rIns="0" bIns="0" rtlCol="0" anchor="ctr"/>
           <a:lstStyle/>
           <a:p>
-            <a:pPr indent="0" marL="0">
+            <a:pPr marL="0" indent="0">
               <a:buNone/>
             </a:pPr>
             <a:r>
@@ -4952,7 +4860,7 @@
           <a:bodyPr wrap="square" lIns="0" tIns="0" rIns="0" bIns="0" rtlCol="0" anchor="ctr"/>
           <a:lstStyle/>
           <a:p>
-            <a:pPr indent="0" marL="0">
+            <a:pPr marL="0" indent="0">
               <a:buNone/>
             </a:pPr>
             <a:endParaRPr lang="en-US" sz="1240" dirty="0"/>
@@ -4983,6 +4891,13 @@
             <a:prstDash val="solid"/>
           </a:ln>
         </p:spPr>
+        <p:txBody>
+          <a:bodyPr/>
+          <a:lstStyle/>
+          <a:p>
+            <a:endParaRPr lang="ko-KR" altLang="en-US"/>
+          </a:p>
+        </p:txBody>
       </p:sp>
       <p:sp>
         <p:nvSpPr>
@@ -5005,7 +4920,7 @@
           <a:bodyPr wrap="square" lIns="0" tIns="0" rIns="0" bIns="0" rtlCol="0" anchor="ctr"/>
           <a:lstStyle/>
           <a:p>
-            <a:pPr indent="0" marL="0">
+            <a:pPr marL="0" indent="0">
               <a:buNone/>
             </a:pPr>
             <a:r>
@@ -5044,7 +4959,7 @@
           <a:bodyPr wrap="square" lIns="0" tIns="0" rIns="0" bIns="0" rtlCol="0" anchor="ctr"/>
           <a:lstStyle/>
           <a:p>
-            <a:pPr indent="0" marL="0">
+            <a:pPr marL="0" indent="0">
               <a:buNone/>
             </a:pPr>
             <a:r>
@@ -5083,7 +4998,7 @@
           <a:bodyPr wrap="square" lIns="0" tIns="0" rIns="0" bIns="0" rtlCol="0" anchor="ctr"/>
           <a:lstStyle/>
           <a:p>
-            <a:pPr indent="0" marL="0">
+            <a:pPr marL="0" indent="0">
               <a:buNone/>
             </a:pPr>
             <a:endParaRPr lang="en-US" sz="1240" dirty="0"/>
@@ -5114,6 +5029,13 @@
             <a:prstDash val="solid"/>
           </a:ln>
         </p:spPr>
+        <p:txBody>
+          <a:bodyPr/>
+          <a:lstStyle/>
+          <a:p>
+            <a:endParaRPr lang="ko-KR" altLang="en-US"/>
+          </a:p>
+        </p:txBody>
       </p:sp>
       <p:sp>
         <p:nvSpPr>
@@ -5136,7 +5058,7 @@
           <a:bodyPr wrap="square" lIns="0" tIns="0" rIns="0" bIns="0" rtlCol="0" anchor="ctr"/>
           <a:lstStyle/>
           <a:p>
-            <a:pPr indent="0" marL="0">
+            <a:pPr marL="0" indent="0">
               <a:buNone/>
             </a:pPr>
             <a:r>
@@ -5175,7 +5097,7 @@
           <a:bodyPr wrap="square" lIns="0" tIns="0" rIns="0" bIns="0" rtlCol="0" anchor="ctr"/>
           <a:lstStyle/>
           <a:p>
-            <a:pPr indent="0" marL="0">
+            <a:pPr marL="0" indent="0">
               <a:buNone/>
             </a:pPr>
             <a:r>
@@ -5214,7 +5136,7 @@
           <a:bodyPr wrap="square" lIns="0" tIns="0" rIns="0" bIns="0" rtlCol="0" anchor="ctr"/>
           <a:lstStyle/>
           <a:p>
-            <a:pPr indent="0" marL="0">
+            <a:pPr marL="0" indent="0">
               <a:buNone/>
             </a:pPr>
             <a:endParaRPr lang="en-US" sz="1240" dirty="0"/>
@@ -5245,6 +5167,13 @@
             <a:prstDash val="solid"/>
           </a:ln>
         </p:spPr>
+        <p:txBody>
+          <a:bodyPr/>
+          <a:lstStyle/>
+          <a:p>
+            <a:endParaRPr lang="ko-KR" altLang="en-US"/>
+          </a:p>
+        </p:txBody>
       </p:sp>
       <p:sp>
         <p:nvSpPr>
@@ -5267,7 +5196,7 @@
           <a:bodyPr wrap="square" lIns="0" tIns="0" rIns="0" bIns="0" rtlCol="0" anchor="ctr"/>
           <a:lstStyle/>
           <a:p>
-            <a:pPr indent="0" marL="0">
+            <a:pPr marL="0" indent="0">
               <a:buNone/>
             </a:pPr>
             <a:r>
@@ -5306,7 +5235,7 @@
           <a:bodyPr wrap="square" lIns="0" tIns="0" rIns="0" bIns="0" rtlCol="0" anchor="ctr"/>
           <a:lstStyle/>
           <a:p>
-            <a:pPr indent="0" marL="0">
+            <a:pPr marL="0" indent="0">
               <a:buNone/>
             </a:pPr>
             <a:r>
@@ -5345,7 +5274,7 @@
           <a:bodyPr wrap="square" lIns="0" tIns="0" rIns="0" bIns="0" rtlCol="0" anchor="ctr"/>
           <a:lstStyle/>
           <a:p>
-            <a:pPr indent="0" marL="0">
+            <a:pPr marL="0" indent="0">
               <a:buNone/>
             </a:pPr>
             <a:endParaRPr lang="en-US" sz="1240" dirty="0"/>
@@ -5376,6 +5305,13 @@
             <a:prstDash val="solid"/>
           </a:ln>
         </p:spPr>
+        <p:txBody>
+          <a:bodyPr/>
+          <a:lstStyle/>
+          <a:p>
+            <a:endParaRPr lang="ko-KR" altLang="en-US"/>
+          </a:p>
+        </p:txBody>
       </p:sp>
       <p:sp>
         <p:nvSpPr>
@@ -5398,7 +5334,7 @@
           <a:bodyPr wrap="square" lIns="0" tIns="0" rIns="0" bIns="0" rtlCol="0" anchor="ctr"/>
           <a:lstStyle/>
           <a:p>
-            <a:pPr indent="0" marL="0">
+            <a:pPr marL="0" indent="0">
               <a:buNone/>
             </a:pPr>
             <a:r>
@@ -5437,7 +5373,7 @@
           <a:bodyPr wrap="square" lIns="0" tIns="0" rIns="0" bIns="0" rtlCol="0" anchor="ctr"/>
           <a:lstStyle/>
           <a:p>
-            <a:pPr indent="0" marL="0">
+            <a:pPr marL="0" indent="0">
               <a:buNone/>
             </a:pPr>
             <a:r>
@@ -5476,7 +5412,7 @@
           <a:bodyPr wrap="square" lIns="0" tIns="0" rIns="0" bIns="0" rtlCol="0" anchor="ctr"/>
           <a:lstStyle/>
           <a:p>
-            <a:pPr indent="0" marL="0">
+            <a:pPr marL="0" indent="0">
               <a:buNone/>
             </a:pPr>
             <a:endParaRPr lang="en-US" sz="1240" dirty="0"/>
@@ -5509,6 +5445,13 @@
             <a:prstDash val="solid"/>
           </a:ln>
         </p:spPr>
+        <p:txBody>
+          <a:bodyPr/>
+          <a:lstStyle/>
+          <a:p>
+            <a:endParaRPr lang="ko-KR" altLang="en-US"/>
+          </a:p>
+        </p:txBody>
       </p:sp>
       <p:sp>
         <p:nvSpPr>
@@ -5531,7 +5474,7 @@
           <a:bodyPr wrap="square" lIns="0" tIns="0" rIns="0" bIns="0" rtlCol="0" anchor="ctr"/>
           <a:lstStyle/>
           <a:p>
-            <a:pPr algn="ctr" indent="0" marL="0">
+            <a:pPr marL="0" indent="0" algn="ctr">
               <a:buNone/>
             </a:pPr>
             <a:r>
@@ -5565,6 +5508,7 @@
         <a:solidFill>
           <a:srgbClr val="FFFFFF"/>
         </a:solidFill>
+        <a:effectLst/>
       </p:bgPr>
     </p:bg>
     <p:spTree>
@@ -5602,7 +5546,7 @@
           <a:bodyPr wrap="square" lIns="0" tIns="0" rIns="0" bIns="0" rtlCol="0" anchor="ctr"/>
           <a:lstStyle/>
           <a:p>
-            <a:pPr indent="0" marL="0">
+            <a:pPr marL="0" indent="0">
               <a:buNone/>
             </a:pPr>
             <a:r>
@@ -5641,6 +5585,13 @@
           </a:solidFill>
           <a:ln/>
         </p:spPr>
+        <p:txBody>
+          <a:bodyPr/>
+          <a:lstStyle/>
+          <a:p>
+            <a:endParaRPr lang="ko-KR" altLang="en-US"/>
+          </a:p>
+        </p:txBody>
       </p:sp>
       <p:sp>
         <p:nvSpPr>
@@ -5663,7 +5614,7 @@
           <a:bodyPr wrap="square" lIns="0" tIns="0" rIns="0" bIns="0" rtlCol="0" anchor="ctr"/>
           <a:lstStyle/>
           <a:p>
-            <a:pPr algn="ctr" indent="0" marL="0">
+            <a:pPr marL="0" indent="0" algn="ctr">
               <a:buNone/>
             </a:pPr>
             <a:r>
@@ -5702,7 +5653,7 @@
           <a:bodyPr wrap="square" lIns="0" tIns="0" rIns="0" bIns="0" rtlCol="0" anchor="ctr"/>
           <a:lstStyle/>
           <a:p>
-            <a:pPr indent="0" marL="0">
+            <a:pPr marL="0" indent="0">
               <a:buNone/>
             </a:pPr>
             <a:r>
@@ -5739,6 +5690,13 @@
           </a:solidFill>
           <a:ln/>
         </p:spPr>
+        <p:txBody>
+          <a:bodyPr/>
+          <a:lstStyle/>
+          <a:p>
+            <a:endParaRPr lang="ko-KR" altLang="en-US"/>
+          </a:p>
+        </p:txBody>
       </p:sp>
       <p:sp>
         <p:nvSpPr>
@@ -5761,7 +5719,7 @@
           <a:bodyPr wrap="square" lIns="0" tIns="0" rIns="0" bIns="0" rtlCol="0" anchor="ctr"/>
           <a:lstStyle/>
           <a:p>
-            <a:pPr algn="r" indent="0" marL="0">
+            <a:pPr marL="0" indent="0" algn="r">
               <a:buNone/>
             </a:pPr>
             <a:r>
@@ -5800,7 +5758,7 @@
           <a:bodyPr wrap="square" lIns="0" tIns="0" rIns="0" bIns="0" rtlCol="0" anchor="ctr"/>
           <a:lstStyle/>
           <a:p>
-            <a:pPr indent="0" marL="0">
+            <a:pPr marL="0" indent="0">
               <a:buNone/>
             </a:pPr>
             <a:r>
@@ -5839,7 +5797,7 @@
           <a:bodyPr wrap="square" lIns="0" tIns="0" rIns="0" bIns="0" rtlCol="0" anchor="ctr"/>
           <a:lstStyle/>
           <a:p>
-            <a:pPr algn="r" indent="0" marL="0">
+            <a:pPr marL="0" indent="0" algn="r">
               <a:buNone/>
             </a:pPr>
             <a:r>
@@ -5876,6 +5834,13 @@
           </a:solidFill>
           <a:ln/>
         </p:spPr>
+        <p:txBody>
+          <a:bodyPr/>
+          <a:lstStyle/>
+          <a:p>
+            <a:endParaRPr lang="ko-KR" altLang="en-US"/>
+          </a:p>
+        </p:txBody>
       </p:sp>
       <p:sp>
         <p:nvSpPr>
@@ -5898,7 +5863,7 @@
           <a:bodyPr wrap="square" lIns="0" tIns="0" rIns="0" bIns="0" rtlCol="0" anchor="ctr"/>
           <a:lstStyle/>
           <a:p>
-            <a:pPr indent="0" marL="0">
+            <a:pPr marL="0" indent="0">
               <a:buNone/>
             </a:pPr>
             <a:r>
@@ -5935,6 +5900,13 @@
           </a:solidFill>
           <a:ln/>
         </p:spPr>
+        <p:txBody>
+          <a:bodyPr/>
+          <a:lstStyle/>
+          <a:p>
+            <a:endParaRPr lang="ko-KR" altLang="en-US"/>
+          </a:p>
+        </p:txBody>
       </p:sp>
       <p:sp>
         <p:nvSpPr>
@@ -5957,7 +5929,7 @@
           <a:bodyPr wrap="square" lIns="0" tIns="0" rIns="0" bIns="0" rtlCol="0" anchor="ctr"/>
           <a:lstStyle/>
           <a:p>
-            <a:pPr indent="0" marL="0">
+            <a:pPr marL="0" indent="0">
               <a:buNone/>
             </a:pPr>
             <a:r>
@@ -5994,6 +5966,13 @@
           </a:solidFill>
           <a:ln/>
         </p:spPr>
+        <p:txBody>
+          <a:bodyPr/>
+          <a:lstStyle/>
+          <a:p>
+            <a:endParaRPr lang="ko-KR" altLang="en-US"/>
+          </a:p>
+        </p:txBody>
       </p:sp>
       <p:sp>
         <p:nvSpPr>
@@ -6016,7 +5995,7 @@
           <a:bodyPr wrap="square" lIns="0" tIns="0" rIns="0" bIns="0" rtlCol="0" anchor="ctr"/>
           <a:lstStyle/>
           <a:p>
-            <a:pPr indent="0" marL="0">
+            <a:pPr marL="0" indent="0">
               <a:buNone/>
             </a:pPr>
             <a:r>
@@ -6058,6 +6037,13 @@
             <a:prstDash val="solid"/>
           </a:ln>
         </p:spPr>
+        <p:txBody>
+          <a:bodyPr/>
+          <a:lstStyle/>
+          <a:p>
+            <a:endParaRPr lang="ko-KR" altLang="en-US"/>
+          </a:p>
+        </p:txBody>
       </p:sp>
       <p:sp>
         <p:nvSpPr>
@@ -6080,7 +6066,7 @@
           <a:bodyPr wrap="square" lIns="0" tIns="0" rIns="0" bIns="0" rtlCol="0" anchor="ctr"/>
           <a:lstStyle/>
           <a:p>
-            <a:pPr indent="0" marL="0">
+            <a:pPr marL="0" indent="0">
               <a:buNone/>
             </a:pPr>
             <a:r>
@@ -6119,7 +6105,7 @@
           <a:bodyPr wrap="square" lIns="0" tIns="0" rIns="0" bIns="0" rtlCol="0" anchor="ctr"/>
           <a:lstStyle/>
           <a:p>
-            <a:pPr indent="0" marL="0">
+            <a:pPr marL="0" indent="0">
               <a:buNone/>
             </a:pPr>
             <a:endParaRPr lang="en-US" sz="1240" dirty="0"/>
@@ -6147,7 +6133,7 @@
           <a:bodyPr wrap="square" lIns="0" tIns="0" rIns="0" bIns="0" rtlCol="0" anchor="ctr"/>
           <a:lstStyle/>
           <a:p>
-            <a:pPr indent="0" marL="0">
+            <a:pPr marL="0" indent="0">
               <a:buNone/>
             </a:pPr>
             <a:endParaRPr lang="en-US" sz="1240" dirty="0"/>
@@ -6178,6 +6164,13 @@
             <a:prstDash val="solid"/>
           </a:ln>
         </p:spPr>
+        <p:txBody>
+          <a:bodyPr/>
+          <a:lstStyle/>
+          <a:p>
+            <a:endParaRPr lang="ko-KR" altLang="en-US"/>
+          </a:p>
+        </p:txBody>
       </p:sp>
       <p:sp>
         <p:nvSpPr>
@@ -6200,7 +6193,7 @@
           <a:bodyPr wrap="square" lIns="0" tIns="0" rIns="0" bIns="0" rtlCol="0" anchor="ctr"/>
           <a:lstStyle/>
           <a:p>
-            <a:pPr indent="0" marL="0">
+            <a:pPr marL="0" indent="0">
               <a:buNone/>
             </a:pPr>
             <a:endParaRPr lang="en-US" sz="1240" dirty="0"/>
@@ -6228,7 +6221,7 @@
           <a:bodyPr wrap="square" lIns="0" tIns="0" rIns="0" bIns="0" rtlCol="0" anchor="ctr"/>
           <a:lstStyle/>
           <a:p>
-            <a:pPr indent="0" marL="0">
+            <a:pPr marL="0" indent="0">
               <a:buNone/>
             </a:pPr>
             <a:endParaRPr lang="en-US" sz="1240" dirty="0"/>
@@ -6256,7 +6249,7 @@
           <a:bodyPr wrap="square" lIns="0" tIns="0" rIns="0" bIns="0" rtlCol="0" anchor="ctr"/>
           <a:lstStyle/>
           <a:p>
-            <a:pPr indent="0" marL="0">
+            <a:pPr marL="0" indent="0">
               <a:buNone/>
             </a:pPr>
             <a:endParaRPr lang="en-US" sz="1240" dirty="0"/>
@@ -6287,6 +6280,13 @@
             <a:prstDash val="solid"/>
           </a:ln>
         </p:spPr>
+        <p:txBody>
+          <a:bodyPr/>
+          <a:lstStyle/>
+          <a:p>
+            <a:endParaRPr lang="ko-KR" altLang="en-US"/>
+          </a:p>
+        </p:txBody>
       </p:sp>
       <p:sp>
         <p:nvSpPr>
@@ -6309,7 +6309,7 @@
           <a:bodyPr wrap="square" lIns="0" tIns="0" rIns="0" bIns="0" rtlCol="0" anchor="ctr"/>
           <a:lstStyle/>
           <a:p>
-            <a:pPr indent="0" marL="0">
+            <a:pPr marL="0" indent="0">
               <a:buNone/>
             </a:pPr>
             <a:endParaRPr lang="en-US" sz="1240" dirty="0"/>
@@ -6337,7 +6337,7 @@
           <a:bodyPr wrap="square" lIns="0" tIns="0" rIns="0" bIns="0" rtlCol="0" anchor="ctr"/>
           <a:lstStyle/>
           <a:p>
-            <a:pPr indent="0" marL="0">
+            <a:pPr marL="0" indent="0">
               <a:buNone/>
             </a:pPr>
             <a:endParaRPr lang="en-US" sz="1240" dirty="0"/>
@@ -6365,7 +6365,7 @@
           <a:bodyPr wrap="square" lIns="0" tIns="0" rIns="0" bIns="0" rtlCol="0" anchor="ctr"/>
           <a:lstStyle/>
           <a:p>
-            <a:pPr indent="0" marL="0">
+            <a:pPr marL="0" indent="0">
               <a:buNone/>
             </a:pPr>
             <a:endParaRPr lang="en-US" sz="1240" dirty="0"/>
@@ -6396,6 +6396,13 @@
             <a:prstDash val="solid"/>
           </a:ln>
         </p:spPr>
+        <p:txBody>
+          <a:bodyPr/>
+          <a:lstStyle/>
+          <a:p>
+            <a:endParaRPr lang="ko-KR" altLang="en-US"/>
+          </a:p>
+        </p:txBody>
       </p:sp>
       <p:sp>
         <p:nvSpPr>
@@ -6418,7 +6425,7 @@
           <a:bodyPr wrap="square" lIns="0" tIns="0" rIns="0" bIns="0" rtlCol="0" anchor="ctr"/>
           <a:lstStyle/>
           <a:p>
-            <a:pPr indent="0" marL="0">
+            <a:pPr marL="0" indent="0">
               <a:buNone/>
             </a:pPr>
             <a:endParaRPr lang="en-US" sz="1240" dirty="0"/>
@@ -6446,7 +6453,7 @@
           <a:bodyPr wrap="square" lIns="0" tIns="0" rIns="0" bIns="0" rtlCol="0" anchor="ctr"/>
           <a:lstStyle/>
           <a:p>
-            <a:pPr indent="0" marL="0">
+            <a:pPr marL="0" indent="0">
               <a:buNone/>
             </a:pPr>
             <a:endParaRPr lang="en-US" sz="1240" dirty="0"/>
@@ -6474,7 +6481,7 @@
           <a:bodyPr wrap="square" lIns="0" tIns="0" rIns="0" bIns="0" rtlCol="0" anchor="ctr"/>
           <a:lstStyle/>
           <a:p>
-            <a:pPr indent="0" marL="0">
+            <a:pPr marL="0" indent="0">
               <a:buNone/>
             </a:pPr>
             <a:endParaRPr lang="en-US" sz="1240" dirty="0"/>
@@ -6505,6 +6512,13 @@
             <a:prstDash val="solid"/>
           </a:ln>
         </p:spPr>
+        <p:txBody>
+          <a:bodyPr/>
+          <a:lstStyle/>
+          <a:p>
+            <a:endParaRPr lang="ko-KR" altLang="en-US"/>
+          </a:p>
+        </p:txBody>
       </p:sp>
       <p:sp>
         <p:nvSpPr>
@@ -6527,7 +6541,7 @@
           <a:bodyPr wrap="square" lIns="0" tIns="0" rIns="0" bIns="0" rtlCol="0" anchor="ctr"/>
           <a:lstStyle/>
           <a:p>
-            <a:pPr indent="0" marL="0">
+            <a:pPr marL="0" indent="0">
               <a:buNone/>
             </a:pPr>
             <a:endParaRPr lang="en-US" sz="1240" dirty="0"/>
@@ -6555,7 +6569,7 @@
           <a:bodyPr wrap="square" lIns="0" tIns="0" rIns="0" bIns="0" rtlCol="0" anchor="ctr"/>
           <a:lstStyle/>
           <a:p>
-            <a:pPr indent="0" marL="0">
+            <a:pPr marL="0" indent="0">
               <a:buNone/>
             </a:pPr>
             <a:endParaRPr lang="en-US" sz="1240" dirty="0"/>
@@ -6583,7 +6597,7 @@
           <a:bodyPr wrap="square" lIns="0" tIns="0" rIns="0" bIns="0" rtlCol="0" anchor="ctr"/>
           <a:lstStyle/>
           <a:p>
-            <a:pPr indent="0" marL="0">
+            <a:pPr marL="0" indent="0">
               <a:buNone/>
             </a:pPr>
             <a:endParaRPr lang="en-US" sz="1240" dirty="0"/>
@@ -6616,6 +6630,13 @@
             <a:prstDash val="solid"/>
           </a:ln>
         </p:spPr>
+        <p:txBody>
+          <a:bodyPr/>
+          <a:lstStyle/>
+          <a:p>
+            <a:endParaRPr lang="ko-KR" altLang="en-US"/>
+          </a:p>
+        </p:txBody>
       </p:sp>
       <p:sp>
         <p:nvSpPr>
@@ -6638,7 +6659,7 @@
           <a:bodyPr wrap="square" lIns="0" tIns="0" rIns="0" bIns="0" rtlCol="0" anchor="ctr"/>
           <a:lstStyle/>
           <a:p>
-            <a:pPr algn="ctr" indent="0" marL="0">
+            <a:pPr marL="0" indent="0" algn="ctr">
               <a:buNone/>
             </a:pPr>
             <a:r>
@@ -6677,7 +6698,7 @@
           <a:bodyPr wrap="square" lIns="0" tIns="0" rIns="0" bIns="0" rtlCol="0" anchor="ctr"/>
           <a:lstStyle/>
           <a:p>
-            <a:pPr algn="ctr" indent="0" marL="0">
+            <a:pPr marL="0" indent="0" algn="ctr">
               <a:buNone/>
             </a:pPr>
             <a:r>
@@ -6711,6 +6732,7 @@
         <a:solidFill>
           <a:srgbClr val="FFFFFF"/>
         </a:solidFill>
+        <a:effectLst/>
       </p:bgPr>
     </p:bg>
     <p:spTree>
@@ -6748,7 +6770,7 @@
           <a:bodyPr wrap="square" lIns="0" tIns="0" rIns="0" bIns="0" rtlCol="0" anchor="ctr"/>
           <a:lstStyle/>
           <a:p>
-            <a:pPr indent="0" marL="0">
+            <a:pPr marL="0" indent="0">
               <a:buNone/>
             </a:pPr>
             <a:r>
@@ -6787,6 +6809,13 @@
           </a:solidFill>
           <a:ln/>
         </p:spPr>
+        <p:txBody>
+          <a:bodyPr/>
+          <a:lstStyle/>
+          <a:p>
+            <a:endParaRPr lang="ko-KR" altLang="en-US"/>
+          </a:p>
+        </p:txBody>
       </p:sp>
       <p:sp>
         <p:nvSpPr>
@@ -6809,7 +6838,7 @@
           <a:bodyPr wrap="square" lIns="0" tIns="0" rIns="0" bIns="0" rtlCol="0" anchor="ctr"/>
           <a:lstStyle/>
           <a:p>
-            <a:pPr algn="ctr" indent="0" marL="0">
+            <a:pPr marL="0" indent="0" algn="ctr">
               <a:buNone/>
             </a:pPr>
             <a:r>
@@ -6848,7 +6877,7 @@
           <a:bodyPr wrap="square" lIns="0" tIns="0" rIns="0" bIns="0" rtlCol="0" anchor="ctr"/>
           <a:lstStyle/>
           <a:p>
-            <a:pPr indent="0" marL="0">
+            <a:pPr marL="0" indent="0">
               <a:buNone/>
             </a:pPr>
             <a:r>
@@ -6885,6 +6914,13 @@
           </a:solidFill>
           <a:ln/>
         </p:spPr>
+        <p:txBody>
+          <a:bodyPr/>
+          <a:lstStyle/>
+          <a:p>
+            <a:endParaRPr lang="ko-KR" altLang="en-US"/>
+          </a:p>
+        </p:txBody>
       </p:sp>
       <p:sp>
         <p:nvSpPr>
@@ -6907,7 +6943,7 @@
           <a:bodyPr wrap="square" lIns="0" tIns="0" rIns="0" bIns="0" rtlCol="0" anchor="ctr"/>
           <a:lstStyle/>
           <a:p>
-            <a:pPr algn="r" indent="0" marL="0">
+            <a:pPr marL="0" indent="0" algn="r">
               <a:buNone/>
             </a:pPr>
             <a:r>
@@ -6946,7 +6982,7 @@
           <a:bodyPr wrap="square" lIns="0" tIns="0" rIns="0" bIns="0" rtlCol="0" anchor="ctr"/>
           <a:lstStyle/>
           <a:p>
-            <a:pPr indent="0" marL="0">
+            <a:pPr marL="0" indent="0">
               <a:buNone/>
             </a:pPr>
             <a:r>
@@ -6985,7 +7021,7 @@
           <a:bodyPr wrap="square" lIns="0" tIns="0" rIns="0" bIns="0" rtlCol="0" anchor="ctr"/>
           <a:lstStyle/>
           <a:p>
-            <a:pPr algn="r" indent="0" marL="0">
+            <a:pPr marL="0" indent="0" algn="r">
               <a:buNone/>
             </a:pPr>
             <a:r>
@@ -7012,7 +7048,7 @@
         <p:spPr>
           <a:xfrm>
             <a:off x="530352" y="1828800"/>
-            <a:ext cx="5669280" cy="2103120"/>
+            <a:ext cx="5349240" cy="2103120"/>
           </a:xfrm>
           <a:prstGeom prst="roundRect">
             <a:avLst>
@@ -7024,6 +7060,13 @@
           </a:solidFill>
           <a:ln/>
         </p:spPr>
+        <p:txBody>
+          <a:bodyPr/>
+          <a:lstStyle/>
+          <a:p>
+            <a:endParaRPr lang="ko-KR" altLang="en-US"/>
+          </a:p>
+        </p:txBody>
       </p:sp>
       <p:sp>
         <p:nvSpPr>
@@ -7046,7 +7089,7 @@
           <a:bodyPr wrap="square" lIns="0" tIns="0" rIns="0" bIns="0" rtlCol="0" anchor="t"/>
           <a:lstStyle/>
           <a:p>
-            <a:pPr indent="0" marL="0">
+            <a:pPr marL="0" indent="0">
               <a:lnSpc>
                 <a:spcPts val="2380"/>
               </a:lnSpc>
@@ -7066,7 +7109,7 @@
             <a:endParaRPr lang="en-US" sz="1400" dirty="0"/>
           </a:p>
           <a:p>
-            <a:pPr indent="0" marL="0">
+            <a:pPr marL="0" indent="0">
               <a:lnSpc>
                 <a:spcPts val="2380"/>
               </a:lnSpc>
@@ -7086,7 +7129,7 @@
             <a:endParaRPr lang="en-US" sz="1400" dirty="0"/>
           </a:p>
           <a:p>
-            <a:pPr indent="0" marL="0">
+            <a:pPr marL="0" indent="0">
               <a:lnSpc>
                 <a:spcPts val="2380"/>
               </a:lnSpc>
@@ -7106,7 +7149,7 @@
             <a:endParaRPr lang="en-US" sz="1400" dirty="0"/>
           </a:p>
           <a:p>
-            <a:pPr indent="0" marL="0">
+            <a:pPr marL="0" indent="0">
               <a:lnSpc>
                 <a:spcPts val="2380"/>
               </a:lnSpc>
@@ -7135,7 +7178,7 @@
         </p:nvSpPr>
         <p:spPr>
           <a:xfrm>
-            <a:off x="5916168" y="2743200"/>
+            <a:off x="5898912" y="1828808"/>
             <a:ext cx="384048" cy="402336"/>
           </a:xfrm>
           <a:prstGeom prst="rect">
@@ -7148,7 +7191,7 @@
           <a:bodyPr wrap="square" lIns="0" tIns="0" rIns="0" bIns="0" rtlCol="0" anchor="ctr"/>
           <a:lstStyle/>
           <a:p>
-            <a:pPr algn="ctr" indent="0" marL="0">
+            <a:pPr marL="0" indent="0" algn="ctr">
               <a:buNone/>
             </a:pPr>
             <a:r>
@@ -7174,8 +7217,8 @@
         </p:nvSpPr>
         <p:spPr>
           <a:xfrm>
-            <a:off x="6583680" y="1828800"/>
-            <a:ext cx="2537460" cy="402336"/>
+            <a:off x="6309360" y="1828800"/>
+            <a:ext cx="2811780" cy="402336"/>
           </a:xfrm>
           <a:prstGeom prst="rect">
             <a:avLst/>
@@ -7185,6 +7228,13 @@
           </a:solidFill>
           <a:ln/>
         </p:spPr>
+        <p:txBody>
+          <a:bodyPr/>
+          <a:lstStyle/>
+          <a:p>
+            <a:endParaRPr lang="ko-KR" altLang="en-US"/>
+          </a:p>
+        </p:txBody>
       </p:sp>
       <p:sp>
         <p:nvSpPr>
@@ -7207,7 +7257,7 @@
           <a:bodyPr wrap="square" lIns="0" tIns="0" rIns="0" bIns="0" rtlCol="0" anchor="ctr"/>
           <a:lstStyle/>
           <a:p>
-            <a:pPr indent="0" marL="0">
+            <a:pPr marL="0" indent="0">
               <a:buNone/>
             </a:pPr>
             <a:r>
@@ -7244,6 +7294,13 @@
           </a:solidFill>
           <a:ln/>
         </p:spPr>
+        <p:txBody>
+          <a:bodyPr/>
+          <a:lstStyle/>
+          <a:p>
+            <a:endParaRPr lang="ko-KR" altLang="en-US"/>
+          </a:p>
+        </p:txBody>
       </p:sp>
       <p:sp>
         <p:nvSpPr>
@@ -7266,7 +7323,7 @@
           <a:bodyPr wrap="square" lIns="0" tIns="0" rIns="0" bIns="0" rtlCol="0" anchor="ctr"/>
           <a:lstStyle/>
           <a:p>
-            <a:pPr indent="0" marL="0">
+            <a:pPr marL="0" indent="0">
               <a:buNone/>
             </a:pPr>
             <a:r>
@@ -7292,8 +7349,8 @@
         </p:nvSpPr>
         <p:spPr>
           <a:xfrm>
-            <a:off x="6583680" y="2231136"/>
-            <a:ext cx="5074920" cy="502920"/>
+            <a:off x="6309360" y="2231136"/>
+            <a:ext cx="5349240" cy="502920"/>
           </a:xfrm>
           <a:prstGeom prst="rect">
             <a:avLst/>
@@ -7308,6 +7365,13 @@
             <a:prstDash val="solid"/>
           </a:ln>
         </p:spPr>
+        <p:txBody>
+          <a:bodyPr/>
+          <a:lstStyle/>
+          <a:p>
+            <a:endParaRPr lang="ko-KR" altLang="en-US"/>
+          </a:p>
+        </p:txBody>
       </p:sp>
       <p:sp>
         <p:nvSpPr>
@@ -7330,7 +7394,7 @@
           <a:bodyPr wrap="square" lIns="0" tIns="0" rIns="0" bIns="0" rtlCol="0" anchor="ctr"/>
           <a:lstStyle/>
           <a:p>
-            <a:pPr indent="0" marL="0">
+            <a:pPr marL="0" indent="0">
               <a:buNone/>
             </a:pPr>
             <a:r>
@@ -7369,7 +7433,7 @@
           <a:bodyPr wrap="square" lIns="0" tIns="0" rIns="0" bIns="0" rtlCol="0" anchor="ctr"/>
           <a:lstStyle/>
           <a:p>
-            <a:pPr indent="0" marL="0">
+            <a:pPr marL="0" indent="0">
               <a:buNone/>
             </a:pPr>
             <a:r>
@@ -7395,8 +7459,8 @@
         </p:nvSpPr>
         <p:spPr>
           <a:xfrm>
-            <a:off x="6583680" y="2734056"/>
-            <a:ext cx="5074920" cy="502920"/>
+            <a:off x="6309360" y="2734056"/>
+            <a:ext cx="5349240" cy="502920"/>
           </a:xfrm>
           <a:prstGeom prst="rect">
             <a:avLst/>
@@ -7411,6 +7475,13 @@
             <a:prstDash val="solid"/>
           </a:ln>
         </p:spPr>
+        <p:txBody>
+          <a:bodyPr/>
+          <a:lstStyle/>
+          <a:p>
+            <a:endParaRPr lang="ko-KR" altLang="en-US"/>
+          </a:p>
+        </p:txBody>
       </p:sp>
       <p:sp>
         <p:nvSpPr>
@@ -7433,7 +7504,7 @@
           <a:bodyPr wrap="square" lIns="0" tIns="0" rIns="0" bIns="0" rtlCol="0" anchor="ctr"/>
           <a:lstStyle/>
           <a:p>
-            <a:pPr indent="0" marL="0">
+            <a:pPr marL="0" indent="0">
               <a:buNone/>
             </a:pPr>
             <a:r>
@@ -7472,7 +7543,7 @@
           <a:bodyPr wrap="square" lIns="0" tIns="0" rIns="0" bIns="0" rtlCol="0" anchor="ctr"/>
           <a:lstStyle/>
           <a:p>
-            <a:pPr indent="0" marL="0">
+            <a:pPr marL="0" indent="0">
               <a:buNone/>
             </a:pPr>
             <a:r>
@@ -7516,6 +7587,13 @@
             <a:prstDash val="solid"/>
           </a:ln>
         </p:spPr>
+        <p:txBody>
+          <a:bodyPr/>
+          <a:lstStyle/>
+          <a:p>
+            <a:endParaRPr lang="ko-KR" altLang="en-US"/>
+          </a:p>
+        </p:txBody>
       </p:sp>
       <p:sp>
         <p:nvSpPr>
@@ -7538,7 +7616,7 @@
           <a:bodyPr wrap="square" lIns="0" tIns="0" rIns="0" bIns="0" rtlCol="0" anchor="ctr"/>
           <a:lstStyle/>
           <a:p>
-            <a:pPr indent="0" marL="0">
+            <a:pPr marL="0" indent="0">
               <a:buNone/>
             </a:pPr>
             <a:r>
@@ -7577,7 +7655,7 @@
           <a:bodyPr wrap="square" lIns="0" tIns="0" rIns="0" bIns="0" rtlCol="0" anchor="t"/>
           <a:lstStyle/>
           <a:p>
-            <a:pPr indent="0" marL="0">
+            <a:pPr marL="0" indent="0">
               <a:lnSpc>
                 <a:spcPts val="1900"/>
               </a:lnSpc>
@@ -7624,6 +7702,13 @@
             <a:prstDash val="solid"/>
           </a:ln>
         </p:spPr>
+        <p:txBody>
+          <a:bodyPr/>
+          <a:lstStyle/>
+          <a:p>
+            <a:endParaRPr lang="ko-KR" altLang="en-US"/>
+          </a:p>
+        </p:txBody>
       </p:sp>
       <p:sp>
         <p:nvSpPr>
@@ -7646,7 +7731,7 @@
           <a:bodyPr wrap="square" lIns="0" tIns="0" rIns="0" bIns="0" rtlCol="0" anchor="ctr"/>
           <a:lstStyle/>
           <a:p>
-            <a:pPr indent="0" marL="0">
+            <a:pPr marL="0" indent="0">
               <a:buNone/>
             </a:pPr>
             <a:r>
@@ -7685,7 +7770,7 @@
           <a:bodyPr wrap="square" lIns="0" tIns="0" rIns="0" bIns="0" rtlCol="0" anchor="t"/>
           <a:lstStyle/>
           <a:p>
-            <a:pPr indent="0" marL="0">
+            <a:pPr marL="0" indent="0">
               <a:lnSpc>
                 <a:spcPts val="1900"/>
               </a:lnSpc>
@@ -7732,6 +7817,13 @@
             <a:prstDash val="solid"/>
           </a:ln>
         </p:spPr>
+        <p:txBody>
+          <a:bodyPr/>
+          <a:lstStyle/>
+          <a:p>
+            <a:endParaRPr lang="ko-KR" altLang="en-US"/>
+          </a:p>
+        </p:txBody>
       </p:sp>
       <p:sp>
         <p:nvSpPr>
@@ -7754,7 +7846,7 @@
           <a:bodyPr wrap="square" lIns="0" tIns="0" rIns="0" bIns="0" rtlCol="0" anchor="ctr"/>
           <a:lstStyle/>
           <a:p>
-            <a:pPr algn="ctr" indent="0" marL="0">
+            <a:pPr marL="0" indent="0" algn="ctr">
               <a:buNone/>
             </a:pPr>
             <a:r>
@@ -7788,6 +7880,7 @@
         <a:solidFill>
           <a:srgbClr val="1B1D21"/>
         </a:solidFill>
+        <a:effectLst/>
       </p:bgPr>
     </p:bg>
     <p:spTree>
@@ -7823,6 +7916,13 @@
           </a:solidFill>
           <a:ln/>
         </p:spPr>
+        <p:txBody>
+          <a:bodyPr/>
+          <a:lstStyle/>
+          <a:p>
+            <a:endParaRPr lang="ko-KR" altLang="en-US"/>
+          </a:p>
+        </p:txBody>
       </p:sp>
       <p:sp>
         <p:nvSpPr>
@@ -7845,11 +7945,11 @@
           <a:bodyPr wrap="square" lIns="0" tIns="0" rIns="0" bIns="0" rtlCol="0" anchor="ctr"/>
           <a:lstStyle/>
           <a:p>
-            <a:pPr indent="0" marL="0">
-              <a:buNone/>
-            </a:pPr>
-            <a:r>
-              <a:rPr lang="en-US" sz="1200" b="1" spc="100" kern="0" dirty="0">
+            <a:pPr marL="0" indent="0">
+              <a:buNone/>
+            </a:pPr>
+            <a:r>
+              <a:rPr lang="en-US" sz="1200" b="1" kern="0" spc="100" dirty="0">
                 <a:solidFill>
                   <a:srgbClr val="6C7078"/>
                 </a:solidFill>
@@ -7884,7 +7984,7 @@
           <a:bodyPr wrap="square" lIns="0" tIns="0" rIns="0" bIns="0" rtlCol="0" anchor="ctr"/>
           <a:lstStyle/>
           <a:p>
-            <a:pPr indent="0" marL="0">
+            <a:pPr marL="0" indent="0">
               <a:buNone/>
             </a:pPr>
             <a:r>
@@ -7901,7 +8001,7 @@
             <a:endParaRPr lang="en-US" sz="3600" dirty="0"/>
           </a:p>
           <a:p>
-            <a:pPr indent="0" marL="0">
+            <a:pPr marL="0" indent="0">
               <a:buNone/>
             </a:pPr>
             <a:r>
@@ -7940,7 +8040,7 @@
           <a:bodyPr wrap="square" lIns="0" tIns="0" rIns="0" bIns="0" rtlCol="0" anchor="ctr"/>
           <a:lstStyle/>
           <a:p>
-            <a:pPr indent="0" marL="0">
+            <a:pPr marL="0" indent="0">
               <a:lnSpc>
                 <a:spcPts val="3200"/>
               </a:lnSpc>
@@ -7960,7 +8060,7 @@
             <a:endParaRPr lang="en-US" sz="1900" dirty="0"/>
           </a:p>
           <a:p>
-            <a:pPr indent="0" marL="0">
+            <a:pPr marL="0" indent="0">
               <a:lnSpc>
                 <a:spcPts val="3200"/>
               </a:lnSpc>
@@ -8002,7 +8102,7 @@
           <a:bodyPr wrap="square" lIns="0" tIns="0" rIns="0" bIns="0" rtlCol="0" anchor="ctr"/>
           <a:lstStyle/>
           <a:p>
-            <a:pPr indent="0" marL="0">
+            <a:pPr marL="0" indent="0">
               <a:buNone/>
             </a:pPr>
             <a:r>
@@ -8041,7 +8141,7 @@
           <a:bodyPr wrap="square" lIns="0" tIns="0" rIns="0" bIns="0" rtlCol="0" anchor="ctr"/>
           <a:lstStyle/>
           <a:p>
-            <a:pPr algn="r" indent="0" marL="0">
+            <a:pPr marL="0" indent="0" algn="r">
               <a:buNone/>
             </a:pPr>
             <a:r>
@@ -8075,6 +8175,7 @@
         <a:solidFill>
           <a:srgbClr val="FFFFFF"/>
         </a:solidFill>
+        <a:effectLst/>
       </p:bgPr>
     </p:bg>
     <p:spTree>
@@ -8112,7 +8213,7 @@
           <a:bodyPr wrap="square" lIns="0" tIns="0" rIns="0" bIns="0" rtlCol="0" anchor="ctr"/>
           <a:lstStyle/>
           <a:p>
-            <a:pPr indent="0" marL="0">
+            <a:pPr marL="0" indent="0">
               <a:buNone/>
             </a:pPr>
             <a:r>
@@ -8151,6 +8252,13 @@
           </a:solidFill>
           <a:ln/>
         </p:spPr>
+        <p:txBody>
+          <a:bodyPr/>
+          <a:lstStyle/>
+          <a:p>
+            <a:endParaRPr lang="ko-KR" altLang="en-US"/>
+          </a:p>
+        </p:txBody>
       </p:sp>
       <p:sp>
         <p:nvSpPr>
@@ -8173,7 +8281,7 @@
           <a:bodyPr wrap="square" lIns="0" tIns="0" rIns="0" bIns="0" rtlCol="0" anchor="ctr"/>
           <a:lstStyle/>
           <a:p>
-            <a:pPr algn="ctr" indent="0" marL="0">
+            <a:pPr marL="0" indent="0" algn="ctr">
               <a:buNone/>
             </a:pPr>
             <a:r>
@@ -8212,7 +8320,7 @@
           <a:bodyPr wrap="square" lIns="0" tIns="0" rIns="0" bIns="0" rtlCol="0" anchor="ctr"/>
           <a:lstStyle/>
           <a:p>
-            <a:pPr indent="0" marL="0">
+            <a:pPr marL="0" indent="0">
               <a:buNone/>
             </a:pPr>
             <a:r>
@@ -8249,6 +8357,13 @@
           </a:solidFill>
           <a:ln/>
         </p:spPr>
+        <p:txBody>
+          <a:bodyPr/>
+          <a:lstStyle/>
+          <a:p>
+            <a:endParaRPr lang="ko-KR" altLang="en-US"/>
+          </a:p>
+        </p:txBody>
       </p:sp>
       <p:sp>
         <p:nvSpPr>
@@ -8271,7 +8386,7 @@
           <a:bodyPr wrap="square" lIns="0" tIns="0" rIns="0" bIns="0" rtlCol="0" anchor="ctr"/>
           <a:lstStyle/>
           <a:p>
-            <a:pPr algn="r" indent="0" marL="0">
+            <a:pPr marL="0" indent="0" algn="r">
               <a:buNone/>
             </a:pPr>
             <a:r>
@@ -8310,7 +8425,7 @@
           <a:bodyPr wrap="square" lIns="0" tIns="0" rIns="0" bIns="0" rtlCol="0" anchor="ctr"/>
           <a:lstStyle/>
           <a:p>
-            <a:pPr indent="0" marL="0">
+            <a:pPr marL="0" indent="0">
               <a:buNone/>
             </a:pPr>
             <a:r>
@@ -8349,7 +8464,7 @@
           <a:bodyPr wrap="square" lIns="0" tIns="0" rIns="0" bIns="0" rtlCol="0" anchor="ctr"/>
           <a:lstStyle/>
           <a:p>
-            <a:pPr algn="r" indent="0" marL="0">
+            <a:pPr marL="0" indent="0" algn="r">
               <a:buNone/>
             </a:pPr>
             <a:r>
@@ -8388,6 +8503,13 @@
           </a:solidFill>
           <a:ln/>
         </p:spPr>
+        <p:txBody>
+          <a:bodyPr/>
+          <a:lstStyle/>
+          <a:p>
+            <a:endParaRPr lang="ko-KR" altLang="en-US"/>
+          </a:p>
+        </p:txBody>
       </p:sp>
       <p:sp>
         <p:nvSpPr>
@@ -8410,7 +8532,7 @@
           <a:bodyPr wrap="square" lIns="0" tIns="0" rIns="0" bIns="0" rtlCol="0" anchor="t"/>
           <a:lstStyle/>
           <a:p>
-            <a:pPr indent="0" marL="0">
+            <a:pPr marL="0" indent="0">
               <a:lnSpc>
                 <a:spcPts val="2720"/>
               </a:lnSpc>
@@ -8430,7 +8552,7 @@
             <a:endParaRPr lang="en-US" sz="1600" dirty="0"/>
           </a:p>
           <a:p>
-            <a:pPr indent="0" marL="0">
+            <a:pPr marL="0" indent="0">
               <a:lnSpc>
                 <a:spcPts val="2720"/>
               </a:lnSpc>
@@ -8450,7 +8572,7 @@
             <a:endParaRPr lang="en-US" sz="1600" dirty="0"/>
           </a:p>
           <a:p>
-            <a:pPr indent="0" marL="0">
+            <a:pPr marL="0" indent="0">
               <a:lnSpc>
                 <a:spcPts val="2720"/>
               </a:lnSpc>
@@ -8492,7 +8614,7 @@
           <a:bodyPr wrap="square" lIns="0" tIns="0" rIns="0" bIns="0" rtlCol="0" anchor="ctr"/>
           <a:lstStyle/>
           <a:p>
-            <a:pPr indent="0" marL="0">
+            <a:pPr marL="0" indent="0">
               <a:lnSpc>
                 <a:spcPts val="3100"/>
               </a:lnSpc>
@@ -8512,7 +8634,7 @@
             <a:endParaRPr lang="en-US" sz="2100" dirty="0"/>
           </a:p>
           <a:p>
-            <a:pPr indent="0" marL="0">
+            <a:pPr marL="0" indent="0">
               <a:lnSpc>
                 <a:spcPts val="3100"/>
               </a:lnSpc>
@@ -8535,14 +8657,14 @@
       </p:sp>
       <p:pic>
         <p:nvPicPr>
-          <p:cNvPr id="13" name="Image 0" descr="/home/claude/w5/교과서_배포/assets/img/03-2-04-too-many-names.png">    </p:cNvPr>
+          <p:cNvPr id="13" name="Image 0" descr="/home/claude/w5/교과서_배포/assets/img/03-2-04-too-many-names.png"/>
           <p:cNvPicPr>
             <a:picLocks noChangeAspect="1"/>
           </p:cNvPicPr>
           <p:nvPr/>
         </p:nvPicPr>
         <p:blipFill>
-          <a:blip r:embed="rId1"/>
+          <a:blip r:embed="rId3"/>
           <a:stretch>
             <a:fillRect/>
           </a:stretch>
@@ -8583,6 +8705,13 @@
             <a:prstDash val="solid"/>
           </a:ln>
         </p:spPr>
+        <p:txBody>
+          <a:bodyPr/>
+          <a:lstStyle/>
+          <a:p>
+            <a:endParaRPr lang="ko-KR" altLang="en-US"/>
+          </a:p>
+        </p:txBody>
       </p:sp>
       <p:sp>
         <p:nvSpPr>
@@ -8605,7 +8734,7 @@
           <a:bodyPr wrap="square" lIns="0" tIns="0" rIns="0" bIns="0" rtlCol="0" anchor="ctr"/>
           <a:lstStyle/>
           <a:p>
-            <a:pPr algn="ctr" indent="0" marL="0">
+            <a:pPr marL="0" indent="0" algn="ctr">
               <a:buNone/>
             </a:pPr>
             <a:r>
@@ -8644,7 +8773,7 @@
           <a:bodyPr wrap="square" lIns="0" tIns="0" rIns="0" bIns="0" rtlCol="0" anchor="ctr"/>
           <a:lstStyle/>
           <a:p>
-            <a:pPr algn="ctr" indent="0" marL="0">
+            <a:pPr marL="0" indent="0" algn="ctr">
               <a:buNone/>
             </a:pPr>
             <a:r>
@@ -8678,6 +8807,7 @@
         <a:solidFill>
           <a:srgbClr val="FFFFFF"/>
         </a:solidFill>
+        <a:effectLst/>
       </p:bgPr>
     </p:bg>
     <p:spTree>
@@ -8715,7 +8845,7 @@
           <a:bodyPr wrap="square" lIns="0" tIns="0" rIns="0" bIns="0" rtlCol="0" anchor="ctr"/>
           <a:lstStyle/>
           <a:p>
-            <a:pPr indent="0" marL="0">
+            <a:pPr marL="0" indent="0">
               <a:buNone/>
             </a:pPr>
             <a:r>
@@ -8754,6 +8884,13 @@
           </a:solidFill>
           <a:ln/>
         </p:spPr>
+        <p:txBody>
+          <a:bodyPr/>
+          <a:lstStyle/>
+          <a:p>
+            <a:endParaRPr lang="ko-KR" altLang="en-US"/>
+          </a:p>
+        </p:txBody>
       </p:sp>
       <p:sp>
         <p:nvSpPr>
@@ -8776,7 +8913,7 @@
           <a:bodyPr wrap="square" lIns="0" tIns="0" rIns="0" bIns="0" rtlCol="0" anchor="ctr"/>
           <a:lstStyle/>
           <a:p>
-            <a:pPr algn="ctr" indent="0" marL="0">
+            <a:pPr marL="0" indent="0" algn="ctr">
               <a:buNone/>
             </a:pPr>
             <a:r>
@@ -8815,7 +8952,7 @@
           <a:bodyPr wrap="square" lIns="0" tIns="0" rIns="0" bIns="0" rtlCol="0" anchor="ctr"/>
           <a:lstStyle/>
           <a:p>
-            <a:pPr indent="0" marL="0">
+            <a:pPr marL="0" indent="0">
               <a:buNone/>
             </a:pPr>
             <a:r>
@@ -8852,6 +8989,13 @@
           </a:solidFill>
           <a:ln/>
         </p:spPr>
+        <p:txBody>
+          <a:bodyPr/>
+          <a:lstStyle/>
+          <a:p>
+            <a:endParaRPr lang="ko-KR" altLang="en-US"/>
+          </a:p>
+        </p:txBody>
       </p:sp>
       <p:sp>
         <p:nvSpPr>
@@ -8874,7 +9018,7 @@
           <a:bodyPr wrap="square" lIns="0" tIns="0" rIns="0" bIns="0" rtlCol="0" anchor="ctr"/>
           <a:lstStyle/>
           <a:p>
-            <a:pPr algn="r" indent="0" marL="0">
+            <a:pPr marL="0" indent="0" algn="r">
               <a:buNone/>
             </a:pPr>
             <a:r>
@@ -8913,7 +9057,7 @@
           <a:bodyPr wrap="square" lIns="0" tIns="0" rIns="0" bIns="0" rtlCol="0" anchor="ctr"/>
           <a:lstStyle/>
           <a:p>
-            <a:pPr indent="0" marL="0">
+            <a:pPr marL="0" indent="0">
               <a:buNone/>
             </a:pPr>
             <a:r>
@@ -8952,7 +9096,7 @@
           <a:bodyPr wrap="square" lIns="0" tIns="0" rIns="0" bIns="0" rtlCol="0" anchor="ctr"/>
           <a:lstStyle/>
           <a:p>
-            <a:pPr algn="r" indent="0" marL="0">
+            <a:pPr marL="0" indent="0" algn="r">
               <a:buNone/>
             </a:pPr>
             <a:r>
@@ -8991,6 +9135,13 @@
           </a:solidFill>
           <a:ln/>
         </p:spPr>
+        <p:txBody>
+          <a:bodyPr/>
+          <a:lstStyle/>
+          <a:p>
+            <a:endParaRPr lang="ko-KR" altLang="en-US"/>
+          </a:p>
+        </p:txBody>
       </p:sp>
       <p:sp>
         <p:nvSpPr>
@@ -9013,7 +9164,7 @@
           <a:bodyPr wrap="square" lIns="0" tIns="0" rIns="0" bIns="0" rtlCol="0" anchor="t"/>
           <a:lstStyle/>
           <a:p>
-            <a:pPr indent="0" marL="0">
+            <a:pPr marL="0" indent="0">
               <a:lnSpc>
                 <a:spcPts val="3570"/>
               </a:lnSpc>
@@ -9058,6 +9209,13 @@
             <a:prstDash val="solid"/>
           </a:ln>
         </p:spPr>
+        <p:txBody>
+          <a:bodyPr/>
+          <a:lstStyle/>
+          <a:p>
+            <a:endParaRPr lang="ko-KR" altLang="en-US"/>
+          </a:p>
+        </p:txBody>
       </p:sp>
       <p:sp>
         <p:nvSpPr>
@@ -9080,7 +9238,7 @@
           <a:bodyPr wrap="square" lIns="0" tIns="0" rIns="0" bIns="0" rtlCol="0" anchor="ctr"/>
           <a:lstStyle/>
           <a:p>
-            <a:pPr algn="ctr" indent="0" marL="0">
+            <a:pPr marL="0" indent="0" algn="ctr">
               <a:buNone/>
             </a:pPr>
             <a:r>
@@ -9122,6 +9280,13 @@
             <a:prstDash val="solid"/>
           </a:ln>
         </p:spPr>
+        <p:txBody>
+          <a:bodyPr/>
+          <a:lstStyle/>
+          <a:p>
+            <a:endParaRPr lang="ko-KR" altLang="en-US"/>
+          </a:p>
+        </p:txBody>
       </p:sp>
       <p:sp>
         <p:nvSpPr>
@@ -9144,7 +9309,7 @@
           <a:bodyPr wrap="square" lIns="0" tIns="0" rIns="0" bIns="0" rtlCol="0" anchor="ctr"/>
           <a:lstStyle/>
           <a:p>
-            <a:pPr algn="ctr" indent="0" marL="0">
+            <a:pPr marL="0" indent="0" algn="ctr">
               <a:buNone/>
             </a:pPr>
             <a:r>
@@ -9186,6 +9351,13 @@
             <a:prstDash val="solid"/>
           </a:ln>
         </p:spPr>
+        <p:txBody>
+          <a:bodyPr/>
+          <a:lstStyle/>
+          <a:p>
+            <a:endParaRPr lang="ko-KR" altLang="en-US"/>
+          </a:p>
+        </p:txBody>
       </p:sp>
       <p:sp>
         <p:nvSpPr>
@@ -9208,7 +9380,7 @@
           <a:bodyPr wrap="square" lIns="0" tIns="0" rIns="0" bIns="0" rtlCol="0" anchor="ctr"/>
           <a:lstStyle/>
           <a:p>
-            <a:pPr algn="ctr" indent="0" marL="0">
+            <a:pPr marL="0" indent="0" algn="ctr">
               <a:buNone/>
             </a:pPr>
             <a:r>
@@ -9250,6 +9422,13 @@
             <a:prstDash val="solid"/>
           </a:ln>
         </p:spPr>
+        <p:txBody>
+          <a:bodyPr/>
+          <a:lstStyle/>
+          <a:p>
+            <a:endParaRPr lang="ko-KR" altLang="en-US"/>
+          </a:p>
+        </p:txBody>
       </p:sp>
       <p:sp>
         <p:nvSpPr>
@@ -9272,7 +9451,7 @@
           <a:bodyPr wrap="square" lIns="0" tIns="0" rIns="0" bIns="0" rtlCol="0" anchor="ctr"/>
           <a:lstStyle/>
           <a:p>
-            <a:pPr algn="ctr" indent="0" marL="0">
+            <a:pPr marL="0" indent="0" algn="ctr">
               <a:buNone/>
             </a:pPr>
             <a:r>
@@ -9311,7 +9490,7 @@
           <a:bodyPr wrap="square" lIns="0" tIns="0" rIns="0" bIns="0" rtlCol="0" anchor="ctr"/>
           <a:lstStyle/>
           <a:p>
-            <a:pPr algn="ctr" indent="0" marL="0">
+            <a:pPr marL="0" indent="0" algn="ctr">
               <a:buNone/>
             </a:pPr>
             <a:r>
@@ -9355,6 +9534,13 @@
             <a:prstDash val="solid"/>
           </a:ln>
         </p:spPr>
+        <p:txBody>
+          <a:bodyPr/>
+          <a:lstStyle/>
+          <a:p>
+            <a:endParaRPr lang="ko-KR" altLang="en-US"/>
+          </a:p>
+        </p:txBody>
       </p:sp>
       <p:sp>
         <p:nvSpPr>
@@ -9377,7 +9563,7 @@
           <a:bodyPr wrap="square" lIns="0" tIns="0" rIns="0" bIns="0" rtlCol="0" anchor="ctr"/>
           <a:lstStyle/>
           <a:p>
-            <a:pPr algn="ctr" indent="0" marL="0">
+            <a:pPr marL="0" indent="0" algn="ctr">
               <a:buNone/>
             </a:pPr>
             <a:r>
@@ -9411,6 +9597,7 @@
         <a:solidFill>
           <a:srgbClr val="FFFFFF"/>
         </a:solidFill>
+        <a:effectLst/>
       </p:bgPr>
     </p:bg>
     <p:spTree>
@@ -9448,7 +9635,7 @@
           <a:bodyPr wrap="square" lIns="0" tIns="0" rIns="0" bIns="0" rtlCol="0" anchor="ctr"/>
           <a:lstStyle/>
           <a:p>
-            <a:pPr indent="0" marL="0">
+            <a:pPr marL="0" indent="0">
               <a:buNone/>
             </a:pPr>
             <a:r>
@@ -9487,6 +9674,13 @@
           </a:solidFill>
           <a:ln/>
         </p:spPr>
+        <p:txBody>
+          <a:bodyPr/>
+          <a:lstStyle/>
+          <a:p>
+            <a:endParaRPr lang="ko-KR" altLang="en-US"/>
+          </a:p>
+        </p:txBody>
       </p:sp>
       <p:sp>
         <p:nvSpPr>
@@ -9509,7 +9703,7 @@
           <a:bodyPr wrap="square" lIns="0" tIns="0" rIns="0" bIns="0" rtlCol="0" anchor="ctr"/>
           <a:lstStyle/>
           <a:p>
-            <a:pPr algn="ctr" indent="0" marL="0">
+            <a:pPr marL="0" indent="0" algn="ctr">
               <a:buNone/>
             </a:pPr>
             <a:r>
@@ -9548,7 +9742,7 @@
           <a:bodyPr wrap="square" lIns="0" tIns="0" rIns="0" bIns="0" rtlCol="0" anchor="ctr"/>
           <a:lstStyle/>
           <a:p>
-            <a:pPr indent="0" marL="0">
+            <a:pPr marL="0" indent="0">
               <a:buNone/>
             </a:pPr>
             <a:r>
@@ -9585,6 +9779,13 @@
           </a:solidFill>
           <a:ln/>
         </p:spPr>
+        <p:txBody>
+          <a:bodyPr/>
+          <a:lstStyle/>
+          <a:p>
+            <a:endParaRPr lang="ko-KR" altLang="en-US"/>
+          </a:p>
+        </p:txBody>
       </p:sp>
       <p:sp>
         <p:nvSpPr>
@@ -9607,7 +9808,7 @@
           <a:bodyPr wrap="square" lIns="0" tIns="0" rIns="0" bIns="0" rtlCol="0" anchor="ctr"/>
           <a:lstStyle/>
           <a:p>
-            <a:pPr algn="r" indent="0" marL="0">
+            <a:pPr marL="0" indent="0" algn="r">
               <a:buNone/>
             </a:pPr>
             <a:r>
@@ -9646,7 +9847,7 @@
           <a:bodyPr wrap="square" lIns="0" tIns="0" rIns="0" bIns="0" rtlCol="0" anchor="ctr"/>
           <a:lstStyle/>
           <a:p>
-            <a:pPr indent="0" marL="0">
+            <a:pPr marL="0" indent="0">
               <a:buNone/>
             </a:pPr>
             <a:r>
@@ -9685,7 +9886,7 @@
           <a:bodyPr wrap="square" lIns="0" tIns="0" rIns="0" bIns="0" rtlCol="0" anchor="ctr"/>
           <a:lstStyle/>
           <a:p>
-            <a:pPr algn="r" indent="0" marL="0">
+            <a:pPr marL="0" indent="0" algn="r">
               <a:buNone/>
             </a:pPr>
             <a:r>
@@ -9712,7 +9913,7 @@
         <p:spPr>
           <a:xfrm>
             <a:off x="530352" y="1783080"/>
-            <a:ext cx="11128248" cy="1143000"/>
+            <a:ext cx="11128248" cy="1207698"/>
           </a:xfrm>
           <a:prstGeom prst="roundRect">
             <a:avLst>
@@ -9724,6 +9925,13 @@
           </a:solidFill>
           <a:ln/>
         </p:spPr>
+        <p:txBody>
+          <a:bodyPr/>
+          <a:lstStyle/>
+          <a:p>
+            <a:endParaRPr lang="ko-KR" altLang="en-US"/>
+          </a:p>
+        </p:txBody>
       </p:sp>
       <p:sp>
         <p:nvSpPr>
@@ -9746,7 +9954,7 @@
           <a:bodyPr wrap="square" lIns="0" tIns="0" rIns="0" bIns="0" rtlCol="0" anchor="ctr"/>
           <a:lstStyle/>
           <a:p>
-            <a:pPr indent="0" marL="0">
+            <a:pPr marL="0" indent="0">
               <a:buNone/>
             </a:pPr>
             <a:r>
@@ -9785,7 +9993,7 @@
           <a:bodyPr wrap="square" lIns="0" tIns="0" rIns="0" bIns="0" rtlCol="0" anchor="t"/>
           <a:lstStyle/>
           <a:p>
-            <a:pPr indent="0" marL="0">
+            <a:pPr marL="0" indent="0">
               <a:lnSpc>
                 <a:spcPts val="3060"/>
               </a:lnSpc>
@@ -9805,7 +10013,7 @@
             <a:endParaRPr lang="en-US" sz="1800" dirty="0"/>
           </a:p>
           <a:p>
-            <a:pPr indent="0" marL="0">
+            <a:pPr marL="0" indent="0">
               <a:lnSpc>
                 <a:spcPts val="3060"/>
               </a:lnSpc>
@@ -9834,7 +10042,7 @@
         </p:nvSpPr>
         <p:spPr>
           <a:xfrm>
-            <a:off x="2194560" y="3108960"/>
+            <a:off x="2194560" y="3143464"/>
             <a:ext cx="1943100" cy="1188720"/>
           </a:xfrm>
           <a:prstGeom prst="rect">
@@ -9850,6 +10058,13 @@
             <a:prstDash val="solid"/>
           </a:ln>
         </p:spPr>
+        <p:txBody>
+          <a:bodyPr/>
+          <a:lstStyle/>
+          <a:p>
+            <a:endParaRPr lang="ko-KR" altLang="en-US"/>
+          </a:p>
+        </p:txBody>
       </p:sp>
       <p:sp>
         <p:nvSpPr>
@@ -9872,7 +10087,7 @@
           <a:bodyPr wrap="square" lIns="0" tIns="0" rIns="0" bIns="0" rtlCol="0" anchor="ctr"/>
           <a:lstStyle/>
           <a:p>
-            <a:pPr algn="ctr" indent="0" marL="0">
+            <a:pPr marL="0" indent="0" algn="ctr">
               <a:buNone/>
             </a:pPr>
             <a:r>
@@ -9898,7 +10113,7 @@
         </p:nvSpPr>
         <p:spPr>
           <a:xfrm>
-            <a:off x="4137660" y="3108960"/>
+            <a:off x="4137660" y="3143464"/>
             <a:ext cx="1943100" cy="1188720"/>
           </a:xfrm>
           <a:prstGeom prst="rect">
@@ -9914,6 +10129,13 @@
             <a:prstDash val="solid"/>
           </a:ln>
         </p:spPr>
+        <p:txBody>
+          <a:bodyPr/>
+          <a:lstStyle/>
+          <a:p>
+            <a:endParaRPr lang="ko-KR" altLang="en-US"/>
+          </a:p>
+        </p:txBody>
       </p:sp>
       <p:sp>
         <p:nvSpPr>
@@ -9936,7 +10158,7 @@
           <a:bodyPr wrap="square" lIns="0" tIns="0" rIns="0" bIns="0" rtlCol="0" anchor="ctr"/>
           <a:lstStyle/>
           <a:p>
-            <a:pPr algn="ctr" indent="0" marL="0">
+            <a:pPr marL="0" indent="0" algn="ctr">
               <a:buNone/>
             </a:pPr>
             <a:r>
@@ -9962,7 +10184,7 @@
         </p:nvSpPr>
         <p:spPr>
           <a:xfrm>
-            <a:off x="6080760" y="3108960"/>
+            <a:off x="6080760" y="3143464"/>
             <a:ext cx="1943100" cy="1188720"/>
           </a:xfrm>
           <a:prstGeom prst="rect">
@@ -9978,6 +10200,13 @@
             <a:prstDash val="solid"/>
           </a:ln>
         </p:spPr>
+        <p:txBody>
+          <a:bodyPr/>
+          <a:lstStyle/>
+          <a:p>
+            <a:endParaRPr lang="ko-KR" altLang="en-US"/>
+          </a:p>
+        </p:txBody>
       </p:sp>
       <p:sp>
         <p:nvSpPr>
@@ -10000,7 +10229,7 @@
           <a:bodyPr wrap="square" lIns="0" tIns="0" rIns="0" bIns="0" rtlCol="0" anchor="ctr"/>
           <a:lstStyle/>
           <a:p>
-            <a:pPr algn="ctr" indent="0" marL="0">
+            <a:pPr marL="0" indent="0" algn="ctr">
               <a:buNone/>
             </a:pPr>
             <a:r>
@@ -10026,7 +10255,7 @@
         </p:nvSpPr>
         <p:spPr>
           <a:xfrm>
-            <a:off x="8023860" y="3108960"/>
+            <a:off x="8023860" y="3143464"/>
             <a:ext cx="1943100" cy="1188720"/>
           </a:xfrm>
           <a:prstGeom prst="rect">
@@ -10042,6 +10271,13 @@
             <a:prstDash val="solid"/>
           </a:ln>
         </p:spPr>
+        <p:txBody>
+          <a:bodyPr/>
+          <a:lstStyle/>
+          <a:p>
+            <a:endParaRPr lang="ko-KR" altLang="en-US"/>
+          </a:p>
+        </p:txBody>
       </p:sp>
       <p:sp>
         <p:nvSpPr>
@@ -10064,7 +10300,7 @@
           <a:bodyPr wrap="square" lIns="0" tIns="0" rIns="0" bIns="0" rtlCol="0" anchor="ctr"/>
           <a:lstStyle/>
           <a:p>
-            <a:pPr algn="ctr" indent="0" marL="0">
+            <a:pPr marL="0" indent="0" algn="ctr">
               <a:buNone/>
             </a:pPr>
             <a:r>
@@ -10090,7 +10326,7 @@
         </p:nvSpPr>
         <p:spPr>
           <a:xfrm>
-            <a:off x="530352" y="4480560"/>
+            <a:off x="530352" y="4515064"/>
             <a:ext cx="11128248" cy="640080"/>
           </a:xfrm>
           <a:prstGeom prst="rect">
@@ -10103,7 +10339,7 @@
           <a:bodyPr wrap="square" lIns="0" tIns="0" rIns="0" bIns="0" rtlCol="0" anchor="ctr"/>
           <a:lstStyle/>
           <a:p>
-            <a:pPr algn="ctr" indent="0" marL="0">
+            <a:pPr marL="0" indent="0" algn="ctr">
               <a:buNone/>
             </a:pPr>
             <a:r>
@@ -10118,72 +10354,6 @@
               <a:t>그럼 0 은 무슨 뜻일까?</a:t>
             </a:r>
             <a:endParaRPr lang="en-US" sz="3000" dirty="0"/>
-          </a:p>
-        </p:txBody>
-      </p:sp>
-      <p:sp>
-        <p:nvSpPr>
-          <p:cNvPr id="22" name="Shape 20"/>
-          <p:cNvSpPr/>
-          <p:nvPr/>
-        </p:nvSpPr>
-        <p:spPr>
-          <a:xfrm>
-            <a:off x="530352" y="5257800"/>
-            <a:ext cx="11128248" cy="512064"/>
-          </a:xfrm>
-          <a:prstGeom prst="roundRect">
-            <a:avLst>
-              <a:gd name="adj" fmla="val 39286"/>
-            </a:avLst>
-          </a:prstGeom>
-          <a:solidFill>
-            <a:srgbClr val="EAF5FB"/>
-          </a:solidFill>
-          <a:ln w="12700">
-            <a:solidFill>
-              <a:srgbClr val="3D8DFF"/>
-            </a:solidFill>
-            <a:prstDash val="solid"/>
-          </a:ln>
-        </p:spPr>
-      </p:sp>
-      <p:sp>
-        <p:nvSpPr>
-          <p:cNvPr id="23" name="Text 21"/>
-          <p:cNvSpPr/>
-          <p:nvPr/>
-        </p:nvSpPr>
-        <p:spPr>
-          <a:xfrm>
-            <a:off x="731520" y="5257800"/>
-            <a:ext cx="10725912" cy="512064"/>
-          </a:xfrm>
-          <a:prstGeom prst="rect">
-            <a:avLst/>
-          </a:prstGeom>
-          <a:noFill/>
-          <a:ln/>
-        </p:spPr>
-        <p:txBody>
-          <a:bodyPr wrap="square" lIns="0" tIns="0" rIns="0" bIns="0" rtlCol="0" anchor="ctr"/>
-          <a:lstStyle/>
-          <a:p>
-            <a:pPr algn="ctr" indent="0" marL="0">
-              <a:buNone/>
-            </a:pPr>
-            <a:r>
-              <a:rPr lang="en-US" sz="1350" b="1" dirty="0">
-                <a:solidFill>
-                  <a:srgbClr val="34373D"/>
-                </a:solidFill>
-                <a:latin typeface="IBM Plex Sans KR" pitchFamily="34" charset="0"/>
-                <a:ea typeface="IBM Plex Sans KR" pitchFamily="34" charset="-122"/>
-                <a:cs typeface="IBM Plex Sans KR" pitchFamily="34" charset="-120"/>
-              </a:rPr>
-              <a:t>학생 답을 먼저 듣는다. “첫 번째”라는 답을 지우지 않는다.</a:t>
-            </a:r>
-            <a:endParaRPr lang="en-US" sz="1350" dirty="0"/>
           </a:p>
         </p:txBody>
       </p:sp>
@@ -10203,6 +10373,7 @@
         <a:solidFill>
           <a:srgbClr val="FFFFFF"/>
         </a:solidFill>
+        <a:effectLst/>
       </p:bgPr>
     </p:bg>
     <p:spTree>
@@ -10240,7 +10411,7 @@
           <a:bodyPr wrap="square" lIns="0" tIns="0" rIns="0" bIns="0" rtlCol="0" anchor="ctr"/>
           <a:lstStyle/>
           <a:p>
-            <a:pPr indent="0" marL="0">
+            <a:pPr marL="0" indent="0">
               <a:buNone/>
             </a:pPr>
             <a:r>
@@ -10279,6 +10450,13 @@
           </a:solidFill>
           <a:ln/>
         </p:spPr>
+        <p:txBody>
+          <a:bodyPr/>
+          <a:lstStyle/>
+          <a:p>
+            <a:endParaRPr lang="ko-KR" altLang="en-US"/>
+          </a:p>
+        </p:txBody>
       </p:sp>
       <p:sp>
         <p:nvSpPr>
@@ -10301,7 +10479,7 @@
           <a:bodyPr wrap="square" lIns="0" tIns="0" rIns="0" bIns="0" rtlCol="0" anchor="ctr"/>
           <a:lstStyle/>
           <a:p>
-            <a:pPr algn="ctr" indent="0" marL="0">
+            <a:pPr marL="0" indent="0" algn="ctr">
               <a:buNone/>
             </a:pPr>
             <a:r>
@@ -10340,7 +10518,7 @@
           <a:bodyPr wrap="square" lIns="0" tIns="0" rIns="0" bIns="0" rtlCol="0" anchor="ctr"/>
           <a:lstStyle/>
           <a:p>
-            <a:pPr indent="0" marL="0">
+            <a:pPr marL="0" indent="0">
               <a:buNone/>
             </a:pPr>
             <a:r>
@@ -10377,6 +10555,13 @@
           </a:solidFill>
           <a:ln/>
         </p:spPr>
+        <p:txBody>
+          <a:bodyPr/>
+          <a:lstStyle/>
+          <a:p>
+            <a:endParaRPr lang="ko-KR" altLang="en-US"/>
+          </a:p>
+        </p:txBody>
       </p:sp>
       <p:sp>
         <p:nvSpPr>
@@ -10399,7 +10584,7 @@
           <a:bodyPr wrap="square" lIns="0" tIns="0" rIns="0" bIns="0" rtlCol="0" anchor="ctr"/>
           <a:lstStyle/>
           <a:p>
-            <a:pPr algn="r" indent="0" marL="0">
+            <a:pPr marL="0" indent="0" algn="r">
               <a:buNone/>
             </a:pPr>
             <a:r>
@@ -10438,7 +10623,7 @@
           <a:bodyPr wrap="square" lIns="0" tIns="0" rIns="0" bIns="0" rtlCol="0" anchor="ctr"/>
           <a:lstStyle/>
           <a:p>
-            <a:pPr indent="0" marL="0">
+            <a:pPr marL="0" indent="0">
               <a:buNone/>
             </a:pPr>
             <a:r>
@@ -10477,7 +10662,7 @@
           <a:bodyPr wrap="square" lIns="0" tIns="0" rIns="0" bIns="0" rtlCol="0" anchor="ctr"/>
           <a:lstStyle/>
           <a:p>
-            <a:pPr algn="r" indent="0" marL="0">
+            <a:pPr marL="0" indent="0" algn="r">
               <a:buNone/>
             </a:pPr>
             <a:r>
@@ -10519,6 +10704,13 @@
             <a:prstDash val="solid"/>
           </a:ln>
         </p:spPr>
+        <p:txBody>
+          <a:bodyPr/>
+          <a:lstStyle/>
+          <a:p>
+            <a:endParaRPr lang="ko-KR" altLang="en-US"/>
+          </a:p>
+        </p:txBody>
       </p:sp>
       <p:sp>
         <p:nvSpPr>
@@ -10541,7 +10733,7 @@
           <a:bodyPr wrap="square" lIns="0" tIns="0" rIns="0" bIns="0" rtlCol="0" anchor="ctr"/>
           <a:lstStyle/>
           <a:p>
-            <a:pPr algn="ctr" indent="0" marL="0">
+            <a:pPr marL="0" indent="0" algn="ctr">
               <a:buNone/>
             </a:pPr>
             <a:r>
@@ -10580,7 +10772,7 @@
           <a:bodyPr wrap="square" lIns="0" tIns="0" rIns="0" bIns="0" rtlCol="0" anchor="ctr"/>
           <a:lstStyle/>
           <a:p>
-            <a:pPr algn="ctr" indent="0" marL="0">
+            <a:pPr marL="0" indent="0" algn="ctr">
               <a:buNone/>
             </a:pPr>
             <a:r>
@@ -10622,6 +10814,13 @@
             <a:prstDash val="solid"/>
           </a:ln>
         </p:spPr>
+        <p:txBody>
+          <a:bodyPr/>
+          <a:lstStyle/>
+          <a:p>
+            <a:endParaRPr lang="ko-KR" altLang="en-US"/>
+          </a:p>
+        </p:txBody>
       </p:sp>
       <p:sp>
         <p:nvSpPr>
@@ -10644,7 +10843,7 @@
           <a:bodyPr wrap="square" lIns="0" tIns="0" rIns="0" bIns="0" rtlCol="0" anchor="ctr"/>
           <a:lstStyle/>
           <a:p>
-            <a:pPr algn="ctr" indent="0" marL="0">
+            <a:pPr marL="0" indent="0" algn="ctr">
               <a:buNone/>
             </a:pPr>
             <a:r>
@@ -10683,7 +10882,7 @@
           <a:bodyPr wrap="square" lIns="0" tIns="0" rIns="0" bIns="0" rtlCol="0" anchor="ctr"/>
           <a:lstStyle/>
           <a:p>
-            <a:pPr algn="ctr" indent="0" marL="0">
+            <a:pPr marL="0" indent="0" algn="ctr">
               <a:buNone/>
             </a:pPr>
             <a:r>
@@ -10725,6 +10924,13 @@
             <a:prstDash val="solid"/>
           </a:ln>
         </p:spPr>
+        <p:txBody>
+          <a:bodyPr/>
+          <a:lstStyle/>
+          <a:p>
+            <a:endParaRPr lang="ko-KR" altLang="en-US"/>
+          </a:p>
+        </p:txBody>
       </p:sp>
       <p:sp>
         <p:nvSpPr>
@@ -10747,7 +10953,7 @@
           <a:bodyPr wrap="square" lIns="0" tIns="0" rIns="0" bIns="0" rtlCol="0" anchor="ctr"/>
           <a:lstStyle/>
           <a:p>
-            <a:pPr algn="ctr" indent="0" marL="0">
+            <a:pPr marL="0" indent="0" algn="ctr">
               <a:buNone/>
             </a:pPr>
             <a:r>
@@ -10786,7 +10992,7 @@
           <a:bodyPr wrap="square" lIns="0" tIns="0" rIns="0" bIns="0" rtlCol="0" anchor="ctr"/>
           <a:lstStyle/>
           <a:p>
-            <a:pPr algn="ctr" indent="0" marL="0">
+            <a:pPr marL="0" indent="0" algn="ctr">
               <a:buNone/>
             </a:pPr>
             <a:r>
@@ -10828,6 +11034,13 @@
             <a:prstDash val="solid"/>
           </a:ln>
         </p:spPr>
+        <p:txBody>
+          <a:bodyPr/>
+          <a:lstStyle/>
+          <a:p>
+            <a:endParaRPr lang="ko-KR" altLang="en-US"/>
+          </a:p>
+        </p:txBody>
       </p:sp>
       <p:sp>
         <p:nvSpPr>
@@ -10850,7 +11063,7 @@
           <a:bodyPr wrap="square" lIns="0" tIns="0" rIns="0" bIns="0" rtlCol="0" anchor="ctr"/>
           <a:lstStyle/>
           <a:p>
-            <a:pPr algn="ctr" indent="0" marL="0">
+            <a:pPr marL="0" indent="0" algn="ctr">
               <a:buNone/>
             </a:pPr>
             <a:r>
@@ -10889,7 +11102,7 @@
           <a:bodyPr wrap="square" lIns="0" tIns="0" rIns="0" bIns="0" rtlCol="0" anchor="ctr"/>
           <a:lstStyle/>
           <a:p>
-            <a:pPr algn="ctr" indent="0" marL="0">
+            <a:pPr marL="0" indent="0" algn="ctr">
               <a:buNone/>
             </a:pPr>
             <a:r>
@@ -10928,7 +11141,7 @@
           <a:bodyPr wrap="square" lIns="0" tIns="0" rIns="0" bIns="0" rtlCol="0" anchor="ctr"/>
           <a:lstStyle/>
           <a:p>
-            <a:pPr algn="ctr" indent="0" marL="0">
+            <a:pPr marL="0" indent="0" algn="ctr">
               <a:buNone/>
             </a:pPr>
             <a:r>
@@ -10948,14 +11161,14 @@
       </p:sp>
       <p:pic>
         <p:nvPicPr>
-          <p:cNvPr id="23" name="Image 0" descr="/home/claude/w5/교과서_배포/assets/img/03-2-01-ruler-zero.png">    </p:cNvPr>
+          <p:cNvPr id="23" name="Image 0" descr="/home/claude/w5/교과서_배포/assets/img/03-2-01-ruler-zero.png"/>
           <p:cNvPicPr>
             <a:picLocks noChangeAspect="1"/>
           </p:cNvPicPr>
           <p:nvPr/>
         </p:nvPicPr>
         <p:blipFill>
-          <a:blip r:embed="rId1"/>
+          <a:blip r:embed="rId3"/>
           <a:stretch>
             <a:fillRect/>
           </a:stretch>
@@ -10986,6 +11199,7 @@
         <a:solidFill>
           <a:srgbClr val="FFFFFF"/>
         </a:solidFill>
+        <a:effectLst/>
       </p:bgPr>
     </p:bg>
     <p:spTree>
@@ -11023,7 +11237,7 @@
           <a:bodyPr wrap="square" lIns="0" tIns="0" rIns="0" bIns="0" rtlCol="0" anchor="ctr"/>
           <a:lstStyle/>
           <a:p>
-            <a:pPr indent="0" marL="0">
+            <a:pPr marL="0" indent="0">
               <a:buNone/>
             </a:pPr>
             <a:r>
@@ -11062,6 +11276,13 @@
           </a:solidFill>
           <a:ln/>
         </p:spPr>
+        <p:txBody>
+          <a:bodyPr/>
+          <a:lstStyle/>
+          <a:p>
+            <a:endParaRPr lang="ko-KR" altLang="en-US"/>
+          </a:p>
+        </p:txBody>
       </p:sp>
       <p:sp>
         <p:nvSpPr>
@@ -11084,7 +11305,7 @@
           <a:bodyPr wrap="square" lIns="0" tIns="0" rIns="0" bIns="0" rtlCol="0" anchor="ctr"/>
           <a:lstStyle/>
           <a:p>
-            <a:pPr algn="ctr" indent="0" marL="0">
+            <a:pPr marL="0" indent="0" algn="ctr">
               <a:buNone/>
             </a:pPr>
             <a:r>
@@ -11123,7 +11344,7 @@
           <a:bodyPr wrap="square" lIns="0" tIns="0" rIns="0" bIns="0" rtlCol="0" anchor="ctr"/>
           <a:lstStyle/>
           <a:p>
-            <a:pPr indent="0" marL="0">
+            <a:pPr marL="0" indent="0">
               <a:buNone/>
             </a:pPr>
             <a:r>
@@ -11160,6 +11381,13 @@
           </a:solidFill>
           <a:ln/>
         </p:spPr>
+        <p:txBody>
+          <a:bodyPr/>
+          <a:lstStyle/>
+          <a:p>
+            <a:endParaRPr lang="ko-KR" altLang="en-US"/>
+          </a:p>
+        </p:txBody>
       </p:sp>
       <p:sp>
         <p:nvSpPr>
@@ -11182,7 +11410,7 @@
           <a:bodyPr wrap="square" lIns="0" tIns="0" rIns="0" bIns="0" rtlCol="0" anchor="ctr"/>
           <a:lstStyle/>
           <a:p>
-            <a:pPr algn="r" indent="0" marL="0">
+            <a:pPr marL="0" indent="0" algn="r">
               <a:buNone/>
             </a:pPr>
             <a:r>
@@ -11221,7 +11449,7 @@
           <a:bodyPr wrap="square" lIns="0" tIns="0" rIns="0" bIns="0" rtlCol="0" anchor="ctr"/>
           <a:lstStyle/>
           <a:p>
-            <a:pPr indent="0" marL="0">
+            <a:pPr marL="0" indent="0">
               <a:buNone/>
             </a:pPr>
             <a:r>
@@ -11260,7 +11488,7 @@
           <a:bodyPr wrap="square" lIns="0" tIns="0" rIns="0" bIns="0" rtlCol="0" anchor="ctr"/>
           <a:lstStyle/>
           <a:p>
-            <a:pPr algn="r" indent="0" marL="0">
+            <a:pPr marL="0" indent="0" algn="r">
               <a:buNone/>
             </a:pPr>
             <a:r>
@@ -11302,6 +11530,13 @@
             <a:prstDash val="solid"/>
           </a:ln>
         </p:spPr>
+        <p:txBody>
+          <a:bodyPr/>
+          <a:lstStyle/>
+          <a:p>
+            <a:endParaRPr lang="ko-KR" altLang="en-US"/>
+          </a:p>
+        </p:txBody>
       </p:sp>
       <p:sp>
         <p:nvSpPr>
@@ -11324,7 +11559,7 @@
           <a:bodyPr wrap="square" lIns="0" tIns="0" rIns="0" bIns="0" rtlCol="0" anchor="ctr"/>
           <a:lstStyle/>
           <a:p>
-            <a:pPr algn="ctr" indent="0" marL="0">
+            <a:pPr marL="0" indent="0" algn="ctr">
               <a:buNone/>
             </a:pPr>
             <a:r>
@@ -11363,7 +11598,7 @@
           <a:bodyPr wrap="square" lIns="0" tIns="0" rIns="0" bIns="0" rtlCol="0" anchor="ctr"/>
           <a:lstStyle/>
           <a:p>
-            <a:pPr algn="ctr" indent="0" marL="0">
+            <a:pPr marL="0" indent="0" algn="ctr">
               <a:buNone/>
             </a:pPr>
             <a:r>
@@ -11405,6 +11640,13 @@
             <a:prstDash val="solid"/>
           </a:ln>
         </p:spPr>
+        <p:txBody>
+          <a:bodyPr/>
+          <a:lstStyle/>
+          <a:p>
+            <a:endParaRPr lang="ko-KR" altLang="en-US"/>
+          </a:p>
+        </p:txBody>
       </p:sp>
       <p:sp>
         <p:nvSpPr>
@@ -11427,7 +11669,7 @@
           <a:bodyPr wrap="square" lIns="0" tIns="0" rIns="0" bIns="0" rtlCol="0" anchor="ctr"/>
           <a:lstStyle/>
           <a:p>
-            <a:pPr algn="ctr" indent="0" marL="0">
+            <a:pPr marL="0" indent="0" algn="ctr">
               <a:buNone/>
             </a:pPr>
             <a:r>
@@ -11466,7 +11708,7 @@
           <a:bodyPr wrap="square" lIns="0" tIns="0" rIns="0" bIns="0" rtlCol="0" anchor="ctr"/>
           <a:lstStyle/>
           <a:p>
-            <a:pPr algn="ctr" indent="0" marL="0">
+            <a:pPr marL="0" indent="0" algn="ctr">
               <a:buNone/>
             </a:pPr>
             <a:r>
@@ -11508,6 +11750,13 @@
             <a:prstDash val="solid"/>
           </a:ln>
         </p:spPr>
+        <p:txBody>
+          <a:bodyPr/>
+          <a:lstStyle/>
+          <a:p>
+            <a:endParaRPr lang="ko-KR" altLang="en-US"/>
+          </a:p>
+        </p:txBody>
       </p:sp>
       <p:sp>
         <p:nvSpPr>
@@ -11530,7 +11779,7 @@
           <a:bodyPr wrap="square" lIns="0" tIns="0" rIns="0" bIns="0" rtlCol="0" anchor="ctr"/>
           <a:lstStyle/>
           <a:p>
-            <a:pPr algn="ctr" indent="0" marL="0">
+            <a:pPr marL="0" indent="0" algn="ctr">
               <a:buNone/>
             </a:pPr>
             <a:r>
@@ -11569,7 +11818,7 @@
           <a:bodyPr wrap="square" lIns="0" tIns="0" rIns="0" bIns="0" rtlCol="0" anchor="ctr"/>
           <a:lstStyle/>
           <a:p>
-            <a:pPr algn="ctr" indent="0" marL="0">
+            <a:pPr marL="0" indent="0" algn="ctr">
               <a:buNone/>
             </a:pPr>
             <a:r>
@@ -11611,6 +11860,13 @@
             <a:prstDash val="solid"/>
           </a:ln>
         </p:spPr>
+        <p:txBody>
+          <a:bodyPr/>
+          <a:lstStyle/>
+          <a:p>
+            <a:endParaRPr lang="ko-KR" altLang="en-US"/>
+          </a:p>
+        </p:txBody>
       </p:sp>
       <p:sp>
         <p:nvSpPr>
@@ -11633,7 +11889,7 @@
           <a:bodyPr wrap="square" lIns="0" tIns="0" rIns="0" bIns="0" rtlCol="0" anchor="ctr"/>
           <a:lstStyle/>
           <a:p>
-            <a:pPr algn="ctr" indent="0" marL="0">
+            <a:pPr marL="0" indent="0" algn="ctr">
               <a:buNone/>
             </a:pPr>
             <a:r>
@@ -11672,7 +11928,7 @@
           <a:bodyPr wrap="square" lIns="0" tIns="0" rIns="0" bIns="0" rtlCol="0" anchor="ctr"/>
           <a:lstStyle/>
           <a:p>
-            <a:pPr algn="ctr" indent="0" marL="0">
+            <a:pPr marL="0" indent="0" algn="ctr">
               <a:buNone/>
             </a:pPr>
             <a:r>
@@ -11716,6 +11972,13 @@
             <a:prstDash val="solid"/>
           </a:ln>
         </p:spPr>
+        <p:txBody>
+          <a:bodyPr/>
+          <a:lstStyle/>
+          <a:p>
+            <a:endParaRPr lang="ko-KR" altLang="en-US"/>
+          </a:p>
+        </p:txBody>
       </p:sp>
       <p:sp>
         <p:nvSpPr>
@@ -11738,7 +12001,7 @@
           <a:bodyPr wrap="square" lIns="0" tIns="0" rIns="0" bIns="0" rtlCol="0" anchor="ctr"/>
           <a:lstStyle/>
           <a:p>
-            <a:pPr indent="0" marL="0">
+            <a:pPr marL="0" indent="0">
               <a:buNone/>
             </a:pPr>
             <a:r>
@@ -11777,7 +12040,7 @@
           <a:bodyPr wrap="square" lIns="0" tIns="0" rIns="0" bIns="0" rtlCol="0" anchor="t"/>
           <a:lstStyle/>
           <a:p>
-            <a:pPr indent="0" marL="0">
+            <a:pPr marL="0" indent="0">
               <a:lnSpc>
                 <a:spcPts val="1900"/>
               </a:lnSpc>
@@ -11824,6 +12087,13 @@
             <a:prstDash val="solid"/>
           </a:ln>
         </p:spPr>
+        <p:txBody>
+          <a:bodyPr/>
+          <a:lstStyle/>
+          <a:p>
+            <a:endParaRPr lang="ko-KR" altLang="en-US"/>
+          </a:p>
+        </p:txBody>
       </p:sp>
       <p:sp>
         <p:nvSpPr>
@@ -11846,7 +12116,7 @@
           <a:bodyPr wrap="square" lIns="0" tIns="0" rIns="0" bIns="0" rtlCol="0" anchor="ctr"/>
           <a:lstStyle/>
           <a:p>
-            <a:pPr indent="0" marL="0">
+            <a:pPr marL="0" indent="0">
               <a:buNone/>
             </a:pPr>
             <a:r>
@@ -11885,7 +12155,7 @@
           <a:bodyPr wrap="square" lIns="0" tIns="0" rIns="0" bIns="0" rtlCol="0" anchor="t"/>
           <a:lstStyle/>
           <a:p>
-            <a:pPr indent="0" marL="0">
+            <a:pPr marL="0" indent="0">
               <a:lnSpc>
                 <a:spcPts val="1900"/>
               </a:lnSpc>
@@ -11932,6 +12202,13 @@
             <a:prstDash val="solid"/>
           </a:ln>
         </p:spPr>
+        <p:txBody>
+          <a:bodyPr/>
+          <a:lstStyle/>
+          <a:p>
+            <a:endParaRPr lang="ko-KR" altLang="en-US"/>
+          </a:p>
+        </p:txBody>
       </p:sp>
       <p:sp>
         <p:nvSpPr>
@@ -11954,7 +12231,7 @@
           <a:bodyPr wrap="square" lIns="0" tIns="0" rIns="0" bIns="0" rtlCol="0" anchor="ctr"/>
           <a:lstStyle/>
           <a:p>
-            <a:pPr algn="ctr" indent="0" marL="0">
+            <a:pPr marL="0" indent="0" algn="ctr">
               <a:buNone/>
             </a:pPr>
             <a:r>
@@ -11988,6 +12265,7 @@
         <a:solidFill>
           <a:srgbClr val="FFFFFF"/>
         </a:solidFill>
+        <a:effectLst/>
       </p:bgPr>
     </p:bg>
     <p:spTree>
@@ -12025,7 +12303,7 @@
           <a:bodyPr wrap="square" lIns="0" tIns="0" rIns="0" bIns="0" rtlCol="0" anchor="ctr"/>
           <a:lstStyle/>
           <a:p>
-            <a:pPr indent="0" marL="0">
+            <a:pPr marL="0" indent="0">
               <a:buNone/>
             </a:pPr>
             <a:r>
@@ -12064,6 +12342,13 @@
           </a:solidFill>
           <a:ln/>
         </p:spPr>
+        <p:txBody>
+          <a:bodyPr/>
+          <a:lstStyle/>
+          <a:p>
+            <a:endParaRPr lang="ko-KR" altLang="en-US"/>
+          </a:p>
+        </p:txBody>
       </p:sp>
       <p:sp>
         <p:nvSpPr>
@@ -12086,7 +12371,7 @@
           <a:bodyPr wrap="square" lIns="0" tIns="0" rIns="0" bIns="0" rtlCol="0" anchor="ctr"/>
           <a:lstStyle/>
           <a:p>
-            <a:pPr algn="ctr" indent="0" marL="0">
+            <a:pPr marL="0" indent="0" algn="ctr">
               <a:buNone/>
             </a:pPr>
             <a:r>
@@ -12125,7 +12410,7 @@
           <a:bodyPr wrap="square" lIns="0" tIns="0" rIns="0" bIns="0" rtlCol="0" anchor="ctr"/>
           <a:lstStyle/>
           <a:p>
-            <a:pPr indent="0" marL="0">
+            <a:pPr marL="0" indent="0">
               <a:buNone/>
             </a:pPr>
             <a:r>
@@ -12162,6 +12447,13 @@
           </a:solidFill>
           <a:ln/>
         </p:spPr>
+        <p:txBody>
+          <a:bodyPr/>
+          <a:lstStyle/>
+          <a:p>
+            <a:endParaRPr lang="ko-KR" altLang="en-US"/>
+          </a:p>
+        </p:txBody>
       </p:sp>
       <p:sp>
         <p:nvSpPr>
@@ -12184,7 +12476,7 @@
           <a:bodyPr wrap="square" lIns="0" tIns="0" rIns="0" bIns="0" rtlCol="0" anchor="ctr"/>
           <a:lstStyle/>
           <a:p>
-            <a:pPr algn="r" indent="0" marL="0">
+            <a:pPr marL="0" indent="0" algn="r">
               <a:buNone/>
             </a:pPr>
             <a:r>
@@ -12223,7 +12515,7 @@
           <a:bodyPr wrap="square" lIns="0" tIns="0" rIns="0" bIns="0" rtlCol="0" anchor="ctr"/>
           <a:lstStyle/>
           <a:p>
-            <a:pPr indent="0" marL="0">
+            <a:pPr marL="0" indent="0">
               <a:buNone/>
             </a:pPr>
             <a:r>
@@ -12262,7 +12554,7 @@
           <a:bodyPr wrap="square" lIns="0" tIns="0" rIns="0" bIns="0" rtlCol="0" anchor="ctr"/>
           <a:lstStyle/>
           <a:p>
-            <a:pPr algn="r" indent="0" marL="0">
+            <a:pPr marL="0" indent="0" algn="r">
               <a:buNone/>
             </a:pPr>
             <a:r>
@@ -12301,7 +12593,7 @@
           <a:bodyPr wrap="square" lIns="0" tIns="0" rIns="0" bIns="0" rtlCol="0" anchor="ctr"/>
           <a:lstStyle/>
           <a:p>
-            <a:pPr indent="0" marL="0">
+            <a:pPr marL="0" indent="0">
               <a:buNone/>
             </a:pPr>
             <a:r>
@@ -12340,6 +12632,13 @@
           </a:solidFill>
           <a:ln/>
         </p:spPr>
+        <p:txBody>
+          <a:bodyPr/>
+          <a:lstStyle/>
+          <a:p>
+            <a:endParaRPr lang="ko-KR" altLang="en-US"/>
+          </a:p>
+        </p:txBody>
       </p:sp>
       <p:sp>
         <p:nvSpPr>
@@ -12362,7 +12661,7 @@
           <a:bodyPr wrap="square" lIns="0" tIns="0" rIns="0" bIns="0" rtlCol="0" anchor="t"/>
           <a:lstStyle/>
           <a:p>
-            <a:pPr indent="0" marL="0">
+            <a:pPr marL="0" indent="0">
               <a:lnSpc>
                 <a:spcPts val="3400"/>
               </a:lnSpc>
@@ -12404,6 +12703,13 @@
           </a:solidFill>
           <a:ln/>
         </p:spPr>
+        <p:txBody>
+          <a:bodyPr/>
+          <a:lstStyle/>
+          <a:p>
+            <a:endParaRPr lang="ko-KR" altLang="en-US"/>
+          </a:p>
+        </p:txBody>
       </p:sp>
       <p:sp>
         <p:nvSpPr>
@@ -12426,7 +12732,7 @@
           <a:bodyPr wrap="square" lIns="0" tIns="0" rIns="0" bIns="0" rtlCol="0" anchor="ctr"/>
           <a:lstStyle/>
           <a:p>
-            <a:pPr indent="0" marL="0">
+            <a:pPr marL="0" indent="0">
               <a:buNone/>
             </a:pPr>
             <a:r>
@@ -12465,7 +12771,7 @@
           <a:bodyPr wrap="square" lIns="0" tIns="0" rIns="0" bIns="0" rtlCol="0" anchor="t"/>
           <a:lstStyle/>
           <a:p>
-            <a:pPr indent="0" marL="0">
+            <a:pPr marL="0" indent="0">
               <a:lnSpc>
                 <a:spcPts val="2890"/>
               </a:lnSpc>
@@ -12512,6 +12818,13 @@
             <a:prstDash val="solid"/>
           </a:ln>
         </p:spPr>
+        <p:txBody>
+          <a:bodyPr/>
+          <a:lstStyle/>
+          <a:p>
+            <a:endParaRPr lang="ko-KR" altLang="en-US"/>
+          </a:p>
+        </p:txBody>
       </p:sp>
       <p:sp>
         <p:nvSpPr>
@@ -12534,7 +12847,7 @@
           <a:bodyPr wrap="square" lIns="0" tIns="0" rIns="0" bIns="0" rtlCol="0" anchor="ctr"/>
           <a:lstStyle/>
           <a:p>
-            <a:pPr indent="0" marL="0">
+            <a:pPr marL="0" indent="0">
               <a:buNone/>
             </a:pPr>
             <a:r>
@@ -12573,7 +12886,7 @@
           <a:bodyPr wrap="square" lIns="0" tIns="0" rIns="0" bIns="0" rtlCol="0" anchor="t"/>
           <a:lstStyle/>
           <a:p>
-            <a:pPr indent="0" marL="0">
+            <a:pPr marL="0" indent="0">
               <a:lnSpc>
                 <a:spcPts val="1900"/>
               </a:lnSpc>
@@ -12620,6 +12933,13 @@
             <a:prstDash val="solid"/>
           </a:ln>
         </p:spPr>
+        <p:txBody>
+          <a:bodyPr/>
+          <a:lstStyle/>
+          <a:p>
+            <a:endParaRPr lang="ko-KR" altLang="en-US"/>
+          </a:p>
+        </p:txBody>
       </p:sp>
       <p:sp>
         <p:nvSpPr>
@@ -12642,7 +12962,7 @@
           <a:bodyPr wrap="square" lIns="0" tIns="0" rIns="0" bIns="0" rtlCol="0" anchor="ctr"/>
           <a:lstStyle/>
           <a:p>
-            <a:pPr indent="0" marL="0">
+            <a:pPr marL="0" indent="0">
               <a:buNone/>
             </a:pPr>
             <a:r>
@@ -12681,7 +13001,7 @@
           <a:bodyPr wrap="square" lIns="0" tIns="0" rIns="0" bIns="0" rtlCol="0" anchor="t"/>
           <a:lstStyle/>
           <a:p>
-            <a:pPr indent="0" marL="0">
+            <a:pPr marL="0" indent="0">
               <a:lnSpc>
                 <a:spcPts val="1900"/>
               </a:lnSpc>
@@ -12718,6 +13038,7 @@
         <a:solidFill>
           <a:srgbClr val="FFFFFF"/>
         </a:solidFill>
+        <a:effectLst/>
       </p:bgPr>
     </p:bg>
     <p:spTree>
@@ -12755,7 +13076,7 @@
           <a:bodyPr wrap="square" lIns="0" tIns="0" rIns="0" bIns="0" rtlCol="0" anchor="ctr"/>
           <a:lstStyle/>
           <a:p>
-            <a:pPr indent="0" marL="0">
+            <a:pPr marL="0" indent="0">
               <a:buNone/>
             </a:pPr>
             <a:r>
@@ -12794,6 +13115,13 @@
           </a:solidFill>
           <a:ln/>
         </p:spPr>
+        <p:txBody>
+          <a:bodyPr/>
+          <a:lstStyle/>
+          <a:p>
+            <a:endParaRPr lang="ko-KR" altLang="en-US"/>
+          </a:p>
+        </p:txBody>
       </p:sp>
       <p:sp>
         <p:nvSpPr>
@@ -12816,7 +13144,7 @@
           <a:bodyPr wrap="square" lIns="0" tIns="0" rIns="0" bIns="0" rtlCol="0" anchor="ctr"/>
           <a:lstStyle/>
           <a:p>
-            <a:pPr algn="ctr" indent="0" marL="0">
+            <a:pPr marL="0" indent="0" algn="ctr">
               <a:buNone/>
             </a:pPr>
             <a:r>
@@ -12855,7 +13183,7 @@
           <a:bodyPr wrap="square" lIns="0" tIns="0" rIns="0" bIns="0" rtlCol="0" anchor="ctr"/>
           <a:lstStyle/>
           <a:p>
-            <a:pPr indent="0" marL="0">
+            <a:pPr marL="0" indent="0">
               <a:buNone/>
             </a:pPr>
             <a:r>
@@ -12892,6 +13220,13 @@
           </a:solidFill>
           <a:ln/>
         </p:spPr>
+        <p:txBody>
+          <a:bodyPr/>
+          <a:lstStyle/>
+          <a:p>
+            <a:endParaRPr lang="ko-KR" altLang="en-US"/>
+          </a:p>
+        </p:txBody>
       </p:sp>
       <p:sp>
         <p:nvSpPr>
@@ -12914,7 +13249,7 @@
           <a:bodyPr wrap="square" lIns="0" tIns="0" rIns="0" bIns="0" rtlCol="0" anchor="ctr"/>
           <a:lstStyle/>
           <a:p>
-            <a:pPr algn="r" indent="0" marL="0">
+            <a:pPr marL="0" indent="0" algn="r">
               <a:buNone/>
             </a:pPr>
             <a:r>
@@ -12953,7 +13288,7 @@
           <a:bodyPr wrap="square" lIns="0" tIns="0" rIns="0" bIns="0" rtlCol="0" anchor="ctr"/>
           <a:lstStyle/>
           <a:p>
-            <a:pPr indent="0" marL="0">
+            <a:pPr marL="0" indent="0">
               <a:buNone/>
             </a:pPr>
             <a:r>
@@ -12992,7 +13327,7 @@
           <a:bodyPr wrap="square" lIns="0" tIns="0" rIns="0" bIns="0" rtlCol="0" anchor="ctr"/>
           <a:lstStyle/>
           <a:p>
-            <a:pPr algn="r" indent="0" marL="0">
+            <a:pPr marL="0" indent="0" algn="r">
               <a:buNone/>
             </a:pPr>
             <a:r>
@@ -13031,6 +13366,13 @@
           </a:solidFill>
           <a:ln/>
         </p:spPr>
+        <p:txBody>
+          <a:bodyPr/>
+          <a:lstStyle/>
+          <a:p>
+            <a:endParaRPr lang="ko-KR" altLang="en-US"/>
+          </a:p>
+        </p:txBody>
       </p:sp>
       <p:sp>
         <p:nvSpPr>
@@ -13053,7 +13395,7 @@
           <a:bodyPr wrap="square" lIns="0" tIns="0" rIns="0" bIns="0" rtlCol="0" anchor="ctr"/>
           <a:lstStyle/>
           <a:p>
-            <a:pPr indent="0" marL="0">
+            <a:pPr marL="0" indent="0">
               <a:buNone/>
             </a:pPr>
             <a:r>
@@ -13092,7 +13434,7 @@
           <a:bodyPr wrap="square" lIns="0" tIns="0" rIns="0" bIns="0" rtlCol="0" anchor="t"/>
           <a:lstStyle/>
           <a:p>
-            <a:pPr indent="0" marL="0">
+            <a:pPr marL="0" indent="0">
               <a:lnSpc>
                 <a:spcPts val="2720"/>
               </a:lnSpc>
@@ -13112,7 +13454,7 @@
             <a:endParaRPr lang="en-US" sz="1600" dirty="0"/>
           </a:p>
           <a:p>
-            <a:pPr indent="0" marL="0">
+            <a:pPr marL="0" indent="0">
               <a:lnSpc>
                 <a:spcPts val="2720"/>
               </a:lnSpc>
@@ -13132,7 +13474,7 @@
             <a:endParaRPr lang="en-US" sz="1600" dirty="0"/>
           </a:p>
           <a:p>
-            <a:pPr indent="0" marL="0">
+            <a:pPr marL="0" indent="0">
               <a:lnSpc>
                 <a:spcPts val="2720"/>
               </a:lnSpc>
@@ -13174,6 +13516,13 @@
           </a:solidFill>
           <a:ln/>
         </p:spPr>
+        <p:txBody>
+          <a:bodyPr/>
+          <a:lstStyle/>
+          <a:p>
+            <a:endParaRPr lang="ko-KR" altLang="en-US"/>
+          </a:p>
+        </p:txBody>
       </p:sp>
       <p:sp>
         <p:nvSpPr>
@@ -13196,7 +13545,7 @@
           <a:bodyPr wrap="square" lIns="0" tIns="0" rIns="0" bIns="0" rtlCol="0" anchor="ctr"/>
           <a:lstStyle/>
           <a:p>
-            <a:pPr indent="0" marL="0">
+            <a:pPr marL="0" indent="0">
               <a:buNone/>
             </a:pPr>
             <a:r>
@@ -13235,7 +13584,7 @@
           <a:bodyPr wrap="square" lIns="0" tIns="0" rIns="0" bIns="0" rtlCol="0" anchor="t"/>
           <a:lstStyle/>
           <a:p>
-            <a:pPr indent="0" marL="0">
+            <a:pPr marL="0" indent="0">
               <a:lnSpc>
                 <a:spcPts val="2720"/>
               </a:lnSpc>
@@ -13255,7 +13604,7 @@
             <a:endParaRPr lang="en-US" sz="1600" dirty="0"/>
           </a:p>
           <a:p>
-            <a:pPr indent="0" marL="0">
+            <a:pPr marL="0" indent="0">
               <a:lnSpc>
                 <a:spcPts val="2720"/>
               </a:lnSpc>
@@ -13297,7 +13646,7 @@
           <a:bodyPr wrap="square" lIns="0" tIns="0" rIns="0" bIns="0" rtlCol="0" anchor="ctr"/>
           <a:lstStyle/>
           <a:p>
-            <a:pPr algn="ctr" indent="0" marL="0">
+            <a:pPr marL="0" indent="0" algn="ctr">
               <a:buNone/>
             </a:pPr>
             <a:r>
@@ -13341,6 +13690,13 @@
             <a:prstDash val="solid"/>
           </a:ln>
         </p:spPr>
+        <p:txBody>
+          <a:bodyPr/>
+          <a:lstStyle/>
+          <a:p>
+            <a:endParaRPr lang="ko-KR" altLang="en-US"/>
+          </a:p>
+        </p:txBody>
       </p:sp>
       <p:sp>
         <p:nvSpPr>
@@ -13363,7 +13719,7 @@
           <a:bodyPr wrap="square" lIns="0" tIns="0" rIns="0" bIns="0" rtlCol="0" anchor="ctr"/>
           <a:lstStyle/>
           <a:p>
-            <a:pPr algn="ctr" indent="0" marL="0">
+            <a:pPr marL="0" indent="0" algn="ctr">
               <a:buNone/>
             </a:pPr>
             <a:r>
@@ -13397,6 +13753,7 @@
         <a:solidFill>
           <a:srgbClr val="FFFFFF"/>
         </a:solidFill>
+        <a:effectLst/>
       </p:bgPr>
     </p:bg>
     <p:spTree>
@@ -13434,7 +13791,7 @@
           <a:bodyPr wrap="square" lIns="0" tIns="0" rIns="0" bIns="0" rtlCol="0" anchor="ctr"/>
           <a:lstStyle/>
           <a:p>
-            <a:pPr indent="0" marL="0">
+            <a:pPr marL="0" indent="0">
               <a:buNone/>
             </a:pPr>
             <a:r>
@@ -13473,6 +13830,13 @@
           </a:solidFill>
           <a:ln/>
         </p:spPr>
+        <p:txBody>
+          <a:bodyPr/>
+          <a:lstStyle/>
+          <a:p>
+            <a:endParaRPr lang="ko-KR" altLang="en-US"/>
+          </a:p>
+        </p:txBody>
       </p:sp>
       <p:sp>
         <p:nvSpPr>
@@ -13495,7 +13859,7 @@
           <a:bodyPr wrap="square" lIns="0" tIns="0" rIns="0" bIns="0" rtlCol="0" anchor="ctr"/>
           <a:lstStyle/>
           <a:p>
-            <a:pPr algn="ctr" indent="0" marL="0">
+            <a:pPr marL="0" indent="0" algn="ctr">
               <a:buNone/>
             </a:pPr>
             <a:r>
@@ -13534,7 +13898,7 @@
           <a:bodyPr wrap="square" lIns="0" tIns="0" rIns="0" bIns="0" rtlCol="0" anchor="ctr"/>
           <a:lstStyle/>
           <a:p>
-            <a:pPr indent="0" marL="0">
+            <a:pPr marL="0" indent="0">
               <a:buNone/>
             </a:pPr>
             <a:r>
@@ -13571,6 +13935,13 @@
           </a:solidFill>
           <a:ln/>
         </p:spPr>
+        <p:txBody>
+          <a:bodyPr/>
+          <a:lstStyle/>
+          <a:p>
+            <a:endParaRPr lang="ko-KR" altLang="en-US"/>
+          </a:p>
+        </p:txBody>
       </p:sp>
       <p:sp>
         <p:nvSpPr>
@@ -13593,7 +13964,7 @@
           <a:bodyPr wrap="square" lIns="0" tIns="0" rIns="0" bIns="0" rtlCol="0" anchor="ctr"/>
           <a:lstStyle/>
           <a:p>
-            <a:pPr algn="r" indent="0" marL="0">
+            <a:pPr marL="0" indent="0" algn="r">
               <a:buNone/>
             </a:pPr>
             <a:r>
@@ -13632,7 +14003,7 @@
           <a:bodyPr wrap="square" lIns="0" tIns="0" rIns="0" bIns="0" rtlCol="0" anchor="ctr"/>
           <a:lstStyle/>
           <a:p>
-            <a:pPr indent="0" marL="0">
+            <a:pPr marL="0" indent="0">
               <a:buNone/>
             </a:pPr>
             <a:r>
@@ -13671,7 +14042,7 @@
           <a:bodyPr wrap="square" lIns="0" tIns="0" rIns="0" bIns="0" rtlCol="0" anchor="ctr"/>
           <a:lstStyle/>
           <a:p>
-            <a:pPr algn="r" indent="0" marL="0">
+            <a:pPr marL="0" indent="0" algn="r">
               <a:buNone/>
             </a:pPr>
             <a:r>
@@ -13710,6 +14081,13 @@
           </a:solidFill>
           <a:ln/>
         </p:spPr>
+        <p:txBody>
+          <a:bodyPr/>
+          <a:lstStyle/>
+          <a:p>
+            <a:endParaRPr lang="ko-KR" altLang="en-US"/>
+          </a:p>
+        </p:txBody>
       </p:sp>
       <p:sp>
         <p:nvSpPr>
@@ -13732,7 +14110,7 @@
           <a:bodyPr wrap="square" lIns="0" tIns="0" rIns="0" bIns="0" rtlCol="0" anchor="t"/>
           <a:lstStyle/>
           <a:p>
-            <a:pPr indent="0" marL="0">
+            <a:pPr marL="0" indent="0">
               <a:lnSpc>
                 <a:spcPts val="2720"/>
               </a:lnSpc>
@@ -13752,7 +14130,7 @@
             <a:endParaRPr lang="en-US" sz="1600" dirty="0"/>
           </a:p>
           <a:p>
-            <a:pPr indent="0" marL="0">
+            <a:pPr marL="0" indent="0">
               <a:lnSpc>
                 <a:spcPts val="2720"/>
               </a:lnSpc>
@@ -13772,7 +14150,7 @@
             <a:endParaRPr lang="en-US" sz="1600" dirty="0"/>
           </a:p>
           <a:p>
-            <a:pPr indent="0" marL="0">
+            <a:pPr marL="0" indent="0">
               <a:lnSpc>
                 <a:spcPts val="2720"/>
               </a:lnSpc>
@@ -13792,7 +14170,7 @@
             <a:endParaRPr lang="en-US" sz="1600" dirty="0"/>
           </a:p>
           <a:p>
-            <a:pPr indent="0" marL="0">
+            <a:pPr marL="0" indent="0">
               <a:lnSpc>
                 <a:spcPts val="2720"/>
               </a:lnSpc>
@@ -13812,7 +14190,7 @@
             <a:endParaRPr lang="en-US" sz="1600" dirty="0"/>
           </a:p>
           <a:p>
-            <a:pPr indent="0" marL="0">
+            <a:pPr marL="0" indent="0">
               <a:lnSpc>
                 <a:spcPts val="2720"/>
               </a:lnSpc>
@@ -13859,6 +14237,13 @@
             <a:prstDash val="solid"/>
           </a:ln>
         </p:spPr>
+        <p:txBody>
+          <a:bodyPr/>
+          <a:lstStyle/>
+          <a:p>
+            <a:endParaRPr lang="ko-KR" altLang="en-US"/>
+          </a:p>
+        </p:txBody>
       </p:sp>
       <p:sp>
         <p:nvSpPr>
@@ -13881,7 +14266,7 @@
           <a:bodyPr wrap="square" lIns="0" tIns="0" rIns="0" bIns="0" rtlCol="0" anchor="ctr"/>
           <a:lstStyle/>
           <a:p>
-            <a:pPr indent="0" marL="0">
+            <a:pPr marL="0" indent="0">
               <a:buNone/>
             </a:pPr>
             <a:r>
@@ -13920,7 +14305,7 @@
           <a:bodyPr wrap="square" lIns="0" tIns="0" rIns="0" bIns="0" rtlCol="0" anchor="t"/>
           <a:lstStyle/>
           <a:p>
-            <a:pPr indent="0" marL="0">
+            <a:pPr marL="0" indent="0">
               <a:lnSpc>
                 <a:spcPts val="1900"/>
               </a:lnSpc>
@@ -13967,6 +14352,13 @@
             <a:prstDash val="solid"/>
           </a:ln>
         </p:spPr>
+        <p:txBody>
+          <a:bodyPr/>
+          <a:lstStyle/>
+          <a:p>
+            <a:endParaRPr lang="ko-KR" altLang="en-US"/>
+          </a:p>
+        </p:txBody>
       </p:sp>
       <p:sp>
         <p:nvSpPr>
@@ -13989,7 +14381,7 @@
           <a:bodyPr wrap="square" lIns="0" tIns="0" rIns="0" bIns="0" rtlCol="0" anchor="ctr"/>
           <a:lstStyle/>
           <a:p>
-            <a:pPr indent="0" marL="0">
+            <a:pPr marL="0" indent="0">
               <a:buNone/>
             </a:pPr>
             <a:r>
@@ -14028,7 +14420,7 @@
           <a:bodyPr wrap="square" lIns="0" tIns="0" rIns="0" bIns="0" rtlCol="0" anchor="t"/>
           <a:lstStyle/>
           <a:p>
-            <a:pPr indent="0" marL="0">
+            <a:pPr marL="0" indent="0">
               <a:lnSpc>
                 <a:spcPts val="1900"/>
               </a:lnSpc>
@@ -14070,6 +14462,13 @@
           </a:solidFill>
           <a:ln/>
         </p:spPr>
+        <p:txBody>
+          <a:bodyPr/>
+          <a:lstStyle/>
+          <a:p>
+            <a:endParaRPr lang="ko-KR" altLang="en-US"/>
+          </a:p>
+        </p:txBody>
       </p:sp>
       <p:sp>
         <p:nvSpPr>
@@ -14092,7 +14491,7 @@
           <a:bodyPr wrap="square" lIns="0" tIns="0" rIns="0" bIns="0" rtlCol="0" anchor="t"/>
           <a:lstStyle/>
           <a:p>
-            <a:pPr indent="0" marL="0">
+            <a:pPr marL="0" indent="0">
               <a:lnSpc>
                 <a:spcPts val="3060"/>
               </a:lnSpc>
@@ -14139,6 +14538,13 @@
             <a:prstDash val="solid"/>
           </a:ln>
         </p:spPr>
+        <p:txBody>
+          <a:bodyPr/>
+          <a:lstStyle/>
+          <a:p>
+            <a:endParaRPr lang="ko-KR" altLang="en-US"/>
+          </a:p>
+        </p:txBody>
       </p:sp>
       <p:sp>
         <p:nvSpPr>
@@ -14161,7 +14567,7 @@
           <a:bodyPr wrap="square" lIns="0" tIns="0" rIns="0" bIns="0" rtlCol="0" anchor="ctr"/>
           <a:lstStyle/>
           <a:p>
-            <a:pPr algn="ctr" indent="0" marL="0">
+            <a:pPr marL="0" indent="0" algn="ctr">
               <a:buNone/>
             </a:pPr>
             <a:r>
@@ -14480,4 +14886,319 @@
     </a:ext>
   </a:extLst>
 </a:theme>
+</file>
+
+<file path=ppt/theme/theme2.xml><?xml version="1.0" encoding="utf-8"?>
+<a:theme xmlns:a="http://schemas.openxmlformats.org/drawingml/2006/main" name="Office 테마">
+  <a:themeElements>
+    <a:clrScheme name="Office">
+      <a:dk1>
+        <a:sysClr val="windowText" lastClr="000000"/>
+      </a:dk1>
+      <a:lt1>
+        <a:sysClr val="window" lastClr="FFFFFF"/>
+      </a:lt1>
+      <a:dk2>
+        <a:srgbClr val="0E2841"/>
+      </a:dk2>
+      <a:lt2>
+        <a:srgbClr val="E8E8E8"/>
+      </a:lt2>
+      <a:accent1>
+        <a:srgbClr val="156082"/>
+      </a:accent1>
+      <a:accent2>
+        <a:srgbClr val="E97132"/>
+      </a:accent2>
+      <a:accent3>
+        <a:srgbClr val="196B24"/>
+      </a:accent3>
+      <a:accent4>
+        <a:srgbClr val="0F9ED5"/>
+      </a:accent4>
+      <a:accent5>
+        <a:srgbClr val="A02B93"/>
+      </a:accent5>
+      <a:accent6>
+        <a:srgbClr val="4EA72E"/>
+      </a:accent6>
+      <a:hlink>
+        <a:srgbClr val="467886"/>
+      </a:hlink>
+      <a:folHlink>
+        <a:srgbClr val="96607D"/>
+      </a:folHlink>
+    </a:clrScheme>
+    <a:fontScheme name="Office">
+      <a:majorFont>
+        <a:latin typeface="맑은 고딕" panose="02110004020202020204"/>
+        <a:ea typeface=""/>
+        <a:cs typeface=""/>
+        <a:font script="Jpan" typeface="游ゴシック Light"/>
+        <a:font script="Hang" typeface="맑은 고딕"/>
+        <a:font script="Hans" typeface="等线 Light"/>
+        <a:font script="Hant" typeface="新細明體"/>
+        <a:font script="Arab" typeface="Times New Roman"/>
+        <a:font script="Hebr" typeface="Times New Roman"/>
+        <a:font script="Thai" typeface="Angsana New"/>
+        <a:font script="Ethi" typeface="Nyala"/>
+        <a:font script="Beng" typeface="Vrinda"/>
+        <a:font script="Gujr" typeface="Shruti"/>
+        <a:font script="Khmr" typeface="MoolBoran"/>
+        <a:font script="Knda" typeface="Tunga"/>
+        <a:font script="Guru" typeface="Raavi"/>
+        <a:font script="Cans" typeface="Euphemia"/>
+        <a:font script="Cher" typeface="Plantagenet Cherokee"/>
+        <a:font script="Yiii" typeface="Microsoft Yi Baiti"/>
+        <a:font script="Tibt" typeface="Microsoft Himalaya"/>
+        <a:font script="Thaa" typeface="MV Boli"/>
+        <a:font script="Deva" typeface="Mangal"/>
+        <a:font script="Telu" typeface="Gautami"/>
+        <a:font script="Taml" typeface="Latha"/>
+        <a:font script="Syrc" typeface="Estrangelo Edessa"/>
+        <a:font script="Orya" typeface="Kalinga"/>
+        <a:font script="Mlym" typeface="Kartika"/>
+        <a:font script="Laoo" typeface="DokChampa"/>
+        <a:font script="Sinh" typeface="Iskoola Pota"/>
+        <a:font script="Mong" typeface="Mongolian Baiti"/>
+        <a:font script="Viet" typeface="Times New Roman"/>
+        <a:font script="Uigh" typeface="Microsoft Uighur"/>
+        <a:font script="Geor" typeface="Sylfaen"/>
+        <a:font script="Armn" typeface="Arial"/>
+        <a:font script="Bugi" typeface="Leelawadee UI"/>
+        <a:font script="Bopo" typeface="Microsoft JhengHei"/>
+        <a:font script="Java" typeface="Javanese Text"/>
+        <a:font script="Lisu" typeface="Segoe UI"/>
+        <a:font script="Mymr" typeface="Myanmar Text"/>
+        <a:font script="Nkoo" typeface="Ebrima"/>
+        <a:font script="Olck" typeface="Nirmala UI"/>
+        <a:font script="Osma" typeface="Ebrima"/>
+        <a:font script="Phag" typeface="Phagspa"/>
+        <a:font script="Syrn" typeface="Estrangelo Edessa"/>
+        <a:font script="Syrj" typeface="Estrangelo Edessa"/>
+        <a:font script="Syre" typeface="Estrangelo Edessa"/>
+        <a:font script="Sora" typeface="Nirmala UI"/>
+        <a:font script="Tale" typeface="Microsoft Tai Le"/>
+        <a:font script="Talu" typeface="Microsoft New Tai Lue"/>
+        <a:font script="Tfng" typeface="Ebrima"/>
+      </a:majorFont>
+      <a:minorFont>
+        <a:latin typeface="맑은 고딕" panose="02110004020202020204"/>
+        <a:ea typeface=""/>
+        <a:cs typeface=""/>
+        <a:font script="Jpan" typeface="游ゴシック"/>
+        <a:font script="Hang" typeface="맑은 고딕"/>
+        <a:font script="Hans" typeface="等线"/>
+        <a:font script="Hant" typeface="新細明體"/>
+        <a:font script="Arab" typeface="Arial"/>
+        <a:font script="Hebr" typeface="Arial"/>
+        <a:font script="Thai" typeface="Cordia New"/>
+        <a:font script="Ethi" typeface="Nyala"/>
+        <a:font script="Beng" typeface="Vrinda"/>
+        <a:font script="Gujr" typeface="Shruti"/>
+        <a:font script="Khmr" typeface="DaunPenh"/>
+        <a:font script="Knda" typeface="Tunga"/>
+        <a:font script="Guru" typeface="Raavi"/>
+        <a:font script="Cans" typeface="Euphemia"/>
+        <a:font script="Cher" typeface="Plantagenet Cherokee"/>
+        <a:font script="Yiii" typeface="Microsoft Yi Baiti"/>
+        <a:font script="Tibt" typeface="Microsoft Himalaya"/>
+        <a:font script="Thaa" typeface="MV Boli"/>
+        <a:font script="Deva" typeface="Mangal"/>
+        <a:font script="Telu" typeface="Gautami"/>
+        <a:font script="Taml" typeface="Latha"/>
+        <a:font script="Syrc" typeface="Estrangelo Edessa"/>
+        <a:font script="Orya" typeface="Kalinga"/>
+        <a:font script="Mlym" typeface="Kartika"/>
+        <a:font script="Laoo" typeface="DokChampa"/>
+        <a:font script="Sinh" typeface="Iskoola Pota"/>
+        <a:font script="Mong" typeface="Mongolian Baiti"/>
+        <a:font script="Viet" typeface="Arial"/>
+        <a:font script="Uigh" typeface="Microsoft Uighur"/>
+        <a:font script="Geor" typeface="Sylfaen"/>
+        <a:font script="Armn" typeface="Arial"/>
+        <a:font script="Bugi" typeface="Leelawadee UI"/>
+        <a:font script="Bopo" typeface="Microsoft JhengHei"/>
+        <a:font script="Java" typeface="Javanese Text"/>
+        <a:font script="Lisu" typeface="Segoe UI"/>
+        <a:font script="Mymr" typeface="Myanmar Text"/>
+        <a:font script="Nkoo" typeface="Ebrima"/>
+        <a:font script="Olck" typeface="Nirmala UI"/>
+        <a:font script="Osma" typeface="Ebrima"/>
+        <a:font script="Phag" typeface="Phagspa"/>
+        <a:font script="Syrn" typeface="Estrangelo Edessa"/>
+        <a:font script="Syrj" typeface="Estrangelo Edessa"/>
+        <a:font script="Syre" typeface="Estrangelo Edessa"/>
+        <a:font script="Sora" typeface="Nirmala UI"/>
+        <a:font script="Tale" typeface="Microsoft Tai Le"/>
+        <a:font script="Talu" typeface="Microsoft New Tai Lue"/>
+        <a:font script="Tfng" typeface="Ebrima"/>
+      </a:minorFont>
+    </a:fontScheme>
+    <a:fmtScheme name="Office">
+      <a:fillStyleLst>
+        <a:solidFill>
+          <a:schemeClr val="phClr"/>
+        </a:solidFill>
+        <a:gradFill rotWithShape="1">
+          <a:gsLst>
+            <a:gs pos="0">
+              <a:schemeClr val="phClr">
+                <a:lumMod val="110000"/>
+                <a:satMod val="105000"/>
+                <a:tint val="67000"/>
+              </a:schemeClr>
+            </a:gs>
+            <a:gs pos="50000">
+              <a:schemeClr val="phClr">
+                <a:lumMod val="105000"/>
+                <a:satMod val="103000"/>
+                <a:tint val="73000"/>
+              </a:schemeClr>
+            </a:gs>
+            <a:gs pos="100000">
+              <a:schemeClr val="phClr">
+                <a:lumMod val="105000"/>
+                <a:satMod val="109000"/>
+                <a:tint val="81000"/>
+              </a:schemeClr>
+            </a:gs>
+          </a:gsLst>
+          <a:lin ang="5400000" scaled="0"/>
+        </a:gradFill>
+        <a:gradFill rotWithShape="1">
+          <a:gsLst>
+            <a:gs pos="0">
+              <a:schemeClr val="phClr">
+                <a:satMod val="103000"/>
+                <a:lumMod val="102000"/>
+                <a:tint val="94000"/>
+              </a:schemeClr>
+            </a:gs>
+            <a:gs pos="50000">
+              <a:schemeClr val="phClr">
+                <a:satMod val="110000"/>
+                <a:lumMod val="100000"/>
+                <a:shade val="100000"/>
+              </a:schemeClr>
+            </a:gs>
+            <a:gs pos="100000">
+              <a:schemeClr val="phClr">
+                <a:lumMod val="99000"/>
+                <a:satMod val="120000"/>
+                <a:shade val="78000"/>
+              </a:schemeClr>
+            </a:gs>
+          </a:gsLst>
+          <a:lin ang="5400000" scaled="0"/>
+        </a:gradFill>
+      </a:fillStyleLst>
+      <a:lnStyleLst>
+        <a:ln w="12700" cap="flat" cmpd="sng" algn="ctr">
+          <a:solidFill>
+            <a:schemeClr val="phClr"/>
+          </a:solidFill>
+          <a:prstDash val="solid"/>
+          <a:miter lim="800000"/>
+        </a:ln>
+        <a:ln w="19050" cap="flat" cmpd="sng" algn="ctr">
+          <a:solidFill>
+            <a:schemeClr val="phClr"/>
+          </a:solidFill>
+          <a:prstDash val="solid"/>
+          <a:miter lim="800000"/>
+        </a:ln>
+        <a:ln w="25400" cap="flat" cmpd="sng" algn="ctr">
+          <a:solidFill>
+            <a:schemeClr val="phClr"/>
+          </a:solidFill>
+          <a:prstDash val="solid"/>
+          <a:miter lim="800000"/>
+        </a:ln>
+      </a:lnStyleLst>
+      <a:effectStyleLst>
+        <a:effectStyle>
+          <a:effectLst/>
+        </a:effectStyle>
+        <a:effectStyle>
+          <a:effectLst/>
+        </a:effectStyle>
+        <a:effectStyle>
+          <a:effectLst>
+            <a:outerShdw blurRad="57150" dist="19050" dir="5400000" algn="ctr" rotWithShape="0">
+              <a:srgbClr val="000000">
+                <a:alpha val="63000"/>
+              </a:srgbClr>
+            </a:outerShdw>
+          </a:effectLst>
+        </a:effectStyle>
+      </a:effectStyleLst>
+      <a:bgFillStyleLst>
+        <a:solidFill>
+          <a:schemeClr val="phClr"/>
+        </a:solidFill>
+        <a:solidFill>
+          <a:schemeClr val="phClr">
+            <a:tint val="95000"/>
+            <a:satMod val="170000"/>
+          </a:schemeClr>
+        </a:solidFill>
+        <a:gradFill rotWithShape="1">
+          <a:gsLst>
+            <a:gs pos="0">
+              <a:schemeClr val="phClr">
+                <a:tint val="93000"/>
+                <a:satMod val="150000"/>
+                <a:shade val="98000"/>
+                <a:lumMod val="102000"/>
+              </a:schemeClr>
+            </a:gs>
+            <a:gs pos="50000">
+              <a:schemeClr val="phClr">
+                <a:tint val="98000"/>
+                <a:satMod val="130000"/>
+                <a:shade val="90000"/>
+                <a:lumMod val="103000"/>
+              </a:schemeClr>
+            </a:gs>
+            <a:gs pos="100000">
+              <a:schemeClr val="phClr">
+                <a:shade val="63000"/>
+                <a:satMod val="120000"/>
+              </a:schemeClr>
+            </a:gs>
+          </a:gsLst>
+          <a:lin ang="5400000" scaled="0"/>
+        </a:gradFill>
+      </a:bgFillStyleLst>
+    </a:fmtScheme>
+  </a:themeElements>
+  <a:objectDefaults>
+    <a:lnDef>
+      <a:spPr/>
+      <a:bodyPr/>
+      <a:lstStyle/>
+      <a:style>
+        <a:lnRef idx="2">
+          <a:schemeClr val="accent1"/>
+        </a:lnRef>
+        <a:fillRef idx="0">
+          <a:schemeClr val="accent1"/>
+        </a:fillRef>
+        <a:effectRef idx="1">
+          <a:schemeClr val="accent1"/>
+        </a:effectRef>
+        <a:fontRef idx="minor">
+          <a:schemeClr val="tx1"/>
+        </a:fontRef>
+      </a:style>
+    </a:lnDef>
+  </a:objectDefaults>
+  <a:extraClrSchemeLst/>
+  <a:extLst>
+    <a:ext uri="{05A4C25C-085E-4340-85A3-A5531E510DB2}">
+      <thm15:themeFamily xmlns:thm15="http://schemas.microsoft.com/office/thememl/2012/main" name="Office Theme" id="{2E142A2C-CD16-42D6-873A-C26D2A0506FA}" vid="{1BDDFF52-6CD6-40A5-AB3C-68EB2F1E4D0A}"/>
+    </a:ext>
+  </a:extLst>
+</a:theme>
 </file>
--- a/03/ppt/03-2_여러_값을_묶는_두_가지_방법_v1.pptx
+++ b/03/ppt/03-2_여러_값을_묶는_두_가지_방법_v1.pptx
@@ -4,9 +4,6 @@
   <p:sldMasterIdLst>
     <p:sldMasterId id="2147483648" r:id="rId1"/>
   </p:sldMasterIdLst>
-  <p:notesMasterIdLst>
-    <p:notesMasterId r:id="rId17"/>
-  </p:notesMasterIdLst>
   <p:sldIdLst>
     <p:sldId id="256" r:id="rId2"/>
     <p:sldId id="257" r:id="rId3"/>
@@ -24,8 +21,11 @@
     <p:sldId id="269" r:id="rId15"/>
     <p:sldId id="270" r:id="rId16"/>
   </p:sldIdLst>
-  <p:sldSz cx="12192000" cy="6858000"/>
-  <p:notesSz cx="6858000" cy="12192000"/>
+  <p:notesMasterIdLst>
+    <p:notesMasterId r:id="rId17"/>
+  </p:notesMasterIdLst>
+  <p:sldSz cx="12191695" cy="6858000"/>
+  <p:notesSz cx="6858000" cy="12191695"/>
   <p:defaultTextStyle>
     <a:lvl1pPr marL="0" algn="l" defTabSz="914400" rtl="0" eaLnBrk="1" latinLnBrk="0" hangingPunct="1">
       <a:defRPr sz="1800" kern="1200">
@@ -118,11 +118,6 @@
       </a:defRPr>
     </a:lvl9pPr>
   </p:defaultTextStyle>
-  <p:extLst>
-    <p:ext uri="{EFAFB233-063F-42B5-8137-9DF3F51BA10A}">
-      <p15:sldGuideLst xmlns:p15="http://schemas.microsoft.com/office/powerpoint/2012/main"/>
-    </p:ext>
-  </p:extLst>
 </p:presentation>
 </file>
 
@@ -148,16 +143,240 @@
           <a:chExt cx="0" cy="0"/>
         </a:xfrm>
       </p:grpSpPr>
+      <p:sp>
+        <p:nvSpPr>
+          <p:cNvPr id="2" name="Header Placeholder 1"/>
+          <p:cNvSpPr>
+            <a:spLocks noGrp="1"/>
+          </p:cNvSpPr>
+          <p:nvPr>
+            <p:ph type="hdr" sz="quarter"/>
+          </p:nvPr>
+        </p:nvSpPr>
+        <p:spPr>
+          <a:xfrm>
+            <a:off x="0" y="0"/>
+            <a:ext cx="2971800" cy="458788"/>
+          </a:xfrm>
+          <a:prstGeom prst="rect">
+            <a:avLst/>
+          </a:prstGeom>
+        </p:spPr>
+        <p:txBody>
+          <a:bodyPr vert="horz" lIns="91440" tIns="45720" rIns="91440" bIns="45720" rtlCol="0"/>
+          <a:lstStyle>
+            <a:lvl1pPr algn="l">
+              <a:defRPr sz="1200"/>
+            </a:lvl1pPr>
+          </a:lstStyle>
+          <a:p>
+            <a:endParaRPr lang="en-US"/>
+          </a:p>
+        </p:txBody>
+      </p:sp>
+      <p:sp>
+        <p:nvSpPr>
+          <p:cNvPr id="3" name="Date Placeholder 2"/>
+          <p:cNvSpPr>
+            <a:spLocks noGrp="1"/>
+          </p:cNvSpPr>
+          <p:nvPr>
+            <p:ph type="dt" idx="1"/>
+          </p:nvPr>
+        </p:nvSpPr>
+        <p:spPr>
+          <a:xfrm>
+            <a:off x="3884613" y="0"/>
+            <a:ext cx="2971800" cy="458788"/>
+          </a:xfrm>
+          <a:prstGeom prst="rect">
+            <a:avLst/>
+          </a:prstGeom>
+        </p:spPr>
+        <p:txBody>
+          <a:bodyPr vert="horz" lIns="91440" tIns="45720" rIns="91440" bIns="45720" rtlCol="0"/>
+          <a:lstStyle>
+            <a:lvl1pPr algn="r">
+              <a:defRPr sz="1200"/>
+            </a:lvl1pPr>
+          </a:lstStyle>
+          <a:p>
+            <a:fld id="{5282F153-3F37-0F45-9E97-73ACFA13230C}" type="datetimeFigureOut">
+              <a:rPr lang="en-US"/>
+              <a:t>7/23/19</a:t>
+            </a:fld>
+            <a:endParaRPr lang="en-US"/>
+          </a:p>
+        </p:txBody>
+      </p:sp>
+      <p:sp>
+        <p:nvSpPr>
+          <p:cNvPr id="4" name="Slide Image Placeholder 3"/>
+          <p:cNvSpPr>
+            <a:spLocks noGrp="1" noRot="1" noChangeAspect="1"/>
+          </p:cNvSpPr>
+          <p:nvPr>
+            <p:ph type="sldImg" idx="2"/>
+          </p:nvPr>
+        </p:nvSpPr>
+        <p:spPr>
+          <a:xfrm>
+            <a:off x="685800" y="1143000"/>
+            <a:ext cx="5486400" cy="3086100"/>
+          </a:xfrm>
+          <a:prstGeom prst="rect">
+            <a:avLst/>
+          </a:prstGeom>
+          <a:noFill/>
+          <a:ln w="12700">
+            <a:solidFill>
+              <a:prstClr val="black"/>
+            </a:solidFill>
+          </a:ln>
+        </p:spPr>
+        <p:txBody>
+          <a:bodyPr vert="horz" lIns="91440" tIns="45720" rIns="91440" bIns="45720" rtlCol="0" anchor="ctr"/>
+          <a:lstStyle/>
+          <a:p>
+            <a:endParaRPr lang="en-US"/>
+          </a:p>
+        </p:txBody>
+      </p:sp>
+      <p:sp>
+        <p:nvSpPr>
+          <p:cNvPr id="5" name="Notes Placeholder 4"/>
+          <p:cNvSpPr>
+            <a:spLocks noGrp="1"/>
+          </p:cNvSpPr>
+          <p:nvPr>
+            <p:ph type="body" sz="quarter" idx="3"/>
+          </p:nvPr>
+        </p:nvSpPr>
+        <p:spPr>
+          <a:xfrm>
+            <a:off x="685800" y="4400550"/>
+            <a:ext cx="5486400" cy="3600450"/>
+          </a:xfrm>
+          <a:prstGeom prst="rect">
+            <a:avLst/>
+          </a:prstGeom>
+        </p:spPr>
+        <p:txBody>
+          <a:bodyPr vert="horz" lIns="91440" tIns="45720" rIns="91440" bIns="45720" rtlCol="0"/>
+          <a:lstStyle/>
+          <a:p>
+            <a:pPr lvl="0"/>
+            <a:r>
+              <a:rPr lang="en-US"/>
+              <a:t>Click to edit Master text styles</a:t>
+            </a:r>
+          </a:p>
+          <a:p>
+            <a:pPr lvl="1"/>
+            <a:r>
+              <a:rPr lang="en-US"/>
+              <a:t>Second level</a:t>
+            </a:r>
+          </a:p>
+          <a:p>
+            <a:pPr lvl="2"/>
+            <a:r>
+              <a:rPr lang="en-US"/>
+              <a:t>Third level</a:t>
+            </a:r>
+          </a:p>
+          <a:p>
+            <a:pPr lvl="3"/>
+            <a:r>
+              <a:rPr lang="en-US"/>
+              <a:t>Fourth level</a:t>
+            </a:r>
+          </a:p>
+          <a:p>
+            <a:pPr lvl="4"/>
+            <a:r>
+              <a:rPr lang="en-US"/>
+              <a:t>Fifth level</a:t>
+            </a:r>
+          </a:p>
+        </p:txBody>
+      </p:sp>
+      <p:sp>
+        <p:nvSpPr>
+          <p:cNvPr id="6" name="Footer Placeholder 5"/>
+          <p:cNvSpPr>
+            <a:spLocks noGrp="1"/>
+          </p:cNvSpPr>
+          <p:nvPr>
+            <p:ph type="ftr" sz="quarter" idx="4"/>
+          </p:nvPr>
+        </p:nvSpPr>
+        <p:spPr>
+          <a:xfrm>
+            <a:off x="0" y="8685213"/>
+            <a:ext cx="2971800" cy="458787"/>
+          </a:xfrm>
+          <a:prstGeom prst="rect">
+            <a:avLst/>
+          </a:prstGeom>
+        </p:spPr>
+        <p:txBody>
+          <a:bodyPr vert="horz" lIns="91440" tIns="45720" rIns="91440" bIns="45720" rtlCol="0" anchor="b"/>
+          <a:lstStyle>
+            <a:lvl1pPr algn="l">
+              <a:defRPr sz="1200"/>
+            </a:lvl1pPr>
+          </a:lstStyle>
+          <a:p>
+            <a:endParaRPr lang="en-US"/>
+          </a:p>
+        </p:txBody>
+      </p:sp>
+      <p:sp>
+        <p:nvSpPr>
+          <p:cNvPr id="7" name="Slide Number Placeholder 6"/>
+          <p:cNvSpPr>
+            <a:spLocks noGrp="1"/>
+          </p:cNvSpPr>
+          <p:nvPr>
+            <p:ph type="sldNum" sz="quarter" idx="5"/>
+          </p:nvPr>
+        </p:nvSpPr>
+        <p:spPr>
+          <a:xfrm>
+            <a:off x="3884613" y="8685213"/>
+            <a:ext cx="2971800" cy="458787"/>
+          </a:xfrm>
+          <a:prstGeom prst="rect">
+            <a:avLst/>
+          </a:prstGeom>
+        </p:spPr>
+        <p:txBody>
+          <a:bodyPr vert="horz" lIns="91440" tIns="45720" rIns="91440" bIns="45720" rtlCol="0" anchor="b"/>
+          <a:lstStyle>
+            <a:lvl1pPr algn="r">
+              <a:defRPr sz="1200"/>
+            </a:lvl1pPr>
+          </a:lstStyle>
+          <a:p>
+            <a:fld id="{CE5E9CC1-C706-0F49-92D6-E571CC5EEA8F}" type="slidenum">
+              <a:rPr lang="en-US"/>
+              <a:t>‹#›</a:t>
+            </a:fld>
+            <a:endParaRPr lang="en-US"/>
+          </a:p>
+        </p:txBody>
+      </p:sp>
     </p:spTree>
     <p:extLst>
       <p:ext uri="{BB962C8B-B14F-4D97-AF65-F5344CB8AC3E}">
-        <p14:creationId xmlns:p14="http://schemas.microsoft.com/office/powerpoint/2010/main" val="2332966557"/>
+        <p14:creationId xmlns:p14="http://schemas.microsoft.com/office/powerpoint/2010/main" val="1024086991"/>
       </p:ext>
     </p:extLst>
   </p:cSld>
   <p:clrMap bg1="lt1" tx1="dk1" bg2="lt2" tx2="dk2" accent1="accent1" accent2="accent2" accent3="accent3" accent4="accent4" accent5="accent5" accent6="accent6" hlink="hlink" folHlink="folHlink"/>
   <p:notesStyle>
-    <a:lvl1pPr marL="0" algn="l" defTabSz="914400" rtl="0" eaLnBrk="1" latinLnBrk="1" hangingPunct="1">
+    <a:lvl1pPr marL="0" algn="l" defTabSz="914400" rtl="0" eaLnBrk="1" latinLnBrk="0" hangingPunct="1">
       <a:defRPr sz="1200" kern="1200">
         <a:solidFill>
           <a:schemeClr val="tx1"/>
@@ -167,7 +386,7 @@
         <a:cs typeface="+mn-cs"/>
       </a:defRPr>
     </a:lvl1pPr>
-    <a:lvl2pPr marL="457200" algn="l" defTabSz="914400" rtl="0" eaLnBrk="1" latinLnBrk="1" hangingPunct="1">
+    <a:lvl2pPr marL="457200" algn="l" defTabSz="914400" rtl="0" eaLnBrk="1" latinLnBrk="0" hangingPunct="1">
       <a:defRPr sz="1200" kern="1200">
         <a:solidFill>
           <a:schemeClr val="tx1"/>
@@ -177,7 +396,7 @@
         <a:cs typeface="+mn-cs"/>
       </a:defRPr>
     </a:lvl2pPr>
-    <a:lvl3pPr marL="914400" algn="l" defTabSz="914400" rtl="0" eaLnBrk="1" latinLnBrk="1" hangingPunct="1">
+    <a:lvl3pPr marL="914400" algn="l" defTabSz="914400" rtl="0" eaLnBrk="1" latinLnBrk="0" hangingPunct="1">
       <a:defRPr sz="1200" kern="1200">
         <a:solidFill>
           <a:schemeClr val="tx1"/>
@@ -187,7 +406,7 @@
         <a:cs typeface="+mn-cs"/>
       </a:defRPr>
     </a:lvl3pPr>
-    <a:lvl4pPr marL="1371600" algn="l" defTabSz="914400" rtl="0" eaLnBrk="1" latinLnBrk="1" hangingPunct="1">
+    <a:lvl4pPr marL="1371600" algn="l" defTabSz="914400" rtl="0" eaLnBrk="1" latinLnBrk="0" hangingPunct="1">
       <a:defRPr sz="1200" kern="1200">
         <a:solidFill>
           <a:schemeClr val="tx1"/>
@@ -197,7 +416,7 @@
         <a:cs typeface="+mn-cs"/>
       </a:defRPr>
     </a:lvl4pPr>
-    <a:lvl5pPr marL="1828800" algn="l" defTabSz="914400" rtl="0" eaLnBrk="1" latinLnBrk="1" hangingPunct="1">
+    <a:lvl5pPr marL="1828800" algn="l" defTabSz="914400" rtl="0" eaLnBrk="1" latinLnBrk="0" hangingPunct="1">
       <a:defRPr sz="1200" kern="1200">
         <a:solidFill>
           <a:schemeClr val="tx1"/>
@@ -207,7 +426,7 @@
         <a:cs typeface="+mn-cs"/>
       </a:defRPr>
     </a:lvl5pPr>
-    <a:lvl6pPr marL="2286000" algn="l" defTabSz="914400" rtl="0" eaLnBrk="1" latinLnBrk="1" hangingPunct="1">
+    <a:lvl6pPr marL="2286000" algn="l" defTabSz="914400" rtl="0" eaLnBrk="1" latinLnBrk="0" hangingPunct="1">
       <a:defRPr sz="1200" kern="1200">
         <a:solidFill>
           <a:schemeClr val="tx1"/>
@@ -217,7 +436,7 @@
         <a:cs typeface="+mn-cs"/>
       </a:defRPr>
     </a:lvl6pPr>
-    <a:lvl7pPr marL="2743200" algn="l" defTabSz="914400" rtl="0" eaLnBrk="1" latinLnBrk="1" hangingPunct="1">
+    <a:lvl7pPr marL="2743200" algn="l" defTabSz="914400" rtl="0" eaLnBrk="1" latinLnBrk="0" hangingPunct="1">
       <a:defRPr sz="1200" kern="1200">
         <a:solidFill>
           <a:schemeClr val="tx1"/>
@@ -227,7 +446,7 @@
         <a:cs typeface="+mn-cs"/>
       </a:defRPr>
     </a:lvl7pPr>
-    <a:lvl8pPr marL="3200400" algn="l" defTabSz="914400" rtl="0" eaLnBrk="1" latinLnBrk="1" hangingPunct="1">
+    <a:lvl8pPr marL="3200400" algn="l" defTabSz="914400" rtl="0" eaLnBrk="1" latinLnBrk="0" hangingPunct="1">
       <a:defRPr sz="1200" kern="1200">
         <a:solidFill>
           <a:schemeClr val="tx1"/>
@@ -237,7 +456,7 @@
         <a:cs typeface="+mn-cs"/>
       </a:defRPr>
     </a:lvl8pPr>
-    <a:lvl9pPr marL="3657600" algn="l" defTabSz="914400" rtl="0" eaLnBrk="1" latinLnBrk="1" hangingPunct="1">
+    <a:lvl9pPr marL="3657600" algn="l" defTabSz="914400" rtl="0" eaLnBrk="1" latinLnBrk="0" hangingPunct="1">
       <a:defRPr sz="1200" kern="1200">
         <a:solidFill>
           <a:schemeClr val="tx1"/>
@@ -311,6 +530,7 @@
 ※ 워크시트 두 개가 이 차시의 주 활동이다. 앞이 밀리면 §5(거리)와 §8(경계)을 줄이고 워크시트를 지킨다.
 ※ 워크시트②는 6주차 서비스 계획서에서 다시 쓴다. 반드시 완성해서 저장하게 한다.</a:t>
             </a:r>
+            <a:endParaRPr lang="en-US" dirty="0"/>
           </a:p>
         </p:txBody>
       </p:sp>
@@ -403,10 +623,11 @@
 그리고 dict 라는 이름 말인데요, dictionary 를 줄인 말입니다. 사전이요. 사전에서 낱말을 찾을 때 몇 번째 쪽인지 세지 않죠. 낱말 자체로 찾습니다. dict 도 똑같습니다.
 [예상 질문]
 Q. student.name 처럼 점으로는 안 되나요?
-A. 안 된다. AttributeError 가 난다. 점은 「그 물건이 원래 가지고 있는 것」을 꺼낼 때 쓴다 — 3-1 의 sys.executable 이 그것이다. 대괄호는 「내가 안에 넣어 둔 값」을 꺼낼 때 쓴다. 교과서 12쪽 상자에 적어 두었다.
+A. 안 된다. AttributeError 가 난다. 점은 「그 물건이 원래 가지고 있는 것」을 꺼낼 때 쓴다 — 3-1 의 sys.executable 이 그것이다. 대괄호는 「내가 안에 넣어 둔 값」을 꺼낼 때 쓴다. 물어보는 학생이 있을 때만 답하고, 먼저 꺼내지 않는다.
 [진행 메모]
 2분을 넘기지 않는다. 앞 장에서 코드로 이미 봤고, 여기는 그림으로 굳히는 자리다.</a:t>
             </a:r>
+            <a:endParaRPr lang="en-US" dirty="0"/>
           </a:p>
         </p:txBody>
       </p:sp>
@@ -505,6 +726,7 @@
 워크시트로 넘어가기 직전이다. 여기서 판단 기준을 명확하게 주고 넘어가야 워크시트가 굴러간다.
 "같은 종류 여럿" 대 "한 대상의 여러 항목" — 이 두 마디를 칠판에 남겨 둔다.</a:t>
             </a:r>
+            <a:endParaRPr lang="en-US" dirty="0"/>
           </a:p>
         </p:txBody>
       </p:sp>
@@ -605,6 +827,7 @@
 시간이 밀렸으면 여덟 개 중 2·3·4·6번만 하게 한다. list 와 dict 가 두 번씩 나온다.
 빨리 끝낸 학생은 8번의 답을 dict 로도 만들어 보게 한다.</a:t>
             </a:r>
+            <a:endParaRPr lang="en-US" dirty="0"/>
           </a:p>
         </p:txBody>
       </p:sp>
@@ -704,6 +927,7 @@
 이름표를 한글로 적은 학생은 그냥 두고, 대신 영어로도 한 번 바꿔 보게 한다. 틀린 게 아니다.
 6주차 연결을 반드시 말한다. 이 활동이 오늘로 끝나는 게 아니라는 걸 알면 성의가 달라진다.</a:t>
             </a:r>
+            <a:endParaRPr lang="en-US" dirty="0"/>
           </a:p>
         </p:txBody>
       </p:sp>
@@ -799,6 +1023,7 @@
 새 문법을 가르치는 장이 아니다. **4주차로 넘어가는 다리** 다. 학생이 직접 치게 하지 않는다. 보여 주고 넘어간다.
 시간이 밀렸으면 표 그림만 보여 주고 한 문장으로 끝낸다.</a:t>
             </a:r>
+            <a:endParaRPr lang="en-US" dirty="0"/>
           </a:p>
         </p:txBody>
       </p:sp>
@@ -894,6 +1119,7 @@
 3주차에 만든 환경(.venv, 커널)은 4주차에 그대로 쓴다. **03 폴더를 지우지 말라고 반드시 안내한다.**
 워크시트②를 못 끝낸 학생은 다음 시간 전까지 채워 오게 한다. 6주차에 쓸 재료다.</a:t>
             </a:r>
+            <a:endParaRPr lang="en-US" dirty="0"/>
           </a:p>
         </p:txBody>
       </p:sp>
@@ -990,6 +1216,7 @@
 [진행 메모]
 여기서 문법을 먼저 꺼내지 않는다. "왜 묶어야 하는가" 를 학생이 납득한 뒤에 list 를 보여 준다.</a:t>
             </a:r>
+            <a:endParaRPr lang="en-US" dirty="0"/>
           </a:p>
         </p:txBody>
       </p:sp>
@@ -1089,6 +1316,7 @@
 [썰 — 시간이 남을 때만]
 줄을 서면 사람마다 "몇 번째" 가 정해진다. list 도 똑같다. 값을 넣는 순간 자리가 정해지고, 그 자리는 내가 안 바꾸면 안 바뀐다.</a:t>
             </a:r>
+            <a:endParaRPr lang="en-US" dirty="0"/>
           </a:p>
         </p:txBody>
       </p:sp>
@@ -1187,6 +1415,7 @@
 **학생 답을 반드시 먼저 듣는다.** "첫 번째" 라는 답을 틀렸다고 하지 않는다. 지금 지워 버리면 다음 장의 설명이 교정이 아니라 암기가 된다.
 답이 안 나오면 그냥 넘어간다. 침묵을 오래 끌지 않는다.</a:t>
             </a:r>
+            <a:endParaRPr lang="en-US" dirty="0"/>
           </a:p>
         </p:txBody>
       </p:sp>
@@ -1287,6 +1516,7 @@
 [썰 — 시간이 남을 때만]
 건물 층수도 나라마다 다르다. 한국은 1층부터 세고, 유럽 여러 나라는 지상층을 0층이라 부르고 그 위가 1층이다. 0층은 "안 올라갔다" 는 뜻이다. 프로그래밍의 0도 그 감각에 가깝다.</a:t>
             </a:r>
+            <a:endParaRPr lang="en-US" dirty="0"/>
           </a:p>
         </p:txBody>
       </p:sp>
@@ -1384,6 +1614,7 @@
 [진행 메모]
 "개수보다 하나 작다" 를 규칙으로 외우게 하지 않는다. 거리로 읽으면 자동으로 나오는 결과라는 걸 한 번 더 짚는다.</a:t>
             </a:r>
+            <a:endParaRPr lang="en-US" dirty="0"/>
           </a:p>
         </p:txBody>
       </p:sp>
@@ -1483,6 +1714,7 @@
 학생 화면마다 오류 문장 길이가 다르다. 마지막 줄을 손가락으로 짚어 준다.
 교과서 10쪽에 같은 화면이 있다. 거기 표시된 두 부분을 같이 본다.</a:t>
             </a:r>
+            <a:endParaRPr lang="en-US" dirty="0"/>
           </a:p>
         </p:txBody>
       </p:sp>
@@ -1577,6 +1809,7 @@
 3-1과 3-2를 잇는 장이다. 두 차시가 따로 노는 게 아니라는 걸 여기서 한 번 묶어 준다.
 시간이 밀리면 이 장은 한 문장으로 줄인다. "지난 시간 60점 경계랑 같은 이야기입니다."</a:t>
             </a:r>
+            <a:endParaRPr lang="en-US" dirty="0"/>
           </a:p>
         </p:txBody>
       </p:sp>
@@ -1679,6 +1912,7 @@
 콜론을 빠뜨리는 실수가 가장 많다. 오류가 나면 콜론부터 보게 한다.
 따옴표 안의 이름표와 밖의 변수 이름을 헷갈리는 학생이 있다. student 는 따옴표 없이, "name" 은 따옴표 안에.</a:t>
             </a:r>
+            <a:endParaRPr lang="en-US" dirty="0"/>
           </a:p>
         </p:txBody>
       </p:sp>
@@ -1751,11 +1985,6 @@
 <file path=ppt/slideMasters/slideMaster1.xml><?xml version="1.0" encoding="utf-8"?>
 <p:sldMaster xmlns:a="http://schemas.openxmlformats.org/drawingml/2006/main" xmlns:r="http://schemas.openxmlformats.org/officeDocument/2006/relationships" xmlns:p="http://schemas.openxmlformats.org/presentationml/2006/main">
   <p:cSld>
-    <p:bg>
-      <p:bgRef idx="1001">
-        <a:schemeClr val="bg1"/>
-      </p:bgRef>
-    </p:bg>
     <p:spTree>
       <p:nvGrpSpPr>
         <p:cNvPr id="1" name=""/>
@@ -2038,7 +2267,6 @@
         <a:solidFill>
           <a:srgbClr val="1B1D21"/>
         </a:solidFill>
-        <a:effectLst/>
       </p:bgPr>
     </p:bg>
     <p:spTree>
@@ -2074,13 +2302,6 @@
           </a:solidFill>
           <a:ln/>
         </p:spPr>
-        <p:txBody>
-          <a:bodyPr/>
-          <a:lstStyle/>
-          <a:p>
-            <a:endParaRPr lang="ko-KR" altLang="en-US"/>
-          </a:p>
-        </p:txBody>
       </p:sp>
       <p:sp>
         <p:nvSpPr>
@@ -2103,11 +2324,11 @@
           <a:bodyPr wrap="square" lIns="0" tIns="0" rIns="0" bIns="0" rtlCol="0" anchor="ctr"/>
           <a:lstStyle/>
           <a:p>
-            <a:pPr marL="0" indent="0">
-              <a:buNone/>
-            </a:pPr>
-            <a:r>
-              <a:rPr lang="en-US" sz="1200" b="1" kern="0" spc="100" dirty="0">
+            <a:pPr indent="0" marL="0">
+              <a:buNone/>
+            </a:pPr>
+            <a:r>
+              <a:rPr lang="en-US" sz="1200" b="1" spc="100" kern="0" dirty="0">
                 <a:solidFill>
                   <a:srgbClr val="6C7078"/>
                 </a:solidFill>
@@ -2142,7 +2363,7 @@
           <a:bodyPr wrap="square" lIns="0" tIns="0" rIns="0" bIns="0" rtlCol="0" anchor="ctr"/>
           <a:lstStyle/>
           <a:p>
-            <a:pPr marL="0" indent="0">
+            <a:pPr indent="0" marL="0">
               <a:buNone/>
             </a:pPr>
             <a:r>
@@ -2159,7 +2380,7 @@
             <a:endParaRPr lang="en-US" sz="4200" dirty="0"/>
           </a:p>
           <a:p>
-            <a:pPr marL="0" indent="0">
+            <a:pPr indent="0" marL="0">
               <a:buNone/>
             </a:pPr>
             <a:r>
@@ -2198,7 +2419,7 @@
           <a:bodyPr wrap="square" lIns="0" tIns="0" rIns="0" bIns="0" rtlCol="0" anchor="ctr"/>
           <a:lstStyle/>
           <a:p>
-            <a:pPr marL="0" indent="0">
+            <a:pPr indent="0" marL="0">
               <a:lnSpc>
                 <a:spcPts val="3200"/>
               </a:lnSpc>
@@ -2218,7 +2439,7 @@
             <a:endParaRPr lang="en-US" sz="1900" dirty="0"/>
           </a:p>
           <a:p>
-            <a:pPr marL="0" indent="0">
+            <a:pPr indent="0" marL="0">
               <a:lnSpc>
                 <a:spcPts val="3200"/>
               </a:lnSpc>
@@ -2260,7 +2481,7 @@
           <a:bodyPr wrap="square" lIns="0" tIns="0" rIns="0" bIns="0" rtlCol="0" anchor="ctr"/>
           <a:lstStyle/>
           <a:p>
-            <a:pPr marL="0" indent="0">
+            <a:pPr indent="0" marL="0">
               <a:buNone/>
             </a:pPr>
             <a:r>
@@ -2299,7 +2520,7 @@
           <a:bodyPr wrap="square" lIns="0" tIns="0" rIns="0" bIns="0" rtlCol="0" anchor="ctr"/>
           <a:lstStyle/>
           <a:p>
-            <a:pPr marL="0" indent="0" algn="r">
+            <a:pPr algn="r" indent="0" marL="0">
               <a:buNone/>
             </a:pPr>
             <a:r>
@@ -2333,7 +2554,6 @@
         <a:solidFill>
           <a:srgbClr val="FFFFFF"/>
         </a:solidFill>
-        <a:effectLst/>
       </p:bgPr>
     </p:bg>
     <p:spTree>
@@ -2371,7 +2591,7 @@
           <a:bodyPr wrap="square" lIns="0" tIns="0" rIns="0" bIns="0" rtlCol="0" anchor="ctr"/>
           <a:lstStyle/>
           <a:p>
-            <a:pPr marL="0" indent="0">
+            <a:pPr indent="0" marL="0">
               <a:buNone/>
             </a:pPr>
             <a:r>
@@ -2410,13 +2630,6 @@
           </a:solidFill>
           <a:ln/>
         </p:spPr>
-        <p:txBody>
-          <a:bodyPr/>
-          <a:lstStyle/>
-          <a:p>
-            <a:endParaRPr lang="ko-KR" altLang="en-US"/>
-          </a:p>
-        </p:txBody>
       </p:sp>
       <p:sp>
         <p:nvSpPr>
@@ -2439,7 +2652,7 @@
           <a:bodyPr wrap="square" lIns="0" tIns="0" rIns="0" bIns="0" rtlCol="0" anchor="ctr"/>
           <a:lstStyle/>
           <a:p>
-            <a:pPr marL="0" indent="0" algn="ctr">
+            <a:pPr algn="ctr" indent="0" marL="0">
               <a:buNone/>
             </a:pPr>
             <a:r>
@@ -2478,7 +2691,7 @@
           <a:bodyPr wrap="square" lIns="0" tIns="0" rIns="0" bIns="0" rtlCol="0" anchor="ctr"/>
           <a:lstStyle/>
           <a:p>
-            <a:pPr marL="0" indent="0">
+            <a:pPr indent="0" marL="0">
               <a:buNone/>
             </a:pPr>
             <a:r>
@@ -2515,13 +2728,6 @@
           </a:solidFill>
           <a:ln/>
         </p:spPr>
-        <p:txBody>
-          <a:bodyPr/>
-          <a:lstStyle/>
-          <a:p>
-            <a:endParaRPr lang="ko-KR" altLang="en-US"/>
-          </a:p>
-        </p:txBody>
       </p:sp>
       <p:sp>
         <p:nvSpPr>
@@ -2544,7 +2750,7 @@
           <a:bodyPr wrap="square" lIns="0" tIns="0" rIns="0" bIns="0" rtlCol="0" anchor="ctr"/>
           <a:lstStyle/>
           <a:p>
-            <a:pPr marL="0" indent="0">
+            <a:pPr indent="0" marL="0">
               <a:buNone/>
             </a:pPr>
             <a:r>
@@ -2583,7 +2789,7 @@
           <a:bodyPr wrap="square" lIns="0" tIns="0" rIns="0" bIns="0" rtlCol="0" anchor="ctr"/>
           <a:lstStyle/>
           <a:p>
-            <a:pPr marL="0" indent="0" algn="r">
+            <a:pPr algn="r" indent="0" marL="0">
               <a:buNone/>
             </a:pPr>
             <a:r>
@@ -2603,14 +2809,14 @@
       </p:sp>
       <p:pic>
         <p:nvPicPr>
-          <p:cNvPr id="9" name="Image 0" descr="/home/claude/w5/교과서_배포/assets/img/03-2-06-dict-labels.png"/>
+          <p:cNvPr id="9" name="Image 0" descr="/home/claude/w5/교과서_배포/assets/img/03-2-06-dict-labels.png">    </p:cNvPr>
           <p:cNvPicPr>
             <a:picLocks noChangeAspect="1"/>
           </p:cNvPicPr>
           <p:nvPr/>
         </p:nvPicPr>
         <p:blipFill>
-          <a:blip r:embed="rId3"/>
+          <a:blip r:embed="rId1"/>
           <a:stretch>
             <a:fillRect/>
           </a:stretch>
@@ -2651,13 +2857,6 @@
             <a:prstDash val="solid"/>
           </a:ln>
         </p:spPr>
-        <p:txBody>
-          <a:bodyPr/>
-          <a:lstStyle/>
-          <a:p>
-            <a:endParaRPr lang="ko-KR" altLang="en-US"/>
-          </a:p>
-        </p:txBody>
       </p:sp>
       <p:sp>
         <p:nvSpPr>
@@ -2680,11 +2879,11 @@
           <a:bodyPr wrap="square" lIns="0" tIns="0" rIns="0" bIns="0" rtlCol="0" anchor="ctr"/>
           <a:lstStyle/>
           <a:p>
-            <a:pPr marL="0" indent="0">
-              <a:buNone/>
-            </a:pPr>
-            <a:r>
-              <a:rPr lang="en-US" sz="1050" b="1" kern="0" spc="60" dirty="0">
+            <a:pPr indent="0" marL="0">
+              <a:buNone/>
+            </a:pPr>
+            <a:r>
+              <a:rPr lang="en-US" sz="1050" b="1" spc="60" kern="0" dirty="0">
                 <a:solidFill>
                   <a:srgbClr val="FF5C00"/>
                 </a:solidFill>
@@ -2719,7 +2918,7 @@
           <a:bodyPr wrap="square" lIns="0" tIns="0" rIns="0" bIns="0" rtlCol="0" anchor="ctr"/>
           <a:lstStyle/>
           <a:p>
-            <a:pPr marL="0" indent="0">
+            <a:pPr indent="0" marL="0">
               <a:buNone/>
             </a:pPr>
             <a:r>
@@ -2758,7 +2957,7 @@
           <a:bodyPr wrap="square" lIns="0" tIns="0" rIns="0" bIns="0" rtlCol="0" anchor="t"/>
           <a:lstStyle/>
           <a:p>
-            <a:pPr marL="0" indent="0">
+            <a:pPr indent="0" marL="0">
               <a:lnSpc>
                 <a:spcPts val="1900"/>
               </a:lnSpc>
@@ -2805,13 +3004,6 @@
             <a:prstDash val="solid"/>
           </a:ln>
         </p:spPr>
-        <p:txBody>
-          <a:bodyPr/>
-          <a:lstStyle/>
-          <a:p>
-            <a:endParaRPr lang="ko-KR" altLang="en-US"/>
-          </a:p>
-        </p:txBody>
       </p:sp>
       <p:sp>
         <p:nvSpPr>
@@ -2834,11 +3026,11 @@
           <a:bodyPr wrap="square" lIns="0" tIns="0" rIns="0" bIns="0" rtlCol="0" anchor="ctr"/>
           <a:lstStyle/>
           <a:p>
-            <a:pPr marL="0" indent="0">
-              <a:buNone/>
-            </a:pPr>
-            <a:r>
-              <a:rPr lang="en-US" sz="1050" b="1" kern="0" spc="60" dirty="0">
+            <a:pPr indent="0" marL="0">
+              <a:buNone/>
+            </a:pPr>
+            <a:r>
+              <a:rPr lang="en-US" sz="1050" b="1" spc="60" kern="0" dirty="0">
                 <a:solidFill>
                   <a:srgbClr val="0E7C86"/>
                 </a:solidFill>
@@ -2873,7 +3065,7 @@
           <a:bodyPr wrap="square" lIns="0" tIns="0" rIns="0" bIns="0" rtlCol="0" anchor="ctr"/>
           <a:lstStyle/>
           <a:p>
-            <a:pPr marL="0" indent="0">
+            <a:pPr indent="0" marL="0">
               <a:buNone/>
             </a:pPr>
             <a:r>
@@ -2912,7 +3104,7 @@
           <a:bodyPr wrap="square" lIns="0" tIns="0" rIns="0" bIns="0" rtlCol="0" anchor="t"/>
           <a:lstStyle/>
           <a:p>
-            <a:pPr marL="0" indent="0">
+            <a:pPr indent="0" marL="0">
               <a:lnSpc>
                 <a:spcPts val="1900"/>
               </a:lnSpc>
@@ -2932,7 +3124,7 @@
             <a:endParaRPr lang="en-US" sz="1300" dirty="0"/>
           </a:p>
           <a:p>
-            <a:pPr marL="0" indent="0">
+            <a:pPr indent="0" marL="0">
               <a:lnSpc>
                 <a:spcPts val="1900"/>
               </a:lnSpc>
@@ -2974,7 +3166,7 @@
           <a:bodyPr wrap="square" lIns="0" tIns="0" rIns="0" bIns="0" rtlCol="0" anchor="ctr"/>
           <a:lstStyle/>
           <a:p>
-            <a:pPr marL="0" indent="0" algn="ctr">
+            <a:pPr algn="ctr" indent="0" marL="0">
               <a:buNone/>
             </a:pPr>
             <a:r>
@@ -3008,7 +3200,6 @@
         <a:solidFill>
           <a:srgbClr val="FFFFFF"/>
         </a:solidFill>
-        <a:effectLst/>
       </p:bgPr>
     </p:bg>
     <p:spTree>
@@ -3046,7 +3237,7 @@
           <a:bodyPr wrap="square" lIns="0" tIns="0" rIns="0" bIns="0" rtlCol="0" anchor="ctr"/>
           <a:lstStyle/>
           <a:p>
-            <a:pPr marL="0" indent="0">
+            <a:pPr indent="0" marL="0">
               <a:buNone/>
             </a:pPr>
             <a:r>
@@ -3085,13 +3276,6 @@
           </a:solidFill>
           <a:ln/>
         </p:spPr>
-        <p:txBody>
-          <a:bodyPr/>
-          <a:lstStyle/>
-          <a:p>
-            <a:endParaRPr lang="ko-KR" altLang="en-US"/>
-          </a:p>
-        </p:txBody>
       </p:sp>
       <p:sp>
         <p:nvSpPr>
@@ -3114,7 +3298,7 @@
           <a:bodyPr wrap="square" lIns="0" tIns="0" rIns="0" bIns="0" rtlCol="0" anchor="ctr"/>
           <a:lstStyle/>
           <a:p>
-            <a:pPr marL="0" indent="0" algn="ctr">
+            <a:pPr algn="ctr" indent="0" marL="0">
               <a:buNone/>
             </a:pPr>
             <a:r>
@@ -3153,7 +3337,7 @@
           <a:bodyPr wrap="square" lIns="0" tIns="0" rIns="0" bIns="0" rtlCol="0" anchor="ctr"/>
           <a:lstStyle/>
           <a:p>
-            <a:pPr marL="0" indent="0">
+            <a:pPr indent="0" marL="0">
               <a:buNone/>
             </a:pPr>
             <a:r>
@@ -3190,13 +3374,6 @@
           </a:solidFill>
           <a:ln/>
         </p:spPr>
-        <p:txBody>
-          <a:bodyPr/>
-          <a:lstStyle/>
-          <a:p>
-            <a:endParaRPr lang="ko-KR" altLang="en-US"/>
-          </a:p>
-        </p:txBody>
       </p:sp>
       <p:sp>
         <p:nvSpPr>
@@ -3219,7 +3396,7 @@
           <a:bodyPr wrap="square" lIns="0" tIns="0" rIns="0" bIns="0" rtlCol="0" anchor="ctr"/>
           <a:lstStyle/>
           <a:p>
-            <a:pPr marL="0" indent="0" algn="r">
+            <a:pPr algn="r" indent="0" marL="0">
               <a:buNone/>
             </a:pPr>
             <a:r>
@@ -3258,7 +3435,7 @@
           <a:bodyPr wrap="square" lIns="0" tIns="0" rIns="0" bIns="0" rtlCol="0" anchor="ctr"/>
           <a:lstStyle/>
           <a:p>
-            <a:pPr marL="0" indent="0">
+            <a:pPr indent="0" marL="0">
               <a:buNone/>
             </a:pPr>
             <a:r>
@@ -3297,7 +3474,7 @@
           <a:bodyPr wrap="square" lIns="0" tIns="0" rIns="0" bIns="0" rtlCol="0" anchor="ctr"/>
           <a:lstStyle/>
           <a:p>
-            <a:pPr marL="0" indent="0" algn="r">
+            <a:pPr algn="r" indent="0" marL="0">
               <a:buNone/>
             </a:pPr>
             <a:r>
@@ -3315,20 +3492,44 @@
           </a:p>
         </p:txBody>
       </p:sp>
-      <p:sp>
-        <p:nvSpPr>
-          <p:cNvPr id="10" name="Shape 8"/>
-          <p:cNvSpPr/>
-          <p:nvPr/>
-        </p:nvSpPr>
-        <p:spPr>
-          <a:xfrm>
-            <a:off x="530352" y="2011680"/>
-            <a:ext cx="5349240" cy="2651760"/>
+      <p:pic>
+        <p:nvPicPr>
+          <p:cNvPr id="10" name="Image 0" descr="/home/claude/w5/교과서_배포/assets/img/03-2-07-list-vs-dict.png">    </p:cNvPr>
+          <p:cNvPicPr>
+            <a:picLocks noChangeAspect="1"/>
+          </p:cNvPicPr>
+          <p:nvPr/>
+        </p:nvPicPr>
+        <p:blipFill>
+          <a:blip r:embed="rId1"/>
+          <a:stretch>
+            <a:fillRect/>
+          </a:stretch>
+        </p:blipFill>
+        <p:spPr>
+          <a:xfrm>
+            <a:off x="530352" y="1784223"/>
+            <a:ext cx="6400800" cy="3600450"/>
+          </a:xfrm>
+          <a:prstGeom prst="rect">
+            <a:avLst/>
+          </a:prstGeom>
+        </p:spPr>
+      </p:pic>
+      <p:sp>
+        <p:nvSpPr>
+          <p:cNvPr id="11" name="Shape 8"/>
+          <p:cNvSpPr/>
+          <p:nvPr/>
+        </p:nvSpPr>
+        <p:spPr>
+          <a:xfrm>
+            <a:off x="7178040" y="1783080"/>
+            <a:ext cx="4480560" cy="1737360"/>
           </a:xfrm>
           <a:prstGeom prst="roundRect">
             <a:avLst>
-              <a:gd name="adj" fmla="val 1897"/>
+              <a:gd name="adj" fmla="val 2895"/>
             </a:avLst>
           </a:prstGeom>
           <a:solidFill>
@@ -3341,36 +3542,29 @@
             <a:prstDash val="solid"/>
           </a:ln>
         </p:spPr>
-        <p:txBody>
-          <a:bodyPr/>
-          <a:lstStyle/>
-          <a:p>
-            <a:endParaRPr lang="ko-KR" altLang="en-US"/>
-          </a:p>
-        </p:txBody>
-      </p:sp>
-      <p:sp>
-        <p:nvSpPr>
-          <p:cNvPr id="11" name="Text 9"/>
-          <p:cNvSpPr/>
-          <p:nvPr/>
-        </p:nvSpPr>
-        <p:spPr>
-          <a:xfrm>
-            <a:off x="713232" y="2176272"/>
-            <a:ext cx="4983480" cy="329184"/>
-          </a:xfrm>
-          <a:prstGeom prst="rect">
-            <a:avLst/>
-          </a:prstGeom>
-          <a:noFill/>
-          <a:ln/>
-        </p:spPr>
-        <p:txBody>
-          <a:bodyPr wrap="square" lIns="0" tIns="0" rIns="0" bIns="0" rtlCol="0" anchor="ctr"/>
-          <a:lstStyle/>
-          <a:p>
-            <a:pPr marL="0" indent="0">
+      </p:sp>
+      <p:sp>
+        <p:nvSpPr>
+          <p:cNvPr id="12" name="Text 9"/>
+          <p:cNvSpPr/>
+          <p:nvPr/>
+        </p:nvSpPr>
+        <p:spPr>
+          <a:xfrm>
+            <a:off x="7360920" y="1947672"/>
+            <a:ext cx="4114800" cy="329184"/>
+          </a:xfrm>
+          <a:prstGeom prst="rect">
+            <a:avLst/>
+          </a:prstGeom>
+          <a:noFill/>
+          <a:ln/>
+        </p:spPr>
+        <p:txBody>
+          <a:bodyPr wrap="square" lIns="0" tIns="0" rIns="0" bIns="0" rtlCol="0" anchor="ctr"/>
+          <a:lstStyle/>
+          <a:p>
+            <a:pPr indent="0" marL="0">
               <a:buNone/>
             </a:pPr>
             <a:r>
@@ -3390,26 +3584,26 @@
       </p:sp>
       <p:sp>
         <p:nvSpPr>
-          <p:cNvPr id="12" name="Text 10"/>
-          <p:cNvSpPr/>
-          <p:nvPr/>
-        </p:nvSpPr>
-        <p:spPr>
-          <a:xfrm>
-            <a:off x="713232" y="2596896"/>
-            <a:ext cx="4983480" cy="402336"/>
-          </a:xfrm>
-          <a:prstGeom prst="rect">
-            <a:avLst/>
-          </a:prstGeom>
-          <a:noFill/>
-          <a:ln/>
-        </p:spPr>
-        <p:txBody>
-          <a:bodyPr wrap="square" lIns="0" tIns="0" rIns="0" bIns="0" rtlCol="0" anchor="ctr"/>
-          <a:lstStyle/>
-          <a:p>
-            <a:pPr marL="0" indent="0">
+          <p:cNvPr id="13" name="Text 10"/>
+          <p:cNvSpPr/>
+          <p:nvPr/>
+        </p:nvSpPr>
+        <p:spPr>
+          <a:xfrm>
+            <a:off x="7360920" y="2368296"/>
+            <a:ext cx="4114800" cy="402336"/>
+          </a:xfrm>
+          <a:prstGeom prst="rect">
+            <a:avLst/>
+          </a:prstGeom>
+          <a:noFill/>
+          <a:ln/>
+        </p:spPr>
+        <p:txBody>
+          <a:bodyPr wrap="square" lIns="0" tIns="0" rIns="0" bIns="0" rtlCol="0" anchor="ctr"/>
+          <a:lstStyle/>
+          <a:p>
+            <a:pPr indent="0" marL="0">
               <a:buNone/>
             </a:pPr>
             <a:r>
@@ -3429,14 +3623,14 @@
       </p:sp>
       <p:sp>
         <p:nvSpPr>
-          <p:cNvPr id="13" name="Text 11"/>
-          <p:cNvSpPr/>
-          <p:nvPr/>
-        </p:nvSpPr>
-        <p:spPr>
-          <a:xfrm>
-            <a:off x="713232" y="3090672"/>
-            <a:ext cx="4983480" cy="1426464"/>
+          <p:cNvPr id="14" name="Text 11"/>
+          <p:cNvSpPr/>
+          <p:nvPr/>
+        </p:nvSpPr>
+        <p:spPr>
+          <a:xfrm>
+            <a:off x="7360920" y="2862072"/>
+            <a:ext cx="4114800" cy="512064"/>
           </a:xfrm>
           <a:prstGeom prst="rect">
             <a:avLst/>
@@ -3448,14 +3642,14 @@
           <a:bodyPr wrap="square" lIns="0" tIns="0" rIns="0" bIns="0" rtlCol="0" anchor="t"/>
           <a:lstStyle/>
           <a:p>
-            <a:pPr marL="0" indent="0">
+            <a:pPr indent="0" marL="0">
               <a:lnSpc>
                 <a:spcPts val="1900"/>
               </a:lnSpc>
               <a:buNone/>
             </a:pPr>
             <a:r>
-              <a:rPr lang="en-US" sz="1240" dirty="0">
+              <a:rPr lang="en-US" sz="1300" dirty="0">
                 <a:solidFill>
                   <a:srgbClr val="6C7078"/>
                 </a:solidFill>
@@ -3465,26 +3659,17 @@
               </a:rPr>
               <a:t>순서와 위치로 찾는다</a:t>
             </a:r>
-            <a:endParaRPr lang="en-US" sz="1240" dirty="0"/>
-          </a:p>
-          <a:p>
-            <a:pPr marL="0" indent="0">
+            <a:endParaRPr lang="en-US" sz="1300" dirty="0"/>
+          </a:p>
+          <a:p>
+            <a:pPr indent="0" marL="0">
               <a:lnSpc>
                 <a:spcPts val="1900"/>
               </a:lnSpc>
               <a:buNone/>
             </a:pPr>
-            <a:endParaRPr lang="en-US" sz="1240" dirty="0"/>
-          </a:p>
-          <a:p>
-            <a:pPr marL="0" indent="0">
-              <a:lnSpc>
-                <a:spcPts val="1900"/>
-              </a:lnSpc>
-              <a:buNone/>
-            </a:pPr>
-            <a:r>
-              <a:rPr lang="en-US" sz="1240" dirty="0">
+            <a:r>
+              <a:rPr lang="en-US" sz="1300" dirty="0">
                 <a:solidFill>
                   <a:srgbClr val="6C7078"/>
                 </a:solidFill>
@@ -3492,46 +3677,26 @@
                 <a:ea typeface="IBM Plex Sans KR" pitchFamily="34" charset="-122"/>
                 <a:cs typeface="IBM Plex Sans KR" pitchFamily="34" charset="-120"/>
               </a:rPr>
-              <a:t>같은 종류가 여러 개</a:t>
-            </a:r>
-            <a:endParaRPr lang="en-US" sz="1240" dirty="0"/>
-          </a:p>
-          <a:p>
-            <a:pPr marL="0" indent="0">
-              <a:lnSpc>
-                <a:spcPts val="1900"/>
-              </a:lnSpc>
-              <a:buNone/>
-            </a:pPr>
-            <a:r>
-              <a:rPr lang="en-US" sz="1240" dirty="0">
-                <a:solidFill>
-                  <a:srgbClr val="6C7078"/>
-                </a:solidFill>
-                <a:latin typeface="IBM Plex Sans KR" pitchFamily="34" charset="0"/>
-                <a:ea typeface="IBM Plex Sans KR" pitchFamily="34" charset="-122"/>
-                <a:cs typeface="IBM Plex Sans KR" pitchFamily="34" charset="-120"/>
-              </a:rPr>
-              <a:t>늘어설 때</a:t>
-            </a:r>
-            <a:endParaRPr lang="en-US" sz="1240" dirty="0"/>
-          </a:p>
-        </p:txBody>
-      </p:sp>
-      <p:sp>
-        <p:nvSpPr>
-          <p:cNvPr id="14" name="Shape 12"/>
-          <p:cNvSpPr/>
-          <p:nvPr/>
-        </p:nvSpPr>
-        <p:spPr>
-          <a:xfrm>
-            <a:off x="6309360" y="2011680"/>
-            <a:ext cx="5349240" cy="2651760"/>
+              <a:t>같은 종류가 여러 개 늘어설 때</a:t>
+            </a:r>
+            <a:endParaRPr lang="en-US" sz="1300" dirty="0"/>
+          </a:p>
+        </p:txBody>
+      </p:sp>
+      <p:sp>
+        <p:nvSpPr>
+          <p:cNvPr id="15" name="Shape 12"/>
+          <p:cNvSpPr/>
+          <p:nvPr/>
+        </p:nvSpPr>
+        <p:spPr>
+          <a:xfrm>
+            <a:off x="7178040" y="3648456"/>
+            <a:ext cx="4480560" cy="1737360"/>
           </a:xfrm>
           <a:prstGeom prst="roundRect">
             <a:avLst>
-              <a:gd name="adj" fmla="val 1897"/>
+              <a:gd name="adj" fmla="val 2895"/>
             </a:avLst>
           </a:prstGeom>
           <a:solidFill>
@@ -3544,36 +3709,29 @@
             <a:prstDash val="solid"/>
           </a:ln>
         </p:spPr>
-        <p:txBody>
-          <a:bodyPr/>
-          <a:lstStyle/>
-          <a:p>
-            <a:endParaRPr lang="ko-KR" altLang="en-US"/>
-          </a:p>
-        </p:txBody>
-      </p:sp>
-      <p:sp>
-        <p:nvSpPr>
-          <p:cNvPr id="15" name="Text 13"/>
-          <p:cNvSpPr/>
-          <p:nvPr/>
-        </p:nvSpPr>
-        <p:spPr>
-          <a:xfrm>
-            <a:off x="6492240" y="2176272"/>
-            <a:ext cx="4983480" cy="329184"/>
-          </a:xfrm>
-          <a:prstGeom prst="rect">
-            <a:avLst/>
-          </a:prstGeom>
-          <a:noFill/>
-          <a:ln/>
-        </p:spPr>
-        <p:txBody>
-          <a:bodyPr wrap="square" lIns="0" tIns="0" rIns="0" bIns="0" rtlCol="0" anchor="ctr"/>
-          <a:lstStyle/>
-          <a:p>
-            <a:pPr marL="0" indent="0">
+      </p:sp>
+      <p:sp>
+        <p:nvSpPr>
+          <p:cNvPr id="16" name="Text 13"/>
+          <p:cNvSpPr/>
+          <p:nvPr/>
+        </p:nvSpPr>
+        <p:spPr>
+          <a:xfrm>
+            <a:off x="7360920" y="3813048"/>
+            <a:ext cx="4114800" cy="329184"/>
+          </a:xfrm>
+          <a:prstGeom prst="rect">
+            <a:avLst/>
+          </a:prstGeom>
+          <a:noFill/>
+          <a:ln/>
+        </p:spPr>
+        <p:txBody>
+          <a:bodyPr wrap="square" lIns="0" tIns="0" rIns="0" bIns="0" rtlCol="0" anchor="ctr"/>
+          <a:lstStyle/>
+          <a:p>
+            <a:pPr indent="0" marL="0">
               <a:buNone/>
             </a:pPr>
             <a:r>
@@ -3593,26 +3751,26 @@
       </p:sp>
       <p:sp>
         <p:nvSpPr>
-          <p:cNvPr id="16" name="Text 14"/>
-          <p:cNvSpPr/>
-          <p:nvPr/>
-        </p:nvSpPr>
-        <p:spPr>
-          <a:xfrm>
-            <a:off x="6492240" y="2596896"/>
-            <a:ext cx="4983480" cy="402336"/>
-          </a:xfrm>
-          <a:prstGeom prst="rect">
-            <a:avLst/>
-          </a:prstGeom>
-          <a:noFill/>
-          <a:ln/>
-        </p:spPr>
-        <p:txBody>
-          <a:bodyPr wrap="square" lIns="0" tIns="0" rIns="0" bIns="0" rtlCol="0" anchor="ctr"/>
-          <a:lstStyle/>
-          <a:p>
-            <a:pPr marL="0" indent="0">
+          <p:cNvPr id="17" name="Text 14"/>
+          <p:cNvSpPr/>
+          <p:nvPr/>
+        </p:nvSpPr>
+        <p:spPr>
+          <a:xfrm>
+            <a:off x="7360920" y="4233672"/>
+            <a:ext cx="4114800" cy="402336"/>
+          </a:xfrm>
+          <a:prstGeom prst="rect">
+            <a:avLst/>
+          </a:prstGeom>
+          <a:noFill/>
+          <a:ln/>
+        </p:spPr>
+        <p:txBody>
+          <a:bodyPr wrap="square" lIns="0" tIns="0" rIns="0" bIns="0" rtlCol="0" anchor="ctr"/>
+          <a:lstStyle/>
+          <a:p>
+            <a:pPr indent="0" marL="0">
               <a:buNone/>
             </a:pPr>
             <a:r>
@@ -3632,14 +3790,14 @@
       </p:sp>
       <p:sp>
         <p:nvSpPr>
-          <p:cNvPr id="17" name="Text 15"/>
-          <p:cNvSpPr/>
-          <p:nvPr/>
-        </p:nvSpPr>
-        <p:spPr>
-          <a:xfrm>
-            <a:off x="6492240" y="3090672"/>
-            <a:ext cx="4983480" cy="1426464"/>
+          <p:cNvPr id="18" name="Text 15"/>
+          <p:cNvSpPr/>
+          <p:nvPr/>
+        </p:nvSpPr>
+        <p:spPr>
+          <a:xfrm>
+            <a:off x="7360920" y="4727448"/>
+            <a:ext cx="4114800" cy="512064"/>
           </a:xfrm>
           <a:prstGeom prst="rect">
             <a:avLst/>
@@ -3651,14 +3809,14 @@
           <a:bodyPr wrap="square" lIns="0" tIns="0" rIns="0" bIns="0" rtlCol="0" anchor="t"/>
           <a:lstStyle/>
           <a:p>
-            <a:pPr marL="0" indent="0">
+            <a:pPr indent="0" marL="0">
               <a:lnSpc>
                 <a:spcPts val="1900"/>
               </a:lnSpc>
               <a:buNone/>
             </a:pPr>
             <a:r>
-              <a:rPr lang="en-US" sz="1240" dirty="0">
+              <a:rPr lang="en-US" sz="1300" dirty="0">
                 <a:solidFill>
                   <a:srgbClr val="34373D"/>
                 </a:solidFill>
@@ -3668,26 +3826,17 @@
               </a:rPr>
               <a:t>이름과 의미로 찾는다</a:t>
             </a:r>
-            <a:endParaRPr lang="en-US" sz="1240" dirty="0"/>
-          </a:p>
-          <a:p>
-            <a:pPr marL="0" indent="0">
+            <a:endParaRPr lang="en-US" sz="1300" dirty="0"/>
+          </a:p>
+          <a:p>
+            <a:pPr indent="0" marL="0">
               <a:lnSpc>
                 <a:spcPts val="1900"/>
               </a:lnSpc>
               <a:buNone/>
             </a:pPr>
-            <a:endParaRPr lang="en-US" sz="1240" dirty="0"/>
-          </a:p>
-          <a:p>
-            <a:pPr marL="0" indent="0">
-              <a:lnSpc>
-                <a:spcPts val="1900"/>
-              </a:lnSpc>
-              <a:buNone/>
-            </a:pPr>
-            <a:r>
-              <a:rPr lang="en-US" sz="1240" dirty="0">
+            <a:r>
+              <a:rPr lang="en-US" sz="1300" dirty="0">
                 <a:solidFill>
                   <a:srgbClr val="34373D"/>
                 </a:solidFill>
@@ -3695,41 +3844,21 @@
                 <a:ea typeface="IBM Plex Sans KR" pitchFamily="34" charset="-122"/>
                 <a:cs typeface="IBM Plex Sans KR" pitchFamily="34" charset="-120"/>
               </a:rPr>
-              <a:t>한 대상의 서로 다른</a:t>
-            </a:r>
-            <a:endParaRPr lang="en-US" sz="1240" dirty="0"/>
-          </a:p>
-          <a:p>
-            <a:pPr marL="0" indent="0">
-              <a:lnSpc>
-                <a:spcPts val="1900"/>
-              </a:lnSpc>
-              <a:buNone/>
-            </a:pPr>
-            <a:r>
-              <a:rPr lang="en-US" sz="1240" dirty="0">
-                <a:solidFill>
-                  <a:srgbClr val="34373D"/>
-                </a:solidFill>
-                <a:latin typeface="IBM Plex Sans KR" pitchFamily="34" charset="0"/>
-                <a:ea typeface="IBM Plex Sans KR" pitchFamily="34" charset="-122"/>
-                <a:cs typeface="IBM Plex Sans KR" pitchFamily="34" charset="-120"/>
-              </a:rPr>
-              <a:t>항목일 때</a:t>
-            </a:r>
-            <a:endParaRPr lang="en-US" sz="1240" dirty="0"/>
-          </a:p>
-        </p:txBody>
-      </p:sp>
-      <p:sp>
-        <p:nvSpPr>
-          <p:cNvPr id="18" name="Shape 16"/>
-          <p:cNvSpPr/>
-          <p:nvPr/>
-        </p:nvSpPr>
-        <p:spPr>
-          <a:xfrm>
-            <a:off x="530352" y="5029200"/>
+              <a:t>한 대상의 서로 다른 항목일 때</a:t>
+            </a:r>
+            <a:endParaRPr lang="en-US" sz="1300" dirty="0"/>
+          </a:p>
+        </p:txBody>
+      </p:sp>
+      <p:sp>
+        <p:nvSpPr>
+          <p:cNvPr id="19" name="Shape 16"/>
+          <p:cNvSpPr/>
+          <p:nvPr/>
+        </p:nvSpPr>
+        <p:spPr>
+          <a:xfrm>
+            <a:off x="530352" y="5577840"/>
             <a:ext cx="11128248" cy="512064"/>
           </a:xfrm>
           <a:prstGeom prst="roundRect">
@@ -3747,23 +3876,16 @@
             <a:prstDash val="solid"/>
           </a:ln>
         </p:spPr>
-        <p:txBody>
-          <a:bodyPr/>
-          <a:lstStyle/>
-          <a:p>
-            <a:endParaRPr lang="ko-KR" altLang="en-US"/>
-          </a:p>
-        </p:txBody>
-      </p:sp>
-      <p:sp>
-        <p:nvSpPr>
-          <p:cNvPr id="19" name="Text 17"/>
-          <p:cNvSpPr/>
-          <p:nvPr/>
-        </p:nvSpPr>
-        <p:spPr>
-          <a:xfrm>
-            <a:off x="731520" y="5029200"/>
+      </p:sp>
+      <p:sp>
+        <p:nvSpPr>
+          <p:cNvPr id="20" name="Text 17"/>
+          <p:cNvSpPr/>
+          <p:nvPr/>
+        </p:nvSpPr>
+        <p:spPr>
+          <a:xfrm>
+            <a:off x="731520" y="5577840"/>
             <a:ext cx="10725912" cy="512064"/>
           </a:xfrm>
           <a:prstGeom prst="rect">
@@ -3776,7 +3898,7 @@
           <a:bodyPr wrap="square" lIns="0" tIns="0" rIns="0" bIns="0" rtlCol="0" anchor="ctr"/>
           <a:lstStyle/>
           <a:p>
-            <a:pPr marL="0" indent="0" algn="ctr">
+            <a:pPr algn="ctr" indent="0" marL="0">
               <a:buNone/>
             </a:pPr>
             <a:r>
@@ -3810,7 +3932,6 @@
         <a:solidFill>
           <a:srgbClr val="FFFFFF"/>
         </a:solidFill>
-        <a:effectLst/>
       </p:bgPr>
     </p:bg>
     <p:spTree>
@@ -3848,7 +3969,7 @@
           <a:bodyPr wrap="square" lIns="0" tIns="0" rIns="0" bIns="0" rtlCol="0" anchor="ctr"/>
           <a:lstStyle/>
           <a:p>
-            <a:pPr marL="0" indent="0">
+            <a:pPr indent="0" marL="0">
               <a:buNone/>
             </a:pPr>
             <a:r>
@@ -3887,13 +4008,6 @@
           </a:solidFill>
           <a:ln/>
         </p:spPr>
-        <p:txBody>
-          <a:bodyPr/>
-          <a:lstStyle/>
-          <a:p>
-            <a:endParaRPr lang="ko-KR" altLang="en-US"/>
-          </a:p>
-        </p:txBody>
       </p:sp>
       <p:sp>
         <p:nvSpPr>
@@ -3916,7 +4030,7 @@
           <a:bodyPr wrap="square" lIns="0" tIns="0" rIns="0" bIns="0" rtlCol="0" anchor="ctr"/>
           <a:lstStyle/>
           <a:p>
-            <a:pPr marL="0" indent="0" algn="ctr">
+            <a:pPr algn="ctr" indent="0" marL="0">
               <a:buNone/>
             </a:pPr>
             <a:r>
@@ -3955,7 +4069,7 @@
           <a:bodyPr wrap="square" lIns="0" tIns="0" rIns="0" bIns="0" rtlCol="0" anchor="ctr"/>
           <a:lstStyle/>
           <a:p>
-            <a:pPr marL="0" indent="0">
+            <a:pPr indent="0" marL="0">
               <a:buNone/>
             </a:pPr>
             <a:r>
@@ -3992,13 +4106,6 @@
           </a:solidFill>
           <a:ln/>
         </p:spPr>
-        <p:txBody>
-          <a:bodyPr/>
-          <a:lstStyle/>
-          <a:p>
-            <a:endParaRPr lang="ko-KR" altLang="en-US"/>
-          </a:p>
-        </p:txBody>
       </p:sp>
       <p:sp>
         <p:nvSpPr>
@@ -4021,7 +4128,7 @@
           <a:bodyPr wrap="square" lIns="0" tIns="0" rIns="0" bIns="0" rtlCol="0" anchor="ctr"/>
           <a:lstStyle/>
           <a:p>
-            <a:pPr marL="0" indent="0" algn="r">
+            <a:pPr algn="r" indent="0" marL="0">
               <a:buNone/>
             </a:pPr>
             <a:r>
@@ -4060,7 +4167,7 @@
           <a:bodyPr wrap="square" lIns="0" tIns="0" rIns="0" bIns="0" rtlCol="0" anchor="ctr"/>
           <a:lstStyle/>
           <a:p>
-            <a:pPr marL="0" indent="0">
+            <a:pPr indent="0" marL="0">
               <a:buNone/>
             </a:pPr>
             <a:r>
@@ -4099,7 +4206,7 @@
           <a:bodyPr wrap="square" lIns="0" tIns="0" rIns="0" bIns="0" rtlCol="0" anchor="ctr"/>
           <a:lstStyle/>
           <a:p>
-            <a:pPr marL="0" indent="0" algn="r">
+            <a:pPr algn="r" indent="0" marL="0">
               <a:buNone/>
             </a:pPr>
             <a:r>
@@ -4136,13 +4243,6 @@
           </a:solidFill>
           <a:ln/>
         </p:spPr>
-        <p:txBody>
-          <a:bodyPr/>
-          <a:lstStyle/>
-          <a:p>
-            <a:endParaRPr lang="ko-KR" altLang="en-US"/>
-          </a:p>
-        </p:txBody>
       </p:sp>
       <p:sp>
         <p:nvSpPr>
@@ -4165,7 +4265,7 @@
           <a:bodyPr wrap="square" lIns="0" tIns="0" rIns="0" bIns="0" rtlCol="0" anchor="ctr"/>
           <a:lstStyle/>
           <a:p>
-            <a:pPr marL="0" indent="0">
+            <a:pPr indent="0" marL="0">
               <a:buNone/>
             </a:pPr>
             <a:r>
@@ -4202,13 +4302,6 @@
           </a:solidFill>
           <a:ln/>
         </p:spPr>
-        <p:txBody>
-          <a:bodyPr/>
-          <a:lstStyle/>
-          <a:p>
-            <a:endParaRPr lang="ko-KR" altLang="en-US"/>
-          </a:p>
-        </p:txBody>
       </p:sp>
       <p:sp>
         <p:nvSpPr>
@@ -4231,7 +4324,7 @@
           <a:bodyPr wrap="square" lIns="0" tIns="0" rIns="0" bIns="0" rtlCol="0" anchor="ctr"/>
           <a:lstStyle/>
           <a:p>
-            <a:pPr marL="0" indent="0">
+            <a:pPr indent="0" marL="0">
               <a:buNone/>
             </a:pPr>
             <a:r>
@@ -4268,13 +4361,6 @@
           </a:solidFill>
           <a:ln/>
         </p:spPr>
-        <p:txBody>
-          <a:bodyPr/>
-          <a:lstStyle/>
-          <a:p>
-            <a:endParaRPr lang="ko-KR" altLang="en-US"/>
-          </a:p>
-        </p:txBody>
       </p:sp>
       <p:sp>
         <p:nvSpPr>
@@ -4297,7 +4383,7 @@
           <a:bodyPr wrap="square" lIns="0" tIns="0" rIns="0" bIns="0" rtlCol="0" anchor="ctr"/>
           <a:lstStyle/>
           <a:p>
-            <a:pPr marL="0" indent="0">
+            <a:pPr indent="0" marL="0">
               <a:buNone/>
             </a:pPr>
             <a:r>
@@ -4339,13 +4425,6 @@
             <a:prstDash val="solid"/>
           </a:ln>
         </p:spPr>
-        <p:txBody>
-          <a:bodyPr/>
-          <a:lstStyle/>
-          <a:p>
-            <a:endParaRPr lang="ko-KR" altLang="en-US"/>
-          </a:p>
-        </p:txBody>
       </p:sp>
       <p:sp>
         <p:nvSpPr>
@@ -4368,7 +4447,7 @@
           <a:bodyPr wrap="square" lIns="0" tIns="0" rIns="0" bIns="0" rtlCol="0" anchor="ctr"/>
           <a:lstStyle/>
           <a:p>
-            <a:pPr marL="0" indent="0">
+            <a:pPr indent="0" marL="0">
               <a:buNone/>
             </a:pPr>
             <a:r>
@@ -4407,7 +4486,7 @@
           <a:bodyPr wrap="square" lIns="0" tIns="0" rIns="0" bIns="0" rtlCol="0" anchor="ctr"/>
           <a:lstStyle/>
           <a:p>
-            <a:pPr marL="0" indent="0">
+            <a:pPr indent="0" marL="0">
               <a:buNone/>
             </a:pPr>
             <a:r>
@@ -4446,7 +4525,7 @@
           <a:bodyPr wrap="square" lIns="0" tIns="0" rIns="0" bIns="0" rtlCol="0" anchor="ctr"/>
           <a:lstStyle/>
           <a:p>
-            <a:pPr marL="0" indent="0">
+            <a:pPr indent="0" marL="0">
               <a:buNone/>
             </a:pPr>
             <a:endParaRPr lang="en-US" sz="1240" dirty="0"/>
@@ -4477,13 +4556,6 @@
             <a:prstDash val="solid"/>
           </a:ln>
         </p:spPr>
-        <p:txBody>
-          <a:bodyPr/>
-          <a:lstStyle/>
-          <a:p>
-            <a:endParaRPr lang="ko-KR" altLang="en-US"/>
-          </a:p>
-        </p:txBody>
       </p:sp>
       <p:sp>
         <p:nvSpPr>
@@ -4506,7 +4578,7 @@
           <a:bodyPr wrap="square" lIns="0" tIns="0" rIns="0" bIns="0" rtlCol="0" anchor="ctr"/>
           <a:lstStyle/>
           <a:p>
-            <a:pPr marL="0" indent="0">
+            <a:pPr indent="0" marL="0">
               <a:buNone/>
             </a:pPr>
             <a:r>
@@ -4545,7 +4617,7 @@
           <a:bodyPr wrap="square" lIns="0" tIns="0" rIns="0" bIns="0" rtlCol="0" anchor="ctr"/>
           <a:lstStyle/>
           <a:p>
-            <a:pPr marL="0" indent="0">
+            <a:pPr indent="0" marL="0">
               <a:buNone/>
             </a:pPr>
             <a:r>
@@ -4584,7 +4656,7 @@
           <a:bodyPr wrap="square" lIns="0" tIns="0" rIns="0" bIns="0" rtlCol="0" anchor="ctr"/>
           <a:lstStyle/>
           <a:p>
-            <a:pPr marL="0" indent="0">
+            <a:pPr indent="0" marL="0">
               <a:buNone/>
             </a:pPr>
             <a:endParaRPr lang="en-US" sz="1240" dirty="0"/>
@@ -4615,13 +4687,6 @@
             <a:prstDash val="solid"/>
           </a:ln>
         </p:spPr>
-        <p:txBody>
-          <a:bodyPr/>
-          <a:lstStyle/>
-          <a:p>
-            <a:endParaRPr lang="ko-KR" altLang="en-US"/>
-          </a:p>
-        </p:txBody>
       </p:sp>
       <p:sp>
         <p:nvSpPr>
@@ -4644,7 +4709,7 @@
           <a:bodyPr wrap="square" lIns="0" tIns="0" rIns="0" bIns="0" rtlCol="0" anchor="ctr"/>
           <a:lstStyle/>
           <a:p>
-            <a:pPr marL="0" indent="0">
+            <a:pPr indent="0" marL="0">
               <a:buNone/>
             </a:pPr>
             <a:r>
@@ -4683,7 +4748,7 @@
           <a:bodyPr wrap="square" lIns="0" tIns="0" rIns="0" bIns="0" rtlCol="0" anchor="ctr"/>
           <a:lstStyle/>
           <a:p>
-            <a:pPr marL="0" indent="0">
+            <a:pPr indent="0" marL="0">
               <a:buNone/>
             </a:pPr>
             <a:r>
@@ -4722,7 +4787,7 @@
           <a:bodyPr wrap="square" lIns="0" tIns="0" rIns="0" bIns="0" rtlCol="0" anchor="ctr"/>
           <a:lstStyle/>
           <a:p>
-            <a:pPr marL="0" indent="0">
+            <a:pPr indent="0" marL="0">
               <a:buNone/>
             </a:pPr>
             <a:endParaRPr lang="en-US" sz="1240" dirty="0"/>
@@ -4753,13 +4818,6 @@
             <a:prstDash val="solid"/>
           </a:ln>
         </p:spPr>
-        <p:txBody>
-          <a:bodyPr/>
-          <a:lstStyle/>
-          <a:p>
-            <a:endParaRPr lang="ko-KR" altLang="en-US"/>
-          </a:p>
-        </p:txBody>
       </p:sp>
       <p:sp>
         <p:nvSpPr>
@@ -4782,7 +4840,7 @@
           <a:bodyPr wrap="square" lIns="0" tIns="0" rIns="0" bIns="0" rtlCol="0" anchor="ctr"/>
           <a:lstStyle/>
           <a:p>
-            <a:pPr marL="0" indent="0">
+            <a:pPr indent="0" marL="0">
               <a:buNone/>
             </a:pPr>
             <a:r>
@@ -4821,7 +4879,7 @@
           <a:bodyPr wrap="square" lIns="0" tIns="0" rIns="0" bIns="0" rtlCol="0" anchor="ctr"/>
           <a:lstStyle/>
           <a:p>
-            <a:pPr marL="0" indent="0">
+            <a:pPr indent="0" marL="0">
               <a:buNone/>
             </a:pPr>
             <a:r>
@@ -4860,7 +4918,7 @@
           <a:bodyPr wrap="square" lIns="0" tIns="0" rIns="0" bIns="0" rtlCol="0" anchor="ctr"/>
           <a:lstStyle/>
           <a:p>
-            <a:pPr marL="0" indent="0">
+            <a:pPr indent="0" marL="0">
               <a:buNone/>
             </a:pPr>
             <a:endParaRPr lang="en-US" sz="1240" dirty="0"/>
@@ -4891,13 +4949,6 @@
             <a:prstDash val="solid"/>
           </a:ln>
         </p:spPr>
-        <p:txBody>
-          <a:bodyPr/>
-          <a:lstStyle/>
-          <a:p>
-            <a:endParaRPr lang="ko-KR" altLang="en-US"/>
-          </a:p>
-        </p:txBody>
       </p:sp>
       <p:sp>
         <p:nvSpPr>
@@ -4920,7 +4971,7 @@
           <a:bodyPr wrap="square" lIns="0" tIns="0" rIns="0" bIns="0" rtlCol="0" anchor="ctr"/>
           <a:lstStyle/>
           <a:p>
-            <a:pPr marL="0" indent="0">
+            <a:pPr indent="0" marL="0">
               <a:buNone/>
             </a:pPr>
             <a:r>
@@ -4959,7 +5010,7 @@
           <a:bodyPr wrap="square" lIns="0" tIns="0" rIns="0" bIns="0" rtlCol="0" anchor="ctr"/>
           <a:lstStyle/>
           <a:p>
-            <a:pPr marL="0" indent="0">
+            <a:pPr indent="0" marL="0">
               <a:buNone/>
             </a:pPr>
             <a:r>
@@ -4998,7 +5049,7 @@
           <a:bodyPr wrap="square" lIns="0" tIns="0" rIns="0" bIns="0" rtlCol="0" anchor="ctr"/>
           <a:lstStyle/>
           <a:p>
-            <a:pPr marL="0" indent="0">
+            <a:pPr indent="0" marL="0">
               <a:buNone/>
             </a:pPr>
             <a:endParaRPr lang="en-US" sz="1240" dirty="0"/>
@@ -5029,13 +5080,6 @@
             <a:prstDash val="solid"/>
           </a:ln>
         </p:spPr>
-        <p:txBody>
-          <a:bodyPr/>
-          <a:lstStyle/>
-          <a:p>
-            <a:endParaRPr lang="ko-KR" altLang="en-US"/>
-          </a:p>
-        </p:txBody>
       </p:sp>
       <p:sp>
         <p:nvSpPr>
@@ -5058,7 +5102,7 @@
           <a:bodyPr wrap="square" lIns="0" tIns="0" rIns="0" bIns="0" rtlCol="0" anchor="ctr"/>
           <a:lstStyle/>
           <a:p>
-            <a:pPr marL="0" indent="0">
+            <a:pPr indent="0" marL="0">
               <a:buNone/>
             </a:pPr>
             <a:r>
@@ -5097,7 +5141,7 @@
           <a:bodyPr wrap="square" lIns="0" tIns="0" rIns="0" bIns="0" rtlCol="0" anchor="ctr"/>
           <a:lstStyle/>
           <a:p>
-            <a:pPr marL="0" indent="0">
+            <a:pPr indent="0" marL="0">
               <a:buNone/>
             </a:pPr>
             <a:r>
@@ -5136,7 +5180,7 @@
           <a:bodyPr wrap="square" lIns="0" tIns="0" rIns="0" bIns="0" rtlCol="0" anchor="ctr"/>
           <a:lstStyle/>
           <a:p>
-            <a:pPr marL="0" indent="0">
+            <a:pPr indent="0" marL="0">
               <a:buNone/>
             </a:pPr>
             <a:endParaRPr lang="en-US" sz="1240" dirty="0"/>
@@ -5167,13 +5211,6 @@
             <a:prstDash val="solid"/>
           </a:ln>
         </p:spPr>
-        <p:txBody>
-          <a:bodyPr/>
-          <a:lstStyle/>
-          <a:p>
-            <a:endParaRPr lang="ko-KR" altLang="en-US"/>
-          </a:p>
-        </p:txBody>
       </p:sp>
       <p:sp>
         <p:nvSpPr>
@@ -5196,7 +5233,7 @@
           <a:bodyPr wrap="square" lIns="0" tIns="0" rIns="0" bIns="0" rtlCol="0" anchor="ctr"/>
           <a:lstStyle/>
           <a:p>
-            <a:pPr marL="0" indent="0">
+            <a:pPr indent="0" marL="0">
               <a:buNone/>
             </a:pPr>
             <a:r>
@@ -5235,7 +5272,7 @@
           <a:bodyPr wrap="square" lIns="0" tIns="0" rIns="0" bIns="0" rtlCol="0" anchor="ctr"/>
           <a:lstStyle/>
           <a:p>
-            <a:pPr marL="0" indent="0">
+            <a:pPr indent="0" marL="0">
               <a:buNone/>
             </a:pPr>
             <a:r>
@@ -5274,7 +5311,7 @@
           <a:bodyPr wrap="square" lIns="0" tIns="0" rIns="0" bIns="0" rtlCol="0" anchor="ctr"/>
           <a:lstStyle/>
           <a:p>
-            <a:pPr marL="0" indent="0">
+            <a:pPr indent="0" marL="0">
               <a:buNone/>
             </a:pPr>
             <a:endParaRPr lang="en-US" sz="1240" dirty="0"/>
@@ -5305,13 +5342,6 @@
             <a:prstDash val="solid"/>
           </a:ln>
         </p:spPr>
-        <p:txBody>
-          <a:bodyPr/>
-          <a:lstStyle/>
-          <a:p>
-            <a:endParaRPr lang="ko-KR" altLang="en-US"/>
-          </a:p>
-        </p:txBody>
       </p:sp>
       <p:sp>
         <p:nvSpPr>
@@ -5334,7 +5364,7 @@
           <a:bodyPr wrap="square" lIns="0" tIns="0" rIns="0" bIns="0" rtlCol="0" anchor="ctr"/>
           <a:lstStyle/>
           <a:p>
-            <a:pPr marL="0" indent="0">
+            <a:pPr indent="0" marL="0">
               <a:buNone/>
             </a:pPr>
             <a:r>
@@ -5373,7 +5403,7 @@
           <a:bodyPr wrap="square" lIns="0" tIns="0" rIns="0" bIns="0" rtlCol="0" anchor="ctr"/>
           <a:lstStyle/>
           <a:p>
-            <a:pPr marL="0" indent="0">
+            <a:pPr indent="0" marL="0">
               <a:buNone/>
             </a:pPr>
             <a:r>
@@ -5412,7 +5442,7 @@
           <a:bodyPr wrap="square" lIns="0" tIns="0" rIns="0" bIns="0" rtlCol="0" anchor="ctr"/>
           <a:lstStyle/>
           <a:p>
-            <a:pPr marL="0" indent="0">
+            <a:pPr indent="0" marL="0">
               <a:buNone/>
             </a:pPr>
             <a:endParaRPr lang="en-US" sz="1240" dirty="0"/>
@@ -5445,13 +5475,6 @@
             <a:prstDash val="solid"/>
           </a:ln>
         </p:spPr>
-        <p:txBody>
-          <a:bodyPr/>
-          <a:lstStyle/>
-          <a:p>
-            <a:endParaRPr lang="ko-KR" altLang="en-US"/>
-          </a:p>
-        </p:txBody>
       </p:sp>
       <p:sp>
         <p:nvSpPr>
@@ -5474,7 +5497,7 @@
           <a:bodyPr wrap="square" lIns="0" tIns="0" rIns="0" bIns="0" rtlCol="0" anchor="ctr"/>
           <a:lstStyle/>
           <a:p>
-            <a:pPr marL="0" indent="0" algn="ctr">
+            <a:pPr algn="ctr" indent="0" marL="0">
               <a:buNone/>
             </a:pPr>
             <a:r>
@@ -5508,7 +5531,6 @@
         <a:solidFill>
           <a:srgbClr val="FFFFFF"/>
         </a:solidFill>
-        <a:effectLst/>
       </p:bgPr>
     </p:bg>
     <p:spTree>
@@ -5546,7 +5568,7 @@
           <a:bodyPr wrap="square" lIns="0" tIns="0" rIns="0" bIns="0" rtlCol="0" anchor="ctr"/>
           <a:lstStyle/>
           <a:p>
-            <a:pPr marL="0" indent="0">
+            <a:pPr indent="0" marL="0">
               <a:buNone/>
             </a:pPr>
             <a:r>
@@ -5585,13 +5607,6 @@
           </a:solidFill>
           <a:ln/>
         </p:spPr>
-        <p:txBody>
-          <a:bodyPr/>
-          <a:lstStyle/>
-          <a:p>
-            <a:endParaRPr lang="ko-KR" altLang="en-US"/>
-          </a:p>
-        </p:txBody>
       </p:sp>
       <p:sp>
         <p:nvSpPr>
@@ -5614,7 +5629,7 @@
           <a:bodyPr wrap="square" lIns="0" tIns="0" rIns="0" bIns="0" rtlCol="0" anchor="ctr"/>
           <a:lstStyle/>
           <a:p>
-            <a:pPr marL="0" indent="0" algn="ctr">
+            <a:pPr algn="ctr" indent="0" marL="0">
               <a:buNone/>
             </a:pPr>
             <a:r>
@@ -5653,7 +5668,7 @@
           <a:bodyPr wrap="square" lIns="0" tIns="0" rIns="0" bIns="0" rtlCol="0" anchor="ctr"/>
           <a:lstStyle/>
           <a:p>
-            <a:pPr marL="0" indent="0">
+            <a:pPr indent="0" marL="0">
               <a:buNone/>
             </a:pPr>
             <a:r>
@@ -5690,13 +5705,6 @@
           </a:solidFill>
           <a:ln/>
         </p:spPr>
-        <p:txBody>
-          <a:bodyPr/>
-          <a:lstStyle/>
-          <a:p>
-            <a:endParaRPr lang="ko-KR" altLang="en-US"/>
-          </a:p>
-        </p:txBody>
       </p:sp>
       <p:sp>
         <p:nvSpPr>
@@ -5719,7 +5727,7 @@
           <a:bodyPr wrap="square" lIns="0" tIns="0" rIns="0" bIns="0" rtlCol="0" anchor="ctr"/>
           <a:lstStyle/>
           <a:p>
-            <a:pPr marL="0" indent="0" algn="r">
+            <a:pPr algn="r" indent="0" marL="0">
               <a:buNone/>
             </a:pPr>
             <a:r>
@@ -5758,7 +5766,7 @@
           <a:bodyPr wrap="square" lIns="0" tIns="0" rIns="0" bIns="0" rtlCol="0" anchor="ctr"/>
           <a:lstStyle/>
           <a:p>
-            <a:pPr marL="0" indent="0">
+            <a:pPr indent="0" marL="0">
               <a:buNone/>
             </a:pPr>
             <a:r>
@@ -5797,7 +5805,7 @@
           <a:bodyPr wrap="square" lIns="0" tIns="0" rIns="0" bIns="0" rtlCol="0" anchor="ctr"/>
           <a:lstStyle/>
           <a:p>
-            <a:pPr marL="0" indent="0" algn="r">
+            <a:pPr algn="r" indent="0" marL="0">
               <a:buNone/>
             </a:pPr>
             <a:r>
@@ -5834,13 +5842,6 @@
           </a:solidFill>
           <a:ln/>
         </p:spPr>
-        <p:txBody>
-          <a:bodyPr/>
-          <a:lstStyle/>
-          <a:p>
-            <a:endParaRPr lang="ko-KR" altLang="en-US"/>
-          </a:p>
-        </p:txBody>
       </p:sp>
       <p:sp>
         <p:nvSpPr>
@@ -5863,7 +5864,7 @@
           <a:bodyPr wrap="square" lIns="0" tIns="0" rIns="0" bIns="0" rtlCol="0" anchor="ctr"/>
           <a:lstStyle/>
           <a:p>
-            <a:pPr marL="0" indent="0">
+            <a:pPr indent="0" marL="0">
               <a:buNone/>
             </a:pPr>
             <a:r>
@@ -5900,13 +5901,6 @@
           </a:solidFill>
           <a:ln/>
         </p:spPr>
-        <p:txBody>
-          <a:bodyPr/>
-          <a:lstStyle/>
-          <a:p>
-            <a:endParaRPr lang="ko-KR" altLang="en-US"/>
-          </a:p>
-        </p:txBody>
       </p:sp>
       <p:sp>
         <p:nvSpPr>
@@ -5929,7 +5923,7 @@
           <a:bodyPr wrap="square" lIns="0" tIns="0" rIns="0" bIns="0" rtlCol="0" anchor="ctr"/>
           <a:lstStyle/>
           <a:p>
-            <a:pPr marL="0" indent="0">
+            <a:pPr indent="0" marL="0">
               <a:buNone/>
             </a:pPr>
             <a:r>
@@ -5966,13 +5960,6 @@
           </a:solidFill>
           <a:ln/>
         </p:spPr>
-        <p:txBody>
-          <a:bodyPr/>
-          <a:lstStyle/>
-          <a:p>
-            <a:endParaRPr lang="ko-KR" altLang="en-US"/>
-          </a:p>
-        </p:txBody>
       </p:sp>
       <p:sp>
         <p:nvSpPr>
@@ -5995,7 +5982,7 @@
           <a:bodyPr wrap="square" lIns="0" tIns="0" rIns="0" bIns="0" rtlCol="0" anchor="ctr"/>
           <a:lstStyle/>
           <a:p>
-            <a:pPr marL="0" indent="0">
+            <a:pPr indent="0" marL="0">
               <a:buNone/>
             </a:pPr>
             <a:r>
@@ -6037,13 +6024,6 @@
             <a:prstDash val="solid"/>
           </a:ln>
         </p:spPr>
-        <p:txBody>
-          <a:bodyPr/>
-          <a:lstStyle/>
-          <a:p>
-            <a:endParaRPr lang="ko-KR" altLang="en-US"/>
-          </a:p>
-        </p:txBody>
       </p:sp>
       <p:sp>
         <p:nvSpPr>
@@ -6066,7 +6046,7 @@
           <a:bodyPr wrap="square" lIns="0" tIns="0" rIns="0" bIns="0" rtlCol="0" anchor="ctr"/>
           <a:lstStyle/>
           <a:p>
-            <a:pPr marL="0" indent="0">
+            <a:pPr indent="0" marL="0">
               <a:buNone/>
             </a:pPr>
             <a:r>
@@ -6105,7 +6085,7 @@
           <a:bodyPr wrap="square" lIns="0" tIns="0" rIns="0" bIns="0" rtlCol="0" anchor="ctr"/>
           <a:lstStyle/>
           <a:p>
-            <a:pPr marL="0" indent="0">
+            <a:pPr indent="0" marL="0">
               <a:buNone/>
             </a:pPr>
             <a:endParaRPr lang="en-US" sz="1240" dirty="0"/>
@@ -6133,7 +6113,7 @@
           <a:bodyPr wrap="square" lIns="0" tIns="0" rIns="0" bIns="0" rtlCol="0" anchor="ctr"/>
           <a:lstStyle/>
           <a:p>
-            <a:pPr marL="0" indent="0">
+            <a:pPr indent="0" marL="0">
               <a:buNone/>
             </a:pPr>
             <a:endParaRPr lang="en-US" sz="1240" dirty="0"/>
@@ -6164,13 +6144,6 @@
             <a:prstDash val="solid"/>
           </a:ln>
         </p:spPr>
-        <p:txBody>
-          <a:bodyPr/>
-          <a:lstStyle/>
-          <a:p>
-            <a:endParaRPr lang="ko-KR" altLang="en-US"/>
-          </a:p>
-        </p:txBody>
       </p:sp>
       <p:sp>
         <p:nvSpPr>
@@ -6193,7 +6166,7 @@
           <a:bodyPr wrap="square" lIns="0" tIns="0" rIns="0" bIns="0" rtlCol="0" anchor="ctr"/>
           <a:lstStyle/>
           <a:p>
-            <a:pPr marL="0" indent="0">
+            <a:pPr indent="0" marL="0">
               <a:buNone/>
             </a:pPr>
             <a:endParaRPr lang="en-US" sz="1240" dirty="0"/>
@@ -6221,7 +6194,7 @@
           <a:bodyPr wrap="square" lIns="0" tIns="0" rIns="0" bIns="0" rtlCol="0" anchor="ctr"/>
           <a:lstStyle/>
           <a:p>
-            <a:pPr marL="0" indent="0">
+            <a:pPr indent="0" marL="0">
               <a:buNone/>
             </a:pPr>
             <a:endParaRPr lang="en-US" sz="1240" dirty="0"/>
@@ -6249,7 +6222,7 @@
           <a:bodyPr wrap="square" lIns="0" tIns="0" rIns="0" bIns="0" rtlCol="0" anchor="ctr"/>
           <a:lstStyle/>
           <a:p>
-            <a:pPr marL="0" indent="0">
+            <a:pPr indent="0" marL="0">
               <a:buNone/>
             </a:pPr>
             <a:endParaRPr lang="en-US" sz="1240" dirty="0"/>
@@ -6280,13 +6253,6 @@
             <a:prstDash val="solid"/>
           </a:ln>
         </p:spPr>
-        <p:txBody>
-          <a:bodyPr/>
-          <a:lstStyle/>
-          <a:p>
-            <a:endParaRPr lang="ko-KR" altLang="en-US"/>
-          </a:p>
-        </p:txBody>
       </p:sp>
       <p:sp>
         <p:nvSpPr>
@@ -6309,7 +6275,7 @@
           <a:bodyPr wrap="square" lIns="0" tIns="0" rIns="0" bIns="0" rtlCol="0" anchor="ctr"/>
           <a:lstStyle/>
           <a:p>
-            <a:pPr marL="0" indent="0">
+            <a:pPr indent="0" marL="0">
               <a:buNone/>
             </a:pPr>
             <a:endParaRPr lang="en-US" sz="1240" dirty="0"/>
@@ -6337,7 +6303,7 @@
           <a:bodyPr wrap="square" lIns="0" tIns="0" rIns="0" bIns="0" rtlCol="0" anchor="ctr"/>
           <a:lstStyle/>
           <a:p>
-            <a:pPr marL="0" indent="0">
+            <a:pPr indent="0" marL="0">
               <a:buNone/>
             </a:pPr>
             <a:endParaRPr lang="en-US" sz="1240" dirty="0"/>
@@ -6365,7 +6331,7 @@
           <a:bodyPr wrap="square" lIns="0" tIns="0" rIns="0" bIns="0" rtlCol="0" anchor="ctr"/>
           <a:lstStyle/>
           <a:p>
-            <a:pPr marL="0" indent="0">
+            <a:pPr indent="0" marL="0">
               <a:buNone/>
             </a:pPr>
             <a:endParaRPr lang="en-US" sz="1240" dirty="0"/>
@@ -6396,13 +6362,6 @@
             <a:prstDash val="solid"/>
           </a:ln>
         </p:spPr>
-        <p:txBody>
-          <a:bodyPr/>
-          <a:lstStyle/>
-          <a:p>
-            <a:endParaRPr lang="ko-KR" altLang="en-US"/>
-          </a:p>
-        </p:txBody>
       </p:sp>
       <p:sp>
         <p:nvSpPr>
@@ -6425,7 +6384,7 @@
           <a:bodyPr wrap="square" lIns="0" tIns="0" rIns="0" bIns="0" rtlCol="0" anchor="ctr"/>
           <a:lstStyle/>
           <a:p>
-            <a:pPr marL="0" indent="0">
+            <a:pPr indent="0" marL="0">
               <a:buNone/>
             </a:pPr>
             <a:endParaRPr lang="en-US" sz="1240" dirty="0"/>
@@ -6453,7 +6412,7 @@
           <a:bodyPr wrap="square" lIns="0" tIns="0" rIns="0" bIns="0" rtlCol="0" anchor="ctr"/>
           <a:lstStyle/>
           <a:p>
-            <a:pPr marL="0" indent="0">
+            <a:pPr indent="0" marL="0">
               <a:buNone/>
             </a:pPr>
             <a:endParaRPr lang="en-US" sz="1240" dirty="0"/>
@@ -6481,7 +6440,7 @@
           <a:bodyPr wrap="square" lIns="0" tIns="0" rIns="0" bIns="0" rtlCol="0" anchor="ctr"/>
           <a:lstStyle/>
           <a:p>
-            <a:pPr marL="0" indent="0">
+            <a:pPr indent="0" marL="0">
               <a:buNone/>
             </a:pPr>
             <a:endParaRPr lang="en-US" sz="1240" dirty="0"/>
@@ -6512,13 +6471,6 @@
             <a:prstDash val="solid"/>
           </a:ln>
         </p:spPr>
-        <p:txBody>
-          <a:bodyPr/>
-          <a:lstStyle/>
-          <a:p>
-            <a:endParaRPr lang="ko-KR" altLang="en-US"/>
-          </a:p>
-        </p:txBody>
       </p:sp>
       <p:sp>
         <p:nvSpPr>
@@ -6541,7 +6493,7 @@
           <a:bodyPr wrap="square" lIns="0" tIns="0" rIns="0" bIns="0" rtlCol="0" anchor="ctr"/>
           <a:lstStyle/>
           <a:p>
-            <a:pPr marL="0" indent="0">
+            <a:pPr indent="0" marL="0">
               <a:buNone/>
             </a:pPr>
             <a:endParaRPr lang="en-US" sz="1240" dirty="0"/>
@@ -6569,7 +6521,7 @@
           <a:bodyPr wrap="square" lIns="0" tIns="0" rIns="0" bIns="0" rtlCol="0" anchor="ctr"/>
           <a:lstStyle/>
           <a:p>
-            <a:pPr marL="0" indent="0">
+            <a:pPr indent="0" marL="0">
               <a:buNone/>
             </a:pPr>
             <a:endParaRPr lang="en-US" sz="1240" dirty="0"/>
@@ -6597,7 +6549,7 @@
           <a:bodyPr wrap="square" lIns="0" tIns="0" rIns="0" bIns="0" rtlCol="0" anchor="ctr"/>
           <a:lstStyle/>
           <a:p>
-            <a:pPr marL="0" indent="0">
+            <a:pPr indent="0" marL="0">
               <a:buNone/>
             </a:pPr>
             <a:endParaRPr lang="en-US" sz="1240" dirty="0"/>
@@ -6630,13 +6582,6 @@
             <a:prstDash val="solid"/>
           </a:ln>
         </p:spPr>
-        <p:txBody>
-          <a:bodyPr/>
-          <a:lstStyle/>
-          <a:p>
-            <a:endParaRPr lang="ko-KR" altLang="en-US"/>
-          </a:p>
-        </p:txBody>
       </p:sp>
       <p:sp>
         <p:nvSpPr>
@@ -6659,7 +6604,7 @@
           <a:bodyPr wrap="square" lIns="0" tIns="0" rIns="0" bIns="0" rtlCol="0" anchor="ctr"/>
           <a:lstStyle/>
           <a:p>
-            <a:pPr marL="0" indent="0" algn="ctr">
+            <a:pPr algn="ctr" indent="0" marL="0">
               <a:buNone/>
             </a:pPr>
             <a:r>
@@ -6698,7 +6643,7 @@
           <a:bodyPr wrap="square" lIns="0" tIns="0" rIns="0" bIns="0" rtlCol="0" anchor="ctr"/>
           <a:lstStyle/>
           <a:p>
-            <a:pPr marL="0" indent="0" algn="ctr">
+            <a:pPr algn="ctr" indent="0" marL="0">
               <a:buNone/>
             </a:pPr>
             <a:r>
@@ -6732,7 +6677,6 @@
         <a:solidFill>
           <a:srgbClr val="FFFFFF"/>
         </a:solidFill>
-        <a:effectLst/>
       </p:bgPr>
     </p:bg>
     <p:spTree>
@@ -6770,7 +6714,7 @@
           <a:bodyPr wrap="square" lIns="0" tIns="0" rIns="0" bIns="0" rtlCol="0" anchor="ctr"/>
           <a:lstStyle/>
           <a:p>
-            <a:pPr marL="0" indent="0">
+            <a:pPr indent="0" marL="0">
               <a:buNone/>
             </a:pPr>
             <a:r>
@@ -6809,13 +6753,6 @@
           </a:solidFill>
           <a:ln/>
         </p:spPr>
-        <p:txBody>
-          <a:bodyPr/>
-          <a:lstStyle/>
-          <a:p>
-            <a:endParaRPr lang="ko-KR" altLang="en-US"/>
-          </a:p>
-        </p:txBody>
       </p:sp>
       <p:sp>
         <p:nvSpPr>
@@ -6838,7 +6775,7 @@
           <a:bodyPr wrap="square" lIns="0" tIns="0" rIns="0" bIns="0" rtlCol="0" anchor="ctr"/>
           <a:lstStyle/>
           <a:p>
-            <a:pPr marL="0" indent="0" algn="ctr">
+            <a:pPr algn="ctr" indent="0" marL="0">
               <a:buNone/>
             </a:pPr>
             <a:r>
@@ -6877,7 +6814,7 @@
           <a:bodyPr wrap="square" lIns="0" tIns="0" rIns="0" bIns="0" rtlCol="0" anchor="ctr"/>
           <a:lstStyle/>
           <a:p>
-            <a:pPr marL="0" indent="0">
+            <a:pPr indent="0" marL="0">
               <a:buNone/>
             </a:pPr>
             <a:r>
@@ -6914,13 +6851,6 @@
           </a:solidFill>
           <a:ln/>
         </p:spPr>
-        <p:txBody>
-          <a:bodyPr/>
-          <a:lstStyle/>
-          <a:p>
-            <a:endParaRPr lang="ko-KR" altLang="en-US"/>
-          </a:p>
-        </p:txBody>
       </p:sp>
       <p:sp>
         <p:nvSpPr>
@@ -6943,7 +6873,7 @@
           <a:bodyPr wrap="square" lIns="0" tIns="0" rIns="0" bIns="0" rtlCol="0" anchor="ctr"/>
           <a:lstStyle/>
           <a:p>
-            <a:pPr marL="0" indent="0" algn="r">
+            <a:pPr algn="r" indent="0" marL="0">
               <a:buNone/>
             </a:pPr>
             <a:r>
@@ -6982,7 +6912,7 @@
           <a:bodyPr wrap="square" lIns="0" tIns="0" rIns="0" bIns="0" rtlCol="0" anchor="ctr"/>
           <a:lstStyle/>
           <a:p>
-            <a:pPr marL="0" indent="0">
+            <a:pPr indent="0" marL="0">
               <a:buNone/>
             </a:pPr>
             <a:r>
@@ -7021,7 +6951,7 @@
           <a:bodyPr wrap="square" lIns="0" tIns="0" rIns="0" bIns="0" rtlCol="0" anchor="ctr"/>
           <a:lstStyle/>
           <a:p>
-            <a:pPr marL="0" indent="0" algn="r">
+            <a:pPr algn="r" indent="0" marL="0">
               <a:buNone/>
             </a:pPr>
             <a:r>
@@ -7048,7 +6978,7 @@
         <p:spPr>
           <a:xfrm>
             <a:off x="530352" y="1828800"/>
-            <a:ext cx="5349240" cy="2103120"/>
+            <a:ext cx="5669280" cy="2103120"/>
           </a:xfrm>
           <a:prstGeom prst="roundRect">
             <a:avLst>
@@ -7060,13 +6990,6 @@
           </a:solidFill>
           <a:ln/>
         </p:spPr>
-        <p:txBody>
-          <a:bodyPr/>
-          <a:lstStyle/>
-          <a:p>
-            <a:endParaRPr lang="ko-KR" altLang="en-US"/>
-          </a:p>
-        </p:txBody>
       </p:sp>
       <p:sp>
         <p:nvSpPr>
@@ -7089,7 +7012,7 @@
           <a:bodyPr wrap="square" lIns="0" tIns="0" rIns="0" bIns="0" rtlCol="0" anchor="t"/>
           <a:lstStyle/>
           <a:p>
-            <a:pPr marL="0" indent="0">
+            <a:pPr indent="0" marL="0">
               <a:lnSpc>
                 <a:spcPts val="2380"/>
               </a:lnSpc>
@@ -7109,7 +7032,7 @@
             <a:endParaRPr lang="en-US" sz="1400" dirty="0"/>
           </a:p>
           <a:p>
-            <a:pPr marL="0" indent="0">
+            <a:pPr indent="0" marL="0">
               <a:lnSpc>
                 <a:spcPts val="2380"/>
               </a:lnSpc>
@@ -7129,7 +7052,7 @@
             <a:endParaRPr lang="en-US" sz="1400" dirty="0"/>
           </a:p>
           <a:p>
-            <a:pPr marL="0" indent="0">
+            <a:pPr indent="0" marL="0">
               <a:lnSpc>
                 <a:spcPts val="2380"/>
               </a:lnSpc>
@@ -7149,7 +7072,7 @@
             <a:endParaRPr lang="en-US" sz="1400" dirty="0"/>
           </a:p>
           <a:p>
-            <a:pPr marL="0" indent="0">
+            <a:pPr indent="0" marL="0">
               <a:lnSpc>
                 <a:spcPts val="2380"/>
               </a:lnSpc>
@@ -7178,7 +7101,7 @@
         </p:nvSpPr>
         <p:spPr>
           <a:xfrm>
-            <a:off x="5898912" y="1828808"/>
+            <a:off x="5916168" y="1828800"/>
             <a:ext cx="384048" cy="402336"/>
           </a:xfrm>
           <a:prstGeom prst="rect">
@@ -7191,7 +7114,7 @@
           <a:bodyPr wrap="square" lIns="0" tIns="0" rIns="0" bIns="0" rtlCol="0" anchor="ctr"/>
           <a:lstStyle/>
           <a:p>
-            <a:pPr marL="0" indent="0" algn="ctr">
+            <a:pPr algn="ctr" indent="0" marL="0">
               <a:buNone/>
             </a:pPr>
             <a:r>
@@ -7217,8 +7140,8 @@
         </p:nvSpPr>
         <p:spPr>
           <a:xfrm>
-            <a:off x="6309360" y="1828800"/>
-            <a:ext cx="2811780" cy="402336"/>
+            <a:off x="6583680" y="1828800"/>
+            <a:ext cx="2537460" cy="402336"/>
           </a:xfrm>
           <a:prstGeom prst="rect">
             <a:avLst/>
@@ -7228,13 +7151,6 @@
           </a:solidFill>
           <a:ln/>
         </p:spPr>
-        <p:txBody>
-          <a:bodyPr/>
-          <a:lstStyle/>
-          <a:p>
-            <a:endParaRPr lang="ko-KR" altLang="en-US"/>
-          </a:p>
-        </p:txBody>
       </p:sp>
       <p:sp>
         <p:nvSpPr>
@@ -7257,7 +7173,7 @@
           <a:bodyPr wrap="square" lIns="0" tIns="0" rIns="0" bIns="0" rtlCol="0" anchor="ctr"/>
           <a:lstStyle/>
           <a:p>
-            <a:pPr marL="0" indent="0">
+            <a:pPr indent="0" marL="0">
               <a:buNone/>
             </a:pPr>
             <a:r>
@@ -7294,13 +7210,6 @@
           </a:solidFill>
           <a:ln/>
         </p:spPr>
-        <p:txBody>
-          <a:bodyPr/>
-          <a:lstStyle/>
-          <a:p>
-            <a:endParaRPr lang="ko-KR" altLang="en-US"/>
-          </a:p>
-        </p:txBody>
       </p:sp>
       <p:sp>
         <p:nvSpPr>
@@ -7323,7 +7232,7 @@
           <a:bodyPr wrap="square" lIns="0" tIns="0" rIns="0" bIns="0" rtlCol="0" anchor="ctr"/>
           <a:lstStyle/>
           <a:p>
-            <a:pPr marL="0" indent="0">
+            <a:pPr indent="0" marL="0">
               <a:buNone/>
             </a:pPr>
             <a:r>
@@ -7349,8 +7258,8 @@
         </p:nvSpPr>
         <p:spPr>
           <a:xfrm>
-            <a:off x="6309360" y="2231136"/>
-            <a:ext cx="5349240" cy="502920"/>
+            <a:off x="6583680" y="2231136"/>
+            <a:ext cx="5074920" cy="502920"/>
           </a:xfrm>
           <a:prstGeom prst="rect">
             <a:avLst/>
@@ -7365,13 +7274,6 @@
             <a:prstDash val="solid"/>
           </a:ln>
         </p:spPr>
-        <p:txBody>
-          <a:bodyPr/>
-          <a:lstStyle/>
-          <a:p>
-            <a:endParaRPr lang="ko-KR" altLang="en-US"/>
-          </a:p>
-        </p:txBody>
       </p:sp>
       <p:sp>
         <p:nvSpPr>
@@ -7394,7 +7296,7 @@
           <a:bodyPr wrap="square" lIns="0" tIns="0" rIns="0" bIns="0" rtlCol="0" anchor="ctr"/>
           <a:lstStyle/>
           <a:p>
-            <a:pPr marL="0" indent="0">
+            <a:pPr indent="0" marL="0">
               <a:buNone/>
             </a:pPr>
             <a:r>
@@ -7433,7 +7335,7 @@
           <a:bodyPr wrap="square" lIns="0" tIns="0" rIns="0" bIns="0" rtlCol="0" anchor="ctr"/>
           <a:lstStyle/>
           <a:p>
-            <a:pPr marL="0" indent="0">
+            <a:pPr indent="0" marL="0">
               <a:buNone/>
             </a:pPr>
             <a:r>
@@ -7459,8 +7361,8 @@
         </p:nvSpPr>
         <p:spPr>
           <a:xfrm>
-            <a:off x="6309360" y="2734056"/>
-            <a:ext cx="5349240" cy="502920"/>
+            <a:off x="6583680" y="2734056"/>
+            <a:ext cx="5074920" cy="502920"/>
           </a:xfrm>
           <a:prstGeom prst="rect">
             <a:avLst/>
@@ -7475,13 +7377,6 @@
             <a:prstDash val="solid"/>
           </a:ln>
         </p:spPr>
-        <p:txBody>
-          <a:bodyPr/>
-          <a:lstStyle/>
-          <a:p>
-            <a:endParaRPr lang="ko-KR" altLang="en-US"/>
-          </a:p>
-        </p:txBody>
       </p:sp>
       <p:sp>
         <p:nvSpPr>
@@ -7504,7 +7399,7 @@
           <a:bodyPr wrap="square" lIns="0" tIns="0" rIns="0" bIns="0" rtlCol="0" anchor="ctr"/>
           <a:lstStyle/>
           <a:p>
-            <a:pPr marL="0" indent="0">
+            <a:pPr indent="0" marL="0">
               <a:buNone/>
             </a:pPr>
             <a:r>
@@ -7543,7 +7438,7 @@
           <a:bodyPr wrap="square" lIns="0" tIns="0" rIns="0" bIns="0" rtlCol="0" anchor="ctr"/>
           <a:lstStyle/>
           <a:p>
-            <a:pPr marL="0" indent="0">
+            <a:pPr indent="0" marL="0">
               <a:buNone/>
             </a:pPr>
             <a:r>
@@ -7587,13 +7482,6 @@
             <a:prstDash val="solid"/>
           </a:ln>
         </p:spPr>
-        <p:txBody>
-          <a:bodyPr/>
-          <a:lstStyle/>
-          <a:p>
-            <a:endParaRPr lang="ko-KR" altLang="en-US"/>
-          </a:p>
-        </p:txBody>
       </p:sp>
       <p:sp>
         <p:nvSpPr>
@@ -7616,7 +7504,7 @@
           <a:bodyPr wrap="square" lIns="0" tIns="0" rIns="0" bIns="0" rtlCol="0" anchor="ctr"/>
           <a:lstStyle/>
           <a:p>
-            <a:pPr marL="0" indent="0">
+            <a:pPr indent="0" marL="0">
               <a:buNone/>
             </a:pPr>
             <a:r>
@@ -7655,7 +7543,7 @@
           <a:bodyPr wrap="square" lIns="0" tIns="0" rIns="0" bIns="0" rtlCol="0" anchor="t"/>
           <a:lstStyle/>
           <a:p>
-            <a:pPr marL="0" indent="0">
+            <a:pPr indent="0" marL="0">
               <a:lnSpc>
                 <a:spcPts val="1900"/>
               </a:lnSpc>
@@ -7702,13 +7590,6 @@
             <a:prstDash val="solid"/>
           </a:ln>
         </p:spPr>
-        <p:txBody>
-          <a:bodyPr/>
-          <a:lstStyle/>
-          <a:p>
-            <a:endParaRPr lang="ko-KR" altLang="en-US"/>
-          </a:p>
-        </p:txBody>
       </p:sp>
       <p:sp>
         <p:nvSpPr>
@@ -7731,7 +7612,7 @@
           <a:bodyPr wrap="square" lIns="0" tIns="0" rIns="0" bIns="0" rtlCol="0" anchor="ctr"/>
           <a:lstStyle/>
           <a:p>
-            <a:pPr marL="0" indent="0">
+            <a:pPr indent="0" marL="0">
               <a:buNone/>
             </a:pPr>
             <a:r>
@@ -7770,7 +7651,7 @@
           <a:bodyPr wrap="square" lIns="0" tIns="0" rIns="0" bIns="0" rtlCol="0" anchor="t"/>
           <a:lstStyle/>
           <a:p>
-            <a:pPr marL="0" indent="0">
+            <a:pPr indent="0" marL="0">
               <a:lnSpc>
                 <a:spcPts val="1900"/>
               </a:lnSpc>
@@ -7817,13 +7698,6 @@
             <a:prstDash val="solid"/>
           </a:ln>
         </p:spPr>
-        <p:txBody>
-          <a:bodyPr/>
-          <a:lstStyle/>
-          <a:p>
-            <a:endParaRPr lang="ko-KR" altLang="en-US"/>
-          </a:p>
-        </p:txBody>
       </p:sp>
       <p:sp>
         <p:nvSpPr>
@@ -7846,7 +7720,7 @@
           <a:bodyPr wrap="square" lIns="0" tIns="0" rIns="0" bIns="0" rtlCol="0" anchor="ctr"/>
           <a:lstStyle/>
           <a:p>
-            <a:pPr marL="0" indent="0" algn="ctr">
+            <a:pPr algn="ctr" indent="0" marL="0">
               <a:buNone/>
             </a:pPr>
             <a:r>
@@ -7880,7 +7754,6 @@
         <a:solidFill>
           <a:srgbClr val="1B1D21"/>
         </a:solidFill>
-        <a:effectLst/>
       </p:bgPr>
     </p:bg>
     <p:spTree>
@@ -7916,13 +7789,6 @@
           </a:solidFill>
           <a:ln/>
         </p:spPr>
-        <p:txBody>
-          <a:bodyPr/>
-          <a:lstStyle/>
-          <a:p>
-            <a:endParaRPr lang="ko-KR" altLang="en-US"/>
-          </a:p>
-        </p:txBody>
       </p:sp>
       <p:sp>
         <p:nvSpPr>
@@ -7945,11 +7811,11 @@
           <a:bodyPr wrap="square" lIns="0" tIns="0" rIns="0" bIns="0" rtlCol="0" anchor="ctr"/>
           <a:lstStyle/>
           <a:p>
-            <a:pPr marL="0" indent="0">
-              <a:buNone/>
-            </a:pPr>
-            <a:r>
-              <a:rPr lang="en-US" sz="1200" b="1" kern="0" spc="100" dirty="0">
+            <a:pPr indent="0" marL="0">
+              <a:buNone/>
+            </a:pPr>
+            <a:r>
+              <a:rPr lang="en-US" sz="1200" b="1" spc="100" kern="0" dirty="0">
                 <a:solidFill>
                   <a:srgbClr val="6C7078"/>
                 </a:solidFill>
@@ -7984,7 +7850,7 @@
           <a:bodyPr wrap="square" lIns="0" tIns="0" rIns="0" bIns="0" rtlCol="0" anchor="ctr"/>
           <a:lstStyle/>
           <a:p>
-            <a:pPr marL="0" indent="0">
+            <a:pPr indent="0" marL="0">
               <a:buNone/>
             </a:pPr>
             <a:r>
@@ -8001,7 +7867,7 @@
             <a:endParaRPr lang="en-US" sz="3600" dirty="0"/>
           </a:p>
           <a:p>
-            <a:pPr marL="0" indent="0">
+            <a:pPr indent="0" marL="0">
               <a:buNone/>
             </a:pPr>
             <a:r>
@@ -8040,7 +7906,7 @@
           <a:bodyPr wrap="square" lIns="0" tIns="0" rIns="0" bIns="0" rtlCol="0" anchor="ctr"/>
           <a:lstStyle/>
           <a:p>
-            <a:pPr marL="0" indent="0">
+            <a:pPr indent="0" marL="0">
               <a:lnSpc>
                 <a:spcPts val="3200"/>
               </a:lnSpc>
@@ -8060,7 +7926,7 @@
             <a:endParaRPr lang="en-US" sz="1900" dirty="0"/>
           </a:p>
           <a:p>
-            <a:pPr marL="0" indent="0">
+            <a:pPr indent="0" marL="0">
               <a:lnSpc>
                 <a:spcPts val="3200"/>
               </a:lnSpc>
@@ -8102,7 +7968,7 @@
           <a:bodyPr wrap="square" lIns="0" tIns="0" rIns="0" bIns="0" rtlCol="0" anchor="ctr"/>
           <a:lstStyle/>
           <a:p>
-            <a:pPr marL="0" indent="0">
+            <a:pPr indent="0" marL="0">
               <a:buNone/>
             </a:pPr>
             <a:r>
@@ -8141,7 +8007,7 @@
           <a:bodyPr wrap="square" lIns="0" tIns="0" rIns="0" bIns="0" rtlCol="0" anchor="ctr"/>
           <a:lstStyle/>
           <a:p>
-            <a:pPr marL="0" indent="0" algn="r">
+            <a:pPr algn="r" indent="0" marL="0">
               <a:buNone/>
             </a:pPr>
             <a:r>
@@ -8175,7 +8041,6 @@
         <a:solidFill>
           <a:srgbClr val="FFFFFF"/>
         </a:solidFill>
-        <a:effectLst/>
       </p:bgPr>
     </p:bg>
     <p:spTree>
@@ -8213,7 +8078,7 @@
           <a:bodyPr wrap="square" lIns="0" tIns="0" rIns="0" bIns="0" rtlCol="0" anchor="ctr"/>
           <a:lstStyle/>
           <a:p>
-            <a:pPr marL="0" indent="0">
+            <a:pPr indent="0" marL="0">
               <a:buNone/>
             </a:pPr>
             <a:r>
@@ -8252,13 +8117,6 @@
           </a:solidFill>
           <a:ln/>
         </p:spPr>
-        <p:txBody>
-          <a:bodyPr/>
-          <a:lstStyle/>
-          <a:p>
-            <a:endParaRPr lang="ko-KR" altLang="en-US"/>
-          </a:p>
-        </p:txBody>
       </p:sp>
       <p:sp>
         <p:nvSpPr>
@@ -8281,7 +8139,7 @@
           <a:bodyPr wrap="square" lIns="0" tIns="0" rIns="0" bIns="0" rtlCol="0" anchor="ctr"/>
           <a:lstStyle/>
           <a:p>
-            <a:pPr marL="0" indent="0" algn="ctr">
+            <a:pPr algn="ctr" indent="0" marL="0">
               <a:buNone/>
             </a:pPr>
             <a:r>
@@ -8320,7 +8178,7 @@
           <a:bodyPr wrap="square" lIns="0" tIns="0" rIns="0" bIns="0" rtlCol="0" anchor="ctr"/>
           <a:lstStyle/>
           <a:p>
-            <a:pPr marL="0" indent="0">
+            <a:pPr indent="0" marL="0">
               <a:buNone/>
             </a:pPr>
             <a:r>
@@ -8357,13 +8215,6 @@
           </a:solidFill>
           <a:ln/>
         </p:spPr>
-        <p:txBody>
-          <a:bodyPr/>
-          <a:lstStyle/>
-          <a:p>
-            <a:endParaRPr lang="ko-KR" altLang="en-US"/>
-          </a:p>
-        </p:txBody>
       </p:sp>
       <p:sp>
         <p:nvSpPr>
@@ -8386,7 +8237,7 @@
           <a:bodyPr wrap="square" lIns="0" tIns="0" rIns="0" bIns="0" rtlCol="0" anchor="ctr"/>
           <a:lstStyle/>
           <a:p>
-            <a:pPr marL="0" indent="0" algn="r">
+            <a:pPr algn="r" indent="0" marL="0">
               <a:buNone/>
             </a:pPr>
             <a:r>
@@ -8425,7 +8276,7 @@
           <a:bodyPr wrap="square" lIns="0" tIns="0" rIns="0" bIns="0" rtlCol="0" anchor="ctr"/>
           <a:lstStyle/>
           <a:p>
-            <a:pPr marL="0" indent="0">
+            <a:pPr indent="0" marL="0">
               <a:buNone/>
             </a:pPr>
             <a:r>
@@ -8464,7 +8315,7 @@
           <a:bodyPr wrap="square" lIns="0" tIns="0" rIns="0" bIns="0" rtlCol="0" anchor="ctr"/>
           <a:lstStyle/>
           <a:p>
-            <a:pPr marL="0" indent="0" algn="r">
+            <a:pPr algn="r" indent="0" marL="0">
               <a:buNone/>
             </a:pPr>
             <a:r>
@@ -8503,13 +8354,6 @@
           </a:solidFill>
           <a:ln/>
         </p:spPr>
-        <p:txBody>
-          <a:bodyPr/>
-          <a:lstStyle/>
-          <a:p>
-            <a:endParaRPr lang="ko-KR" altLang="en-US"/>
-          </a:p>
-        </p:txBody>
       </p:sp>
       <p:sp>
         <p:nvSpPr>
@@ -8532,7 +8376,7 @@
           <a:bodyPr wrap="square" lIns="0" tIns="0" rIns="0" bIns="0" rtlCol="0" anchor="t"/>
           <a:lstStyle/>
           <a:p>
-            <a:pPr marL="0" indent="0">
+            <a:pPr indent="0" marL="0">
               <a:lnSpc>
                 <a:spcPts val="2720"/>
               </a:lnSpc>
@@ -8552,7 +8396,7 @@
             <a:endParaRPr lang="en-US" sz="1600" dirty="0"/>
           </a:p>
           <a:p>
-            <a:pPr marL="0" indent="0">
+            <a:pPr indent="0" marL="0">
               <a:lnSpc>
                 <a:spcPts val="2720"/>
               </a:lnSpc>
@@ -8572,7 +8416,7 @@
             <a:endParaRPr lang="en-US" sz="1600" dirty="0"/>
           </a:p>
           <a:p>
-            <a:pPr marL="0" indent="0">
+            <a:pPr indent="0" marL="0">
               <a:lnSpc>
                 <a:spcPts val="2720"/>
               </a:lnSpc>
@@ -8614,7 +8458,7 @@
           <a:bodyPr wrap="square" lIns="0" tIns="0" rIns="0" bIns="0" rtlCol="0" anchor="ctr"/>
           <a:lstStyle/>
           <a:p>
-            <a:pPr marL="0" indent="0">
+            <a:pPr indent="0" marL="0">
               <a:lnSpc>
                 <a:spcPts val="3100"/>
               </a:lnSpc>
@@ -8634,7 +8478,7 @@
             <a:endParaRPr lang="en-US" sz="2100" dirty="0"/>
           </a:p>
           <a:p>
-            <a:pPr marL="0" indent="0">
+            <a:pPr indent="0" marL="0">
               <a:lnSpc>
                 <a:spcPts val="3100"/>
               </a:lnSpc>
@@ -8657,14 +8501,14 @@
       </p:sp>
       <p:pic>
         <p:nvPicPr>
-          <p:cNvPr id="13" name="Image 0" descr="/home/claude/w5/교과서_배포/assets/img/03-2-04-too-many-names.png"/>
+          <p:cNvPr id="13" name="Image 0" descr="/home/claude/w5/교과서_배포/assets/img/03-2-04-too-many-names.png">    </p:cNvPr>
           <p:cNvPicPr>
             <a:picLocks noChangeAspect="1"/>
           </p:cNvPicPr>
           <p:nvPr/>
         </p:nvPicPr>
         <p:blipFill>
-          <a:blip r:embed="rId3"/>
+          <a:blip r:embed="rId1"/>
           <a:stretch>
             <a:fillRect/>
           </a:stretch>
@@ -8705,13 +8549,6 @@
             <a:prstDash val="solid"/>
           </a:ln>
         </p:spPr>
-        <p:txBody>
-          <a:bodyPr/>
-          <a:lstStyle/>
-          <a:p>
-            <a:endParaRPr lang="ko-KR" altLang="en-US"/>
-          </a:p>
-        </p:txBody>
       </p:sp>
       <p:sp>
         <p:nvSpPr>
@@ -8734,7 +8571,7 @@
           <a:bodyPr wrap="square" lIns="0" tIns="0" rIns="0" bIns="0" rtlCol="0" anchor="ctr"/>
           <a:lstStyle/>
           <a:p>
-            <a:pPr marL="0" indent="0" algn="ctr">
+            <a:pPr algn="ctr" indent="0" marL="0">
               <a:buNone/>
             </a:pPr>
             <a:r>
@@ -8773,7 +8610,7 @@
           <a:bodyPr wrap="square" lIns="0" tIns="0" rIns="0" bIns="0" rtlCol="0" anchor="ctr"/>
           <a:lstStyle/>
           <a:p>
-            <a:pPr marL="0" indent="0" algn="ctr">
+            <a:pPr algn="ctr" indent="0" marL="0">
               <a:buNone/>
             </a:pPr>
             <a:r>
@@ -8807,7 +8644,6 @@
         <a:solidFill>
           <a:srgbClr val="FFFFFF"/>
         </a:solidFill>
-        <a:effectLst/>
       </p:bgPr>
     </p:bg>
     <p:spTree>
@@ -8845,7 +8681,7 @@
           <a:bodyPr wrap="square" lIns="0" tIns="0" rIns="0" bIns="0" rtlCol="0" anchor="ctr"/>
           <a:lstStyle/>
           <a:p>
-            <a:pPr marL="0" indent="0">
+            <a:pPr indent="0" marL="0">
               <a:buNone/>
             </a:pPr>
             <a:r>
@@ -8884,13 +8720,6 @@
           </a:solidFill>
           <a:ln/>
         </p:spPr>
-        <p:txBody>
-          <a:bodyPr/>
-          <a:lstStyle/>
-          <a:p>
-            <a:endParaRPr lang="ko-KR" altLang="en-US"/>
-          </a:p>
-        </p:txBody>
       </p:sp>
       <p:sp>
         <p:nvSpPr>
@@ -8913,7 +8742,7 @@
           <a:bodyPr wrap="square" lIns="0" tIns="0" rIns="0" bIns="0" rtlCol="0" anchor="ctr"/>
           <a:lstStyle/>
           <a:p>
-            <a:pPr marL="0" indent="0" algn="ctr">
+            <a:pPr algn="ctr" indent="0" marL="0">
               <a:buNone/>
             </a:pPr>
             <a:r>
@@ -8952,7 +8781,7 @@
           <a:bodyPr wrap="square" lIns="0" tIns="0" rIns="0" bIns="0" rtlCol="0" anchor="ctr"/>
           <a:lstStyle/>
           <a:p>
-            <a:pPr marL="0" indent="0">
+            <a:pPr indent="0" marL="0">
               <a:buNone/>
             </a:pPr>
             <a:r>
@@ -8989,13 +8818,6 @@
           </a:solidFill>
           <a:ln/>
         </p:spPr>
-        <p:txBody>
-          <a:bodyPr/>
-          <a:lstStyle/>
-          <a:p>
-            <a:endParaRPr lang="ko-KR" altLang="en-US"/>
-          </a:p>
-        </p:txBody>
       </p:sp>
       <p:sp>
         <p:nvSpPr>
@@ -9018,7 +8840,7 @@
           <a:bodyPr wrap="square" lIns="0" tIns="0" rIns="0" bIns="0" rtlCol="0" anchor="ctr"/>
           <a:lstStyle/>
           <a:p>
-            <a:pPr marL="0" indent="0" algn="r">
+            <a:pPr algn="r" indent="0" marL="0">
               <a:buNone/>
             </a:pPr>
             <a:r>
@@ -9057,7 +8879,7 @@
           <a:bodyPr wrap="square" lIns="0" tIns="0" rIns="0" bIns="0" rtlCol="0" anchor="ctr"/>
           <a:lstStyle/>
           <a:p>
-            <a:pPr marL="0" indent="0">
+            <a:pPr indent="0" marL="0">
               <a:buNone/>
             </a:pPr>
             <a:r>
@@ -9096,7 +8918,7 @@
           <a:bodyPr wrap="square" lIns="0" tIns="0" rIns="0" bIns="0" rtlCol="0" anchor="ctr"/>
           <a:lstStyle/>
           <a:p>
-            <a:pPr marL="0" indent="0" algn="r">
+            <a:pPr algn="r" indent="0" marL="0">
               <a:buNone/>
             </a:pPr>
             <a:r>
@@ -9135,13 +8957,6 @@
           </a:solidFill>
           <a:ln/>
         </p:spPr>
-        <p:txBody>
-          <a:bodyPr/>
-          <a:lstStyle/>
-          <a:p>
-            <a:endParaRPr lang="ko-KR" altLang="en-US"/>
-          </a:p>
-        </p:txBody>
       </p:sp>
       <p:sp>
         <p:nvSpPr>
@@ -9164,7 +8979,7 @@
           <a:bodyPr wrap="square" lIns="0" tIns="0" rIns="0" bIns="0" rtlCol="0" anchor="t"/>
           <a:lstStyle/>
           <a:p>
-            <a:pPr marL="0" indent="0">
+            <a:pPr indent="0" marL="0">
               <a:lnSpc>
                 <a:spcPts val="3570"/>
               </a:lnSpc>
@@ -9209,13 +9024,6 @@
             <a:prstDash val="solid"/>
           </a:ln>
         </p:spPr>
-        <p:txBody>
-          <a:bodyPr/>
-          <a:lstStyle/>
-          <a:p>
-            <a:endParaRPr lang="ko-KR" altLang="en-US"/>
-          </a:p>
-        </p:txBody>
       </p:sp>
       <p:sp>
         <p:nvSpPr>
@@ -9238,7 +9046,7 @@
           <a:bodyPr wrap="square" lIns="0" tIns="0" rIns="0" bIns="0" rtlCol="0" anchor="ctr"/>
           <a:lstStyle/>
           <a:p>
-            <a:pPr marL="0" indent="0" algn="ctr">
+            <a:pPr algn="ctr" indent="0" marL="0">
               <a:buNone/>
             </a:pPr>
             <a:r>
@@ -9280,13 +9088,6 @@
             <a:prstDash val="solid"/>
           </a:ln>
         </p:spPr>
-        <p:txBody>
-          <a:bodyPr/>
-          <a:lstStyle/>
-          <a:p>
-            <a:endParaRPr lang="ko-KR" altLang="en-US"/>
-          </a:p>
-        </p:txBody>
       </p:sp>
       <p:sp>
         <p:nvSpPr>
@@ -9309,7 +9110,7 @@
           <a:bodyPr wrap="square" lIns="0" tIns="0" rIns="0" bIns="0" rtlCol="0" anchor="ctr"/>
           <a:lstStyle/>
           <a:p>
-            <a:pPr marL="0" indent="0" algn="ctr">
+            <a:pPr algn="ctr" indent="0" marL="0">
               <a:buNone/>
             </a:pPr>
             <a:r>
@@ -9351,13 +9152,6 @@
             <a:prstDash val="solid"/>
           </a:ln>
         </p:spPr>
-        <p:txBody>
-          <a:bodyPr/>
-          <a:lstStyle/>
-          <a:p>
-            <a:endParaRPr lang="ko-KR" altLang="en-US"/>
-          </a:p>
-        </p:txBody>
       </p:sp>
       <p:sp>
         <p:nvSpPr>
@@ -9380,7 +9174,7 @@
           <a:bodyPr wrap="square" lIns="0" tIns="0" rIns="0" bIns="0" rtlCol="0" anchor="ctr"/>
           <a:lstStyle/>
           <a:p>
-            <a:pPr marL="0" indent="0" algn="ctr">
+            <a:pPr algn="ctr" indent="0" marL="0">
               <a:buNone/>
             </a:pPr>
             <a:r>
@@ -9422,13 +9216,6 @@
             <a:prstDash val="solid"/>
           </a:ln>
         </p:spPr>
-        <p:txBody>
-          <a:bodyPr/>
-          <a:lstStyle/>
-          <a:p>
-            <a:endParaRPr lang="ko-KR" altLang="en-US"/>
-          </a:p>
-        </p:txBody>
       </p:sp>
       <p:sp>
         <p:nvSpPr>
@@ -9451,7 +9238,7 @@
           <a:bodyPr wrap="square" lIns="0" tIns="0" rIns="0" bIns="0" rtlCol="0" anchor="ctr"/>
           <a:lstStyle/>
           <a:p>
-            <a:pPr marL="0" indent="0" algn="ctr">
+            <a:pPr algn="ctr" indent="0" marL="0">
               <a:buNone/>
             </a:pPr>
             <a:r>
@@ -9490,7 +9277,7 @@
           <a:bodyPr wrap="square" lIns="0" tIns="0" rIns="0" bIns="0" rtlCol="0" anchor="ctr"/>
           <a:lstStyle/>
           <a:p>
-            <a:pPr marL="0" indent="0" algn="ctr">
+            <a:pPr algn="ctr" indent="0" marL="0">
               <a:buNone/>
             </a:pPr>
             <a:r>
@@ -9534,13 +9321,6 @@
             <a:prstDash val="solid"/>
           </a:ln>
         </p:spPr>
-        <p:txBody>
-          <a:bodyPr/>
-          <a:lstStyle/>
-          <a:p>
-            <a:endParaRPr lang="ko-KR" altLang="en-US"/>
-          </a:p>
-        </p:txBody>
       </p:sp>
       <p:sp>
         <p:nvSpPr>
@@ -9563,7 +9343,7 @@
           <a:bodyPr wrap="square" lIns="0" tIns="0" rIns="0" bIns="0" rtlCol="0" anchor="ctr"/>
           <a:lstStyle/>
           <a:p>
-            <a:pPr marL="0" indent="0" algn="ctr">
+            <a:pPr algn="ctr" indent="0" marL="0">
               <a:buNone/>
             </a:pPr>
             <a:r>
@@ -9597,7 +9377,6 @@
         <a:solidFill>
           <a:srgbClr val="FFFFFF"/>
         </a:solidFill>
-        <a:effectLst/>
       </p:bgPr>
     </p:bg>
     <p:spTree>
@@ -9635,7 +9414,7 @@
           <a:bodyPr wrap="square" lIns="0" tIns="0" rIns="0" bIns="0" rtlCol="0" anchor="ctr"/>
           <a:lstStyle/>
           <a:p>
-            <a:pPr marL="0" indent="0">
+            <a:pPr indent="0" marL="0">
               <a:buNone/>
             </a:pPr>
             <a:r>
@@ -9674,13 +9453,6 @@
           </a:solidFill>
           <a:ln/>
         </p:spPr>
-        <p:txBody>
-          <a:bodyPr/>
-          <a:lstStyle/>
-          <a:p>
-            <a:endParaRPr lang="ko-KR" altLang="en-US"/>
-          </a:p>
-        </p:txBody>
       </p:sp>
       <p:sp>
         <p:nvSpPr>
@@ -9703,7 +9475,7 @@
           <a:bodyPr wrap="square" lIns="0" tIns="0" rIns="0" bIns="0" rtlCol="0" anchor="ctr"/>
           <a:lstStyle/>
           <a:p>
-            <a:pPr marL="0" indent="0" algn="ctr">
+            <a:pPr algn="ctr" indent="0" marL="0">
               <a:buNone/>
             </a:pPr>
             <a:r>
@@ -9742,7 +9514,7 @@
           <a:bodyPr wrap="square" lIns="0" tIns="0" rIns="0" bIns="0" rtlCol="0" anchor="ctr"/>
           <a:lstStyle/>
           <a:p>
-            <a:pPr marL="0" indent="0">
+            <a:pPr indent="0" marL="0">
               <a:buNone/>
             </a:pPr>
             <a:r>
@@ -9779,13 +9551,6 @@
           </a:solidFill>
           <a:ln/>
         </p:spPr>
-        <p:txBody>
-          <a:bodyPr/>
-          <a:lstStyle/>
-          <a:p>
-            <a:endParaRPr lang="ko-KR" altLang="en-US"/>
-          </a:p>
-        </p:txBody>
       </p:sp>
       <p:sp>
         <p:nvSpPr>
@@ -9808,7 +9573,7 @@
           <a:bodyPr wrap="square" lIns="0" tIns="0" rIns="0" bIns="0" rtlCol="0" anchor="ctr"/>
           <a:lstStyle/>
           <a:p>
-            <a:pPr marL="0" indent="0" algn="r">
+            <a:pPr algn="r" indent="0" marL="0">
               <a:buNone/>
             </a:pPr>
             <a:r>
@@ -9847,7 +9612,7 @@
           <a:bodyPr wrap="square" lIns="0" tIns="0" rIns="0" bIns="0" rtlCol="0" anchor="ctr"/>
           <a:lstStyle/>
           <a:p>
-            <a:pPr marL="0" indent="0">
+            <a:pPr indent="0" marL="0">
               <a:buNone/>
             </a:pPr>
             <a:r>
@@ -9886,7 +9651,7 @@
           <a:bodyPr wrap="square" lIns="0" tIns="0" rIns="0" bIns="0" rtlCol="0" anchor="ctr"/>
           <a:lstStyle/>
           <a:p>
-            <a:pPr marL="0" indent="0" algn="r">
+            <a:pPr algn="r" indent="0" marL="0">
               <a:buNone/>
             </a:pPr>
             <a:r>
@@ -9913,7 +9678,7 @@
         <p:spPr>
           <a:xfrm>
             <a:off x="530352" y="1783080"/>
-            <a:ext cx="11128248" cy="1207698"/>
+            <a:ext cx="11128248" cy="1143000"/>
           </a:xfrm>
           <a:prstGeom prst="roundRect">
             <a:avLst>
@@ -9925,13 +9690,6 @@
           </a:solidFill>
           <a:ln/>
         </p:spPr>
-        <p:txBody>
-          <a:bodyPr/>
-          <a:lstStyle/>
-          <a:p>
-            <a:endParaRPr lang="ko-KR" altLang="en-US"/>
-          </a:p>
-        </p:txBody>
       </p:sp>
       <p:sp>
         <p:nvSpPr>
@@ -9954,7 +9712,7 @@
           <a:bodyPr wrap="square" lIns="0" tIns="0" rIns="0" bIns="0" rtlCol="0" anchor="ctr"/>
           <a:lstStyle/>
           <a:p>
-            <a:pPr marL="0" indent="0">
+            <a:pPr indent="0" marL="0">
               <a:buNone/>
             </a:pPr>
             <a:r>
@@ -9993,7 +9751,7 @@
           <a:bodyPr wrap="square" lIns="0" tIns="0" rIns="0" bIns="0" rtlCol="0" anchor="t"/>
           <a:lstStyle/>
           <a:p>
-            <a:pPr marL="0" indent="0">
+            <a:pPr indent="0" marL="0">
               <a:lnSpc>
                 <a:spcPts val="3060"/>
               </a:lnSpc>
@@ -10013,7 +9771,7 @@
             <a:endParaRPr lang="en-US" sz="1800" dirty="0"/>
           </a:p>
           <a:p>
-            <a:pPr marL="0" indent="0">
+            <a:pPr indent="0" marL="0">
               <a:lnSpc>
                 <a:spcPts val="3060"/>
               </a:lnSpc>
@@ -10042,7 +9800,7 @@
         </p:nvSpPr>
         <p:spPr>
           <a:xfrm>
-            <a:off x="2194560" y="3143464"/>
+            <a:off x="2194560" y="3108960"/>
             <a:ext cx="1943100" cy="1188720"/>
           </a:xfrm>
           <a:prstGeom prst="rect">
@@ -10058,13 +9816,6 @@
             <a:prstDash val="solid"/>
           </a:ln>
         </p:spPr>
-        <p:txBody>
-          <a:bodyPr/>
-          <a:lstStyle/>
-          <a:p>
-            <a:endParaRPr lang="ko-KR" altLang="en-US"/>
-          </a:p>
-        </p:txBody>
       </p:sp>
       <p:sp>
         <p:nvSpPr>
@@ -10087,7 +9838,7 @@
           <a:bodyPr wrap="square" lIns="0" tIns="0" rIns="0" bIns="0" rtlCol="0" anchor="ctr"/>
           <a:lstStyle/>
           <a:p>
-            <a:pPr marL="0" indent="0" algn="ctr">
+            <a:pPr algn="ctr" indent="0" marL="0">
               <a:buNone/>
             </a:pPr>
             <a:r>
@@ -10113,7 +9864,7 @@
         </p:nvSpPr>
         <p:spPr>
           <a:xfrm>
-            <a:off x="4137660" y="3143464"/>
+            <a:off x="4137660" y="3108960"/>
             <a:ext cx="1943100" cy="1188720"/>
           </a:xfrm>
           <a:prstGeom prst="rect">
@@ -10129,13 +9880,6 @@
             <a:prstDash val="solid"/>
           </a:ln>
         </p:spPr>
-        <p:txBody>
-          <a:bodyPr/>
-          <a:lstStyle/>
-          <a:p>
-            <a:endParaRPr lang="ko-KR" altLang="en-US"/>
-          </a:p>
-        </p:txBody>
       </p:sp>
       <p:sp>
         <p:nvSpPr>
@@ -10158,7 +9902,7 @@
           <a:bodyPr wrap="square" lIns="0" tIns="0" rIns="0" bIns="0" rtlCol="0" anchor="ctr"/>
           <a:lstStyle/>
           <a:p>
-            <a:pPr marL="0" indent="0" algn="ctr">
+            <a:pPr algn="ctr" indent="0" marL="0">
               <a:buNone/>
             </a:pPr>
             <a:r>
@@ -10184,7 +9928,7 @@
         </p:nvSpPr>
         <p:spPr>
           <a:xfrm>
-            <a:off x="6080760" y="3143464"/>
+            <a:off x="6080760" y="3108960"/>
             <a:ext cx="1943100" cy="1188720"/>
           </a:xfrm>
           <a:prstGeom prst="rect">
@@ -10200,13 +9944,6 @@
             <a:prstDash val="solid"/>
           </a:ln>
         </p:spPr>
-        <p:txBody>
-          <a:bodyPr/>
-          <a:lstStyle/>
-          <a:p>
-            <a:endParaRPr lang="ko-KR" altLang="en-US"/>
-          </a:p>
-        </p:txBody>
       </p:sp>
       <p:sp>
         <p:nvSpPr>
@@ -10229,7 +9966,7 @@
           <a:bodyPr wrap="square" lIns="0" tIns="0" rIns="0" bIns="0" rtlCol="0" anchor="ctr"/>
           <a:lstStyle/>
           <a:p>
-            <a:pPr marL="0" indent="0" algn="ctr">
+            <a:pPr algn="ctr" indent="0" marL="0">
               <a:buNone/>
             </a:pPr>
             <a:r>
@@ -10255,7 +9992,7 @@
         </p:nvSpPr>
         <p:spPr>
           <a:xfrm>
-            <a:off x="8023860" y="3143464"/>
+            <a:off x="8023860" y="3108960"/>
             <a:ext cx="1943100" cy="1188720"/>
           </a:xfrm>
           <a:prstGeom prst="rect">
@@ -10271,13 +10008,6 @@
             <a:prstDash val="solid"/>
           </a:ln>
         </p:spPr>
-        <p:txBody>
-          <a:bodyPr/>
-          <a:lstStyle/>
-          <a:p>
-            <a:endParaRPr lang="ko-KR" altLang="en-US"/>
-          </a:p>
-        </p:txBody>
       </p:sp>
       <p:sp>
         <p:nvSpPr>
@@ -10300,7 +10030,7 @@
           <a:bodyPr wrap="square" lIns="0" tIns="0" rIns="0" bIns="0" rtlCol="0" anchor="ctr"/>
           <a:lstStyle/>
           <a:p>
-            <a:pPr marL="0" indent="0" algn="ctr">
+            <a:pPr algn="ctr" indent="0" marL="0">
               <a:buNone/>
             </a:pPr>
             <a:r>
@@ -10326,7 +10056,7 @@
         </p:nvSpPr>
         <p:spPr>
           <a:xfrm>
-            <a:off x="530352" y="4515064"/>
+            <a:off x="530352" y="4480560"/>
             <a:ext cx="11128248" cy="640080"/>
           </a:xfrm>
           <a:prstGeom prst="rect">
@@ -10339,7 +10069,7 @@
           <a:bodyPr wrap="square" lIns="0" tIns="0" rIns="0" bIns="0" rtlCol="0" anchor="ctr"/>
           <a:lstStyle/>
           <a:p>
-            <a:pPr marL="0" indent="0" algn="ctr">
+            <a:pPr algn="ctr" indent="0" marL="0">
               <a:buNone/>
             </a:pPr>
             <a:r>
@@ -10373,7 +10103,6 @@
         <a:solidFill>
           <a:srgbClr val="FFFFFF"/>
         </a:solidFill>
-        <a:effectLst/>
       </p:bgPr>
     </p:bg>
     <p:spTree>
@@ -10411,7 +10140,7 @@
           <a:bodyPr wrap="square" lIns="0" tIns="0" rIns="0" bIns="0" rtlCol="0" anchor="ctr"/>
           <a:lstStyle/>
           <a:p>
-            <a:pPr marL="0" indent="0">
+            <a:pPr indent="0" marL="0">
               <a:buNone/>
             </a:pPr>
             <a:r>
@@ -10450,13 +10179,6 @@
           </a:solidFill>
           <a:ln/>
         </p:spPr>
-        <p:txBody>
-          <a:bodyPr/>
-          <a:lstStyle/>
-          <a:p>
-            <a:endParaRPr lang="ko-KR" altLang="en-US"/>
-          </a:p>
-        </p:txBody>
       </p:sp>
       <p:sp>
         <p:nvSpPr>
@@ -10479,7 +10201,7 @@
           <a:bodyPr wrap="square" lIns="0" tIns="0" rIns="0" bIns="0" rtlCol="0" anchor="ctr"/>
           <a:lstStyle/>
           <a:p>
-            <a:pPr marL="0" indent="0" algn="ctr">
+            <a:pPr algn="ctr" indent="0" marL="0">
               <a:buNone/>
             </a:pPr>
             <a:r>
@@ -10518,7 +10240,7 @@
           <a:bodyPr wrap="square" lIns="0" tIns="0" rIns="0" bIns="0" rtlCol="0" anchor="ctr"/>
           <a:lstStyle/>
           <a:p>
-            <a:pPr marL="0" indent="0">
+            <a:pPr indent="0" marL="0">
               <a:buNone/>
             </a:pPr>
             <a:r>
@@ -10555,13 +10277,6 @@
           </a:solidFill>
           <a:ln/>
         </p:spPr>
-        <p:txBody>
-          <a:bodyPr/>
-          <a:lstStyle/>
-          <a:p>
-            <a:endParaRPr lang="ko-KR" altLang="en-US"/>
-          </a:p>
-        </p:txBody>
       </p:sp>
       <p:sp>
         <p:nvSpPr>
@@ -10584,7 +10299,7 @@
           <a:bodyPr wrap="square" lIns="0" tIns="0" rIns="0" bIns="0" rtlCol="0" anchor="ctr"/>
           <a:lstStyle/>
           <a:p>
-            <a:pPr marL="0" indent="0" algn="r">
+            <a:pPr algn="r" indent="0" marL="0">
               <a:buNone/>
             </a:pPr>
             <a:r>
@@ -10623,7 +10338,7 @@
           <a:bodyPr wrap="square" lIns="0" tIns="0" rIns="0" bIns="0" rtlCol="0" anchor="ctr"/>
           <a:lstStyle/>
           <a:p>
-            <a:pPr marL="0" indent="0">
+            <a:pPr indent="0" marL="0">
               <a:buNone/>
             </a:pPr>
             <a:r>
@@ -10662,7 +10377,7 @@
           <a:bodyPr wrap="square" lIns="0" tIns="0" rIns="0" bIns="0" rtlCol="0" anchor="ctr"/>
           <a:lstStyle/>
           <a:p>
-            <a:pPr marL="0" indent="0" algn="r">
+            <a:pPr algn="r" indent="0" marL="0">
               <a:buNone/>
             </a:pPr>
             <a:r>
@@ -10704,13 +10419,6 @@
             <a:prstDash val="solid"/>
           </a:ln>
         </p:spPr>
-        <p:txBody>
-          <a:bodyPr/>
-          <a:lstStyle/>
-          <a:p>
-            <a:endParaRPr lang="ko-KR" altLang="en-US"/>
-          </a:p>
-        </p:txBody>
       </p:sp>
       <p:sp>
         <p:nvSpPr>
@@ -10733,7 +10441,7 @@
           <a:bodyPr wrap="square" lIns="0" tIns="0" rIns="0" bIns="0" rtlCol="0" anchor="ctr"/>
           <a:lstStyle/>
           <a:p>
-            <a:pPr marL="0" indent="0" algn="ctr">
+            <a:pPr algn="ctr" indent="0" marL="0">
               <a:buNone/>
             </a:pPr>
             <a:r>
@@ -10772,7 +10480,7 @@
           <a:bodyPr wrap="square" lIns="0" tIns="0" rIns="0" bIns="0" rtlCol="0" anchor="ctr"/>
           <a:lstStyle/>
           <a:p>
-            <a:pPr marL="0" indent="0" algn="ctr">
+            <a:pPr algn="ctr" indent="0" marL="0">
               <a:buNone/>
             </a:pPr>
             <a:r>
@@ -10814,13 +10522,6 @@
             <a:prstDash val="solid"/>
           </a:ln>
         </p:spPr>
-        <p:txBody>
-          <a:bodyPr/>
-          <a:lstStyle/>
-          <a:p>
-            <a:endParaRPr lang="ko-KR" altLang="en-US"/>
-          </a:p>
-        </p:txBody>
       </p:sp>
       <p:sp>
         <p:nvSpPr>
@@ -10843,7 +10544,7 @@
           <a:bodyPr wrap="square" lIns="0" tIns="0" rIns="0" bIns="0" rtlCol="0" anchor="ctr"/>
           <a:lstStyle/>
           <a:p>
-            <a:pPr marL="0" indent="0" algn="ctr">
+            <a:pPr algn="ctr" indent="0" marL="0">
               <a:buNone/>
             </a:pPr>
             <a:r>
@@ -10882,7 +10583,7 @@
           <a:bodyPr wrap="square" lIns="0" tIns="0" rIns="0" bIns="0" rtlCol="0" anchor="ctr"/>
           <a:lstStyle/>
           <a:p>
-            <a:pPr marL="0" indent="0" algn="ctr">
+            <a:pPr algn="ctr" indent="0" marL="0">
               <a:buNone/>
             </a:pPr>
             <a:r>
@@ -10924,13 +10625,6 @@
             <a:prstDash val="solid"/>
           </a:ln>
         </p:spPr>
-        <p:txBody>
-          <a:bodyPr/>
-          <a:lstStyle/>
-          <a:p>
-            <a:endParaRPr lang="ko-KR" altLang="en-US"/>
-          </a:p>
-        </p:txBody>
       </p:sp>
       <p:sp>
         <p:nvSpPr>
@@ -10953,7 +10647,7 @@
           <a:bodyPr wrap="square" lIns="0" tIns="0" rIns="0" bIns="0" rtlCol="0" anchor="ctr"/>
           <a:lstStyle/>
           <a:p>
-            <a:pPr marL="0" indent="0" algn="ctr">
+            <a:pPr algn="ctr" indent="0" marL="0">
               <a:buNone/>
             </a:pPr>
             <a:r>
@@ -10992,7 +10686,7 @@
           <a:bodyPr wrap="square" lIns="0" tIns="0" rIns="0" bIns="0" rtlCol="0" anchor="ctr"/>
           <a:lstStyle/>
           <a:p>
-            <a:pPr marL="0" indent="0" algn="ctr">
+            <a:pPr algn="ctr" indent="0" marL="0">
               <a:buNone/>
             </a:pPr>
             <a:r>
@@ -11034,13 +10728,6 @@
             <a:prstDash val="solid"/>
           </a:ln>
         </p:spPr>
-        <p:txBody>
-          <a:bodyPr/>
-          <a:lstStyle/>
-          <a:p>
-            <a:endParaRPr lang="ko-KR" altLang="en-US"/>
-          </a:p>
-        </p:txBody>
       </p:sp>
       <p:sp>
         <p:nvSpPr>
@@ -11063,7 +10750,7 @@
           <a:bodyPr wrap="square" lIns="0" tIns="0" rIns="0" bIns="0" rtlCol="0" anchor="ctr"/>
           <a:lstStyle/>
           <a:p>
-            <a:pPr marL="0" indent="0" algn="ctr">
+            <a:pPr algn="ctr" indent="0" marL="0">
               <a:buNone/>
             </a:pPr>
             <a:r>
@@ -11102,7 +10789,7 @@
           <a:bodyPr wrap="square" lIns="0" tIns="0" rIns="0" bIns="0" rtlCol="0" anchor="ctr"/>
           <a:lstStyle/>
           <a:p>
-            <a:pPr marL="0" indent="0" algn="ctr">
+            <a:pPr algn="ctr" indent="0" marL="0">
               <a:buNone/>
             </a:pPr>
             <a:r>
@@ -11141,7 +10828,7 @@
           <a:bodyPr wrap="square" lIns="0" tIns="0" rIns="0" bIns="0" rtlCol="0" anchor="ctr"/>
           <a:lstStyle/>
           <a:p>
-            <a:pPr marL="0" indent="0" algn="ctr">
+            <a:pPr algn="ctr" indent="0" marL="0">
               <a:buNone/>
             </a:pPr>
             <a:r>
@@ -11161,14 +10848,14 @@
       </p:sp>
       <p:pic>
         <p:nvPicPr>
-          <p:cNvPr id="23" name="Image 0" descr="/home/claude/w5/교과서_배포/assets/img/03-2-01-ruler-zero.png"/>
+          <p:cNvPr id="23" name="Image 0" descr="/home/claude/w5/교과서_배포/assets/img/03-2-01-ruler-zero.png">    </p:cNvPr>
           <p:cNvPicPr>
             <a:picLocks noChangeAspect="1"/>
           </p:cNvPicPr>
           <p:nvPr/>
         </p:nvPicPr>
         <p:blipFill>
-          <a:blip r:embed="rId3"/>
+          <a:blip r:embed="rId1"/>
           <a:stretch>
             <a:fillRect/>
           </a:stretch>
@@ -11199,7 +10886,6 @@
         <a:solidFill>
           <a:srgbClr val="FFFFFF"/>
         </a:solidFill>
-        <a:effectLst/>
       </p:bgPr>
     </p:bg>
     <p:spTree>
@@ -11237,7 +10923,7 @@
           <a:bodyPr wrap="square" lIns="0" tIns="0" rIns="0" bIns="0" rtlCol="0" anchor="ctr"/>
           <a:lstStyle/>
           <a:p>
-            <a:pPr marL="0" indent="0">
+            <a:pPr indent="0" marL="0">
               <a:buNone/>
             </a:pPr>
             <a:r>
@@ -11276,13 +10962,6 @@
           </a:solidFill>
           <a:ln/>
         </p:spPr>
-        <p:txBody>
-          <a:bodyPr/>
-          <a:lstStyle/>
-          <a:p>
-            <a:endParaRPr lang="ko-KR" altLang="en-US"/>
-          </a:p>
-        </p:txBody>
       </p:sp>
       <p:sp>
         <p:nvSpPr>
@@ -11305,7 +10984,7 @@
           <a:bodyPr wrap="square" lIns="0" tIns="0" rIns="0" bIns="0" rtlCol="0" anchor="ctr"/>
           <a:lstStyle/>
           <a:p>
-            <a:pPr marL="0" indent="0" algn="ctr">
+            <a:pPr algn="ctr" indent="0" marL="0">
               <a:buNone/>
             </a:pPr>
             <a:r>
@@ -11344,7 +11023,7 @@
           <a:bodyPr wrap="square" lIns="0" tIns="0" rIns="0" bIns="0" rtlCol="0" anchor="ctr"/>
           <a:lstStyle/>
           <a:p>
-            <a:pPr marL="0" indent="0">
+            <a:pPr indent="0" marL="0">
               <a:buNone/>
             </a:pPr>
             <a:r>
@@ -11381,13 +11060,6 @@
           </a:solidFill>
           <a:ln/>
         </p:spPr>
-        <p:txBody>
-          <a:bodyPr/>
-          <a:lstStyle/>
-          <a:p>
-            <a:endParaRPr lang="ko-KR" altLang="en-US"/>
-          </a:p>
-        </p:txBody>
       </p:sp>
       <p:sp>
         <p:nvSpPr>
@@ -11410,7 +11082,7 @@
           <a:bodyPr wrap="square" lIns="0" tIns="0" rIns="0" bIns="0" rtlCol="0" anchor="ctr"/>
           <a:lstStyle/>
           <a:p>
-            <a:pPr marL="0" indent="0" algn="r">
+            <a:pPr algn="r" indent="0" marL="0">
               <a:buNone/>
             </a:pPr>
             <a:r>
@@ -11449,7 +11121,7 @@
           <a:bodyPr wrap="square" lIns="0" tIns="0" rIns="0" bIns="0" rtlCol="0" anchor="ctr"/>
           <a:lstStyle/>
           <a:p>
-            <a:pPr marL="0" indent="0">
+            <a:pPr indent="0" marL="0">
               <a:buNone/>
             </a:pPr>
             <a:r>
@@ -11488,7 +11160,7 @@
           <a:bodyPr wrap="square" lIns="0" tIns="0" rIns="0" bIns="0" rtlCol="0" anchor="ctr"/>
           <a:lstStyle/>
           <a:p>
-            <a:pPr marL="0" indent="0" algn="r">
+            <a:pPr algn="r" indent="0" marL="0">
               <a:buNone/>
             </a:pPr>
             <a:r>
@@ -11530,13 +11202,6 @@
             <a:prstDash val="solid"/>
           </a:ln>
         </p:spPr>
-        <p:txBody>
-          <a:bodyPr/>
-          <a:lstStyle/>
-          <a:p>
-            <a:endParaRPr lang="ko-KR" altLang="en-US"/>
-          </a:p>
-        </p:txBody>
       </p:sp>
       <p:sp>
         <p:nvSpPr>
@@ -11559,7 +11224,7 @@
           <a:bodyPr wrap="square" lIns="0" tIns="0" rIns="0" bIns="0" rtlCol="0" anchor="ctr"/>
           <a:lstStyle/>
           <a:p>
-            <a:pPr marL="0" indent="0" algn="ctr">
+            <a:pPr algn="ctr" indent="0" marL="0">
               <a:buNone/>
             </a:pPr>
             <a:r>
@@ -11598,7 +11263,7 @@
           <a:bodyPr wrap="square" lIns="0" tIns="0" rIns="0" bIns="0" rtlCol="0" anchor="ctr"/>
           <a:lstStyle/>
           <a:p>
-            <a:pPr marL="0" indent="0" algn="ctr">
+            <a:pPr algn="ctr" indent="0" marL="0">
               <a:buNone/>
             </a:pPr>
             <a:r>
@@ -11640,13 +11305,6 @@
             <a:prstDash val="solid"/>
           </a:ln>
         </p:spPr>
-        <p:txBody>
-          <a:bodyPr/>
-          <a:lstStyle/>
-          <a:p>
-            <a:endParaRPr lang="ko-KR" altLang="en-US"/>
-          </a:p>
-        </p:txBody>
       </p:sp>
       <p:sp>
         <p:nvSpPr>
@@ -11669,7 +11327,7 @@
           <a:bodyPr wrap="square" lIns="0" tIns="0" rIns="0" bIns="0" rtlCol="0" anchor="ctr"/>
           <a:lstStyle/>
           <a:p>
-            <a:pPr marL="0" indent="0" algn="ctr">
+            <a:pPr algn="ctr" indent="0" marL="0">
               <a:buNone/>
             </a:pPr>
             <a:r>
@@ -11708,7 +11366,7 @@
           <a:bodyPr wrap="square" lIns="0" tIns="0" rIns="0" bIns="0" rtlCol="0" anchor="ctr"/>
           <a:lstStyle/>
           <a:p>
-            <a:pPr marL="0" indent="0" algn="ctr">
+            <a:pPr algn="ctr" indent="0" marL="0">
               <a:buNone/>
             </a:pPr>
             <a:r>
@@ -11750,13 +11408,6 @@
             <a:prstDash val="solid"/>
           </a:ln>
         </p:spPr>
-        <p:txBody>
-          <a:bodyPr/>
-          <a:lstStyle/>
-          <a:p>
-            <a:endParaRPr lang="ko-KR" altLang="en-US"/>
-          </a:p>
-        </p:txBody>
       </p:sp>
       <p:sp>
         <p:nvSpPr>
@@ -11779,7 +11430,7 @@
           <a:bodyPr wrap="square" lIns="0" tIns="0" rIns="0" bIns="0" rtlCol="0" anchor="ctr"/>
           <a:lstStyle/>
           <a:p>
-            <a:pPr marL="0" indent="0" algn="ctr">
+            <a:pPr algn="ctr" indent="0" marL="0">
               <a:buNone/>
             </a:pPr>
             <a:r>
@@ -11818,7 +11469,7 @@
           <a:bodyPr wrap="square" lIns="0" tIns="0" rIns="0" bIns="0" rtlCol="0" anchor="ctr"/>
           <a:lstStyle/>
           <a:p>
-            <a:pPr marL="0" indent="0" algn="ctr">
+            <a:pPr algn="ctr" indent="0" marL="0">
               <a:buNone/>
             </a:pPr>
             <a:r>
@@ -11860,13 +11511,6 @@
             <a:prstDash val="solid"/>
           </a:ln>
         </p:spPr>
-        <p:txBody>
-          <a:bodyPr/>
-          <a:lstStyle/>
-          <a:p>
-            <a:endParaRPr lang="ko-KR" altLang="en-US"/>
-          </a:p>
-        </p:txBody>
       </p:sp>
       <p:sp>
         <p:nvSpPr>
@@ -11889,7 +11533,7 @@
           <a:bodyPr wrap="square" lIns="0" tIns="0" rIns="0" bIns="0" rtlCol="0" anchor="ctr"/>
           <a:lstStyle/>
           <a:p>
-            <a:pPr marL="0" indent="0" algn="ctr">
+            <a:pPr algn="ctr" indent="0" marL="0">
               <a:buNone/>
             </a:pPr>
             <a:r>
@@ -11928,7 +11572,7 @@
           <a:bodyPr wrap="square" lIns="0" tIns="0" rIns="0" bIns="0" rtlCol="0" anchor="ctr"/>
           <a:lstStyle/>
           <a:p>
-            <a:pPr marL="0" indent="0" algn="ctr">
+            <a:pPr algn="ctr" indent="0" marL="0">
               <a:buNone/>
             </a:pPr>
             <a:r>
@@ -11972,13 +11616,6 @@
             <a:prstDash val="solid"/>
           </a:ln>
         </p:spPr>
-        <p:txBody>
-          <a:bodyPr/>
-          <a:lstStyle/>
-          <a:p>
-            <a:endParaRPr lang="ko-KR" altLang="en-US"/>
-          </a:p>
-        </p:txBody>
       </p:sp>
       <p:sp>
         <p:nvSpPr>
@@ -12001,7 +11638,7 @@
           <a:bodyPr wrap="square" lIns="0" tIns="0" rIns="0" bIns="0" rtlCol="0" anchor="ctr"/>
           <a:lstStyle/>
           <a:p>
-            <a:pPr marL="0" indent="0">
+            <a:pPr indent="0" marL="0">
               <a:buNone/>
             </a:pPr>
             <a:r>
@@ -12040,7 +11677,7 @@
           <a:bodyPr wrap="square" lIns="0" tIns="0" rIns="0" bIns="0" rtlCol="0" anchor="t"/>
           <a:lstStyle/>
           <a:p>
-            <a:pPr marL="0" indent="0">
+            <a:pPr indent="0" marL="0">
               <a:lnSpc>
                 <a:spcPts val="1900"/>
               </a:lnSpc>
@@ -12087,13 +11724,6 @@
             <a:prstDash val="solid"/>
           </a:ln>
         </p:spPr>
-        <p:txBody>
-          <a:bodyPr/>
-          <a:lstStyle/>
-          <a:p>
-            <a:endParaRPr lang="ko-KR" altLang="en-US"/>
-          </a:p>
-        </p:txBody>
       </p:sp>
       <p:sp>
         <p:nvSpPr>
@@ -12116,7 +11746,7 @@
           <a:bodyPr wrap="square" lIns="0" tIns="0" rIns="0" bIns="0" rtlCol="0" anchor="ctr"/>
           <a:lstStyle/>
           <a:p>
-            <a:pPr marL="0" indent="0">
+            <a:pPr indent="0" marL="0">
               <a:buNone/>
             </a:pPr>
             <a:r>
@@ -12155,7 +11785,7 @@
           <a:bodyPr wrap="square" lIns="0" tIns="0" rIns="0" bIns="0" rtlCol="0" anchor="t"/>
           <a:lstStyle/>
           <a:p>
-            <a:pPr marL="0" indent="0">
+            <a:pPr indent="0" marL="0">
               <a:lnSpc>
                 <a:spcPts val="1900"/>
               </a:lnSpc>
@@ -12202,13 +11832,6 @@
             <a:prstDash val="solid"/>
           </a:ln>
         </p:spPr>
-        <p:txBody>
-          <a:bodyPr/>
-          <a:lstStyle/>
-          <a:p>
-            <a:endParaRPr lang="ko-KR" altLang="en-US"/>
-          </a:p>
-        </p:txBody>
       </p:sp>
       <p:sp>
         <p:nvSpPr>
@@ -12231,7 +11854,7 @@
           <a:bodyPr wrap="square" lIns="0" tIns="0" rIns="0" bIns="0" rtlCol="0" anchor="ctr"/>
           <a:lstStyle/>
           <a:p>
-            <a:pPr marL="0" indent="0" algn="ctr">
+            <a:pPr algn="ctr" indent="0" marL="0">
               <a:buNone/>
             </a:pPr>
             <a:r>
@@ -12265,7 +11888,6 @@
         <a:solidFill>
           <a:srgbClr val="FFFFFF"/>
         </a:solidFill>
-        <a:effectLst/>
       </p:bgPr>
     </p:bg>
     <p:spTree>
@@ -12303,7 +11925,7 @@
           <a:bodyPr wrap="square" lIns="0" tIns="0" rIns="0" bIns="0" rtlCol="0" anchor="ctr"/>
           <a:lstStyle/>
           <a:p>
-            <a:pPr marL="0" indent="0">
+            <a:pPr indent="0" marL="0">
               <a:buNone/>
             </a:pPr>
             <a:r>
@@ -12342,13 +11964,6 @@
           </a:solidFill>
           <a:ln/>
         </p:spPr>
-        <p:txBody>
-          <a:bodyPr/>
-          <a:lstStyle/>
-          <a:p>
-            <a:endParaRPr lang="ko-KR" altLang="en-US"/>
-          </a:p>
-        </p:txBody>
       </p:sp>
       <p:sp>
         <p:nvSpPr>
@@ -12371,7 +11986,7 @@
           <a:bodyPr wrap="square" lIns="0" tIns="0" rIns="0" bIns="0" rtlCol="0" anchor="ctr"/>
           <a:lstStyle/>
           <a:p>
-            <a:pPr marL="0" indent="0" algn="ctr">
+            <a:pPr algn="ctr" indent="0" marL="0">
               <a:buNone/>
             </a:pPr>
             <a:r>
@@ -12410,7 +12025,7 @@
           <a:bodyPr wrap="square" lIns="0" tIns="0" rIns="0" bIns="0" rtlCol="0" anchor="ctr"/>
           <a:lstStyle/>
           <a:p>
-            <a:pPr marL="0" indent="0">
+            <a:pPr indent="0" marL="0">
               <a:buNone/>
             </a:pPr>
             <a:r>
@@ -12447,13 +12062,6 @@
           </a:solidFill>
           <a:ln/>
         </p:spPr>
-        <p:txBody>
-          <a:bodyPr/>
-          <a:lstStyle/>
-          <a:p>
-            <a:endParaRPr lang="ko-KR" altLang="en-US"/>
-          </a:p>
-        </p:txBody>
       </p:sp>
       <p:sp>
         <p:nvSpPr>
@@ -12476,7 +12084,7 @@
           <a:bodyPr wrap="square" lIns="0" tIns="0" rIns="0" bIns="0" rtlCol="0" anchor="ctr"/>
           <a:lstStyle/>
           <a:p>
-            <a:pPr marL="0" indent="0" algn="r">
+            <a:pPr algn="r" indent="0" marL="0">
               <a:buNone/>
             </a:pPr>
             <a:r>
@@ -12515,7 +12123,7 @@
           <a:bodyPr wrap="square" lIns="0" tIns="0" rIns="0" bIns="0" rtlCol="0" anchor="ctr"/>
           <a:lstStyle/>
           <a:p>
-            <a:pPr marL="0" indent="0">
+            <a:pPr indent="0" marL="0">
               <a:buNone/>
             </a:pPr>
             <a:r>
@@ -12554,7 +12162,7 @@
           <a:bodyPr wrap="square" lIns="0" tIns="0" rIns="0" bIns="0" rtlCol="0" anchor="ctr"/>
           <a:lstStyle/>
           <a:p>
-            <a:pPr marL="0" indent="0" algn="r">
+            <a:pPr algn="r" indent="0" marL="0">
               <a:buNone/>
             </a:pPr>
             <a:r>
@@ -12574,30 +12182,156 @@
       </p:sp>
       <p:sp>
         <p:nvSpPr>
-          <p:cNvPr id="10" name="Text 8"/>
-          <p:cNvSpPr/>
-          <p:nvPr/>
-        </p:nvSpPr>
-        <p:spPr>
-          <a:xfrm>
-            <a:off x="530352" y="1664208"/>
-            <a:ext cx="11128248" cy="310896"/>
-          </a:xfrm>
-          <a:prstGeom prst="rect">
-            <a:avLst/>
-          </a:prstGeom>
-          <a:noFill/>
-          <a:ln/>
-        </p:spPr>
-        <p:txBody>
-          <a:bodyPr wrap="square" lIns="0" tIns="0" rIns="0" bIns="0" rtlCol="0" anchor="ctr"/>
-          <a:lstStyle/>
-          <a:p>
-            <a:pPr marL="0" indent="0">
-              <a:buNone/>
-            </a:pPr>
-            <a:r>
-              <a:rPr lang="en-US" sz="1500" b="1" dirty="0">
+          <p:cNvPr id="10" name="Shape 8"/>
+          <p:cNvSpPr/>
+          <p:nvPr/>
+        </p:nvSpPr>
+        <p:spPr>
+          <a:xfrm>
+            <a:off x="530352" y="1691640"/>
+            <a:ext cx="5669280" cy="1051560"/>
+          </a:xfrm>
+          <a:prstGeom prst="roundRect">
+            <a:avLst>
+              <a:gd name="adj" fmla="val 4348"/>
+            </a:avLst>
+          </a:prstGeom>
+          <a:solidFill>
+            <a:srgbClr val="24272C"/>
+          </a:solidFill>
+          <a:ln/>
+        </p:spPr>
+      </p:sp>
+      <p:sp>
+        <p:nvSpPr>
+          <p:cNvPr id="11" name="Text 9"/>
+          <p:cNvSpPr/>
+          <p:nvPr/>
+        </p:nvSpPr>
+        <p:spPr>
+          <a:xfrm>
+            <a:off x="768096" y="1819656"/>
+            <a:ext cx="5193792" cy="219456"/>
+          </a:xfrm>
+          <a:prstGeom prst="rect">
+            <a:avLst/>
+          </a:prstGeom>
+          <a:noFill/>
+          <a:ln/>
+        </p:spPr>
+        <p:txBody>
+          <a:bodyPr wrap="square" lIns="0" tIns="0" rIns="0" bIns="0" rtlCol="0" anchor="ctr"/>
+          <a:lstStyle/>
+          <a:p>
+            <a:pPr indent="0" marL="0">
+              <a:buNone/>
+            </a:pPr>
+            <a:r>
+              <a:rPr lang="en-US" sz="950" dirty="0">
+                <a:solidFill>
+                  <a:srgbClr val="8A9099"/>
+                </a:solidFill>
+                <a:latin typeface="IBM Plex Mono" pitchFamily="34" charset="0"/>
+                <a:ea typeface="IBM Plex Mono" pitchFamily="34" charset="-122"/>
+                <a:cs typeface="IBM Plex Mono" pitchFamily="34" charset="-120"/>
+              </a:rPr>
+              <a:t>len = length(길이)</a:t>
+            </a:r>
+            <a:endParaRPr lang="en-US" sz="950" dirty="0"/>
+          </a:p>
+        </p:txBody>
+      </p:sp>
+      <p:sp>
+        <p:nvSpPr>
+          <p:cNvPr id="12" name="Text 10"/>
+          <p:cNvSpPr/>
+          <p:nvPr/>
+        </p:nvSpPr>
+        <p:spPr>
+          <a:xfrm>
+            <a:off x="768096" y="2093976"/>
+            <a:ext cx="5193792" cy="502920"/>
+          </a:xfrm>
+          <a:prstGeom prst="rect">
+            <a:avLst/>
+          </a:prstGeom>
+          <a:noFill/>
+          <a:ln/>
+        </p:spPr>
+        <p:txBody>
+          <a:bodyPr wrap="square" lIns="0" tIns="0" rIns="0" bIns="0" rtlCol="0" anchor="t"/>
+          <a:lstStyle/>
+          <a:p>
+            <a:pPr indent="0" marL="0">
+              <a:lnSpc>
+                <a:spcPts val="2890"/>
+              </a:lnSpc>
+              <a:buNone/>
+            </a:pPr>
+            <a:r>
+              <a:rPr lang="en-US" sz="1700" b="1" dirty="0">
+                <a:solidFill>
+                  <a:srgbClr val="E8EAED"/>
+                </a:solidFill>
+                <a:latin typeface="IBM Plex Mono" pitchFamily="34" charset="0"/>
+                <a:ea typeface="IBM Plex Mono" pitchFamily="34" charset="-122"/>
+                <a:cs typeface="IBM Plex Mono" pitchFamily="34" charset="-120"/>
+              </a:rPr>
+              <a:t>print(len(scores))</a:t>
+            </a:r>
+            <a:endParaRPr lang="en-US" sz="1700" dirty="0"/>
+          </a:p>
+          <a:p>
+            <a:pPr indent="0" marL="0">
+              <a:lnSpc>
+                <a:spcPts val="2890"/>
+              </a:lnSpc>
+              <a:buNone/>
+            </a:pPr>
+            <a:r>
+              <a:rPr lang="en-US" sz="1700" b="1" dirty="0">
+                <a:solidFill>
+                  <a:srgbClr val="7FE0A8"/>
+                </a:solidFill>
+                <a:latin typeface="IBM Plex Mono" pitchFamily="34" charset="0"/>
+                <a:ea typeface="IBM Plex Mono" pitchFamily="34" charset="-122"/>
+                <a:cs typeface="IBM Plex Mono" pitchFamily="34" charset="-120"/>
+              </a:rPr>
+              <a:t>4</a:t>
+            </a:r>
+            <a:endParaRPr lang="en-US" sz="1700" dirty="0"/>
+          </a:p>
+        </p:txBody>
+      </p:sp>
+      <p:sp>
+        <p:nvSpPr>
+          <p:cNvPr id="13" name="Text 11"/>
+          <p:cNvSpPr/>
+          <p:nvPr/>
+        </p:nvSpPr>
+        <p:spPr>
+          <a:xfrm>
+            <a:off x="6583680" y="1691640"/>
+            <a:ext cx="5074920" cy="1051560"/>
+          </a:xfrm>
+          <a:prstGeom prst="rect">
+            <a:avLst/>
+          </a:prstGeom>
+          <a:noFill/>
+          <a:ln/>
+        </p:spPr>
+        <p:txBody>
+          <a:bodyPr wrap="square" lIns="0" tIns="0" rIns="0" bIns="0" rtlCol="0" anchor="ctr"/>
+          <a:lstStyle/>
+          <a:p>
+            <a:pPr indent="0" marL="0">
+              <a:lnSpc>
+                <a:spcPts val="2400"/>
+              </a:lnSpc>
+              <a:buNone/>
+            </a:pPr>
+            <a:r>
+              <a:rPr lang="en-US" sz="1600" b="1" dirty="0">
                 <a:solidFill>
                   <a:srgbClr val="1B1D21"/>
                 </a:solidFill>
@@ -12605,26 +12339,66 @@
                 <a:ea typeface="IBM Plex Sans KR" pitchFamily="34" charset="-122"/>
                 <a:cs typeface="IBM Plex Sans KR" pitchFamily="34" charset="-120"/>
               </a:rPr>
-              <a:t>값은 네 개 · 자리 번호는 0 1 2 3 · 4번 자리는 없다</a:t>
-            </a:r>
-            <a:endParaRPr lang="en-US" sz="1500" dirty="0"/>
-          </a:p>
-        </p:txBody>
-      </p:sp>
-      <p:sp>
-        <p:nvSpPr>
-          <p:cNvPr id="11" name="Shape 9"/>
-          <p:cNvSpPr/>
-          <p:nvPr/>
-        </p:nvSpPr>
-        <p:spPr>
-          <a:xfrm>
-            <a:off x="530352" y="2103120"/>
-            <a:ext cx="11128248" cy="822960"/>
+              <a:t>값이 4개니까</a:t>
+            </a:r>
+            <a:endParaRPr lang="en-US" sz="1600" dirty="0"/>
+          </a:p>
+          <a:p>
+            <a:pPr indent="0" marL="0">
+              <a:lnSpc>
+                <a:spcPts val="2400"/>
+              </a:lnSpc>
+              <a:buNone/>
+            </a:pPr>
+            <a:r>
+              <a:rPr lang="en-US" sz="1600" b="1" dirty="0">
+                <a:solidFill>
+                  <a:srgbClr val="1B1D21"/>
+                </a:solidFill>
+                <a:latin typeface="IBM Plex Sans KR" pitchFamily="34" charset="0"/>
+                <a:ea typeface="IBM Plex Sans KR" pitchFamily="34" charset="-122"/>
+                <a:cs typeface="IBM Plex Sans KR" pitchFamily="34" charset="-120"/>
+              </a:rPr>
+              <a:t>자리 번호는 0 1 2 3</a:t>
+            </a:r>
+            <a:endParaRPr lang="en-US" sz="1600" dirty="0"/>
+          </a:p>
+          <a:p>
+            <a:pPr indent="0" marL="0">
+              <a:lnSpc>
+                <a:spcPts val="2400"/>
+              </a:lnSpc>
+              <a:buNone/>
+            </a:pPr>
+            <a:r>
+              <a:rPr lang="en-US" sz="1600" b="1" dirty="0">
+                <a:solidFill>
+                  <a:srgbClr val="1B1D21"/>
+                </a:solidFill>
+                <a:latin typeface="IBM Plex Sans KR" pitchFamily="34" charset="0"/>
+                <a:ea typeface="IBM Plex Sans KR" pitchFamily="34" charset="-122"/>
+                <a:cs typeface="IBM Plex Sans KR" pitchFamily="34" charset="-120"/>
+              </a:rPr>
+              <a:t>4번 자리는 없다</a:t>
+            </a:r>
+            <a:endParaRPr lang="en-US" sz="1600" dirty="0"/>
+          </a:p>
+        </p:txBody>
+      </p:sp>
+      <p:sp>
+        <p:nvSpPr>
+          <p:cNvPr id="14" name="Shape 12"/>
+          <p:cNvSpPr/>
+          <p:nvPr/>
+        </p:nvSpPr>
+        <p:spPr>
+          <a:xfrm>
+            <a:off x="530352" y="2926080"/>
+            <a:ext cx="11128248" cy="777240"/>
           </a:xfrm>
           <a:prstGeom prst="roundRect">
             <a:avLst>
-              <a:gd name="adj" fmla="val 5556"/>
+              <a:gd name="adj" fmla="val 5882"/>
             </a:avLst>
           </a:prstGeom>
           <a:solidFill>
@@ -12632,24 +12406,17 @@
           </a:solidFill>
           <a:ln/>
         </p:spPr>
-        <p:txBody>
-          <a:bodyPr/>
-          <a:lstStyle/>
-          <a:p>
-            <a:endParaRPr lang="ko-KR" altLang="en-US"/>
-          </a:p>
-        </p:txBody>
-      </p:sp>
-      <p:sp>
-        <p:nvSpPr>
-          <p:cNvPr id="12" name="Text 10"/>
-          <p:cNvSpPr/>
-          <p:nvPr/>
-        </p:nvSpPr>
-        <p:spPr>
-          <a:xfrm>
-            <a:off x="768096" y="2286000"/>
-            <a:ext cx="10652760" cy="457200"/>
+      </p:sp>
+      <p:sp>
+        <p:nvSpPr>
+          <p:cNvPr id="15" name="Text 13"/>
+          <p:cNvSpPr/>
+          <p:nvPr/>
+        </p:nvSpPr>
+        <p:spPr>
+          <a:xfrm>
+            <a:off x="768096" y="3108960"/>
+            <a:ext cx="10652760" cy="411480"/>
           </a:xfrm>
           <a:prstGeom prst="rect">
             <a:avLst/>
@@ -12661,7 +12428,7 @@
           <a:bodyPr wrap="square" lIns="0" tIns="0" rIns="0" bIns="0" rtlCol="0" anchor="t"/>
           <a:lstStyle/>
           <a:p>
-            <a:pPr marL="0" indent="0">
+            <a:pPr indent="0" marL="0">
               <a:lnSpc>
                 <a:spcPts val="3400"/>
               </a:lnSpc>
@@ -12684,18 +12451,18 @@
       </p:sp>
       <p:sp>
         <p:nvSpPr>
-          <p:cNvPr id="13" name="Shape 11"/>
-          <p:cNvSpPr/>
-          <p:nvPr/>
-        </p:nvSpPr>
-        <p:spPr>
-          <a:xfrm>
-            <a:off x="530352" y="3108960"/>
-            <a:ext cx="11128248" cy="1371600"/>
+          <p:cNvPr id="16" name="Shape 14"/>
+          <p:cNvSpPr/>
+          <p:nvPr/>
+        </p:nvSpPr>
+        <p:spPr>
+          <a:xfrm>
+            <a:off x="530352" y="3886200"/>
+            <a:ext cx="11128248" cy="1051560"/>
           </a:xfrm>
           <a:prstGeom prst="roundRect">
             <a:avLst>
-              <a:gd name="adj" fmla="val 3333"/>
+              <a:gd name="adj" fmla="val 4348"/>
             </a:avLst>
           </a:prstGeom>
           <a:solidFill>
@@ -12703,23 +12470,16 @@
           </a:solidFill>
           <a:ln/>
         </p:spPr>
-        <p:txBody>
-          <a:bodyPr/>
-          <a:lstStyle/>
-          <a:p>
-            <a:endParaRPr lang="ko-KR" altLang="en-US"/>
-          </a:p>
-        </p:txBody>
-      </p:sp>
-      <p:sp>
-        <p:nvSpPr>
-          <p:cNvPr id="14" name="Text 12"/>
-          <p:cNvSpPr/>
-          <p:nvPr/>
-        </p:nvSpPr>
-        <p:spPr>
-          <a:xfrm>
-            <a:off x="768096" y="3236976"/>
+      </p:sp>
+      <p:sp>
+        <p:nvSpPr>
+          <p:cNvPr id="17" name="Text 15"/>
+          <p:cNvSpPr/>
+          <p:nvPr/>
+        </p:nvSpPr>
+        <p:spPr>
+          <a:xfrm>
+            <a:off x="768096" y="4014216"/>
             <a:ext cx="10652760" cy="219456"/>
           </a:xfrm>
           <a:prstGeom prst="rect">
@@ -12732,7 +12492,7 @@
           <a:bodyPr wrap="square" lIns="0" tIns="0" rIns="0" bIns="0" rtlCol="0" anchor="ctr"/>
           <a:lstStyle/>
           <a:p>
-            <a:pPr marL="0" indent="0">
+            <a:pPr indent="0" marL="0">
               <a:buNone/>
             </a:pPr>
             <a:r>
@@ -12752,14 +12512,14 @@
       </p:sp>
       <p:sp>
         <p:nvSpPr>
-          <p:cNvPr id="15" name="Text 13"/>
-          <p:cNvSpPr/>
-          <p:nvPr/>
-        </p:nvSpPr>
-        <p:spPr>
-          <a:xfrm>
-            <a:off x="768096" y="3511296"/>
-            <a:ext cx="10652760" cy="822960"/>
+          <p:cNvPr id="18" name="Text 16"/>
+          <p:cNvSpPr/>
+          <p:nvPr/>
+        </p:nvSpPr>
+        <p:spPr>
+          <a:xfrm>
+            <a:off x="768096" y="4288536"/>
+            <a:ext cx="10652760" cy="502920"/>
           </a:xfrm>
           <a:prstGeom prst="rect">
             <a:avLst/>
@@ -12771,7 +12531,7 @@
           <a:bodyPr wrap="square" lIns="0" tIns="0" rIns="0" bIns="0" rtlCol="0" anchor="t"/>
           <a:lstStyle/>
           <a:p>
-            <a:pPr marL="0" indent="0">
+            <a:pPr indent="0" marL="0">
               <a:lnSpc>
                 <a:spcPts val="2890"/>
               </a:lnSpc>
@@ -12794,18 +12554,18 @@
       </p:sp>
       <p:sp>
         <p:nvSpPr>
-          <p:cNvPr id="16" name="Shape 14"/>
-          <p:cNvSpPr/>
-          <p:nvPr/>
-        </p:nvSpPr>
-        <p:spPr>
-          <a:xfrm>
-            <a:off x="530352" y="4754880"/>
-            <a:ext cx="5349240" cy="1143000"/>
+          <p:cNvPr id="19" name="Shape 17"/>
+          <p:cNvSpPr/>
+          <p:nvPr/>
+        </p:nvSpPr>
+        <p:spPr>
+          <a:xfrm>
+            <a:off x="530352" y="5120640"/>
+            <a:ext cx="5349240" cy="1051560"/>
           </a:xfrm>
           <a:prstGeom prst="roundRect">
             <a:avLst>
-              <a:gd name="adj" fmla="val 4400"/>
+              <a:gd name="adj" fmla="val 4783"/>
             </a:avLst>
           </a:prstGeom>
           <a:solidFill>
@@ -12818,23 +12578,16 @@
             <a:prstDash val="solid"/>
           </a:ln>
         </p:spPr>
-        <p:txBody>
-          <a:bodyPr/>
-          <a:lstStyle/>
-          <a:p>
-            <a:endParaRPr lang="ko-KR" altLang="en-US"/>
-          </a:p>
-        </p:txBody>
-      </p:sp>
-      <p:sp>
-        <p:nvSpPr>
-          <p:cNvPr id="17" name="Text 15"/>
-          <p:cNvSpPr/>
-          <p:nvPr/>
-        </p:nvSpPr>
-        <p:spPr>
-          <a:xfrm>
-            <a:off x="713232" y="4919472"/>
+      </p:sp>
+      <p:sp>
+        <p:nvSpPr>
+          <p:cNvPr id="20" name="Text 18"/>
+          <p:cNvSpPr/>
+          <p:nvPr/>
+        </p:nvSpPr>
+        <p:spPr>
+          <a:xfrm>
+            <a:off x="713232" y="5285232"/>
             <a:ext cx="4983480" cy="402336"/>
           </a:xfrm>
           <a:prstGeom prst="rect">
@@ -12847,7 +12600,7 @@
           <a:bodyPr wrap="square" lIns="0" tIns="0" rIns="0" bIns="0" rtlCol="0" anchor="ctr"/>
           <a:lstStyle/>
           <a:p>
-            <a:pPr marL="0" indent="0">
+            <a:pPr indent="0" marL="0">
               <a:buNone/>
             </a:pPr>
             <a:r>
@@ -12867,14 +12620,14 @@
       </p:sp>
       <p:sp>
         <p:nvSpPr>
-          <p:cNvPr id="18" name="Text 16"/>
-          <p:cNvSpPr/>
-          <p:nvPr/>
-        </p:nvSpPr>
-        <p:spPr>
-          <a:xfrm>
-            <a:off x="713232" y="5413248"/>
-            <a:ext cx="4983480" cy="338328"/>
+          <p:cNvPr id="21" name="Text 19"/>
+          <p:cNvSpPr/>
+          <p:nvPr/>
+        </p:nvSpPr>
+        <p:spPr>
+          <a:xfrm>
+            <a:off x="713232" y="5779008"/>
+            <a:ext cx="4983480" cy="246888"/>
           </a:xfrm>
           <a:prstGeom prst="rect">
             <a:avLst/>
@@ -12886,14 +12639,14 @@
           <a:bodyPr wrap="square" lIns="0" tIns="0" rIns="0" bIns="0" rtlCol="0" anchor="t"/>
           <a:lstStyle/>
           <a:p>
-            <a:pPr marL="0" indent="0">
+            <a:pPr indent="0" marL="0">
               <a:lnSpc>
                 <a:spcPts val="1900"/>
               </a:lnSpc>
               <a:buNone/>
             </a:pPr>
             <a:r>
-              <a:rPr lang="en-US" sz="1240" dirty="0">
+              <a:rPr lang="en-US" sz="1300" dirty="0">
                 <a:solidFill>
                   <a:srgbClr val="6C7078"/>
                 </a:solidFill>
@@ -12901,26 +12654,26 @@
                 <a:ea typeface="IBM Plex Sans KR" pitchFamily="34" charset="-122"/>
                 <a:cs typeface="IBM Plex Sans KR" pitchFamily="34" charset="-120"/>
               </a:rPr>
-              <a:t>IndexError 는 자리 번호가 잘못됐다는 말</a:t>
-            </a:r>
-            <a:endParaRPr lang="en-US" sz="1240" dirty="0"/>
-          </a:p>
-        </p:txBody>
-      </p:sp>
-      <p:sp>
-        <p:nvSpPr>
-          <p:cNvPr id="19" name="Shape 17"/>
-          <p:cNvSpPr/>
-          <p:nvPr/>
-        </p:nvSpPr>
-        <p:spPr>
-          <a:xfrm>
-            <a:off x="6309360" y="4754880"/>
-            <a:ext cx="5349240" cy="1143000"/>
+              <a:t>자리 번호가 잘못됐다는 말</a:t>
+            </a:r>
+            <a:endParaRPr lang="en-US" sz="1300" dirty="0"/>
+          </a:p>
+        </p:txBody>
+      </p:sp>
+      <p:sp>
+        <p:nvSpPr>
+          <p:cNvPr id="22" name="Shape 20"/>
+          <p:cNvSpPr/>
+          <p:nvPr/>
+        </p:nvSpPr>
+        <p:spPr>
+          <a:xfrm>
+            <a:off x="6309360" y="5120640"/>
+            <a:ext cx="5349240" cy="1051560"/>
           </a:xfrm>
           <a:prstGeom prst="roundRect">
             <a:avLst>
-              <a:gd name="adj" fmla="val 4400"/>
+              <a:gd name="adj" fmla="val 4783"/>
             </a:avLst>
           </a:prstGeom>
           <a:solidFill>
@@ -12933,23 +12686,16 @@
             <a:prstDash val="solid"/>
           </a:ln>
         </p:spPr>
-        <p:txBody>
-          <a:bodyPr/>
-          <a:lstStyle/>
-          <a:p>
-            <a:endParaRPr lang="ko-KR" altLang="en-US"/>
-          </a:p>
-        </p:txBody>
-      </p:sp>
-      <p:sp>
-        <p:nvSpPr>
-          <p:cNvPr id="20" name="Text 18"/>
-          <p:cNvSpPr/>
-          <p:nvPr/>
-        </p:nvSpPr>
-        <p:spPr>
-          <a:xfrm>
-            <a:off x="6492240" y="4919472"/>
+      </p:sp>
+      <p:sp>
+        <p:nvSpPr>
+          <p:cNvPr id="23" name="Text 21"/>
+          <p:cNvSpPr/>
+          <p:nvPr/>
+        </p:nvSpPr>
+        <p:spPr>
+          <a:xfrm>
+            <a:off x="6492240" y="5285232"/>
             <a:ext cx="4983480" cy="402336"/>
           </a:xfrm>
           <a:prstGeom prst="rect">
@@ -12962,7 +12708,7 @@
           <a:bodyPr wrap="square" lIns="0" tIns="0" rIns="0" bIns="0" rtlCol="0" anchor="ctr"/>
           <a:lstStyle/>
           <a:p>
-            <a:pPr marL="0" indent="0">
+            <a:pPr indent="0" marL="0">
               <a:buNone/>
             </a:pPr>
             <a:r>
@@ -12982,14 +12728,14 @@
       </p:sp>
       <p:sp>
         <p:nvSpPr>
-          <p:cNvPr id="21" name="Text 19"/>
-          <p:cNvSpPr/>
-          <p:nvPr/>
-        </p:nvSpPr>
-        <p:spPr>
-          <a:xfrm>
-            <a:off x="6492240" y="5413248"/>
-            <a:ext cx="4983480" cy="338328"/>
+          <p:cNvPr id="24" name="Text 22"/>
+          <p:cNvSpPr/>
+          <p:nvPr/>
+        </p:nvSpPr>
+        <p:spPr>
+          <a:xfrm>
+            <a:off x="6492240" y="5779008"/>
+            <a:ext cx="4983480" cy="246888"/>
           </a:xfrm>
           <a:prstGeom prst="rect">
             <a:avLst/>
@@ -13001,14 +12747,14 @@
           <a:bodyPr wrap="square" lIns="0" tIns="0" rIns="0" bIns="0" rtlCol="0" anchor="t"/>
           <a:lstStyle/>
           <a:p>
-            <a:pPr marL="0" indent="0">
+            <a:pPr indent="0" marL="0">
               <a:lnSpc>
                 <a:spcPts val="1900"/>
               </a:lnSpc>
               <a:buNone/>
             </a:pPr>
             <a:r>
-              <a:rPr lang="en-US" sz="1240" dirty="0">
+              <a:rPr lang="en-US" sz="1300" dirty="0">
                 <a:solidFill>
                   <a:srgbClr val="6C7078"/>
                 </a:solidFill>
@@ -13016,9 +12762,9 @@
                 <a:ea typeface="IBM Plex Sans KR" pitchFamily="34" charset="-122"/>
                 <a:cs typeface="IBM Plex Sans KR" pitchFamily="34" charset="-120"/>
               </a:rPr>
-              <a:t>out of range 는 그 범위를 벗어났다는 말</a:t>
-            </a:r>
-            <a:endParaRPr lang="en-US" sz="1240" dirty="0"/>
+              <a:t>그 범위를 벗어났다는 말</a:t>
+            </a:r>
+            <a:endParaRPr lang="en-US" sz="1300" dirty="0"/>
           </a:p>
         </p:txBody>
       </p:sp>
@@ -13038,7 +12784,6 @@
         <a:solidFill>
           <a:srgbClr val="FFFFFF"/>
         </a:solidFill>
-        <a:effectLst/>
       </p:bgPr>
     </p:bg>
     <p:spTree>
@@ -13076,7 +12821,7 @@
           <a:bodyPr wrap="square" lIns="0" tIns="0" rIns="0" bIns="0" rtlCol="0" anchor="ctr"/>
           <a:lstStyle/>
           <a:p>
-            <a:pPr marL="0" indent="0">
+            <a:pPr indent="0" marL="0">
               <a:buNone/>
             </a:pPr>
             <a:r>
@@ -13115,13 +12860,6 @@
           </a:solidFill>
           <a:ln/>
         </p:spPr>
-        <p:txBody>
-          <a:bodyPr/>
-          <a:lstStyle/>
-          <a:p>
-            <a:endParaRPr lang="ko-KR" altLang="en-US"/>
-          </a:p>
-        </p:txBody>
       </p:sp>
       <p:sp>
         <p:nvSpPr>
@@ -13144,7 +12882,7 @@
           <a:bodyPr wrap="square" lIns="0" tIns="0" rIns="0" bIns="0" rtlCol="0" anchor="ctr"/>
           <a:lstStyle/>
           <a:p>
-            <a:pPr marL="0" indent="0" algn="ctr">
+            <a:pPr algn="ctr" indent="0" marL="0">
               <a:buNone/>
             </a:pPr>
             <a:r>
@@ -13183,7 +12921,7 @@
           <a:bodyPr wrap="square" lIns="0" tIns="0" rIns="0" bIns="0" rtlCol="0" anchor="ctr"/>
           <a:lstStyle/>
           <a:p>
-            <a:pPr marL="0" indent="0">
+            <a:pPr indent="0" marL="0">
               <a:buNone/>
             </a:pPr>
             <a:r>
@@ -13220,13 +12958,6 @@
           </a:solidFill>
           <a:ln/>
         </p:spPr>
-        <p:txBody>
-          <a:bodyPr/>
-          <a:lstStyle/>
-          <a:p>
-            <a:endParaRPr lang="ko-KR" altLang="en-US"/>
-          </a:p>
-        </p:txBody>
       </p:sp>
       <p:sp>
         <p:nvSpPr>
@@ -13249,7 +12980,7 @@
           <a:bodyPr wrap="square" lIns="0" tIns="0" rIns="0" bIns="0" rtlCol="0" anchor="ctr"/>
           <a:lstStyle/>
           <a:p>
-            <a:pPr marL="0" indent="0" algn="r">
+            <a:pPr algn="r" indent="0" marL="0">
               <a:buNone/>
             </a:pPr>
             <a:r>
@@ -13288,7 +13019,7 @@
           <a:bodyPr wrap="square" lIns="0" tIns="0" rIns="0" bIns="0" rtlCol="0" anchor="ctr"/>
           <a:lstStyle/>
           <a:p>
-            <a:pPr marL="0" indent="0">
+            <a:pPr indent="0" marL="0">
               <a:buNone/>
             </a:pPr>
             <a:r>
@@ -13327,7 +13058,7 @@
           <a:bodyPr wrap="square" lIns="0" tIns="0" rIns="0" bIns="0" rtlCol="0" anchor="ctr"/>
           <a:lstStyle/>
           <a:p>
-            <a:pPr marL="0" indent="0" algn="r">
+            <a:pPr algn="r" indent="0" marL="0">
               <a:buNone/>
             </a:pPr>
             <a:r>
@@ -13366,13 +13097,6 @@
           </a:solidFill>
           <a:ln/>
         </p:spPr>
-        <p:txBody>
-          <a:bodyPr/>
-          <a:lstStyle/>
-          <a:p>
-            <a:endParaRPr lang="ko-KR" altLang="en-US"/>
-          </a:p>
-        </p:txBody>
       </p:sp>
       <p:sp>
         <p:nvSpPr>
@@ -13395,7 +13119,7 @@
           <a:bodyPr wrap="square" lIns="0" tIns="0" rIns="0" bIns="0" rtlCol="0" anchor="ctr"/>
           <a:lstStyle/>
           <a:p>
-            <a:pPr marL="0" indent="0">
+            <a:pPr indent="0" marL="0">
               <a:buNone/>
             </a:pPr>
             <a:r>
@@ -13434,7 +13158,7 @@
           <a:bodyPr wrap="square" lIns="0" tIns="0" rIns="0" bIns="0" rtlCol="0" anchor="t"/>
           <a:lstStyle/>
           <a:p>
-            <a:pPr marL="0" indent="0">
+            <a:pPr indent="0" marL="0">
               <a:lnSpc>
                 <a:spcPts val="2720"/>
               </a:lnSpc>
@@ -13454,7 +13178,7 @@
             <a:endParaRPr lang="en-US" sz="1600" dirty="0"/>
           </a:p>
           <a:p>
-            <a:pPr marL="0" indent="0">
+            <a:pPr indent="0" marL="0">
               <a:lnSpc>
                 <a:spcPts val="2720"/>
               </a:lnSpc>
@@ -13474,7 +13198,7 @@
             <a:endParaRPr lang="en-US" sz="1600" dirty="0"/>
           </a:p>
           <a:p>
-            <a:pPr marL="0" indent="0">
+            <a:pPr indent="0" marL="0">
               <a:lnSpc>
                 <a:spcPts val="2720"/>
               </a:lnSpc>
@@ -13516,13 +13240,6 @@
           </a:solidFill>
           <a:ln/>
         </p:spPr>
-        <p:txBody>
-          <a:bodyPr/>
-          <a:lstStyle/>
-          <a:p>
-            <a:endParaRPr lang="ko-KR" altLang="en-US"/>
-          </a:p>
-        </p:txBody>
       </p:sp>
       <p:sp>
         <p:nvSpPr>
@@ -13545,7 +13262,7 @@
           <a:bodyPr wrap="square" lIns="0" tIns="0" rIns="0" bIns="0" rtlCol="0" anchor="ctr"/>
           <a:lstStyle/>
           <a:p>
-            <a:pPr marL="0" indent="0">
+            <a:pPr indent="0" marL="0">
               <a:buNone/>
             </a:pPr>
             <a:r>
@@ -13584,7 +13301,7 @@
           <a:bodyPr wrap="square" lIns="0" tIns="0" rIns="0" bIns="0" rtlCol="0" anchor="t"/>
           <a:lstStyle/>
           <a:p>
-            <a:pPr marL="0" indent="0">
+            <a:pPr indent="0" marL="0">
               <a:lnSpc>
                 <a:spcPts val="2720"/>
               </a:lnSpc>
@@ -13604,7 +13321,7 @@
             <a:endParaRPr lang="en-US" sz="1600" dirty="0"/>
           </a:p>
           <a:p>
-            <a:pPr marL="0" indent="0">
+            <a:pPr indent="0" marL="0">
               <a:lnSpc>
                 <a:spcPts val="2720"/>
               </a:lnSpc>
@@ -13646,7 +13363,7 @@
           <a:bodyPr wrap="square" lIns="0" tIns="0" rIns="0" bIns="0" rtlCol="0" anchor="ctr"/>
           <a:lstStyle/>
           <a:p>
-            <a:pPr marL="0" indent="0" algn="ctr">
+            <a:pPr algn="ctr" indent="0" marL="0">
               <a:buNone/>
             </a:pPr>
             <a:r>
@@ -13690,13 +13407,6 @@
             <a:prstDash val="solid"/>
           </a:ln>
         </p:spPr>
-        <p:txBody>
-          <a:bodyPr/>
-          <a:lstStyle/>
-          <a:p>
-            <a:endParaRPr lang="ko-KR" altLang="en-US"/>
-          </a:p>
-        </p:txBody>
       </p:sp>
       <p:sp>
         <p:nvSpPr>
@@ -13719,7 +13429,7 @@
           <a:bodyPr wrap="square" lIns="0" tIns="0" rIns="0" bIns="0" rtlCol="0" anchor="ctr"/>
           <a:lstStyle/>
           <a:p>
-            <a:pPr marL="0" indent="0" algn="ctr">
+            <a:pPr algn="ctr" indent="0" marL="0">
               <a:buNone/>
             </a:pPr>
             <a:r>
@@ -13753,7 +13463,6 @@
         <a:solidFill>
           <a:srgbClr val="FFFFFF"/>
         </a:solidFill>
-        <a:effectLst/>
       </p:bgPr>
     </p:bg>
     <p:spTree>
@@ -13791,7 +13500,7 @@
           <a:bodyPr wrap="square" lIns="0" tIns="0" rIns="0" bIns="0" rtlCol="0" anchor="ctr"/>
           <a:lstStyle/>
           <a:p>
-            <a:pPr marL="0" indent="0">
+            <a:pPr indent="0" marL="0">
               <a:buNone/>
             </a:pPr>
             <a:r>
@@ -13830,13 +13539,6 @@
           </a:solidFill>
           <a:ln/>
         </p:spPr>
-        <p:txBody>
-          <a:bodyPr/>
-          <a:lstStyle/>
-          <a:p>
-            <a:endParaRPr lang="ko-KR" altLang="en-US"/>
-          </a:p>
-        </p:txBody>
       </p:sp>
       <p:sp>
         <p:nvSpPr>
@@ -13859,7 +13561,7 @@
           <a:bodyPr wrap="square" lIns="0" tIns="0" rIns="0" bIns="0" rtlCol="0" anchor="ctr"/>
           <a:lstStyle/>
           <a:p>
-            <a:pPr marL="0" indent="0" algn="ctr">
+            <a:pPr algn="ctr" indent="0" marL="0">
               <a:buNone/>
             </a:pPr>
             <a:r>
@@ -13898,7 +13600,7 @@
           <a:bodyPr wrap="square" lIns="0" tIns="0" rIns="0" bIns="0" rtlCol="0" anchor="ctr"/>
           <a:lstStyle/>
           <a:p>
-            <a:pPr marL="0" indent="0">
+            <a:pPr indent="0" marL="0">
               <a:buNone/>
             </a:pPr>
             <a:r>
@@ -13935,13 +13637,6 @@
           </a:solidFill>
           <a:ln/>
         </p:spPr>
-        <p:txBody>
-          <a:bodyPr/>
-          <a:lstStyle/>
-          <a:p>
-            <a:endParaRPr lang="ko-KR" altLang="en-US"/>
-          </a:p>
-        </p:txBody>
       </p:sp>
       <p:sp>
         <p:nvSpPr>
@@ -13964,7 +13659,7 @@
           <a:bodyPr wrap="square" lIns="0" tIns="0" rIns="0" bIns="0" rtlCol="0" anchor="ctr"/>
           <a:lstStyle/>
           <a:p>
-            <a:pPr marL="0" indent="0" algn="r">
+            <a:pPr algn="r" indent="0" marL="0">
               <a:buNone/>
             </a:pPr>
             <a:r>
@@ -14003,7 +13698,7 @@
           <a:bodyPr wrap="square" lIns="0" tIns="0" rIns="0" bIns="0" rtlCol="0" anchor="ctr"/>
           <a:lstStyle/>
           <a:p>
-            <a:pPr marL="0" indent="0">
+            <a:pPr indent="0" marL="0">
               <a:buNone/>
             </a:pPr>
             <a:r>
@@ -14042,7 +13737,7 @@
           <a:bodyPr wrap="square" lIns="0" tIns="0" rIns="0" bIns="0" rtlCol="0" anchor="ctr"/>
           <a:lstStyle/>
           <a:p>
-            <a:pPr marL="0" indent="0" algn="r">
+            <a:pPr algn="r" indent="0" marL="0">
               <a:buNone/>
             </a:pPr>
             <a:r>
@@ -14081,13 +13776,6 @@
           </a:solidFill>
           <a:ln/>
         </p:spPr>
-        <p:txBody>
-          <a:bodyPr/>
-          <a:lstStyle/>
-          <a:p>
-            <a:endParaRPr lang="ko-KR" altLang="en-US"/>
-          </a:p>
-        </p:txBody>
       </p:sp>
       <p:sp>
         <p:nvSpPr>
@@ -14110,7 +13798,7 @@
           <a:bodyPr wrap="square" lIns="0" tIns="0" rIns="0" bIns="0" rtlCol="0" anchor="t"/>
           <a:lstStyle/>
           <a:p>
-            <a:pPr marL="0" indent="0">
+            <a:pPr indent="0" marL="0">
               <a:lnSpc>
                 <a:spcPts val="2720"/>
               </a:lnSpc>
@@ -14130,7 +13818,7 @@
             <a:endParaRPr lang="en-US" sz="1600" dirty="0"/>
           </a:p>
           <a:p>
-            <a:pPr marL="0" indent="0">
+            <a:pPr indent="0" marL="0">
               <a:lnSpc>
                 <a:spcPts val="2720"/>
               </a:lnSpc>
@@ -14150,7 +13838,7 @@
             <a:endParaRPr lang="en-US" sz="1600" dirty="0"/>
           </a:p>
           <a:p>
-            <a:pPr marL="0" indent="0">
+            <a:pPr indent="0" marL="0">
               <a:lnSpc>
                 <a:spcPts val="2720"/>
               </a:lnSpc>
@@ -14170,7 +13858,7 @@
             <a:endParaRPr lang="en-US" sz="1600" dirty="0"/>
           </a:p>
           <a:p>
-            <a:pPr marL="0" indent="0">
+            <a:pPr indent="0" marL="0">
               <a:lnSpc>
                 <a:spcPts val="2720"/>
               </a:lnSpc>
@@ -14190,7 +13878,7 @@
             <a:endParaRPr lang="en-US" sz="1600" dirty="0"/>
           </a:p>
           <a:p>
-            <a:pPr marL="0" indent="0">
+            <a:pPr indent="0" marL="0">
               <a:lnSpc>
                 <a:spcPts val="2720"/>
               </a:lnSpc>
@@ -14237,13 +13925,6 @@
             <a:prstDash val="solid"/>
           </a:ln>
         </p:spPr>
-        <p:txBody>
-          <a:bodyPr/>
-          <a:lstStyle/>
-          <a:p>
-            <a:endParaRPr lang="ko-KR" altLang="en-US"/>
-          </a:p>
-        </p:txBody>
       </p:sp>
       <p:sp>
         <p:nvSpPr>
@@ -14266,7 +13947,7 @@
           <a:bodyPr wrap="square" lIns="0" tIns="0" rIns="0" bIns="0" rtlCol="0" anchor="ctr"/>
           <a:lstStyle/>
           <a:p>
-            <a:pPr marL="0" indent="0">
+            <a:pPr indent="0" marL="0">
               <a:buNone/>
             </a:pPr>
             <a:r>
@@ -14305,7 +13986,7 @@
           <a:bodyPr wrap="square" lIns="0" tIns="0" rIns="0" bIns="0" rtlCol="0" anchor="t"/>
           <a:lstStyle/>
           <a:p>
-            <a:pPr marL="0" indent="0">
+            <a:pPr indent="0" marL="0">
               <a:lnSpc>
                 <a:spcPts val="1900"/>
               </a:lnSpc>
@@ -14352,13 +14033,6 @@
             <a:prstDash val="solid"/>
           </a:ln>
         </p:spPr>
-        <p:txBody>
-          <a:bodyPr/>
-          <a:lstStyle/>
-          <a:p>
-            <a:endParaRPr lang="ko-KR" altLang="en-US"/>
-          </a:p>
-        </p:txBody>
       </p:sp>
       <p:sp>
         <p:nvSpPr>
@@ -14381,7 +14055,7 @@
           <a:bodyPr wrap="square" lIns="0" tIns="0" rIns="0" bIns="0" rtlCol="0" anchor="ctr"/>
           <a:lstStyle/>
           <a:p>
-            <a:pPr marL="0" indent="0">
+            <a:pPr indent="0" marL="0">
               <a:buNone/>
             </a:pPr>
             <a:r>
@@ -14420,7 +14094,7 @@
           <a:bodyPr wrap="square" lIns="0" tIns="0" rIns="0" bIns="0" rtlCol="0" anchor="t"/>
           <a:lstStyle/>
           <a:p>
-            <a:pPr marL="0" indent="0">
+            <a:pPr indent="0" marL="0">
               <a:lnSpc>
                 <a:spcPts val="1900"/>
               </a:lnSpc>
@@ -14462,13 +14136,6 @@
           </a:solidFill>
           <a:ln/>
         </p:spPr>
-        <p:txBody>
-          <a:bodyPr/>
-          <a:lstStyle/>
-          <a:p>
-            <a:endParaRPr lang="ko-KR" altLang="en-US"/>
-          </a:p>
-        </p:txBody>
       </p:sp>
       <p:sp>
         <p:nvSpPr>
@@ -14491,7 +14158,7 @@
           <a:bodyPr wrap="square" lIns="0" tIns="0" rIns="0" bIns="0" rtlCol="0" anchor="t"/>
           <a:lstStyle/>
           <a:p>
-            <a:pPr marL="0" indent="0">
+            <a:pPr indent="0" marL="0">
               <a:lnSpc>
                 <a:spcPts val="3060"/>
               </a:lnSpc>
@@ -14538,13 +14205,6 @@
             <a:prstDash val="solid"/>
           </a:ln>
         </p:spPr>
-        <p:txBody>
-          <a:bodyPr/>
-          <a:lstStyle/>
-          <a:p>
-            <a:endParaRPr lang="ko-KR" altLang="en-US"/>
-          </a:p>
-        </p:txBody>
       </p:sp>
       <p:sp>
         <p:nvSpPr>
@@ -14567,7 +14227,7 @@
           <a:bodyPr wrap="square" lIns="0" tIns="0" rIns="0" bIns="0" rtlCol="0" anchor="ctr"/>
           <a:lstStyle/>
           <a:p>
-            <a:pPr marL="0" indent="0" algn="ctr">
+            <a:pPr algn="ctr" indent="0" marL="0">
               <a:buNone/>
             </a:pPr>
             <a:r>
@@ -14886,319 +14546,4 @@
     </a:ext>
   </a:extLst>
 </a:theme>
-</file>
-
-<file path=ppt/theme/theme2.xml><?xml version="1.0" encoding="utf-8"?>
-<a:theme xmlns:a="http://schemas.openxmlformats.org/drawingml/2006/main" name="Office 테마">
-  <a:themeElements>
-    <a:clrScheme name="Office">
-      <a:dk1>
-        <a:sysClr val="windowText" lastClr="000000"/>
-      </a:dk1>
-      <a:lt1>
-        <a:sysClr val="window" lastClr="FFFFFF"/>
-      </a:lt1>
-      <a:dk2>
-        <a:srgbClr val="0E2841"/>
-      </a:dk2>
-      <a:lt2>
-        <a:srgbClr val="E8E8E8"/>
-      </a:lt2>
-      <a:accent1>
-        <a:srgbClr val="156082"/>
-      </a:accent1>
-      <a:accent2>
-        <a:srgbClr val="E97132"/>
-      </a:accent2>
-      <a:accent3>
-        <a:srgbClr val="196B24"/>
-      </a:accent3>
-      <a:accent4>
-        <a:srgbClr val="0F9ED5"/>
-      </a:accent4>
-      <a:accent5>
-        <a:srgbClr val="A02B93"/>
-      </a:accent5>
-      <a:accent6>
-        <a:srgbClr val="4EA72E"/>
-      </a:accent6>
-      <a:hlink>
-        <a:srgbClr val="467886"/>
-      </a:hlink>
-      <a:folHlink>
-        <a:srgbClr val="96607D"/>
-      </a:folHlink>
-    </a:clrScheme>
-    <a:fontScheme name="Office">
-      <a:majorFont>
-        <a:latin typeface="맑은 고딕" panose="02110004020202020204"/>
-        <a:ea typeface=""/>
-        <a:cs typeface=""/>
-        <a:font script="Jpan" typeface="游ゴシック Light"/>
-        <a:font script="Hang" typeface="맑은 고딕"/>
-        <a:font script="Hans" typeface="等线 Light"/>
-        <a:font script="Hant" typeface="新細明體"/>
-        <a:font script="Arab" typeface="Times New Roman"/>
-        <a:font script="Hebr" typeface="Times New Roman"/>
-        <a:font script="Thai" typeface="Angsana New"/>
-        <a:font script="Ethi" typeface="Nyala"/>
-        <a:font script="Beng" typeface="Vrinda"/>
-        <a:font script="Gujr" typeface="Shruti"/>
-        <a:font script="Khmr" typeface="MoolBoran"/>
-        <a:font script="Knda" typeface="Tunga"/>
-        <a:font script="Guru" typeface="Raavi"/>
-        <a:font script="Cans" typeface="Euphemia"/>
-        <a:font script="Cher" typeface="Plantagenet Cherokee"/>
-        <a:font script="Yiii" typeface="Microsoft Yi Baiti"/>
-        <a:font script="Tibt" typeface="Microsoft Himalaya"/>
-        <a:font script="Thaa" typeface="MV Boli"/>
-        <a:font script="Deva" typeface="Mangal"/>
-        <a:font script="Telu" typeface="Gautami"/>
-        <a:font script="Taml" typeface="Latha"/>
-        <a:font script="Syrc" typeface="Estrangelo Edessa"/>
-        <a:font script="Orya" typeface="Kalinga"/>
-        <a:font script="Mlym" typeface="Kartika"/>
-        <a:font script="Laoo" typeface="DokChampa"/>
-        <a:font script="Sinh" typeface="Iskoola Pota"/>
-        <a:font script="Mong" typeface="Mongolian Baiti"/>
-        <a:font script="Viet" typeface="Times New Roman"/>
-        <a:font script="Uigh" typeface="Microsoft Uighur"/>
-        <a:font script="Geor" typeface="Sylfaen"/>
-        <a:font script="Armn" typeface="Arial"/>
-        <a:font script="Bugi" typeface="Leelawadee UI"/>
-        <a:font script="Bopo" typeface="Microsoft JhengHei"/>
-        <a:font script="Java" typeface="Javanese Text"/>
-        <a:font script="Lisu" typeface="Segoe UI"/>
-        <a:font script="Mymr" typeface="Myanmar Text"/>
-        <a:font script="Nkoo" typeface="Ebrima"/>
-        <a:font script="Olck" typeface="Nirmala UI"/>
-        <a:font script="Osma" typeface="Ebrima"/>
-        <a:font script="Phag" typeface="Phagspa"/>
-        <a:font script="Syrn" typeface="Estrangelo Edessa"/>
-        <a:font script="Syrj" typeface="Estrangelo Edessa"/>
-        <a:font script="Syre" typeface="Estrangelo Edessa"/>
-        <a:font script="Sora" typeface="Nirmala UI"/>
-        <a:font script="Tale" typeface="Microsoft Tai Le"/>
-        <a:font script="Talu" typeface="Microsoft New Tai Lue"/>
-        <a:font script="Tfng" typeface="Ebrima"/>
-      </a:majorFont>
-      <a:minorFont>
-        <a:latin typeface="맑은 고딕" panose="02110004020202020204"/>
-        <a:ea typeface=""/>
-        <a:cs typeface=""/>
-        <a:font script="Jpan" typeface="游ゴシック"/>
-        <a:font script="Hang" typeface="맑은 고딕"/>
-        <a:font script="Hans" typeface="等线"/>
-        <a:font script="Hant" typeface="新細明體"/>
-        <a:font script="Arab" typeface="Arial"/>
-        <a:font script="Hebr" typeface="Arial"/>
-        <a:font script="Thai" typeface="Cordia New"/>
-        <a:font script="Ethi" typeface="Nyala"/>
-        <a:font script="Beng" typeface="Vrinda"/>
-        <a:font script="Gujr" typeface="Shruti"/>
-        <a:font script="Khmr" typeface="DaunPenh"/>
-        <a:font script="Knda" typeface="Tunga"/>
-        <a:font script="Guru" typeface="Raavi"/>
-        <a:font script="Cans" typeface="Euphemia"/>
-        <a:font script="Cher" typeface="Plantagenet Cherokee"/>
-        <a:font script="Yiii" typeface="Microsoft Yi Baiti"/>
-        <a:font script="Tibt" typeface="Microsoft Himalaya"/>
-        <a:font script="Thaa" typeface="MV Boli"/>
-        <a:font script="Deva" typeface="Mangal"/>
-        <a:font script="Telu" typeface="Gautami"/>
-        <a:font script="Taml" typeface="Latha"/>
-        <a:font script="Syrc" typeface="Estrangelo Edessa"/>
-        <a:font script="Orya" typeface="Kalinga"/>
-        <a:font script="Mlym" typeface="Kartika"/>
-        <a:font script="Laoo" typeface="DokChampa"/>
-        <a:font script="Sinh" typeface="Iskoola Pota"/>
-        <a:font script="Mong" typeface="Mongolian Baiti"/>
-        <a:font script="Viet" typeface="Arial"/>
-        <a:font script="Uigh" typeface="Microsoft Uighur"/>
-        <a:font script="Geor" typeface="Sylfaen"/>
-        <a:font script="Armn" typeface="Arial"/>
-        <a:font script="Bugi" typeface="Leelawadee UI"/>
-        <a:font script="Bopo" typeface="Microsoft JhengHei"/>
-        <a:font script="Java" typeface="Javanese Text"/>
-        <a:font script="Lisu" typeface="Segoe UI"/>
-        <a:font script="Mymr" typeface="Myanmar Text"/>
-        <a:font script="Nkoo" typeface="Ebrima"/>
-        <a:font script="Olck" typeface="Nirmala UI"/>
-        <a:font script="Osma" typeface="Ebrima"/>
-        <a:font script="Phag" typeface="Phagspa"/>
-        <a:font script="Syrn" typeface="Estrangelo Edessa"/>
-        <a:font script="Syrj" typeface="Estrangelo Edessa"/>
-        <a:font script="Syre" typeface="Estrangelo Edessa"/>
-        <a:font script="Sora" typeface="Nirmala UI"/>
-        <a:font script="Tale" typeface="Microsoft Tai Le"/>
-        <a:font script="Talu" typeface="Microsoft New Tai Lue"/>
-        <a:font script="Tfng" typeface="Ebrima"/>
-      </a:minorFont>
-    </a:fontScheme>
-    <a:fmtScheme name="Office">
-      <a:fillStyleLst>
-        <a:solidFill>
-          <a:schemeClr val="phClr"/>
-        </a:solidFill>
-        <a:gradFill rotWithShape="1">
-          <a:gsLst>
-            <a:gs pos="0">
-              <a:schemeClr val="phClr">
-                <a:lumMod val="110000"/>
-                <a:satMod val="105000"/>
-                <a:tint val="67000"/>
-              </a:schemeClr>
-            </a:gs>
-            <a:gs pos="50000">
-              <a:schemeClr val="phClr">
-                <a:lumMod val="105000"/>
-                <a:satMod val="103000"/>
-                <a:tint val="73000"/>
-              </a:schemeClr>
-            </a:gs>
-            <a:gs pos="100000">
-              <a:schemeClr val="phClr">
-                <a:lumMod val="105000"/>
-                <a:satMod val="109000"/>
-                <a:tint val="81000"/>
-              </a:schemeClr>
-            </a:gs>
-          </a:gsLst>
-          <a:lin ang="5400000" scaled="0"/>
-        </a:gradFill>
-        <a:gradFill rotWithShape="1">
-          <a:gsLst>
-            <a:gs pos="0">
-              <a:schemeClr val="phClr">
-                <a:satMod val="103000"/>
-                <a:lumMod val="102000"/>
-                <a:tint val="94000"/>
-              </a:schemeClr>
-            </a:gs>
-            <a:gs pos="50000">
-              <a:schemeClr val="phClr">
-                <a:satMod val="110000"/>
-                <a:lumMod val="100000"/>
-                <a:shade val="100000"/>
-              </a:schemeClr>
-            </a:gs>
-            <a:gs pos="100000">
-              <a:schemeClr val="phClr">
-                <a:lumMod val="99000"/>
-                <a:satMod val="120000"/>
-                <a:shade val="78000"/>
-              </a:schemeClr>
-            </a:gs>
-          </a:gsLst>
-          <a:lin ang="5400000" scaled="0"/>
-        </a:gradFill>
-      </a:fillStyleLst>
-      <a:lnStyleLst>
-        <a:ln w="12700" cap="flat" cmpd="sng" algn="ctr">
-          <a:solidFill>
-            <a:schemeClr val="phClr"/>
-          </a:solidFill>
-          <a:prstDash val="solid"/>
-          <a:miter lim="800000"/>
-        </a:ln>
-        <a:ln w="19050" cap="flat" cmpd="sng" algn="ctr">
-          <a:solidFill>
-            <a:schemeClr val="phClr"/>
-          </a:solidFill>
-          <a:prstDash val="solid"/>
-          <a:miter lim="800000"/>
-        </a:ln>
-        <a:ln w="25400" cap="flat" cmpd="sng" algn="ctr">
-          <a:solidFill>
-            <a:schemeClr val="phClr"/>
-          </a:solidFill>
-          <a:prstDash val="solid"/>
-          <a:miter lim="800000"/>
-        </a:ln>
-      </a:lnStyleLst>
-      <a:effectStyleLst>
-        <a:effectStyle>
-          <a:effectLst/>
-        </a:effectStyle>
-        <a:effectStyle>
-          <a:effectLst/>
-        </a:effectStyle>
-        <a:effectStyle>
-          <a:effectLst>
-            <a:outerShdw blurRad="57150" dist="19050" dir="5400000" algn="ctr" rotWithShape="0">
-              <a:srgbClr val="000000">
-                <a:alpha val="63000"/>
-              </a:srgbClr>
-            </a:outerShdw>
-          </a:effectLst>
-        </a:effectStyle>
-      </a:effectStyleLst>
-      <a:bgFillStyleLst>
-        <a:solidFill>
-          <a:schemeClr val="phClr"/>
-        </a:solidFill>
-        <a:solidFill>
-          <a:schemeClr val="phClr">
-            <a:tint val="95000"/>
-            <a:satMod val="170000"/>
-          </a:schemeClr>
-        </a:solidFill>
-        <a:gradFill rotWithShape="1">
-          <a:gsLst>
-            <a:gs pos="0">
-              <a:schemeClr val="phClr">
-                <a:tint val="93000"/>
-                <a:satMod val="150000"/>
-                <a:shade val="98000"/>
-                <a:lumMod val="102000"/>
-              </a:schemeClr>
-            </a:gs>
-            <a:gs pos="50000">
-              <a:schemeClr val="phClr">
-                <a:tint val="98000"/>
-                <a:satMod val="130000"/>
-                <a:shade val="90000"/>
-                <a:lumMod val="103000"/>
-              </a:schemeClr>
-            </a:gs>
-            <a:gs pos="100000">
-              <a:schemeClr val="phClr">
-                <a:shade val="63000"/>
-                <a:satMod val="120000"/>
-              </a:schemeClr>
-            </a:gs>
-          </a:gsLst>
-          <a:lin ang="5400000" scaled="0"/>
-        </a:gradFill>
-      </a:bgFillStyleLst>
-    </a:fmtScheme>
-  </a:themeElements>
-  <a:objectDefaults>
-    <a:lnDef>
-      <a:spPr/>
-      <a:bodyPr/>
-      <a:lstStyle/>
-      <a:style>
-        <a:lnRef idx="2">
-          <a:schemeClr val="accent1"/>
-        </a:lnRef>
-        <a:fillRef idx="0">
-          <a:schemeClr val="accent1"/>
-        </a:fillRef>
-        <a:effectRef idx="1">
-          <a:schemeClr val="accent1"/>
-        </a:effectRef>
-        <a:fontRef idx="minor">
-          <a:schemeClr val="tx1"/>
-        </a:fontRef>
-      </a:style>
-    </a:lnDef>
-  </a:objectDefaults>
-  <a:extraClrSchemeLst/>
-  <a:extLst>
-    <a:ext uri="{05A4C25C-085E-4340-85A3-A5531E510DB2}">
-      <thm15:themeFamily xmlns:thm15="http://schemas.microsoft.com/office/thememl/2012/main" name="Office Theme" id="{2E142A2C-CD16-42D6-873A-C26D2A0506FA}" vid="{1BDDFF52-6CD6-40A5-AB3C-68EB2F1E4D0A}"/>
-    </a:ext>
-  </a:extLst>
-</a:theme>
 </file>
--- a/03/ppt/03-2_여러_값을_묶는_두_가지_방법_v1.pptx
+++ b/03/ppt/03-2_여러_값을_묶는_두_가지_방법_v1.pptx
@@ -4,6 +4,9 @@
   <p:sldMasterIdLst>
     <p:sldMasterId id="2147483648" r:id="rId1"/>
   </p:sldMasterIdLst>
+  <p:notesMasterIdLst>
+    <p:notesMasterId r:id="rId17"/>
+  </p:notesMasterIdLst>
   <p:sldIdLst>
     <p:sldId id="256" r:id="rId2"/>
     <p:sldId id="257" r:id="rId3"/>
@@ -21,11 +24,8 @@
     <p:sldId id="269" r:id="rId15"/>
     <p:sldId id="270" r:id="rId16"/>
   </p:sldIdLst>
-  <p:notesMasterIdLst>
-    <p:notesMasterId r:id="rId17"/>
-  </p:notesMasterIdLst>
-  <p:sldSz cx="12191695" cy="6858000"/>
-  <p:notesSz cx="6858000" cy="12191695"/>
+  <p:sldSz cx="12192000" cy="6858000"/>
+  <p:notesSz cx="6858000" cy="12192000"/>
   <p:defaultTextStyle>
     <a:lvl1pPr marL="0" algn="l" defTabSz="914400" rtl="0" eaLnBrk="1" latinLnBrk="0" hangingPunct="1">
       <a:defRPr sz="1800" kern="1200">
@@ -118,6 +118,11 @@
       </a:defRPr>
     </a:lvl9pPr>
   </p:defaultTextStyle>
+  <p:extLst>
+    <p:ext uri="{EFAFB233-063F-42B5-8137-9DF3F51BA10A}">
+      <p15:sldGuideLst xmlns:p15="http://schemas.microsoft.com/office/powerpoint/2012/main"/>
+    </p:ext>
+  </p:extLst>
 </p:presentation>
 </file>
 
@@ -143,240 +148,16 @@
           <a:chExt cx="0" cy="0"/>
         </a:xfrm>
       </p:grpSpPr>
-      <p:sp>
-        <p:nvSpPr>
-          <p:cNvPr id="2" name="Header Placeholder 1"/>
-          <p:cNvSpPr>
-            <a:spLocks noGrp="1"/>
-          </p:cNvSpPr>
-          <p:nvPr>
-            <p:ph type="hdr" sz="quarter"/>
-          </p:nvPr>
-        </p:nvSpPr>
-        <p:spPr>
-          <a:xfrm>
-            <a:off x="0" y="0"/>
-            <a:ext cx="2971800" cy="458788"/>
-          </a:xfrm>
-          <a:prstGeom prst="rect">
-            <a:avLst/>
-          </a:prstGeom>
-        </p:spPr>
-        <p:txBody>
-          <a:bodyPr vert="horz" lIns="91440" tIns="45720" rIns="91440" bIns="45720" rtlCol="0"/>
-          <a:lstStyle>
-            <a:lvl1pPr algn="l">
-              <a:defRPr sz="1200"/>
-            </a:lvl1pPr>
-          </a:lstStyle>
-          <a:p>
-            <a:endParaRPr lang="en-US"/>
-          </a:p>
-        </p:txBody>
-      </p:sp>
-      <p:sp>
-        <p:nvSpPr>
-          <p:cNvPr id="3" name="Date Placeholder 2"/>
-          <p:cNvSpPr>
-            <a:spLocks noGrp="1"/>
-          </p:cNvSpPr>
-          <p:nvPr>
-            <p:ph type="dt" idx="1"/>
-          </p:nvPr>
-        </p:nvSpPr>
-        <p:spPr>
-          <a:xfrm>
-            <a:off x="3884613" y="0"/>
-            <a:ext cx="2971800" cy="458788"/>
-          </a:xfrm>
-          <a:prstGeom prst="rect">
-            <a:avLst/>
-          </a:prstGeom>
-        </p:spPr>
-        <p:txBody>
-          <a:bodyPr vert="horz" lIns="91440" tIns="45720" rIns="91440" bIns="45720" rtlCol="0"/>
-          <a:lstStyle>
-            <a:lvl1pPr algn="r">
-              <a:defRPr sz="1200"/>
-            </a:lvl1pPr>
-          </a:lstStyle>
-          <a:p>
-            <a:fld id="{5282F153-3F37-0F45-9E97-73ACFA13230C}" type="datetimeFigureOut">
-              <a:rPr lang="en-US"/>
-              <a:t>7/23/19</a:t>
-            </a:fld>
-            <a:endParaRPr lang="en-US"/>
-          </a:p>
-        </p:txBody>
-      </p:sp>
-      <p:sp>
-        <p:nvSpPr>
-          <p:cNvPr id="4" name="Slide Image Placeholder 3"/>
-          <p:cNvSpPr>
-            <a:spLocks noGrp="1" noRot="1" noChangeAspect="1"/>
-          </p:cNvSpPr>
-          <p:nvPr>
-            <p:ph type="sldImg" idx="2"/>
-          </p:nvPr>
-        </p:nvSpPr>
-        <p:spPr>
-          <a:xfrm>
-            <a:off x="685800" y="1143000"/>
-            <a:ext cx="5486400" cy="3086100"/>
-          </a:xfrm>
-          <a:prstGeom prst="rect">
-            <a:avLst/>
-          </a:prstGeom>
-          <a:noFill/>
-          <a:ln w="12700">
-            <a:solidFill>
-              <a:prstClr val="black"/>
-            </a:solidFill>
-          </a:ln>
-        </p:spPr>
-        <p:txBody>
-          <a:bodyPr vert="horz" lIns="91440" tIns="45720" rIns="91440" bIns="45720" rtlCol="0" anchor="ctr"/>
-          <a:lstStyle/>
-          <a:p>
-            <a:endParaRPr lang="en-US"/>
-          </a:p>
-        </p:txBody>
-      </p:sp>
-      <p:sp>
-        <p:nvSpPr>
-          <p:cNvPr id="5" name="Notes Placeholder 4"/>
-          <p:cNvSpPr>
-            <a:spLocks noGrp="1"/>
-          </p:cNvSpPr>
-          <p:nvPr>
-            <p:ph type="body" sz="quarter" idx="3"/>
-          </p:nvPr>
-        </p:nvSpPr>
-        <p:spPr>
-          <a:xfrm>
-            <a:off x="685800" y="4400550"/>
-            <a:ext cx="5486400" cy="3600450"/>
-          </a:xfrm>
-          <a:prstGeom prst="rect">
-            <a:avLst/>
-          </a:prstGeom>
-        </p:spPr>
-        <p:txBody>
-          <a:bodyPr vert="horz" lIns="91440" tIns="45720" rIns="91440" bIns="45720" rtlCol="0"/>
-          <a:lstStyle/>
-          <a:p>
-            <a:pPr lvl="0"/>
-            <a:r>
-              <a:rPr lang="en-US"/>
-              <a:t>Click to edit Master text styles</a:t>
-            </a:r>
-          </a:p>
-          <a:p>
-            <a:pPr lvl="1"/>
-            <a:r>
-              <a:rPr lang="en-US"/>
-              <a:t>Second level</a:t>
-            </a:r>
-          </a:p>
-          <a:p>
-            <a:pPr lvl="2"/>
-            <a:r>
-              <a:rPr lang="en-US"/>
-              <a:t>Third level</a:t>
-            </a:r>
-          </a:p>
-          <a:p>
-            <a:pPr lvl="3"/>
-            <a:r>
-              <a:rPr lang="en-US"/>
-              <a:t>Fourth level</a:t>
-            </a:r>
-          </a:p>
-          <a:p>
-            <a:pPr lvl="4"/>
-            <a:r>
-              <a:rPr lang="en-US"/>
-              <a:t>Fifth level</a:t>
-            </a:r>
-          </a:p>
-        </p:txBody>
-      </p:sp>
-      <p:sp>
-        <p:nvSpPr>
-          <p:cNvPr id="6" name="Footer Placeholder 5"/>
-          <p:cNvSpPr>
-            <a:spLocks noGrp="1"/>
-          </p:cNvSpPr>
-          <p:nvPr>
-            <p:ph type="ftr" sz="quarter" idx="4"/>
-          </p:nvPr>
-        </p:nvSpPr>
-        <p:spPr>
-          <a:xfrm>
-            <a:off x="0" y="8685213"/>
-            <a:ext cx="2971800" cy="458787"/>
-          </a:xfrm>
-          <a:prstGeom prst="rect">
-            <a:avLst/>
-          </a:prstGeom>
-        </p:spPr>
-        <p:txBody>
-          <a:bodyPr vert="horz" lIns="91440" tIns="45720" rIns="91440" bIns="45720" rtlCol="0" anchor="b"/>
-          <a:lstStyle>
-            <a:lvl1pPr algn="l">
-              <a:defRPr sz="1200"/>
-            </a:lvl1pPr>
-          </a:lstStyle>
-          <a:p>
-            <a:endParaRPr lang="en-US"/>
-          </a:p>
-        </p:txBody>
-      </p:sp>
-      <p:sp>
-        <p:nvSpPr>
-          <p:cNvPr id="7" name="Slide Number Placeholder 6"/>
-          <p:cNvSpPr>
-            <a:spLocks noGrp="1"/>
-          </p:cNvSpPr>
-          <p:nvPr>
-            <p:ph type="sldNum" sz="quarter" idx="5"/>
-          </p:nvPr>
-        </p:nvSpPr>
-        <p:spPr>
-          <a:xfrm>
-            <a:off x="3884613" y="8685213"/>
-            <a:ext cx="2971800" cy="458787"/>
-          </a:xfrm>
-          <a:prstGeom prst="rect">
-            <a:avLst/>
-          </a:prstGeom>
-        </p:spPr>
-        <p:txBody>
-          <a:bodyPr vert="horz" lIns="91440" tIns="45720" rIns="91440" bIns="45720" rtlCol="0" anchor="b"/>
-          <a:lstStyle>
-            <a:lvl1pPr algn="r">
-              <a:defRPr sz="1200"/>
-            </a:lvl1pPr>
-          </a:lstStyle>
-          <a:p>
-            <a:fld id="{CE5E9CC1-C706-0F49-92D6-E571CC5EEA8F}" type="slidenum">
-              <a:rPr lang="en-US"/>
-              <a:t>‹#›</a:t>
-            </a:fld>
-            <a:endParaRPr lang="en-US"/>
-          </a:p>
-        </p:txBody>
-      </p:sp>
     </p:spTree>
     <p:extLst>
       <p:ext uri="{BB962C8B-B14F-4D97-AF65-F5344CB8AC3E}">
-        <p14:creationId xmlns:p14="http://schemas.microsoft.com/office/powerpoint/2010/main" val="1024086991"/>
+        <p14:creationId xmlns:p14="http://schemas.microsoft.com/office/powerpoint/2010/main" val="1135257816"/>
       </p:ext>
     </p:extLst>
   </p:cSld>
   <p:clrMap bg1="lt1" tx1="dk1" bg2="lt2" tx2="dk2" accent1="accent1" accent2="accent2" accent3="accent3" accent4="accent4" accent5="accent5" accent6="accent6" hlink="hlink" folHlink="folHlink"/>
   <p:notesStyle>
-    <a:lvl1pPr marL="0" algn="l" defTabSz="914400" rtl="0" eaLnBrk="1" latinLnBrk="0" hangingPunct="1">
+    <a:lvl1pPr marL="0" algn="l" defTabSz="914400" rtl="0" eaLnBrk="1" latinLnBrk="1" hangingPunct="1">
       <a:defRPr sz="1200" kern="1200">
         <a:solidFill>
           <a:schemeClr val="tx1"/>
@@ -386,7 +167,7 @@
         <a:cs typeface="+mn-cs"/>
       </a:defRPr>
     </a:lvl1pPr>
-    <a:lvl2pPr marL="457200" algn="l" defTabSz="914400" rtl="0" eaLnBrk="1" latinLnBrk="0" hangingPunct="1">
+    <a:lvl2pPr marL="457200" algn="l" defTabSz="914400" rtl="0" eaLnBrk="1" latinLnBrk="1" hangingPunct="1">
       <a:defRPr sz="1200" kern="1200">
         <a:solidFill>
           <a:schemeClr val="tx1"/>
@@ -396,7 +177,7 @@
         <a:cs typeface="+mn-cs"/>
       </a:defRPr>
     </a:lvl2pPr>
-    <a:lvl3pPr marL="914400" algn="l" defTabSz="914400" rtl="0" eaLnBrk="1" latinLnBrk="0" hangingPunct="1">
+    <a:lvl3pPr marL="914400" algn="l" defTabSz="914400" rtl="0" eaLnBrk="1" latinLnBrk="1" hangingPunct="1">
       <a:defRPr sz="1200" kern="1200">
         <a:solidFill>
           <a:schemeClr val="tx1"/>
@@ -406,7 +187,7 @@
         <a:cs typeface="+mn-cs"/>
       </a:defRPr>
     </a:lvl3pPr>
-    <a:lvl4pPr marL="1371600" algn="l" defTabSz="914400" rtl="0" eaLnBrk="1" latinLnBrk="0" hangingPunct="1">
+    <a:lvl4pPr marL="1371600" algn="l" defTabSz="914400" rtl="0" eaLnBrk="1" latinLnBrk="1" hangingPunct="1">
       <a:defRPr sz="1200" kern="1200">
         <a:solidFill>
           <a:schemeClr val="tx1"/>
@@ -416,7 +197,7 @@
         <a:cs typeface="+mn-cs"/>
       </a:defRPr>
     </a:lvl4pPr>
-    <a:lvl5pPr marL="1828800" algn="l" defTabSz="914400" rtl="0" eaLnBrk="1" latinLnBrk="0" hangingPunct="1">
+    <a:lvl5pPr marL="1828800" algn="l" defTabSz="914400" rtl="0" eaLnBrk="1" latinLnBrk="1" hangingPunct="1">
       <a:defRPr sz="1200" kern="1200">
         <a:solidFill>
           <a:schemeClr val="tx1"/>
@@ -426,7 +207,7 @@
         <a:cs typeface="+mn-cs"/>
       </a:defRPr>
     </a:lvl5pPr>
-    <a:lvl6pPr marL="2286000" algn="l" defTabSz="914400" rtl="0" eaLnBrk="1" latinLnBrk="0" hangingPunct="1">
+    <a:lvl6pPr marL="2286000" algn="l" defTabSz="914400" rtl="0" eaLnBrk="1" latinLnBrk="1" hangingPunct="1">
       <a:defRPr sz="1200" kern="1200">
         <a:solidFill>
           <a:schemeClr val="tx1"/>
@@ -436,7 +217,7 @@
         <a:cs typeface="+mn-cs"/>
       </a:defRPr>
     </a:lvl6pPr>
-    <a:lvl7pPr marL="2743200" algn="l" defTabSz="914400" rtl="0" eaLnBrk="1" latinLnBrk="0" hangingPunct="1">
+    <a:lvl7pPr marL="2743200" algn="l" defTabSz="914400" rtl="0" eaLnBrk="1" latinLnBrk="1" hangingPunct="1">
       <a:defRPr sz="1200" kern="1200">
         <a:solidFill>
           <a:schemeClr val="tx1"/>
@@ -446,7 +227,7 @@
         <a:cs typeface="+mn-cs"/>
       </a:defRPr>
     </a:lvl7pPr>
-    <a:lvl8pPr marL="3200400" algn="l" defTabSz="914400" rtl="0" eaLnBrk="1" latinLnBrk="0" hangingPunct="1">
+    <a:lvl8pPr marL="3200400" algn="l" defTabSz="914400" rtl="0" eaLnBrk="1" latinLnBrk="1" hangingPunct="1">
       <a:defRPr sz="1200" kern="1200">
         <a:solidFill>
           <a:schemeClr val="tx1"/>
@@ -456,7 +237,7 @@
         <a:cs typeface="+mn-cs"/>
       </a:defRPr>
     </a:lvl8pPr>
-    <a:lvl9pPr marL="3657600" algn="l" defTabSz="914400" rtl="0" eaLnBrk="1" latinLnBrk="0" hangingPunct="1">
+    <a:lvl9pPr marL="3657600" algn="l" defTabSz="914400" rtl="0" eaLnBrk="1" latinLnBrk="1" hangingPunct="1">
       <a:defRPr sz="1200" kern="1200">
         <a:solidFill>
           <a:schemeClr val="tx1"/>
@@ -530,7 +311,6 @@
 ※ 워크시트 두 개가 이 차시의 주 활동이다. 앞이 밀리면 §5(거리)와 §8(경계)을 줄이고 워크시트를 지킨다.
 ※ 워크시트②는 6주차 서비스 계획서에서 다시 쓴다. 반드시 완성해서 저장하게 한다.</a:t>
             </a:r>
-            <a:endParaRPr lang="en-US" dirty="0"/>
           </a:p>
         </p:txBody>
       </p:sp>
@@ -627,7 +407,6 @@
 [진행 메모]
 2분을 넘기지 않는다. 앞 장에서 코드로 이미 봤고, 여기는 그림으로 굳히는 자리다.</a:t>
             </a:r>
-            <a:endParaRPr lang="en-US" dirty="0"/>
           </a:p>
         </p:txBody>
       </p:sp>
@@ -726,7 +505,6 @@
 워크시트로 넘어가기 직전이다. 여기서 판단 기준을 명확하게 주고 넘어가야 워크시트가 굴러간다.
 "같은 종류 여럿" 대 "한 대상의 여러 항목" — 이 두 마디를 칠판에 남겨 둔다.</a:t>
             </a:r>
-            <a:endParaRPr lang="en-US" dirty="0"/>
           </a:p>
         </p:txBody>
       </p:sp>
@@ -827,7 +605,6 @@
 시간이 밀렸으면 여덟 개 중 2·3·4·6번만 하게 한다. list 와 dict 가 두 번씩 나온다.
 빨리 끝낸 학생은 8번의 답을 dict 로도 만들어 보게 한다.</a:t>
             </a:r>
-            <a:endParaRPr lang="en-US" dirty="0"/>
           </a:p>
         </p:txBody>
       </p:sp>
@@ -927,7 +704,6 @@
 이름표를 한글로 적은 학생은 그냥 두고, 대신 영어로도 한 번 바꿔 보게 한다. 틀린 게 아니다.
 6주차 연결을 반드시 말한다. 이 활동이 오늘로 끝나는 게 아니라는 걸 알면 성의가 달라진다.</a:t>
             </a:r>
-            <a:endParaRPr lang="en-US" dirty="0"/>
           </a:p>
         </p:txBody>
       </p:sp>
@@ -1023,7 +799,6 @@
 새 문법을 가르치는 장이 아니다. **4주차로 넘어가는 다리** 다. 학생이 직접 치게 하지 않는다. 보여 주고 넘어간다.
 시간이 밀렸으면 표 그림만 보여 주고 한 문장으로 끝낸다.</a:t>
             </a:r>
-            <a:endParaRPr lang="en-US" dirty="0"/>
           </a:p>
         </p:txBody>
       </p:sp>
@@ -1119,7 +894,6 @@
 3주차에 만든 환경(.venv, 커널)은 4주차에 그대로 쓴다. **03 폴더를 지우지 말라고 반드시 안내한다.**
 워크시트②를 못 끝낸 학생은 다음 시간 전까지 채워 오게 한다. 6주차에 쓸 재료다.</a:t>
             </a:r>
-            <a:endParaRPr lang="en-US" dirty="0"/>
           </a:p>
         </p:txBody>
       </p:sp>
@@ -1216,7 +990,6 @@
 [진행 메모]
 여기서 문법을 먼저 꺼내지 않는다. "왜 묶어야 하는가" 를 학생이 납득한 뒤에 list 를 보여 준다.</a:t>
             </a:r>
-            <a:endParaRPr lang="en-US" dirty="0"/>
           </a:p>
         </p:txBody>
       </p:sp>
@@ -1316,7 +1089,6 @@
 [썰 — 시간이 남을 때만]
 줄을 서면 사람마다 "몇 번째" 가 정해진다. list 도 똑같다. 값을 넣는 순간 자리가 정해지고, 그 자리는 내가 안 바꾸면 안 바뀐다.</a:t>
             </a:r>
-            <a:endParaRPr lang="en-US" dirty="0"/>
           </a:p>
         </p:txBody>
       </p:sp>
@@ -1415,7 +1187,6 @@
 **학생 답을 반드시 먼저 듣는다.** "첫 번째" 라는 답을 틀렸다고 하지 않는다. 지금 지워 버리면 다음 장의 설명이 교정이 아니라 암기가 된다.
 답이 안 나오면 그냥 넘어간다. 침묵을 오래 끌지 않는다.</a:t>
             </a:r>
-            <a:endParaRPr lang="en-US" dirty="0"/>
           </a:p>
         </p:txBody>
       </p:sp>
@@ -1516,7 +1287,6 @@
 [썰 — 시간이 남을 때만]
 건물 층수도 나라마다 다르다. 한국은 1층부터 세고, 유럽 여러 나라는 지상층을 0층이라 부르고 그 위가 1층이다. 0층은 "안 올라갔다" 는 뜻이다. 프로그래밍의 0도 그 감각에 가깝다.</a:t>
             </a:r>
-            <a:endParaRPr lang="en-US" dirty="0"/>
           </a:p>
         </p:txBody>
       </p:sp>
@@ -1614,7 +1384,6 @@
 [진행 메모]
 "개수보다 하나 작다" 를 규칙으로 외우게 하지 않는다. 거리로 읽으면 자동으로 나오는 결과라는 걸 한 번 더 짚는다.</a:t>
             </a:r>
-            <a:endParaRPr lang="en-US" dirty="0"/>
           </a:p>
         </p:txBody>
       </p:sp>
@@ -1714,7 +1483,6 @@
 학생 화면마다 오류 문장 길이가 다르다. 마지막 줄을 손가락으로 짚어 준다.
 교과서 10쪽에 같은 화면이 있다. 거기 표시된 두 부분을 같이 본다.</a:t>
             </a:r>
-            <a:endParaRPr lang="en-US" dirty="0"/>
           </a:p>
         </p:txBody>
       </p:sp>
@@ -1809,7 +1577,6 @@
 3-1과 3-2를 잇는 장이다. 두 차시가 따로 노는 게 아니라는 걸 여기서 한 번 묶어 준다.
 시간이 밀리면 이 장은 한 문장으로 줄인다. "지난 시간 60점 경계랑 같은 이야기입니다."</a:t>
             </a:r>
-            <a:endParaRPr lang="en-US" dirty="0"/>
           </a:p>
         </p:txBody>
       </p:sp>
@@ -1912,7 +1679,6 @@
 콜론을 빠뜨리는 실수가 가장 많다. 오류가 나면 콜론부터 보게 한다.
 따옴표 안의 이름표와 밖의 변수 이름을 헷갈리는 학생이 있다. student 는 따옴표 없이, "name" 은 따옴표 안에.</a:t>
             </a:r>
-            <a:endParaRPr lang="en-US" dirty="0"/>
           </a:p>
         </p:txBody>
       </p:sp>
@@ -1985,6 +1751,11 @@
 <file path=ppt/slideMasters/slideMaster1.xml><?xml version="1.0" encoding="utf-8"?>
 <p:sldMaster xmlns:a="http://schemas.openxmlformats.org/drawingml/2006/main" xmlns:r="http://schemas.openxmlformats.org/officeDocument/2006/relationships" xmlns:p="http://schemas.openxmlformats.org/presentationml/2006/main">
   <p:cSld>
+    <p:bg>
+      <p:bgRef idx="1001">
+        <a:schemeClr val="bg1"/>
+      </p:bgRef>
+    </p:bg>
     <p:spTree>
       <p:nvGrpSpPr>
         <p:cNvPr id="1" name=""/>
@@ -2267,6 +2038,7 @@
         <a:solidFill>
           <a:srgbClr val="1B1D21"/>
         </a:solidFill>
+        <a:effectLst/>
       </p:bgPr>
     </p:bg>
     <p:spTree>
@@ -2302,6 +2074,13 @@
           </a:solidFill>
           <a:ln/>
         </p:spPr>
+        <p:txBody>
+          <a:bodyPr/>
+          <a:lstStyle/>
+          <a:p>
+            <a:endParaRPr lang="ko-KR" altLang="en-US"/>
+          </a:p>
+        </p:txBody>
       </p:sp>
       <p:sp>
         <p:nvSpPr>
@@ -2324,11 +2103,11 @@
           <a:bodyPr wrap="square" lIns="0" tIns="0" rIns="0" bIns="0" rtlCol="0" anchor="ctr"/>
           <a:lstStyle/>
           <a:p>
-            <a:pPr indent="0" marL="0">
-              <a:buNone/>
-            </a:pPr>
-            <a:r>
-              <a:rPr lang="en-US" sz="1200" b="1" spc="100" kern="0" dirty="0">
+            <a:pPr marL="0" indent="0">
+              <a:buNone/>
+            </a:pPr>
+            <a:r>
+              <a:rPr lang="en-US" sz="1200" b="1" kern="0" spc="100" dirty="0">
                 <a:solidFill>
                   <a:srgbClr val="6C7078"/>
                 </a:solidFill>
@@ -2363,7 +2142,7 @@
           <a:bodyPr wrap="square" lIns="0" tIns="0" rIns="0" bIns="0" rtlCol="0" anchor="ctr"/>
           <a:lstStyle/>
           <a:p>
-            <a:pPr indent="0" marL="0">
+            <a:pPr marL="0" indent="0">
               <a:buNone/>
             </a:pPr>
             <a:r>
@@ -2380,7 +2159,7 @@
             <a:endParaRPr lang="en-US" sz="4200" dirty="0"/>
           </a:p>
           <a:p>
-            <a:pPr indent="0" marL="0">
+            <a:pPr marL="0" indent="0">
               <a:buNone/>
             </a:pPr>
             <a:r>
@@ -2419,7 +2198,7 @@
           <a:bodyPr wrap="square" lIns="0" tIns="0" rIns="0" bIns="0" rtlCol="0" anchor="ctr"/>
           <a:lstStyle/>
           <a:p>
-            <a:pPr indent="0" marL="0">
+            <a:pPr marL="0" indent="0">
               <a:lnSpc>
                 <a:spcPts val="3200"/>
               </a:lnSpc>
@@ -2439,7 +2218,7 @@
             <a:endParaRPr lang="en-US" sz="1900" dirty="0"/>
           </a:p>
           <a:p>
-            <a:pPr indent="0" marL="0">
+            <a:pPr marL="0" indent="0">
               <a:lnSpc>
                 <a:spcPts val="3200"/>
               </a:lnSpc>
@@ -2481,7 +2260,7 @@
           <a:bodyPr wrap="square" lIns="0" tIns="0" rIns="0" bIns="0" rtlCol="0" anchor="ctr"/>
           <a:lstStyle/>
           <a:p>
-            <a:pPr indent="0" marL="0">
+            <a:pPr marL="0" indent="0">
               <a:buNone/>
             </a:pPr>
             <a:r>
@@ -2520,7 +2299,7 @@
           <a:bodyPr wrap="square" lIns="0" tIns="0" rIns="0" bIns="0" rtlCol="0" anchor="ctr"/>
           <a:lstStyle/>
           <a:p>
-            <a:pPr algn="r" indent="0" marL="0">
+            <a:pPr marL="0" indent="0" algn="r">
               <a:buNone/>
             </a:pPr>
             <a:r>
@@ -2554,6 +2333,7 @@
         <a:solidFill>
           <a:srgbClr val="FFFFFF"/>
         </a:solidFill>
+        <a:effectLst/>
       </p:bgPr>
     </p:bg>
     <p:spTree>
@@ -2591,7 +2371,7 @@
           <a:bodyPr wrap="square" lIns="0" tIns="0" rIns="0" bIns="0" rtlCol="0" anchor="ctr"/>
           <a:lstStyle/>
           <a:p>
-            <a:pPr indent="0" marL="0">
+            <a:pPr marL="0" indent="0">
               <a:buNone/>
             </a:pPr>
             <a:r>
@@ -2630,6 +2410,13 @@
           </a:solidFill>
           <a:ln/>
         </p:spPr>
+        <p:txBody>
+          <a:bodyPr/>
+          <a:lstStyle/>
+          <a:p>
+            <a:endParaRPr lang="ko-KR" altLang="en-US"/>
+          </a:p>
+        </p:txBody>
       </p:sp>
       <p:sp>
         <p:nvSpPr>
@@ -2652,7 +2439,7 @@
           <a:bodyPr wrap="square" lIns="0" tIns="0" rIns="0" bIns="0" rtlCol="0" anchor="ctr"/>
           <a:lstStyle/>
           <a:p>
-            <a:pPr algn="ctr" indent="0" marL="0">
+            <a:pPr marL="0" indent="0" algn="ctr">
               <a:buNone/>
             </a:pPr>
             <a:r>
@@ -2691,7 +2478,7 @@
           <a:bodyPr wrap="square" lIns="0" tIns="0" rIns="0" bIns="0" rtlCol="0" anchor="ctr"/>
           <a:lstStyle/>
           <a:p>
-            <a:pPr indent="0" marL="0">
+            <a:pPr marL="0" indent="0">
               <a:buNone/>
             </a:pPr>
             <a:r>
@@ -2728,6 +2515,13 @@
           </a:solidFill>
           <a:ln/>
         </p:spPr>
+        <p:txBody>
+          <a:bodyPr/>
+          <a:lstStyle/>
+          <a:p>
+            <a:endParaRPr lang="ko-KR" altLang="en-US"/>
+          </a:p>
+        </p:txBody>
       </p:sp>
       <p:sp>
         <p:nvSpPr>
@@ -2750,7 +2544,7 @@
           <a:bodyPr wrap="square" lIns="0" tIns="0" rIns="0" bIns="0" rtlCol="0" anchor="ctr"/>
           <a:lstStyle/>
           <a:p>
-            <a:pPr indent="0" marL="0">
+            <a:pPr marL="0" indent="0">
               <a:buNone/>
             </a:pPr>
             <a:r>
@@ -2789,7 +2583,7 @@
           <a:bodyPr wrap="square" lIns="0" tIns="0" rIns="0" bIns="0" rtlCol="0" anchor="ctr"/>
           <a:lstStyle/>
           <a:p>
-            <a:pPr algn="r" indent="0" marL="0">
+            <a:pPr marL="0" indent="0" algn="r">
               <a:buNone/>
             </a:pPr>
             <a:r>
@@ -2809,14 +2603,14 @@
       </p:sp>
       <p:pic>
         <p:nvPicPr>
-          <p:cNvPr id="9" name="Image 0" descr="/home/claude/w5/교과서_배포/assets/img/03-2-06-dict-labels.png">    </p:cNvPr>
+          <p:cNvPr id="9" name="Image 0" descr="/home/claude/w5/교과서_배포/assets/img/03-2-06-dict-labels.png"/>
           <p:cNvPicPr>
             <a:picLocks noChangeAspect="1"/>
           </p:cNvPicPr>
           <p:nvPr/>
         </p:nvPicPr>
         <p:blipFill>
-          <a:blip r:embed="rId1"/>
+          <a:blip r:embed="rId3"/>
           <a:stretch>
             <a:fillRect/>
           </a:stretch>
@@ -2857,6 +2651,13 @@
             <a:prstDash val="solid"/>
           </a:ln>
         </p:spPr>
+        <p:txBody>
+          <a:bodyPr/>
+          <a:lstStyle/>
+          <a:p>
+            <a:endParaRPr lang="ko-KR" altLang="en-US"/>
+          </a:p>
+        </p:txBody>
       </p:sp>
       <p:sp>
         <p:nvSpPr>
@@ -2879,11 +2680,11 @@
           <a:bodyPr wrap="square" lIns="0" tIns="0" rIns="0" bIns="0" rtlCol="0" anchor="ctr"/>
           <a:lstStyle/>
           <a:p>
-            <a:pPr indent="0" marL="0">
-              <a:buNone/>
-            </a:pPr>
-            <a:r>
-              <a:rPr lang="en-US" sz="1050" b="1" spc="60" kern="0" dirty="0">
+            <a:pPr marL="0" indent="0">
+              <a:buNone/>
+            </a:pPr>
+            <a:r>
+              <a:rPr lang="en-US" sz="1050" b="1" kern="0" spc="60" dirty="0">
                 <a:solidFill>
                   <a:srgbClr val="FF5C00"/>
                 </a:solidFill>
@@ -2918,7 +2719,7 @@
           <a:bodyPr wrap="square" lIns="0" tIns="0" rIns="0" bIns="0" rtlCol="0" anchor="ctr"/>
           <a:lstStyle/>
           <a:p>
-            <a:pPr indent="0" marL="0">
+            <a:pPr marL="0" indent="0">
               <a:buNone/>
             </a:pPr>
             <a:r>
@@ -2957,7 +2758,7 @@
           <a:bodyPr wrap="square" lIns="0" tIns="0" rIns="0" bIns="0" rtlCol="0" anchor="t"/>
           <a:lstStyle/>
           <a:p>
-            <a:pPr indent="0" marL="0">
+            <a:pPr marL="0" indent="0">
               <a:lnSpc>
                 <a:spcPts val="1900"/>
               </a:lnSpc>
@@ -3004,6 +2805,13 @@
             <a:prstDash val="solid"/>
           </a:ln>
         </p:spPr>
+        <p:txBody>
+          <a:bodyPr/>
+          <a:lstStyle/>
+          <a:p>
+            <a:endParaRPr lang="ko-KR" altLang="en-US"/>
+          </a:p>
+        </p:txBody>
       </p:sp>
       <p:sp>
         <p:nvSpPr>
@@ -3026,11 +2834,11 @@
           <a:bodyPr wrap="square" lIns="0" tIns="0" rIns="0" bIns="0" rtlCol="0" anchor="ctr"/>
           <a:lstStyle/>
           <a:p>
-            <a:pPr indent="0" marL="0">
-              <a:buNone/>
-            </a:pPr>
-            <a:r>
-              <a:rPr lang="en-US" sz="1050" b="1" spc="60" kern="0" dirty="0">
+            <a:pPr marL="0" indent="0">
+              <a:buNone/>
+            </a:pPr>
+            <a:r>
+              <a:rPr lang="en-US" sz="1050" b="1" kern="0" spc="60" dirty="0">
                 <a:solidFill>
                   <a:srgbClr val="0E7C86"/>
                 </a:solidFill>
@@ -3065,7 +2873,7 @@
           <a:bodyPr wrap="square" lIns="0" tIns="0" rIns="0" bIns="0" rtlCol="0" anchor="ctr"/>
           <a:lstStyle/>
           <a:p>
-            <a:pPr indent="0" marL="0">
+            <a:pPr marL="0" indent="0">
               <a:buNone/>
             </a:pPr>
             <a:r>
@@ -3104,7 +2912,7 @@
           <a:bodyPr wrap="square" lIns="0" tIns="0" rIns="0" bIns="0" rtlCol="0" anchor="t"/>
           <a:lstStyle/>
           <a:p>
-            <a:pPr indent="0" marL="0">
+            <a:pPr marL="0" indent="0">
               <a:lnSpc>
                 <a:spcPts val="1900"/>
               </a:lnSpc>
@@ -3124,7 +2932,7 @@
             <a:endParaRPr lang="en-US" sz="1300" dirty="0"/>
           </a:p>
           <a:p>
-            <a:pPr indent="0" marL="0">
+            <a:pPr marL="0" indent="0">
               <a:lnSpc>
                 <a:spcPts val="1900"/>
               </a:lnSpc>
@@ -3166,7 +2974,7 @@
           <a:bodyPr wrap="square" lIns="0" tIns="0" rIns="0" bIns="0" rtlCol="0" anchor="ctr"/>
           <a:lstStyle/>
           <a:p>
-            <a:pPr algn="ctr" indent="0" marL="0">
+            <a:pPr marL="0" indent="0" algn="ctr">
               <a:buNone/>
             </a:pPr>
             <a:r>
@@ -3200,6 +3008,7 @@
         <a:solidFill>
           <a:srgbClr val="FFFFFF"/>
         </a:solidFill>
+        <a:effectLst/>
       </p:bgPr>
     </p:bg>
     <p:spTree>
@@ -3237,7 +3046,7 @@
           <a:bodyPr wrap="square" lIns="0" tIns="0" rIns="0" bIns="0" rtlCol="0" anchor="ctr"/>
           <a:lstStyle/>
           <a:p>
-            <a:pPr indent="0" marL="0">
+            <a:pPr marL="0" indent="0">
               <a:buNone/>
             </a:pPr>
             <a:r>
@@ -3276,6 +3085,13 @@
           </a:solidFill>
           <a:ln/>
         </p:spPr>
+        <p:txBody>
+          <a:bodyPr/>
+          <a:lstStyle/>
+          <a:p>
+            <a:endParaRPr lang="ko-KR" altLang="en-US"/>
+          </a:p>
+        </p:txBody>
       </p:sp>
       <p:sp>
         <p:nvSpPr>
@@ -3298,7 +3114,7 @@
           <a:bodyPr wrap="square" lIns="0" tIns="0" rIns="0" bIns="0" rtlCol="0" anchor="ctr"/>
           <a:lstStyle/>
           <a:p>
-            <a:pPr algn="ctr" indent="0" marL="0">
+            <a:pPr marL="0" indent="0" algn="ctr">
               <a:buNone/>
             </a:pPr>
             <a:r>
@@ -3337,7 +3153,7 @@
           <a:bodyPr wrap="square" lIns="0" tIns="0" rIns="0" bIns="0" rtlCol="0" anchor="ctr"/>
           <a:lstStyle/>
           <a:p>
-            <a:pPr indent="0" marL="0">
+            <a:pPr marL="0" indent="0">
               <a:buNone/>
             </a:pPr>
             <a:r>
@@ -3374,6 +3190,13 @@
           </a:solidFill>
           <a:ln/>
         </p:spPr>
+        <p:txBody>
+          <a:bodyPr/>
+          <a:lstStyle/>
+          <a:p>
+            <a:endParaRPr lang="ko-KR" altLang="en-US"/>
+          </a:p>
+        </p:txBody>
       </p:sp>
       <p:sp>
         <p:nvSpPr>
@@ -3396,7 +3219,7 @@
           <a:bodyPr wrap="square" lIns="0" tIns="0" rIns="0" bIns="0" rtlCol="0" anchor="ctr"/>
           <a:lstStyle/>
           <a:p>
-            <a:pPr algn="r" indent="0" marL="0">
+            <a:pPr marL="0" indent="0" algn="r">
               <a:buNone/>
             </a:pPr>
             <a:r>
@@ -3435,7 +3258,7 @@
           <a:bodyPr wrap="square" lIns="0" tIns="0" rIns="0" bIns="0" rtlCol="0" anchor="ctr"/>
           <a:lstStyle/>
           <a:p>
-            <a:pPr indent="0" marL="0">
+            <a:pPr marL="0" indent="0">
               <a:buNone/>
             </a:pPr>
             <a:r>
@@ -3474,7 +3297,7 @@
           <a:bodyPr wrap="square" lIns="0" tIns="0" rIns="0" bIns="0" rtlCol="0" anchor="ctr"/>
           <a:lstStyle/>
           <a:p>
-            <a:pPr algn="r" indent="0" marL="0">
+            <a:pPr marL="0" indent="0" algn="r">
               <a:buNone/>
             </a:pPr>
             <a:r>
@@ -3494,14 +3317,14 @@
       </p:sp>
       <p:pic>
         <p:nvPicPr>
-          <p:cNvPr id="10" name="Image 0" descr="/home/claude/w5/교과서_배포/assets/img/03-2-07-list-vs-dict.png">    </p:cNvPr>
+          <p:cNvPr id="10" name="Image 0" descr="/home/claude/w5/교과서_배포/assets/img/03-2-07-list-vs-dict.png"/>
           <p:cNvPicPr>
             <a:picLocks noChangeAspect="1"/>
           </p:cNvPicPr>
           <p:nvPr/>
         </p:nvPicPr>
         <p:blipFill>
-          <a:blip r:embed="rId1"/>
+          <a:blip r:embed="rId3"/>
           <a:stretch>
             <a:fillRect/>
           </a:stretch>
@@ -3542,6 +3365,13 @@
             <a:prstDash val="solid"/>
           </a:ln>
         </p:spPr>
+        <p:txBody>
+          <a:bodyPr/>
+          <a:lstStyle/>
+          <a:p>
+            <a:endParaRPr lang="ko-KR" altLang="en-US"/>
+          </a:p>
+        </p:txBody>
       </p:sp>
       <p:sp>
         <p:nvSpPr>
@@ -3564,7 +3394,7 @@
           <a:bodyPr wrap="square" lIns="0" tIns="0" rIns="0" bIns="0" rtlCol="0" anchor="ctr"/>
           <a:lstStyle/>
           <a:p>
-            <a:pPr indent="0" marL="0">
+            <a:pPr marL="0" indent="0">
               <a:buNone/>
             </a:pPr>
             <a:r>
@@ -3603,7 +3433,7 @@
           <a:bodyPr wrap="square" lIns="0" tIns="0" rIns="0" bIns="0" rtlCol="0" anchor="ctr"/>
           <a:lstStyle/>
           <a:p>
-            <a:pPr indent="0" marL="0">
+            <a:pPr marL="0" indent="0">
               <a:buNone/>
             </a:pPr>
             <a:r>
@@ -3642,7 +3472,7 @@
           <a:bodyPr wrap="square" lIns="0" tIns="0" rIns="0" bIns="0" rtlCol="0" anchor="t"/>
           <a:lstStyle/>
           <a:p>
-            <a:pPr indent="0" marL="0">
+            <a:pPr marL="0" indent="0">
               <a:lnSpc>
                 <a:spcPts val="1900"/>
               </a:lnSpc>
@@ -3662,7 +3492,7 @@
             <a:endParaRPr lang="en-US" sz="1300" dirty="0"/>
           </a:p>
           <a:p>
-            <a:pPr indent="0" marL="0">
+            <a:pPr marL="0" indent="0">
               <a:lnSpc>
                 <a:spcPts val="1900"/>
               </a:lnSpc>
@@ -3709,6 +3539,13 @@
             <a:prstDash val="solid"/>
           </a:ln>
         </p:spPr>
+        <p:txBody>
+          <a:bodyPr/>
+          <a:lstStyle/>
+          <a:p>
+            <a:endParaRPr lang="ko-KR" altLang="en-US"/>
+          </a:p>
+        </p:txBody>
       </p:sp>
       <p:sp>
         <p:nvSpPr>
@@ -3731,7 +3568,7 @@
           <a:bodyPr wrap="square" lIns="0" tIns="0" rIns="0" bIns="0" rtlCol="0" anchor="ctr"/>
           <a:lstStyle/>
           <a:p>
-            <a:pPr indent="0" marL="0">
+            <a:pPr marL="0" indent="0">
               <a:buNone/>
             </a:pPr>
             <a:r>
@@ -3770,7 +3607,7 @@
           <a:bodyPr wrap="square" lIns="0" tIns="0" rIns="0" bIns="0" rtlCol="0" anchor="ctr"/>
           <a:lstStyle/>
           <a:p>
-            <a:pPr indent="0" marL="0">
+            <a:pPr marL="0" indent="0">
               <a:buNone/>
             </a:pPr>
             <a:r>
@@ -3809,7 +3646,7 @@
           <a:bodyPr wrap="square" lIns="0" tIns="0" rIns="0" bIns="0" rtlCol="0" anchor="t"/>
           <a:lstStyle/>
           <a:p>
-            <a:pPr indent="0" marL="0">
+            <a:pPr marL="0" indent="0">
               <a:lnSpc>
                 <a:spcPts val="1900"/>
               </a:lnSpc>
@@ -3829,7 +3666,7 @@
             <a:endParaRPr lang="en-US" sz="1300" dirty="0"/>
           </a:p>
           <a:p>
-            <a:pPr indent="0" marL="0">
+            <a:pPr marL="0" indent="0">
               <a:lnSpc>
                 <a:spcPts val="1900"/>
               </a:lnSpc>
@@ -3876,6 +3713,13 @@
             <a:prstDash val="solid"/>
           </a:ln>
         </p:spPr>
+        <p:txBody>
+          <a:bodyPr/>
+          <a:lstStyle/>
+          <a:p>
+            <a:endParaRPr lang="ko-KR" altLang="en-US"/>
+          </a:p>
+        </p:txBody>
       </p:sp>
       <p:sp>
         <p:nvSpPr>
@@ -3898,7 +3742,7 @@
           <a:bodyPr wrap="square" lIns="0" tIns="0" rIns="0" bIns="0" rtlCol="0" anchor="ctr"/>
           <a:lstStyle/>
           <a:p>
-            <a:pPr algn="ctr" indent="0" marL="0">
+            <a:pPr marL="0" indent="0" algn="ctr">
               <a:buNone/>
             </a:pPr>
             <a:r>
@@ -3932,6 +3776,7 @@
         <a:solidFill>
           <a:srgbClr val="FFFFFF"/>
         </a:solidFill>
+        <a:effectLst/>
       </p:bgPr>
     </p:bg>
     <p:spTree>
@@ -3969,7 +3814,7 @@
           <a:bodyPr wrap="square" lIns="0" tIns="0" rIns="0" bIns="0" rtlCol="0" anchor="ctr"/>
           <a:lstStyle/>
           <a:p>
-            <a:pPr indent="0" marL="0">
+            <a:pPr marL="0" indent="0">
               <a:buNone/>
             </a:pPr>
             <a:r>
@@ -4008,6 +3853,13 @@
           </a:solidFill>
           <a:ln/>
         </p:spPr>
+        <p:txBody>
+          <a:bodyPr/>
+          <a:lstStyle/>
+          <a:p>
+            <a:endParaRPr lang="ko-KR" altLang="en-US"/>
+          </a:p>
+        </p:txBody>
       </p:sp>
       <p:sp>
         <p:nvSpPr>
@@ -4030,7 +3882,7 @@
           <a:bodyPr wrap="square" lIns="0" tIns="0" rIns="0" bIns="0" rtlCol="0" anchor="ctr"/>
           <a:lstStyle/>
           <a:p>
-            <a:pPr algn="ctr" indent="0" marL="0">
+            <a:pPr marL="0" indent="0" algn="ctr">
               <a:buNone/>
             </a:pPr>
             <a:r>
@@ -4069,7 +3921,7 @@
           <a:bodyPr wrap="square" lIns="0" tIns="0" rIns="0" bIns="0" rtlCol="0" anchor="ctr"/>
           <a:lstStyle/>
           <a:p>
-            <a:pPr indent="0" marL="0">
+            <a:pPr marL="0" indent="0">
               <a:buNone/>
             </a:pPr>
             <a:r>
@@ -4106,6 +3958,13 @@
           </a:solidFill>
           <a:ln/>
         </p:spPr>
+        <p:txBody>
+          <a:bodyPr/>
+          <a:lstStyle/>
+          <a:p>
+            <a:endParaRPr lang="ko-KR" altLang="en-US"/>
+          </a:p>
+        </p:txBody>
       </p:sp>
       <p:sp>
         <p:nvSpPr>
@@ -4128,7 +3987,7 @@
           <a:bodyPr wrap="square" lIns="0" tIns="0" rIns="0" bIns="0" rtlCol="0" anchor="ctr"/>
           <a:lstStyle/>
           <a:p>
-            <a:pPr algn="r" indent="0" marL="0">
+            <a:pPr marL="0" indent="0" algn="r">
               <a:buNone/>
             </a:pPr>
             <a:r>
@@ -4167,7 +4026,7 @@
           <a:bodyPr wrap="square" lIns="0" tIns="0" rIns="0" bIns="0" rtlCol="0" anchor="ctr"/>
           <a:lstStyle/>
           <a:p>
-            <a:pPr indent="0" marL="0">
+            <a:pPr marL="0" indent="0">
               <a:buNone/>
             </a:pPr>
             <a:r>
@@ -4206,7 +4065,7 @@
           <a:bodyPr wrap="square" lIns="0" tIns="0" rIns="0" bIns="0" rtlCol="0" anchor="ctr"/>
           <a:lstStyle/>
           <a:p>
-            <a:pPr algn="r" indent="0" marL="0">
+            <a:pPr marL="0" indent="0" algn="r">
               <a:buNone/>
             </a:pPr>
             <a:r>
@@ -4243,6 +4102,13 @@
           </a:solidFill>
           <a:ln/>
         </p:spPr>
+        <p:txBody>
+          <a:bodyPr/>
+          <a:lstStyle/>
+          <a:p>
+            <a:endParaRPr lang="ko-KR" altLang="en-US"/>
+          </a:p>
+        </p:txBody>
       </p:sp>
       <p:sp>
         <p:nvSpPr>
@@ -4265,7 +4131,7 @@
           <a:bodyPr wrap="square" lIns="0" tIns="0" rIns="0" bIns="0" rtlCol="0" anchor="ctr"/>
           <a:lstStyle/>
           <a:p>
-            <a:pPr indent="0" marL="0">
+            <a:pPr marL="0" indent="0">
               <a:buNone/>
             </a:pPr>
             <a:r>
@@ -4302,6 +4168,13 @@
           </a:solidFill>
           <a:ln/>
         </p:spPr>
+        <p:txBody>
+          <a:bodyPr/>
+          <a:lstStyle/>
+          <a:p>
+            <a:endParaRPr lang="ko-KR" altLang="en-US"/>
+          </a:p>
+        </p:txBody>
       </p:sp>
       <p:sp>
         <p:nvSpPr>
@@ -4324,7 +4197,7 @@
           <a:bodyPr wrap="square" lIns="0" tIns="0" rIns="0" bIns="0" rtlCol="0" anchor="ctr"/>
           <a:lstStyle/>
           <a:p>
-            <a:pPr indent="0" marL="0">
+            <a:pPr marL="0" indent="0">
               <a:buNone/>
             </a:pPr>
             <a:r>
@@ -4361,6 +4234,13 @@
           </a:solidFill>
           <a:ln/>
         </p:spPr>
+        <p:txBody>
+          <a:bodyPr/>
+          <a:lstStyle/>
+          <a:p>
+            <a:endParaRPr lang="ko-KR" altLang="en-US"/>
+          </a:p>
+        </p:txBody>
       </p:sp>
       <p:sp>
         <p:nvSpPr>
@@ -4383,7 +4263,7 @@
           <a:bodyPr wrap="square" lIns="0" tIns="0" rIns="0" bIns="0" rtlCol="0" anchor="ctr"/>
           <a:lstStyle/>
           <a:p>
-            <a:pPr indent="0" marL="0">
+            <a:pPr marL="0" indent="0">
               <a:buNone/>
             </a:pPr>
             <a:r>
@@ -4425,6 +4305,13 @@
             <a:prstDash val="solid"/>
           </a:ln>
         </p:spPr>
+        <p:txBody>
+          <a:bodyPr/>
+          <a:lstStyle/>
+          <a:p>
+            <a:endParaRPr lang="ko-KR" altLang="en-US"/>
+          </a:p>
+        </p:txBody>
       </p:sp>
       <p:sp>
         <p:nvSpPr>
@@ -4447,7 +4334,7 @@
           <a:bodyPr wrap="square" lIns="0" tIns="0" rIns="0" bIns="0" rtlCol="0" anchor="ctr"/>
           <a:lstStyle/>
           <a:p>
-            <a:pPr indent="0" marL="0">
+            <a:pPr marL="0" indent="0">
               <a:buNone/>
             </a:pPr>
             <a:r>
@@ -4486,7 +4373,7 @@
           <a:bodyPr wrap="square" lIns="0" tIns="0" rIns="0" bIns="0" rtlCol="0" anchor="ctr"/>
           <a:lstStyle/>
           <a:p>
-            <a:pPr indent="0" marL="0">
+            <a:pPr marL="0" indent="0">
               <a:buNone/>
             </a:pPr>
             <a:r>
@@ -4525,7 +4412,7 @@
           <a:bodyPr wrap="square" lIns="0" tIns="0" rIns="0" bIns="0" rtlCol="0" anchor="ctr"/>
           <a:lstStyle/>
           <a:p>
-            <a:pPr indent="0" marL="0">
+            <a:pPr marL="0" indent="0">
               <a:buNone/>
             </a:pPr>
             <a:endParaRPr lang="en-US" sz="1240" dirty="0"/>
@@ -4556,6 +4443,13 @@
             <a:prstDash val="solid"/>
           </a:ln>
         </p:spPr>
+        <p:txBody>
+          <a:bodyPr/>
+          <a:lstStyle/>
+          <a:p>
+            <a:endParaRPr lang="ko-KR" altLang="en-US"/>
+          </a:p>
+        </p:txBody>
       </p:sp>
       <p:sp>
         <p:nvSpPr>
@@ -4578,7 +4472,7 @@
           <a:bodyPr wrap="square" lIns="0" tIns="0" rIns="0" bIns="0" rtlCol="0" anchor="ctr"/>
           <a:lstStyle/>
           <a:p>
-            <a:pPr indent="0" marL="0">
+            <a:pPr marL="0" indent="0">
               <a:buNone/>
             </a:pPr>
             <a:r>
@@ -4617,7 +4511,7 @@
           <a:bodyPr wrap="square" lIns="0" tIns="0" rIns="0" bIns="0" rtlCol="0" anchor="ctr"/>
           <a:lstStyle/>
           <a:p>
-            <a:pPr indent="0" marL="0">
+            <a:pPr marL="0" indent="0">
               <a:buNone/>
             </a:pPr>
             <a:r>
@@ -4656,7 +4550,7 @@
           <a:bodyPr wrap="square" lIns="0" tIns="0" rIns="0" bIns="0" rtlCol="0" anchor="ctr"/>
           <a:lstStyle/>
           <a:p>
-            <a:pPr indent="0" marL="0">
+            <a:pPr marL="0" indent="0">
               <a:buNone/>
             </a:pPr>
             <a:endParaRPr lang="en-US" sz="1240" dirty="0"/>
@@ -4687,6 +4581,13 @@
             <a:prstDash val="solid"/>
           </a:ln>
         </p:spPr>
+        <p:txBody>
+          <a:bodyPr/>
+          <a:lstStyle/>
+          <a:p>
+            <a:endParaRPr lang="ko-KR" altLang="en-US"/>
+          </a:p>
+        </p:txBody>
       </p:sp>
       <p:sp>
         <p:nvSpPr>
@@ -4709,7 +4610,7 @@
           <a:bodyPr wrap="square" lIns="0" tIns="0" rIns="0" bIns="0" rtlCol="0" anchor="ctr"/>
           <a:lstStyle/>
           <a:p>
-            <a:pPr indent="0" marL="0">
+            <a:pPr marL="0" indent="0">
               <a:buNone/>
             </a:pPr>
             <a:r>
@@ -4748,7 +4649,7 @@
           <a:bodyPr wrap="square" lIns="0" tIns="0" rIns="0" bIns="0" rtlCol="0" anchor="ctr"/>
           <a:lstStyle/>
           <a:p>
-            <a:pPr indent="0" marL="0">
+            <a:pPr marL="0" indent="0">
               <a:buNone/>
             </a:pPr>
             <a:r>
@@ -4787,7 +4688,7 @@
           <a:bodyPr wrap="square" lIns="0" tIns="0" rIns="0" bIns="0" rtlCol="0" anchor="ctr"/>
           <a:lstStyle/>
           <a:p>
-            <a:pPr indent="0" marL="0">
+            <a:pPr marL="0" indent="0">
               <a:buNone/>
             </a:pPr>
             <a:endParaRPr lang="en-US" sz="1240" dirty="0"/>
@@ -4818,6 +4719,13 @@
             <a:prstDash val="solid"/>
           </a:ln>
         </p:spPr>
+        <p:txBody>
+          <a:bodyPr/>
+          <a:lstStyle/>
+          <a:p>
+            <a:endParaRPr lang="ko-KR" altLang="en-US"/>
+          </a:p>
+        </p:txBody>
       </p:sp>
       <p:sp>
         <p:nvSpPr>
@@ -4840,7 +4748,7 @@
           <a:bodyPr wrap="square" lIns="0" tIns="0" rIns="0" bIns="0" rtlCol="0" anchor="ctr"/>
           <a:lstStyle/>
           <a:p>
-            <a:pPr indent="0" marL="0">
+            <a:pPr marL="0" indent="0">
               <a:buNone/>
             </a:pPr>
             <a:r>
@@ -4879,7 +4787,7 @@
           <a:bodyPr wrap="square" lIns="0" tIns="0" rIns="0" bIns="0" rtlCol="0" anchor="ctr"/>
           <a:lstStyle/>
           <a:p>
-            <a:pPr indent="0" marL="0">
+            <a:pPr marL="0" indent="0">
               <a:buNone/>
             </a:pPr>
             <a:r>
@@ -4918,7 +4826,7 @@
           <a:bodyPr wrap="square" lIns="0" tIns="0" rIns="0" bIns="0" rtlCol="0" anchor="ctr"/>
           <a:lstStyle/>
           <a:p>
-            <a:pPr indent="0" marL="0">
+            <a:pPr marL="0" indent="0">
               <a:buNone/>
             </a:pPr>
             <a:endParaRPr lang="en-US" sz="1240" dirty="0"/>
@@ -4949,6 +4857,13 @@
             <a:prstDash val="solid"/>
           </a:ln>
         </p:spPr>
+        <p:txBody>
+          <a:bodyPr/>
+          <a:lstStyle/>
+          <a:p>
+            <a:endParaRPr lang="ko-KR" altLang="en-US"/>
+          </a:p>
+        </p:txBody>
       </p:sp>
       <p:sp>
         <p:nvSpPr>
@@ -4971,7 +4886,7 @@
           <a:bodyPr wrap="square" lIns="0" tIns="0" rIns="0" bIns="0" rtlCol="0" anchor="ctr"/>
           <a:lstStyle/>
           <a:p>
-            <a:pPr indent="0" marL="0">
+            <a:pPr marL="0" indent="0">
               <a:buNone/>
             </a:pPr>
             <a:r>
@@ -5010,7 +4925,7 @@
           <a:bodyPr wrap="square" lIns="0" tIns="0" rIns="0" bIns="0" rtlCol="0" anchor="ctr"/>
           <a:lstStyle/>
           <a:p>
-            <a:pPr indent="0" marL="0">
+            <a:pPr marL="0" indent="0">
               <a:buNone/>
             </a:pPr>
             <a:r>
@@ -5049,7 +4964,7 @@
           <a:bodyPr wrap="square" lIns="0" tIns="0" rIns="0" bIns="0" rtlCol="0" anchor="ctr"/>
           <a:lstStyle/>
           <a:p>
-            <a:pPr indent="0" marL="0">
+            <a:pPr marL="0" indent="0">
               <a:buNone/>
             </a:pPr>
             <a:endParaRPr lang="en-US" sz="1240" dirty="0"/>
@@ -5080,6 +4995,13 @@
             <a:prstDash val="solid"/>
           </a:ln>
         </p:spPr>
+        <p:txBody>
+          <a:bodyPr/>
+          <a:lstStyle/>
+          <a:p>
+            <a:endParaRPr lang="ko-KR" altLang="en-US"/>
+          </a:p>
+        </p:txBody>
       </p:sp>
       <p:sp>
         <p:nvSpPr>
@@ -5102,7 +5024,7 @@
           <a:bodyPr wrap="square" lIns="0" tIns="0" rIns="0" bIns="0" rtlCol="0" anchor="ctr"/>
           <a:lstStyle/>
           <a:p>
-            <a:pPr indent="0" marL="0">
+            <a:pPr marL="0" indent="0">
               <a:buNone/>
             </a:pPr>
             <a:r>
@@ -5141,7 +5063,7 @@
           <a:bodyPr wrap="square" lIns="0" tIns="0" rIns="0" bIns="0" rtlCol="0" anchor="ctr"/>
           <a:lstStyle/>
           <a:p>
-            <a:pPr indent="0" marL="0">
+            <a:pPr marL="0" indent="0">
               <a:buNone/>
             </a:pPr>
             <a:r>
@@ -5180,7 +5102,7 @@
           <a:bodyPr wrap="square" lIns="0" tIns="0" rIns="0" bIns="0" rtlCol="0" anchor="ctr"/>
           <a:lstStyle/>
           <a:p>
-            <a:pPr indent="0" marL="0">
+            <a:pPr marL="0" indent="0">
               <a:buNone/>
             </a:pPr>
             <a:endParaRPr lang="en-US" sz="1240" dirty="0"/>
@@ -5211,6 +5133,13 @@
             <a:prstDash val="solid"/>
           </a:ln>
         </p:spPr>
+        <p:txBody>
+          <a:bodyPr/>
+          <a:lstStyle/>
+          <a:p>
+            <a:endParaRPr lang="ko-KR" altLang="en-US"/>
+          </a:p>
+        </p:txBody>
       </p:sp>
       <p:sp>
         <p:nvSpPr>
@@ -5233,7 +5162,7 @@
           <a:bodyPr wrap="square" lIns="0" tIns="0" rIns="0" bIns="0" rtlCol="0" anchor="ctr"/>
           <a:lstStyle/>
           <a:p>
-            <a:pPr indent="0" marL="0">
+            <a:pPr marL="0" indent="0">
               <a:buNone/>
             </a:pPr>
             <a:r>
@@ -5272,7 +5201,7 @@
           <a:bodyPr wrap="square" lIns="0" tIns="0" rIns="0" bIns="0" rtlCol="0" anchor="ctr"/>
           <a:lstStyle/>
           <a:p>
-            <a:pPr indent="0" marL="0">
+            <a:pPr marL="0" indent="0">
               <a:buNone/>
             </a:pPr>
             <a:r>
@@ -5311,7 +5240,7 @@
           <a:bodyPr wrap="square" lIns="0" tIns="0" rIns="0" bIns="0" rtlCol="0" anchor="ctr"/>
           <a:lstStyle/>
           <a:p>
-            <a:pPr indent="0" marL="0">
+            <a:pPr marL="0" indent="0">
               <a:buNone/>
             </a:pPr>
             <a:endParaRPr lang="en-US" sz="1240" dirty="0"/>
@@ -5342,6 +5271,13 @@
             <a:prstDash val="solid"/>
           </a:ln>
         </p:spPr>
+        <p:txBody>
+          <a:bodyPr/>
+          <a:lstStyle/>
+          <a:p>
+            <a:endParaRPr lang="ko-KR" altLang="en-US"/>
+          </a:p>
+        </p:txBody>
       </p:sp>
       <p:sp>
         <p:nvSpPr>
@@ -5364,7 +5300,7 @@
           <a:bodyPr wrap="square" lIns="0" tIns="0" rIns="0" bIns="0" rtlCol="0" anchor="ctr"/>
           <a:lstStyle/>
           <a:p>
-            <a:pPr indent="0" marL="0">
+            <a:pPr marL="0" indent="0">
               <a:buNone/>
             </a:pPr>
             <a:r>
@@ -5403,7 +5339,7 @@
           <a:bodyPr wrap="square" lIns="0" tIns="0" rIns="0" bIns="0" rtlCol="0" anchor="ctr"/>
           <a:lstStyle/>
           <a:p>
-            <a:pPr indent="0" marL="0">
+            <a:pPr marL="0" indent="0">
               <a:buNone/>
             </a:pPr>
             <a:r>
@@ -5442,7 +5378,7 @@
           <a:bodyPr wrap="square" lIns="0" tIns="0" rIns="0" bIns="0" rtlCol="0" anchor="ctr"/>
           <a:lstStyle/>
           <a:p>
-            <a:pPr indent="0" marL="0">
+            <a:pPr marL="0" indent="0">
               <a:buNone/>
             </a:pPr>
             <a:endParaRPr lang="en-US" sz="1240" dirty="0"/>
@@ -5475,6 +5411,13 @@
             <a:prstDash val="solid"/>
           </a:ln>
         </p:spPr>
+        <p:txBody>
+          <a:bodyPr/>
+          <a:lstStyle/>
+          <a:p>
+            <a:endParaRPr lang="ko-KR" altLang="en-US"/>
+          </a:p>
+        </p:txBody>
       </p:sp>
       <p:sp>
         <p:nvSpPr>
@@ -5497,7 +5440,7 @@
           <a:bodyPr wrap="square" lIns="0" tIns="0" rIns="0" bIns="0" rtlCol="0" anchor="ctr"/>
           <a:lstStyle/>
           <a:p>
-            <a:pPr algn="ctr" indent="0" marL="0">
+            <a:pPr marL="0" indent="0" algn="ctr">
               <a:buNone/>
             </a:pPr>
             <a:r>
@@ -5531,6 +5474,7 @@
         <a:solidFill>
           <a:srgbClr val="FFFFFF"/>
         </a:solidFill>
+        <a:effectLst/>
       </p:bgPr>
     </p:bg>
     <p:spTree>
@@ -5568,7 +5512,7 @@
           <a:bodyPr wrap="square" lIns="0" tIns="0" rIns="0" bIns="0" rtlCol="0" anchor="ctr"/>
           <a:lstStyle/>
           <a:p>
-            <a:pPr indent="0" marL="0">
+            <a:pPr marL="0" indent="0">
               <a:buNone/>
             </a:pPr>
             <a:r>
@@ -5607,6 +5551,13 @@
           </a:solidFill>
           <a:ln/>
         </p:spPr>
+        <p:txBody>
+          <a:bodyPr/>
+          <a:lstStyle/>
+          <a:p>
+            <a:endParaRPr lang="ko-KR" altLang="en-US"/>
+          </a:p>
+        </p:txBody>
       </p:sp>
       <p:sp>
         <p:nvSpPr>
@@ -5629,7 +5580,7 @@
           <a:bodyPr wrap="square" lIns="0" tIns="0" rIns="0" bIns="0" rtlCol="0" anchor="ctr"/>
           <a:lstStyle/>
           <a:p>
-            <a:pPr algn="ctr" indent="0" marL="0">
+            <a:pPr marL="0" indent="0" algn="ctr">
               <a:buNone/>
             </a:pPr>
             <a:r>
@@ -5668,7 +5619,7 @@
           <a:bodyPr wrap="square" lIns="0" tIns="0" rIns="0" bIns="0" rtlCol="0" anchor="ctr"/>
           <a:lstStyle/>
           <a:p>
-            <a:pPr indent="0" marL="0">
+            <a:pPr marL="0" indent="0">
               <a:buNone/>
             </a:pPr>
             <a:r>
@@ -5705,6 +5656,13 @@
           </a:solidFill>
           <a:ln/>
         </p:spPr>
+        <p:txBody>
+          <a:bodyPr/>
+          <a:lstStyle/>
+          <a:p>
+            <a:endParaRPr lang="ko-KR" altLang="en-US"/>
+          </a:p>
+        </p:txBody>
       </p:sp>
       <p:sp>
         <p:nvSpPr>
@@ -5727,7 +5685,7 @@
           <a:bodyPr wrap="square" lIns="0" tIns="0" rIns="0" bIns="0" rtlCol="0" anchor="ctr"/>
           <a:lstStyle/>
           <a:p>
-            <a:pPr algn="r" indent="0" marL="0">
+            <a:pPr marL="0" indent="0" algn="r">
               <a:buNone/>
             </a:pPr>
             <a:r>
@@ -5766,7 +5724,7 @@
           <a:bodyPr wrap="square" lIns="0" tIns="0" rIns="0" bIns="0" rtlCol="0" anchor="ctr"/>
           <a:lstStyle/>
           <a:p>
-            <a:pPr indent="0" marL="0">
+            <a:pPr marL="0" indent="0">
               <a:buNone/>
             </a:pPr>
             <a:r>
@@ -5805,7 +5763,7 @@
           <a:bodyPr wrap="square" lIns="0" tIns="0" rIns="0" bIns="0" rtlCol="0" anchor="ctr"/>
           <a:lstStyle/>
           <a:p>
-            <a:pPr algn="r" indent="0" marL="0">
+            <a:pPr marL="0" indent="0" algn="r">
               <a:buNone/>
             </a:pPr>
             <a:r>
@@ -5842,6 +5800,13 @@
           </a:solidFill>
           <a:ln/>
         </p:spPr>
+        <p:txBody>
+          <a:bodyPr/>
+          <a:lstStyle/>
+          <a:p>
+            <a:endParaRPr lang="ko-KR" altLang="en-US"/>
+          </a:p>
+        </p:txBody>
       </p:sp>
       <p:sp>
         <p:nvSpPr>
@@ -5864,7 +5829,7 @@
           <a:bodyPr wrap="square" lIns="0" tIns="0" rIns="0" bIns="0" rtlCol="0" anchor="ctr"/>
           <a:lstStyle/>
           <a:p>
-            <a:pPr indent="0" marL="0">
+            <a:pPr marL="0" indent="0">
               <a:buNone/>
             </a:pPr>
             <a:r>
@@ -5901,6 +5866,13 @@
           </a:solidFill>
           <a:ln/>
         </p:spPr>
+        <p:txBody>
+          <a:bodyPr/>
+          <a:lstStyle/>
+          <a:p>
+            <a:endParaRPr lang="ko-KR" altLang="en-US"/>
+          </a:p>
+        </p:txBody>
       </p:sp>
       <p:sp>
         <p:nvSpPr>
@@ -5923,7 +5895,7 @@
           <a:bodyPr wrap="square" lIns="0" tIns="0" rIns="0" bIns="0" rtlCol="0" anchor="ctr"/>
           <a:lstStyle/>
           <a:p>
-            <a:pPr indent="0" marL="0">
+            <a:pPr marL="0" indent="0">
               <a:buNone/>
             </a:pPr>
             <a:r>
@@ -5960,6 +5932,13 @@
           </a:solidFill>
           <a:ln/>
         </p:spPr>
+        <p:txBody>
+          <a:bodyPr/>
+          <a:lstStyle/>
+          <a:p>
+            <a:endParaRPr lang="ko-KR" altLang="en-US"/>
+          </a:p>
+        </p:txBody>
       </p:sp>
       <p:sp>
         <p:nvSpPr>
@@ -5982,7 +5961,7 @@
           <a:bodyPr wrap="square" lIns="0" tIns="0" rIns="0" bIns="0" rtlCol="0" anchor="ctr"/>
           <a:lstStyle/>
           <a:p>
-            <a:pPr indent="0" marL="0">
+            <a:pPr marL="0" indent="0">
               <a:buNone/>
             </a:pPr>
             <a:r>
@@ -6024,6 +6003,13 @@
             <a:prstDash val="solid"/>
           </a:ln>
         </p:spPr>
+        <p:txBody>
+          <a:bodyPr/>
+          <a:lstStyle/>
+          <a:p>
+            <a:endParaRPr lang="ko-KR" altLang="en-US"/>
+          </a:p>
+        </p:txBody>
       </p:sp>
       <p:sp>
         <p:nvSpPr>
@@ -6046,7 +6032,7 @@
           <a:bodyPr wrap="square" lIns="0" tIns="0" rIns="0" bIns="0" rtlCol="0" anchor="ctr"/>
           <a:lstStyle/>
           <a:p>
-            <a:pPr indent="0" marL="0">
+            <a:pPr marL="0" indent="0">
               <a:buNone/>
             </a:pPr>
             <a:r>
@@ -6085,7 +6071,7 @@
           <a:bodyPr wrap="square" lIns="0" tIns="0" rIns="0" bIns="0" rtlCol="0" anchor="ctr"/>
           <a:lstStyle/>
           <a:p>
-            <a:pPr indent="0" marL="0">
+            <a:pPr marL="0" indent="0">
               <a:buNone/>
             </a:pPr>
             <a:endParaRPr lang="en-US" sz="1240" dirty="0"/>
@@ -6113,7 +6099,7 @@
           <a:bodyPr wrap="square" lIns="0" tIns="0" rIns="0" bIns="0" rtlCol="0" anchor="ctr"/>
           <a:lstStyle/>
           <a:p>
-            <a:pPr indent="0" marL="0">
+            <a:pPr marL="0" indent="0">
               <a:buNone/>
             </a:pPr>
             <a:endParaRPr lang="en-US" sz="1240" dirty="0"/>
@@ -6144,6 +6130,13 @@
             <a:prstDash val="solid"/>
           </a:ln>
         </p:spPr>
+        <p:txBody>
+          <a:bodyPr/>
+          <a:lstStyle/>
+          <a:p>
+            <a:endParaRPr lang="ko-KR" altLang="en-US"/>
+          </a:p>
+        </p:txBody>
       </p:sp>
       <p:sp>
         <p:nvSpPr>
@@ -6166,7 +6159,7 @@
           <a:bodyPr wrap="square" lIns="0" tIns="0" rIns="0" bIns="0" rtlCol="0" anchor="ctr"/>
           <a:lstStyle/>
           <a:p>
-            <a:pPr indent="0" marL="0">
+            <a:pPr marL="0" indent="0">
               <a:buNone/>
             </a:pPr>
             <a:endParaRPr lang="en-US" sz="1240" dirty="0"/>
@@ -6194,7 +6187,7 @@
           <a:bodyPr wrap="square" lIns="0" tIns="0" rIns="0" bIns="0" rtlCol="0" anchor="ctr"/>
           <a:lstStyle/>
           <a:p>
-            <a:pPr indent="0" marL="0">
+            <a:pPr marL="0" indent="0">
               <a:buNone/>
             </a:pPr>
             <a:endParaRPr lang="en-US" sz="1240" dirty="0"/>
@@ -6222,7 +6215,7 @@
           <a:bodyPr wrap="square" lIns="0" tIns="0" rIns="0" bIns="0" rtlCol="0" anchor="ctr"/>
           <a:lstStyle/>
           <a:p>
-            <a:pPr indent="0" marL="0">
+            <a:pPr marL="0" indent="0">
               <a:buNone/>
             </a:pPr>
             <a:endParaRPr lang="en-US" sz="1240" dirty="0"/>
@@ -6253,6 +6246,13 @@
             <a:prstDash val="solid"/>
           </a:ln>
         </p:spPr>
+        <p:txBody>
+          <a:bodyPr/>
+          <a:lstStyle/>
+          <a:p>
+            <a:endParaRPr lang="ko-KR" altLang="en-US"/>
+          </a:p>
+        </p:txBody>
       </p:sp>
       <p:sp>
         <p:nvSpPr>
@@ -6275,7 +6275,7 @@
           <a:bodyPr wrap="square" lIns="0" tIns="0" rIns="0" bIns="0" rtlCol="0" anchor="ctr"/>
           <a:lstStyle/>
           <a:p>
-            <a:pPr indent="0" marL="0">
+            <a:pPr marL="0" indent="0">
               <a:buNone/>
             </a:pPr>
             <a:endParaRPr lang="en-US" sz="1240" dirty="0"/>
@@ -6303,7 +6303,7 @@
           <a:bodyPr wrap="square" lIns="0" tIns="0" rIns="0" bIns="0" rtlCol="0" anchor="ctr"/>
           <a:lstStyle/>
           <a:p>
-            <a:pPr indent="0" marL="0">
+            <a:pPr marL="0" indent="0">
               <a:buNone/>
             </a:pPr>
             <a:endParaRPr lang="en-US" sz="1240" dirty="0"/>
@@ -6331,7 +6331,7 @@
           <a:bodyPr wrap="square" lIns="0" tIns="0" rIns="0" bIns="0" rtlCol="0" anchor="ctr"/>
           <a:lstStyle/>
           <a:p>
-            <a:pPr indent="0" marL="0">
+            <a:pPr marL="0" indent="0">
               <a:buNone/>
             </a:pPr>
             <a:endParaRPr lang="en-US" sz="1240" dirty="0"/>
@@ -6362,6 +6362,13 @@
             <a:prstDash val="solid"/>
           </a:ln>
         </p:spPr>
+        <p:txBody>
+          <a:bodyPr/>
+          <a:lstStyle/>
+          <a:p>
+            <a:endParaRPr lang="ko-KR" altLang="en-US"/>
+          </a:p>
+        </p:txBody>
       </p:sp>
       <p:sp>
         <p:nvSpPr>
@@ -6384,7 +6391,7 @@
           <a:bodyPr wrap="square" lIns="0" tIns="0" rIns="0" bIns="0" rtlCol="0" anchor="ctr"/>
           <a:lstStyle/>
           <a:p>
-            <a:pPr indent="0" marL="0">
+            <a:pPr marL="0" indent="0">
               <a:buNone/>
             </a:pPr>
             <a:endParaRPr lang="en-US" sz="1240" dirty="0"/>
@@ -6412,7 +6419,7 @@
           <a:bodyPr wrap="square" lIns="0" tIns="0" rIns="0" bIns="0" rtlCol="0" anchor="ctr"/>
           <a:lstStyle/>
           <a:p>
-            <a:pPr indent="0" marL="0">
+            <a:pPr marL="0" indent="0">
               <a:buNone/>
             </a:pPr>
             <a:endParaRPr lang="en-US" sz="1240" dirty="0"/>
@@ -6440,7 +6447,7 @@
           <a:bodyPr wrap="square" lIns="0" tIns="0" rIns="0" bIns="0" rtlCol="0" anchor="ctr"/>
           <a:lstStyle/>
           <a:p>
-            <a:pPr indent="0" marL="0">
+            <a:pPr marL="0" indent="0">
               <a:buNone/>
             </a:pPr>
             <a:endParaRPr lang="en-US" sz="1240" dirty="0"/>
@@ -6471,6 +6478,13 @@
             <a:prstDash val="solid"/>
           </a:ln>
         </p:spPr>
+        <p:txBody>
+          <a:bodyPr/>
+          <a:lstStyle/>
+          <a:p>
+            <a:endParaRPr lang="ko-KR" altLang="en-US"/>
+          </a:p>
+        </p:txBody>
       </p:sp>
       <p:sp>
         <p:nvSpPr>
@@ -6493,7 +6507,7 @@
           <a:bodyPr wrap="square" lIns="0" tIns="0" rIns="0" bIns="0" rtlCol="0" anchor="ctr"/>
           <a:lstStyle/>
           <a:p>
-            <a:pPr indent="0" marL="0">
+            <a:pPr marL="0" indent="0">
               <a:buNone/>
             </a:pPr>
             <a:endParaRPr lang="en-US" sz="1240" dirty="0"/>
@@ -6521,7 +6535,7 @@
           <a:bodyPr wrap="square" lIns="0" tIns="0" rIns="0" bIns="0" rtlCol="0" anchor="ctr"/>
           <a:lstStyle/>
           <a:p>
-            <a:pPr indent="0" marL="0">
+            <a:pPr marL="0" indent="0">
               <a:buNone/>
             </a:pPr>
             <a:endParaRPr lang="en-US" sz="1240" dirty="0"/>
@@ -6549,7 +6563,7 @@
           <a:bodyPr wrap="square" lIns="0" tIns="0" rIns="0" bIns="0" rtlCol="0" anchor="ctr"/>
           <a:lstStyle/>
           <a:p>
-            <a:pPr indent="0" marL="0">
+            <a:pPr marL="0" indent="0">
               <a:buNone/>
             </a:pPr>
             <a:endParaRPr lang="en-US" sz="1240" dirty="0"/>
@@ -6582,6 +6596,13 @@
             <a:prstDash val="solid"/>
           </a:ln>
         </p:spPr>
+        <p:txBody>
+          <a:bodyPr/>
+          <a:lstStyle/>
+          <a:p>
+            <a:endParaRPr lang="ko-KR" altLang="en-US"/>
+          </a:p>
+        </p:txBody>
       </p:sp>
       <p:sp>
         <p:nvSpPr>
@@ -6604,7 +6625,7 @@
           <a:bodyPr wrap="square" lIns="0" tIns="0" rIns="0" bIns="0" rtlCol="0" anchor="ctr"/>
           <a:lstStyle/>
           <a:p>
-            <a:pPr algn="ctr" indent="0" marL="0">
+            <a:pPr marL="0" indent="0" algn="ctr">
               <a:buNone/>
             </a:pPr>
             <a:r>
@@ -6643,7 +6664,7 @@
           <a:bodyPr wrap="square" lIns="0" tIns="0" rIns="0" bIns="0" rtlCol="0" anchor="ctr"/>
           <a:lstStyle/>
           <a:p>
-            <a:pPr algn="ctr" indent="0" marL="0">
+            <a:pPr marL="0" indent="0" algn="ctr">
               <a:buNone/>
             </a:pPr>
             <a:r>
@@ -6677,6 +6698,7 @@
         <a:solidFill>
           <a:srgbClr val="FFFFFF"/>
         </a:solidFill>
+        <a:effectLst/>
       </p:bgPr>
     </p:bg>
     <p:spTree>
@@ -6714,7 +6736,7 @@
           <a:bodyPr wrap="square" lIns="0" tIns="0" rIns="0" bIns="0" rtlCol="0" anchor="ctr"/>
           <a:lstStyle/>
           <a:p>
-            <a:pPr indent="0" marL="0">
+            <a:pPr marL="0" indent="0">
               <a:buNone/>
             </a:pPr>
             <a:r>
@@ -6753,6 +6775,13 @@
           </a:solidFill>
           <a:ln/>
         </p:spPr>
+        <p:txBody>
+          <a:bodyPr/>
+          <a:lstStyle/>
+          <a:p>
+            <a:endParaRPr lang="ko-KR" altLang="en-US"/>
+          </a:p>
+        </p:txBody>
       </p:sp>
       <p:sp>
         <p:nvSpPr>
@@ -6775,7 +6804,7 @@
           <a:bodyPr wrap="square" lIns="0" tIns="0" rIns="0" bIns="0" rtlCol="0" anchor="ctr"/>
           <a:lstStyle/>
           <a:p>
-            <a:pPr algn="ctr" indent="0" marL="0">
+            <a:pPr marL="0" indent="0" algn="ctr">
               <a:buNone/>
             </a:pPr>
             <a:r>
@@ -6814,7 +6843,7 @@
           <a:bodyPr wrap="square" lIns="0" tIns="0" rIns="0" bIns="0" rtlCol="0" anchor="ctr"/>
           <a:lstStyle/>
           <a:p>
-            <a:pPr indent="0" marL="0">
+            <a:pPr marL="0" indent="0">
               <a:buNone/>
             </a:pPr>
             <a:r>
@@ -6851,6 +6880,13 @@
           </a:solidFill>
           <a:ln/>
         </p:spPr>
+        <p:txBody>
+          <a:bodyPr/>
+          <a:lstStyle/>
+          <a:p>
+            <a:endParaRPr lang="ko-KR" altLang="en-US"/>
+          </a:p>
+        </p:txBody>
       </p:sp>
       <p:sp>
         <p:nvSpPr>
@@ -6873,7 +6909,7 @@
           <a:bodyPr wrap="square" lIns="0" tIns="0" rIns="0" bIns="0" rtlCol="0" anchor="ctr"/>
           <a:lstStyle/>
           <a:p>
-            <a:pPr algn="r" indent="0" marL="0">
+            <a:pPr marL="0" indent="0" algn="r">
               <a:buNone/>
             </a:pPr>
             <a:r>
@@ -6912,7 +6948,7 @@
           <a:bodyPr wrap="square" lIns="0" tIns="0" rIns="0" bIns="0" rtlCol="0" anchor="ctr"/>
           <a:lstStyle/>
           <a:p>
-            <a:pPr indent="0" marL="0">
+            <a:pPr marL="0" indent="0">
               <a:buNone/>
             </a:pPr>
             <a:r>
@@ -6951,7 +6987,7 @@
           <a:bodyPr wrap="square" lIns="0" tIns="0" rIns="0" bIns="0" rtlCol="0" anchor="ctr"/>
           <a:lstStyle/>
           <a:p>
-            <a:pPr algn="r" indent="0" marL="0">
+            <a:pPr marL="0" indent="0" algn="r">
               <a:buNone/>
             </a:pPr>
             <a:r>
@@ -6978,7 +7014,7 @@
         <p:spPr>
           <a:xfrm>
             <a:off x="530352" y="1828800"/>
-            <a:ext cx="5669280" cy="2103120"/>
+            <a:ext cx="5349240" cy="2103120"/>
           </a:xfrm>
           <a:prstGeom prst="roundRect">
             <a:avLst>
@@ -6990,6 +7026,13 @@
           </a:solidFill>
           <a:ln/>
         </p:spPr>
+        <p:txBody>
+          <a:bodyPr/>
+          <a:lstStyle/>
+          <a:p>
+            <a:endParaRPr lang="ko-KR" altLang="en-US"/>
+          </a:p>
+        </p:txBody>
       </p:sp>
       <p:sp>
         <p:nvSpPr>
@@ -7012,7 +7055,7 @@
           <a:bodyPr wrap="square" lIns="0" tIns="0" rIns="0" bIns="0" rtlCol="0" anchor="t"/>
           <a:lstStyle/>
           <a:p>
-            <a:pPr indent="0" marL="0">
+            <a:pPr marL="0" indent="0">
               <a:lnSpc>
                 <a:spcPts val="2380"/>
               </a:lnSpc>
@@ -7032,7 +7075,7 @@
             <a:endParaRPr lang="en-US" sz="1400" dirty="0"/>
           </a:p>
           <a:p>
-            <a:pPr indent="0" marL="0">
+            <a:pPr marL="0" indent="0">
               <a:lnSpc>
                 <a:spcPts val="2380"/>
               </a:lnSpc>
@@ -7052,7 +7095,7 @@
             <a:endParaRPr lang="en-US" sz="1400" dirty="0"/>
           </a:p>
           <a:p>
-            <a:pPr indent="0" marL="0">
+            <a:pPr marL="0" indent="0">
               <a:lnSpc>
                 <a:spcPts val="2380"/>
               </a:lnSpc>
@@ -7072,7 +7115,7 @@
             <a:endParaRPr lang="en-US" sz="1400" dirty="0"/>
           </a:p>
           <a:p>
-            <a:pPr indent="0" marL="0">
+            <a:pPr marL="0" indent="0">
               <a:lnSpc>
                 <a:spcPts val="2380"/>
               </a:lnSpc>
@@ -7114,7 +7157,7 @@
           <a:bodyPr wrap="square" lIns="0" tIns="0" rIns="0" bIns="0" rtlCol="0" anchor="ctr"/>
           <a:lstStyle/>
           <a:p>
-            <a:pPr algn="ctr" indent="0" marL="0">
+            <a:pPr marL="0" indent="0" algn="ctr">
               <a:buNone/>
             </a:pPr>
             <a:r>
@@ -7140,8 +7183,8 @@
         </p:nvSpPr>
         <p:spPr>
           <a:xfrm>
-            <a:off x="6583680" y="1828800"/>
-            <a:ext cx="2537460" cy="402336"/>
+            <a:off x="6336792" y="1828800"/>
+            <a:ext cx="2784348" cy="402336"/>
           </a:xfrm>
           <a:prstGeom prst="rect">
             <a:avLst/>
@@ -7151,6 +7194,13 @@
           </a:solidFill>
           <a:ln/>
         </p:spPr>
+        <p:txBody>
+          <a:bodyPr/>
+          <a:lstStyle/>
+          <a:p>
+            <a:endParaRPr lang="ko-KR" altLang="en-US"/>
+          </a:p>
+        </p:txBody>
       </p:sp>
       <p:sp>
         <p:nvSpPr>
@@ -7173,7 +7223,7 @@
           <a:bodyPr wrap="square" lIns="0" tIns="0" rIns="0" bIns="0" rtlCol="0" anchor="ctr"/>
           <a:lstStyle/>
           <a:p>
-            <a:pPr indent="0" marL="0">
+            <a:pPr marL="0" indent="0">
               <a:buNone/>
             </a:pPr>
             <a:r>
@@ -7210,6 +7260,13 @@
           </a:solidFill>
           <a:ln/>
         </p:spPr>
+        <p:txBody>
+          <a:bodyPr/>
+          <a:lstStyle/>
+          <a:p>
+            <a:endParaRPr lang="ko-KR" altLang="en-US"/>
+          </a:p>
+        </p:txBody>
       </p:sp>
       <p:sp>
         <p:nvSpPr>
@@ -7232,7 +7289,7 @@
           <a:bodyPr wrap="square" lIns="0" tIns="0" rIns="0" bIns="0" rtlCol="0" anchor="ctr"/>
           <a:lstStyle/>
           <a:p>
-            <a:pPr indent="0" marL="0">
+            <a:pPr marL="0" indent="0">
               <a:buNone/>
             </a:pPr>
             <a:r>
@@ -7258,8 +7315,8 @@
         </p:nvSpPr>
         <p:spPr>
           <a:xfrm>
-            <a:off x="6583680" y="2231136"/>
-            <a:ext cx="5074920" cy="502920"/>
+            <a:off x="6336792" y="2231136"/>
+            <a:ext cx="5321808" cy="502920"/>
           </a:xfrm>
           <a:prstGeom prst="rect">
             <a:avLst/>
@@ -7274,6 +7331,13 @@
             <a:prstDash val="solid"/>
           </a:ln>
         </p:spPr>
+        <p:txBody>
+          <a:bodyPr/>
+          <a:lstStyle/>
+          <a:p>
+            <a:endParaRPr lang="ko-KR" altLang="en-US"/>
+          </a:p>
+        </p:txBody>
       </p:sp>
       <p:sp>
         <p:nvSpPr>
@@ -7296,7 +7360,7 @@
           <a:bodyPr wrap="square" lIns="0" tIns="0" rIns="0" bIns="0" rtlCol="0" anchor="ctr"/>
           <a:lstStyle/>
           <a:p>
-            <a:pPr indent="0" marL="0">
+            <a:pPr marL="0" indent="0">
               <a:buNone/>
             </a:pPr>
             <a:r>
@@ -7335,7 +7399,7 @@
           <a:bodyPr wrap="square" lIns="0" tIns="0" rIns="0" bIns="0" rtlCol="0" anchor="ctr"/>
           <a:lstStyle/>
           <a:p>
-            <a:pPr indent="0" marL="0">
+            <a:pPr marL="0" indent="0">
               <a:buNone/>
             </a:pPr>
             <a:r>
@@ -7361,8 +7425,8 @@
         </p:nvSpPr>
         <p:spPr>
           <a:xfrm>
-            <a:off x="6583680" y="2734056"/>
-            <a:ext cx="5074920" cy="502920"/>
+            <a:off x="6336792" y="2734056"/>
+            <a:ext cx="5321808" cy="502920"/>
           </a:xfrm>
           <a:prstGeom prst="rect">
             <a:avLst/>
@@ -7377,6 +7441,13 @@
             <a:prstDash val="solid"/>
           </a:ln>
         </p:spPr>
+        <p:txBody>
+          <a:bodyPr/>
+          <a:lstStyle/>
+          <a:p>
+            <a:endParaRPr lang="ko-KR" altLang="en-US"/>
+          </a:p>
+        </p:txBody>
       </p:sp>
       <p:sp>
         <p:nvSpPr>
@@ -7399,7 +7470,7 @@
           <a:bodyPr wrap="square" lIns="0" tIns="0" rIns="0" bIns="0" rtlCol="0" anchor="ctr"/>
           <a:lstStyle/>
           <a:p>
-            <a:pPr indent="0" marL="0">
+            <a:pPr marL="0" indent="0">
               <a:buNone/>
             </a:pPr>
             <a:r>
@@ -7438,7 +7509,7 @@
           <a:bodyPr wrap="square" lIns="0" tIns="0" rIns="0" bIns="0" rtlCol="0" anchor="ctr"/>
           <a:lstStyle/>
           <a:p>
-            <a:pPr indent="0" marL="0">
+            <a:pPr marL="0" indent="0">
               <a:buNone/>
             </a:pPr>
             <a:r>
@@ -7482,6 +7553,13 @@
             <a:prstDash val="solid"/>
           </a:ln>
         </p:spPr>
+        <p:txBody>
+          <a:bodyPr/>
+          <a:lstStyle/>
+          <a:p>
+            <a:endParaRPr lang="ko-KR" altLang="en-US"/>
+          </a:p>
+        </p:txBody>
       </p:sp>
       <p:sp>
         <p:nvSpPr>
@@ -7504,7 +7582,7 @@
           <a:bodyPr wrap="square" lIns="0" tIns="0" rIns="0" bIns="0" rtlCol="0" anchor="ctr"/>
           <a:lstStyle/>
           <a:p>
-            <a:pPr indent="0" marL="0">
+            <a:pPr marL="0" indent="0">
               <a:buNone/>
             </a:pPr>
             <a:r>
@@ -7543,7 +7621,7 @@
           <a:bodyPr wrap="square" lIns="0" tIns="0" rIns="0" bIns="0" rtlCol="0" anchor="t"/>
           <a:lstStyle/>
           <a:p>
-            <a:pPr indent="0" marL="0">
+            <a:pPr marL="0" indent="0">
               <a:lnSpc>
                 <a:spcPts val="1900"/>
               </a:lnSpc>
@@ -7590,6 +7668,13 @@
             <a:prstDash val="solid"/>
           </a:ln>
         </p:spPr>
+        <p:txBody>
+          <a:bodyPr/>
+          <a:lstStyle/>
+          <a:p>
+            <a:endParaRPr lang="ko-KR" altLang="en-US"/>
+          </a:p>
+        </p:txBody>
       </p:sp>
       <p:sp>
         <p:nvSpPr>
@@ -7612,7 +7697,7 @@
           <a:bodyPr wrap="square" lIns="0" tIns="0" rIns="0" bIns="0" rtlCol="0" anchor="ctr"/>
           <a:lstStyle/>
           <a:p>
-            <a:pPr indent="0" marL="0">
+            <a:pPr marL="0" indent="0">
               <a:buNone/>
             </a:pPr>
             <a:r>
@@ -7651,7 +7736,7 @@
           <a:bodyPr wrap="square" lIns="0" tIns="0" rIns="0" bIns="0" rtlCol="0" anchor="t"/>
           <a:lstStyle/>
           <a:p>
-            <a:pPr indent="0" marL="0">
+            <a:pPr marL="0" indent="0">
               <a:lnSpc>
                 <a:spcPts val="1900"/>
               </a:lnSpc>
@@ -7698,6 +7783,13 @@
             <a:prstDash val="solid"/>
           </a:ln>
         </p:spPr>
+        <p:txBody>
+          <a:bodyPr/>
+          <a:lstStyle/>
+          <a:p>
+            <a:endParaRPr lang="ko-KR" altLang="en-US"/>
+          </a:p>
+        </p:txBody>
       </p:sp>
       <p:sp>
         <p:nvSpPr>
@@ -7720,7 +7812,7 @@
           <a:bodyPr wrap="square" lIns="0" tIns="0" rIns="0" bIns="0" rtlCol="0" anchor="ctr"/>
           <a:lstStyle/>
           <a:p>
-            <a:pPr algn="ctr" indent="0" marL="0">
+            <a:pPr marL="0" indent="0" algn="ctr">
               <a:buNone/>
             </a:pPr>
             <a:r>
@@ -7754,6 +7846,7 @@
         <a:solidFill>
           <a:srgbClr val="1B1D21"/>
         </a:solidFill>
+        <a:effectLst/>
       </p:bgPr>
     </p:bg>
     <p:spTree>
@@ -7789,6 +7882,13 @@
           </a:solidFill>
           <a:ln/>
         </p:spPr>
+        <p:txBody>
+          <a:bodyPr/>
+          <a:lstStyle/>
+          <a:p>
+            <a:endParaRPr lang="ko-KR" altLang="en-US"/>
+          </a:p>
+        </p:txBody>
       </p:sp>
       <p:sp>
         <p:nvSpPr>
@@ -7811,11 +7911,11 @@
           <a:bodyPr wrap="square" lIns="0" tIns="0" rIns="0" bIns="0" rtlCol="0" anchor="ctr"/>
           <a:lstStyle/>
           <a:p>
-            <a:pPr indent="0" marL="0">
-              <a:buNone/>
-            </a:pPr>
-            <a:r>
-              <a:rPr lang="en-US" sz="1200" b="1" spc="100" kern="0" dirty="0">
+            <a:pPr marL="0" indent="0">
+              <a:buNone/>
+            </a:pPr>
+            <a:r>
+              <a:rPr lang="en-US" sz="1200" b="1" kern="0" spc="100" dirty="0">
                 <a:solidFill>
                   <a:srgbClr val="6C7078"/>
                 </a:solidFill>
@@ -7850,7 +7950,7 @@
           <a:bodyPr wrap="square" lIns="0" tIns="0" rIns="0" bIns="0" rtlCol="0" anchor="ctr"/>
           <a:lstStyle/>
           <a:p>
-            <a:pPr indent="0" marL="0">
+            <a:pPr marL="0" indent="0">
               <a:buNone/>
             </a:pPr>
             <a:r>
@@ -7867,7 +7967,7 @@
             <a:endParaRPr lang="en-US" sz="3600" dirty="0"/>
           </a:p>
           <a:p>
-            <a:pPr indent="0" marL="0">
+            <a:pPr marL="0" indent="0">
               <a:buNone/>
             </a:pPr>
             <a:r>
@@ -7906,7 +8006,7 @@
           <a:bodyPr wrap="square" lIns="0" tIns="0" rIns="0" bIns="0" rtlCol="0" anchor="ctr"/>
           <a:lstStyle/>
           <a:p>
-            <a:pPr indent="0" marL="0">
+            <a:pPr marL="0" indent="0">
               <a:lnSpc>
                 <a:spcPts val="3200"/>
               </a:lnSpc>
@@ -7926,7 +8026,7 @@
             <a:endParaRPr lang="en-US" sz="1900" dirty="0"/>
           </a:p>
           <a:p>
-            <a:pPr indent="0" marL="0">
+            <a:pPr marL="0" indent="0">
               <a:lnSpc>
                 <a:spcPts val="3200"/>
               </a:lnSpc>
@@ -7968,7 +8068,7 @@
           <a:bodyPr wrap="square" lIns="0" tIns="0" rIns="0" bIns="0" rtlCol="0" anchor="ctr"/>
           <a:lstStyle/>
           <a:p>
-            <a:pPr indent="0" marL="0">
+            <a:pPr marL="0" indent="0">
               <a:buNone/>
             </a:pPr>
             <a:r>
@@ -8007,7 +8107,7 @@
           <a:bodyPr wrap="square" lIns="0" tIns="0" rIns="0" bIns="0" rtlCol="0" anchor="ctr"/>
           <a:lstStyle/>
           <a:p>
-            <a:pPr algn="r" indent="0" marL="0">
+            <a:pPr marL="0" indent="0" algn="r">
               <a:buNone/>
             </a:pPr>
             <a:r>
@@ -8041,6 +8141,7 @@
         <a:solidFill>
           <a:srgbClr val="FFFFFF"/>
         </a:solidFill>
+        <a:effectLst/>
       </p:bgPr>
     </p:bg>
     <p:spTree>
@@ -8078,7 +8179,7 @@
           <a:bodyPr wrap="square" lIns="0" tIns="0" rIns="0" bIns="0" rtlCol="0" anchor="ctr"/>
           <a:lstStyle/>
           <a:p>
-            <a:pPr indent="0" marL="0">
+            <a:pPr marL="0" indent="0">
               <a:buNone/>
             </a:pPr>
             <a:r>
@@ -8117,6 +8218,13 @@
           </a:solidFill>
           <a:ln/>
         </p:spPr>
+        <p:txBody>
+          <a:bodyPr/>
+          <a:lstStyle/>
+          <a:p>
+            <a:endParaRPr lang="ko-KR" altLang="en-US"/>
+          </a:p>
+        </p:txBody>
       </p:sp>
       <p:sp>
         <p:nvSpPr>
@@ -8139,7 +8247,7 @@
           <a:bodyPr wrap="square" lIns="0" tIns="0" rIns="0" bIns="0" rtlCol="0" anchor="ctr"/>
           <a:lstStyle/>
           <a:p>
-            <a:pPr algn="ctr" indent="0" marL="0">
+            <a:pPr marL="0" indent="0" algn="ctr">
               <a:buNone/>
             </a:pPr>
             <a:r>
@@ -8178,7 +8286,7 @@
           <a:bodyPr wrap="square" lIns="0" tIns="0" rIns="0" bIns="0" rtlCol="0" anchor="ctr"/>
           <a:lstStyle/>
           <a:p>
-            <a:pPr indent="0" marL="0">
+            <a:pPr marL="0" indent="0">
               <a:buNone/>
             </a:pPr>
             <a:r>
@@ -8215,6 +8323,13 @@
           </a:solidFill>
           <a:ln/>
         </p:spPr>
+        <p:txBody>
+          <a:bodyPr/>
+          <a:lstStyle/>
+          <a:p>
+            <a:endParaRPr lang="ko-KR" altLang="en-US"/>
+          </a:p>
+        </p:txBody>
       </p:sp>
       <p:sp>
         <p:nvSpPr>
@@ -8237,7 +8352,7 @@
           <a:bodyPr wrap="square" lIns="0" tIns="0" rIns="0" bIns="0" rtlCol="0" anchor="ctr"/>
           <a:lstStyle/>
           <a:p>
-            <a:pPr algn="r" indent="0" marL="0">
+            <a:pPr marL="0" indent="0" algn="r">
               <a:buNone/>
             </a:pPr>
             <a:r>
@@ -8276,7 +8391,7 @@
           <a:bodyPr wrap="square" lIns="0" tIns="0" rIns="0" bIns="0" rtlCol="0" anchor="ctr"/>
           <a:lstStyle/>
           <a:p>
-            <a:pPr indent="0" marL="0">
+            <a:pPr marL="0" indent="0">
               <a:buNone/>
             </a:pPr>
             <a:r>
@@ -8315,7 +8430,7 @@
           <a:bodyPr wrap="square" lIns="0" tIns="0" rIns="0" bIns="0" rtlCol="0" anchor="ctr"/>
           <a:lstStyle/>
           <a:p>
-            <a:pPr algn="r" indent="0" marL="0">
+            <a:pPr marL="0" indent="0" algn="r">
               <a:buNone/>
             </a:pPr>
             <a:r>
@@ -8354,6 +8469,13 @@
           </a:solidFill>
           <a:ln/>
         </p:spPr>
+        <p:txBody>
+          <a:bodyPr/>
+          <a:lstStyle/>
+          <a:p>
+            <a:endParaRPr lang="ko-KR" altLang="en-US"/>
+          </a:p>
+        </p:txBody>
       </p:sp>
       <p:sp>
         <p:nvSpPr>
@@ -8376,7 +8498,7 @@
           <a:bodyPr wrap="square" lIns="0" tIns="0" rIns="0" bIns="0" rtlCol="0" anchor="t"/>
           <a:lstStyle/>
           <a:p>
-            <a:pPr indent="0" marL="0">
+            <a:pPr marL="0" indent="0">
               <a:lnSpc>
                 <a:spcPts val="2720"/>
               </a:lnSpc>
@@ -8396,7 +8518,7 @@
             <a:endParaRPr lang="en-US" sz="1600" dirty="0"/>
           </a:p>
           <a:p>
-            <a:pPr indent="0" marL="0">
+            <a:pPr marL="0" indent="0">
               <a:lnSpc>
                 <a:spcPts val="2720"/>
               </a:lnSpc>
@@ -8416,7 +8538,7 @@
             <a:endParaRPr lang="en-US" sz="1600" dirty="0"/>
           </a:p>
           <a:p>
-            <a:pPr indent="0" marL="0">
+            <a:pPr marL="0" indent="0">
               <a:lnSpc>
                 <a:spcPts val="2720"/>
               </a:lnSpc>
@@ -8458,7 +8580,7 @@
           <a:bodyPr wrap="square" lIns="0" tIns="0" rIns="0" bIns="0" rtlCol="0" anchor="ctr"/>
           <a:lstStyle/>
           <a:p>
-            <a:pPr indent="0" marL="0">
+            <a:pPr marL="0" indent="0">
               <a:lnSpc>
                 <a:spcPts val="3100"/>
               </a:lnSpc>
@@ -8478,7 +8600,7 @@
             <a:endParaRPr lang="en-US" sz="2100" dirty="0"/>
           </a:p>
           <a:p>
-            <a:pPr indent="0" marL="0">
+            <a:pPr marL="0" indent="0">
               <a:lnSpc>
                 <a:spcPts val="3100"/>
               </a:lnSpc>
@@ -8501,14 +8623,14 @@
       </p:sp>
       <p:pic>
         <p:nvPicPr>
-          <p:cNvPr id="13" name="Image 0" descr="/home/claude/w5/교과서_배포/assets/img/03-2-04-too-many-names.png">    </p:cNvPr>
+          <p:cNvPr id="13" name="Image 0" descr="/home/claude/w5/교과서_배포/assets/img/03-2-04-too-many-names.png"/>
           <p:cNvPicPr>
             <a:picLocks noChangeAspect="1"/>
           </p:cNvPicPr>
           <p:nvPr/>
         </p:nvPicPr>
         <p:blipFill>
-          <a:blip r:embed="rId1"/>
+          <a:blip r:embed="rId3"/>
           <a:stretch>
             <a:fillRect/>
           </a:stretch>
@@ -8549,6 +8671,13 @@
             <a:prstDash val="solid"/>
           </a:ln>
         </p:spPr>
+        <p:txBody>
+          <a:bodyPr/>
+          <a:lstStyle/>
+          <a:p>
+            <a:endParaRPr lang="ko-KR" altLang="en-US"/>
+          </a:p>
+        </p:txBody>
       </p:sp>
       <p:sp>
         <p:nvSpPr>
@@ -8571,7 +8700,7 @@
           <a:bodyPr wrap="square" lIns="0" tIns="0" rIns="0" bIns="0" rtlCol="0" anchor="ctr"/>
           <a:lstStyle/>
           <a:p>
-            <a:pPr algn="ctr" indent="0" marL="0">
+            <a:pPr marL="0" indent="0" algn="ctr">
               <a:buNone/>
             </a:pPr>
             <a:r>
@@ -8610,7 +8739,7 @@
           <a:bodyPr wrap="square" lIns="0" tIns="0" rIns="0" bIns="0" rtlCol="0" anchor="ctr"/>
           <a:lstStyle/>
           <a:p>
-            <a:pPr algn="ctr" indent="0" marL="0">
+            <a:pPr marL="0" indent="0" algn="ctr">
               <a:buNone/>
             </a:pPr>
             <a:r>
@@ -8644,6 +8773,7 @@
         <a:solidFill>
           <a:srgbClr val="FFFFFF"/>
         </a:solidFill>
+        <a:effectLst/>
       </p:bgPr>
     </p:bg>
     <p:spTree>
@@ -8681,7 +8811,7 @@
           <a:bodyPr wrap="square" lIns="0" tIns="0" rIns="0" bIns="0" rtlCol="0" anchor="ctr"/>
           <a:lstStyle/>
           <a:p>
-            <a:pPr indent="0" marL="0">
+            <a:pPr marL="0" indent="0">
               <a:buNone/>
             </a:pPr>
             <a:r>
@@ -8720,6 +8850,13 @@
           </a:solidFill>
           <a:ln/>
         </p:spPr>
+        <p:txBody>
+          <a:bodyPr/>
+          <a:lstStyle/>
+          <a:p>
+            <a:endParaRPr lang="ko-KR" altLang="en-US"/>
+          </a:p>
+        </p:txBody>
       </p:sp>
       <p:sp>
         <p:nvSpPr>
@@ -8742,7 +8879,7 @@
           <a:bodyPr wrap="square" lIns="0" tIns="0" rIns="0" bIns="0" rtlCol="0" anchor="ctr"/>
           <a:lstStyle/>
           <a:p>
-            <a:pPr algn="ctr" indent="0" marL="0">
+            <a:pPr marL="0" indent="0" algn="ctr">
               <a:buNone/>
             </a:pPr>
             <a:r>
@@ -8781,7 +8918,7 @@
           <a:bodyPr wrap="square" lIns="0" tIns="0" rIns="0" bIns="0" rtlCol="0" anchor="ctr"/>
           <a:lstStyle/>
           <a:p>
-            <a:pPr indent="0" marL="0">
+            <a:pPr marL="0" indent="0">
               <a:buNone/>
             </a:pPr>
             <a:r>
@@ -8818,6 +8955,13 @@
           </a:solidFill>
           <a:ln/>
         </p:spPr>
+        <p:txBody>
+          <a:bodyPr/>
+          <a:lstStyle/>
+          <a:p>
+            <a:endParaRPr lang="ko-KR" altLang="en-US"/>
+          </a:p>
+        </p:txBody>
       </p:sp>
       <p:sp>
         <p:nvSpPr>
@@ -8840,7 +8984,7 @@
           <a:bodyPr wrap="square" lIns="0" tIns="0" rIns="0" bIns="0" rtlCol="0" anchor="ctr"/>
           <a:lstStyle/>
           <a:p>
-            <a:pPr algn="r" indent="0" marL="0">
+            <a:pPr marL="0" indent="0" algn="r">
               <a:buNone/>
             </a:pPr>
             <a:r>
@@ -8879,7 +9023,7 @@
           <a:bodyPr wrap="square" lIns="0" tIns="0" rIns="0" bIns="0" rtlCol="0" anchor="ctr"/>
           <a:lstStyle/>
           <a:p>
-            <a:pPr indent="0" marL="0">
+            <a:pPr marL="0" indent="0">
               <a:buNone/>
             </a:pPr>
             <a:r>
@@ -8918,7 +9062,7 @@
           <a:bodyPr wrap="square" lIns="0" tIns="0" rIns="0" bIns="0" rtlCol="0" anchor="ctr"/>
           <a:lstStyle/>
           <a:p>
-            <a:pPr algn="r" indent="0" marL="0">
+            <a:pPr marL="0" indent="0" algn="r">
               <a:buNone/>
             </a:pPr>
             <a:r>
@@ -8957,6 +9101,13 @@
           </a:solidFill>
           <a:ln/>
         </p:spPr>
+        <p:txBody>
+          <a:bodyPr/>
+          <a:lstStyle/>
+          <a:p>
+            <a:endParaRPr lang="ko-KR" altLang="en-US"/>
+          </a:p>
+        </p:txBody>
       </p:sp>
       <p:sp>
         <p:nvSpPr>
@@ -8979,7 +9130,7 @@
           <a:bodyPr wrap="square" lIns="0" tIns="0" rIns="0" bIns="0" rtlCol="0" anchor="t"/>
           <a:lstStyle/>
           <a:p>
-            <a:pPr indent="0" marL="0">
+            <a:pPr marL="0" indent="0">
               <a:lnSpc>
                 <a:spcPts val="3570"/>
               </a:lnSpc>
@@ -9024,6 +9175,13 @@
             <a:prstDash val="solid"/>
           </a:ln>
         </p:spPr>
+        <p:txBody>
+          <a:bodyPr/>
+          <a:lstStyle/>
+          <a:p>
+            <a:endParaRPr lang="ko-KR" altLang="en-US"/>
+          </a:p>
+        </p:txBody>
       </p:sp>
       <p:sp>
         <p:nvSpPr>
@@ -9046,7 +9204,7 @@
           <a:bodyPr wrap="square" lIns="0" tIns="0" rIns="0" bIns="0" rtlCol="0" anchor="ctr"/>
           <a:lstStyle/>
           <a:p>
-            <a:pPr algn="ctr" indent="0" marL="0">
+            <a:pPr marL="0" indent="0" algn="ctr">
               <a:buNone/>
             </a:pPr>
             <a:r>
@@ -9088,6 +9246,13 @@
             <a:prstDash val="solid"/>
           </a:ln>
         </p:spPr>
+        <p:txBody>
+          <a:bodyPr/>
+          <a:lstStyle/>
+          <a:p>
+            <a:endParaRPr lang="ko-KR" altLang="en-US"/>
+          </a:p>
+        </p:txBody>
       </p:sp>
       <p:sp>
         <p:nvSpPr>
@@ -9110,7 +9275,7 @@
           <a:bodyPr wrap="square" lIns="0" tIns="0" rIns="0" bIns="0" rtlCol="0" anchor="ctr"/>
           <a:lstStyle/>
           <a:p>
-            <a:pPr algn="ctr" indent="0" marL="0">
+            <a:pPr marL="0" indent="0" algn="ctr">
               <a:buNone/>
             </a:pPr>
             <a:r>
@@ -9152,6 +9317,13 @@
             <a:prstDash val="solid"/>
           </a:ln>
         </p:spPr>
+        <p:txBody>
+          <a:bodyPr/>
+          <a:lstStyle/>
+          <a:p>
+            <a:endParaRPr lang="ko-KR" altLang="en-US"/>
+          </a:p>
+        </p:txBody>
       </p:sp>
       <p:sp>
         <p:nvSpPr>
@@ -9174,7 +9346,7 @@
           <a:bodyPr wrap="square" lIns="0" tIns="0" rIns="0" bIns="0" rtlCol="0" anchor="ctr"/>
           <a:lstStyle/>
           <a:p>
-            <a:pPr algn="ctr" indent="0" marL="0">
+            <a:pPr marL="0" indent="0" algn="ctr">
               <a:buNone/>
             </a:pPr>
             <a:r>
@@ -9216,6 +9388,13 @@
             <a:prstDash val="solid"/>
           </a:ln>
         </p:spPr>
+        <p:txBody>
+          <a:bodyPr/>
+          <a:lstStyle/>
+          <a:p>
+            <a:endParaRPr lang="ko-KR" altLang="en-US"/>
+          </a:p>
+        </p:txBody>
       </p:sp>
       <p:sp>
         <p:nvSpPr>
@@ -9238,7 +9417,7 @@
           <a:bodyPr wrap="square" lIns="0" tIns="0" rIns="0" bIns="0" rtlCol="0" anchor="ctr"/>
           <a:lstStyle/>
           <a:p>
-            <a:pPr algn="ctr" indent="0" marL="0">
+            <a:pPr marL="0" indent="0" algn="ctr">
               <a:buNone/>
             </a:pPr>
             <a:r>
@@ -9277,7 +9456,7 @@
           <a:bodyPr wrap="square" lIns="0" tIns="0" rIns="0" bIns="0" rtlCol="0" anchor="ctr"/>
           <a:lstStyle/>
           <a:p>
-            <a:pPr algn="ctr" indent="0" marL="0">
+            <a:pPr marL="0" indent="0" algn="ctr">
               <a:buNone/>
             </a:pPr>
             <a:r>
@@ -9321,6 +9500,13 @@
             <a:prstDash val="solid"/>
           </a:ln>
         </p:spPr>
+        <p:txBody>
+          <a:bodyPr/>
+          <a:lstStyle/>
+          <a:p>
+            <a:endParaRPr lang="ko-KR" altLang="en-US"/>
+          </a:p>
+        </p:txBody>
       </p:sp>
       <p:sp>
         <p:nvSpPr>
@@ -9343,7 +9529,7 @@
           <a:bodyPr wrap="square" lIns="0" tIns="0" rIns="0" bIns="0" rtlCol="0" anchor="ctr"/>
           <a:lstStyle/>
           <a:p>
-            <a:pPr algn="ctr" indent="0" marL="0">
+            <a:pPr marL="0" indent="0" algn="ctr">
               <a:buNone/>
             </a:pPr>
             <a:r>
@@ -9377,6 +9563,7 @@
         <a:solidFill>
           <a:srgbClr val="FFFFFF"/>
         </a:solidFill>
+        <a:effectLst/>
       </p:bgPr>
     </p:bg>
     <p:spTree>
@@ -9414,7 +9601,7 @@
           <a:bodyPr wrap="square" lIns="0" tIns="0" rIns="0" bIns="0" rtlCol="0" anchor="ctr"/>
           <a:lstStyle/>
           <a:p>
-            <a:pPr indent="0" marL="0">
+            <a:pPr marL="0" indent="0">
               <a:buNone/>
             </a:pPr>
             <a:r>
@@ -9453,6 +9640,13 @@
           </a:solidFill>
           <a:ln/>
         </p:spPr>
+        <p:txBody>
+          <a:bodyPr/>
+          <a:lstStyle/>
+          <a:p>
+            <a:endParaRPr lang="ko-KR" altLang="en-US"/>
+          </a:p>
+        </p:txBody>
       </p:sp>
       <p:sp>
         <p:nvSpPr>
@@ -9475,7 +9669,7 @@
           <a:bodyPr wrap="square" lIns="0" tIns="0" rIns="0" bIns="0" rtlCol="0" anchor="ctr"/>
           <a:lstStyle/>
           <a:p>
-            <a:pPr algn="ctr" indent="0" marL="0">
+            <a:pPr marL="0" indent="0" algn="ctr">
               <a:buNone/>
             </a:pPr>
             <a:r>
@@ -9514,7 +9708,7 @@
           <a:bodyPr wrap="square" lIns="0" tIns="0" rIns="0" bIns="0" rtlCol="0" anchor="ctr"/>
           <a:lstStyle/>
           <a:p>
-            <a:pPr indent="0" marL="0">
+            <a:pPr marL="0" indent="0">
               <a:buNone/>
             </a:pPr>
             <a:r>
@@ -9551,6 +9745,13 @@
           </a:solidFill>
           <a:ln/>
         </p:spPr>
+        <p:txBody>
+          <a:bodyPr/>
+          <a:lstStyle/>
+          <a:p>
+            <a:endParaRPr lang="ko-KR" altLang="en-US"/>
+          </a:p>
+        </p:txBody>
       </p:sp>
       <p:sp>
         <p:nvSpPr>
@@ -9573,7 +9774,7 @@
           <a:bodyPr wrap="square" lIns="0" tIns="0" rIns="0" bIns="0" rtlCol="0" anchor="ctr"/>
           <a:lstStyle/>
           <a:p>
-            <a:pPr algn="r" indent="0" marL="0">
+            <a:pPr marL="0" indent="0" algn="r">
               <a:buNone/>
             </a:pPr>
             <a:r>
@@ -9612,7 +9813,7 @@
           <a:bodyPr wrap="square" lIns="0" tIns="0" rIns="0" bIns="0" rtlCol="0" anchor="ctr"/>
           <a:lstStyle/>
           <a:p>
-            <a:pPr indent="0" marL="0">
+            <a:pPr marL="0" indent="0">
               <a:buNone/>
             </a:pPr>
             <a:r>
@@ -9651,7 +9852,7 @@
           <a:bodyPr wrap="square" lIns="0" tIns="0" rIns="0" bIns="0" rtlCol="0" anchor="ctr"/>
           <a:lstStyle/>
           <a:p>
-            <a:pPr algn="r" indent="0" marL="0">
+            <a:pPr marL="0" indent="0" algn="r">
               <a:buNone/>
             </a:pPr>
             <a:r>
@@ -9678,7 +9879,7 @@
         <p:spPr>
           <a:xfrm>
             <a:off x="530352" y="1783080"/>
-            <a:ext cx="11128248" cy="1143000"/>
+            <a:ext cx="11128248" cy="1188720"/>
           </a:xfrm>
           <a:prstGeom prst="roundRect">
             <a:avLst>
@@ -9690,6 +9891,13 @@
           </a:solidFill>
           <a:ln/>
         </p:spPr>
+        <p:txBody>
+          <a:bodyPr/>
+          <a:lstStyle/>
+          <a:p>
+            <a:endParaRPr lang="ko-KR" altLang="en-US"/>
+          </a:p>
+        </p:txBody>
       </p:sp>
       <p:sp>
         <p:nvSpPr>
@@ -9712,7 +9920,7 @@
           <a:bodyPr wrap="square" lIns="0" tIns="0" rIns="0" bIns="0" rtlCol="0" anchor="ctr"/>
           <a:lstStyle/>
           <a:p>
-            <a:pPr indent="0" marL="0">
+            <a:pPr marL="0" indent="0">
               <a:buNone/>
             </a:pPr>
             <a:r>
@@ -9751,7 +9959,7 @@
           <a:bodyPr wrap="square" lIns="0" tIns="0" rIns="0" bIns="0" rtlCol="0" anchor="t"/>
           <a:lstStyle/>
           <a:p>
-            <a:pPr indent="0" marL="0">
+            <a:pPr marL="0" indent="0">
               <a:lnSpc>
                 <a:spcPts val="3060"/>
               </a:lnSpc>
@@ -9771,7 +9979,7 @@
             <a:endParaRPr lang="en-US" sz="1800" dirty="0"/>
           </a:p>
           <a:p>
-            <a:pPr indent="0" marL="0">
+            <a:pPr marL="0" indent="0">
               <a:lnSpc>
                 <a:spcPts val="3060"/>
               </a:lnSpc>
@@ -9800,7 +10008,7 @@
         </p:nvSpPr>
         <p:spPr>
           <a:xfrm>
-            <a:off x="2194560" y="3108960"/>
+            <a:off x="2194560" y="3143464"/>
             <a:ext cx="1943100" cy="1188720"/>
           </a:xfrm>
           <a:prstGeom prst="rect">
@@ -9816,6 +10024,13 @@
             <a:prstDash val="solid"/>
           </a:ln>
         </p:spPr>
+        <p:txBody>
+          <a:bodyPr/>
+          <a:lstStyle/>
+          <a:p>
+            <a:endParaRPr lang="ko-KR" altLang="en-US"/>
+          </a:p>
+        </p:txBody>
       </p:sp>
       <p:sp>
         <p:nvSpPr>
@@ -9825,7 +10040,7 @@
         </p:nvSpPr>
         <p:spPr>
           <a:xfrm>
-            <a:off x="2194560" y="3108960"/>
+            <a:off x="2194560" y="3143464"/>
             <a:ext cx="1943100" cy="1188720"/>
           </a:xfrm>
           <a:prstGeom prst="rect">
@@ -9838,7 +10053,7 @@
           <a:bodyPr wrap="square" lIns="0" tIns="0" rIns="0" bIns="0" rtlCol="0" anchor="ctr"/>
           <a:lstStyle/>
           <a:p>
-            <a:pPr algn="ctr" indent="0" marL="0">
+            <a:pPr marL="0" indent="0" algn="ctr">
               <a:buNone/>
             </a:pPr>
             <a:r>
@@ -9864,7 +10079,7 @@
         </p:nvSpPr>
         <p:spPr>
           <a:xfrm>
-            <a:off x="4137660" y="3108960"/>
+            <a:off x="4137660" y="3143464"/>
             <a:ext cx="1943100" cy="1188720"/>
           </a:xfrm>
           <a:prstGeom prst="rect">
@@ -9880,6 +10095,13 @@
             <a:prstDash val="solid"/>
           </a:ln>
         </p:spPr>
+        <p:txBody>
+          <a:bodyPr/>
+          <a:lstStyle/>
+          <a:p>
+            <a:endParaRPr lang="ko-KR" altLang="en-US"/>
+          </a:p>
+        </p:txBody>
       </p:sp>
       <p:sp>
         <p:nvSpPr>
@@ -9889,7 +10111,7 @@
         </p:nvSpPr>
         <p:spPr>
           <a:xfrm>
-            <a:off x="4137660" y="3108960"/>
+            <a:off x="4137660" y="3143464"/>
             <a:ext cx="1943100" cy="1188720"/>
           </a:xfrm>
           <a:prstGeom prst="rect">
@@ -9902,7 +10124,7 @@
           <a:bodyPr wrap="square" lIns="0" tIns="0" rIns="0" bIns="0" rtlCol="0" anchor="ctr"/>
           <a:lstStyle/>
           <a:p>
-            <a:pPr algn="ctr" indent="0" marL="0">
+            <a:pPr marL="0" indent="0" algn="ctr">
               <a:buNone/>
             </a:pPr>
             <a:r>
@@ -9928,7 +10150,7 @@
         </p:nvSpPr>
         <p:spPr>
           <a:xfrm>
-            <a:off x="6080760" y="3108960"/>
+            <a:off x="6080760" y="3143464"/>
             <a:ext cx="1943100" cy="1188720"/>
           </a:xfrm>
           <a:prstGeom prst="rect">
@@ -9944,6 +10166,13 @@
             <a:prstDash val="solid"/>
           </a:ln>
         </p:spPr>
+        <p:txBody>
+          <a:bodyPr/>
+          <a:lstStyle/>
+          <a:p>
+            <a:endParaRPr lang="ko-KR" altLang="en-US"/>
+          </a:p>
+        </p:txBody>
       </p:sp>
       <p:sp>
         <p:nvSpPr>
@@ -9953,7 +10182,7 @@
         </p:nvSpPr>
         <p:spPr>
           <a:xfrm>
-            <a:off x="6080760" y="3108960"/>
+            <a:off x="6080760" y="3143464"/>
             <a:ext cx="1943100" cy="1188720"/>
           </a:xfrm>
           <a:prstGeom prst="rect">
@@ -9966,7 +10195,7 @@
           <a:bodyPr wrap="square" lIns="0" tIns="0" rIns="0" bIns="0" rtlCol="0" anchor="ctr"/>
           <a:lstStyle/>
           <a:p>
-            <a:pPr algn="ctr" indent="0" marL="0">
+            <a:pPr marL="0" indent="0" algn="ctr">
               <a:buNone/>
             </a:pPr>
             <a:r>
@@ -9992,7 +10221,7 @@
         </p:nvSpPr>
         <p:spPr>
           <a:xfrm>
-            <a:off x="8023860" y="3108960"/>
+            <a:off x="8023860" y="3143464"/>
             <a:ext cx="1943100" cy="1188720"/>
           </a:xfrm>
           <a:prstGeom prst="rect">
@@ -10008,6 +10237,13 @@
             <a:prstDash val="solid"/>
           </a:ln>
         </p:spPr>
+        <p:txBody>
+          <a:bodyPr/>
+          <a:lstStyle/>
+          <a:p>
+            <a:endParaRPr lang="ko-KR" altLang="en-US"/>
+          </a:p>
+        </p:txBody>
       </p:sp>
       <p:sp>
         <p:nvSpPr>
@@ -10017,7 +10253,7 @@
         </p:nvSpPr>
         <p:spPr>
           <a:xfrm>
-            <a:off x="8023860" y="3108960"/>
+            <a:off x="8023860" y="3143464"/>
             <a:ext cx="1943100" cy="1188720"/>
           </a:xfrm>
           <a:prstGeom prst="rect">
@@ -10030,7 +10266,7 @@
           <a:bodyPr wrap="square" lIns="0" tIns="0" rIns="0" bIns="0" rtlCol="0" anchor="ctr"/>
           <a:lstStyle/>
           <a:p>
-            <a:pPr algn="ctr" indent="0" marL="0">
+            <a:pPr marL="0" indent="0" algn="ctr">
               <a:buNone/>
             </a:pPr>
             <a:r>
@@ -10056,7 +10292,7 @@
         </p:nvSpPr>
         <p:spPr>
           <a:xfrm>
-            <a:off x="530352" y="4480560"/>
+            <a:off x="530352" y="4515064"/>
             <a:ext cx="11128248" cy="640080"/>
           </a:xfrm>
           <a:prstGeom prst="rect">
@@ -10069,7 +10305,7 @@
           <a:bodyPr wrap="square" lIns="0" tIns="0" rIns="0" bIns="0" rtlCol="0" anchor="ctr"/>
           <a:lstStyle/>
           <a:p>
-            <a:pPr algn="ctr" indent="0" marL="0">
+            <a:pPr marL="0" indent="0" algn="ctr">
               <a:buNone/>
             </a:pPr>
             <a:r>
@@ -10103,6 +10339,7 @@
         <a:solidFill>
           <a:srgbClr val="FFFFFF"/>
         </a:solidFill>
+        <a:effectLst/>
       </p:bgPr>
     </p:bg>
     <p:spTree>
@@ -10140,7 +10377,7 @@
           <a:bodyPr wrap="square" lIns="0" tIns="0" rIns="0" bIns="0" rtlCol="0" anchor="ctr"/>
           <a:lstStyle/>
           <a:p>
-            <a:pPr indent="0" marL="0">
+            <a:pPr marL="0" indent="0">
               <a:buNone/>
             </a:pPr>
             <a:r>
@@ -10179,6 +10416,13 @@
           </a:solidFill>
           <a:ln/>
         </p:spPr>
+        <p:txBody>
+          <a:bodyPr/>
+          <a:lstStyle/>
+          <a:p>
+            <a:endParaRPr lang="ko-KR" altLang="en-US"/>
+          </a:p>
+        </p:txBody>
       </p:sp>
       <p:sp>
         <p:nvSpPr>
@@ -10201,7 +10445,7 @@
           <a:bodyPr wrap="square" lIns="0" tIns="0" rIns="0" bIns="0" rtlCol="0" anchor="ctr"/>
           <a:lstStyle/>
           <a:p>
-            <a:pPr algn="ctr" indent="0" marL="0">
+            <a:pPr marL="0" indent="0" algn="ctr">
               <a:buNone/>
             </a:pPr>
             <a:r>
@@ -10240,7 +10484,7 @@
           <a:bodyPr wrap="square" lIns="0" tIns="0" rIns="0" bIns="0" rtlCol="0" anchor="ctr"/>
           <a:lstStyle/>
           <a:p>
-            <a:pPr indent="0" marL="0">
+            <a:pPr marL="0" indent="0">
               <a:buNone/>
             </a:pPr>
             <a:r>
@@ -10277,6 +10521,13 @@
           </a:solidFill>
           <a:ln/>
         </p:spPr>
+        <p:txBody>
+          <a:bodyPr/>
+          <a:lstStyle/>
+          <a:p>
+            <a:endParaRPr lang="ko-KR" altLang="en-US"/>
+          </a:p>
+        </p:txBody>
       </p:sp>
       <p:sp>
         <p:nvSpPr>
@@ -10299,7 +10550,7 @@
           <a:bodyPr wrap="square" lIns="0" tIns="0" rIns="0" bIns="0" rtlCol="0" anchor="ctr"/>
           <a:lstStyle/>
           <a:p>
-            <a:pPr algn="r" indent="0" marL="0">
+            <a:pPr marL="0" indent="0" algn="r">
               <a:buNone/>
             </a:pPr>
             <a:r>
@@ -10338,7 +10589,7 @@
           <a:bodyPr wrap="square" lIns="0" tIns="0" rIns="0" bIns="0" rtlCol="0" anchor="ctr"/>
           <a:lstStyle/>
           <a:p>
-            <a:pPr indent="0" marL="0">
+            <a:pPr marL="0" indent="0">
               <a:buNone/>
             </a:pPr>
             <a:r>
@@ -10377,7 +10628,7 @@
           <a:bodyPr wrap="square" lIns="0" tIns="0" rIns="0" bIns="0" rtlCol="0" anchor="ctr"/>
           <a:lstStyle/>
           <a:p>
-            <a:pPr algn="r" indent="0" marL="0">
+            <a:pPr marL="0" indent="0" algn="r">
               <a:buNone/>
             </a:pPr>
             <a:r>
@@ -10419,6 +10670,13 @@
             <a:prstDash val="solid"/>
           </a:ln>
         </p:spPr>
+        <p:txBody>
+          <a:bodyPr/>
+          <a:lstStyle/>
+          <a:p>
+            <a:endParaRPr lang="ko-KR" altLang="en-US"/>
+          </a:p>
+        </p:txBody>
       </p:sp>
       <p:sp>
         <p:nvSpPr>
@@ -10441,7 +10699,7 @@
           <a:bodyPr wrap="square" lIns="0" tIns="0" rIns="0" bIns="0" rtlCol="0" anchor="ctr"/>
           <a:lstStyle/>
           <a:p>
-            <a:pPr algn="ctr" indent="0" marL="0">
+            <a:pPr marL="0" indent="0" algn="ctr">
               <a:buNone/>
             </a:pPr>
             <a:r>
@@ -10480,7 +10738,7 @@
           <a:bodyPr wrap="square" lIns="0" tIns="0" rIns="0" bIns="0" rtlCol="0" anchor="ctr"/>
           <a:lstStyle/>
           <a:p>
-            <a:pPr algn="ctr" indent="0" marL="0">
+            <a:pPr marL="0" indent="0" algn="ctr">
               <a:buNone/>
             </a:pPr>
             <a:r>
@@ -10522,6 +10780,13 @@
             <a:prstDash val="solid"/>
           </a:ln>
         </p:spPr>
+        <p:txBody>
+          <a:bodyPr/>
+          <a:lstStyle/>
+          <a:p>
+            <a:endParaRPr lang="ko-KR" altLang="en-US"/>
+          </a:p>
+        </p:txBody>
       </p:sp>
       <p:sp>
         <p:nvSpPr>
@@ -10544,7 +10809,7 @@
           <a:bodyPr wrap="square" lIns="0" tIns="0" rIns="0" bIns="0" rtlCol="0" anchor="ctr"/>
           <a:lstStyle/>
           <a:p>
-            <a:pPr algn="ctr" indent="0" marL="0">
+            <a:pPr marL="0" indent="0" algn="ctr">
               <a:buNone/>
             </a:pPr>
             <a:r>
@@ -10583,7 +10848,7 @@
           <a:bodyPr wrap="square" lIns="0" tIns="0" rIns="0" bIns="0" rtlCol="0" anchor="ctr"/>
           <a:lstStyle/>
           <a:p>
-            <a:pPr algn="ctr" indent="0" marL="0">
+            <a:pPr marL="0" indent="0" algn="ctr">
               <a:buNone/>
             </a:pPr>
             <a:r>
@@ -10625,6 +10890,13 @@
             <a:prstDash val="solid"/>
           </a:ln>
         </p:spPr>
+        <p:txBody>
+          <a:bodyPr/>
+          <a:lstStyle/>
+          <a:p>
+            <a:endParaRPr lang="ko-KR" altLang="en-US"/>
+          </a:p>
+        </p:txBody>
       </p:sp>
       <p:sp>
         <p:nvSpPr>
@@ -10647,7 +10919,7 @@
           <a:bodyPr wrap="square" lIns="0" tIns="0" rIns="0" bIns="0" rtlCol="0" anchor="ctr"/>
           <a:lstStyle/>
           <a:p>
-            <a:pPr algn="ctr" indent="0" marL="0">
+            <a:pPr marL="0" indent="0" algn="ctr">
               <a:buNone/>
             </a:pPr>
             <a:r>
@@ -10686,7 +10958,7 @@
           <a:bodyPr wrap="square" lIns="0" tIns="0" rIns="0" bIns="0" rtlCol="0" anchor="ctr"/>
           <a:lstStyle/>
           <a:p>
-            <a:pPr algn="ctr" indent="0" marL="0">
+            <a:pPr marL="0" indent="0" algn="ctr">
               <a:buNone/>
             </a:pPr>
             <a:r>
@@ -10728,6 +11000,13 @@
             <a:prstDash val="solid"/>
           </a:ln>
         </p:spPr>
+        <p:txBody>
+          <a:bodyPr/>
+          <a:lstStyle/>
+          <a:p>
+            <a:endParaRPr lang="ko-KR" altLang="en-US"/>
+          </a:p>
+        </p:txBody>
       </p:sp>
       <p:sp>
         <p:nvSpPr>
@@ -10750,7 +11029,7 @@
           <a:bodyPr wrap="square" lIns="0" tIns="0" rIns="0" bIns="0" rtlCol="0" anchor="ctr"/>
           <a:lstStyle/>
           <a:p>
-            <a:pPr algn="ctr" indent="0" marL="0">
+            <a:pPr marL="0" indent="0" algn="ctr">
               <a:buNone/>
             </a:pPr>
             <a:r>
@@ -10789,7 +11068,7 @@
           <a:bodyPr wrap="square" lIns="0" tIns="0" rIns="0" bIns="0" rtlCol="0" anchor="ctr"/>
           <a:lstStyle/>
           <a:p>
-            <a:pPr algn="ctr" indent="0" marL="0">
+            <a:pPr marL="0" indent="0" algn="ctr">
               <a:buNone/>
             </a:pPr>
             <a:r>
@@ -10828,7 +11107,7 @@
           <a:bodyPr wrap="square" lIns="0" tIns="0" rIns="0" bIns="0" rtlCol="0" anchor="ctr"/>
           <a:lstStyle/>
           <a:p>
-            <a:pPr algn="ctr" indent="0" marL="0">
+            <a:pPr marL="0" indent="0" algn="ctr">
               <a:buNone/>
             </a:pPr>
             <a:r>
@@ -10848,14 +11127,14 @@
       </p:sp>
       <p:pic>
         <p:nvPicPr>
-          <p:cNvPr id="23" name="Image 0" descr="/home/claude/w5/교과서_배포/assets/img/03-2-01-ruler-zero.png">    </p:cNvPr>
+          <p:cNvPr id="23" name="Image 0" descr="/home/claude/w5/교과서_배포/assets/img/03-2-01-ruler-zero.png"/>
           <p:cNvPicPr>
             <a:picLocks noChangeAspect="1"/>
           </p:cNvPicPr>
           <p:nvPr/>
         </p:nvPicPr>
         <p:blipFill>
-          <a:blip r:embed="rId1"/>
+          <a:blip r:embed="rId3"/>
           <a:stretch>
             <a:fillRect/>
           </a:stretch>
@@ -10886,6 +11165,7 @@
         <a:solidFill>
           <a:srgbClr val="FFFFFF"/>
         </a:solidFill>
+        <a:effectLst/>
       </p:bgPr>
     </p:bg>
     <p:spTree>
@@ -10923,7 +11203,7 @@
           <a:bodyPr wrap="square" lIns="0" tIns="0" rIns="0" bIns="0" rtlCol="0" anchor="ctr"/>
           <a:lstStyle/>
           <a:p>
-            <a:pPr indent="0" marL="0">
+            <a:pPr marL="0" indent="0">
               <a:buNone/>
             </a:pPr>
             <a:r>
@@ -10962,6 +11242,13 @@
           </a:solidFill>
           <a:ln/>
         </p:spPr>
+        <p:txBody>
+          <a:bodyPr/>
+          <a:lstStyle/>
+          <a:p>
+            <a:endParaRPr lang="ko-KR" altLang="en-US"/>
+          </a:p>
+        </p:txBody>
       </p:sp>
       <p:sp>
         <p:nvSpPr>
@@ -10984,7 +11271,7 @@
           <a:bodyPr wrap="square" lIns="0" tIns="0" rIns="0" bIns="0" rtlCol="0" anchor="ctr"/>
           <a:lstStyle/>
           <a:p>
-            <a:pPr algn="ctr" indent="0" marL="0">
+            <a:pPr marL="0" indent="0" algn="ctr">
               <a:buNone/>
             </a:pPr>
             <a:r>
@@ -11023,7 +11310,7 @@
           <a:bodyPr wrap="square" lIns="0" tIns="0" rIns="0" bIns="0" rtlCol="0" anchor="ctr"/>
           <a:lstStyle/>
           <a:p>
-            <a:pPr indent="0" marL="0">
+            <a:pPr marL="0" indent="0">
               <a:buNone/>
             </a:pPr>
             <a:r>
@@ -11060,6 +11347,13 @@
           </a:solidFill>
           <a:ln/>
         </p:spPr>
+        <p:txBody>
+          <a:bodyPr/>
+          <a:lstStyle/>
+          <a:p>
+            <a:endParaRPr lang="ko-KR" altLang="en-US"/>
+          </a:p>
+        </p:txBody>
       </p:sp>
       <p:sp>
         <p:nvSpPr>
@@ -11082,7 +11376,7 @@
           <a:bodyPr wrap="square" lIns="0" tIns="0" rIns="0" bIns="0" rtlCol="0" anchor="ctr"/>
           <a:lstStyle/>
           <a:p>
-            <a:pPr algn="r" indent="0" marL="0">
+            <a:pPr marL="0" indent="0" algn="r">
               <a:buNone/>
             </a:pPr>
             <a:r>
@@ -11121,7 +11415,7 @@
           <a:bodyPr wrap="square" lIns="0" tIns="0" rIns="0" bIns="0" rtlCol="0" anchor="ctr"/>
           <a:lstStyle/>
           <a:p>
-            <a:pPr indent="0" marL="0">
+            <a:pPr marL="0" indent="0">
               <a:buNone/>
             </a:pPr>
             <a:r>
@@ -11160,7 +11454,7 @@
           <a:bodyPr wrap="square" lIns="0" tIns="0" rIns="0" bIns="0" rtlCol="0" anchor="ctr"/>
           <a:lstStyle/>
           <a:p>
-            <a:pPr algn="r" indent="0" marL="0">
+            <a:pPr marL="0" indent="0" algn="r">
               <a:buNone/>
             </a:pPr>
             <a:r>
@@ -11202,6 +11496,13 @@
             <a:prstDash val="solid"/>
           </a:ln>
         </p:spPr>
+        <p:txBody>
+          <a:bodyPr/>
+          <a:lstStyle/>
+          <a:p>
+            <a:endParaRPr lang="ko-KR" altLang="en-US"/>
+          </a:p>
+        </p:txBody>
       </p:sp>
       <p:sp>
         <p:nvSpPr>
@@ -11224,7 +11525,7 @@
           <a:bodyPr wrap="square" lIns="0" tIns="0" rIns="0" bIns="0" rtlCol="0" anchor="ctr"/>
           <a:lstStyle/>
           <a:p>
-            <a:pPr algn="ctr" indent="0" marL="0">
+            <a:pPr marL="0" indent="0" algn="ctr">
               <a:buNone/>
             </a:pPr>
             <a:r>
@@ -11263,7 +11564,7 @@
           <a:bodyPr wrap="square" lIns="0" tIns="0" rIns="0" bIns="0" rtlCol="0" anchor="ctr"/>
           <a:lstStyle/>
           <a:p>
-            <a:pPr algn="ctr" indent="0" marL="0">
+            <a:pPr marL="0" indent="0" algn="ctr">
               <a:buNone/>
             </a:pPr>
             <a:r>
@@ -11305,6 +11606,13 @@
             <a:prstDash val="solid"/>
           </a:ln>
         </p:spPr>
+        <p:txBody>
+          <a:bodyPr/>
+          <a:lstStyle/>
+          <a:p>
+            <a:endParaRPr lang="ko-KR" altLang="en-US"/>
+          </a:p>
+        </p:txBody>
       </p:sp>
       <p:sp>
         <p:nvSpPr>
@@ -11327,7 +11635,7 @@
           <a:bodyPr wrap="square" lIns="0" tIns="0" rIns="0" bIns="0" rtlCol="0" anchor="ctr"/>
           <a:lstStyle/>
           <a:p>
-            <a:pPr algn="ctr" indent="0" marL="0">
+            <a:pPr marL="0" indent="0" algn="ctr">
               <a:buNone/>
             </a:pPr>
             <a:r>
@@ -11366,7 +11674,7 @@
           <a:bodyPr wrap="square" lIns="0" tIns="0" rIns="0" bIns="0" rtlCol="0" anchor="ctr"/>
           <a:lstStyle/>
           <a:p>
-            <a:pPr algn="ctr" indent="0" marL="0">
+            <a:pPr marL="0" indent="0" algn="ctr">
               <a:buNone/>
             </a:pPr>
             <a:r>
@@ -11408,6 +11716,13 @@
             <a:prstDash val="solid"/>
           </a:ln>
         </p:spPr>
+        <p:txBody>
+          <a:bodyPr/>
+          <a:lstStyle/>
+          <a:p>
+            <a:endParaRPr lang="ko-KR" altLang="en-US"/>
+          </a:p>
+        </p:txBody>
       </p:sp>
       <p:sp>
         <p:nvSpPr>
@@ -11430,7 +11745,7 @@
           <a:bodyPr wrap="square" lIns="0" tIns="0" rIns="0" bIns="0" rtlCol="0" anchor="ctr"/>
           <a:lstStyle/>
           <a:p>
-            <a:pPr algn="ctr" indent="0" marL="0">
+            <a:pPr marL="0" indent="0" algn="ctr">
               <a:buNone/>
             </a:pPr>
             <a:r>
@@ -11469,7 +11784,7 @@
           <a:bodyPr wrap="square" lIns="0" tIns="0" rIns="0" bIns="0" rtlCol="0" anchor="ctr"/>
           <a:lstStyle/>
           <a:p>
-            <a:pPr algn="ctr" indent="0" marL="0">
+            <a:pPr marL="0" indent="0" algn="ctr">
               <a:buNone/>
             </a:pPr>
             <a:r>
@@ -11511,6 +11826,13 @@
             <a:prstDash val="solid"/>
           </a:ln>
         </p:spPr>
+        <p:txBody>
+          <a:bodyPr/>
+          <a:lstStyle/>
+          <a:p>
+            <a:endParaRPr lang="ko-KR" altLang="en-US"/>
+          </a:p>
+        </p:txBody>
       </p:sp>
       <p:sp>
         <p:nvSpPr>
@@ -11533,7 +11855,7 @@
           <a:bodyPr wrap="square" lIns="0" tIns="0" rIns="0" bIns="0" rtlCol="0" anchor="ctr"/>
           <a:lstStyle/>
           <a:p>
-            <a:pPr algn="ctr" indent="0" marL="0">
+            <a:pPr marL="0" indent="0" algn="ctr">
               <a:buNone/>
             </a:pPr>
             <a:r>
@@ -11572,7 +11894,7 @@
           <a:bodyPr wrap="square" lIns="0" tIns="0" rIns="0" bIns="0" rtlCol="0" anchor="ctr"/>
           <a:lstStyle/>
           <a:p>
-            <a:pPr algn="ctr" indent="0" marL="0">
+            <a:pPr marL="0" indent="0" algn="ctr">
               <a:buNone/>
             </a:pPr>
             <a:r>
@@ -11616,6 +11938,13 @@
             <a:prstDash val="solid"/>
           </a:ln>
         </p:spPr>
+        <p:txBody>
+          <a:bodyPr/>
+          <a:lstStyle/>
+          <a:p>
+            <a:endParaRPr lang="ko-KR" altLang="en-US"/>
+          </a:p>
+        </p:txBody>
       </p:sp>
       <p:sp>
         <p:nvSpPr>
@@ -11638,7 +11967,7 @@
           <a:bodyPr wrap="square" lIns="0" tIns="0" rIns="0" bIns="0" rtlCol="0" anchor="ctr"/>
           <a:lstStyle/>
           <a:p>
-            <a:pPr indent="0" marL="0">
+            <a:pPr marL="0" indent="0">
               <a:buNone/>
             </a:pPr>
             <a:r>
@@ -11677,7 +12006,7 @@
           <a:bodyPr wrap="square" lIns="0" tIns="0" rIns="0" bIns="0" rtlCol="0" anchor="t"/>
           <a:lstStyle/>
           <a:p>
-            <a:pPr indent="0" marL="0">
+            <a:pPr marL="0" indent="0">
               <a:lnSpc>
                 <a:spcPts val="1900"/>
               </a:lnSpc>
@@ -11724,6 +12053,13 @@
             <a:prstDash val="solid"/>
           </a:ln>
         </p:spPr>
+        <p:txBody>
+          <a:bodyPr/>
+          <a:lstStyle/>
+          <a:p>
+            <a:endParaRPr lang="ko-KR" altLang="en-US"/>
+          </a:p>
+        </p:txBody>
       </p:sp>
       <p:sp>
         <p:nvSpPr>
@@ -11746,7 +12082,7 @@
           <a:bodyPr wrap="square" lIns="0" tIns="0" rIns="0" bIns="0" rtlCol="0" anchor="ctr"/>
           <a:lstStyle/>
           <a:p>
-            <a:pPr indent="0" marL="0">
+            <a:pPr marL="0" indent="0">
               <a:buNone/>
             </a:pPr>
             <a:r>
@@ -11785,7 +12121,7 @@
           <a:bodyPr wrap="square" lIns="0" tIns="0" rIns="0" bIns="0" rtlCol="0" anchor="t"/>
           <a:lstStyle/>
           <a:p>
-            <a:pPr indent="0" marL="0">
+            <a:pPr marL="0" indent="0">
               <a:lnSpc>
                 <a:spcPts val="1900"/>
               </a:lnSpc>
@@ -11832,6 +12168,13 @@
             <a:prstDash val="solid"/>
           </a:ln>
         </p:spPr>
+        <p:txBody>
+          <a:bodyPr/>
+          <a:lstStyle/>
+          <a:p>
+            <a:endParaRPr lang="ko-KR" altLang="en-US"/>
+          </a:p>
+        </p:txBody>
       </p:sp>
       <p:sp>
         <p:nvSpPr>
@@ -11854,7 +12197,7 @@
           <a:bodyPr wrap="square" lIns="0" tIns="0" rIns="0" bIns="0" rtlCol="0" anchor="ctr"/>
           <a:lstStyle/>
           <a:p>
-            <a:pPr algn="ctr" indent="0" marL="0">
+            <a:pPr marL="0" indent="0" algn="ctr">
               <a:buNone/>
             </a:pPr>
             <a:r>
@@ -11888,6 +12231,7 @@
         <a:solidFill>
           <a:srgbClr val="FFFFFF"/>
         </a:solidFill>
+        <a:effectLst/>
       </p:bgPr>
     </p:bg>
     <p:spTree>
@@ -11925,7 +12269,7 @@
           <a:bodyPr wrap="square" lIns="0" tIns="0" rIns="0" bIns="0" rtlCol="0" anchor="ctr"/>
           <a:lstStyle/>
           <a:p>
-            <a:pPr indent="0" marL="0">
+            <a:pPr marL="0" indent="0">
               <a:buNone/>
             </a:pPr>
             <a:r>
@@ -11964,6 +12308,13 @@
           </a:solidFill>
           <a:ln/>
         </p:spPr>
+        <p:txBody>
+          <a:bodyPr/>
+          <a:lstStyle/>
+          <a:p>
+            <a:endParaRPr lang="ko-KR" altLang="en-US"/>
+          </a:p>
+        </p:txBody>
       </p:sp>
       <p:sp>
         <p:nvSpPr>
@@ -11986,7 +12337,7 @@
           <a:bodyPr wrap="square" lIns="0" tIns="0" rIns="0" bIns="0" rtlCol="0" anchor="ctr"/>
           <a:lstStyle/>
           <a:p>
-            <a:pPr algn="ctr" indent="0" marL="0">
+            <a:pPr marL="0" indent="0" algn="ctr">
               <a:buNone/>
             </a:pPr>
             <a:r>
@@ -12025,7 +12376,7 @@
           <a:bodyPr wrap="square" lIns="0" tIns="0" rIns="0" bIns="0" rtlCol="0" anchor="ctr"/>
           <a:lstStyle/>
           <a:p>
-            <a:pPr indent="0" marL="0">
+            <a:pPr marL="0" indent="0">
               <a:buNone/>
             </a:pPr>
             <a:r>
@@ -12062,6 +12413,13 @@
           </a:solidFill>
           <a:ln/>
         </p:spPr>
+        <p:txBody>
+          <a:bodyPr/>
+          <a:lstStyle/>
+          <a:p>
+            <a:endParaRPr lang="ko-KR" altLang="en-US"/>
+          </a:p>
+        </p:txBody>
       </p:sp>
       <p:sp>
         <p:nvSpPr>
@@ -12084,7 +12442,7 @@
           <a:bodyPr wrap="square" lIns="0" tIns="0" rIns="0" bIns="0" rtlCol="0" anchor="ctr"/>
           <a:lstStyle/>
           <a:p>
-            <a:pPr algn="r" indent="0" marL="0">
+            <a:pPr marL="0" indent="0" algn="r">
               <a:buNone/>
             </a:pPr>
             <a:r>
@@ -12123,7 +12481,7 @@
           <a:bodyPr wrap="square" lIns="0" tIns="0" rIns="0" bIns="0" rtlCol="0" anchor="ctr"/>
           <a:lstStyle/>
           <a:p>
-            <a:pPr indent="0" marL="0">
+            <a:pPr marL="0" indent="0">
               <a:buNone/>
             </a:pPr>
             <a:r>
@@ -12162,7 +12520,7 @@
           <a:bodyPr wrap="square" lIns="0" tIns="0" rIns="0" bIns="0" rtlCol="0" anchor="ctr"/>
           <a:lstStyle/>
           <a:p>
-            <a:pPr algn="r" indent="0" marL="0">
+            <a:pPr marL="0" indent="0" algn="r">
               <a:buNone/>
             </a:pPr>
             <a:r>
@@ -12201,6 +12559,13 @@
           </a:solidFill>
           <a:ln/>
         </p:spPr>
+        <p:txBody>
+          <a:bodyPr/>
+          <a:lstStyle/>
+          <a:p>
+            <a:endParaRPr lang="ko-KR" altLang="en-US"/>
+          </a:p>
+        </p:txBody>
       </p:sp>
       <p:sp>
         <p:nvSpPr>
@@ -12223,7 +12588,7 @@
           <a:bodyPr wrap="square" lIns="0" tIns="0" rIns="0" bIns="0" rtlCol="0" anchor="ctr"/>
           <a:lstStyle/>
           <a:p>
-            <a:pPr indent="0" marL="0">
+            <a:pPr marL="0" indent="0">
               <a:buNone/>
             </a:pPr>
             <a:r>
@@ -12262,7 +12627,7 @@
           <a:bodyPr wrap="square" lIns="0" tIns="0" rIns="0" bIns="0" rtlCol="0" anchor="t"/>
           <a:lstStyle/>
           <a:p>
-            <a:pPr indent="0" marL="0">
+            <a:pPr marL="0" indent="0">
               <a:lnSpc>
                 <a:spcPts val="2890"/>
               </a:lnSpc>
@@ -12282,7 +12647,7 @@
             <a:endParaRPr lang="en-US" sz="1700" dirty="0"/>
           </a:p>
           <a:p>
-            <a:pPr indent="0" marL="0">
+            <a:pPr marL="0" indent="0">
               <a:lnSpc>
                 <a:spcPts val="2890"/>
               </a:lnSpc>
@@ -12324,7 +12689,7 @@
           <a:bodyPr wrap="square" lIns="0" tIns="0" rIns="0" bIns="0" rtlCol="0" anchor="ctr"/>
           <a:lstStyle/>
           <a:p>
-            <a:pPr indent="0" marL="0">
+            <a:pPr marL="0" indent="0">
               <a:lnSpc>
                 <a:spcPts val="2400"/>
               </a:lnSpc>
@@ -12344,7 +12709,7 @@
             <a:endParaRPr lang="en-US" sz="1600" dirty="0"/>
           </a:p>
           <a:p>
-            <a:pPr indent="0" marL="0">
+            <a:pPr marL="0" indent="0">
               <a:lnSpc>
                 <a:spcPts val="2400"/>
               </a:lnSpc>
@@ -12364,7 +12729,7 @@
             <a:endParaRPr lang="en-US" sz="1600" dirty="0"/>
           </a:p>
           <a:p>
-            <a:pPr indent="0" marL="0">
+            <a:pPr marL="0" indent="0">
               <a:lnSpc>
                 <a:spcPts val="2400"/>
               </a:lnSpc>
@@ -12406,6 +12771,13 @@
           </a:solidFill>
           <a:ln/>
         </p:spPr>
+        <p:txBody>
+          <a:bodyPr/>
+          <a:lstStyle/>
+          <a:p>
+            <a:endParaRPr lang="ko-KR" altLang="en-US"/>
+          </a:p>
+        </p:txBody>
       </p:sp>
       <p:sp>
         <p:nvSpPr>
@@ -12428,7 +12800,7 @@
           <a:bodyPr wrap="square" lIns="0" tIns="0" rIns="0" bIns="0" rtlCol="0" anchor="t"/>
           <a:lstStyle/>
           <a:p>
-            <a:pPr indent="0" marL="0">
+            <a:pPr marL="0" indent="0">
               <a:lnSpc>
                 <a:spcPts val="3400"/>
               </a:lnSpc>
@@ -12470,6 +12842,13 @@
           </a:solidFill>
           <a:ln/>
         </p:spPr>
+        <p:txBody>
+          <a:bodyPr/>
+          <a:lstStyle/>
+          <a:p>
+            <a:endParaRPr lang="ko-KR" altLang="en-US"/>
+          </a:p>
+        </p:txBody>
       </p:sp>
       <p:sp>
         <p:nvSpPr>
@@ -12492,7 +12871,7 @@
           <a:bodyPr wrap="square" lIns="0" tIns="0" rIns="0" bIns="0" rtlCol="0" anchor="ctr"/>
           <a:lstStyle/>
           <a:p>
-            <a:pPr indent="0" marL="0">
+            <a:pPr marL="0" indent="0">
               <a:buNone/>
             </a:pPr>
             <a:r>
@@ -12531,7 +12910,7 @@
           <a:bodyPr wrap="square" lIns="0" tIns="0" rIns="0" bIns="0" rtlCol="0" anchor="t"/>
           <a:lstStyle/>
           <a:p>
-            <a:pPr indent="0" marL="0">
+            <a:pPr marL="0" indent="0">
               <a:lnSpc>
                 <a:spcPts val="2890"/>
               </a:lnSpc>
@@ -12578,6 +12957,13 @@
             <a:prstDash val="solid"/>
           </a:ln>
         </p:spPr>
+        <p:txBody>
+          <a:bodyPr/>
+          <a:lstStyle/>
+          <a:p>
+            <a:endParaRPr lang="ko-KR" altLang="en-US"/>
+          </a:p>
+        </p:txBody>
       </p:sp>
       <p:sp>
         <p:nvSpPr>
@@ -12600,7 +12986,7 @@
           <a:bodyPr wrap="square" lIns="0" tIns="0" rIns="0" bIns="0" rtlCol="0" anchor="ctr"/>
           <a:lstStyle/>
           <a:p>
-            <a:pPr indent="0" marL="0">
+            <a:pPr marL="0" indent="0">
               <a:buNone/>
             </a:pPr>
             <a:r>
@@ -12639,7 +13025,7 @@
           <a:bodyPr wrap="square" lIns="0" tIns="0" rIns="0" bIns="0" rtlCol="0" anchor="t"/>
           <a:lstStyle/>
           <a:p>
-            <a:pPr indent="0" marL="0">
+            <a:pPr marL="0" indent="0">
               <a:lnSpc>
                 <a:spcPts val="1900"/>
               </a:lnSpc>
@@ -12686,6 +13072,13 @@
             <a:prstDash val="solid"/>
           </a:ln>
         </p:spPr>
+        <p:txBody>
+          <a:bodyPr/>
+          <a:lstStyle/>
+          <a:p>
+            <a:endParaRPr lang="ko-KR" altLang="en-US"/>
+          </a:p>
+        </p:txBody>
       </p:sp>
       <p:sp>
         <p:nvSpPr>
@@ -12708,7 +13101,7 @@
           <a:bodyPr wrap="square" lIns="0" tIns="0" rIns="0" bIns="0" rtlCol="0" anchor="ctr"/>
           <a:lstStyle/>
           <a:p>
-            <a:pPr indent="0" marL="0">
+            <a:pPr marL="0" indent="0">
               <a:buNone/>
             </a:pPr>
             <a:r>
@@ -12747,7 +13140,7 @@
           <a:bodyPr wrap="square" lIns="0" tIns="0" rIns="0" bIns="0" rtlCol="0" anchor="t"/>
           <a:lstStyle/>
           <a:p>
-            <a:pPr indent="0" marL="0">
+            <a:pPr marL="0" indent="0">
               <a:lnSpc>
                 <a:spcPts val="1900"/>
               </a:lnSpc>
@@ -12784,6 +13177,7 @@
         <a:solidFill>
           <a:srgbClr val="FFFFFF"/>
         </a:solidFill>
+        <a:effectLst/>
       </p:bgPr>
     </p:bg>
     <p:spTree>
@@ -12821,7 +13215,7 @@
           <a:bodyPr wrap="square" lIns="0" tIns="0" rIns="0" bIns="0" rtlCol="0" anchor="ctr"/>
           <a:lstStyle/>
           <a:p>
-            <a:pPr indent="0" marL="0">
+            <a:pPr marL="0" indent="0">
               <a:buNone/>
             </a:pPr>
             <a:r>
@@ -12860,6 +13254,13 @@
           </a:solidFill>
           <a:ln/>
         </p:spPr>
+        <p:txBody>
+          <a:bodyPr/>
+          <a:lstStyle/>
+          <a:p>
+            <a:endParaRPr lang="ko-KR" altLang="en-US"/>
+          </a:p>
+        </p:txBody>
       </p:sp>
       <p:sp>
         <p:nvSpPr>
@@ -12882,7 +13283,7 @@
           <a:bodyPr wrap="square" lIns="0" tIns="0" rIns="0" bIns="0" rtlCol="0" anchor="ctr"/>
           <a:lstStyle/>
           <a:p>
-            <a:pPr algn="ctr" indent="0" marL="0">
+            <a:pPr marL="0" indent="0" algn="ctr">
               <a:buNone/>
             </a:pPr>
             <a:r>
@@ -12921,7 +13322,7 @@
           <a:bodyPr wrap="square" lIns="0" tIns="0" rIns="0" bIns="0" rtlCol="0" anchor="ctr"/>
           <a:lstStyle/>
           <a:p>
-            <a:pPr indent="0" marL="0">
+            <a:pPr marL="0" indent="0">
               <a:buNone/>
             </a:pPr>
             <a:r>
@@ -12958,6 +13359,13 @@
           </a:solidFill>
           <a:ln/>
         </p:spPr>
+        <p:txBody>
+          <a:bodyPr/>
+          <a:lstStyle/>
+          <a:p>
+            <a:endParaRPr lang="ko-KR" altLang="en-US"/>
+          </a:p>
+        </p:txBody>
       </p:sp>
       <p:sp>
         <p:nvSpPr>
@@ -12980,7 +13388,7 @@
           <a:bodyPr wrap="square" lIns="0" tIns="0" rIns="0" bIns="0" rtlCol="0" anchor="ctr"/>
           <a:lstStyle/>
           <a:p>
-            <a:pPr algn="r" indent="0" marL="0">
+            <a:pPr marL="0" indent="0" algn="r">
               <a:buNone/>
             </a:pPr>
             <a:r>
@@ -13019,7 +13427,7 @@
           <a:bodyPr wrap="square" lIns="0" tIns="0" rIns="0" bIns="0" rtlCol="0" anchor="ctr"/>
           <a:lstStyle/>
           <a:p>
-            <a:pPr indent="0" marL="0">
+            <a:pPr marL="0" indent="0">
               <a:buNone/>
             </a:pPr>
             <a:r>
@@ -13058,7 +13466,7 @@
           <a:bodyPr wrap="square" lIns="0" tIns="0" rIns="0" bIns="0" rtlCol="0" anchor="ctr"/>
           <a:lstStyle/>
           <a:p>
-            <a:pPr algn="r" indent="0" marL="0">
+            <a:pPr marL="0" indent="0" algn="r">
               <a:buNone/>
             </a:pPr>
             <a:r>
@@ -13097,6 +13505,13 @@
           </a:solidFill>
           <a:ln/>
         </p:spPr>
+        <p:txBody>
+          <a:bodyPr/>
+          <a:lstStyle/>
+          <a:p>
+            <a:endParaRPr lang="ko-KR" altLang="en-US"/>
+          </a:p>
+        </p:txBody>
       </p:sp>
       <p:sp>
         <p:nvSpPr>
@@ -13119,7 +13534,7 @@
           <a:bodyPr wrap="square" lIns="0" tIns="0" rIns="0" bIns="0" rtlCol="0" anchor="ctr"/>
           <a:lstStyle/>
           <a:p>
-            <a:pPr indent="0" marL="0">
+            <a:pPr marL="0" indent="0">
               <a:buNone/>
             </a:pPr>
             <a:r>
@@ -13158,7 +13573,7 @@
           <a:bodyPr wrap="square" lIns="0" tIns="0" rIns="0" bIns="0" rtlCol="0" anchor="t"/>
           <a:lstStyle/>
           <a:p>
-            <a:pPr indent="0" marL="0">
+            <a:pPr marL="0" indent="0">
               <a:lnSpc>
                 <a:spcPts val="2720"/>
               </a:lnSpc>
@@ -13178,7 +13593,7 @@
             <a:endParaRPr lang="en-US" sz="1600" dirty="0"/>
           </a:p>
           <a:p>
-            <a:pPr indent="0" marL="0">
+            <a:pPr marL="0" indent="0">
               <a:lnSpc>
                 <a:spcPts val="2720"/>
               </a:lnSpc>
@@ -13198,7 +13613,7 @@
             <a:endParaRPr lang="en-US" sz="1600" dirty="0"/>
           </a:p>
           <a:p>
-            <a:pPr indent="0" marL="0">
+            <a:pPr marL="0" indent="0">
               <a:lnSpc>
                 <a:spcPts val="2720"/>
               </a:lnSpc>
@@ -13240,6 +13655,13 @@
           </a:solidFill>
           <a:ln/>
         </p:spPr>
+        <p:txBody>
+          <a:bodyPr/>
+          <a:lstStyle/>
+          <a:p>
+            <a:endParaRPr lang="ko-KR" altLang="en-US"/>
+          </a:p>
+        </p:txBody>
       </p:sp>
       <p:sp>
         <p:nvSpPr>
@@ -13262,7 +13684,7 @@
           <a:bodyPr wrap="square" lIns="0" tIns="0" rIns="0" bIns="0" rtlCol="0" anchor="ctr"/>
           <a:lstStyle/>
           <a:p>
-            <a:pPr indent="0" marL="0">
+            <a:pPr marL="0" indent="0">
               <a:buNone/>
             </a:pPr>
             <a:r>
@@ -13301,7 +13723,7 @@
           <a:bodyPr wrap="square" lIns="0" tIns="0" rIns="0" bIns="0" rtlCol="0" anchor="t"/>
           <a:lstStyle/>
           <a:p>
-            <a:pPr indent="0" marL="0">
+            <a:pPr marL="0" indent="0">
               <a:lnSpc>
                 <a:spcPts val="2720"/>
               </a:lnSpc>
@@ -13321,7 +13743,7 @@
             <a:endParaRPr lang="en-US" sz="1600" dirty="0"/>
           </a:p>
           <a:p>
-            <a:pPr indent="0" marL="0">
+            <a:pPr marL="0" indent="0">
               <a:lnSpc>
                 <a:spcPts val="2720"/>
               </a:lnSpc>
@@ -13363,7 +13785,7 @@
           <a:bodyPr wrap="square" lIns="0" tIns="0" rIns="0" bIns="0" rtlCol="0" anchor="ctr"/>
           <a:lstStyle/>
           <a:p>
-            <a:pPr algn="ctr" indent="0" marL="0">
+            <a:pPr marL="0" indent="0" algn="ctr">
               <a:buNone/>
             </a:pPr>
             <a:r>
@@ -13407,6 +13829,13 @@
             <a:prstDash val="solid"/>
           </a:ln>
         </p:spPr>
+        <p:txBody>
+          <a:bodyPr/>
+          <a:lstStyle/>
+          <a:p>
+            <a:endParaRPr lang="ko-KR" altLang="en-US"/>
+          </a:p>
+        </p:txBody>
       </p:sp>
       <p:sp>
         <p:nvSpPr>
@@ -13429,7 +13858,7 @@
           <a:bodyPr wrap="square" lIns="0" tIns="0" rIns="0" bIns="0" rtlCol="0" anchor="ctr"/>
           <a:lstStyle/>
           <a:p>
-            <a:pPr algn="ctr" indent="0" marL="0">
+            <a:pPr marL="0" indent="0" algn="ctr">
               <a:buNone/>
             </a:pPr>
             <a:r>
@@ -13463,6 +13892,7 @@
         <a:solidFill>
           <a:srgbClr val="FFFFFF"/>
         </a:solidFill>
+        <a:effectLst/>
       </p:bgPr>
     </p:bg>
     <p:spTree>
@@ -13500,7 +13930,7 @@
           <a:bodyPr wrap="square" lIns="0" tIns="0" rIns="0" bIns="0" rtlCol="0" anchor="ctr"/>
           <a:lstStyle/>
           <a:p>
-            <a:pPr indent="0" marL="0">
+            <a:pPr marL="0" indent="0">
               <a:buNone/>
             </a:pPr>
             <a:r>
@@ -13539,6 +13969,13 @@
           </a:solidFill>
           <a:ln/>
         </p:spPr>
+        <p:txBody>
+          <a:bodyPr/>
+          <a:lstStyle/>
+          <a:p>
+            <a:endParaRPr lang="ko-KR" altLang="en-US"/>
+          </a:p>
+        </p:txBody>
       </p:sp>
       <p:sp>
         <p:nvSpPr>
@@ -13561,7 +13998,7 @@
           <a:bodyPr wrap="square" lIns="0" tIns="0" rIns="0" bIns="0" rtlCol="0" anchor="ctr"/>
           <a:lstStyle/>
           <a:p>
-            <a:pPr algn="ctr" indent="0" marL="0">
+            <a:pPr marL="0" indent="0" algn="ctr">
               <a:buNone/>
             </a:pPr>
             <a:r>
@@ -13600,7 +14037,7 @@
           <a:bodyPr wrap="square" lIns="0" tIns="0" rIns="0" bIns="0" rtlCol="0" anchor="ctr"/>
           <a:lstStyle/>
           <a:p>
-            <a:pPr indent="0" marL="0">
+            <a:pPr marL="0" indent="0">
               <a:buNone/>
             </a:pPr>
             <a:r>
@@ -13637,6 +14074,13 @@
           </a:solidFill>
           <a:ln/>
         </p:spPr>
+        <p:txBody>
+          <a:bodyPr/>
+          <a:lstStyle/>
+          <a:p>
+            <a:endParaRPr lang="ko-KR" altLang="en-US"/>
+          </a:p>
+        </p:txBody>
       </p:sp>
       <p:sp>
         <p:nvSpPr>
@@ -13659,7 +14103,7 @@
           <a:bodyPr wrap="square" lIns="0" tIns="0" rIns="0" bIns="0" rtlCol="0" anchor="ctr"/>
           <a:lstStyle/>
           <a:p>
-            <a:pPr algn="r" indent="0" marL="0">
+            <a:pPr marL="0" indent="0" algn="r">
               <a:buNone/>
             </a:pPr>
             <a:r>
@@ -13698,7 +14142,7 @@
           <a:bodyPr wrap="square" lIns="0" tIns="0" rIns="0" bIns="0" rtlCol="0" anchor="ctr"/>
           <a:lstStyle/>
           <a:p>
-            <a:pPr indent="0" marL="0">
+            <a:pPr marL="0" indent="0">
               <a:buNone/>
             </a:pPr>
             <a:r>
@@ -13737,7 +14181,7 @@
           <a:bodyPr wrap="square" lIns="0" tIns="0" rIns="0" bIns="0" rtlCol="0" anchor="ctr"/>
           <a:lstStyle/>
           <a:p>
-            <a:pPr algn="r" indent="0" marL="0">
+            <a:pPr marL="0" indent="0" algn="r">
               <a:buNone/>
             </a:pPr>
             <a:r>
@@ -13776,6 +14220,13 @@
           </a:solidFill>
           <a:ln/>
         </p:spPr>
+        <p:txBody>
+          <a:bodyPr/>
+          <a:lstStyle/>
+          <a:p>
+            <a:endParaRPr lang="ko-KR" altLang="en-US"/>
+          </a:p>
+        </p:txBody>
       </p:sp>
       <p:sp>
         <p:nvSpPr>
@@ -13798,7 +14249,7 @@
           <a:bodyPr wrap="square" lIns="0" tIns="0" rIns="0" bIns="0" rtlCol="0" anchor="t"/>
           <a:lstStyle/>
           <a:p>
-            <a:pPr indent="0" marL="0">
+            <a:pPr marL="0" indent="0">
               <a:lnSpc>
                 <a:spcPts val="2720"/>
               </a:lnSpc>
@@ -13818,7 +14269,7 @@
             <a:endParaRPr lang="en-US" sz="1600" dirty="0"/>
           </a:p>
           <a:p>
-            <a:pPr indent="0" marL="0">
+            <a:pPr marL="0" indent="0">
               <a:lnSpc>
                 <a:spcPts val="2720"/>
               </a:lnSpc>
@@ -13838,7 +14289,7 @@
             <a:endParaRPr lang="en-US" sz="1600" dirty="0"/>
           </a:p>
           <a:p>
-            <a:pPr indent="0" marL="0">
+            <a:pPr marL="0" indent="0">
               <a:lnSpc>
                 <a:spcPts val="2720"/>
               </a:lnSpc>
@@ -13858,7 +14309,7 @@
             <a:endParaRPr lang="en-US" sz="1600" dirty="0"/>
           </a:p>
           <a:p>
-            <a:pPr indent="0" marL="0">
+            <a:pPr marL="0" indent="0">
               <a:lnSpc>
                 <a:spcPts val="2720"/>
               </a:lnSpc>
@@ -13878,7 +14329,7 @@
             <a:endParaRPr lang="en-US" sz="1600" dirty="0"/>
           </a:p>
           <a:p>
-            <a:pPr indent="0" marL="0">
+            <a:pPr marL="0" indent="0">
               <a:lnSpc>
                 <a:spcPts val="2720"/>
               </a:lnSpc>
@@ -13925,6 +14376,13 @@
             <a:prstDash val="solid"/>
           </a:ln>
         </p:spPr>
+        <p:txBody>
+          <a:bodyPr/>
+          <a:lstStyle/>
+          <a:p>
+            <a:endParaRPr lang="ko-KR" altLang="en-US"/>
+          </a:p>
+        </p:txBody>
       </p:sp>
       <p:sp>
         <p:nvSpPr>
@@ -13947,7 +14405,7 @@
           <a:bodyPr wrap="square" lIns="0" tIns="0" rIns="0" bIns="0" rtlCol="0" anchor="ctr"/>
           <a:lstStyle/>
           <a:p>
-            <a:pPr indent="0" marL="0">
+            <a:pPr marL="0" indent="0">
               <a:buNone/>
             </a:pPr>
             <a:r>
@@ -13986,7 +14444,7 @@
           <a:bodyPr wrap="square" lIns="0" tIns="0" rIns="0" bIns="0" rtlCol="0" anchor="t"/>
           <a:lstStyle/>
           <a:p>
-            <a:pPr indent="0" marL="0">
+            <a:pPr marL="0" indent="0">
               <a:lnSpc>
                 <a:spcPts val="1900"/>
               </a:lnSpc>
@@ -14033,6 +14491,13 @@
             <a:prstDash val="solid"/>
           </a:ln>
         </p:spPr>
+        <p:txBody>
+          <a:bodyPr/>
+          <a:lstStyle/>
+          <a:p>
+            <a:endParaRPr lang="ko-KR" altLang="en-US"/>
+          </a:p>
+        </p:txBody>
       </p:sp>
       <p:sp>
         <p:nvSpPr>
@@ -14055,7 +14520,7 @@
           <a:bodyPr wrap="square" lIns="0" tIns="0" rIns="0" bIns="0" rtlCol="0" anchor="ctr"/>
           <a:lstStyle/>
           <a:p>
-            <a:pPr indent="0" marL="0">
+            <a:pPr marL="0" indent="0">
               <a:buNone/>
             </a:pPr>
             <a:r>
@@ -14094,7 +14559,7 @@
           <a:bodyPr wrap="square" lIns="0" tIns="0" rIns="0" bIns="0" rtlCol="0" anchor="t"/>
           <a:lstStyle/>
           <a:p>
-            <a:pPr indent="0" marL="0">
+            <a:pPr marL="0" indent="0">
               <a:lnSpc>
                 <a:spcPts val="1900"/>
               </a:lnSpc>
@@ -14136,6 +14601,13 @@
           </a:solidFill>
           <a:ln/>
         </p:spPr>
+        <p:txBody>
+          <a:bodyPr/>
+          <a:lstStyle/>
+          <a:p>
+            <a:endParaRPr lang="ko-KR" altLang="en-US"/>
+          </a:p>
+        </p:txBody>
       </p:sp>
       <p:sp>
         <p:nvSpPr>
@@ -14158,7 +14630,7 @@
           <a:bodyPr wrap="square" lIns="0" tIns="0" rIns="0" bIns="0" rtlCol="0" anchor="t"/>
           <a:lstStyle/>
           <a:p>
-            <a:pPr indent="0" marL="0">
+            <a:pPr marL="0" indent="0">
               <a:lnSpc>
                 <a:spcPts val="3060"/>
               </a:lnSpc>
@@ -14205,6 +14677,13 @@
             <a:prstDash val="solid"/>
           </a:ln>
         </p:spPr>
+        <p:txBody>
+          <a:bodyPr/>
+          <a:lstStyle/>
+          <a:p>
+            <a:endParaRPr lang="ko-KR" altLang="en-US"/>
+          </a:p>
+        </p:txBody>
       </p:sp>
       <p:sp>
         <p:nvSpPr>
@@ -14227,7 +14706,7 @@
           <a:bodyPr wrap="square" lIns="0" tIns="0" rIns="0" bIns="0" rtlCol="0" anchor="ctr"/>
           <a:lstStyle/>
           <a:p>
-            <a:pPr algn="ctr" indent="0" marL="0">
+            <a:pPr marL="0" indent="0" algn="ctr">
               <a:buNone/>
             </a:pPr>
             <a:r>
@@ -14546,4 +15025,319 @@
     </a:ext>
   </a:extLst>
 </a:theme>
+</file>
+
+<file path=ppt/theme/theme2.xml><?xml version="1.0" encoding="utf-8"?>
+<a:theme xmlns:a="http://schemas.openxmlformats.org/drawingml/2006/main" name="Office 테마">
+  <a:themeElements>
+    <a:clrScheme name="Office">
+      <a:dk1>
+        <a:sysClr val="windowText" lastClr="000000"/>
+      </a:dk1>
+      <a:lt1>
+        <a:sysClr val="window" lastClr="FFFFFF"/>
+      </a:lt1>
+      <a:dk2>
+        <a:srgbClr val="0E2841"/>
+      </a:dk2>
+      <a:lt2>
+        <a:srgbClr val="E8E8E8"/>
+      </a:lt2>
+      <a:accent1>
+        <a:srgbClr val="156082"/>
+      </a:accent1>
+      <a:accent2>
+        <a:srgbClr val="E97132"/>
+      </a:accent2>
+      <a:accent3>
+        <a:srgbClr val="196B24"/>
+      </a:accent3>
+      <a:accent4>
+        <a:srgbClr val="0F9ED5"/>
+      </a:accent4>
+      <a:accent5>
+        <a:srgbClr val="A02B93"/>
+      </a:accent5>
+      <a:accent6>
+        <a:srgbClr val="4EA72E"/>
+      </a:accent6>
+      <a:hlink>
+        <a:srgbClr val="467886"/>
+      </a:hlink>
+      <a:folHlink>
+        <a:srgbClr val="96607D"/>
+      </a:folHlink>
+    </a:clrScheme>
+    <a:fontScheme name="Office">
+      <a:majorFont>
+        <a:latin typeface="맑은 고딕" panose="02110004020202020204"/>
+        <a:ea typeface=""/>
+        <a:cs typeface=""/>
+        <a:font script="Jpan" typeface="游ゴシック Light"/>
+        <a:font script="Hang" typeface="맑은 고딕"/>
+        <a:font script="Hans" typeface="等线 Light"/>
+        <a:font script="Hant" typeface="新細明體"/>
+        <a:font script="Arab" typeface="Times New Roman"/>
+        <a:font script="Hebr" typeface="Times New Roman"/>
+        <a:font script="Thai" typeface="Angsana New"/>
+        <a:font script="Ethi" typeface="Nyala"/>
+        <a:font script="Beng" typeface="Vrinda"/>
+        <a:font script="Gujr" typeface="Shruti"/>
+        <a:font script="Khmr" typeface="MoolBoran"/>
+        <a:font script="Knda" typeface="Tunga"/>
+        <a:font script="Guru" typeface="Raavi"/>
+        <a:font script="Cans" typeface="Euphemia"/>
+        <a:font script="Cher" typeface="Plantagenet Cherokee"/>
+        <a:font script="Yiii" typeface="Microsoft Yi Baiti"/>
+        <a:font script="Tibt" typeface="Microsoft Himalaya"/>
+        <a:font script="Thaa" typeface="MV Boli"/>
+        <a:font script="Deva" typeface="Mangal"/>
+        <a:font script="Telu" typeface="Gautami"/>
+        <a:font script="Taml" typeface="Latha"/>
+        <a:font script="Syrc" typeface="Estrangelo Edessa"/>
+        <a:font script="Orya" typeface="Kalinga"/>
+        <a:font script="Mlym" typeface="Kartika"/>
+        <a:font script="Laoo" typeface="DokChampa"/>
+        <a:font script="Sinh" typeface="Iskoola Pota"/>
+        <a:font script="Mong" typeface="Mongolian Baiti"/>
+        <a:font script="Viet" typeface="Times New Roman"/>
+        <a:font script="Uigh" typeface="Microsoft Uighur"/>
+        <a:font script="Geor" typeface="Sylfaen"/>
+        <a:font script="Armn" typeface="Arial"/>
+        <a:font script="Bugi" typeface="Leelawadee UI"/>
+        <a:font script="Bopo" typeface="Microsoft JhengHei"/>
+        <a:font script="Java" typeface="Javanese Text"/>
+        <a:font script="Lisu" typeface="Segoe UI"/>
+        <a:font script="Mymr" typeface="Myanmar Text"/>
+        <a:font script="Nkoo" typeface="Ebrima"/>
+        <a:font script="Olck" typeface="Nirmala UI"/>
+        <a:font script="Osma" typeface="Ebrima"/>
+        <a:font script="Phag" typeface="Phagspa"/>
+        <a:font script="Syrn" typeface="Estrangelo Edessa"/>
+        <a:font script="Syrj" typeface="Estrangelo Edessa"/>
+        <a:font script="Syre" typeface="Estrangelo Edessa"/>
+        <a:font script="Sora" typeface="Nirmala UI"/>
+        <a:font script="Tale" typeface="Microsoft Tai Le"/>
+        <a:font script="Talu" typeface="Microsoft New Tai Lue"/>
+        <a:font script="Tfng" typeface="Ebrima"/>
+      </a:majorFont>
+      <a:minorFont>
+        <a:latin typeface="맑은 고딕" panose="02110004020202020204"/>
+        <a:ea typeface=""/>
+        <a:cs typeface=""/>
+        <a:font script="Jpan" typeface="游ゴシック"/>
+        <a:font script="Hang" typeface="맑은 고딕"/>
+        <a:font script="Hans" typeface="等线"/>
+        <a:font script="Hant" typeface="新細明體"/>
+        <a:font script="Arab" typeface="Arial"/>
+        <a:font script="Hebr" typeface="Arial"/>
+        <a:font script="Thai" typeface="Cordia New"/>
+        <a:font script="Ethi" typeface="Nyala"/>
+        <a:font script="Beng" typeface="Vrinda"/>
+        <a:font script="Gujr" typeface="Shruti"/>
+        <a:font script="Khmr" typeface="DaunPenh"/>
+        <a:font script="Knda" typeface="Tunga"/>
+        <a:font script="Guru" typeface="Raavi"/>
+        <a:font script="Cans" typeface="Euphemia"/>
+        <a:font script="Cher" typeface="Plantagenet Cherokee"/>
+        <a:font script="Yiii" typeface="Microsoft Yi Baiti"/>
+        <a:font script="Tibt" typeface="Microsoft Himalaya"/>
+        <a:font script="Thaa" typeface="MV Boli"/>
+        <a:font script="Deva" typeface="Mangal"/>
+        <a:font script="Telu" typeface="Gautami"/>
+        <a:font script="Taml" typeface="Latha"/>
+        <a:font script="Syrc" typeface="Estrangelo Edessa"/>
+        <a:font script="Orya" typeface="Kalinga"/>
+        <a:font script="Mlym" typeface="Kartika"/>
+        <a:font script="Laoo" typeface="DokChampa"/>
+        <a:font script="Sinh" typeface="Iskoola Pota"/>
+        <a:font script="Mong" typeface="Mongolian Baiti"/>
+        <a:font script="Viet" typeface="Arial"/>
+        <a:font script="Uigh" typeface="Microsoft Uighur"/>
+        <a:font script="Geor" typeface="Sylfaen"/>
+        <a:font script="Armn" typeface="Arial"/>
+        <a:font script="Bugi" typeface="Leelawadee UI"/>
+        <a:font script="Bopo" typeface="Microsoft JhengHei"/>
+        <a:font script="Java" typeface="Javanese Text"/>
+        <a:font script="Lisu" typeface="Segoe UI"/>
+        <a:font script="Mymr" typeface="Myanmar Text"/>
+        <a:font script="Nkoo" typeface="Ebrima"/>
+        <a:font script="Olck" typeface="Nirmala UI"/>
+        <a:font script="Osma" typeface="Ebrima"/>
+        <a:font script="Phag" typeface="Phagspa"/>
+        <a:font script="Syrn" typeface="Estrangelo Edessa"/>
+        <a:font script="Syrj" typeface="Estrangelo Edessa"/>
+        <a:font script="Syre" typeface="Estrangelo Edessa"/>
+        <a:font script="Sora" typeface="Nirmala UI"/>
+        <a:font script="Tale" typeface="Microsoft Tai Le"/>
+        <a:font script="Talu" typeface="Microsoft New Tai Lue"/>
+        <a:font script="Tfng" typeface="Ebrima"/>
+      </a:minorFont>
+    </a:fontScheme>
+    <a:fmtScheme name="Office">
+      <a:fillStyleLst>
+        <a:solidFill>
+          <a:schemeClr val="phClr"/>
+        </a:solidFill>
+        <a:gradFill rotWithShape="1">
+          <a:gsLst>
+            <a:gs pos="0">
+              <a:schemeClr val="phClr">
+                <a:lumMod val="110000"/>
+                <a:satMod val="105000"/>
+                <a:tint val="67000"/>
+              </a:schemeClr>
+            </a:gs>
+            <a:gs pos="50000">
+              <a:schemeClr val="phClr">
+                <a:lumMod val="105000"/>
+                <a:satMod val="103000"/>
+                <a:tint val="73000"/>
+              </a:schemeClr>
+            </a:gs>
+            <a:gs pos="100000">
+              <a:schemeClr val="phClr">
+                <a:lumMod val="105000"/>
+                <a:satMod val="109000"/>
+                <a:tint val="81000"/>
+              </a:schemeClr>
+            </a:gs>
+          </a:gsLst>
+          <a:lin ang="5400000" scaled="0"/>
+        </a:gradFill>
+        <a:gradFill rotWithShape="1">
+          <a:gsLst>
+            <a:gs pos="0">
+              <a:schemeClr val="phClr">
+                <a:satMod val="103000"/>
+                <a:lumMod val="102000"/>
+                <a:tint val="94000"/>
+              </a:schemeClr>
+            </a:gs>
+            <a:gs pos="50000">
+              <a:schemeClr val="phClr">
+                <a:satMod val="110000"/>
+                <a:lumMod val="100000"/>
+                <a:shade val="100000"/>
+              </a:schemeClr>
+            </a:gs>
+            <a:gs pos="100000">
+              <a:schemeClr val="phClr">
+                <a:lumMod val="99000"/>
+                <a:satMod val="120000"/>
+                <a:shade val="78000"/>
+              </a:schemeClr>
+            </a:gs>
+          </a:gsLst>
+          <a:lin ang="5400000" scaled="0"/>
+        </a:gradFill>
+      </a:fillStyleLst>
+      <a:lnStyleLst>
+        <a:ln w="12700" cap="flat" cmpd="sng" algn="ctr">
+          <a:solidFill>
+            <a:schemeClr val="phClr"/>
+          </a:solidFill>
+          <a:prstDash val="solid"/>
+          <a:miter lim="800000"/>
+        </a:ln>
+        <a:ln w="19050" cap="flat" cmpd="sng" algn="ctr">
+          <a:solidFill>
+            <a:schemeClr val="phClr"/>
+          </a:solidFill>
+          <a:prstDash val="solid"/>
+          <a:miter lim="800000"/>
+        </a:ln>
+        <a:ln w="25400" cap="flat" cmpd="sng" algn="ctr">
+          <a:solidFill>
+            <a:schemeClr val="phClr"/>
+          </a:solidFill>
+          <a:prstDash val="solid"/>
+          <a:miter lim="800000"/>
+        </a:ln>
+      </a:lnStyleLst>
+      <a:effectStyleLst>
+        <a:effectStyle>
+          <a:effectLst/>
+        </a:effectStyle>
+        <a:effectStyle>
+          <a:effectLst/>
+        </a:effectStyle>
+        <a:effectStyle>
+          <a:effectLst>
+            <a:outerShdw blurRad="57150" dist="19050" dir="5400000" algn="ctr" rotWithShape="0">
+              <a:srgbClr val="000000">
+                <a:alpha val="63000"/>
+              </a:srgbClr>
+            </a:outerShdw>
+          </a:effectLst>
+        </a:effectStyle>
+      </a:effectStyleLst>
+      <a:bgFillStyleLst>
+        <a:solidFill>
+          <a:schemeClr val="phClr"/>
+        </a:solidFill>
+        <a:solidFill>
+          <a:schemeClr val="phClr">
+            <a:tint val="95000"/>
+            <a:satMod val="170000"/>
+          </a:schemeClr>
+        </a:solidFill>
+        <a:gradFill rotWithShape="1">
+          <a:gsLst>
+            <a:gs pos="0">
+              <a:schemeClr val="phClr">
+                <a:tint val="93000"/>
+                <a:satMod val="150000"/>
+                <a:shade val="98000"/>
+                <a:lumMod val="102000"/>
+              </a:schemeClr>
+            </a:gs>
+            <a:gs pos="50000">
+              <a:schemeClr val="phClr">
+                <a:tint val="98000"/>
+                <a:satMod val="130000"/>
+                <a:shade val="90000"/>
+                <a:lumMod val="103000"/>
+              </a:schemeClr>
+            </a:gs>
+            <a:gs pos="100000">
+              <a:schemeClr val="phClr">
+                <a:shade val="63000"/>
+                <a:satMod val="120000"/>
+              </a:schemeClr>
+            </a:gs>
+          </a:gsLst>
+          <a:lin ang="5400000" scaled="0"/>
+        </a:gradFill>
+      </a:bgFillStyleLst>
+    </a:fmtScheme>
+  </a:themeElements>
+  <a:objectDefaults>
+    <a:lnDef>
+      <a:spPr/>
+      <a:bodyPr/>
+      <a:lstStyle/>
+      <a:style>
+        <a:lnRef idx="2">
+          <a:schemeClr val="accent1"/>
+        </a:lnRef>
+        <a:fillRef idx="0">
+          <a:schemeClr val="accent1"/>
+        </a:fillRef>
+        <a:effectRef idx="1">
+          <a:schemeClr val="accent1"/>
+        </a:effectRef>
+        <a:fontRef idx="minor">
+          <a:schemeClr val="tx1"/>
+        </a:fontRef>
+      </a:style>
+    </a:lnDef>
+  </a:objectDefaults>
+  <a:extraClrSchemeLst/>
+  <a:extLst>
+    <a:ext uri="{05A4C25C-085E-4340-85A3-A5531E510DB2}">
+      <thm15:themeFamily xmlns:thm15="http://schemas.microsoft.com/office/thememl/2012/main" name="Office Theme" id="{2E142A2C-CD16-42D6-873A-C26D2A0506FA}" vid="{1BDDFF52-6CD6-40A5-AB3C-68EB2F1E4D0A}"/>
+    </a:ext>
+  </a:extLst>
+</a:theme>
 </file>